--- a/library/lectures/lec-02/rendered/lec-02.pptx
+++ b/library/lectures/lec-02/rendered/lec-02.pptx
@@ -1151,6 +1151,13 @@
           <a:lstStyle/>
           <a:p>
             <a:r>
+              <a:t>*[VERIFY-DAY-OF] Цифры на момент мая 2026. Темп роста ~×10 каждые 1-2 года. Перед лекцией — проверить актуальные значения для GPT-5, Claude 4.7 и Gemini.*</a:t>
+            </a:r>
+          </a:p>
+          <a:p/>
+          <a:p/>
+          <a:p>
+            <a:r>
               <a:t>Механизм внимания работает на всех токенах контекста, что приводит к естественному ограничению: контекстное окно — это максимальное количество токенов, которое модель может обработать за один запрос. Лекция 1 §3.3.1 уже вводила понятие на уровне «когда история чата плюс новое сообщение перестают помещаться, старые сообщения выпадают». Сейчас мы углубляем: почему именно есть верхний предел и почему он стоит денег.</a:t>
             </a:r>
           </a:p>
@@ -1251,7 +1258,7 @@
           <a:p/>
           <a:p>
             <a:r>
-              <a:t>Эксперимент. В большой контекст — десятки тысяч токенов из произвольных документов — вставляется один значимый факт: в начале, в середине или в конце. Затем модель спрашивают факт и считают точность ответа. Результаты дают характерную U-образную кривую: точность около 70–80% когда факт лежит в начале, проваливается до 30–40% в середине, и снова поднимается до 70–80% к концу. Феномен авторы назвали «потеря в середине».</a:t>
+              <a:t>Эксперимент. В большой контекст — десятки тысяч токенов из произвольных документов — вставляется один значимый факт: в начале, в середине или в конце. Затем модель спрашивают факт и считают точность ответа. Результаты дают характерную U-образную кривую: точность около 70–80% когда факт лежит в начале, проседает до ~50% в середине, и снова поднимается до 70–80% к концу. Феномен авторы назвали «потеря в середине».</a:t>
             </a:r>
           </a:p>
           <a:p/>
@@ -2271,6 +2278,13 @@
         <p:txBody>
           <a:bodyPr/>
           <a:lstStyle/>
+          <a:p>
+            <a:r>
+              <a:t>*[VERIFY-DAY-OF] За день до семинара — проверить доступность HF Playground и наличие Meta-Llama-3-8B-Instruct. Резервы: Together.ai, локальная Ollama.*</a:t>
+            </a:r>
+          </a:p>
+          <a:p/>
+          <a:p/>
           <a:p>
             <a:r>
               <a:t>Тема семинара 2 — «Эффект температуры: как стохастичность сэмплинга меняет ответ LLM». На семинаре соберём результаты ваших домашних экспериментов и обсудим, какую температуру каждый выбрал бы для production своей задачи.</a:t>
@@ -6488,7 +6502,7 @@
                 </a:solidFill>
                 <a:latin typeface="Arial"/>
               </a:rPr>
-              <a:t>3 применения эмбеддингов: similarity, clustering, search</a:t>
+              <a:t>Эмбеддинги дают similarity, clustering и search — основу RAG</a:t>
             </a:r>
           </a:p>
         </p:txBody>
@@ -6527,7 +6541,7 @@
                 </a:solidFill>
                 <a:latin typeface="Arial"/>
               </a:rPr>
-              <a:t>Карта для Раздела 3 курса (Лекции 3+ — RAG, retrieval, generation)</a:t>
+              <a:t>Три практических применения, надстраиваемых над одной embedding-таблицей</a:t>
             </a:r>
           </a:p>
         </p:txBody>
@@ -9477,11 +9491,11 @@
         <p:spPr>
           <a:xfrm>
             <a:off x="502920" y="1874519"/>
-            <a:ext cx="5486400" cy="3657600"/>
+            <a:ext cx="7772400" cy="4206240"/>
           </a:xfrm>
           <a:prstGeom prst="roundRect">
             <a:avLst>
-              <a:gd name="adj" fmla="val 8333"/>
+              <a:gd name="adj" fmla="val 7246"/>
             </a:avLst>
           </a:prstGeom>
           <a:solidFill>
@@ -9518,7 +9532,7 @@
       </p:sp>
       <p:pic>
         <p:nvPicPr>
-          <p:cNvPr id="5" name="Picture 4" descr="s14-flashlight.png"/>
+          <p:cNvPr id="5" name="Picture 4" descr="s14-attention-bars.png"/>
           <p:cNvPicPr>
             <a:picLocks noChangeAspect="1"/>
           </p:cNvPicPr>
@@ -9533,7 +9547,7 @@
         <p:spPr>
           <a:xfrm>
             <a:off x="685800" y="2011680"/>
-            <a:ext cx="5120640" cy="3383280"/>
+            <a:ext cx="7406640" cy="3931920"/>
           </a:xfrm>
           <a:prstGeom prst="rect">
             <a:avLst/>
@@ -9548,8 +9562,8 @@
         </p:nvSpPr>
         <p:spPr>
           <a:xfrm>
-            <a:off x="502920" y="5577840"/>
-            <a:ext cx="5486400" cy="365760"/>
+            <a:off x="502920" y="6126480"/>
+            <a:ext cx="7772400" cy="365760"/>
           </a:xfrm>
           <a:prstGeom prst="rect">
             <a:avLst/>
@@ -9568,13 +9582,13 @@
               </a:lnSpc>
             </a:pPr>
             <a:r>
-              <a:rPr sz="1300" b="0" i="1">
+              <a:rPr sz="1400" b="0" i="1">
                 <a:solidFill>
                   <a:srgbClr val="065A82"/>
                 </a:solidFill>
                 <a:latin typeface="Arial"/>
               </a:rPr>
-              <a:t>Метафора: фонарик в тёмной комнате</a:t>
+              <a:t>Distribution на токенах контекста — основное содержание</a:t>
             </a:r>
           </a:p>
         </p:txBody>
@@ -9587,12 +9601,12 @@
         </p:nvSpPr>
         <p:spPr>
           <a:xfrm>
-            <a:off x="6263640" y="1874519"/>
-            <a:ext cx="5486400" cy="3657600"/>
+            <a:off x="8549640" y="1874519"/>
+            <a:ext cx="3246120" cy="2926080"/>
           </a:xfrm>
           <a:prstGeom prst="roundRect">
             <a:avLst>
-              <a:gd name="adj" fmla="val 8333"/>
+              <a:gd name="adj" fmla="val 10416"/>
             </a:avLst>
           </a:prstGeom>
           <a:solidFill>
@@ -9627,9 +9641,468 @@
           </a:p>
         </p:txBody>
       </p:sp>
+      <p:sp>
+        <p:nvSpPr>
+          <p:cNvPr id="8" name="TextBox 7"/>
+          <p:cNvSpPr txBox="1"/>
+          <p:nvPr/>
+        </p:nvSpPr>
+        <p:spPr>
+          <a:xfrm>
+            <a:off x="8732519" y="2011680"/>
+            <a:ext cx="2880360" cy="365760"/>
+          </a:xfrm>
+          <a:prstGeom prst="rect">
+            <a:avLst/>
+          </a:prstGeom>
+          <a:noFill/>
+        </p:spPr>
+        <p:txBody>
+          <a:bodyPr wrap="square" lIns="0" rIns="0" tIns="0" bIns="0" anchor="t">
+            <a:spAutoFit/>
+          </a:bodyPr>
+          <a:lstStyle/>
+          <a:p>
+            <a:pPr algn="l">
+              <a:lnSpc>
+                <a:spcPct val="115000"/>
+              </a:lnSpc>
+            </a:pPr>
+            <a:r>
+              <a:rPr sz="1500" b="1" i="0">
+                <a:solidFill>
+                  <a:srgbClr val="065A82"/>
+                </a:solidFill>
+                <a:latin typeface="Arial"/>
+              </a:rPr>
+              <a:t>3 свойства</a:t>
+            </a:r>
+          </a:p>
+        </p:txBody>
+      </p:sp>
+      <p:sp>
+        <p:nvSpPr>
+          <p:cNvPr id="9" name="Rounded Rectangle 8"/>
+          <p:cNvSpPr/>
+          <p:nvPr/>
+        </p:nvSpPr>
+        <p:spPr>
+          <a:xfrm>
+            <a:off x="8732519" y="2514600"/>
+            <a:ext cx="292608" cy="292608"/>
+          </a:xfrm>
+          <a:prstGeom prst="roundRect">
+            <a:avLst>
+              <a:gd name="adj" fmla="val 50000"/>
+            </a:avLst>
+          </a:prstGeom>
+          <a:solidFill>
+            <a:srgbClr val="065A82"/>
+          </a:solidFill>
+          <a:ln>
+            <a:noFill/>
+          </a:ln>
+          <a:effectLst/>
+        </p:spPr>
+        <p:style>
+          <a:lnRef idx="1">
+            <a:schemeClr val="accent1"/>
+          </a:lnRef>
+          <a:fillRef idx="3">
+            <a:schemeClr val="accent1"/>
+          </a:fillRef>
+          <a:effectRef idx="2">
+            <a:schemeClr val="accent1"/>
+          </a:effectRef>
+          <a:fontRef idx="minor">
+            <a:schemeClr val="lt1"/>
+          </a:fontRef>
+        </p:style>
+        <p:txBody>
+          <a:bodyPr rtlCol="0" anchor="ctr"/>
+          <a:lstStyle/>
+          <a:p>
+            <a:pPr algn="ctr"/>
+          </a:p>
+        </p:txBody>
+      </p:sp>
+      <p:sp>
+        <p:nvSpPr>
+          <p:cNvPr id="10" name="TextBox 9"/>
+          <p:cNvSpPr txBox="1"/>
+          <p:nvPr/>
+        </p:nvSpPr>
+        <p:spPr>
+          <a:xfrm>
+            <a:off x="8732519" y="2523744"/>
+            <a:ext cx="292608" cy="274320"/>
+          </a:xfrm>
+          <a:prstGeom prst="rect">
+            <a:avLst/>
+          </a:prstGeom>
+          <a:noFill/>
+        </p:spPr>
+        <p:txBody>
+          <a:bodyPr wrap="square" lIns="0" rIns="0" tIns="0" bIns="0" anchor="ctr">
+            <a:spAutoFit/>
+          </a:bodyPr>
+          <a:lstStyle/>
+          <a:p>
+            <a:pPr algn="ctr">
+              <a:lnSpc>
+                <a:spcPct val="115000"/>
+              </a:lnSpc>
+            </a:pPr>
+            <a:r>
+              <a:rPr sz="1300" b="1" i="0">
+                <a:solidFill>
+                  <a:srgbClr val="FFFFFF"/>
+                </a:solidFill>
+                <a:latin typeface="Arial"/>
+              </a:rPr>
+              <a:t>1</a:t>
+            </a:r>
+          </a:p>
+        </p:txBody>
+      </p:sp>
+      <p:sp>
+        <p:nvSpPr>
+          <p:cNvPr id="11" name="TextBox 10"/>
+          <p:cNvSpPr txBox="1"/>
+          <p:nvPr/>
+        </p:nvSpPr>
+        <p:spPr>
+          <a:xfrm>
+            <a:off x="9098280" y="2468880"/>
+            <a:ext cx="2514600" cy="594360"/>
+          </a:xfrm>
+          <a:prstGeom prst="rect">
+            <a:avLst/>
+          </a:prstGeom>
+          <a:noFill/>
+        </p:spPr>
+        <p:txBody>
+          <a:bodyPr wrap="square" lIns="0" rIns="0" tIns="0" bIns="0" anchor="t">
+            <a:spAutoFit/>
+          </a:bodyPr>
+          <a:lstStyle/>
+          <a:p>
+            <a:pPr algn="l">
+              <a:lnSpc>
+                <a:spcPct val="130000"/>
+              </a:lnSpc>
+            </a:pPr>
+            <a:r>
+              <a:rPr sz="1400" b="0" i="0">
+                <a:solidFill>
+                  <a:srgbClr val="21295C"/>
+                </a:solidFill>
+                <a:latin typeface="Arial"/>
+              </a:rPr>
+              <a:t>На вход — все токены контекста.</a:t>
+            </a:r>
+          </a:p>
+        </p:txBody>
+      </p:sp>
+      <p:sp>
+        <p:nvSpPr>
+          <p:cNvPr id="12" name="Rounded Rectangle 11"/>
+          <p:cNvSpPr/>
+          <p:nvPr/>
+        </p:nvSpPr>
+        <p:spPr>
+          <a:xfrm>
+            <a:off x="8732519" y="3227832"/>
+            <a:ext cx="292608" cy="292608"/>
+          </a:xfrm>
+          <a:prstGeom prst="roundRect">
+            <a:avLst>
+              <a:gd name="adj" fmla="val 50000"/>
+            </a:avLst>
+          </a:prstGeom>
+          <a:solidFill>
+            <a:srgbClr val="065A82"/>
+          </a:solidFill>
+          <a:ln>
+            <a:noFill/>
+          </a:ln>
+          <a:effectLst/>
+        </p:spPr>
+        <p:style>
+          <a:lnRef idx="1">
+            <a:schemeClr val="accent1"/>
+          </a:lnRef>
+          <a:fillRef idx="3">
+            <a:schemeClr val="accent1"/>
+          </a:fillRef>
+          <a:effectRef idx="2">
+            <a:schemeClr val="accent1"/>
+          </a:effectRef>
+          <a:fontRef idx="minor">
+            <a:schemeClr val="lt1"/>
+          </a:fontRef>
+        </p:style>
+        <p:txBody>
+          <a:bodyPr rtlCol="0" anchor="ctr"/>
+          <a:lstStyle/>
+          <a:p>
+            <a:pPr algn="ctr"/>
+          </a:p>
+        </p:txBody>
+      </p:sp>
+      <p:sp>
+        <p:nvSpPr>
+          <p:cNvPr id="13" name="TextBox 12"/>
+          <p:cNvSpPr txBox="1"/>
+          <p:nvPr/>
+        </p:nvSpPr>
+        <p:spPr>
+          <a:xfrm>
+            <a:off x="8732519" y="3236976"/>
+            <a:ext cx="292608" cy="274320"/>
+          </a:xfrm>
+          <a:prstGeom prst="rect">
+            <a:avLst/>
+          </a:prstGeom>
+          <a:noFill/>
+        </p:spPr>
+        <p:txBody>
+          <a:bodyPr wrap="square" lIns="0" rIns="0" tIns="0" bIns="0" anchor="ctr">
+            <a:spAutoFit/>
+          </a:bodyPr>
+          <a:lstStyle/>
+          <a:p>
+            <a:pPr algn="ctr">
+              <a:lnSpc>
+                <a:spcPct val="115000"/>
+              </a:lnSpc>
+            </a:pPr>
+            <a:r>
+              <a:rPr sz="1300" b="1" i="0">
+                <a:solidFill>
+                  <a:srgbClr val="FFFFFF"/>
+                </a:solidFill>
+                <a:latin typeface="Arial"/>
+              </a:rPr>
+              <a:t>2</a:t>
+            </a:r>
+          </a:p>
+        </p:txBody>
+      </p:sp>
+      <p:sp>
+        <p:nvSpPr>
+          <p:cNvPr id="14" name="TextBox 13"/>
+          <p:cNvSpPr txBox="1"/>
+          <p:nvPr/>
+        </p:nvSpPr>
+        <p:spPr>
+          <a:xfrm>
+            <a:off x="9098280" y="3182112"/>
+            <a:ext cx="2514600" cy="594360"/>
+          </a:xfrm>
+          <a:prstGeom prst="rect">
+            <a:avLst/>
+          </a:prstGeom>
+          <a:noFill/>
+        </p:spPr>
+        <p:txBody>
+          <a:bodyPr wrap="square" lIns="0" rIns="0" tIns="0" bIns="0" anchor="t">
+            <a:spAutoFit/>
+          </a:bodyPr>
+          <a:lstStyle/>
+          <a:p>
+            <a:pPr algn="l">
+              <a:lnSpc>
+                <a:spcPct val="130000"/>
+              </a:lnSpc>
+            </a:pPr>
+            <a:r>
+              <a:rPr sz="1400" b="0" i="0">
+                <a:solidFill>
+                  <a:srgbClr val="21295C"/>
+                </a:solidFill>
+                <a:latin typeface="Arial"/>
+              </a:rPr>
+              <a:t>На выходе — распределение, Σ = 1.</a:t>
+            </a:r>
+          </a:p>
+        </p:txBody>
+      </p:sp>
+      <p:sp>
+        <p:nvSpPr>
+          <p:cNvPr id="15" name="Rounded Rectangle 14"/>
+          <p:cNvSpPr/>
+          <p:nvPr/>
+        </p:nvSpPr>
+        <p:spPr>
+          <a:xfrm>
+            <a:off x="8732519" y="3941063"/>
+            <a:ext cx="292608" cy="292608"/>
+          </a:xfrm>
+          <a:prstGeom prst="roundRect">
+            <a:avLst>
+              <a:gd name="adj" fmla="val 50000"/>
+            </a:avLst>
+          </a:prstGeom>
+          <a:solidFill>
+            <a:srgbClr val="065A82"/>
+          </a:solidFill>
+          <a:ln>
+            <a:noFill/>
+          </a:ln>
+          <a:effectLst/>
+        </p:spPr>
+        <p:style>
+          <a:lnRef idx="1">
+            <a:schemeClr val="accent1"/>
+          </a:lnRef>
+          <a:fillRef idx="3">
+            <a:schemeClr val="accent1"/>
+          </a:fillRef>
+          <a:effectRef idx="2">
+            <a:schemeClr val="accent1"/>
+          </a:effectRef>
+          <a:fontRef idx="minor">
+            <a:schemeClr val="lt1"/>
+          </a:fontRef>
+        </p:style>
+        <p:txBody>
+          <a:bodyPr rtlCol="0" anchor="ctr"/>
+          <a:lstStyle/>
+          <a:p>
+            <a:pPr algn="ctr"/>
+          </a:p>
+        </p:txBody>
+      </p:sp>
+      <p:sp>
+        <p:nvSpPr>
+          <p:cNvPr id="16" name="TextBox 15"/>
+          <p:cNvSpPr txBox="1"/>
+          <p:nvPr/>
+        </p:nvSpPr>
+        <p:spPr>
+          <a:xfrm>
+            <a:off x="8732519" y="3950207"/>
+            <a:ext cx="292608" cy="274320"/>
+          </a:xfrm>
+          <a:prstGeom prst="rect">
+            <a:avLst/>
+          </a:prstGeom>
+          <a:noFill/>
+        </p:spPr>
+        <p:txBody>
+          <a:bodyPr wrap="square" lIns="0" rIns="0" tIns="0" bIns="0" anchor="ctr">
+            <a:spAutoFit/>
+          </a:bodyPr>
+          <a:lstStyle/>
+          <a:p>
+            <a:pPr algn="ctr">
+              <a:lnSpc>
+                <a:spcPct val="115000"/>
+              </a:lnSpc>
+            </a:pPr>
+            <a:r>
+              <a:rPr sz="1300" b="1" i="0">
+                <a:solidFill>
+                  <a:srgbClr val="FFFFFF"/>
+                </a:solidFill>
+                <a:latin typeface="Arial"/>
+              </a:rPr>
+              <a:t>3</a:t>
+            </a:r>
+          </a:p>
+        </p:txBody>
+      </p:sp>
+      <p:sp>
+        <p:nvSpPr>
+          <p:cNvPr id="17" name="TextBox 16"/>
+          <p:cNvSpPr txBox="1"/>
+          <p:nvPr/>
+        </p:nvSpPr>
+        <p:spPr>
+          <a:xfrm>
+            <a:off x="9098280" y="3895344"/>
+            <a:ext cx="2514600" cy="594360"/>
+          </a:xfrm>
+          <a:prstGeom prst="rect">
+            <a:avLst/>
+          </a:prstGeom>
+          <a:noFill/>
+        </p:spPr>
+        <p:txBody>
+          <a:bodyPr wrap="square" lIns="0" rIns="0" tIns="0" bIns="0" anchor="t">
+            <a:spAutoFit/>
+          </a:bodyPr>
+          <a:lstStyle/>
+          <a:p>
+            <a:pPr algn="l">
+              <a:lnSpc>
+                <a:spcPct val="130000"/>
+              </a:lnSpc>
+            </a:pPr>
+            <a:r>
+              <a:rPr sz="1400" b="0" i="0">
+                <a:solidFill>
+                  <a:srgbClr val="21295C"/>
+                </a:solidFill>
+                <a:latin typeface="Arial"/>
+              </a:rPr>
+              <a:t>Пересчитывается на каждом шаге.</a:t>
+            </a:r>
+          </a:p>
+        </p:txBody>
+      </p:sp>
+      <p:sp>
+        <p:nvSpPr>
+          <p:cNvPr id="18" name="Rounded Rectangle 17"/>
+          <p:cNvSpPr/>
+          <p:nvPr/>
+        </p:nvSpPr>
+        <p:spPr>
+          <a:xfrm>
+            <a:off x="8549640" y="4892040"/>
+            <a:ext cx="3246120" cy="1371600"/>
+          </a:xfrm>
+          <a:prstGeom prst="roundRect">
+            <a:avLst>
+              <a:gd name="adj" fmla="val 22222"/>
+            </a:avLst>
+          </a:prstGeom>
+          <a:solidFill>
+            <a:srgbClr val="F4F7FA"/>
+          </a:solidFill>
+          <a:ln w="19050">
+            <a:solidFill>
+              <a:srgbClr val="1C7293"/>
+            </a:solidFill>
+          </a:ln>
+          <a:effectLst/>
+        </p:spPr>
+        <p:style>
+          <a:lnRef idx="1">
+            <a:schemeClr val="accent1"/>
+          </a:lnRef>
+          <a:fillRef idx="3">
+            <a:schemeClr val="accent1"/>
+          </a:fillRef>
+          <a:effectRef idx="2">
+            <a:schemeClr val="accent1"/>
+          </a:effectRef>
+          <a:fontRef idx="minor">
+            <a:schemeClr val="lt1"/>
+          </a:fontRef>
+        </p:style>
+        <p:txBody>
+          <a:bodyPr rtlCol="0" anchor="ctr"/>
+          <a:lstStyle/>
+          <a:p>
+            <a:pPr algn="ctr"/>
+          </a:p>
+        </p:txBody>
+      </p:sp>
       <p:pic>
         <p:nvPicPr>
-          <p:cNvPr id="8" name="Picture 7" descr="s14-attention-bars.png"/>
+          <p:cNvPr id="19" name="Picture 18" descr="s14-flashlight.png"/>
           <p:cNvPicPr>
             <a:picLocks noChangeAspect="1"/>
           </p:cNvPicPr>
@@ -9643,8 +10116,8 @@
         </p:blipFill>
         <p:spPr>
           <a:xfrm>
-            <a:off x="6446520" y="2011680"/>
-            <a:ext cx="5120640" cy="2286000"/>
+            <a:off x="8686800" y="4983480"/>
+            <a:ext cx="1188720" cy="1188720"/>
           </a:xfrm>
           <a:prstGeom prst="rect">
             <a:avLst/>
@@ -9653,60 +10126,14 @@
       </p:pic>
       <p:sp>
         <p:nvSpPr>
-          <p:cNvPr id="9" name="Rounded Rectangle 8"/>
-          <p:cNvSpPr/>
-          <p:nvPr/>
-        </p:nvSpPr>
-        <p:spPr>
-          <a:xfrm>
-            <a:off x="6492240" y="4407408"/>
-            <a:ext cx="228600" cy="228600"/>
-          </a:xfrm>
-          <a:prstGeom prst="roundRect">
-            <a:avLst>
-              <a:gd name="adj" fmla="val 50000"/>
-            </a:avLst>
-          </a:prstGeom>
-          <a:solidFill>
-            <a:srgbClr val="065A82"/>
-          </a:solidFill>
-          <a:ln>
-            <a:noFill/>
-          </a:ln>
-          <a:effectLst/>
-        </p:spPr>
-        <p:style>
-          <a:lnRef idx="1">
-            <a:schemeClr val="accent1"/>
-          </a:lnRef>
-          <a:fillRef idx="3">
-            <a:schemeClr val="accent1"/>
-          </a:fillRef>
-          <a:effectRef idx="2">
-            <a:schemeClr val="accent1"/>
-          </a:effectRef>
-          <a:fontRef idx="minor">
-            <a:schemeClr val="lt1"/>
-          </a:fontRef>
-        </p:style>
-        <p:txBody>
-          <a:bodyPr rtlCol="0" anchor="ctr"/>
-          <a:lstStyle/>
-          <a:p>
-            <a:pPr algn="ctr"/>
-          </a:p>
-        </p:txBody>
-      </p:sp>
-      <p:sp>
-        <p:nvSpPr>
-          <p:cNvPr id="10" name="TextBox 9"/>
-          <p:cNvSpPr txBox="1"/>
-          <p:nvPr/>
-        </p:nvSpPr>
-        <p:spPr>
-          <a:xfrm>
-            <a:off x="6492240" y="4416552"/>
-            <a:ext cx="228600" cy="201168"/>
+          <p:cNvPr id="20" name="TextBox 19"/>
+          <p:cNvSpPr txBox="1"/>
+          <p:nvPr/>
+        </p:nvSpPr>
+        <p:spPr>
+          <a:xfrm>
+            <a:off x="9921240" y="5074920"/>
+            <a:ext cx="1737360" cy="1005840"/>
           </a:xfrm>
           <a:prstGeom prst="rect">
             <a:avLst/>
@@ -9719,320 +10146,33 @@
           </a:bodyPr>
           <a:lstStyle/>
           <a:p>
-            <a:pPr algn="ctr">
-              <a:lnSpc>
-                <a:spcPct val="115000"/>
-              </a:lnSpc>
-            </a:pPr>
-            <a:r>
-              <a:rPr sz="1100" b="1" i="0">
-                <a:solidFill>
-                  <a:srgbClr val="FFFFFF"/>
-                </a:solidFill>
-                <a:latin typeface="Arial"/>
-              </a:rPr>
-              <a:t>1</a:t>
-            </a:r>
-          </a:p>
-        </p:txBody>
-      </p:sp>
-      <p:sp>
-        <p:nvSpPr>
-          <p:cNvPr id="11" name="TextBox 10"/>
-          <p:cNvSpPr txBox="1"/>
-          <p:nvPr/>
-        </p:nvSpPr>
-        <p:spPr>
-          <a:xfrm>
-            <a:off x="6858000" y="4343400"/>
-            <a:ext cx="4846320" cy="320040"/>
-          </a:xfrm>
-          <a:prstGeom prst="rect">
-            <a:avLst/>
-          </a:prstGeom>
-          <a:noFill/>
-        </p:spPr>
-        <p:txBody>
-          <a:bodyPr wrap="square" lIns="0" rIns="0" tIns="0" bIns="0" anchor="ctr">
-            <a:spAutoFit/>
-          </a:bodyPr>
-          <a:lstStyle/>
-          <a:p>
             <a:pPr algn="l">
               <a:lnSpc>
-                <a:spcPct val="115000"/>
-              </a:lnSpc>
-            </a:pPr>
-            <a:r>
-              <a:rPr sz="1300" b="0" i="0">
+                <a:spcPct val="130000"/>
+              </a:lnSpc>
+            </a:pPr>
+            <a:r>
+              <a:rPr sz="1200" b="0" i="1">
                 <a:solidFill>
                   <a:srgbClr val="21295C"/>
                 </a:solidFill>
                 <a:latin typeface="Arial"/>
               </a:rPr>
-              <a:t>На вход — все токены контекста (не часть).</a:t>
-            </a:r>
-          </a:p>
-        </p:txBody>
-      </p:sp>
-      <p:sp>
-        <p:nvSpPr>
-          <p:cNvPr id="12" name="Rounded Rectangle 11"/>
-          <p:cNvSpPr/>
-          <p:nvPr/>
-        </p:nvSpPr>
-        <p:spPr>
-          <a:xfrm>
-            <a:off x="6492240" y="4727448"/>
-            <a:ext cx="228600" cy="228600"/>
-          </a:xfrm>
-          <a:prstGeom prst="roundRect">
-            <a:avLst>
-              <a:gd name="adj" fmla="val 50000"/>
-            </a:avLst>
-          </a:prstGeom>
-          <a:solidFill>
-            <a:srgbClr val="065A82"/>
-          </a:solidFill>
-          <a:ln>
-            <a:noFill/>
-          </a:ln>
-          <a:effectLst/>
-        </p:spPr>
-        <p:style>
-          <a:lnRef idx="1">
-            <a:schemeClr val="accent1"/>
-          </a:lnRef>
-          <a:fillRef idx="3">
-            <a:schemeClr val="accent1"/>
-          </a:fillRef>
-          <a:effectRef idx="2">
-            <a:schemeClr val="accent1"/>
-          </a:effectRef>
-          <a:fontRef idx="minor">
-            <a:schemeClr val="lt1"/>
-          </a:fontRef>
-        </p:style>
-        <p:txBody>
-          <a:bodyPr rtlCol="0" anchor="ctr"/>
-          <a:lstStyle/>
-          <a:p>
-            <a:pPr algn="ctr"/>
-          </a:p>
-        </p:txBody>
-      </p:sp>
-      <p:sp>
-        <p:nvSpPr>
-          <p:cNvPr id="13" name="TextBox 12"/>
-          <p:cNvSpPr txBox="1"/>
-          <p:nvPr/>
-        </p:nvSpPr>
-        <p:spPr>
-          <a:xfrm>
-            <a:off x="6492240" y="4736592"/>
-            <a:ext cx="228600" cy="201168"/>
-          </a:xfrm>
-          <a:prstGeom prst="rect">
-            <a:avLst/>
-          </a:prstGeom>
-          <a:noFill/>
-        </p:spPr>
-        <p:txBody>
-          <a:bodyPr wrap="square" lIns="0" rIns="0" tIns="0" bIns="0" anchor="ctr">
-            <a:spAutoFit/>
-          </a:bodyPr>
-          <a:lstStyle/>
-          <a:p>
-            <a:pPr algn="ctr">
-              <a:lnSpc>
-                <a:spcPct val="115000"/>
-              </a:lnSpc>
-            </a:pPr>
-            <a:r>
-              <a:rPr sz="1100" b="1" i="0">
-                <a:solidFill>
-                  <a:srgbClr val="FFFFFF"/>
-                </a:solidFill>
-                <a:latin typeface="Arial"/>
-              </a:rPr>
-              <a:t>2</a:t>
-            </a:r>
-          </a:p>
-        </p:txBody>
-      </p:sp>
-      <p:sp>
-        <p:nvSpPr>
-          <p:cNvPr id="14" name="TextBox 13"/>
-          <p:cNvSpPr txBox="1"/>
-          <p:nvPr/>
-        </p:nvSpPr>
-        <p:spPr>
-          <a:xfrm>
-            <a:off x="6858000" y="4663440"/>
-            <a:ext cx="4846320" cy="320040"/>
-          </a:xfrm>
-          <a:prstGeom prst="rect">
-            <a:avLst/>
-          </a:prstGeom>
-          <a:noFill/>
-        </p:spPr>
-        <p:txBody>
-          <a:bodyPr wrap="square" lIns="0" rIns="0" tIns="0" bIns="0" anchor="ctr">
-            <a:spAutoFit/>
-          </a:bodyPr>
-          <a:lstStyle/>
-          <a:p>
-            <a:pPr algn="l">
-              <a:lnSpc>
-                <a:spcPct val="115000"/>
-              </a:lnSpc>
-            </a:pPr>
-            <a:r>
-              <a:rPr sz="1300" b="0" i="0">
-                <a:solidFill>
-                  <a:srgbClr val="21295C"/>
-                </a:solidFill>
-                <a:latin typeface="Arial"/>
-              </a:rPr>
-              <a:t>На выходе — распределение, сумма = 1.</a:t>
-            </a:r>
-          </a:p>
-        </p:txBody>
-      </p:sp>
-      <p:sp>
-        <p:nvSpPr>
-          <p:cNvPr id="15" name="Rounded Rectangle 14"/>
-          <p:cNvSpPr/>
-          <p:nvPr/>
-        </p:nvSpPr>
-        <p:spPr>
-          <a:xfrm>
-            <a:off x="6492240" y="5047488"/>
-            <a:ext cx="228600" cy="228600"/>
-          </a:xfrm>
-          <a:prstGeom prst="roundRect">
-            <a:avLst>
-              <a:gd name="adj" fmla="val 50000"/>
-            </a:avLst>
-          </a:prstGeom>
-          <a:solidFill>
-            <a:srgbClr val="065A82"/>
-          </a:solidFill>
-          <a:ln>
-            <a:noFill/>
-          </a:ln>
-          <a:effectLst/>
-        </p:spPr>
-        <p:style>
-          <a:lnRef idx="1">
-            <a:schemeClr val="accent1"/>
-          </a:lnRef>
-          <a:fillRef idx="3">
-            <a:schemeClr val="accent1"/>
-          </a:fillRef>
-          <a:effectRef idx="2">
-            <a:schemeClr val="accent1"/>
-          </a:effectRef>
-          <a:fontRef idx="minor">
-            <a:schemeClr val="lt1"/>
-          </a:fontRef>
-        </p:style>
-        <p:txBody>
-          <a:bodyPr rtlCol="0" anchor="ctr"/>
-          <a:lstStyle/>
-          <a:p>
-            <a:pPr algn="ctr"/>
-          </a:p>
-        </p:txBody>
-      </p:sp>
-      <p:sp>
-        <p:nvSpPr>
-          <p:cNvPr id="16" name="TextBox 15"/>
-          <p:cNvSpPr txBox="1"/>
-          <p:nvPr/>
-        </p:nvSpPr>
-        <p:spPr>
-          <a:xfrm>
-            <a:off x="6492240" y="5056632"/>
-            <a:ext cx="228600" cy="201168"/>
-          </a:xfrm>
-          <a:prstGeom prst="rect">
-            <a:avLst/>
-          </a:prstGeom>
-          <a:noFill/>
-        </p:spPr>
-        <p:txBody>
-          <a:bodyPr wrap="square" lIns="0" rIns="0" tIns="0" bIns="0" anchor="ctr">
-            <a:spAutoFit/>
-          </a:bodyPr>
-          <a:lstStyle/>
-          <a:p>
-            <a:pPr algn="ctr">
-              <a:lnSpc>
-                <a:spcPct val="115000"/>
-              </a:lnSpc>
-            </a:pPr>
-            <a:r>
-              <a:rPr sz="1100" b="1" i="0">
-                <a:solidFill>
-                  <a:srgbClr val="FFFFFF"/>
-                </a:solidFill>
-                <a:latin typeface="Arial"/>
-              </a:rPr>
-              <a:t>3</a:t>
-            </a:r>
-          </a:p>
-        </p:txBody>
-      </p:sp>
-      <p:sp>
-        <p:nvSpPr>
-          <p:cNvPr id="17" name="TextBox 16"/>
-          <p:cNvSpPr txBox="1"/>
-          <p:nvPr/>
-        </p:nvSpPr>
-        <p:spPr>
-          <a:xfrm>
-            <a:off x="6858000" y="4983480"/>
-            <a:ext cx="4846320" cy="320040"/>
-          </a:xfrm>
-          <a:prstGeom prst="rect">
-            <a:avLst/>
-          </a:prstGeom>
-          <a:noFill/>
-        </p:spPr>
-        <p:txBody>
-          <a:bodyPr wrap="square" lIns="0" rIns="0" tIns="0" bIns="0" anchor="ctr">
-            <a:spAutoFit/>
-          </a:bodyPr>
-          <a:lstStyle/>
-          <a:p>
-            <a:pPr algn="l">
-              <a:lnSpc>
-                <a:spcPct val="115000"/>
-              </a:lnSpc>
-            </a:pPr>
-            <a:r>
-              <a:rPr sz="1300" b="0" i="0">
-                <a:solidFill>
-                  <a:srgbClr val="21295C"/>
-                </a:solidFill>
-                <a:latin typeface="Arial"/>
-              </a:rPr>
-              <a:t>Пересчитывается на каждом шаге генерации.</a:t>
-            </a:r>
-          </a:p>
-        </p:txBody>
-      </p:sp>
-      <p:sp>
-        <p:nvSpPr>
-          <p:cNvPr id="18" name="TextBox 17"/>
-          <p:cNvSpPr txBox="1"/>
-          <p:nvPr/>
-        </p:nvSpPr>
-        <p:spPr>
-          <a:xfrm>
-            <a:off x="502920" y="5989320"/>
-            <a:ext cx="11247120" cy="457200"/>
+              <a:t>Метафора: фонарик в тёмной комнате — модель «подсвечивает» одни токены ярче других.</a:t>
+            </a:r>
+          </a:p>
+        </p:txBody>
+      </p:sp>
+      <p:sp>
+        <p:nvSpPr>
+          <p:cNvPr id="21" name="TextBox 20"/>
+          <p:cNvSpPr txBox="1"/>
+          <p:nvPr/>
+        </p:nvSpPr>
+        <p:spPr>
+          <a:xfrm>
+            <a:off x="502920" y="6537960"/>
+            <a:ext cx="11247120" cy="274320"/>
           </a:xfrm>
           <a:prstGeom prst="rect">
             <a:avLst/>
@@ -10292,8 +10432,8 @@
         </p:nvSpPr>
         <p:spPr>
           <a:xfrm>
-            <a:off x="708659" y="3154680"/>
-            <a:ext cx="3520440" cy="411480"/>
+            <a:off x="708659" y="3108960"/>
+            <a:ext cx="3520440" cy="457200"/>
           </a:xfrm>
           <a:prstGeom prst="roundRect">
             <a:avLst>
@@ -10338,8 +10478,8 @@
         </p:nvSpPr>
         <p:spPr>
           <a:xfrm>
-            <a:off x="708659" y="3200400"/>
-            <a:ext cx="3520440" cy="320040"/>
+            <a:off x="708659" y="3154679"/>
+            <a:ext cx="3520440" cy="365760"/>
           </a:xfrm>
           <a:prstGeom prst="rect">
             <a:avLst/>
@@ -10358,7 +10498,7 @@
               </a:lnSpc>
             </a:pPr>
             <a:r>
-              <a:rPr sz="1400" b="1" i="0">
+              <a:rPr sz="1600" b="1" i="0">
                 <a:solidFill>
                   <a:srgbClr val="FFFFFF"/>
                 </a:solidFill>
@@ -10377,8 +10517,8 @@
         </p:nvSpPr>
         <p:spPr>
           <a:xfrm>
-            <a:off x="708659" y="3611880"/>
-            <a:ext cx="3520440" cy="320040"/>
+            <a:off x="708659" y="3584448"/>
+            <a:ext cx="3520440" cy="274320"/>
           </a:xfrm>
           <a:prstGeom prst="rect">
             <a:avLst/>
@@ -10397,7 +10537,7 @@
               </a:lnSpc>
             </a:pPr>
             <a:r>
-              <a:rPr sz="1100" b="0" i="1">
+              <a:rPr sz="1200" b="0" i="1">
                 <a:solidFill>
                   <a:srgbClr val="21295C"/>
                 </a:solidFill>
@@ -10416,8 +10556,8 @@
         </p:nvSpPr>
         <p:spPr>
           <a:xfrm>
-            <a:off x="4366259" y="3154680"/>
-            <a:ext cx="3520440" cy="411480"/>
+            <a:off x="4366259" y="3108960"/>
+            <a:ext cx="3520440" cy="457200"/>
           </a:xfrm>
           <a:prstGeom prst="roundRect">
             <a:avLst>
@@ -10462,8 +10602,8 @@
         </p:nvSpPr>
         <p:spPr>
           <a:xfrm>
-            <a:off x="4366259" y="3200400"/>
-            <a:ext cx="3520440" cy="320040"/>
+            <a:off x="4366259" y="3154679"/>
+            <a:ext cx="3520440" cy="365760"/>
           </a:xfrm>
           <a:prstGeom prst="rect">
             <a:avLst/>
@@ -10482,7 +10622,7 @@
               </a:lnSpc>
             </a:pPr>
             <a:r>
-              <a:rPr sz="1400" b="1" i="0">
+              <a:rPr sz="1600" b="1" i="0">
                 <a:solidFill>
                   <a:srgbClr val="FFFFFF"/>
                 </a:solidFill>
@@ -10501,8 +10641,8 @@
         </p:nvSpPr>
         <p:spPr>
           <a:xfrm>
-            <a:off x="4366259" y="3611880"/>
-            <a:ext cx="3520440" cy="320040"/>
+            <a:off x="4366259" y="3584448"/>
+            <a:ext cx="3520440" cy="274320"/>
           </a:xfrm>
           <a:prstGeom prst="rect">
             <a:avLst/>
@@ -10521,7 +10661,7 @@
               </a:lnSpc>
             </a:pPr>
             <a:r>
-              <a:rPr sz="1100" b="0" i="1">
+              <a:rPr sz="1200" b="0" i="1">
                 <a:solidFill>
                   <a:srgbClr val="21295C"/>
                 </a:solidFill>
@@ -10540,8 +10680,8 @@
         </p:nvSpPr>
         <p:spPr>
           <a:xfrm>
-            <a:off x="8023860" y="3154680"/>
-            <a:ext cx="3520440" cy="411480"/>
+            <a:off x="8023860" y="3108960"/>
+            <a:ext cx="3520440" cy="457200"/>
           </a:xfrm>
           <a:prstGeom prst="roundRect">
             <a:avLst>
@@ -10586,8 +10726,8 @@
         </p:nvSpPr>
         <p:spPr>
           <a:xfrm>
-            <a:off x="8023860" y="3200400"/>
-            <a:ext cx="3520440" cy="320040"/>
+            <a:off x="8023860" y="3154679"/>
+            <a:ext cx="3520440" cy="365760"/>
           </a:xfrm>
           <a:prstGeom prst="rect">
             <a:avLst/>
@@ -10606,7 +10746,7 @@
               </a:lnSpc>
             </a:pPr>
             <a:r>
-              <a:rPr sz="1400" b="1" i="0">
+              <a:rPr sz="1600" b="1" i="0">
                 <a:solidFill>
                   <a:srgbClr val="FFFFFF"/>
                 </a:solidFill>
@@ -10625,8 +10765,8 @@
         </p:nvSpPr>
         <p:spPr>
           <a:xfrm>
-            <a:off x="8023860" y="3611880"/>
-            <a:ext cx="3520440" cy="320040"/>
+            <a:off x="8023860" y="3584448"/>
+            <a:ext cx="3520440" cy="274320"/>
           </a:xfrm>
           <a:prstGeom prst="rect">
             <a:avLst/>
@@ -10645,7 +10785,7 @@
               </a:lnSpc>
             </a:pPr>
             <a:r>
-              <a:rPr sz="1100" b="0" i="1">
+              <a:rPr sz="1200" b="0" i="1">
                 <a:solidFill>
                   <a:srgbClr val="21295C"/>
                 </a:solidFill>
@@ -10684,13 +10824,13 @@
               </a:lnSpc>
             </a:pPr>
             <a:r>
-              <a:rPr sz="1100" b="0" i="1">
+              <a:rPr sz="1200" b="0" i="1">
                 <a:solidFill>
                   <a:srgbClr val="1C7293"/>
                 </a:solidFill>
                 <a:latin typeface="Arial"/>
               </a:rPr>
-              <a:t>Упрощение: реальный attention map содержит сотни связей. Модель смотрит статистически, не делает грамматический разбор.</a:t>
+              <a:t>Упрощение: реальный attention map — сотни связей. Модель смотрит статистически, не делает грамматический разбор.</a:t>
             </a:r>
           </a:p>
         </p:txBody>
@@ -10751,7 +10891,7 @@
         </p:nvSpPr>
         <p:spPr>
           <a:xfrm>
-            <a:off x="685800" y="4315968"/>
+            <a:off x="685800" y="4297679"/>
             <a:ext cx="5120640" cy="365760"/>
           </a:xfrm>
           <a:prstGeom prst="rect">
@@ -10771,13 +10911,13 @@
               </a:lnSpc>
             </a:pPr>
             <a:r>
-              <a:rPr sz="1500" b="1" i="0">
+              <a:rPr sz="1800" b="1" i="0">
                 <a:solidFill>
                   <a:srgbClr val="065A82"/>
                 </a:solidFill>
                 <a:latin typeface="Arial"/>
               </a:rPr>
-              <a:t>B1. Без роли</a:t>
+              <a:t>Без роли</a:t>
             </a:r>
           </a:p>
         </p:txBody>
@@ -10810,7 +10950,7 @@
               </a:lnSpc>
             </a:pPr>
             <a:r>
-              <a:rPr sz="1700" b="0" i="0">
+              <a:rPr sz="1800" b="0" i="0">
                 <a:solidFill>
                   <a:srgbClr val="21295C"/>
                 </a:solidFill>
@@ -10830,7 +10970,7 @@
         <p:spPr>
           <a:xfrm>
             <a:off x="685800" y="5349240"/>
-            <a:ext cx="5120640" cy="822960"/>
+            <a:ext cx="5120640" cy="868680"/>
           </a:xfrm>
           <a:prstGeom prst="rect">
             <a:avLst/>
@@ -10849,7 +10989,7 @@
               </a:lnSpc>
             </a:pPr>
             <a:r>
-              <a:rPr sz="1300" b="0" i="1">
+              <a:rPr sz="1500" b="0" i="1">
                 <a:solidFill>
                   <a:srgbClr val="21295C"/>
                 </a:solidFill>
@@ -10917,7 +11057,7 @@
         </p:nvSpPr>
         <p:spPr>
           <a:xfrm>
-            <a:off x="6446520" y="4315968"/>
+            <a:off x="6446520" y="4297679"/>
             <a:ext cx="5120640" cy="365760"/>
           </a:xfrm>
           <a:prstGeom prst="rect">
@@ -10937,13 +11077,13 @@
               </a:lnSpc>
             </a:pPr>
             <a:r>
-              <a:rPr sz="1500" b="1" i="0">
+              <a:rPr sz="1800" b="1" i="0">
                 <a:solidFill>
                   <a:srgbClr val="21295C"/>
                 </a:solidFill>
                 <a:latin typeface="Arial"/>
               </a:rPr>
-              <a:t>B2. С ролью</a:t>
+              <a:t>С ролью</a:t>
             </a:r>
           </a:p>
         </p:txBody>
@@ -10976,7 +11116,7 @@
               </a:lnSpc>
             </a:pPr>
             <a:r>
-              <a:rPr sz="1700" b="0" i="0">
+              <a:rPr sz="1800" b="0" i="0">
                 <a:solidFill>
                   <a:srgbClr val="21295C"/>
                 </a:solidFill>
@@ -10985,7 +11125,7 @@
               <a:t>«Ты </a:t>
             </a:r>
             <a:r>
-              <a:rPr sz="1700" b="1" i="0">
+              <a:rPr sz="1800" b="1" i="0">
                 <a:solidFill>
                   <a:srgbClr val="F0AB00"/>
                 </a:solidFill>
@@ -10994,7 +11134,7 @@
               <a:t>эксперт по Python</a:t>
             </a:r>
             <a:r>
-              <a:rPr sz="1700" b="0" i="0">
+              <a:rPr sz="1800" b="0" i="0">
                 <a:solidFill>
                   <a:srgbClr val="21295C"/>
                 </a:solidFill>
@@ -11003,7 +11143,7 @@
               <a:t>. Объясни асинхронность </a:t>
             </a:r>
             <a:r>
-              <a:rPr sz="1700" b="1" i="0">
+              <a:rPr sz="1800" b="1" i="0">
                 <a:solidFill>
                   <a:srgbClr val="F0AB00"/>
                 </a:solidFill>
@@ -11012,7 +11152,7 @@
               <a:t>джуниору</a:t>
             </a:r>
             <a:r>
-              <a:rPr sz="1700" b="0" i="0">
+              <a:rPr sz="1800" b="0" i="0">
                 <a:solidFill>
                   <a:srgbClr val="21295C"/>
                 </a:solidFill>
@@ -11032,7 +11172,7 @@
         <p:spPr>
           <a:xfrm>
             <a:off x="6446520" y="5349240"/>
-            <a:ext cx="5120640" cy="822960"/>
+            <a:ext cx="5120640" cy="868680"/>
           </a:xfrm>
           <a:prstGeom prst="rect">
             <a:avLst/>
@@ -11051,7 +11191,7 @@
               </a:lnSpc>
             </a:pPr>
             <a:r>
-              <a:rPr sz="1300" b="1" i="1">
+              <a:rPr sz="1500" b="1" i="1">
                 <a:solidFill>
                   <a:srgbClr val="21295C"/>
                 </a:solidFill>
@@ -11059,93 +11199,6 @@
               </a:rPr>
               <a:t>→ role-токены подсвечены
 (высокий вес в attention)</a:t>
-            </a:r>
-          </a:p>
-        </p:txBody>
-      </p:sp>
-      <p:sp>
-        <p:nvSpPr>
-          <p:cNvPr id="25" name="Rounded Rectangle 24"/>
-          <p:cNvSpPr/>
-          <p:nvPr/>
-        </p:nvSpPr>
-        <p:spPr>
-          <a:xfrm>
-            <a:off x="502920" y="6400800"/>
-            <a:ext cx="11247120" cy="365760"/>
-          </a:xfrm>
-          <a:prstGeom prst="roundRect">
-            <a:avLst>
-              <a:gd name="adj" fmla="val 12000"/>
-            </a:avLst>
-          </a:prstGeom>
-          <a:solidFill>
-            <a:srgbClr val="FEF5E0"/>
-          </a:solidFill>
-          <a:ln w="15240">
-            <a:solidFill>
-              <a:srgbClr val="F0AB00"/>
-            </a:solidFill>
-          </a:ln>
-          <a:effectLst/>
-        </p:spPr>
-        <p:style>
-          <a:lnRef idx="1">
-            <a:schemeClr val="accent1"/>
-          </a:lnRef>
-          <a:fillRef idx="3">
-            <a:schemeClr val="accent1"/>
-          </a:fillRef>
-          <a:effectRef idx="2">
-            <a:schemeClr val="accent1"/>
-          </a:effectRef>
-          <a:fontRef idx="minor">
-            <a:schemeClr val="lt1"/>
-          </a:fontRef>
-        </p:style>
-        <p:txBody>
-          <a:bodyPr rtlCol="0" anchor="ctr"/>
-          <a:lstStyle/>
-          <a:p>
-            <a:pPr algn="ctr"/>
-          </a:p>
-        </p:txBody>
-      </p:sp>
-      <p:sp>
-        <p:nvSpPr>
-          <p:cNvPr id="26" name="TextBox 25"/>
-          <p:cNvSpPr txBox="1"/>
-          <p:nvPr/>
-        </p:nvSpPr>
-        <p:spPr>
-          <a:xfrm>
-            <a:off x="685800" y="6473952"/>
-            <a:ext cx="10881360" cy="219456"/>
-          </a:xfrm>
-          <a:prstGeom prst="rect">
-            <a:avLst/>
-          </a:prstGeom>
-          <a:noFill/>
-        </p:spPr>
-        <p:txBody>
-          <a:bodyPr wrap="square" lIns="0" rIns="0" tIns="0" bIns="0" anchor="ctr">
-            <a:spAutoFit/>
-          </a:bodyPr>
-          <a:lstStyle/>
-          <a:p>
-            <a:pPr algn="l">
-              <a:lnSpc>
-                <a:spcPct val="125000"/>
-              </a:lnSpc>
-            </a:pPr>
-            <a:r>
-              <a:rPr sz="1200" b="1" i="0">
-                <a:solidFill>
-                  <a:srgbClr val="21295C"/>
-                </a:solidFill>
-                <a:latin typeface="Arial"/>
-              </a:rPr>
-              <a:t>1-е из 3 «почему» Лекции 1 §5.3 — payoff на s24</a:t>
             </a:r>
           </a:p>
         </p:txBody>
@@ -11810,8 +11863,8 @@
         </p:nvSpPr>
         <p:spPr>
           <a:xfrm>
-            <a:off x="502920" y="6172200"/>
-            <a:ext cx="11247120" cy="365760"/>
+            <a:off x="502920" y="6126480"/>
+            <a:ext cx="11247120" cy="640080"/>
           </a:xfrm>
           <a:prstGeom prst="roundRect">
             <a:avLst>
@@ -11858,8 +11911,8 @@
         </p:nvSpPr>
         <p:spPr>
           <a:xfrm>
-            <a:off x="685800" y="6245352"/>
-            <a:ext cx="10881360" cy="219456"/>
+            <a:off x="685800" y="6199632"/>
+            <a:ext cx="10881360" cy="493775"/>
           </a:xfrm>
           <a:prstGeom prst="rect">
             <a:avLst/>
@@ -11878,52 +11931,13 @@
               </a:lnSpc>
             </a:pPr>
             <a:r>
-              <a:rPr sz="1400" b="1" i="0">
+              <a:rPr sz="1500" b="1" i="0">
                 <a:solidFill>
                   <a:srgbClr val="21295C"/>
                 </a:solidFill>
                 <a:latin typeface="Arial"/>
               </a:rPr>
-              <a:t>Стоимость attention растёт квадратично от длины. 1M ≈ 16× дороже 100k.</a:t>
-            </a:r>
-          </a:p>
-        </p:txBody>
-      </p:sp>
-      <p:sp>
-        <p:nvSpPr>
-          <p:cNvPr id="20" name="TextBox 19"/>
-          <p:cNvSpPr txBox="1"/>
-          <p:nvPr/>
-        </p:nvSpPr>
-        <p:spPr>
-          <a:xfrm>
-            <a:off x="502920" y="6583680"/>
-            <a:ext cx="11247120" cy="228600"/>
-          </a:xfrm>
-          <a:prstGeom prst="rect">
-            <a:avLst/>
-          </a:prstGeom>
-          <a:noFill/>
-        </p:spPr>
-        <p:txBody>
-          <a:bodyPr wrap="square" lIns="0" rIns="0" tIns="0" bIns="0" anchor="t">
-            <a:spAutoFit/>
-          </a:bodyPr>
-          <a:lstStyle/>
-          <a:p>
-            <a:pPr algn="ctr">
-              <a:lnSpc>
-                <a:spcPct val="115000"/>
-              </a:lnSpc>
-            </a:pPr>
-            <a:r>
-              <a:rPr sz="1100" b="0" i="1">
-                <a:solidFill>
-                  <a:srgbClr val="1C7293"/>
-                </a:solidFill>
-                <a:latin typeface="Arial"/>
-              </a:rPr>
-              <a:t>[VERIFY-DAY-OF] Цифры на момент мая 2026. Темп роста ~×10 каждые 1-2 года.</a:t>
+              <a:t>Стоимость attention растёт квадратично от длины. 1M ≈ 16× дороже 100k — production-pricing с batching; чистая N²-теория дала бы 100×.</a:t>
             </a:r>
           </a:p>
         </p:txBody>
@@ -12330,7 +12344,7 @@
             <a:r>
               <a:rPr sz="1400" b="1" i="0">
                 <a:solidFill>
-                  <a:srgbClr val="1C7293"/>
+                  <a:srgbClr val="F0AB00"/>
                 </a:solidFill>
                 <a:latin typeface="Arial"/>
               </a:rPr>
@@ -12408,11 +12422,11 @@
             <a:r>
               <a:rPr sz="1400" b="1" i="0">
                 <a:solidFill>
-                  <a:srgbClr val="F0AB00"/>
-                </a:solidFill>
-                <a:latin typeface="Arial"/>
-              </a:rPr>
-              <a:t>~30%</a:t>
+                  <a:srgbClr val="1C7293"/>
+                </a:solidFill>
+                <a:latin typeface="Arial"/>
+              </a:rPr>
+              <a:t>~50%</a:t>
             </a:r>
           </a:p>
         </p:txBody>
@@ -12486,7 +12500,7 @@
             <a:r>
               <a:rPr sz="1400" b="1" i="0">
                 <a:solidFill>
-                  <a:srgbClr val="1C7293"/>
+                  <a:srgbClr val="F0AB00"/>
                 </a:solidFill>
                 <a:latin typeface="Arial"/>
               </a:rPr>
@@ -12973,8 +12987,8 @@
         </p:nvSpPr>
         <p:spPr>
           <a:xfrm>
-            <a:off x="8732519" y="2697480"/>
-            <a:ext cx="1785366" cy="411480"/>
+            <a:off x="8732519" y="2651760"/>
+            <a:ext cx="1785366" cy="365760"/>
           </a:xfrm>
           <a:prstGeom prst="rect">
             <a:avLst/>
@@ -13012,8 +13026,8 @@
         </p:nvSpPr>
         <p:spPr>
           <a:xfrm>
-            <a:off x="10335006" y="2697480"/>
-            <a:ext cx="1298448" cy="411480"/>
+            <a:off x="10335006" y="2651760"/>
+            <a:ext cx="1298448" cy="365760"/>
           </a:xfrm>
           <a:prstGeom prst="rect">
             <a:avLst/>
@@ -13051,8 +13065,8 @@
         </p:nvSpPr>
         <p:spPr>
           <a:xfrm>
-            <a:off x="8732519" y="3200400"/>
-            <a:ext cx="1785366" cy="411480"/>
+            <a:off x="8732519" y="3063240"/>
+            <a:ext cx="1785366" cy="365760"/>
           </a:xfrm>
           <a:prstGeom prst="rect">
             <a:avLst/>
@@ -13090,8 +13104,8 @@
         </p:nvSpPr>
         <p:spPr>
           <a:xfrm>
-            <a:off x="10335006" y="3200400"/>
-            <a:ext cx="1298448" cy="411480"/>
+            <a:off x="10335006" y="3063240"/>
+            <a:ext cx="1298448" cy="365760"/>
           </a:xfrm>
           <a:prstGeom prst="rect">
             <a:avLst/>
@@ -13129,8 +13143,8 @@
         </p:nvSpPr>
         <p:spPr>
           <a:xfrm>
-            <a:off x="8732519" y="3703320"/>
-            <a:ext cx="1785366" cy="411480"/>
+            <a:off x="8732519" y="3474720"/>
+            <a:ext cx="1785366" cy="365760"/>
           </a:xfrm>
           <a:prstGeom prst="rect">
             <a:avLst/>
@@ -13168,8 +13182,8 @@
         </p:nvSpPr>
         <p:spPr>
           <a:xfrm>
-            <a:off x="10335006" y="3703320"/>
-            <a:ext cx="1298448" cy="411480"/>
+            <a:off x="10335006" y="3474720"/>
+            <a:ext cx="1298448" cy="365760"/>
           </a:xfrm>
           <a:prstGeom prst="rect">
             <a:avLst/>
@@ -13207,8 +13221,8 @@
         </p:nvSpPr>
         <p:spPr>
           <a:xfrm>
-            <a:off x="8732519" y="4206240"/>
-            <a:ext cx="1785366" cy="411480"/>
+            <a:off x="8732519" y="3886200"/>
+            <a:ext cx="1785366" cy="365760"/>
           </a:xfrm>
           <a:prstGeom prst="rect">
             <a:avLst/>
@@ -13246,8 +13260,8 @@
         </p:nvSpPr>
         <p:spPr>
           <a:xfrm>
-            <a:off x="10335006" y="4206240"/>
-            <a:ext cx="1298448" cy="411480"/>
+            <a:off x="10335006" y="3886200"/>
+            <a:ext cx="1298448" cy="365760"/>
           </a:xfrm>
           <a:prstGeom prst="rect">
             <a:avLst/>
@@ -13285,8 +13299,8 @@
         </p:nvSpPr>
         <p:spPr>
           <a:xfrm>
-            <a:off x="8732519" y="4709160"/>
-            <a:ext cx="1785366" cy="411480"/>
+            <a:off x="8732519" y="4297680"/>
+            <a:ext cx="1785366" cy="365760"/>
           </a:xfrm>
           <a:prstGeom prst="rect">
             <a:avLst/>
@@ -13324,8 +13338,8 @@
         </p:nvSpPr>
         <p:spPr>
           <a:xfrm>
-            <a:off x="10335006" y="4709160"/>
-            <a:ext cx="1298448" cy="411480"/>
+            <a:off x="10335006" y="4297680"/>
+            <a:ext cx="1298448" cy="365760"/>
           </a:xfrm>
           <a:prstGeom prst="rect">
             <a:avLst/>
@@ -13363,8 +13377,8 @@
         </p:nvSpPr>
         <p:spPr>
           <a:xfrm>
-            <a:off x="8732519" y="5349240"/>
-            <a:ext cx="2880360" cy="411480"/>
+            <a:off x="8732519" y="4846320"/>
+            <a:ext cx="2880360" cy="868680"/>
           </a:xfrm>
           <a:prstGeom prst="rect">
             <a:avLst/>
@@ -13379,18 +13393,18 @@
           <a:p>
             <a:pPr algn="l">
               <a:lnSpc>
-                <a:spcPct val="120000"/>
-              </a:lnSpc>
-            </a:pPr>
-            <a:r>
-              <a:rPr sz="1100" b="0" i="1">
+                <a:spcPct val="130000"/>
+              </a:lnSpc>
+            </a:pPr>
+            <a:r>
+              <a:rPr sz="1200" b="0" i="1">
                 <a:solidFill>
                   <a:srgbClr val="1C7293"/>
                 </a:solidFill>
                 <a:latin typeface="Arial"/>
               </a:rPr>
-              <a:t>… остальные ~200k
-токенов: каждый &lt;0.05
+              <a:t>… остальные ~200k токенов:
+каждый &lt; 0.05
 Σ = 1</a:t>
             </a:r>
           </a:p>
@@ -13568,13 +13582,13 @@
               </a:lnSpc>
             </a:pPr>
             <a:r>
-              <a:rPr sz="1500" b="0" i="1">
+              <a:rPr sz="1800" b="0" i="1">
                 <a:solidFill>
                   <a:srgbClr val="065A82"/>
                 </a:solidFill>
                 <a:latin typeface="Arial"/>
               </a:rPr>
-              <a:t>T=0 (argmax) · T=0.7 (стандарт) · T=2.0 (хаос) — 3-е из 3 «почему» Лекции 1 §5.3</a:t>
+              <a:t>T = 0 (argmax)  ·  T = 1.0 (стандарт)  ·  T = 2.0 (хаос)</a:t>
             </a:r>
           </a:p>
         </p:txBody>
@@ -13587,164 +13601,12 @@
         </p:nvSpPr>
         <p:spPr>
           <a:xfrm>
-            <a:off x="502920" y="1783080"/>
-            <a:ext cx="3749039" cy="3474720"/>
+            <a:off x="502920" y="1828800"/>
+            <a:ext cx="3749039" cy="4160520"/>
           </a:xfrm>
           <a:prstGeom prst="roundRect">
             <a:avLst>
-              <a:gd name="adj" fmla="val 8771"/>
-            </a:avLst>
-          </a:prstGeom>
-          <a:solidFill>
-            <a:srgbClr val="FEF5E0"/>
-          </a:solidFill>
-          <a:ln w="25400">
-            <a:solidFill>
-              <a:srgbClr val="F0AB00"/>
-            </a:solidFill>
-          </a:ln>
-          <a:effectLst/>
-        </p:spPr>
-        <p:style>
-          <a:lnRef idx="1">
-            <a:schemeClr val="accent1"/>
-          </a:lnRef>
-          <a:fillRef idx="3">
-            <a:schemeClr val="accent1"/>
-          </a:fillRef>
-          <a:effectRef idx="2">
-            <a:schemeClr val="accent1"/>
-          </a:effectRef>
-          <a:fontRef idx="minor">
-            <a:schemeClr val="lt1"/>
-          </a:fontRef>
-        </p:style>
-        <p:txBody>
-          <a:bodyPr rtlCol="0" anchor="ctr"/>
-          <a:lstStyle/>
-          <a:p>
-            <a:pPr algn="ctr"/>
-          </a:p>
-        </p:txBody>
-      </p:sp>
-      <p:sp>
-        <p:nvSpPr>
-          <p:cNvPr id="5" name="TextBox 4"/>
-          <p:cNvSpPr txBox="1"/>
-          <p:nvPr/>
-        </p:nvSpPr>
-        <p:spPr>
-          <a:xfrm>
-            <a:off x="685800" y="1892807"/>
-            <a:ext cx="3383279" cy="365760"/>
-          </a:xfrm>
-          <a:prstGeom prst="rect">
-            <a:avLst/>
-          </a:prstGeom>
-          <a:noFill/>
-        </p:spPr>
-        <p:txBody>
-          <a:bodyPr wrap="square" lIns="0" rIns="0" tIns="0" bIns="0" anchor="t">
-            <a:spAutoFit/>
-          </a:bodyPr>
-          <a:lstStyle/>
-          <a:p>
-            <a:pPr algn="ctr">
-              <a:lnSpc>
-                <a:spcPct val="115000"/>
-              </a:lnSpc>
-            </a:pPr>
-            <a:r>
-              <a:rPr sz="1600" b="1" i="0">
-                <a:solidFill>
-                  <a:srgbClr val="F0AB00"/>
-                </a:solidFill>
-                <a:latin typeface="Arial"/>
-              </a:rPr>
-              <a:t>T = 0  ·  argmax</a:t>
-            </a:r>
-          </a:p>
-        </p:txBody>
-      </p:sp>
-      <p:pic>
-        <p:nvPicPr>
-          <p:cNvPr id="6" name="Picture 5" descr="s19-T0.png"/>
-          <p:cNvPicPr>
-            <a:picLocks noChangeAspect="1"/>
-          </p:cNvPicPr>
-          <p:nvPr/>
-        </p:nvPicPr>
-        <p:blipFill>
-          <a:blip r:embed="rId2"/>
-          <a:stretch>
-            <a:fillRect/>
-          </a:stretch>
-        </p:blipFill>
-        <p:spPr>
-          <a:xfrm>
-            <a:off x="777240" y="2331720"/>
-            <a:ext cx="3200399" cy="1920240"/>
-          </a:xfrm>
-          <a:prstGeom prst="rect">
-            <a:avLst/>
-          </a:prstGeom>
-        </p:spPr>
-      </p:pic>
-      <p:sp>
-        <p:nvSpPr>
-          <p:cNvPr id="7" name="TextBox 6"/>
-          <p:cNvSpPr txBox="1"/>
-          <p:nvPr/>
-        </p:nvSpPr>
-        <p:spPr>
-          <a:xfrm>
-            <a:off x="685800" y="4389120"/>
-            <a:ext cx="3383279" cy="868680"/>
-          </a:xfrm>
-          <a:prstGeom prst="rect">
-            <a:avLst/>
-          </a:prstGeom>
-          <a:noFill/>
-        </p:spPr>
-        <p:txBody>
-          <a:bodyPr wrap="square" lIns="0" rIns="0" tIns="0" bIns="0" anchor="t">
-            <a:spAutoFit/>
-          </a:bodyPr>
-          <a:lstStyle/>
-          <a:p>
-            <a:pPr algn="ctr">
-              <a:lnSpc>
-                <a:spcPct val="130000"/>
-              </a:lnSpc>
-            </a:pPr>
-            <a:r>
-              <a:rPr sz="1200" b="0" i="1">
-                <a:solidFill>
-                  <a:srgbClr val="21295C"/>
-                </a:solidFill>
-                <a:latin typeface="Arial"/>
-              </a:rPr>
-              <a:t>Детерминированный
-выбор — яблоко.
-10 запусков → одинаково.</a:t>
-            </a:r>
-          </a:p>
-        </p:txBody>
-      </p:sp>
-      <p:sp>
-        <p:nvSpPr>
-          <p:cNvPr id="8" name="Rounded Rectangle 7"/>
-          <p:cNvSpPr/>
-          <p:nvPr/>
-        </p:nvSpPr>
-        <p:spPr>
-          <a:xfrm>
-            <a:off x="4343399" y="1783080"/>
-            <a:ext cx="3749039" cy="3474720"/>
-          </a:xfrm>
-          <a:prstGeom prst="roundRect">
-            <a:avLst>
-              <a:gd name="adj" fmla="val 8771"/>
+              <a:gd name="adj" fmla="val 8130"/>
             </a:avLst>
           </a:prstGeom>
           <a:solidFill>
@@ -13781,14 +13643,166 @@
       </p:sp>
       <p:sp>
         <p:nvSpPr>
+          <p:cNvPr id="5" name="TextBox 4"/>
+          <p:cNvSpPr txBox="1"/>
+          <p:nvPr/>
+        </p:nvSpPr>
+        <p:spPr>
+          <a:xfrm>
+            <a:off x="685800" y="1965960"/>
+            <a:ext cx="3383279" cy="411480"/>
+          </a:xfrm>
+          <a:prstGeom prst="rect">
+            <a:avLst/>
+          </a:prstGeom>
+          <a:noFill/>
+        </p:spPr>
+        <p:txBody>
+          <a:bodyPr wrap="square" lIns="0" rIns="0" tIns="0" bIns="0" anchor="t">
+            <a:spAutoFit/>
+          </a:bodyPr>
+          <a:lstStyle/>
+          <a:p>
+            <a:pPr algn="ctr">
+              <a:lnSpc>
+                <a:spcPct val="115000"/>
+              </a:lnSpc>
+            </a:pPr>
+            <a:r>
+              <a:rPr sz="1800" b="1" i="0">
+                <a:solidFill>
+                  <a:srgbClr val="F0AB00"/>
+                </a:solidFill>
+                <a:latin typeface="Arial"/>
+              </a:rPr>
+              <a:t>T = 0  ·  argmax</a:t>
+            </a:r>
+          </a:p>
+        </p:txBody>
+      </p:sp>
+      <p:pic>
+        <p:nvPicPr>
+          <p:cNvPr id="6" name="Picture 5" descr="s19-T0.png"/>
+          <p:cNvPicPr>
+            <a:picLocks noChangeAspect="1"/>
+          </p:cNvPicPr>
+          <p:nvPr/>
+        </p:nvPicPr>
+        <p:blipFill>
+          <a:blip r:embed="rId2"/>
+          <a:stretch>
+            <a:fillRect/>
+          </a:stretch>
+        </p:blipFill>
+        <p:spPr>
+          <a:xfrm>
+            <a:off x="777240" y="2468880"/>
+            <a:ext cx="3200399" cy="2103120"/>
+          </a:xfrm>
+          <a:prstGeom prst="rect">
+            <a:avLst/>
+          </a:prstGeom>
+        </p:spPr>
+      </p:pic>
+      <p:sp>
+        <p:nvSpPr>
+          <p:cNvPr id="7" name="TextBox 6"/>
+          <p:cNvSpPr txBox="1"/>
+          <p:nvPr/>
+        </p:nvSpPr>
+        <p:spPr>
+          <a:xfrm>
+            <a:off x="685800" y="4663440"/>
+            <a:ext cx="3383279" cy="1280160"/>
+          </a:xfrm>
+          <a:prstGeom prst="rect">
+            <a:avLst/>
+          </a:prstGeom>
+          <a:noFill/>
+        </p:spPr>
+        <p:txBody>
+          <a:bodyPr wrap="square" lIns="0" rIns="0" tIns="0" bIns="0" anchor="t">
+            <a:spAutoFit/>
+          </a:bodyPr>
+          <a:lstStyle/>
+          <a:p>
+            <a:pPr algn="ctr">
+              <a:lnSpc>
+                <a:spcPct val="130000"/>
+              </a:lnSpc>
+            </a:pPr>
+            <a:r>
+              <a:rPr sz="1400" b="0" i="1">
+                <a:solidFill>
+                  <a:srgbClr val="21295C"/>
+                </a:solidFill>
+                <a:latin typeface="Arial"/>
+              </a:rPr>
+              <a:t>Детерминированный
+выбор — яблоко.
+10 запусков → одинаково.</a:t>
+            </a:r>
+          </a:p>
+        </p:txBody>
+      </p:sp>
+      <p:sp>
+        <p:nvSpPr>
+          <p:cNvPr id="8" name="Rounded Rectangle 7"/>
+          <p:cNvSpPr/>
+          <p:nvPr/>
+        </p:nvSpPr>
+        <p:spPr>
+          <a:xfrm>
+            <a:off x="4343399" y="1828800"/>
+            <a:ext cx="3749039" cy="4160520"/>
+          </a:xfrm>
+          <a:prstGeom prst="roundRect">
+            <a:avLst>
+              <a:gd name="adj" fmla="val 8130"/>
+            </a:avLst>
+          </a:prstGeom>
+          <a:solidFill>
+            <a:srgbClr val="FEF5E0"/>
+          </a:solidFill>
+          <a:ln w="31750">
+            <a:solidFill>
+              <a:srgbClr val="F0AB00"/>
+            </a:solidFill>
+          </a:ln>
+          <a:effectLst/>
+        </p:spPr>
+        <p:style>
+          <a:lnRef idx="1">
+            <a:schemeClr val="accent1"/>
+          </a:lnRef>
+          <a:fillRef idx="3">
+            <a:schemeClr val="accent1"/>
+          </a:fillRef>
+          <a:effectRef idx="2">
+            <a:schemeClr val="accent1"/>
+          </a:effectRef>
+          <a:fontRef idx="minor">
+            <a:schemeClr val="lt1"/>
+          </a:fontRef>
+        </p:style>
+        <p:txBody>
+          <a:bodyPr rtlCol="0" anchor="ctr"/>
+          <a:lstStyle/>
+          <a:p>
+            <a:pPr algn="ctr"/>
+          </a:p>
+        </p:txBody>
+      </p:sp>
+      <p:sp>
+        <p:nvSpPr>
           <p:cNvPr id="9" name="TextBox 8"/>
           <p:cNvSpPr txBox="1"/>
           <p:nvPr/>
         </p:nvSpPr>
         <p:spPr>
           <a:xfrm>
-            <a:off x="4526279" y="1892807"/>
-            <a:ext cx="3383279" cy="365760"/>
+            <a:off x="4526279" y="1965960"/>
+            <a:ext cx="3383279" cy="411480"/>
           </a:xfrm>
           <a:prstGeom prst="rect">
             <a:avLst/>
@@ -13807,13 +13821,13 @@
               </a:lnSpc>
             </a:pPr>
             <a:r>
-              <a:rPr sz="1600" b="1" i="0">
+              <a:rPr sz="1800" b="1" i="0">
                 <a:solidFill>
                   <a:srgbClr val="065A82"/>
                 </a:solidFill>
                 <a:latin typeface="Arial"/>
               </a:rPr>
-              <a:t>T = 0.7  ·  стандарт</a:t>
+              <a:t>T = 1.0  ·  стандарт</a:t>
             </a:r>
           </a:p>
         </p:txBody>
@@ -13834,8 +13848,8 @@
         </p:blipFill>
         <p:spPr>
           <a:xfrm>
-            <a:off x="4617719" y="2331720"/>
-            <a:ext cx="3200399" cy="1920240"/>
+            <a:off x="4617719" y="2468880"/>
+            <a:ext cx="3200399" cy="2103120"/>
           </a:xfrm>
           <a:prstGeom prst="rect">
             <a:avLst/>
@@ -13850,8 +13864,8 @@
         </p:nvSpPr>
         <p:spPr>
           <a:xfrm>
-            <a:off x="4526279" y="4389120"/>
-            <a:ext cx="3383279" cy="868680"/>
+            <a:off x="4526279" y="4663440"/>
+            <a:ext cx="3383279" cy="1280160"/>
           </a:xfrm>
           <a:prstGeom prst="rect">
             <a:avLst/>
@@ -13870,7 +13884,7 @@
               </a:lnSpc>
             </a:pPr>
             <a:r>
-              <a:rPr sz="1200" b="0" i="1">
+              <a:rPr sz="1400" b="0" i="1">
                 <a:solidFill>
                   <a:srgbClr val="21295C"/>
                 </a:solidFill>
@@ -13878,7 +13892,8 @@
               </a:rPr>
               <a:t>Сэмплирование
 пропорционально P.
-Естественная вариативность.</a:t>
+Естественная вариативность.
+(T = 0.7 — consensus для чата)</a:t>
             </a:r>
           </a:p>
         </p:txBody>
@@ -13891,12 +13906,12 @@
         </p:nvSpPr>
         <p:spPr>
           <a:xfrm>
-            <a:off x="8183879" y="1783080"/>
-            <a:ext cx="3749039" cy="3474720"/>
+            <a:off x="8183879" y="1828800"/>
+            <a:ext cx="3749039" cy="4160520"/>
           </a:xfrm>
           <a:prstGeom prst="roundRect">
             <a:avLst>
-              <a:gd name="adj" fmla="val 8771"/>
+              <a:gd name="adj" fmla="val 8130"/>
             </a:avLst>
           </a:prstGeom>
           <a:solidFill>
@@ -13939,8 +13954,8 @@
         </p:nvSpPr>
         <p:spPr>
           <a:xfrm>
-            <a:off x="8366759" y="1892807"/>
-            <a:ext cx="3383279" cy="365760"/>
+            <a:off x="8366759" y="1965960"/>
+            <a:ext cx="3383279" cy="411480"/>
           </a:xfrm>
           <a:prstGeom prst="rect">
             <a:avLst/>
@@ -13959,7 +13974,7 @@
               </a:lnSpc>
             </a:pPr>
             <a:r>
-              <a:rPr sz="1600" b="1" i="0">
+              <a:rPr sz="1800" b="1" i="0">
                 <a:solidFill>
                   <a:srgbClr val="028090"/>
                 </a:solidFill>
@@ -13986,8 +14001,8 @@
         </p:blipFill>
         <p:spPr>
           <a:xfrm>
-            <a:off x="8458200" y="2331720"/>
-            <a:ext cx="3200399" cy="1920240"/>
+            <a:off x="8458200" y="2468880"/>
+            <a:ext cx="3200399" cy="2103120"/>
           </a:xfrm>
           <a:prstGeom prst="rect">
             <a:avLst/>
@@ -14002,8 +14017,8 @@
         </p:nvSpPr>
         <p:spPr>
           <a:xfrm>
-            <a:off x="8366759" y="4389120"/>
-            <a:ext cx="3383279" cy="868680"/>
+            <a:off x="8366759" y="4663440"/>
+            <a:ext cx="3383279" cy="1280160"/>
           </a:xfrm>
           <a:prstGeom prst="rect">
             <a:avLst/>
@@ -14022,7 +14037,7 @@
               </a:lnSpc>
             </a:pPr>
             <a:r>
-              <a:rPr sz="1200" b="0" i="1">
+              <a:rPr sz="1400" b="0" i="1">
                 <a:solidFill>
                   <a:srgbClr val="21295C"/>
                 </a:solidFill>
@@ -14043,8 +14058,8 @@
         </p:nvSpPr>
         <p:spPr>
           <a:xfrm>
-            <a:off x="502920" y="5440680"/>
-            <a:ext cx="11247120" cy="640080"/>
+            <a:off x="502920" y="6172200"/>
+            <a:ext cx="11247120" cy="594360"/>
           </a:xfrm>
           <a:prstGeom prst="roundRect">
             <a:avLst>
@@ -14091,8 +14106,8 @@
         </p:nvSpPr>
         <p:spPr>
           <a:xfrm>
-            <a:off x="667512" y="5513832"/>
-            <a:ext cx="10917936" cy="493775"/>
+            <a:off x="667512" y="6245352"/>
+            <a:ext cx="10917936" cy="448056"/>
           </a:xfrm>
           <a:prstGeom prst="rect">
             <a:avLst/>
@@ -14111,100 +14126,13 @@
               </a:lnSpc>
             </a:pPr>
             <a:r>
-              <a:rPr sz="1400" b="0" i="0">
+              <a:rPr sz="1500" b="0" i="0">
                 <a:solidFill>
                   <a:srgbClr val="21295C"/>
                 </a:solidFill>
                 <a:latin typeface="Arial"/>
               </a:rPr>
-              <a:t>Альтернативные ручки: top-p (nucleus) отрезает редкие токены по Σ; top-k — по числу кандидатов. Достаточно T для start, top-p/k — для тонкой настройки.</a:t>
-            </a:r>
-          </a:p>
-        </p:txBody>
-      </p:sp>
-      <p:sp>
-        <p:nvSpPr>
-          <p:cNvPr id="18" name="Rounded Rectangle 17"/>
-          <p:cNvSpPr/>
-          <p:nvPr/>
-        </p:nvSpPr>
-        <p:spPr>
-          <a:xfrm>
-            <a:off x="502920" y="6217920"/>
-            <a:ext cx="11247120" cy="411480"/>
-          </a:xfrm>
-          <a:prstGeom prst="roundRect">
-            <a:avLst>
-              <a:gd name="adj" fmla="val 12000"/>
-            </a:avLst>
-          </a:prstGeom>
-          <a:solidFill>
-            <a:srgbClr val="FEF5E0"/>
-          </a:solidFill>
-          <a:ln w="15240">
-            <a:solidFill>
-              <a:srgbClr val="F0AB00"/>
-            </a:solidFill>
-          </a:ln>
-          <a:effectLst/>
-        </p:spPr>
-        <p:style>
-          <a:lnRef idx="1">
-            <a:schemeClr val="accent1"/>
-          </a:lnRef>
-          <a:fillRef idx="3">
-            <a:schemeClr val="accent1"/>
-          </a:fillRef>
-          <a:effectRef idx="2">
-            <a:schemeClr val="accent1"/>
-          </a:effectRef>
-          <a:fontRef idx="minor">
-            <a:schemeClr val="lt1"/>
-          </a:fontRef>
-        </p:style>
-        <p:txBody>
-          <a:bodyPr rtlCol="0" anchor="ctr"/>
-          <a:lstStyle/>
-          <a:p>
-            <a:pPr algn="ctr"/>
-          </a:p>
-        </p:txBody>
-      </p:sp>
-      <p:sp>
-        <p:nvSpPr>
-          <p:cNvPr id="19" name="TextBox 18"/>
-          <p:cNvSpPr txBox="1"/>
-          <p:nvPr/>
-        </p:nvSpPr>
-        <p:spPr>
-          <a:xfrm>
-            <a:off x="685800" y="6291072"/>
-            <a:ext cx="10881360" cy="265176"/>
-          </a:xfrm>
-          <a:prstGeom prst="rect">
-            <a:avLst/>
-          </a:prstGeom>
-          <a:noFill/>
-        </p:spPr>
-        <p:txBody>
-          <a:bodyPr wrap="square" lIns="0" rIns="0" tIns="0" bIns="0" anchor="ctr">
-            <a:spAutoFit/>
-          </a:bodyPr>
-          <a:lstStyle/>
-          <a:p>
-            <a:pPr algn="l">
-              <a:lnSpc>
-                <a:spcPct val="125000"/>
-              </a:lnSpc>
-            </a:pPr>
-            <a:r>
-              <a:rPr sz="1300" b="1" i="0">
-                <a:solidFill>
-                  <a:srgbClr val="21295C"/>
-                </a:solidFill>
-                <a:latin typeface="Arial"/>
-              </a:rPr>
-              <a:t>3-е из 3 «почему» Лекции 1 §5.3: стохастический сэмплинг при T&gt;0 даёт разные ответы</a:t>
+              <a:t>Альтернативные ручки: top-p (nucleus) — отрезает редкие токены по Σ; top-k — по числу кандидатов. Достаточно T для start.</a:t>
             </a:r>
           </a:p>
         </p:txBody>
@@ -17897,8 +17825,8 @@
         </p:nvSpPr>
         <p:spPr>
           <a:xfrm>
-            <a:off x="594360" y="2331720"/>
-            <a:ext cx="1956816" cy="868680"/>
+            <a:off x="594360" y="2377440"/>
+            <a:ext cx="1956816" cy="960120"/>
           </a:xfrm>
           <a:prstGeom prst="rect">
             <a:avLst/>
@@ -17917,7 +17845,7 @@
               </a:lnSpc>
             </a:pPr>
             <a:r>
-              <a:rPr sz="1500" b="1" i="0">
+              <a:rPr sz="1700" b="1" i="0">
                 <a:solidFill>
                   <a:srgbClr val="21295C"/>
                 </a:solidFill>
@@ -17937,7 +17865,7 @@
         </p:nvSpPr>
         <p:spPr>
           <a:xfrm>
-            <a:off x="594360" y="3291839"/>
+            <a:off x="594360" y="3383280"/>
             <a:ext cx="1956816" cy="1188720"/>
           </a:xfrm>
           <a:prstGeom prst="rect">
@@ -17957,7 +17885,7 @@
               </a:lnSpc>
             </a:pPr>
             <a:r>
-              <a:rPr sz="1200" b="0" i="1">
+              <a:rPr sz="1400" b="0" i="1">
                 <a:solidFill>
                   <a:srgbClr val="21295C"/>
                 </a:solidFill>
@@ -18070,8 +17998,8 @@
         </p:nvSpPr>
         <p:spPr>
           <a:xfrm>
-            <a:off x="2871216" y="2331720"/>
-            <a:ext cx="1956816" cy="868680"/>
+            <a:off x="2871216" y="2377440"/>
+            <a:ext cx="1956816" cy="960120"/>
           </a:xfrm>
           <a:prstGeom prst="rect">
             <a:avLst/>
@@ -18090,7 +18018,7 @@
               </a:lnSpc>
             </a:pPr>
             <a:r>
-              <a:rPr sz="1500" b="1" i="0">
+              <a:rPr sz="1700" b="1" i="0">
                 <a:solidFill>
                   <a:srgbClr val="21295C"/>
                 </a:solidFill>
@@ -18109,7 +18037,7 @@
         </p:nvSpPr>
         <p:spPr>
           <a:xfrm>
-            <a:off x="2871216" y="3291839"/>
+            <a:off x="2871216" y="3383280"/>
             <a:ext cx="1956816" cy="1188720"/>
           </a:xfrm>
           <a:prstGeom prst="rect">
@@ -18129,7 +18057,7 @@
               </a:lnSpc>
             </a:pPr>
             <a:r>
-              <a:rPr sz="1200" b="0" i="1">
+              <a:rPr sz="1400" b="0" i="1">
                 <a:solidFill>
                   <a:srgbClr val="21295C"/>
                 </a:solidFill>
@@ -18242,8 +18170,8 @@
         </p:nvSpPr>
         <p:spPr>
           <a:xfrm>
-            <a:off x="5148072" y="2331720"/>
-            <a:ext cx="1956816" cy="868680"/>
+            <a:off x="5148072" y="2377440"/>
+            <a:ext cx="1956816" cy="960120"/>
           </a:xfrm>
           <a:prstGeom prst="rect">
             <a:avLst/>
@@ -18262,7 +18190,7 @@
               </a:lnSpc>
             </a:pPr>
             <a:r>
-              <a:rPr sz="1500" b="1" i="0">
+              <a:rPr sz="1700" b="1" i="0">
                 <a:solidFill>
                   <a:srgbClr val="21295C"/>
                 </a:solidFill>
@@ -18281,7 +18209,7 @@
         </p:nvSpPr>
         <p:spPr>
           <a:xfrm>
-            <a:off x="5148072" y="3291839"/>
+            <a:off x="5148072" y="3383280"/>
             <a:ext cx="1956816" cy="1188720"/>
           </a:xfrm>
           <a:prstGeom prst="rect">
@@ -18301,7 +18229,7 @@
               </a:lnSpc>
             </a:pPr>
             <a:r>
-              <a:rPr sz="1200" b="0" i="1">
+              <a:rPr sz="1400" b="0" i="1">
                 <a:solidFill>
                   <a:srgbClr val="21295C"/>
                 </a:solidFill>
@@ -18414,8 +18342,8 @@
         </p:nvSpPr>
         <p:spPr>
           <a:xfrm>
-            <a:off x="7424928" y="2331720"/>
-            <a:ext cx="1956816" cy="868680"/>
+            <a:off x="7424928" y="2377440"/>
+            <a:ext cx="1956816" cy="960120"/>
           </a:xfrm>
           <a:prstGeom prst="rect">
             <a:avLst/>
@@ -18434,7 +18362,7 @@
               </a:lnSpc>
             </a:pPr>
             <a:r>
-              <a:rPr sz="1500" b="1" i="0">
+              <a:rPr sz="1700" b="1" i="0">
                 <a:solidFill>
                   <a:srgbClr val="21295C"/>
                 </a:solidFill>
@@ -18453,7 +18381,7 @@
         </p:nvSpPr>
         <p:spPr>
           <a:xfrm>
-            <a:off x="7424928" y="3291839"/>
+            <a:off x="7424928" y="3383280"/>
             <a:ext cx="1956816" cy="1188720"/>
           </a:xfrm>
           <a:prstGeom prst="rect">
@@ -18473,7 +18401,7 @@
               </a:lnSpc>
             </a:pPr>
             <a:r>
-              <a:rPr sz="1200" b="0" i="1">
+              <a:rPr sz="1400" b="0" i="1">
                 <a:solidFill>
                   <a:srgbClr val="21295C"/>
                 </a:solidFill>
@@ -18586,8 +18514,8 @@
         </p:nvSpPr>
         <p:spPr>
           <a:xfrm>
-            <a:off x="9701784" y="2331720"/>
-            <a:ext cx="1956816" cy="868680"/>
+            <a:off x="9701784" y="2377440"/>
+            <a:ext cx="1956816" cy="960120"/>
           </a:xfrm>
           <a:prstGeom prst="rect">
             <a:avLst/>
@@ -18606,7 +18534,7 @@
               </a:lnSpc>
             </a:pPr>
             <a:r>
-              <a:rPr sz="1500" b="1" i="0">
+              <a:rPr sz="1700" b="1" i="0">
                 <a:solidFill>
                   <a:srgbClr val="21295C"/>
                 </a:solidFill>
@@ -18626,7 +18554,7 @@
         </p:nvSpPr>
         <p:spPr>
           <a:xfrm>
-            <a:off x="9701784" y="3291839"/>
+            <a:off x="9701784" y="3383280"/>
             <a:ext cx="1956816" cy="1188720"/>
           </a:xfrm>
           <a:prstGeom prst="rect">
@@ -18646,7 +18574,7 @@
               </a:lnSpc>
             </a:pPr>
             <a:r>
-              <a:rPr sz="1200" b="0" i="1">
+              <a:rPr sz="1400" b="0" i="1">
                 <a:solidFill>
                   <a:srgbClr val="21295C"/>
                 </a:solidFill>
@@ -18667,7 +18595,7 @@
         <p:spPr>
           <a:xfrm>
             <a:off x="914400" y="4846320"/>
-            <a:ext cx="10424160" cy="457200"/>
+            <a:ext cx="10424160" cy="548640"/>
           </a:xfrm>
           <a:prstGeom prst="roundRect">
             <a:avLst>
@@ -18714,8 +18642,8 @@
         </p:nvSpPr>
         <p:spPr>
           <a:xfrm>
-            <a:off x="914400" y="4892040"/>
-            <a:ext cx="10424160" cy="365760"/>
+            <a:off x="914400" y="4937759"/>
+            <a:ext cx="10424160" cy="411480"/>
           </a:xfrm>
           <a:prstGeom prst="rect">
             <a:avLst/>
@@ -18734,7 +18662,7 @@
               </a:lnSpc>
             </a:pPr>
             <a:r>
-              <a:rPr sz="1400" b="1" i="1">
+              <a:rPr sz="1600" b="1" i="1">
                 <a:solidFill>
                   <a:srgbClr val="065A82"/>
                 </a:solidFill>
@@ -18753,7 +18681,7 @@
         </p:nvSpPr>
         <p:spPr>
           <a:xfrm>
-            <a:off x="502920" y="6035040"/>
+            <a:off x="502920" y="6080760"/>
             <a:ext cx="11247120" cy="502920"/>
           </a:xfrm>
           <a:prstGeom prst="rect">
@@ -18773,13 +18701,13 @@
               </a:lnSpc>
             </a:pPr>
             <a:r>
-              <a:rPr sz="1200" b="0" i="1">
-                <a:solidFill>
-                  <a:srgbClr val="1C7293"/>
-                </a:solidFill>
-                <a:latin typeface="Arial"/>
-              </a:rPr>
-              <a:t>Каждый шаг — stateless (callback Lec-1 §3.2). «Память» одного ответа несёт сам контекст, не модель.</a:t>
+              <a:rPr sz="1400" b="0" i="1">
+                <a:solidFill>
+                  <a:srgbClr val="21295C"/>
+                </a:solidFill>
+                <a:latin typeface="Arial"/>
+              </a:rPr>
+              <a:t>Каждый шаг — stateless. «Память» одного ответа несёт сам контекст, не модель.</a:t>
             </a:r>
           </a:p>
         </p:txBody>
@@ -18869,13 +18797,13 @@
               </a:lnSpc>
             </a:pPr>
             <a:r>
-              <a:rPr sz="1500" b="0" i="1">
+              <a:rPr sz="1600" b="0" i="1">
                 <a:solidFill>
                   <a:srgbClr val="065A82"/>
                 </a:solidFill>
                 <a:latin typeface="Arial"/>
               </a:rPr>
-              <a:t>Архитектурно — тот же конвейер s05-s17. Различия — в размере и среде.</a:t>
+              <a:t>Архитектурно — тот же конвейер. Различия — в размере и среде.</a:t>
             </a:r>
           </a:p>
         </p:txBody>
@@ -18956,7 +18884,7 @@
               </a:lnSpc>
             </a:pPr>
             <a:r>
-              <a:rPr sz="1700" b="1" i="0">
+              <a:rPr sz="1800" b="1" i="0">
                 <a:solidFill>
                   <a:srgbClr val="065A82"/>
                 </a:solidFill>
@@ -18975,7 +18903,7 @@
         </p:nvSpPr>
         <p:spPr>
           <a:xfrm>
-            <a:off x="777240" y="2514600"/>
+            <a:off x="777240" y="2560320"/>
             <a:ext cx="4937760" cy="411480"/>
           </a:xfrm>
           <a:prstGeom prst="rect">
@@ -18995,7 +18923,7 @@
               </a:lnSpc>
             </a:pPr>
             <a:r>
-              <a:rPr sz="1400" b="1" i="0">
+              <a:rPr sz="1500" b="1" i="0">
                 <a:solidFill>
                   <a:srgbClr val="21295C"/>
                 </a:solidFill>
@@ -19014,7 +18942,7 @@
         </p:nvSpPr>
         <p:spPr>
           <a:xfrm>
-            <a:off x="777240" y="2926080"/>
+            <a:off x="777240" y="2971800"/>
             <a:ext cx="4937760" cy="914400"/>
           </a:xfrm>
           <a:prstGeom prst="rect">
@@ -19034,7 +18962,7 @@
               </a:lnSpc>
             </a:pPr>
             <a:r>
-              <a:rPr sz="1300" b="0" i="0">
+              <a:rPr sz="1400" b="0" i="0">
                 <a:solidFill>
                   <a:srgbClr val="21295C"/>
                 </a:solidFill>
@@ -19054,8 +18982,8 @@
         </p:nvSpPr>
         <p:spPr>
           <a:xfrm>
-            <a:off x="777240" y="4133088"/>
-            <a:ext cx="164592" cy="164592"/>
+            <a:off x="777240" y="4242816"/>
+            <a:ext cx="182880" cy="182880"/>
           </a:xfrm>
           <a:prstGeom prst="roundRect">
             <a:avLst>
@@ -19100,7 +19028,7 @@
         </p:nvSpPr>
         <p:spPr>
           <a:xfrm>
-            <a:off x="1051560" y="4023360"/>
+            <a:off x="1069848" y="4114800"/>
             <a:ext cx="1920239" cy="365760"/>
           </a:xfrm>
           <a:prstGeom prst="rect">
@@ -19120,7 +19048,7 @@
               </a:lnSpc>
             </a:pPr>
             <a:r>
-              <a:rPr sz="1300" b="1" i="0">
+              <a:rPr sz="1400" b="1" i="0">
                 <a:solidFill>
                   <a:srgbClr val="21295C"/>
                 </a:solidFill>
@@ -19139,7 +19067,7 @@
         </p:nvSpPr>
         <p:spPr>
           <a:xfrm>
-            <a:off x="2971800" y="4023360"/>
+            <a:off x="2971800" y="4114800"/>
             <a:ext cx="3017520" cy="365760"/>
           </a:xfrm>
           <a:prstGeom prst="rect">
@@ -19159,7 +19087,7 @@
               </a:lnSpc>
             </a:pPr>
             <a:r>
-              <a:rPr sz="1200" b="0" i="1">
+              <a:rPr sz="1300" b="0" i="1">
                 <a:solidFill>
                   <a:srgbClr val="21295C"/>
                 </a:solidFill>
@@ -19178,8 +19106,8 @@
         </p:nvSpPr>
         <p:spPr>
           <a:xfrm>
-            <a:off x="777240" y="4590288"/>
-            <a:ext cx="164592" cy="164592"/>
+            <a:off x="777240" y="4700016"/>
+            <a:ext cx="182880" cy="182880"/>
           </a:xfrm>
           <a:prstGeom prst="roundRect">
             <a:avLst>
@@ -19224,7 +19152,7 @@
         </p:nvSpPr>
         <p:spPr>
           <a:xfrm>
-            <a:off x="1051560" y="4480560"/>
+            <a:off x="1069848" y="4572000"/>
             <a:ext cx="1920239" cy="365760"/>
           </a:xfrm>
           <a:prstGeom prst="rect">
@@ -19244,7 +19172,7 @@
               </a:lnSpc>
             </a:pPr>
             <a:r>
-              <a:rPr sz="1300" b="1" i="0">
+              <a:rPr sz="1400" b="1" i="0">
                 <a:solidFill>
                   <a:srgbClr val="21295C"/>
                 </a:solidFill>
@@ -19263,7 +19191,7 @@
         </p:nvSpPr>
         <p:spPr>
           <a:xfrm>
-            <a:off x="2971800" y="4480560"/>
+            <a:off x="2971800" y="4572000"/>
             <a:ext cx="3017520" cy="365760"/>
           </a:xfrm>
           <a:prstGeom prst="rect">
@@ -19283,7 +19211,7 @@
               </a:lnSpc>
             </a:pPr>
             <a:r>
-              <a:rPr sz="1200" b="0" i="1">
+              <a:rPr sz="1300" b="0" i="1">
                 <a:solidFill>
                   <a:srgbClr val="21295C"/>
                 </a:solidFill>
@@ -19302,8 +19230,8 @@
         </p:nvSpPr>
         <p:spPr>
           <a:xfrm>
-            <a:off x="777240" y="5047488"/>
-            <a:ext cx="164592" cy="164592"/>
+            <a:off x="777240" y="5157216"/>
+            <a:ext cx="182880" cy="182880"/>
           </a:xfrm>
           <a:prstGeom prst="roundRect">
             <a:avLst>
@@ -19348,7 +19276,7 @@
         </p:nvSpPr>
         <p:spPr>
           <a:xfrm>
-            <a:off x="1051560" y="4937760"/>
+            <a:off x="1069848" y="5029200"/>
             <a:ext cx="1920239" cy="365760"/>
           </a:xfrm>
           <a:prstGeom prst="rect">
@@ -19368,7 +19296,7 @@
               </a:lnSpc>
             </a:pPr>
             <a:r>
-              <a:rPr sz="1300" b="1" i="0">
+              <a:rPr sz="1400" b="1" i="0">
                 <a:solidFill>
                   <a:srgbClr val="21295C"/>
                 </a:solidFill>
@@ -19387,7 +19315,7 @@
         </p:nvSpPr>
         <p:spPr>
           <a:xfrm>
-            <a:off x="2971800" y="4937760"/>
+            <a:off x="2971800" y="5029200"/>
             <a:ext cx="3017520" cy="365760"/>
           </a:xfrm>
           <a:prstGeom prst="rect">
@@ -19407,7 +19335,7 @@
               </a:lnSpc>
             </a:pPr>
             <a:r>
-              <a:rPr sz="1200" b="0" i="1">
+              <a:rPr sz="1300" b="0" i="1">
                 <a:solidFill>
                   <a:srgbClr val="21295C"/>
                 </a:solidFill>
@@ -19426,8 +19354,8 @@
         </p:nvSpPr>
         <p:spPr>
           <a:xfrm>
-            <a:off x="777240" y="5504688"/>
-            <a:ext cx="164592" cy="164592"/>
+            <a:off x="777240" y="5614416"/>
+            <a:ext cx="182880" cy="182880"/>
           </a:xfrm>
           <a:prstGeom prst="roundRect">
             <a:avLst>
@@ -19472,7 +19400,7 @@
         </p:nvSpPr>
         <p:spPr>
           <a:xfrm>
-            <a:off x="1051560" y="5394960"/>
+            <a:off x="1069848" y="5486400"/>
             <a:ext cx="1920239" cy="365760"/>
           </a:xfrm>
           <a:prstGeom prst="rect">
@@ -19492,7 +19420,7 @@
               </a:lnSpc>
             </a:pPr>
             <a:r>
-              <a:rPr sz="1300" b="1" i="0">
+              <a:rPr sz="1400" b="1" i="0">
                 <a:solidFill>
                   <a:srgbClr val="21295C"/>
                 </a:solidFill>
@@ -19511,7 +19439,7 @@
         </p:nvSpPr>
         <p:spPr>
           <a:xfrm>
-            <a:off x="2971800" y="5394960"/>
+            <a:off x="2971800" y="5486400"/>
             <a:ext cx="3017520" cy="365760"/>
           </a:xfrm>
           <a:prstGeom prst="rect">
@@ -19531,7 +19459,7 @@
               </a:lnSpc>
             </a:pPr>
             <a:r>
-              <a:rPr sz="1200" b="0" i="1">
+              <a:rPr sz="1300" b="0" i="1">
                 <a:solidFill>
                   <a:srgbClr val="21295C"/>
                 </a:solidFill>
@@ -19618,7 +19546,7 @@
               </a:lnSpc>
             </a:pPr>
             <a:r>
-              <a:rPr sz="1700" b="1" i="0">
+              <a:rPr sz="1800" b="1" i="0">
                 <a:solidFill>
                   <a:srgbClr val="065A82"/>
                 </a:solidFill>
@@ -19637,7 +19565,7 @@
         </p:nvSpPr>
         <p:spPr>
           <a:xfrm>
-            <a:off x="6537959" y="2514600"/>
+            <a:off x="6537959" y="2560320"/>
             <a:ext cx="4937760" cy="411480"/>
           </a:xfrm>
           <a:prstGeom prst="rect">
@@ -19657,7 +19585,7 @@
               </a:lnSpc>
             </a:pPr>
             <a:r>
-              <a:rPr sz="1400" b="1" i="0">
+              <a:rPr sz="1500" b="1" i="0">
                 <a:solidFill>
                   <a:srgbClr val="21295C"/>
                 </a:solidFill>
@@ -19676,7 +19604,7 @@
         </p:nvSpPr>
         <p:spPr>
           <a:xfrm>
-            <a:off x="6537959" y="2926080"/>
+            <a:off x="6537959" y="2971800"/>
             <a:ext cx="4937760" cy="914400"/>
           </a:xfrm>
           <a:prstGeom prst="rect">
@@ -19696,7 +19624,7 @@
               </a:lnSpc>
             </a:pPr>
             <a:r>
-              <a:rPr sz="1300" b="0" i="0">
+              <a:rPr sz="1400" b="0" i="0">
                 <a:solidFill>
                   <a:srgbClr val="21295C"/>
                 </a:solidFill>
@@ -19717,8 +19645,8 @@
         </p:nvSpPr>
         <p:spPr>
           <a:xfrm>
-            <a:off x="6537959" y="4133088"/>
-            <a:ext cx="164592" cy="164592"/>
+            <a:off x="6537959" y="4242816"/>
+            <a:ext cx="182880" cy="182880"/>
           </a:xfrm>
           <a:prstGeom prst="roundRect">
             <a:avLst>
@@ -19763,7 +19691,7 @@
         </p:nvSpPr>
         <p:spPr>
           <a:xfrm>
-            <a:off x="6812279" y="4023360"/>
+            <a:off x="6830568" y="4114800"/>
             <a:ext cx="1920239" cy="365760"/>
           </a:xfrm>
           <a:prstGeom prst="rect">
@@ -19783,7 +19711,7 @@
               </a:lnSpc>
             </a:pPr>
             <a:r>
-              <a:rPr sz="1300" b="1" i="0">
+              <a:rPr sz="1400" b="1" i="0">
                 <a:solidFill>
                   <a:srgbClr val="21295C"/>
                 </a:solidFill>
@@ -19802,7 +19730,7 @@
         </p:nvSpPr>
         <p:spPr>
           <a:xfrm>
-            <a:off x="8732520" y="4023360"/>
+            <a:off x="8732520" y="4114800"/>
             <a:ext cx="3017520" cy="365760"/>
           </a:xfrm>
           <a:prstGeom prst="rect">
@@ -19822,7 +19750,7 @@
               </a:lnSpc>
             </a:pPr>
             <a:r>
-              <a:rPr sz="1200" b="0" i="1">
+              <a:rPr sz="1300" b="0" i="1">
                 <a:solidFill>
                   <a:srgbClr val="21295C"/>
                 </a:solidFill>
@@ -19841,8 +19769,8 @@
         </p:nvSpPr>
         <p:spPr>
           <a:xfrm>
-            <a:off x="6537959" y="4590288"/>
-            <a:ext cx="164592" cy="164592"/>
+            <a:off x="6537959" y="4700016"/>
+            <a:ext cx="182880" cy="182880"/>
           </a:xfrm>
           <a:prstGeom prst="roundRect">
             <a:avLst>
@@ -19887,7 +19815,7 @@
         </p:nvSpPr>
         <p:spPr>
           <a:xfrm>
-            <a:off x="6812279" y="4480560"/>
+            <a:off x="6830568" y="4572000"/>
             <a:ext cx="1920239" cy="365760"/>
           </a:xfrm>
           <a:prstGeom prst="rect">
@@ -19907,7 +19835,7 @@
               </a:lnSpc>
             </a:pPr>
             <a:r>
-              <a:rPr sz="1300" b="1" i="0">
+              <a:rPr sz="1400" b="1" i="0">
                 <a:solidFill>
                   <a:srgbClr val="21295C"/>
                 </a:solidFill>
@@ -19926,7 +19854,7 @@
         </p:nvSpPr>
         <p:spPr>
           <a:xfrm>
-            <a:off x="8732520" y="4480560"/>
+            <a:off x="8732520" y="4572000"/>
             <a:ext cx="3017520" cy="365760"/>
           </a:xfrm>
           <a:prstGeom prst="rect">
@@ -19946,7 +19874,7 @@
               </a:lnSpc>
             </a:pPr>
             <a:r>
-              <a:rPr sz="1200" b="0" i="1">
+              <a:rPr sz="1300" b="0" i="1">
                 <a:solidFill>
                   <a:srgbClr val="21295C"/>
                 </a:solidFill>
@@ -19965,8 +19893,8 @@
         </p:nvSpPr>
         <p:spPr>
           <a:xfrm>
-            <a:off x="6537959" y="5047488"/>
-            <a:ext cx="164592" cy="164592"/>
+            <a:off x="6537959" y="5157216"/>
+            <a:ext cx="182880" cy="182880"/>
           </a:xfrm>
           <a:prstGeom prst="roundRect">
             <a:avLst>
@@ -20011,7 +19939,7 @@
         </p:nvSpPr>
         <p:spPr>
           <a:xfrm>
-            <a:off x="6812279" y="4937760"/>
+            <a:off x="6830568" y="5029200"/>
             <a:ext cx="1920239" cy="365760"/>
           </a:xfrm>
           <a:prstGeom prst="rect">
@@ -20031,7 +19959,7 @@
               </a:lnSpc>
             </a:pPr>
             <a:r>
-              <a:rPr sz="1300" b="1" i="0">
+              <a:rPr sz="1400" b="1" i="0">
                 <a:solidFill>
                   <a:srgbClr val="21295C"/>
                 </a:solidFill>
@@ -20050,7 +19978,7 @@
         </p:nvSpPr>
         <p:spPr>
           <a:xfrm>
-            <a:off x="8732520" y="4937760"/>
+            <a:off x="8732520" y="5029200"/>
             <a:ext cx="3017520" cy="365760"/>
           </a:xfrm>
           <a:prstGeom prst="rect">
@@ -20070,7 +19998,7 @@
               </a:lnSpc>
             </a:pPr>
             <a:r>
-              <a:rPr sz="1200" b="0" i="1">
+              <a:rPr sz="1300" b="0" i="1">
                 <a:solidFill>
                   <a:srgbClr val="21295C"/>
                 </a:solidFill>
@@ -20089,8 +20017,8 @@
         </p:nvSpPr>
         <p:spPr>
           <a:xfrm>
-            <a:off x="6537959" y="5504688"/>
-            <a:ext cx="164592" cy="164592"/>
+            <a:off x="6537959" y="5614416"/>
+            <a:ext cx="182880" cy="182880"/>
           </a:xfrm>
           <a:prstGeom prst="roundRect">
             <a:avLst>
@@ -20135,7 +20063,7 @@
         </p:nvSpPr>
         <p:spPr>
           <a:xfrm>
-            <a:off x="6812279" y="5394960"/>
+            <a:off x="6830568" y="5486400"/>
             <a:ext cx="1920239" cy="365760"/>
           </a:xfrm>
           <a:prstGeom prst="rect">
@@ -20155,7 +20083,7 @@
               </a:lnSpc>
             </a:pPr>
             <a:r>
-              <a:rPr sz="1300" b="1" i="0">
+              <a:rPr sz="1400" b="1" i="0">
                 <a:solidFill>
                   <a:srgbClr val="21295C"/>
                 </a:solidFill>
@@ -20174,7 +20102,7 @@
         </p:nvSpPr>
         <p:spPr>
           <a:xfrm>
-            <a:off x="8732520" y="5394960"/>
+            <a:off x="8732520" y="5486400"/>
             <a:ext cx="3017520" cy="365760"/>
           </a:xfrm>
           <a:prstGeom prst="rect">
@@ -20194,52 +20122,13 @@
               </a:lnSpc>
             </a:pPr>
             <a:r>
-              <a:rPr sz="1200" b="0" i="1">
+              <a:rPr sz="1300" b="0" i="1">
                 <a:solidFill>
                   <a:srgbClr val="21295C"/>
                 </a:solidFill>
                 <a:latin typeface="Arial"/>
               </a:rPr>
               <a:t>оплата за токены, RU ≈ 2× EN</a:t>
-            </a:r>
-          </a:p>
-        </p:txBody>
-      </p:sp>
-      <p:sp>
-        <p:nvSpPr>
-          <p:cNvPr id="36" name="TextBox 35"/>
-          <p:cNvSpPr txBox="1"/>
-          <p:nvPr/>
-        </p:nvSpPr>
-        <p:spPr>
-          <a:xfrm>
-            <a:off x="502920" y="6263640"/>
-            <a:ext cx="11247120" cy="365760"/>
-          </a:xfrm>
-          <a:prstGeom prst="rect">
-            <a:avLst/>
-          </a:prstGeom>
-          <a:noFill/>
-        </p:spPr>
-        <p:txBody>
-          <a:bodyPr wrap="square" lIns="0" rIns="0" tIns="0" bIns="0" anchor="t">
-            <a:spAutoFit/>
-          </a:bodyPr>
-          <a:lstStyle/>
-          <a:p>
-            <a:pPr algn="ctr">
-              <a:lnSpc>
-                <a:spcPct val="115000"/>
-              </a:lnSpc>
-            </a:pPr>
-            <a:r>
-              <a:rPr sz="1200" b="0" i="1">
-                <a:solidFill>
-                  <a:srgbClr val="1C7293"/>
-                </a:solidFill>
-                <a:latin typeface="Arial"/>
-              </a:rPr>
-              <a:t>Глубже про trade-off (приватность × качество × стоимость) — Лекция 1 §4.2 (без повтора).</a:t>
             </a:r>
           </a:p>
         </p:txBody>
@@ -20396,8 +20285,8 @@
         </p:nvSpPr>
         <p:spPr>
           <a:xfrm>
-            <a:off x="1428750" y="2514600"/>
-            <a:ext cx="640080" cy="640080"/>
+            <a:off x="1360170" y="2560320"/>
+            <a:ext cx="777240" cy="777240"/>
           </a:xfrm>
           <a:prstGeom prst="roundRect">
             <a:avLst>
@@ -20442,8 +20331,8 @@
         </p:nvSpPr>
         <p:spPr>
           <a:xfrm>
-            <a:off x="502920" y="2578608"/>
-            <a:ext cx="2491740" cy="502920"/>
+            <a:off x="502920" y="2624328"/>
+            <a:ext cx="2491740" cy="640080"/>
           </a:xfrm>
           <a:prstGeom prst="rect">
             <a:avLst/>
@@ -20462,7 +20351,7 @@
               </a:lnSpc>
             </a:pPr>
             <a:r>
-              <a:rPr sz="2400" b="1" i="0">
+              <a:rPr sz="2800" b="1" i="0">
                 <a:solidFill>
                   <a:srgbClr val="FFFFFF"/>
                 </a:solidFill>
@@ -20481,8 +20370,8 @@
         </p:nvSpPr>
         <p:spPr>
           <a:xfrm>
-            <a:off x="594360" y="3291840"/>
-            <a:ext cx="2308860" cy="457200"/>
+            <a:off x="594360" y="3474720"/>
+            <a:ext cx="2308860" cy="502920"/>
           </a:xfrm>
           <a:prstGeom prst="rect">
             <a:avLst/>
@@ -20501,7 +20390,7 @@
               </a:lnSpc>
             </a:pPr>
             <a:r>
-              <a:rPr sz="1800" b="1" i="0">
+              <a:rPr sz="2000" b="1" i="0">
                 <a:solidFill>
                   <a:srgbClr val="21295C"/>
                 </a:solidFill>
@@ -20520,8 +20409,8 @@
         </p:nvSpPr>
         <p:spPr>
           <a:xfrm>
-            <a:off x="594360" y="3840480"/>
-            <a:ext cx="2308860" cy="777240"/>
+            <a:off x="594360" y="4069080"/>
+            <a:ext cx="2308860" cy="914400"/>
           </a:xfrm>
           <a:prstGeom prst="rect">
             <a:avLst/>
@@ -20540,7 +20429,7 @@
               </a:lnSpc>
             </a:pPr>
             <a:r>
-              <a:rPr sz="1300" b="0" i="1">
+              <a:rPr sz="1500" b="0" i="1">
                 <a:solidFill>
                   <a:srgbClr val="21295C"/>
                 </a:solidFill>
@@ -20554,46 +20443,7 @@
       </p:sp>
       <p:sp>
         <p:nvSpPr>
-          <p:cNvPr id="9" name="TextBox 8"/>
-          <p:cNvSpPr txBox="1"/>
-          <p:nvPr/>
-        </p:nvSpPr>
-        <p:spPr>
-          <a:xfrm>
-            <a:off x="594360" y="4663440"/>
-            <a:ext cx="2308860" cy="320040"/>
-          </a:xfrm>
-          <a:prstGeom prst="rect">
-            <a:avLst/>
-          </a:prstGeom>
-          <a:noFill/>
-        </p:spPr>
-        <p:txBody>
-          <a:bodyPr wrap="square" lIns="0" rIns="0" tIns="0" bIns="0" anchor="t">
-            <a:spAutoFit/>
-          </a:bodyPr>
-          <a:lstStyle/>
-          <a:p>
-            <a:pPr algn="ctr">
-              <a:lnSpc>
-                <a:spcPct val="115000"/>
-              </a:lnSpc>
-            </a:pPr>
-            <a:r>
-              <a:rPr sz="1100" b="0" i="1">
-                <a:solidFill>
-                  <a:srgbClr val="1C7293"/>
-                </a:solidFill>
-                <a:latin typeface="Arial"/>
-              </a:rPr>
-              <a:t>← s05–s08</a:t>
-            </a:r>
-          </a:p>
-        </p:txBody>
-      </p:sp>
-      <p:sp>
-        <p:nvSpPr>
-          <p:cNvPr id="10" name="Right Arrow 9"/>
+          <p:cNvPr id="9" name="Right Arrow 8"/>
           <p:cNvSpPr/>
           <p:nvPr/>
         </p:nvSpPr>
@@ -20637,7 +20487,7 @@
       </p:sp>
       <p:sp>
         <p:nvSpPr>
-          <p:cNvPr id="11" name="Rounded Rectangle 10"/>
+          <p:cNvPr id="10" name="Rounded Rectangle 9"/>
           <p:cNvSpPr/>
           <p:nvPr/>
         </p:nvSpPr>
@@ -20685,14 +20535,14 @@
       </p:sp>
       <p:sp>
         <p:nvSpPr>
-          <p:cNvPr id="12" name="Rounded Rectangle 11"/>
+          <p:cNvPr id="11" name="Rounded Rectangle 10"/>
           <p:cNvSpPr/>
           <p:nvPr/>
         </p:nvSpPr>
         <p:spPr>
           <a:xfrm>
-            <a:off x="4240530" y="2514600"/>
-            <a:ext cx="640080" cy="640080"/>
+            <a:off x="4171950" y="2560320"/>
+            <a:ext cx="777240" cy="777240"/>
           </a:xfrm>
           <a:prstGeom prst="roundRect">
             <a:avLst>
@@ -20731,14 +20581,53 @@
       </p:sp>
       <p:sp>
         <p:nvSpPr>
+          <p:cNvPr id="12" name="TextBox 11"/>
+          <p:cNvSpPr txBox="1"/>
+          <p:nvPr/>
+        </p:nvSpPr>
+        <p:spPr>
+          <a:xfrm>
+            <a:off x="3314700" y="2624328"/>
+            <a:ext cx="2491740" cy="640080"/>
+          </a:xfrm>
+          <a:prstGeom prst="rect">
+            <a:avLst/>
+          </a:prstGeom>
+          <a:noFill/>
+        </p:spPr>
+        <p:txBody>
+          <a:bodyPr wrap="square" lIns="0" rIns="0" tIns="0" bIns="0" anchor="ctr">
+            <a:spAutoFit/>
+          </a:bodyPr>
+          <a:lstStyle/>
+          <a:p>
+            <a:pPr algn="ctr">
+              <a:lnSpc>
+                <a:spcPct val="115000"/>
+              </a:lnSpc>
+            </a:pPr>
+            <a:r>
+              <a:rPr sz="2800" b="1" i="0">
+                <a:solidFill>
+                  <a:srgbClr val="FFFFFF"/>
+                </a:solidFill>
+                <a:latin typeface="Arial"/>
+              </a:rPr>
+              <a:t>2</a:t>
+            </a:r>
+          </a:p>
+        </p:txBody>
+      </p:sp>
+      <p:sp>
+        <p:nvSpPr>
           <p:cNvPr id="13" name="TextBox 12"/>
           <p:cNvSpPr txBox="1"/>
           <p:nvPr/>
         </p:nvSpPr>
         <p:spPr>
           <a:xfrm>
-            <a:off x="3314700" y="2578608"/>
-            <a:ext cx="2491740" cy="502920"/>
+            <a:off x="3406140" y="3474720"/>
+            <a:ext cx="2308860" cy="502920"/>
           </a:xfrm>
           <a:prstGeom prst="rect">
             <a:avLst/>
@@ -20757,13 +20646,13 @@
               </a:lnSpc>
             </a:pPr>
             <a:r>
-              <a:rPr sz="2400" b="1" i="0">
-                <a:solidFill>
-                  <a:srgbClr val="FFFFFF"/>
-                </a:solidFill>
-                <a:latin typeface="Arial"/>
-              </a:rPr>
-              <a:t>2</a:t>
+              <a:rPr sz="2000" b="1" i="0">
+                <a:solidFill>
+                  <a:srgbClr val="21295C"/>
+                </a:solidFill>
+                <a:latin typeface="Arial"/>
+              </a:rPr>
+              <a:t>Эмбеддинг</a:t>
             </a:r>
           </a:p>
         </p:txBody>
@@ -20776,119 +20665,41 @@
         </p:nvSpPr>
         <p:spPr>
           <a:xfrm>
-            <a:off x="3406140" y="3291840"/>
-            <a:ext cx="2308860" cy="457200"/>
-          </a:xfrm>
-          <a:prstGeom prst="rect">
-            <a:avLst/>
-          </a:prstGeom>
-          <a:noFill/>
-        </p:spPr>
-        <p:txBody>
-          <a:bodyPr wrap="square" lIns="0" rIns="0" tIns="0" bIns="0" anchor="ctr">
+            <a:off x="3406140" y="4069080"/>
+            <a:ext cx="2308860" cy="914400"/>
+          </a:xfrm>
+          <a:prstGeom prst="rect">
+            <a:avLst/>
+          </a:prstGeom>
+          <a:noFill/>
+        </p:spPr>
+        <p:txBody>
+          <a:bodyPr wrap="square" lIns="0" rIns="0" tIns="0" bIns="0" anchor="t">
             <a:spAutoFit/>
           </a:bodyPr>
           <a:lstStyle/>
           <a:p>
             <a:pPr algn="ctr">
               <a:lnSpc>
-                <a:spcPct val="115000"/>
-              </a:lnSpc>
-            </a:pPr>
-            <a:r>
-              <a:rPr sz="1800" b="1" i="0">
+                <a:spcPct val="130000"/>
+              </a:lnSpc>
+            </a:pPr>
+            <a:r>
+              <a:rPr sz="1500" b="0" i="1">
                 <a:solidFill>
                   <a:srgbClr val="21295C"/>
                 </a:solidFill>
                 <a:latin typeface="Arial"/>
               </a:rPr>
-              <a:t>Эмбеддинг</a:t>
-            </a:r>
-          </a:p>
-        </p:txBody>
-      </p:sp>
-      <p:sp>
-        <p:nvSpPr>
-          <p:cNvPr id="15" name="TextBox 14"/>
-          <p:cNvSpPr txBox="1"/>
-          <p:nvPr/>
-        </p:nvSpPr>
-        <p:spPr>
-          <a:xfrm>
-            <a:off x="3406140" y="3840480"/>
-            <a:ext cx="2308860" cy="777240"/>
-          </a:xfrm>
-          <a:prstGeom prst="rect">
-            <a:avLst/>
-          </a:prstGeom>
-          <a:noFill/>
-        </p:spPr>
-        <p:txBody>
-          <a:bodyPr wrap="square" lIns="0" rIns="0" tIns="0" bIns="0" anchor="t">
-            <a:spAutoFit/>
-          </a:bodyPr>
-          <a:lstStyle/>
-          <a:p>
-            <a:pPr algn="ctr">
-              <a:lnSpc>
-                <a:spcPct val="130000"/>
-              </a:lnSpc>
-            </a:pPr>
-            <a:r>
-              <a:rPr sz="1300" b="0" i="1">
-                <a:solidFill>
-                  <a:srgbClr val="21295C"/>
-                </a:solidFill>
-                <a:latin typeface="Arial"/>
-              </a:rPr>
               <a:t>id → вектор
-из learned table</a:t>
-            </a:r>
-          </a:p>
-        </p:txBody>
-      </p:sp>
-      <p:sp>
-        <p:nvSpPr>
-          <p:cNvPr id="16" name="TextBox 15"/>
-          <p:cNvSpPr txBox="1"/>
-          <p:nvPr/>
-        </p:nvSpPr>
-        <p:spPr>
-          <a:xfrm>
-            <a:off x="3406140" y="4663440"/>
-            <a:ext cx="2308860" cy="320040"/>
-          </a:xfrm>
-          <a:prstGeom prst="rect">
-            <a:avLst/>
-          </a:prstGeom>
-          <a:noFill/>
-        </p:spPr>
-        <p:txBody>
-          <a:bodyPr wrap="square" lIns="0" rIns="0" tIns="0" bIns="0" anchor="t">
-            <a:spAutoFit/>
-          </a:bodyPr>
-          <a:lstStyle/>
-          <a:p>
-            <a:pPr algn="ctr">
-              <a:lnSpc>
-                <a:spcPct val="115000"/>
-              </a:lnSpc>
-            </a:pPr>
-            <a:r>
-              <a:rPr sz="1100" b="0" i="1">
-                <a:solidFill>
-                  <a:srgbClr val="1C7293"/>
-                </a:solidFill>
-                <a:latin typeface="Arial"/>
-              </a:rPr>
-              <a:t>← s09–s12</a:t>
-            </a:r>
-          </a:p>
-        </p:txBody>
-      </p:sp>
-      <p:sp>
-        <p:nvSpPr>
-          <p:cNvPr id="17" name="Right Arrow 16"/>
+из обученной таблицы</a:t>
+            </a:r>
+          </a:p>
+        </p:txBody>
+      </p:sp>
+      <p:sp>
+        <p:nvSpPr>
+          <p:cNvPr id="15" name="Right Arrow 14"/>
           <p:cNvSpPr/>
           <p:nvPr/>
         </p:nvSpPr>
@@ -20932,7 +20743,7 @@
       </p:sp>
       <p:sp>
         <p:nvSpPr>
-          <p:cNvPr id="18" name="Rounded Rectangle 17"/>
+          <p:cNvPr id="16" name="Rounded Rectangle 15"/>
           <p:cNvSpPr/>
           <p:nvPr/>
         </p:nvSpPr>
@@ -20980,14 +20791,14 @@
       </p:sp>
       <p:sp>
         <p:nvSpPr>
-          <p:cNvPr id="19" name="Rounded Rectangle 18"/>
+          <p:cNvPr id="17" name="Rounded Rectangle 16"/>
           <p:cNvSpPr/>
           <p:nvPr/>
         </p:nvSpPr>
         <p:spPr>
           <a:xfrm>
-            <a:off x="7052310" y="2514600"/>
-            <a:ext cx="640080" cy="640080"/>
+            <a:off x="6983730" y="2560320"/>
+            <a:ext cx="777240" cy="777240"/>
           </a:xfrm>
           <a:prstGeom prst="roundRect">
             <a:avLst>
@@ -21026,111 +20837,111 @@
       </p:sp>
       <p:sp>
         <p:nvSpPr>
+          <p:cNvPr id="18" name="TextBox 17"/>
+          <p:cNvSpPr txBox="1"/>
+          <p:nvPr/>
+        </p:nvSpPr>
+        <p:spPr>
+          <a:xfrm>
+            <a:off x="6126480" y="2624328"/>
+            <a:ext cx="2491740" cy="640080"/>
+          </a:xfrm>
+          <a:prstGeom prst="rect">
+            <a:avLst/>
+          </a:prstGeom>
+          <a:noFill/>
+        </p:spPr>
+        <p:txBody>
+          <a:bodyPr wrap="square" lIns="0" rIns="0" tIns="0" bIns="0" anchor="ctr">
+            <a:spAutoFit/>
+          </a:bodyPr>
+          <a:lstStyle/>
+          <a:p>
+            <a:pPr algn="ctr">
+              <a:lnSpc>
+                <a:spcPct val="115000"/>
+              </a:lnSpc>
+            </a:pPr>
+            <a:r>
+              <a:rPr sz="2800" b="1" i="0">
+                <a:solidFill>
+                  <a:srgbClr val="FFFFFF"/>
+                </a:solidFill>
+                <a:latin typeface="Arial"/>
+              </a:rPr>
+              <a:t>3</a:t>
+            </a:r>
+          </a:p>
+        </p:txBody>
+      </p:sp>
+      <p:sp>
+        <p:nvSpPr>
+          <p:cNvPr id="19" name="TextBox 18"/>
+          <p:cNvSpPr txBox="1"/>
+          <p:nvPr/>
+        </p:nvSpPr>
+        <p:spPr>
+          <a:xfrm>
+            <a:off x="6217920" y="3474720"/>
+            <a:ext cx="2308860" cy="502920"/>
+          </a:xfrm>
+          <a:prstGeom prst="rect">
+            <a:avLst/>
+          </a:prstGeom>
+          <a:noFill/>
+        </p:spPr>
+        <p:txBody>
+          <a:bodyPr wrap="square" lIns="0" rIns="0" tIns="0" bIns="0" anchor="ctr">
+            <a:spAutoFit/>
+          </a:bodyPr>
+          <a:lstStyle/>
+          <a:p>
+            <a:pPr algn="ctr">
+              <a:lnSpc>
+                <a:spcPct val="115000"/>
+              </a:lnSpc>
+            </a:pPr>
+            <a:r>
+              <a:rPr sz="2000" b="1" i="0">
+                <a:solidFill>
+                  <a:srgbClr val="21295C"/>
+                </a:solidFill>
+                <a:latin typeface="Arial"/>
+              </a:rPr>
+              <a:t>Внимание</a:t>
+            </a:r>
+          </a:p>
+        </p:txBody>
+      </p:sp>
+      <p:sp>
+        <p:nvSpPr>
           <p:cNvPr id="20" name="TextBox 19"/>
           <p:cNvSpPr txBox="1"/>
           <p:nvPr/>
         </p:nvSpPr>
         <p:spPr>
           <a:xfrm>
-            <a:off x="6126480" y="2578608"/>
-            <a:ext cx="2491740" cy="502920"/>
-          </a:xfrm>
-          <a:prstGeom prst="rect">
-            <a:avLst/>
-          </a:prstGeom>
-          <a:noFill/>
-        </p:spPr>
-        <p:txBody>
-          <a:bodyPr wrap="square" lIns="0" rIns="0" tIns="0" bIns="0" anchor="ctr">
+            <a:off x="6217920" y="4069080"/>
+            <a:ext cx="2308860" cy="914400"/>
+          </a:xfrm>
+          <a:prstGeom prst="rect">
+            <a:avLst/>
+          </a:prstGeom>
+          <a:noFill/>
+        </p:spPr>
+        <p:txBody>
+          <a:bodyPr wrap="square" lIns="0" rIns="0" tIns="0" bIns="0" anchor="t">
             <a:spAutoFit/>
           </a:bodyPr>
           <a:lstStyle/>
           <a:p>
             <a:pPr algn="ctr">
               <a:lnSpc>
-                <a:spcPct val="115000"/>
-              </a:lnSpc>
-            </a:pPr>
-            <a:r>
-              <a:rPr sz="2400" b="1" i="0">
-                <a:solidFill>
-                  <a:srgbClr val="FFFFFF"/>
-                </a:solidFill>
-                <a:latin typeface="Arial"/>
-              </a:rPr>
-              <a:t>3</a:t>
-            </a:r>
-          </a:p>
-        </p:txBody>
-      </p:sp>
-      <p:sp>
-        <p:nvSpPr>
-          <p:cNvPr id="21" name="TextBox 20"/>
-          <p:cNvSpPr txBox="1"/>
-          <p:nvPr/>
-        </p:nvSpPr>
-        <p:spPr>
-          <a:xfrm>
-            <a:off x="6217920" y="3291840"/>
-            <a:ext cx="2308860" cy="457200"/>
-          </a:xfrm>
-          <a:prstGeom prst="rect">
-            <a:avLst/>
-          </a:prstGeom>
-          <a:noFill/>
-        </p:spPr>
-        <p:txBody>
-          <a:bodyPr wrap="square" lIns="0" rIns="0" tIns="0" bIns="0" anchor="ctr">
-            <a:spAutoFit/>
-          </a:bodyPr>
-          <a:lstStyle/>
-          <a:p>
-            <a:pPr algn="ctr">
-              <a:lnSpc>
-                <a:spcPct val="115000"/>
-              </a:lnSpc>
-            </a:pPr>
-            <a:r>
-              <a:rPr sz="1800" b="1" i="0">
-                <a:solidFill>
-                  <a:srgbClr val="21295C"/>
-                </a:solidFill>
-                <a:latin typeface="Arial"/>
-              </a:rPr>
-              <a:t>Внимание</a:t>
-            </a:r>
-          </a:p>
-        </p:txBody>
-      </p:sp>
-      <p:sp>
-        <p:nvSpPr>
-          <p:cNvPr id="22" name="TextBox 21"/>
-          <p:cNvSpPr txBox="1"/>
-          <p:nvPr/>
-        </p:nvSpPr>
-        <p:spPr>
-          <a:xfrm>
-            <a:off x="6217920" y="3840480"/>
-            <a:ext cx="2308860" cy="777240"/>
-          </a:xfrm>
-          <a:prstGeom prst="rect">
-            <a:avLst/>
-          </a:prstGeom>
-          <a:noFill/>
-        </p:spPr>
-        <p:txBody>
-          <a:bodyPr wrap="square" lIns="0" rIns="0" tIns="0" bIns="0" anchor="t">
-            <a:spAutoFit/>
-          </a:bodyPr>
-          <a:lstStyle/>
-          <a:p>
-            <a:pPr algn="ctr">
-              <a:lnSpc>
                 <a:spcPct val="130000"/>
               </a:lnSpc>
             </a:pPr>
             <a:r>
-              <a:rPr sz="1300" b="0" i="1">
+              <a:rPr sz="1500" b="0" i="1">
                 <a:solidFill>
                   <a:srgbClr val="21295C"/>
                 </a:solidFill>
@@ -21144,46 +20955,7 @@
       </p:sp>
       <p:sp>
         <p:nvSpPr>
-          <p:cNvPr id="23" name="TextBox 22"/>
-          <p:cNvSpPr txBox="1"/>
-          <p:nvPr/>
-        </p:nvSpPr>
-        <p:spPr>
-          <a:xfrm>
-            <a:off x="6217920" y="4663440"/>
-            <a:ext cx="2308860" cy="320040"/>
-          </a:xfrm>
-          <a:prstGeom prst="rect">
-            <a:avLst/>
-          </a:prstGeom>
-          <a:noFill/>
-        </p:spPr>
-        <p:txBody>
-          <a:bodyPr wrap="square" lIns="0" rIns="0" tIns="0" bIns="0" anchor="t">
-            <a:spAutoFit/>
-          </a:bodyPr>
-          <a:lstStyle/>
-          <a:p>
-            <a:pPr algn="ctr">
-              <a:lnSpc>
-                <a:spcPct val="115000"/>
-              </a:lnSpc>
-            </a:pPr>
-            <a:r>
-              <a:rPr sz="1100" b="0" i="1">
-                <a:solidFill>
-                  <a:srgbClr val="1C7293"/>
-                </a:solidFill>
-                <a:latin typeface="Arial"/>
-              </a:rPr>
-              <a:t>← s13–s17</a:t>
-            </a:r>
-          </a:p>
-        </p:txBody>
-      </p:sp>
-      <p:sp>
-        <p:nvSpPr>
-          <p:cNvPr id="24" name="Right Arrow 23"/>
+          <p:cNvPr id="21" name="Right Arrow 20"/>
           <p:cNvSpPr/>
           <p:nvPr/>
         </p:nvSpPr>
@@ -21227,7 +20999,7 @@
       </p:sp>
       <p:sp>
         <p:nvSpPr>
-          <p:cNvPr id="25" name="Rounded Rectangle 24"/>
+          <p:cNvPr id="22" name="Rounded Rectangle 21"/>
           <p:cNvSpPr/>
           <p:nvPr/>
         </p:nvSpPr>
@@ -21275,14 +21047,14 @@
       </p:sp>
       <p:sp>
         <p:nvSpPr>
-          <p:cNvPr id="26" name="Rounded Rectangle 25"/>
+          <p:cNvPr id="23" name="Rounded Rectangle 22"/>
           <p:cNvSpPr/>
           <p:nvPr/>
         </p:nvSpPr>
         <p:spPr>
           <a:xfrm>
-            <a:off x="9864090" y="2514600"/>
-            <a:ext cx="640080" cy="640080"/>
+            <a:off x="9795510" y="2560320"/>
+            <a:ext cx="777240" cy="777240"/>
           </a:xfrm>
           <a:prstGeom prst="roundRect">
             <a:avLst>
@@ -21321,164 +21093,125 @@
       </p:sp>
       <p:sp>
         <p:nvSpPr>
+          <p:cNvPr id="24" name="TextBox 23"/>
+          <p:cNvSpPr txBox="1"/>
+          <p:nvPr/>
+        </p:nvSpPr>
+        <p:spPr>
+          <a:xfrm>
+            <a:off x="8938260" y="2624328"/>
+            <a:ext cx="2491740" cy="640080"/>
+          </a:xfrm>
+          <a:prstGeom prst="rect">
+            <a:avLst/>
+          </a:prstGeom>
+          <a:noFill/>
+        </p:spPr>
+        <p:txBody>
+          <a:bodyPr wrap="square" lIns="0" rIns="0" tIns="0" bIns="0" anchor="ctr">
+            <a:spAutoFit/>
+          </a:bodyPr>
+          <a:lstStyle/>
+          <a:p>
+            <a:pPr algn="ctr">
+              <a:lnSpc>
+                <a:spcPct val="115000"/>
+              </a:lnSpc>
+            </a:pPr>
+            <a:r>
+              <a:rPr sz="2800" b="1" i="0">
+                <a:solidFill>
+                  <a:srgbClr val="FFFFFF"/>
+                </a:solidFill>
+                <a:latin typeface="Arial"/>
+              </a:rPr>
+              <a:t>4</a:t>
+            </a:r>
+          </a:p>
+        </p:txBody>
+      </p:sp>
+      <p:sp>
+        <p:nvSpPr>
+          <p:cNvPr id="25" name="TextBox 24"/>
+          <p:cNvSpPr txBox="1"/>
+          <p:nvPr/>
+        </p:nvSpPr>
+        <p:spPr>
+          <a:xfrm>
+            <a:off x="9029700" y="3474720"/>
+            <a:ext cx="2308860" cy="502920"/>
+          </a:xfrm>
+          <a:prstGeom prst="rect">
+            <a:avLst/>
+          </a:prstGeom>
+          <a:noFill/>
+        </p:spPr>
+        <p:txBody>
+          <a:bodyPr wrap="square" lIns="0" rIns="0" tIns="0" bIns="0" anchor="ctr">
+            <a:spAutoFit/>
+          </a:bodyPr>
+          <a:lstStyle/>
+          <a:p>
+            <a:pPr algn="ctr">
+              <a:lnSpc>
+                <a:spcPct val="115000"/>
+              </a:lnSpc>
+            </a:pPr>
+            <a:r>
+              <a:rPr sz="2000" b="1" i="0">
+                <a:solidFill>
+                  <a:srgbClr val="21295C"/>
+                </a:solidFill>
+                <a:latin typeface="Arial"/>
+              </a:rPr>
+              <a:t>Сэмплинг</a:t>
+            </a:r>
+          </a:p>
+        </p:txBody>
+      </p:sp>
+      <p:sp>
+        <p:nvSpPr>
+          <p:cNvPr id="26" name="TextBox 25"/>
+          <p:cNvSpPr txBox="1"/>
+          <p:nvPr/>
+        </p:nvSpPr>
+        <p:spPr>
+          <a:xfrm>
+            <a:off x="9029700" y="4069080"/>
+            <a:ext cx="2308860" cy="914400"/>
+          </a:xfrm>
+          <a:prstGeom prst="rect">
+            <a:avLst/>
+          </a:prstGeom>
+          <a:noFill/>
+        </p:spPr>
+        <p:txBody>
+          <a:bodyPr wrap="square" lIns="0" rIns="0" tIns="0" bIns="0" anchor="t">
+            <a:spAutoFit/>
+          </a:bodyPr>
+          <a:lstStyle/>
+          <a:p>
+            <a:pPr algn="ctr">
+              <a:lnSpc>
+                <a:spcPct val="130000"/>
+              </a:lnSpc>
+            </a:pPr>
+            <a:r>
+              <a:rPr sz="1500" b="0" i="1">
+                <a:solidFill>
+                  <a:srgbClr val="21295C"/>
+                </a:solidFill>
+                <a:latin typeface="Arial"/>
+              </a:rPr>
+              <a:t>Распределение →
+один токен (T / p / k)</a:t>
+            </a:r>
+          </a:p>
+        </p:txBody>
+      </p:sp>
+      <p:sp>
+        <p:nvSpPr>
           <p:cNvPr id="27" name="TextBox 26"/>
-          <p:cNvSpPr txBox="1"/>
-          <p:nvPr/>
-        </p:nvSpPr>
-        <p:spPr>
-          <a:xfrm>
-            <a:off x="8938260" y="2578608"/>
-            <a:ext cx="2491740" cy="502920"/>
-          </a:xfrm>
-          <a:prstGeom prst="rect">
-            <a:avLst/>
-          </a:prstGeom>
-          <a:noFill/>
-        </p:spPr>
-        <p:txBody>
-          <a:bodyPr wrap="square" lIns="0" rIns="0" tIns="0" bIns="0" anchor="ctr">
-            <a:spAutoFit/>
-          </a:bodyPr>
-          <a:lstStyle/>
-          <a:p>
-            <a:pPr algn="ctr">
-              <a:lnSpc>
-                <a:spcPct val="115000"/>
-              </a:lnSpc>
-            </a:pPr>
-            <a:r>
-              <a:rPr sz="2400" b="1" i="0">
-                <a:solidFill>
-                  <a:srgbClr val="FFFFFF"/>
-                </a:solidFill>
-                <a:latin typeface="Arial"/>
-              </a:rPr>
-              <a:t>4</a:t>
-            </a:r>
-          </a:p>
-        </p:txBody>
-      </p:sp>
-      <p:sp>
-        <p:nvSpPr>
-          <p:cNvPr id="28" name="TextBox 27"/>
-          <p:cNvSpPr txBox="1"/>
-          <p:nvPr/>
-        </p:nvSpPr>
-        <p:spPr>
-          <a:xfrm>
-            <a:off x="9029700" y="3291840"/>
-            <a:ext cx="2308860" cy="457200"/>
-          </a:xfrm>
-          <a:prstGeom prst="rect">
-            <a:avLst/>
-          </a:prstGeom>
-          <a:noFill/>
-        </p:spPr>
-        <p:txBody>
-          <a:bodyPr wrap="square" lIns="0" rIns="0" tIns="0" bIns="0" anchor="ctr">
-            <a:spAutoFit/>
-          </a:bodyPr>
-          <a:lstStyle/>
-          <a:p>
-            <a:pPr algn="ctr">
-              <a:lnSpc>
-                <a:spcPct val="115000"/>
-              </a:lnSpc>
-            </a:pPr>
-            <a:r>
-              <a:rPr sz="1800" b="1" i="0">
-                <a:solidFill>
-                  <a:srgbClr val="21295C"/>
-                </a:solidFill>
-                <a:latin typeface="Arial"/>
-              </a:rPr>
-              <a:t>Сэмплинг</a:t>
-            </a:r>
-          </a:p>
-        </p:txBody>
-      </p:sp>
-      <p:sp>
-        <p:nvSpPr>
-          <p:cNvPr id="29" name="TextBox 28"/>
-          <p:cNvSpPr txBox="1"/>
-          <p:nvPr/>
-        </p:nvSpPr>
-        <p:spPr>
-          <a:xfrm>
-            <a:off x="9029700" y="3840480"/>
-            <a:ext cx="2308860" cy="777240"/>
-          </a:xfrm>
-          <a:prstGeom prst="rect">
-            <a:avLst/>
-          </a:prstGeom>
-          <a:noFill/>
-        </p:spPr>
-        <p:txBody>
-          <a:bodyPr wrap="square" lIns="0" rIns="0" tIns="0" bIns="0" anchor="t">
-            <a:spAutoFit/>
-          </a:bodyPr>
-          <a:lstStyle/>
-          <a:p>
-            <a:pPr algn="ctr">
-              <a:lnSpc>
-                <a:spcPct val="130000"/>
-              </a:lnSpc>
-            </a:pPr>
-            <a:r>
-              <a:rPr sz="1300" b="0" i="1">
-                <a:solidFill>
-                  <a:srgbClr val="21295C"/>
-                </a:solidFill>
-                <a:latin typeface="Arial"/>
-              </a:rPr>
-              <a:t>Распределение →
-один токен (T/p/k)</a:t>
-            </a:r>
-          </a:p>
-        </p:txBody>
-      </p:sp>
-      <p:sp>
-        <p:nvSpPr>
-          <p:cNvPr id="30" name="TextBox 29"/>
-          <p:cNvSpPr txBox="1"/>
-          <p:nvPr/>
-        </p:nvSpPr>
-        <p:spPr>
-          <a:xfrm>
-            <a:off x="9029700" y="4663440"/>
-            <a:ext cx="2308860" cy="320040"/>
-          </a:xfrm>
-          <a:prstGeom prst="rect">
-            <a:avLst/>
-          </a:prstGeom>
-          <a:noFill/>
-        </p:spPr>
-        <p:txBody>
-          <a:bodyPr wrap="square" lIns="0" rIns="0" tIns="0" bIns="0" anchor="t">
-            <a:spAutoFit/>
-          </a:bodyPr>
-          <a:lstStyle/>
-          <a:p>
-            <a:pPr algn="ctr">
-              <a:lnSpc>
-                <a:spcPct val="115000"/>
-              </a:lnSpc>
-            </a:pPr>
-            <a:r>
-              <a:rPr sz="1100" b="0" i="1">
-                <a:solidFill>
-                  <a:srgbClr val="1C7293"/>
-                </a:solidFill>
-                <a:latin typeface="Arial"/>
-              </a:rPr>
-              <a:t>← s18–s20</a:t>
-            </a:r>
-          </a:p>
-        </p:txBody>
-      </p:sp>
-      <p:sp>
-        <p:nvSpPr>
-          <p:cNvPr id="31" name="TextBox 30"/>
           <p:cNvSpPr txBox="1"/>
           <p:nvPr/>
         </p:nvSpPr>
@@ -21581,7 +21314,7 @@
         <p:spPr>
           <a:xfrm>
             <a:off x="502920" y="1325880"/>
-            <a:ext cx="11247120" cy="411480"/>
+            <a:ext cx="11247120" cy="457200"/>
           </a:xfrm>
           <a:prstGeom prst="roundRect">
             <a:avLst>
@@ -21628,7 +21361,7 @@
         </p:nvSpPr>
         <p:spPr>
           <a:xfrm>
-            <a:off x="502920" y="1353312"/>
+            <a:off x="502920" y="1371600"/>
             <a:ext cx="11247120" cy="365760"/>
           </a:xfrm>
           <a:prstGeom prst="rect">
@@ -21648,13 +21381,13 @@
               </a:lnSpc>
             </a:pPr>
             <a:r>
-              <a:rPr sz="1400" b="1" i="1">
+              <a:rPr sz="1600" b="1" i="1">
                 <a:solidFill>
                   <a:srgbClr val="21295C"/>
                 </a:solidFill>
                 <a:latin typeface="Arial"/>
               </a:rPr>
-              <a:t>Payoff Лекции 1 §5.3  —  LO7</a:t>
+              <a:t>Payoff трёх «почему» — связь обещаний и механизмов</a:t>
             </a:r>
           </a:p>
         </p:txBody>
@@ -21667,12 +21400,12 @@
         </p:nvSpPr>
         <p:spPr>
           <a:xfrm>
-            <a:off x="502920" y="1965960"/>
-            <a:ext cx="11247120" cy="1417320"/>
+            <a:off x="502920" y="2011680"/>
+            <a:ext cx="11247120" cy="1508760"/>
           </a:xfrm>
           <a:prstGeom prst="roundRect">
             <a:avLst>
-              <a:gd name="adj" fmla="val 21505"/>
+              <a:gd name="adj" fmla="val 20202"/>
             </a:avLst>
           </a:prstGeom>
           <a:solidFill>
@@ -21715,8 +21448,8 @@
         </p:nvSpPr>
         <p:spPr>
           <a:xfrm>
-            <a:off x="777240" y="2258568"/>
-            <a:ext cx="777240" cy="777240"/>
+            <a:off x="777240" y="2331720"/>
+            <a:ext cx="868680" cy="868680"/>
           </a:xfrm>
           <a:prstGeom prst="roundRect">
             <a:avLst>
@@ -21761,8 +21494,8 @@
         </p:nvSpPr>
         <p:spPr>
           <a:xfrm>
-            <a:off x="777240" y="2286000"/>
-            <a:ext cx="777240" cy="731520"/>
+            <a:off x="777240" y="2359152"/>
+            <a:ext cx="868680" cy="822960"/>
           </a:xfrm>
           <a:prstGeom prst="rect">
             <a:avLst/>
@@ -21781,7 +21514,7 @@
               </a:lnSpc>
             </a:pPr>
             <a:r>
-              <a:rPr sz="3800" b="1" i="0">
+              <a:rPr sz="4400" b="1" i="0">
                 <a:solidFill>
                   <a:srgbClr val="FFFFFF"/>
                 </a:solidFill>
@@ -21800,8 +21533,8 @@
         </p:nvSpPr>
         <p:spPr>
           <a:xfrm>
-            <a:off x="1783080" y="2148840"/>
-            <a:ext cx="8229600" cy="411480"/>
+            <a:off x="1874519" y="2194560"/>
+            <a:ext cx="9144000" cy="502920"/>
           </a:xfrm>
           <a:prstGeom prst="rect">
             <a:avLst/>
@@ -21820,7 +21553,7 @@
               </a:lnSpc>
             </a:pPr>
             <a:r>
-              <a:rPr sz="1600" b="1" i="0">
+              <a:rPr sz="1800" b="1" i="0">
                 <a:solidFill>
                   <a:srgbClr val="21295C"/>
                 </a:solidFill>
@@ -21839,8 +21572,8 @@
         </p:nvSpPr>
         <p:spPr>
           <a:xfrm>
-            <a:off x="1783080" y="2606039"/>
-            <a:ext cx="8229600" cy="731520"/>
+            <a:off x="1874519" y="2743200"/>
+            <a:ext cx="9144000" cy="777240"/>
           </a:xfrm>
           <a:prstGeom prst="rect">
             <a:avLst/>
@@ -21859,7 +21592,7 @@
               </a:lnSpc>
             </a:pPr>
             <a:r>
-              <a:rPr sz="1300" b="0" i="1">
+              <a:rPr sz="1500" b="0" i="1">
                 <a:solidFill>
                   <a:srgbClr val="21295C"/>
                 </a:solidFill>
@@ -21872,57 +21605,18 @@
       </p:sp>
       <p:sp>
         <p:nvSpPr>
-          <p:cNvPr id="10" name="TextBox 9"/>
-          <p:cNvSpPr txBox="1"/>
-          <p:nvPr/>
-        </p:nvSpPr>
-        <p:spPr>
-          <a:xfrm>
-            <a:off x="10149840" y="2423160"/>
-            <a:ext cx="1005840" cy="457200"/>
-          </a:xfrm>
-          <a:prstGeom prst="rect">
-            <a:avLst/>
-          </a:prstGeom>
-          <a:noFill/>
-        </p:spPr>
-        <p:txBody>
-          <a:bodyPr wrap="square" lIns="0" rIns="0" tIns="0" bIns="0" anchor="ctr">
-            <a:spAutoFit/>
-          </a:bodyPr>
-          <a:lstStyle/>
-          <a:p>
-            <a:pPr algn="r">
-              <a:lnSpc>
-                <a:spcPct val="115000"/>
-              </a:lnSpc>
-            </a:pPr>
-            <a:r>
-              <a:rPr sz="1400" b="1" i="0">
-                <a:solidFill>
-                  <a:srgbClr val="F0AB00"/>
-                </a:solidFill>
-                <a:latin typeface="Arial"/>
-              </a:rPr>
-              <a:t>→ s15</a:t>
-            </a:r>
-          </a:p>
-        </p:txBody>
-      </p:sp>
-      <p:sp>
-        <p:nvSpPr>
-          <p:cNvPr id="11" name="Rounded Rectangle 10"/>
+          <p:cNvPr id="10" name="Rounded Rectangle 9"/>
           <p:cNvSpPr/>
           <p:nvPr/>
         </p:nvSpPr>
         <p:spPr>
           <a:xfrm>
-            <a:off x="502920" y="3520439"/>
-            <a:ext cx="11247120" cy="1417320"/>
+            <a:off x="502920" y="3657600"/>
+            <a:ext cx="11247120" cy="1508760"/>
           </a:xfrm>
           <a:prstGeom prst="roundRect">
             <a:avLst>
-              <a:gd name="adj" fmla="val 21505"/>
+              <a:gd name="adj" fmla="val 20202"/>
             </a:avLst>
           </a:prstGeom>
           <a:solidFill>
@@ -21959,14 +21653,14 @@
       </p:sp>
       <p:sp>
         <p:nvSpPr>
-          <p:cNvPr id="12" name="Rounded Rectangle 11"/>
+          <p:cNvPr id="11" name="Rounded Rectangle 10"/>
           <p:cNvSpPr/>
           <p:nvPr/>
         </p:nvSpPr>
         <p:spPr>
           <a:xfrm>
-            <a:off x="777240" y="3813048"/>
-            <a:ext cx="777240" cy="777240"/>
+            <a:off x="777240" y="3977639"/>
+            <a:ext cx="868680" cy="868680"/>
           </a:xfrm>
           <a:prstGeom prst="roundRect">
             <a:avLst>
@@ -22005,39 +21699,78 @@
       </p:sp>
       <p:sp>
         <p:nvSpPr>
+          <p:cNvPr id="12" name="TextBox 11"/>
+          <p:cNvSpPr txBox="1"/>
+          <p:nvPr/>
+        </p:nvSpPr>
+        <p:spPr>
+          <a:xfrm>
+            <a:off x="777240" y="4005072"/>
+            <a:ext cx="868680" cy="822960"/>
+          </a:xfrm>
+          <a:prstGeom prst="rect">
+            <a:avLst/>
+          </a:prstGeom>
+          <a:noFill/>
+        </p:spPr>
+        <p:txBody>
+          <a:bodyPr wrap="square" lIns="0" rIns="0" tIns="0" bIns="0" anchor="ctr">
+            <a:spAutoFit/>
+          </a:bodyPr>
+          <a:lstStyle/>
+          <a:p>
+            <a:pPr algn="ctr">
+              <a:lnSpc>
+                <a:spcPct val="115000"/>
+              </a:lnSpc>
+            </a:pPr>
+            <a:r>
+              <a:rPr sz="4400" b="1" i="0">
+                <a:solidFill>
+                  <a:srgbClr val="FFFFFF"/>
+                </a:solidFill>
+                <a:latin typeface="Arial"/>
+              </a:rPr>
+              <a:t>2</a:t>
+            </a:r>
+          </a:p>
+        </p:txBody>
+      </p:sp>
+      <p:sp>
+        <p:nvSpPr>
           <p:cNvPr id="13" name="TextBox 12"/>
           <p:cNvSpPr txBox="1"/>
           <p:nvPr/>
         </p:nvSpPr>
         <p:spPr>
           <a:xfrm>
-            <a:off x="777240" y="3840479"/>
-            <a:ext cx="777240" cy="731520"/>
-          </a:xfrm>
-          <a:prstGeom prst="rect">
-            <a:avLst/>
-          </a:prstGeom>
-          <a:noFill/>
-        </p:spPr>
-        <p:txBody>
-          <a:bodyPr wrap="square" lIns="0" rIns="0" tIns="0" bIns="0" anchor="ctr">
-            <a:spAutoFit/>
-          </a:bodyPr>
-          <a:lstStyle/>
-          <a:p>
-            <a:pPr algn="ctr">
+            <a:off x="1874519" y="3840480"/>
+            <a:ext cx="9144000" cy="502920"/>
+          </a:xfrm>
+          <a:prstGeom prst="rect">
+            <a:avLst/>
+          </a:prstGeom>
+          <a:noFill/>
+        </p:spPr>
+        <p:txBody>
+          <a:bodyPr wrap="square" lIns="0" rIns="0" tIns="0" bIns="0" anchor="t">
+            <a:spAutoFit/>
+          </a:bodyPr>
+          <a:lstStyle/>
+          <a:p>
+            <a:pPr algn="l">
               <a:lnSpc>
                 <a:spcPct val="115000"/>
               </a:lnSpc>
             </a:pPr>
             <a:r>
-              <a:rPr sz="3800" b="1" i="0">
-                <a:solidFill>
-                  <a:srgbClr val="FFFFFF"/>
-                </a:solidFill>
-                <a:latin typeface="Arial"/>
-              </a:rPr>
-              <a:t>2</a:t>
+              <a:rPr sz="1800" b="1" i="0">
+                <a:solidFill>
+                  <a:srgbClr val="21295C"/>
+                </a:solidFill>
+                <a:latin typeface="Arial"/>
+              </a:rPr>
+              <a:t>Почему AI плохо считает буквы?</a:t>
             </a:r>
           </a:p>
         </p:txBody>
@@ -22050,8 +21783,8 @@
         </p:nvSpPr>
         <p:spPr>
           <a:xfrm>
-            <a:off x="1783080" y="3703320"/>
-            <a:ext cx="8229600" cy="411480"/>
+            <a:off x="1874519" y="4389120"/>
+            <a:ext cx="9144000" cy="777240"/>
           </a:xfrm>
           <a:prstGeom prst="rect">
             <a:avLst/>
@@ -22066,55 +21799,16 @@
           <a:p>
             <a:pPr algn="l">
               <a:lnSpc>
-                <a:spcPct val="115000"/>
-              </a:lnSpc>
-            </a:pPr>
-            <a:r>
-              <a:rPr sz="1600" b="1" i="0">
+                <a:spcPct val="130000"/>
+              </a:lnSpc>
+            </a:pPr>
+            <a:r>
+              <a:rPr sz="1500" b="0" i="1">
                 <a:solidFill>
                   <a:srgbClr val="21295C"/>
                 </a:solidFill>
                 <a:latin typeface="Arial"/>
               </a:rPr>
-              <a:t>Почему AI плохо считает буквы?</a:t>
-            </a:r>
-          </a:p>
-        </p:txBody>
-      </p:sp>
-      <p:sp>
-        <p:nvSpPr>
-          <p:cNvPr id="15" name="TextBox 14"/>
-          <p:cNvSpPr txBox="1"/>
-          <p:nvPr/>
-        </p:nvSpPr>
-        <p:spPr>
-          <a:xfrm>
-            <a:off x="1783080" y="4160520"/>
-            <a:ext cx="8229600" cy="731520"/>
-          </a:xfrm>
-          <a:prstGeom prst="rect">
-            <a:avLst/>
-          </a:prstGeom>
-          <a:noFill/>
-        </p:spPr>
-        <p:txBody>
-          <a:bodyPr wrap="square" lIns="0" rIns="0" tIns="0" bIns="0" anchor="t">
-            <a:spAutoFit/>
-          </a:bodyPr>
-          <a:lstStyle/>
-          <a:p>
-            <a:pPr algn="l">
-              <a:lnSpc>
-                <a:spcPct val="130000"/>
-              </a:lnSpc>
-            </a:pPr>
-            <a:r>
-              <a:rPr sz="1300" b="0" i="1">
-                <a:solidFill>
-                  <a:srgbClr val="21295C"/>
-                </a:solidFill>
-                <a:latin typeface="Arial"/>
-              </a:rPr>
               <a:t>Токенизатор объединяет буквы в токены. strawberry — 3 токена, не 10 букв. Модель видит токены, не буквы.</a:t>
             </a:r>
           </a:p>
@@ -22122,57 +21816,18 @@
       </p:sp>
       <p:sp>
         <p:nvSpPr>
-          <p:cNvPr id="16" name="TextBox 15"/>
-          <p:cNvSpPr txBox="1"/>
-          <p:nvPr/>
-        </p:nvSpPr>
-        <p:spPr>
-          <a:xfrm>
-            <a:off x="10149840" y="3977639"/>
-            <a:ext cx="1005840" cy="457200"/>
-          </a:xfrm>
-          <a:prstGeom prst="rect">
-            <a:avLst/>
-          </a:prstGeom>
-          <a:noFill/>
-        </p:spPr>
-        <p:txBody>
-          <a:bodyPr wrap="square" lIns="0" rIns="0" tIns="0" bIns="0" anchor="ctr">
-            <a:spAutoFit/>
-          </a:bodyPr>
-          <a:lstStyle/>
-          <a:p>
-            <a:pPr algn="r">
-              <a:lnSpc>
-                <a:spcPct val="115000"/>
-              </a:lnSpc>
-            </a:pPr>
-            <a:r>
-              <a:rPr sz="1400" b="1" i="0">
-                <a:solidFill>
-                  <a:srgbClr val="065A82"/>
-                </a:solidFill>
-                <a:latin typeface="Arial"/>
-              </a:rPr>
-              <a:t>→ s05–s07</a:t>
-            </a:r>
-          </a:p>
-        </p:txBody>
-      </p:sp>
-      <p:sp>
-        <p:nvSpPr>
-          <p:cNvPr id="17" name="Rounded Rectangle 16"/>
+          <p:cNvPr id="15" name="Rounded Rectangle 14"/>
           <p:cNvSpPr/>
           <p:nvPr/>
         </p:nvSpPr>
         <p:spPr>
           <a:xfrm>
-            <a:off x="502920" y="5074920"/>
-            <a:ext cx="11247120" cy="1417320"/>
+            <a:off x="502920" y="5303520"/>
+            <a:ext cx="11247120" cy="1508760"/>
           </a:xfrm>
           <a:prstGeom prst="roundRect">
             <a:avLst>
-              <a:gd name="adj" fmla="val 21505"/>
+              <a:gd name="adj" fmla="val 20202"/>
             </a:avLst>
           </a:prstGeom>
           <a:solidFill>
@@ -22209,14 +21864,14 @@
       </p:sp>
       <p:sp>
         <p:nvSpPr>
-          <p:cNvPr id="18" name="Rounded Rectangle 17"/>
+          <p:cNvPr id="16" name="Rounded Rectangle 15"/>
           <p:cNvSpPr/>
           <p:nvPr/>
         </p:nvSpPr>
         <p:spPr>
           <a:xfrm>
-            <a:off x="777240" y="5367528"/>
-            <a:ext cx="777240" cy="777240"/>
+            <a:off x="777240" y="5623559"/>
+            <a:ext cx="868680" cy="868680"/>
           </a:xfrm>
           <a:prstGeom prst="roundRect">
             <a:avLst>
@@ -22255,53 +21910,92 @@
       </p:sp>
       <p:sp>
         <p:nvSpPr>
+          <p:cNvPr id="17" name="TextBox 16"/>
+          <p:cNvSpPr txBox="1"/>
+          <p:nvPr/>
+        </p:nvSpPr>
+        <p:spPr>
+          <a:xfrm>
+            <a:off x="777240" y="5650992"/>
+            <a:ext cx="868680" cy="822960"/>
+          </a:xfrm>
+          <a:prstGeom prst="rect">
+            <a:avLst/>
+          </a:prstGeom>
+          <a:noFill/>
+        </p:spPr>
+        <p:txBody>
+          <a:bodyPr wrap="square" lIns="0" rIns="0" tIns="0" bIns="0" anchor="ctr">
+            <a:spAutoFit/>
+          </a:bodyPr>
+          <a:lstStyle/>
+          <a:p>
+            <a:pPr algn="ctr">
+              <a:lnSpc>
+                <a:spcPct val="115000"/>
+              </a:lnSpc>
+            </a:pPr>
+            <a:r>
+              <a:rPr sz="4400" b="1" i="0">
+                <a:solidFill>
+                  <a:srgbClr val="FFFFFF"/>
+                </a:solidFill>
+                <a:latin typeface="Arial"/>
+              </a:rPr>
+              <a:t>3</a:t>
+            </a:r>
+          </a:p>
+        </p:txBody>
+      </p:sp>
+      <p:sp>
+        <p:nvSpPr>
+          <p:cNvPr id="18" name="TextBox 17"/>
+          <p:cNvSpPr txBox="1"/>
+          <p:nvPr/>
+        </p:nvSpPr>
+        <p:spPr>
+          <a:xfrm>
+            <a:off x="1874519" y="5486400"/>
+            <a:ext cx="9144000" cy="502920"/>
+          </a:xfrm>
+          <a:prstGeom prst="rect">
+            <a:avLst/>
+          </a:prstGeom>
+          <a:noFill/>
+        </p:spPr>
+        <p:txBody>
+          <a:bodyPr wrap="square" lIns="0" rIns="0" tIns="0" bIns="0" anchor="t">
+            <a:spAutoFit/>
+          </a:bodyPr>
+          <a:lstStyle/>
+          <a:p>
+            <a:pPr algn="l">
+              <a:lnSpc>
+                <a:spcPct val="115000"/>
+              </a:lnSpc>
+            </a:pPr>
+            <a:r>
+              <a:rPr sz="1800" b="1" i="0">
+                <a:solidFill>
+                  <a:srgbClr val="21295C"/>
+                </a:solidFill>
+                <a:latin typeface="Arial"/>
+              </a:rPr>
+              <a:t>Почему один и тот же запрос даёт разные ответы?</a:t>
+            </a:r>
+          </a:p>
+        </p:txBody>
+      </p:sp>
+      <p:sp>
+        <p:nvSpPr>
           <p:cNvPr id="19" name="TextBox 18"/>
           <p:cNvSpPr txBox="1"/>
           <p:nvPr/>
         </p:nvSpPr>
         <p:spPr>
           <a:xfrm>
-            <a:off x="777240" y="5394959"/>
-            <a:ext cx="777240" cy="731520"/>
-          </a:xfrm>
-          <a:prstGeom prst="rect">
-            <a:avLst/>
-          </a:prstGeom>
-          <a:noFill/>
-        </p:spPr>
-        <p:txBody>
-          <a:bodyPr wrap="square" lIns="0" rIns="0" tIns="0" bIns="0" anchor="ctr">
-            <a:spAutoFit/>
-          </a:bodyPr>
-          <a:lstStyle/>
-          <a:p>
-            <a:pPr algn="ctr">
-              <a:lnSpc>
-                <a:spcPct val="115000"/>
-              </a:lnSpc>
-            </a:pPr>
-            <a:r>
-              <a:rPr sz="3800" b="1" i="0">
-                <a:solidFill>
-                  <a:srgbClr val="FFFFFF"/>
-                </a:solidFill>
-                <a:latin typeface="Arial"/>
-              </a:rPr>
-              <a:t>3</a:t>
-            </a:r>
-          </a:p>
-        </p:txBody>
-      </p:sp>
-      <p:sp>
-        <p:nvSpPr>
-          <p:cNvPr id="20" name="TextBox 19"/>
-          <p:cNvSpPr txBox="1"/>
-          <p:nvPr/>
-        </p:nvSpPr>
-        <p:spPr>
-          <a:xfrm>
-            <a:off x="1783080" y="5257800"/>
-            <a:ext cx="8229600" cy="411480"/>
+            <a:off x="1874519" y="6035040"/>
+            <a:ext cx="9144000" cy="777240"/>
           </a:xfrm>
           <a:prstGeom prst="rect">
             <a:avLst/>
@@ -22316,95 +22010,17 @@
           <a:p>
             <a:pPr algn="l">
               <a:lnSpc>
-                <a:spcPct val="115000"/>
-              </a:lnSpc>
-            </a:pPr>
-            <a:r>
-              <a:rPr sz="1600" b="1" i="0">
+                <a:spcPct val="130000"/>
+              </a:lnSpc>
+            </a:pPr>
+            <a:r>
+              <a:rPr sz="1500" b="0" i="1">
                 <a:solidFill>
                   <a:srgbClr val="21295C"/>
                 </a:solidFill>
                 <a:latin typeface="Arial"/>
               </a:rPr>
-              <a:t>Почему один и тот же запрос даёт разные ответы?</a:t>
-            </a:r>
-          </a:p>
-        </p:txBody>
-      </p:sp>
-      <p:sp>
-        <p:nvSpPr>
-          <p:cNvPr id="21" name="TextBox 20"/>
-          <p:cNvSpPr txBox="1"/>
-          <p:nvPr/>
-        </p:nvSpPr>
-        <p:spPr>
-          <a:xfrm>
-            <a:off x="1783080" y="5715000"/>
-            <a:ext cx="8229600" cy="731520"/>
-          </a:xfrm>
-          <a:prstGeom prst="rect">
-            <a:avLst/>
-          </a:prstGeom>
-          <a:noFill/>
-        </p:spPr>
-        <p:txBody>
-          <a:bodyPr wrap="square" lIns="0" rIns="0" tIns="0" bIns="0" anchor="t">
-            <a:spAutoFit/>
-          </a:bodyPr>
-          <a:lstStyle/>
-          <a:p>
-            <a:pPr algn="l">
-              <a:lnSpc>
-                <a:spcPct val="130000"/>
-              </a:lnSpc>
-            </a:pPr>
-            <a:r>
-              <a:rPr sz="1300" b="0" i="1">
-                <a:solidFill>
-                  <a:srgbClr val="21295C"/>
-                </a:solidFill>
-                <a:latin typeface="Arial"/>
-              </a:rPr>
-              <a:t>Сэмплинг — стохастический выбор из distribution при T&gt;0. Каждый запуск может выбрать разный токен.</a:t>
-            </a:r>
-          </a:p>
-        </p:txBody>
-      </p:sp>
-      <p:sp>
-        <p:nvSpPr>
-          <p:cNvPr id="22" name="TextBox 21"/>
-          <p:cNvSpPr txBox="1"/>
-          <p:nvPr/>
-        </p:nvSpPr>
-        <p:spPr>
-          <a:xfrm>
-            <a:off x="10149840" y="5532120"/>
-            <a:ext cx="1005840" cy="457200"/>
-          </a:xfrm>
-          <a:prstGeom prst="rect">
-            <a:avLst/>
-          </a:prstGeom>
-          <a:noFill/>
-        </p:spPr>
-        <p:txBody>
-          <a:bodyPr wrap="square" lIns="0" rIns="0" tIns="0" bIns="0" anchor="ctr">
-            <a:spAutoFit/>
-          </a:bodyPr>
-          <a:lstStyle/>
-          <a:p>
-            <a:pPr algn="r">
-              <a:lnSpc>
-                <a:spcPct val="115000"/>
-              </a:lnSpc>
-            </a:pPr>
-            <a:r>
-              <a:rPr sz="1400" b="1" i="0">
-                <a:solidFill>
-                  <a:srgbClr val="028090"/>
-                </a:solidFill>
-                <a:latin typeface="Arial"/>
-              </a:rPr>
-              <a:t>→ s18–s19</a:t>
+              <a:t>Сэмплинг — стохастический выбор из distribution при T &gt; 0. Каждый запуск может выбрать разный токен.</a:t>
             </a:r>
           </a:p>
         </p:txBody>
@@ -22662,7 +22278,7 @@
         <p:spPr>
           <a:xfrm>
             <a:off x="731520" y="2926080"/>
-            <a:ext cx="640080" cy="640080"/>
+            <a:ext cx="731520" cy="731520"/>
           </a:xfrm>
           <a:prstGeom prst="rect">
             <a:avLst/>
@@ -22677,8 +22293,47 @@
         </p:nvSpPr>
         <p:spPr>
           <a:xfrm>
-            <a:off x="1463040" y="2926080"/>
-            <a:ext cx="2514600" cy="365760"/>
+            <a:off x="1554480" y="3017520"/>
+            <a:ext cx="2423160" cy="457200"/>
+          </a:xfrm>
+          <a:prstGeom prst="rect">
+            <a:avLst/>
+          </a:prstGeom>
+          <a:noFill/>
+        </p:spPr>
+        <p:txBody>
+          <a:bodyPr wrap="square" lIns="0" rIns="0" tIns="0" bIns="0" anchor="ctr">
+            <a:spAutoFit/>
+          </a:bodyPr>
+          <a:lstStyle/>
+          <a:p>
+            <a:pPr algn="l">
+              <a:lnSpc>
+                <a:spcPct val="115000"/>
+              </a:lnSpc>
+            </a:pPr>
+            <a:r>
+              <a:rPr sz="1700" b="1" i="0">
+                <a:solidFill>
+                  <a:srgbClr val="065A82"/>
+                </a:solidFill>
+                <a:latin typeface="Arial"/>
+              </a:rPr>
+              <a:t>Фиксированные классы</a:t>
+            </a:r>
+          </a:p>
+        </p:txBody>
+      </p:sp>
+      <p:sp>
+        <p:nvSpPr>
+          <p:cNvPr id="9" name="TextBox 8"/>
+          <p:cNvSpPr txBox="1"/>
+          <p:nvPr/>
+        </p:nvSpPr>
+        <p:spPr>
+          <a:xfrm>
+            <a:off x="731520" y="3840480"/>
+            <a:ext cx="3154680" cy="868680"/>
           </a:xfrm>
           <a:prstGeom prst="rect">
             <a:avLst/>
@@ -22693,31 +22348,31 @@
           <a:p>
             <a:pPr algn="l">
               <a:lnSpc>
-                <a:spcPct val="115000"/>
-              </a:lnSpc>
-            </a:pPr>
-            <a:r>
-              <a:rPr sz="1500" b="1" i="0">
-                <a:solidFill>
-                  <a:srgbClr val="065A82"/>
-                </a:solidFill>
-                <a:latin typeface="Arial"/>
-              </a:rPr>
-              <a:t>Ветка 1</a:t>
-            </a:r>
-          </a:p>
-        </p:txBody>
-      </p:sp>
-      <p:sp>
-        <p:nvSpPr>
-          <p:cNvPr id="9" name="TextBox 8"/>
-          <p:cNvSpPr txBox="1"/>
-          <p:nvPr/>
-        </p:nvSpPr>
-        <p:spPr>
-          <a:xfrm>
-            <a:off x="731520" y="3657600"/>
-            <a:ext cx="3154680" cy="868680"/>
+                <a:spcPct val="130000"/>
+              </a:lnSpc>
+            </a:pPr>
+            <a:r>
+              <a:rPr sz="1400" b="0" i="1">
+                <a:solidFill>
+                  <a:srgbClr val="21295C"/>
+                </a:solidFill>
+                <a:latin typeface="Arial"/>
+              </a:rPr>
+              <a:t>Классификация на маленьком наборе категорий (5–20)?</a:t>
+            </a:r>
+          </a:p>
+        </p:txBody>
+      </p:sp>
+      <p:sp>
+        <p:nvSpPr>
+          <p:cNvPr id="10" name="TextBox 9"/>
+          <p:cNvSpPr txBox="1"/>
+          <p:nvPr/>
+        </p:nvSpPr>
+        <p:spPr>
+          <a:xfrm>
+            <a:off x="731520" y="4663440"/>
+            <a:ext cx="3154680" cy="731520"/>
           </a:xfrm>
           <a:prstGeom prst="rect">
             <a:avLst/>
@@ -22736,46 +22391,7 @@
               </a:lnSpc>
             </a:pPr>
             <a:r>
-              <a:rPr sz="1200" b="0" i="1">
-                <a:solidFill>
-                  <a:srgbClr val="21295C"/>
-                </a:solidFill>
-                <a:latin typeface="Arial"/>
-              </a:rPr>
-              <a:t>Классификация на маленьком фиксированном наборе категорий (5–20)?</a:t>
-            </a:r>
-          </a:p>
-        </p:txBody>
-      </p:sp>
-      <p:sp>
-        <p:nvSpPr>
-          <p:cNvPr id="10" name="TextBox 9"/>
-          <p:cNvSpPr txBox="1"/>
-          <p:nvPr/>
-        </p:nvSpPr>
-        <p:spPr>
-          <a:xfrm>
-            <a:off x="731520" y="4572000"/>
-            <a:ext cx="3154680" cy="731520"/>
-          </a:xfrm>
-          <a:prstGeom prst="rect">
-            <a:avLst/>
-          </a:prstGeom>
-          <a:noFill/>
-        </p:spPr>
-        <p:txBody>
-          <a:bodyPr wrap="square" lIns="0" rIns="0" tIns="0" bIns="0" anchor="t">
-            <a:spAutoFit/>
-          </a:bodyPr>
-          <a:lstStyle/>
-          <a:p>
-            <a:pPr algn="l">
-              <a:lnSpc>
-                <a:spcPct val="130000"/>
-              </a:lnSpc>
-            </a:pPr>
-            <a:r>
-              <a:rPr sz="1200" b="1" i="0">
+              <a:rPr sz="1400" b="1" i="0">
                 <a:solidFill>
                   <a:srgbClr val="21295C"/>
                 </a:solidFill>
@@ -22897,7 +22513,7 @@
         <p:spPr>
           <a:xfrm>
             <a:off x="4526280" y="2926080"/>
-            <a:ext cx="640080" cy="640080"/>
+            <a:ext cx="731520" cy="731520"/>
           </a:xfrm>
           <a:prstGeom prst="rect">
             <a:avLst/>
@@ -22912,8 +22528,47 @@
         </p:nvSpPr>
         <p:spPr>
           <a:xfrm>
-            <a:off x="5257800" y="2926080"/>
-            <a:ext cx="2514600" cy="365760"/>
+            <a:off x="5349240" y="3017520"/>
+            <a:ext cx="2423160" cy="457200"/>
+          </a:xfrm>
+          <a:prstGeom prst="rect">
+            <a:avLst/>
+          </a:prstGeom>
+          <a:noFill/>
+        </p:spPr>
+        <p:txBody>
+          <a:bodyPr wrap="square" lIns="0" rIns="0" tIns="0" bIns="0" anchor="ctr">
+            <a:spAutoFit/>
+          </a:bodyPr>
+          <a:lstStyle/>
+          <a:p>
+            <a:pPr algn="l">
+              <a:lnSpc>
+                <a:spcPct val="115000"/>
+              </a:lnSpc>
+            </a:pPr>
+            <a:r>
+              <a:rPr sz="1700" b="1" i="0">
+                <a:solidFill>
+                  <a:srgbClr val="065A82"/>
+                </a:solidFill>
+                <a:latin typeface="Arial"/>
+              </a:rPr>
+              <a:t>Интерпретируемость</a:t>
+            </a:r>
+          </a:p>
+        </p:txBody>
+      </p:sp>
+      <p:sp>
+        <p:nvSpPr>
+          <p:cNvPr id="15" name="TextBox 14"/>
+          <p:cNvSpPr txBox="1"/>
+          <p:nvPr/>
+        </p:nvSpPr>
+        <p:spPr>
+          <a:xfrm>
+            <a:off x="4526280" y="3840480"/>
+            <a:ext cx="3154680" cy="868680"/>
           </a:xfrm>
           <a:prstGeom prst="rect">
             <a:avLst/>
@@ -22928,31 +22583,32 @@
           <a:p>
             <a:pPr algn="l">
               <a:lnSpc>
-                <a:spcPct val="115000"/>
-              </a:lnSpc>
-            </a:pPr>
-            <a:r>
-              <a:rPr sz="1500" b="1" i="0">
-                <a:solidFill>
-                  <a:srgbClr val="065A82"/>
-                </a:solidFill>
-                <a:latin typeface="Arial"/>
-              </a:rPr>
-              <a:t>Ветка 2</a:t>
-            </a:r>
-          </a:p>
-        </p:txBody>
-      </p:sp>
-      <p:sp>
-        <p:nvSpPr>
-          <p:cNvPr id="15" name="TextBox 14"/>
-          <p:cNvSpPr txBox="1"/>
-          <p:nvPr/>
-        </p:nvSpPr>
-        <p:spPr>
-          <a:xfrm>
-            <a:off x="4526280" y="3657600"/>
-            <a:ext cx="3154680" cy="868680"/>
+                <a:spcPct val="130000"/>
+              </a:lnSpc>
+            </a:pPr>
+            <a:r>
+              <a:rPr sz="1400" b="0" i="1">
+                <a:solidFill>
+                  <a:srgbClr val="21295C"/>
+                </a:solidFill>
+                <a:latin typeface="Arial"/>
+              </a:rPr>
+              <a:t>Нужна интерпретируемость
+(финансы, медицина, страхование)?</a:t>
+            </a:r>
+          </a:p>
+        </p:txBody>
+      </p:sp>
+      <p:sp>
+        <p:nvSpPr>
+          <p:cNvPr id="16" name="TextBox 15"/>
+          <p:cNvSpPr txBox="1"/>
+          <p:nvPr/>
+        </p:nvSpPr>
+        <p:spPr>
+          <a:xfrm>
+            <a:off x="4526280" y="4663440"/>
+            <a:ext cx="3154680" cy="731520"/>
           </a:xfrm>
           <a:prstGeom prst="rect">
             <a:avLst/>
@@ -22971,46 +22627,7 @@
               </a:lnSpc>
             </a:pPr>
             <a:r>
-              <a:rPr sz="1200" b="0" i="1">
-                <a:solidFill>
-                  <a:srgbClr val="21295C"/>
-                </a:solidFill>
-                <a:latin typeface="Arial"/>
-              </a:rPr>
-              <a:t>Нужна интерпретируемость (regulated: финансы, медицина, страхование)?</a:t>
-            </a:r>
-          </a:p>
-        </p:txBody>
-      </p:sp>
-      <p:sp>
-        <p:nvSpPr>
-          <p:cNvPr id="16" name="TextBox 15"/>
-          <p:cNvSpPr txBox="1"/>
-          <p:nvPr/>
-        </p:nvSpPr>
-        <p:spPr>
-          <a:xfrm>
-            <a:off x="4526280" y="4572000"/>
-            <a:ext cx="3154680" cy="731520"/>
-          </a:xfrm>
-          <a:prstGeom prst="rect">
-            <a:avLst/>
-          </a:prstGeom>
-          <a:noFill/>
-        </p:spPr>
-        <p:txBody>
-          <a:bodyPr wrap="square" lIns="0" rIns="0" tIns="0" bIns="0" anchor="t">
-            <a:spAutoFit/>
-          </a:bodyPr>
-          <a:lstStyle/>
-          <a:p>
-            <a:pPr algn="l">
-              <a:lnSpc>
-                <a:spcPct val="130000"/>
-              </a:lnSpc>
-            </a:pPr>
-            <a:r>
-              <a:rPr sz="1200" b="1" i="0">
+              <a:rPr sz="1400" b="1" i="0">
                 <a:solidFill>
                   <a:srgbClr val="21295C"/>
                 </a:solidFill>
@@ -23132,7 +22749,7 @@
         <p:spPr>
           <a:xfrm>
             <a:off x="8321040" y="2926080"/>
-            <a:ext cx="640080" cy="640080"/>
+            <a:ext cx="731520" cy="731520"/>
           </a:xfrm>
           <a:prstGeom prst="rect">
             <a:avLst/>
@@ -23147,8 +22764,47 @@
         </p:nvSpPr>
         <p:spPr>
           <a:xfrm>
-            <a:off x="9052560" y="2926080"/>
-            <a:ext cx="2514600" cy="365760"/>
+            <a:off x="9144000" y="3017520"/>
+            <a:ext cx="2423160" cy="457200"/>
+          </a:xfrm>
+          <a:prstGeom prst="rect">
+            <a:avLst/>
+          </a:prstGeom>
+          <a:noFill/>
+        </p:spPr>
+        <p:txBody>
+          <a:bodyPr wrap="square" lIns="0" rIns="0" tIns="0" bIns="0" anchor="ctr">
+            <a:spAutoFit/>
+          </a:bodyPr>
+          <a:lstStyle/>
+          <a:p>
+            <a:pPr algn="l">
+              <a:lnSpc>
+                <a:spcPct val="115000"/>
+              </a:lnSpc>
+            </a:pPr>
+            <a:r>
+              <a:rPr sz="1700" b="1" i="0">
+                <a:solidFill>
+                  <a:srgbClr val="065A82"/>
+                </a:solidFill>
+                <a:latin typeface="Arial"/>
+              </a:rPr>
+              <a:t>Real-time</a:t>
+            </a:r>
+          </a:p>
+        </p:txBody>
+      </p:sp>
+      <p:sp>
+        <p:nvSpPr>
+          <p:cNvPr id="21" name="TextBox 20"/>
+          <p:cNvSpPr txBox="1"/>
+          <p:nvPr/>
+        </p:nvSpPr>
+        <p:spPr>
+          <a:xfrm>
+            <a:off x="8321040" y="3840480"/>
+            <a:ext cx="3154680" cy="868680"/>
           </a:xfrm>
           <a:prstGeom prst="rect">
             <a:avLst/>
@@ -23163,31 +22819,32 @@
           <a:p>
             <a:pPr algn="l">
               <a:lnSpc>
-                <a:spcPct val="115000"/>
-              </a:lnSpc>
-            </a:pPr>
-            <a:r>
-              <a:rPr sz="1500" b="1" i="0">
-                <a:solidFill>
-                  <a:srgbClr val="065A82"/>
-                </a:solidFill>
-                <a:latin typeface="Arial"/>
-              </a:rPr>
-              <a:t>Ветка 3</a:t>
-            </a:r>
-          </a:p>
-        </p:txBody>
-      </p:sp>
-      <p:sp>
-        <p:nvSpPr>
-          <p:cNvPr id="21" name="TextBox 20"/>
-          <p:cNvSpPr txBox="1"/>
-          <p:nvPr/>
-        </p:nvSpPr>
-        <p:spPr>
-          <a:xfrm>
-            <a:off x="8321040" y="3657600"/>
-            <a:ext cx="3154680" cy="868680"/>
+                <a:spcPct val="130000"/>
+              </a:lnSpc>
+            </a:pPr>
+            <a:r>
+              <a:rPr sz="1400" b="0" i="1">
+                <a:solidFill>
+                  <a:srgbClr val="21295C"/>
+                </a:solidFill>
+                <a:latin typeface="Arial"/>
+              </a:rPr>
+              <a:t>Время отклика &lt; 100 ms критично
+(антифрод, edge)?</a:t>
+            </a:r>
+          </a:p>
+        </p:txBody>
+      </p:sp>
+      <p:sp>
+        <p:nvSpPr>
+          <p:cNvPr id="22" name="TextBox 21"/>
+          <p:cNvSpPr txBox="1"/>
+          <p:nvPr/>
+        </p:nvSpPr>
+        <p:spPr>
+          <a:xfrm>
+            <a:off x="8321040" y="4663440"/>
+            <a:ext cx="3154680" cy="731520"/>
           </a:xfrm>
           <a:prstGeom prst="rect">
             <a:avLst/>
@@ -23206,46 +22863,7 @@
               </a:lnSpc>
             </a:pPr>
             <a:r>
-              <a:rPr sz="1200" b="0" i="1">
-                <a:solidFill>
-                  <a:srgbClr val="21295C"/>
-                </a:solidFill>
-                <a:latin typeface="Arial"/>
-              </a:rPr>
-              <a:t>Время отклика &lt; 100 ms критично (real-time, антифрод, edge)?</a:t>
-            </a:r>
-          </a:p>
-        </p:txBody>
-      </p:sp>
-      <p:sp>
-        <p:nvSpPr>
-          <p:cNvPr id="22" name="TextBox 21"/>
-          <p:cNvSpPr txBox="1"/>
-          <p:nvPr/>
-        </p:nvSpPr>
-        <p:spPr>
-          <a:xfrm>
-            <a:off x="8321040" y="4572000"/>
-            <a:ext cx="3154680" cy="731520"/>
-          </a:xfrm>
-          <a:prstGeom prst="rect">
-            <a:avLst/>
-          </a:prstGeom>
-          <a:noFill/>
-        </p:spPr>
-        <p:txBody>
-          <a:bodyPr wrap="square" lIns="0" rIns="0" tIns="0" bIns="0" anchor="t">
-            <a:spAutoFit/>
-          </a:bodyPr>
-          <a:lstStyle/>
-          <a:p>
-            <a:pPr algn="l">
-              <a:lnSpc>
-                <a:spcPct val="130000"/>
-              </a:lnSpc>
-            </a:pPr>
-            <a:r>
-              <a:rPr sz="1200" b="1" i="0">
+              <a:rPr sz="1400" b="1" i="0">
                 <a:solidFill>
                   <a:srgbClr val="21295C"/>
                 </a:solidFill>
@@ -23266,8 +22884,8 @@
         </p:nvSpPr>
         <p:spPr>
           <a:xfrm>
-            <a:off x="2438247" y="5577840"/>
-            <a:ext cx="7315200" cy="548640"/>
+            <a:off x="1981047" y="5760720"/>
+            <a:ext cx="8229600" cy="777240"/>
           </a:xfrm>
           <a:prstGeom prst="roundRect">
             <a:avLst>
@@ -23314,8 +22932,8 @@
         </p:nvSpPr>
         <p:spPr>
           <a:xfrm>
-            <a:off x="2438247" y="5650992"/>
-            <a:ext cx="7315200" cy="411480"/>
+            <a:off x="1981047" y="5897880"/>
+            <a:ext cx="8229600" cy="502920"/>
           </a:xfrm>
           <a:prstGeom prst="rect">
             <a:avLst/>
@@ -23334,52 +22952,13 @@
               </a:lnSpc>
             </a:pPr>
             <a:r>
-              <a:rPr sz="1500" b="1" i="0">
+              <a:rPr sz="1700" b="1" i="0">
                 <a:solidFill>
                   <a:srgbClr val="21295C"/>
                 </a:solidFill>
                 <a:latin typeface="Arial"/>
               </a:rPr>
               <a:t>Иначе — LLM подходит (chat, RAG, generation, многошаговое рассуждение)</a:t>
-            </a:r>
-          </a:p>
-        </p:txBody>
-      </p:sp>
-      <p:sp>
-        <p:nvSpPr>
-          <p:cNvPr id="25" name="TextBox 24"/>
-          <p:cNvSpPr txBox="1"/>
-          <p:nvPr/>
-        </p:nvSpPr>
-        <p:spPr>
-          <a:xfrm>
-            <a:off x="502920" y="6309360"/>
-            <a:ext cx="11247120" cy="365760"/>
-          </a:xfrm>
-          <a:prstGeom prst="rect">
-            <a:avLst/>
-          </a:prstGeom>
-          <a:noFill/>
-        </p:spPr>
-        <p:txBody>
-          <a:bodyPr wrap="square" lIns="0" rIns="0" tIns="0" bIns="0" anchor="t">
-            <a:spAutoFit/>
-          </a:bodyPr>
-          <a:lstStyle/>
-          <a:p>
-            <a:pPr algn="ctr">
-              <a:lnSpc>
-                <a:spcPct val="115000"/>
-              </a:lnSpc>
-            </a:pPr>
-            <a:r>
-              <a:rPr sz="1200" b="0" i="1">
-                <a:solidFill>
-                  <a:srgbClr val="1C7293"/>
-                </a:solidFill>
-                <a:latin typeface="Arial"/>
-              </a:rPr>
-              <a:t>Верхний уровень. Глубже — Лекции 4–7 (индустрии).</a:t>
             </a:r>
           </a:p>
         </p:txBody>
@@ -23469,13 +23048,13 @@
               </a:lnSpc>
             </a:pPr>
             <a:r>
-              <a:rPr sz="1500" b="0" i="1">
+              <a:rPr sz="1600" b="0" i="1">
                 <a:solidFill>
                   <a:srgbClr val="065A82"/>
                 </a:solidFill>
                 <a:latin typeface="Arial"/>
               </a:rPr>
-              <a:t>Cross-cutting frame: human vs AI (callback Lec-1 §4.8 Pearl)</a:t>
+              <a:t>AI считает корреляции в данных, не строит каузальный граф</a:t>
             </a:r>
           </a:p>
         </p:txBody>
@@ -23545,7 +23124,7 @@
         <p:spPr>
           <a:xfrm>
             <a:off x="777240" y="2103120"/>
-            <a:ext cx="731520" cy="731520"/>
+            <a:ext cx="822960" cy="822960"/>
           </a:xfrm>
           <a:prstGeom prst="rect">
             <a:avLst/>
@@ -23560,8 +23139,8 @@
         </p:nvSpPr>
         <p:spPr>
           <a:xfrm>
-            <a:off x="1600200" y="2103120"/>
-            <a:ext cx="4206240" cy="731520"/>
+            <a:off x="1691640" y="2103120"/>
+            <a:ext cx="4114800" cy="822960"/>
           </a:xfrm>
           <a:prstGeom prst="rect">
             <a:avLst/>
@@ -23580,7 +23159,7 @@
               </a:lnSpc>
             </a:pPr>
             <a:r>
-              <a:rPr sz="2200" b="1" i="0">
+              <a:rPr sz="2400" b="1" i="0">
                 <a:solidFill>
                   <a:srgbClr val="21295C"/>
                 </a:solidFill>
@@ -23599,8 +23178,8 @@
         </p:nvSpPr>
         <p:spPr>
           <a:xfrm>
-            <a:off x="777240" y="2971800"/>
-            <a:ext cx="4937760" cy="502920"/>
+            <a:off x="777240" y="3154679"/>
+            <a:ext cx="4937760" cy="594360"/>
           </a:xfrm>
           <a:prstGeom prst="rect">
             <a:avLst/>
@@ -23619,7 +23198,7 @@
               </a:lnSpc>
             </a:pPr>
             <a:r>
-              <a:rPr sz="1600" b="1" i="1">
+              <a:rPr sz="1800" b="1" i="1">
                 <a:solidFill>
                   <a:srgbClr val="065A82"/>
                 </a:solidFill>
@@ -23638,8 +23217,8 @@
         </p:nvSpPr>
         <p:spPr>
           <a:xfrm>
-            <a:off x="777240" y="3566160"/>
-            <a:ext cx="4937760" cy="365760"/>
+            <a:off x="777240" y="3886200"/>
+            <a:ext cx="4937760" cy="457200"/>
           </a:xfrm>
           <a:prstGeom prst="rect">
             <a:avLst/>
@@ -23658,13 +23237,13 @@
               </a:lnSpc>
             </a:pPr>
             <a:r>
-              <a:rPr sz="1400" b="0" i="1">
+              <a:rPr sz="1600" b="0" i="1">
                 <a:solidFill>
                   <a:srgbClr val="21295C"/>
                 </a:solidFill>
                 <a:latin typeface="Arial"/>
               </a:rPr>
-              <a:t>Модель причинности.</a:t>
+              <a:t>Модель причинности — строит механизмы.</a:t>
             </a:r>
           </a:p>
         </p:txBody>
@@ -23677,8 +23256,8 @@
         </p:nvSpPr>
         <p:spPr>
           <a:xfrm>
-            <a:off x="777240" y="4023360"/>
-            <a:ext cx="4937760" cy="365760"/>
+            <a:off x="777240" y="4709160"/>
+            <a:ext cx="4937760" cy="1417320"/>
           </a:xfrm>
           <a:prstGeom prst="rect">
             <a:avLst/>
@@ -23693,17 +23272,17 @@
           <a:p>
             <a:pPr algn="l">
               <a:lnSpc>
-                <a:spcPct val="115000"/>
-              </a:lnSpc>
-            </a:pPr>
-            <a:r>
-              <a:rPr sz="1300" b="1" i="0">
-                <a:solidFill>
-                  <a:srgbClr val="065A82"/>
-                </a:solidFill>
-                <a:latin typeface="Arial"/>
-              </a:rPr>
-              <a:t>Уровни Перла:</a:t>
+                <a:spcPct val="130000"/>
+              </a:lnSpc>
+            </a:pPr>
+            <a:r>
+              <a:rPr sz="1500" b="0" i="1">
+                <a:solidFill>
+                  <a:srgbClr val="21295C"/>
+                </a:solidFill>
+                <a:latin typeface="Arial"/>
+              </a:rPr>
+              <a:t>Опирается на физическую интуицию, доменные знания, знание механизмов мира.</a:t>
             </a:r>
           </a:p>
         </p:txBody>
@@ -23711,300 +23290,6 @@
       <p:sp>
         <p:nvSpPr>
           <p:cNvPr id="10" name="Rounded Rectangle 9"/>
-          <p:cNvSpPr/>
-          <p:nvPr/>
-        </p:nvSpPr>
-        <p:spPr>
-          <a:xfrm>
-            <a:off x="868680" y="4480559"/>
-            <a:ext cx="164592" cy="164592"/>
-          </a:xfrm>
-          <a:prstGeom prst="roundRect">
-            <a:avLst>
-              <a:gd name="adj" fmla="val 50000"/>
-            </a:avLst>
-          </a:prstGeom>
-          <a:solidFill>
-            <a:srgbClr val="028090"/>
-          </a:solidFill>
-          <a:ln>
-            <a:noFill/>
-          </a:ln>
-          <a:effectLst/>
-        </p:spPr>
-        <p:style>
-          <a:lnRef idx="1">
-            <a:schemeClr val="accent1"/>
-          </a:lnRef>
-          <a:fillRef idx="3">
-            <a:schemeClr val="accent1"/>
-          </a:fillRef>
-          <a:effectRef idx="2">
-            <a:schemeClr val="accent1"/>
-          </a:effectRef>
-          <a:fontRef idx="minor">
-            <a:schemeClr val="lt1"/>
-          </a:fontRef>
-        </p:style>
-        <p:txBody>
-          <a:bodyPr rtlCol="0" anchor="ctr"/>
-          <a:lstStyle/>
-          <a:p>
-            <a:pPr algn="ctr"/>
-          </a:p>
-        </p:txBody>
-      </p:sp>
-      <p:sp>
-        <p:nvSpPr>
-          <p:cNvPr id="11" name="TextBox 10"/>
-          <p:cNvSpPr txBox="1"/>
-          <p:nvPr/>
-        </p:nvSpPr>
-        <p:spPr>
-          <a:xfrm>
-            <a:off x="1143000" y="4389120"/>
-            <a:ext cx="4663440" cy="365760"/>
-          </a:xfrm>
-          <a:prstGeom prst="rect">
-            <a:avLst/>
-          </a:prstGeom>
-          <a:noFill/>
-        </p:spPr>
-        <p:txBody>
-          <a:bodyPr wrap="square" lIns="0" rIns="0" tIns="0" bIns="0" anchor="ctr">
-            <a:spAutoFit/>
-          </a:bodyPr>
-          <a:lstStyle/>
-          <a:p>
-            <a:pPr algn="l">
-              <a:lnSpc>
-                <a:spcPct val="115000"/>
-              </a:lnSpc>
-            </a:pPr>
-            <a:r>
-              <a:rPr sz="1300" b="0" i="0">
-                <a:solidFill>
-                  <a:srgbClr val="21295C"/>
-                </a:solidFill>
-                <a:latin typeface="Arial"/>
-              </a:rPr>
-              <a:t>1. Ассоциация</a:t>
-            </a:r>
-          </a:p>
-        </p:txBody>
-      </p:sp>
-      <p:sp>
-        <p:nvSpPr>
-          <p:cNvPr id="12" name="Rounded Rectangle 11"/>
-          <p:cNvSpPr/>
-          <p:nvPr/>
-        </p:nvSpPr>
-        <p:spPr>
-          <a:xfrm>
-            <a:off x="868680" y="4846320"/>
-            <a:ext cx="164592" cy="164592"/>
-          </a:xfrm>
-          <a:prstGeom prst="roundRect">
-            <a:avLst>
-              <a:gd name="adj" fmla="val 50000"/>
-            </a:avLst>
-          </a:prstGeom>
-          <a:solidFill>
-            <a:srgbClr val="028090"/>
-          </a:solidFill>
-          <a:ln>
-            <a:noFill/>
-          </a:ln>
-          <a:effectLst/>
-        </p:spPr>
-        <p:style>
-          <a:lnRef idx="1">
-            <a:schemeClr val="accent1"/>
-          </a:lnRef>
-          <a:fillRef idx="3">
-            <a:schemeClr val="accent1"/>
-          </a:fillRef>
-          <a:effectRef idx="2">
-            <a:schemeClr val="accent1"/>
-          </a:effectRef>
-          <a:fontRef idx="minor">
-            <a:schemeClr val="lt1"/>
-          </a:fontRef>
-        </p:style>
-        <p:txBody>
-          <a:bodyPr rtlCol="0" anchor="ctr"/>
-          <a:lstStyle/>
-          <a:p>
-            <a:pPr algn="ctr"/>
-          </a:p>
-        </p:txBody>
-      </p:sp>
-      <p:sp>
-        <p:nvSpPr>
-          <p:cNvPr id="13" name="TextBox 12"/>
-          <p:cNvSpPr txBox="1"/>
-          <p:nvPr/>
-        </p:nvSpPr>
-        <p:spPr>
-          <a:xfrm>
-            <a:off x="1143000" y="4754880"/>
-            <a:ext cx="4663440" cy="365760"/>
-          </a:xfrm>
-          <a:prstGeom prst="rect">
-            <a:avLst/>
-          </a:prstGeom>
-          <a:noFill/>
-        </p:spPr>
-        <p:txBody>
-          <a:bodyPr wrap="square" lIns="0" rIns="0" tIns="0" bIns="0" anchor="ctr">
-            <a:spAutoFit/>
-          </a:bodyPr>
-          <a:lstStyle/>
-          <a:p>
-            <a:pPr algn="l">
-              <a:lnSpc>
-                <a:spcPct val="115000"/>
-              </a:lnSpc>
-            </a:pPr>
-            <a:r>
-              <a:rPr sz="1300" b="0" i="0">
-                <a:solidFill>
-                  <a:srgbClr val="21295C"/>
-                </a:solidFill>
-                <a:latin typeface="Arial"/>
-              </a:rPr>
-              <a:t>2. Вмешательство</a:t>
-            </a:r>
-          </a:p>
-        </p:txBody>
-      </p:sp>
-      <p:sp>
-        <p:nvSpPr>
-          <p:cNvPr id="14" name="Rounded Rectangle 13"/>
-          <p:cNvSpPr/>
-          <p:nvPr/>
-        </p:nvSpPr>
-        <p:spPr>
-          <a:xfrm>
-            <a:off x="868680" y="5212079"/>
-            <a:ext cx="164592" cy="164592"/>
-          </a:xfrm>
-          <a:prstGeom prst="roundRect">
-            <a:avLst>
-              <a:gd name="adj" fmla="val 50000"/>
-            </a:avLst>
-          </a:prstGeom>
-          <a:solidFill>
-            <a:srgbClr val="F0AB00"/>
-          </a:solidFill>
-          <a:ln>
-            <a:noFill/>
-          </a:ln>
-          <a:effectLst/>
-        </p:spPr>
-        <p:style>
-          <a:lnRef idx="1">
-            <a:schemeClr val="accent1"/>
-          </a:lnRef>
-          <a:fillRef idx="3">
-            <a:schemeClr val="accent1"/>
-          </a:fillRef>
-          <a:effectRef idx="2">
-            <a:schemeClr val="accent1"/>
-          </a:effectRef>
-          <a:fontRef idx="minor">
-            <a:schemeClr val="lt1"/>
-          </a:fontRef>
-        </p:style>
-        <p:txBody>
-          <a:bodyPr rtlCol="0" anchor="ctr"/>
-          <a:lstStyle/>
-          <a:p>
-            <a:pPr algn="ctr"/>
-          </a:p>
-        </p:txBody>
-      </p:sp>
-      <p:sp>
-        <p:nvSpPr>
-          <p:cNvPr id="15" name="TextBox 14"/>
-          <p:cNvSpPr txBox="1"/>
-          <p:nvPr/>
-        </p:nvSpPr>
-        <p:spPr>
-          <a:xfrm>
-            <a:off x="1143000" y="5120640"/>
-            <a:ext cx="4663440" cy="365760"/>
-          </a:xfrm>
-          <a:prstGeom prst="rect">
-            <a:avLst/>
-          </a:prstGeom>
-          <a:noFill/>
-        </p:spPr>
-        <p:txBody>
-          <a:bodyPr wrap="square" lIns="0" rIns="0" tIns="0" bIns="0" anchor="ctr">
-            <a:spAutoFit/>
-          </a:bodyPr>
-          <a:lstStyle/>
-          <a:p>
-            <a:pPr algn="l">
-              <a:lnSpc>
-                <a:spcPct val="115000"/>
-              </a:lnSpc>
-            </a:pPr>
-            <a:r>
-              <a:rPr sz="1300" b="0" i="0">
-                <a:solidFill>
-                  <a:srgbClr val="21295C"/>
-                </a:solidFill>
-                <a:latin typeface="Arial"/>
-              </a:rPr>
-              <a:t>3. Контрфактуальность</a:t>
-            </a:r>
-          </a:p>
-        </p:txBody>
-      </p:sp>
-      <p:sp>
-        <p:nvSpPr>
-          <p:cNvPr id="16" name="TextBox 15"/>
-          <p:cNvSpPr txBox="1"/>
-          <p:nvPr/>
-        </p:nvSpPr>
-        <p:spPr>
-          <a:xfrm>
-            <a:off x="777240" y="5623559"/>
-            <a:ext cx="4937760" cy="594360"/>
-          </a:xfrm>
-          <a:prstGeom prst="rect">
-            <a:avLst/>
-          </a:prstGeom>
-          <a:noFill/>
-        </p:spPr>
-        <p:txBody>
-          <a:bodyPr wrap="square" lIns="0" rIns="0" tIns="0" bIns="0" anchor="t">
-            <a:spAutoFit/>
-          </a:bodyPr>
-          <a:lstStyle/>
-          <a:p>
-            <a:pPr algn="l">
-              <a:lnSpc>
-                <a:spcPct val="130000"/>
-              </a:lnSpc>
-            </a:pPr>
-            <a:r>
-              <a:rPr sz="1200" b="0" i="1">
-                <a:solidFill>
-                  <a:srgbClr val="21295C"/>
-                </a:solidFill>
-                <a:latin typeface="Arial"/>
-              </a:rPr>
-              <a:t>Опирается на физическую интуицию, доменные знания, знание механизмов мира.</a:t>
-            </a:r>
-          </a:p>
-        </p:txBody>
-      </p:sp>
-      <p:sp>
-        <p:nvSpPr>
-          <p:cNvPr id="17" name="Rounded Rectangle 16"/>
           <p:cNvSpPr/>
           <p:nvPr/>
         </p:nvSpPr>
@@ -24052,7 +23337,7 @@
       </p:sp>
       <p:pic>
         <p:nvPicPr>
-          <p:cNvPr id="18" name="Picture 17" descr="brain.png"/>
+          <p:cNvPr id="11" name="Picture 10" descr="brain.png"/>
           <p:cNvPicPr>
             <a:picLocks noChangeAspect="1"/>
           </p:cNvPicPr>
@@ -24067,7 +23352,7 @@
         <p:spPr>
           <a:xfrm>
             <a:off x="6537959" y="2103120"/>
-            <a:ext cx="731520" cy="731520"/>
+            <a:ext cx="822960" cy="822960"/>
           </a:xfrm>
           <a:prstGeom prst="rect">
             <a:avLst/>
@@ -24076,14 +23361,14 @@
       </p:pic>
       <p:sp>
         <p:nvSpPr>
-          <p:cNvPr id="19" name="TextBox 18"/>
-          <p:cNvSpPr txBox="1"/>
-          <p:nvPr/>
-        </p:nvSpPr>
-        <p:spPr>
-          <a:xfrm>
-            <a:off x="7360919" y="2103120"/>
-            <a:ext cx="4206240" cy="731520"/>
+          <p:cNvPr id="12" name="TextBox 11"/>
+          <p:cNvSpPr txBox="1"/>
+          <p:nvPr/>
+        </p:nvSpPr>
+        <p:spPr>
+          <a:xfrm>
+            <a:off x="7452360" y="2103120"/>
+            <a:ext cx="4114800" cy="822960"/>
           </a:xfrm>
           <a:prstGeom prst="rect">
             <a:avLst/>
@@ -24102,7 +23387,7 @@
               </a:lnSpc>
             </a:pPr>
             <a:r>
-              <a:rPr sz="2200" b="1" i="0">
+              <a:rPr sz="2400" b="1" i="0">
                 <a:solidFill>
                   <a:srgbClr val="21295C"/>
                 </a:solidFill>
@@ -24115,14 +23400,14 @@
       </p:sp>
       <p:sp>
         <p:nvSpPr>
-          <p:cNvPr id="20" name="TextBox 19"/>
-          <p:cNvSpPr txBox="1"/>
-          <p:nvPr/>
-        </p:nvSpPr>
-        <p:spPr>
-          <a:xfrm>
-            <a:off x="6537959" y="2971800"/>
-            <a:ext cx="4937760" cy="502920"/>
+          <p:cNvPr id="13" name="TextBox 12"/>
+          <p:cNvSpPr txBox="1"/>
+          <p:nvPr/>
+        </p:nvSpPr>
+        <p:spPr>
+          <a:xfrm>
+            <a:off x="6537959" y="3154679"/>
+            <a:ext cx="4937760" cy="594360"/>
           </a:xfrm>
           <a:prstGeom prst="rect">
             <a:avLst/>
@@ -24141,7 +23426,7 @@
               </a:lnSpc>
             </a:pPr>
             <a:r>
-              <a:rPr sz="1600" b="1" i="1">
+              <a:rPr sz="1800" b="1" i="1">
                 <a:solidFill>
                   <a:srgbClr val="065A82"/>
                 </a:solidFill>
@@ -24154,14 +23439,14 @@
       </p:sp>
       <p:sp>
         <p:nvSpPr>
-          <p:cNvPr id="21" name="TextBox 20"/>
-          <p:cNvSpPr txBox="1"/>
-          <p:nvPr/>
-        </p:nvSpPr>
-        <p:spPr>
-          <a:xfrm>
-            <a:off x="6537959" y="3566160"/>
-            <a:ext cx="4937760" cy="365760"/>
+          <p:cNvPr id="14" name="TextBox 13"/>
+          <p:cNvSpPr txBox="1"/>
+          <p:nvPr/>
+        </p:nvSpPr>
+        <p:spPr>
+          <a:xfrm>
+            <a:off x="6537959" y="3886200"/>
+            <a:ext cx="4937760" cy="457200"/>
           </a:xfrm>
           <a:prstGeom prst="rect">
             <a:avLst/>
@@ -24180,27 +23465,27 @@
               </a:lnSpc>
             </a:pPr>
             <a:r>
-              <a:rPr sz="1400" b="0" i="1">
+              <a:rPr sz="1600" b="0" i="1">
                 <a:solidFill>
                   <a:srgbClr val="21295C"/>
                 </a:solidFill>
                 <a:latin typeface="Arial"/>
               </a:rPr>
-              <a:t>Статистическая корреляция.</a:t>
-            </a:r>
-          </a:p>
-        </p:txBody>
-      </p:sp>
-      <p:sp>
-        <p:nvSpPr>
-          <p:cNvPr id="22" name="TextBox 21"/>
-          <p:cNvSpPr txBox="1"/>
-          <p:nvPr/>
-        </p:nvSpPr>
-        <p:spPr>
-          <a:xfrm>
-            <a:off x="6537959" y="4023360"/>
-            <a:ext cx="4937760" cy="365760"/>
+              <a:t>Статистическая корреляция, не причинность.</a:t>
+            </a:r>
+          </a:p>
+        </p:txBody>
+      </p:sp>
+      <p:sp>
+        <p:nvSpPr>
+          <p:cNvPr id="15" name="TextBox 14"/>
+          <p:cNvSpPr txBox="1"/>
+          <p:nvPr/>
+        </p:nvSpPr>
+        <p:spPr>
+          <a:xfrm>
+            <a:off x="6537959" y="4709160"/>
+            <a:ext cx="4937760" cy="1417320"/>
           </a:xfrm>
           <a:prstGeom prst="rect">
             <a:avLst/>
@@ -24215,42 +23500,44 @@
           <a:p>
             <a:pPr algn="l">
               <a:lnSpc>
-                <a:spcPct val="115000"/>
-              </a:lnSpc>
-            </a:pPr>
-            <a:r>
-              <a:rPr sz="1300" b="1" i="0">
-                <a:solidFill>
-                  <a:srgbClr val="065A82"/>
-                </a:solidFill>
-                <a:latin typeface="Arial"/>
-              </a:rPr>
-              <a:t>Уровни Перла:</a:t>
-            </a:r>
-          </a:p>
-        </p:txBody>
-      </p:sp>
-      <p:sp>
-        <p:nvSpPr>
-          <p:cNvPr id="23" name="Rounded Rectangle 22"/>
+                <a:spcPct val="130000"/>
+              </a:lnSpc>
+            </a:pPr>
+            <a:r>
+              <a:rPr sz="1500" b="0" i="1">
+                <a:solidFill>
+                  <a:srgbClr val="21295C"/>
+                </a:solidFill>
+                <a:latin typeface="Arial"/>
+              </a:rPr>
+              <a:t>Замечает паттерн «X и Y часто соседствуют» в обучающих данных — корреляция, не каузальный граф.</a:t>
+            </a:r>
+          </a:p>
+        </p:txBody>
+      </p:sp>
+      <p:sp>
+        <p:nvSpPr>
+          <p:cNvPr id="16" name="Rounded Rectangle 15"/>
           <p:cNvSpPr/>
           <p:nvPr/>
         </p:nvSpPr>
         <p:spPr>
           <a:xfrm>
-            <a:off x="6629400" y="4480559"/>
-            <a:ext cx="164592" cy="164592"/>
+            <a:off x="502920" y="6446520"/>
+            <a:ext cx="11247120" cy="365760"/>
           </a:xfrm>
           <a:prstGeom prst="roundRect">
             <a:avLst>
-              <a:gd name="adj" fmla="val 50000"/>
+              <a:gd name="adj" fmla="val 12000"/>
             </a:avLst>
           </a:prstGeom>
           <a:solidFill>
-            <a:srgbClr val="028090"/>
+            <a:srgbClr val="FEF5E0"/>
           </a:solidFill>
-          <a:ln>
-            <a:noFill/>
+          <a:ln w="15240">
+            <a:solidFill>
+              <a:srgbClr val="F0AB00"/>
+            </a:solidFill>
           </a:ln>
           <a:effectLst/>
         </p:spPr>
@@ -24278,14 +23565,14 @@
       </p:sp>
       <p:sp>
         <p:nvSpPr>
-          <p:cNvPr id="24" name="TextBox 23"/>
-          <p:cNvSpPr txBox="1"/>
-          <p:nvPr/>
-        </p:nvSpPr>
-        <p:spPr>
-          <a:xfrm>
-            <a:off x="6903720" y="4389120"/>
-            <a:ext cx="4663440" cy="365760"/>
+          <p:cNvPr id="17" name="TextBox 16"/>
+          <p:cNvSpPr txBox="1"/>
+          <p:nvPr/>
+        </p:nvSpPr>
+        <p:spPr>
+          <a:xfrm>
+            <a:off x="685800" y="6519672"/>
+            <a:ext cx="10881360" cy="219456"/>
           </a:xfrm>
           <a:prstGeom prst="rect">
             <a:avLst/>
@@ -24300,265 +23587,17 @@
           <a:p>
             <a:pPr algn="l">
               <a:lnSpc>
-                <a:spcPct val="115000"/>
-              </a:lnSpc>
-            </a:pPr>
-            <a:r>
-              <a:rPr sz="1300" b="0" i="0">
+                <a:spcPct val="125000"/>
+              </a:lnSpc>
+            </a:pPr>
+            <a:r>
+              <a:rPr sz="1400" b="1" i="0">
                 <a:solidFill>
                   <a:srgbClr val="21295C"/>
                 </a:solidFill>
                 <a:latin typeface="Arial"/>
               </a:rPr>
-              <a:t>1. Ассоциация — да</a:t>
-            </a:r>
-          </a:p>
-        </p:txBody>
-      </p:sp>
-      <p:sp>
-        <p:nvSpPr>
-          <p:cNvPr id="25" name="Rounded Rectangle 24"/>
-          <p:cNvSpPr/>
-          <p:nvPr/>
-        </p:nvSpPr>
-        <p:spPr>
-          <a:xfrm>
-            <a:off x="6629400" y="4846320"/>
-            <a:ext cx="164592" cy="164592"/>
-          </a:xfrm>
-          <a:prstGeom prst="roundRect">
-            <a:avLst>
-              <a:gd name="adj" fmla="val 50000"/>
-            </a:avLst>
-          </a:prstGeom>
-          <a:solidFill>
-            <a:srgbClr val="1C7293"/>
-          </a:solidFill>
-          <a:ln>
-            <a:noFill/>
-          </a:ln>
-          <a:effectLst/>
-        </p:spPr>
-        <p:style>
-          <a:lnRef idx="1">
-            <a:schemeClr val="accent1"/>
-          </a:lnRef>
-          <a:fillRef idx="3">
-            <a:schemeClr val="accent1"/>
-          </a:fillRef>
-          <a:effectRef idx="2">
-            <a:schemeClr val="accent1"/>
-          </a:effectRef>
-          <a:fontRef idx="minor">
-            <a:schemeClr val="lt1"/>
-          </a:fontRef>
-        </p:style>
-        <p:txBody>
-          <a:bodyPr rtlCol="0" anchor="ctr"/>
-          <a:lstStyle/>
-          <a:p>
-            <a:pPr algn="ctr"/>
-          </a:p>
-        </p:txBody>
-      </p:sp>
-      <p:sp>
-        <p:nvSpPr>
-          <p:cNvPr id="26" name="TextBox 25"/>
-          <p:cNvSpPr txBox="1"/>
-          <p:nvPr/>
-        </p:nvSpPr>
-        <p:spPr>
-          <a:xfrm>
-            <a:off x="6903720" y="4754880"/>
-            <a:ext cx="4663440" cy="365760"/>
-          </a:xfrm>
-          <a:prstGeom prst="rect">
-            <a:avLst/>
-          </a:prstGeom>
-          <a:noFill/>
-        </p:spPr>
-        <p:txBody>
-          <a:bodyPr wrap="square" lIns="0" rIns="0" tIns="0" bIns="0" anchor="ctr">
-            <a:spAutoFit/>
-          </a:bodyPr>
-          <a:lstStyle/>
-          <a:p>
-            <a:pPr algn="l">
-              <a:lnSpc>
-                <a:spcPct val="115000"/>
-              </a:lnSpc>
-            </a:pPr>
-            <a:r>
-              <a:rPr sz="1300" b="0" i="0">
-                <a:solidFill>
-                  <a:srgbClr val="21295C"/>
-                </a:solidFill>
-                <a:latin typeface="Arial"/>
-              </a:rPr>
-              <a:t>2. Вмешательство — частично</a:t>
-            </a:r>
-          </a:p>
-        </p:txBody>
-      </p:sp>
-      <p:sp>
-        <p:nvSpPr>
-          <p:cNvPr id="27" name="Rounded Rectangle 26"/>
-          <p:cNvSpPr/>
-          <p:nvPr/>
-        </p:nvSpPr>
-        <p:spPr>
-          <a:xfrm>
-            <a:off x="6629400" y="5212079"/>
-            <a:ext cx="164592" cy="164592"/>
-          </a:xfrm>
-          <a:prstGeom prst="roundRect">
-            <a:avLst>
-              <a:gd name="adj" fmla="val 50000"/>
-            </a:avLst>
-          </a:prstGeom>
-          <a:solidFill>
-            <a:srgbClr val="6B7685"/>
-          </a:solidFill>
-          <a:ln>
-            <a:noFill/>
-          </a:ln>
-          <a:effectLst/>
-        </p:spPr>
-        <p:style>
-          <a:lnRef idx="1">
-            <a:schemeClr val="accent1"/>
-          </a:lnRef>
-          <a:fillRef idx="3">
-            <a:schemeClr val="accent1"/>
-          </a:fillRef>
-          <a:effectRef idx="2">
-            <a:schemeClr val="accent1"/>
-          </a:effectRef>
-          <a:fontRef idx="minor">
-            <a:schemeClr val="lt1"/>
-          </a:fontRef>
-        </p:style>
-        <p:txBody>
-          <a:bodyPr rtlCol="0" anchor="ctr"/>
-          <a:lstStyle/>
-          <a:p>
-            <a:pPr algn="ctr"/>
-          </a:p>
-        </p:txBody>
-      </p:sp>
-      <p:sp>
-        <p:nvSpPr>
-          <p:cNvPr id="28" name="TextBox 27"/>
-          <p:cNvSpPr txBox="1"/>
-          <p:nvPr/>
-        </p:nvSpPr>
-        <p:spPr>
-          <a:xfrm>
-            <a:off x="6903720" y="5120640"/>
-            <a:ext cx="4663440" cy="365760"/>
-          </a:xfrm>
-          <a:prstGeom prst="rect">
-            <a:avLst/>
-          </a:prstGeom>
-          <a:noFill/>
-        </p:spPr>
-        <p:txBody>
-          <a:bodyPr wrap="square" lIns="0" rIns="0" tIns="0" bIns="0" anchor="ctr">
-            <a:spAutoFit/>
-          </a:bodyPr>
-          <a:lstStyle/>
-          <a:p>
-            <a:pPr algn="l">
-              <a:lnSpc>
-                <a:spcPct val="115000"/>
-              </a:lnSpc>
-            </a:pPr>
-            <a:r>
-              <a:rPr sz="1300" b="0" i="0">
-                <a:solidFill>
-                  <a:srgbClr val="21295C"/>
-                </a:solidFill>
-                <a:latin typeface="Arial"/>
-              </a:rPr>
-              <a:t>3. Контрфактуальность — нет</a:t>
-            </a:r>
-          </a:p>
-        </p:txBody>
-      </p:sp>
-      <p:sp>
-        <p:nvSpPr>
-          <p:cNvPr id="29" name="TextBox 28"/>
-          <p:cNvSpPr txBox="1"/>
-          <p:nvPr/>
-        </p:nvSpPr>
-        <p:spPr>
-          <a:xfrm>
-            <a:off x="6537959" y="5623559"/>
-            <a:ext cx="4937760" cy="594360"/>
-          </a:xfrm>
-          <a:prstGeom prst="rect">
-            <a:avLst/>
-          </a:prstGeom>
-          <a:noFill/>
-        </p:spPr>
-        <p:txBody>
-          <a:bodyPr wrap="square" lIns="0" rIns="0" tIns="0" bIns="0" anchor="t">
-            <a:spAutoFit/>
-          </a:bodyPr>
-          <a:lstStyle/>
-          <a:p>
-            <a:pPr algn="l">
-              <a:lnSpc>
-                <a:spcPct val="130000"/>
-              </a:lnSpc>
-            </a:pPr>
-            <a:r>
-              <a:rPr sz="1200" b="0" i="1">
-                <a:solidFill>
-                  <a:srgbClr val="21295C"/>
-                </a:solidFill>
-                <a:latin typeface="Arial"/>
-              </a:rPr>
-              <a:t>Замечает паттерн «X и Y часто соседствуют» — корреляция, не каузальный граф.</a:t>
-            </a:r>
-          </a:p>
-        </p:txBody>
-      </p:sp>
-      <p:sp>
-        <p:nvSpPr>
-          <p:cNvPr id="30" name="TextBox 29"/>
-          <p:cNvSpPr txBox="1"/>
-          <p:nvPr/>
-        </p:nvSpPr>
-        <p:spPr>
-          <a:xfrm>
-            <a:off x="502920" y="6355080"/>
-            <a:ext cx="11247120" cy="365760"/>
-          </a:xfrm>
-          <a:prstGeom prst="rect">
-            <a:avLst/>
-          </a:prstGeom>
-          <a:noFill/>
-        </p:spPr>
-        <p:txBody>
-          <a:bodyPr wrap="square" lIns="0" rIns="0" tIns="0" bIns="0" anchor="t">
-            <a:spAutoFit/>
-          </a:bodyPr>
-          <a:lstStyle/>
-          <a:p>
-            <a:pPr algn="ctr">
-              <a:lnSpc>
-                <a:spcPct val="115000"/>
-              </a:lnSpc>
-            </a:pPr>
-            <a:r>
-              <a:rPr sz="1200" b="0" i="1">
-                <a:solidFill>
-                  <a:srgbClr val="1C7293"/>
-                </a:solidFill>
-                <a:latin typeface="Arial"/>
-              </a:rPr>
-              <a:t>Lec-1 §4.8 разбирала 3 уровня Перла. Теперь — механизм: attention считает веса в данных, не строит каузальный граф.</a:t>
+              <a:t>Инженерный вывод: для причинных выводов привлекайте domain-эксперта или causal-методы.</a:t>
             </a:r>
           </a:p>
         </p:txBody>
@@ -24648,13 +23687,13 @@
               </a:lnSpc>
             </a:pPr>
             <a:r>
-              <a:rPr sz="1500" b="0" i="1">
+              <a:rPr sz="1600" b="0" i="1">
                 <a:solidFill>
                   <a:srgbClr val="065A82"/>
                 </a:solidFill>
                 <a:latin typeface="Arial"/>
               </a:rPr>
-              <a:t>ДЗ к Семинару 2  —  apply LO4 + LO6 + LO7</a:t>
+              <a:t>ДЗ к Семинару 2 — apply температуры на своей задаче</a:t>
             </a:r>
           </a:p>
         </p:txBody>
@@ -24667,12 +23706,12 @@
         </p:nvSpPr>
         <p:spPr>
           <a:xfrm>
-            <a:off x="502920" y="1920240"/>
-            <a:ext cx="3611880" cy="3017520"/>
+            <a:off x="502920" y="1874519"/>
+            <a:ext cx="3611880" cy="3246120"/>
           </a:xfrm>
           <a:prstGeom prst="roundRect">
             <a:avLst>
-              <a:gd name="adj" fmla="val 10101"/>
+              <a:gd name="adj" fmla="val 9389"/>
             </a:avLst>
           </a:prstGeom>
           <a:solidFill>
@@ -24723,8 +23762,8 @@
         </p:blipFill>
         <p:spPr>
           <a:xfrm>
-            <a:off x="1851660" y="2194560"/>
-            <a:ext cx="914400" cy="914400"/>
+            <a:off x="1805940" y="2148839"/>
+            <a:ext cx="1005840" cy="1005840"/>
           </a:xfrm>
           <a:prstGeom prst="rect">
             <a:avLst/>
@@ -24739,8 +23778,8 @@
         </p:nvSpPr>
         <p:spPr>
           <a:xfrm>
-            <a:off x="685800" y="3200400"/>
-            <a:ext cx="3246120" cy="411480"/>
+            <a:off x="685800" y="3291839"/>
+            <a:ext cx="3246120" cy="457200"/>
           </a:xfrm>
           <a:prstGeom prst="rect">
             <a:avLst/>
@@ -24759,7 +23798,7 @@
               </a:lnSpc>
             </a:pPr>
             <a:r>
-              <a:rPr sz="1800" b="1" i="0">
+              <a:rPr sz="2000" b="1" i="0">
                 <a:solidFill>
                   <a:srgbClr val="065A82"/>
                 </a:solidFill>
@@ -24778,7 +23817,46 @@
         </p:nvSpPr>
         <p:spPr>
           <a:xfrm>
-            <a:off x="731520" y="3657600"/>
+            <a:off x="731520" y="3794760"/>
+            <a:ext cx="3154680" cy="685800"/>
+          </a:xfrm>
+          <a:prstGeom prst="rect">
+            <a:avLst/>
+          </a:prstGeom>
+          <a:noFill/>
+        </p:spPr>
+        <p:txBody>
+          <a:bodyPr wrap="square" lIns="0" rIns="0" tIns="0" bIns="0" anchor="t">
+            <a:spAutoFit/>
+          </a:bodyPr>
+          <a:lstStyle/>
+          <a:p>
+            <a:pPr algn="ctr">
+              <a:lnSpc>
+                <a:spcPct val="130000"/>
+              </a:lnSpc>
+            </a:pPr>
+            <a:r>
+              <a:rPr sz="1500" b="1" i="0">
+                <a:solidFill>
+                  <a:srgbClr val="21295C"/>
+                </a:solidFill>
+                <a:latin typeface="Arial"/>
+              </a:rPr>
+              <a:t>Возьмите типовую задачу из своей предметной области.</a:t>
+            </a:r>
+          </a:p>
+        </p:txBody>
+      </p:sp>
+      <p:sp>
+        <p:nvSpPr>
+          <p:cNvPr id="8" name="TextBox 7"/>
+          <p:cNvSpPr txBox="1"/>
+          <p:nvPr/>
+        </p:nvSpPr>
+        <p:spPr>
+          <a:xfrm>
+            <a:off x="731520" y="4480560"/>
             <a:ext cx="3154680" cy="594360"/>
           </a:xfrm>
           <a:prstGeom prst="rect">
@@ -24794,50 +23872,11 @@
           <a:p>
             <a:pPr algn="ctr">
               <a:lnSpc>
-                <a:spcPct val="130000"/>
-              </a:lnSpc>
-            </a:pPr>
-            <a:r>
-              <a:rPr sz="1300" b="1" i="0">
-                <a:solidFill>
-                  <a:srgbClr val="21295C"/>
-                </a:solidFill>
-                <a:latin typeface="Arial"/>
-              </a:rPr>
-              <a:t>Возьмите типовую задачу из своей предметной области.</a:t>
-            </a:r>
-          </a:p>
-        </p:txBody>
-      </p:sp>
-      <p:sp>
-        <p:nvSpPr>
-          <p:cNvPr id="8" name="TextBox 7"/>
-          <p:cNvSpPr txBox="1"/>
-          <p:nvPr/>
-        </p:nvSpPr>
-        <p:spPr>
-          <a:xfrm>
-            <a:off x="731520" y="4251960"/>
-            <a:ext cx="3154680" cy="640080"/>
-          </a:xfrm>
-          <a:prstGeom prst="rect">
-            <a:avLst/>
-          </a:prstGeom>
-          <a:noFill/>
-        </p:spPr>
-        <p:txBody>
-          <a:bodyPr wrap="square" lIns="0" rIns="0" tIns="0" bIns="0" anchor="t">
-            <a:spAutoFit/>
-          </a:bodyPr>
-          <a:lstStyle/>
-          <a:p>
-            <a:pPr algn="ctr">
-              <a:lnSpc>
                 <a:spcPct val="135000"/>
               </a:lnSpc>
             </a:pPr>
             <a:r>
-              <a:rPr sz="1200" b="0" i="1">
+              <a:rPr sz="1300" b="0" i="1">
                 <a:solidFill>
                   <a:srgbClr val="21295C"/>
                 </a:solidFill>
@@ -24856,12 +23895,12 @@
         </p:nvSpPr>
         <p:spPr>
           <a:xfrm>
-            <a:off x="4297680" y="1920240"/>
-            <a:ext cx="3611880" cy="3017520"/>
+            <a:off x="4297680" y="1874519"/>
+            <a:ext cx="3611880" cy="3246120"/>
           </a:xfrm>
           <a:prstGeom prst="roundRect">
             <a:avLst>
-              <a:gd name="adj" fmla="val 10101"/>
+              <a:gd name="adj" fmla="val 9389"/>
             </a:avLst>
           </a:prstGeom>
           <a:solidFill>
@@ -24912,8 +23951,8 @@
         </p:blipFill>
         <p:spPr>
           <a:xfrm>
-            <a:off x="5646420" y="2194560"/>
-            <a:ext cx="914400" cy="914400"/>
+            <a:off x="5600700" y="2148839"/>
+            <a:ext cx="1005840" cy="1005840"/>
           </a:xfrm>
           <a:prstGeom prst="rect">
             <a:avLst/>
@@ -24928,8 +23967,8 @@
         </p:nvSpPr>
         <p:spPr>
           <a:xfrm>
-            <a:off x="4480560" y="3200400"/>
-            <a:ext cx="3246120" cy="411480"/>
+            <a:off x="4480560" y="3291839"/>
+            <a:ext cx="3246120" cy="457200"/>
           </a:xfrm>
           <a:prstGeom prst="rect">
             <a:avLst/>
@@ -24948,7 +23987,7 @@
               </a:lnSpc>
             </a:pPr>
             <a:r>
-              <a:rPr sz="1800" b="1" i="0">
+              <a:rPr sz="2000" b="1" i="0">
                 <a:solidFill>
                   <a:srgbClr val="065A82"/>
                 </a:solidFill>
@@ -24967,7 +24006,46 @@
         </p:nvSpPr>
         <p:spPr>
           <a:xfrm>
-            <a:off x="4526280" y="3657600"/>
+            <a:off x="4526280" y="3794760"/>
+            <a:ext cx="3154680" cy="685800"/>
+          </a:xfrm>
+          <a:prstGeom prst="rect">
+            <a:avLst/>
+          </a:prstGeom>
+          <a:noFill/>
+        </p:spPr>
+        <p:txBody>
+          <a:bodyPr wrap="square" lIns="0" rIns="0" tIns="0" bIns="0" anchor="t">
+            <a:spAutoFit/>
+          </a:bodyPr>
+          <a:lstStyle/>
+          <a:p>
+            <a:pPr algn="ctr">
+              <a:lnSpc>
+                <a:spcPct val="130000"/>
+              </a:lnSpc>
+            </a:pPr>
+            <a:r>
+              <a:rPr sz="1500" b="1" i="0">
+                <a:solidFill>
+                  <a:srgbClr val="21295C"/>
+                </a:solidFill>
+                <a:latin typeface="Arial"/>
+              </a:rPr>
+              <a:t>Запустите в playground на 3 температурах.</a:t>
+            </a:r>
+          </a:p>
+        </p:txBody>
+      </p:sp>
+      <p:sp>
+        <p:nvSpPr>
+          <p:cNvPr id="13" name="TextBox 12"/>
+          <p:cNvSpPr txBox="1"/>
+          <p:nvPr/>
+        </p:nvSpPr>
+        <p:spPr>
+          <a:xfrm>
+            <a:off x="4526280" y="4480560"/>
             <a:ext cx="3154680" cy="594360"/>
           </a:xfrm>
           <a:prstGeom prst="rect">
@@ -24983,50 +24061,11 @@
           <a:p>
             <a:pPr algn="ctr">
               <a:lnSpc>
-                <a:spcPct val="130000"/>
-              </a:lnSpc>
-            </a:pPr>
-            <a:r>
-              <a:rPr sz="1300" b="1" i="0">
-                <a:solidFill>
-                  <a:srgbClr val="21295C"/>
-                </a:solidFill>
-                <a:latin typeface="Arial"/>
-              </a:rPr>
-              <a:t>Запустите в playground на 3 температурах.</a:t>
-            </a:r>
-          </a:p>
-        </p:txBody>
-      </p:sp>
-      <p:sp>
-        <p:nvSpPr>
-          <p:cNvPr id="13" name="TextBox 12"/>
-          <p:cNvSpPr txBox="1"/>
-          <p:nvPr/>
-        </p:nvSpPr>
-        <p:spPr>
-          <a:xfrm>
-            <a:off x="4526280" y="4251960"/>
-            <a:ext cx="3154680" cy="640080"/>
-          </a:xfrm>
-          <a:prstGeom prst="rect">
-            <a:avLst/>
-          </a:prstGeom>
-          <a:noFill/>
-        </p:spPr>
-        <p:txBody>
-          <a:bodyPr wrap="square" lIns="0" rIns="0" tIns="0" bIns="0" anchor="t">
-            <a:spAutoFit/>
-          </a:bodyPr>
-          <a:lstStyle/>
-          <a:p>
-            <a:pPr algn="ctr">
-              <a:lnSpc>
                 <a:spcPct val="135000"/>
               </a:lnSpc>
             </a:pPr>
             <a:r>
-              <a:rPr sz="1200" b="0" i="1">
+              <a:rPr sz="1300" b="0" i="1">
                 <a:solidFill>
                   <a:srgbClr val="21295C"/>
                 </a:solidFill>
@@ -25047,12 +24086,12 @@
         </p:nvSpPr>
         <p:spPr>
           <a:xfrm>
-            <a:off x="8092440" y="1920240"/>
-            <a:ext cx="3611880" cy="3017520"/>
+            <a:off x="8092440" y="1874519"/>
+            <a:ext cx="3611880" cy="3246120"/>
           </a:xfrm>
           <a:prstGeom prst="roundRect">
             <a:avLst>
-              <a:gd name="adj" fmla="val 10101"/>
+              <a:gd name="adj" fmla="val 9389"/>
             </a:avLst>
           </a:prstGeom>
           <a:solidFill>
@@ -25103,8 +24142,8 @@
         </p:blipFill>
         <p:spPr>
           <a:xfrm>
-            <a:off x="9441180" y="2194560"/>
-            <a:ext cx="914400" cy="914400"/>
+            <a:off x="9395460" y="2148839"/>
+            <a:ext cx="1005840" cy="1005840"/>
           </a:xfrm>
           <a:prstGeom prst="rect">
             <a:avLst/>
@@ -25119,8 +24158,8 @@
         </p:nvSpPr>
         <p:spPr>
           <a:xfrm>
-            <a:off x="8275320" y="3200400"/>
-            <a:ext cx="3246120" cy="411480"/>
+            <a:off x="8275320" y="3291839"/>
+            <a:ext cx="3246120" cy="457200"/>
           </a:xfrm>
           <a:prstGeom prst="rect">
             <a:avLst/>
@@ -25139,7 +24178,7 @@
               </a:lnSpc>
             </a:pPr>
             <a:r>
-              <a:rPr sz="1800" b="1" i="0">
+              <a:rPr sz="2000" b="1" i="0">
                 <a:solidFill>
                   <a:srgbClr val="065A82"/>
                 </a:solidFill>
@@ -25158,7 +24197,46 @@
         </p:nvSpPr>
         <p:spPr>
           <a:xfrm>
-            <a:off x="8321040" y="3657600"/>
+            <a:off x="8321040" y="3794760"/>
+            <a:ext cx="3154680" cy="685800"/>
+          </a:xfrm>
+          <a:prstGeom prst="rect">
+            <a:avLst/>
+          </a:prstGeom>
+          <a:noFill/>
+        </p:spPr>
+        <p:txBody>
+          <a:bodyPr wrap="square" lIns="0" rIns="0" tIns="0" bIns="0" anchor="t">
+            <a:spAutoFit/>
+          </a:bodyPr>
+          <a:lstStyle/>
+          <a:p>
+            <a:pPr algn="ctr">
+              <a:lnSpc>
+                <a:spcPct val="130000"/>
+              </a:lnSpc>
+            </a:pPr>
+            <a:r>
+              <a:rPr sz="1500" b="1" i="0">
+                <a:solidFill>
+                  <a:srgbClr val="21295C"/>
+                </a:solidFill>
+                <a:latin typeface="Arial"/>
+              </a:rPr>
+              <a:t>Принесите одностраничный разбор (1 A4).</a:t>
+            </a:r>
+          </a:p>
+        </p:txBody>
+      </p:sp>
+      <p:sp>
+        <p:nvSpPr>
+          <p:cNvPr id="18" name="TextBox 17"/>
+          <p:cNvSpPr txBox="1"/>
+          <p:nvPr/>
+        </p:nvSpPr>
+        <p:spPr>
+          <a:xfrm>
+            <a:off x="8321040" y="4480560"/>
             <a:ext cx="3154680" cy="594360"/>
           </a:xfrm>
           <a:prstGeom prst="rect">
@@ -25174,50 +24252,11 @@
           <a:p>
             <a:pPr algn="ctr">
               <a:lnSpc>
-                <a:spcPct val="130000"/>
-              </a:lnSpc>
-            </a:pPr>
-            <a:r>
-              <a:rPr sz="1300" b="1" i="0">
-                <a:solidFill>
-                  <a:srgbClr val="21295C"/>
-                </a:solidFill>
-                <a:latin typeface="Arial"/>
-              </a:rPr>
-              <a:t>Принесите одностраничный разбор (1 A4).</a:t>
-            </a:r>
-          </a:p>
-        </p:txBody>
-      </p:sp>
-      <p:sp>
-        <p:nvSpPr>
-          <p:cNvPr id="18" name="TextBox 17"/>
-          <p:cNvSpPr txBox="1"/>
-          <p:nvPr/>
-        </p:nvSpPr>
-        <p:spPr>
-          <a:xfrm>
-            <a:off x="8321040" y="4251960"/>
-            <a:ext cx="3154680" cy="640080"/>
-          </a:xfrm>
-          <a:prstGeom prst="rect">
-            <a:avLst/>
-          </a:prstGeom>
-          <a:noFill/>
-        </p:spPr>
-        <p:txBody>
-          <a:bodyPr wrap="square" lIns="0" rIns="0" tIns="0" bIns="0" anchor="t">
-            <a:spAutoFit/>
-          </a:bodyPr>
-          <a:lstStyle/>
-          <a:p>
-            <a:pPr algn="ctr">
-              <a:lnSpc>
                 <a:spcPct val="135000"/>
               </a:lnSpc>
             </a:pPr>
             <a:r>
-              <a:rPr sz="1200" b="0" i="1">
+              <a:rPr sz="1300" b="0" i="1">
                 <a:solidFill>
                   <a:srgbClr val="21295C"/>
                 </a:solidFill>
@@ -25236,12 +24275,12 @@
         </p:nvSpPr>
         <p:spPr>
           <a:xfrm>
-            <a:off x="502920" y="5166360"/>
-            <a:ext cx="7680960" cy="1188720"/>
+            <a:off x="502920" y="5349240"/>
+            <a:ext cx="7680960" cy="1280160"/>
           </a:xfrm>
           <a:prstGeom prst="roundRect">
             <a:avLst>
-              <a:gd name="adj" fmla="val 25000"/>
+              <a:gd name="adj" fmla="val 23809"/>
             </a:avLst>
           </a:prstGeom>
           <a:solidFill>
@@ -25284,7 +24323,7 @@
         </p:nvSpPr>
         <p:spPr>
           <a:xfrm>
-            <a:off x="685800" y="5276088"/>
+            <a:off x="685800" y="5477255"/>
             <a:ext cx="7315200" cy="365760"/>
           </a:xfrm>
           <a:prstGeom prst="rect">
@@ -25304,7 +24343,7 @@
               </a:lnSpc>
             </a:pPr>
             <a:r>
-              <a:rPr sz="1400" b="1" i="0">
+              <a:rPr sz="1500" b="1" i="0">
                 <a:solidFill>
                   <a:srgbClr val="065A82"/>
                 </a:solidFill>
@@ -25323,7 +24362,7 @@
         </p:nvSpPr>
         <p:spPr>
           <a:xfrm>
-            <a:off x="685800" y="5669280"/>
+            <a:off x="685800" y="5879592"/>
             <a:ext cx="7315200" cy="365760"/>
           </a:xfrm>
           <a:prstGeom prst="rect">
@@ -25343,7 +24382,7 @@
               </a:lnSpc>
             </a:pPr>
             <a:r>
-              <a:rPr sz="1200" b="0" i="0">
+              <a:rPr sz="1300" b="0" i="0">
                 <a:solidFill>
                   <a:srgbClr val="21295C"/>
                 </a:solidFill>
@@ -25362,7 +24401,7 @@
         </p:nvSpPr>
         <p:spPr>
           <a:xfrm>
-            <a:off x="685800" y="6007608"/>
+            <a:off x="685800" y="6263640"/>
             <a:ext cx="7315200" cy="320040"/>
           </a:xfrm>
           <a:prstGeom prst="rect">
@@ -25382,13 +24421,13 @@
               </a:lnSpc>
             </a:pPr>
             <a:r>
-              <a:rPr sz="1100" b="0" i="1">
+              <a:rPr sz="1200" b="0" i="1">
                 <a:solidFill>
                   <a:srgbClr val="1C7293"/>
                 </a:solidFill>
                 <a:latin typeface="Arial"/>
               </a:rPr>
-              <a:t>Fallback: Together.ai / Ollama локально с Llama 3   ·   НЕ подойдут: ChatGPT Free, Claude.ai</a:t>
+              <a:t>Fallback: Together.ai / Ollama локально   ·   НЕ подойдут: ChatGPT Free, Claude.ai</a:t>
             </a:r>
           </a:p>
         </p:txBody>
@@ -25401,8 +24440,8 @@
         </p:nvSpPr>
         <p:spPr>
           <a:xfrm>
-            <a:off x="8366760" y="5166360"/>
-            <a:ext cx="3383280" cy="1188720"/>
+            <a:off x="8366760" y="5349240"/>
+            <a:ext cx="3383280" cy="1280160"/>
           </a:xfrm>
           <a:prstGeom prst="roundRect">
             <a:avLst>
@@ -25449,7 +24488,7 @@
         </p:nvSpPr>
         <p:spPr>
           <a:xfrm>
-            <a:off x="8503920" y="5257800"/>
+            <a:off x="8503920" y="5458968"/>
             <a:ext cx="3200400" cy="365760"/>
           </a:xfrm>
           <a:prstGeom prst="rect">
@@ -25469,7 +24508,7 @@
               </a:lnSpc>
             </a:pPr>
             <a:r>
-              <a:rPr sz="1400" b="1" i="0">
+              <a:rPr sz="1600" b="1" i="0">
                 <a:solidFill>
                   <a:srgbClr val="21295C"/>
                 </a:solidFill>
@@ -25488,7 +24527,7 @@
         </p:nvSpPr>
         <p:spPr>
           <a:xfrm>
-            <a:off x="8503920" y="5623560"/>
+            <a:off x="8503920" y="5843016"/>
             <a:ext cx="3200400" cy="731520"/>
           </a:xfrm>
           <a:prstGeom prst="rect">
@@ -25508,52 +24547,13 @@
               </a:lnSpc>
             </a:pPr>
             <a:r>
-              <a:rPr sz="1100" b="0" i="1">
+              <a:rPr sz="1200" b="0" i="1">
                 <a:solidFill>
                   <a:srgbClr val="21295C"/>
                 </a:solidFill>
                 <a:latin typeface="Arial"/>
               </a:rPr>
-              <a:t>«Сколько р в "строгая регуляризация"» × 3 модели. Объяснить через §1.3 (токенизация).</a:t>
-            </a:r>
-          </a:p>
-        </p:txBody>
-      </p:sp>
-      <p:sp>
-        <p:nvSpPr>
-          <p:cNvPr id="26" name="TextBox 25"/>
-          <p:cNvSpPr txBox="1"/>
-          <p:nvPr/>
-        </p:nvSpPr>
-        <p:spPr>
-          <a:xfrm>
-            <a:off x="502920" y="6446520"/>
-            <a:ext cx="11247120" cy="274320"/>
-          </a:xfrm>
-          <a:prstGeom prst="rect">
-            <a:avLst/>
-          </a:prstGeom>
-          <a:noFill/>
-        </p:spPr>
-        <p:txBody>
-          <a:bodyPr wrap="square" lIns="0" rIns="0" tIns="0" bIns="0" anchor="t">
-            <a:spAutoFit/>
-          </a:bodyPr>
-          <a:lstStyle/>
-          <a:p>
-            <a:pPr algn="ctr">
-              <a:lnSpc>
-                <a:spcPct val="115000"/>
-              </a:lnSpc>
-            </a:pPr>
-            <a:r>
-              <a:rPr sz="1100" b="0" i="1">
-                <a:solidFill>
-                  <a:srgbClr val="1C7293"/>
-                </a:solidFill>
-                <a:latin typeface="Arial"/>
-              </a:rPr>
-              <a:t>[VERIFY-DAY-OF] доступность HF Playground за день до семинара.</a:t>
+              <a:t>«Сколько р в "строгая регуляризация"» × 3 модели. Объяснить через токенизацию.</a:t>
             </a:r>
           </a:p>
         </p:txBody>
@@ -25643,13 +24643,13 @@
               </a:lnSpc>
             </a:pPr>
             <a:r>
-              <a:rPr sz="1500" b="0" i="1">
+              <a:rPr sz="1600" b="0" i="1">
                 <a:solidFill>
                   <a:srgbClr val="065A82"/>
                 </a:solidFill>
                 <a:latin typeface="Arial"/>
               </a:rPr>
-              <a:t>Все 4 надстраиваются над single-shot inference (s21)</a:t>
+              <a:t>Все 4 концепции надстраиваются над single-shot inference</a:t>
             </a:r>
           </a:p>
         </p:txBody>
@@ -25663,11 +24663,11 @@
         <p:spPr>
           <a:xfrm>
             <a:off x="502920" y="1874519"/>
-            <a:ext cx="5486400" cy="1920240"/>
+            <a:ext cx="5486400" cy="2011680"/>
           </a:xfrm>
           <a:prstGeom prst="roundRect">
             <a:avLst>
-              <a:gd name="adj" fmla="val 15873"/>
+              <a:gd name="adj" fmla="val 15151"/>
             </a:avLst>
           </a:prstGeom>
           <a:solidFill>
@@ -25719,7 +24719,7 @@
         <p:spPr>
           <a:xfrm>
             <a:off x="731520" y="2148839"/>
-            <a:ext cx="777240" cy="777240"/>
+            <a:ext cx="868680" cy="868680"/>
           </a:xfrm>
           <a:prstGeom prst="rect">
             <a:avLst/>
@@ -25734,8 +24734,8 @@
         </p:nvSpPr>
         <p:spPr>
           <a:xfrm>
-            <a:off x="1645920" y="2057400"/>
-            <a:ext cx="4206240" cy="457200"/>
+            <a:off x="1737360" y="2057400"/>
+            <a:ext cx="4114800" cy="457200"/>
           </a:xfrm>
           <a:prstGeom prst="rect">
             <a:avLst/>
@@ -25754,7 +24754,7 @@
               </a:lnSpc>
             </a:pPr>
             <a:r>
-              <a:rPr sz="2000" b="1" i="0">
+              <a:rPr sz="2200" b="1" i="0">
                 <a:solidFill>
                   <a:srgbClr val="21295C"/>
                 </a:solidFill>
@@ -25773,8 +24773,8 @@
         </p:nvSpPr>
         <p:spPr>
           <a:xfrm>
-            <a:off x="1645920" y="2514600"/>
-            <a:ext cx="4206240" cy="365760"/>
+            <a:off x="1737360" y="2560320"/>
+            <a:ext cx="4114800" cy="365760"/>
           </a:xfrm>
           <a:prstGeom prst="rect">
             <a:avLst/>
@@ -25793,7 +24793,7 @@
               </a:lnSpc>
             </a:pPr>
             <a:r>
-              <a:rPr sz="1300" b="0" i="1">
+              <a:rPr sz="1400" b="0" i="1">
                 <a:solidFill>
                   <a:srgbClr val="065A82"/>
                 </a:solidFill>
@@ -25812,7 +24812,7 @@
         </p:nvSpPr>
         <p:spPr>
           <a:xfrm>
-            <a:off x="777240" y="2971800"/>
+            <a:off x="777240" y="3063239"/>
             <a:ext cx="5029200" cy="777240"/>
           </a:xfrm>
           <a:prstGeom prst="rect">
@@ -25832,13 +24832,13 @@
               </a:lnSpc>
             </a:pPr>
             <a:r>
-              <a:rPr sz="1300" b="0" i="0">
+              <a:rPr sz="1400" b="0" i="0">
                 <a:solidFill>
                   <a:srgbClr val="21295C"/>
                 </a:solidFill>
                 <a:latin typeface="Arial"/>
               </a:rPr>
-              <a:t>embedding similarity (s10–s12) + LLM → ответ из вашей базы</a:t>
+              <a:t>embedding similarity + LLM → ответ из вашей базы</a:t>
             </a:r>
           </a:p>
         </p:txBody>
@@ -25852,11 +24852,11 @@
         <p:spPr>
           <a:xfrm>
             <a:off x="6172200" y="1874519"/>
-            <a:ext cx="5486400" cy="1920240"/>
+            <a:ext cx="5486400" cy="2011680"/>
           </a:xfrm>
           <a:prstGeom prst="roundRect">
             <a:avLst>
-              <a:gd name="adj" fmla="val 15873"/>
+              <a:gd name="adj" fmla="val 15151"/>
             </a:avLst>
           </a:prstGeom>
           <a:solidFill>
@@ -25908,7 +24908,7 @@
         <p:spPr>
           <a:xfrm>
             <a:off x="6400800" y="2148839"/>
-            <a:ext cx="777240" cy="777240"/>
+            <a:ext cx="868680" cy="868680"/>
           </a:xfrm>
           <a:prstGeom prst="rect">
             <a:avLst/>
@@ -25923,8 +24923,8 @@
         </p:nvSpPr>
         <p:spPr>
           <a:xfrm>
-            <a:off x="7315200" y="2057400"/>
-            <a:ext cx="4206240" cy="457200"/>
+            <a:off x="7406640" y="2057400"/>
+            <a:ext cx="4114800" cy="457200"/>
           </a:xfrm>
           <a:prstGeom prst="rect">
             <a:avLst/>
@@ -25943,7 +24943,7 @@
               </a:lnSpc>
             </a:pPr>
             <a:r>
-              <a:rPr sz="2000" b="1" i="0">
+              <a:rPr sz="2200" b="1" i="0">
                 <a:solidFill>
                   <a:srgbClr val="21295C"/>
                 </a:solidFill>
@@ -25962,8 +24962,8 @@
         </p:nvSpPr>
         <p:spPr>
           <a:xfrm>
-            <a:off x="7315200" y="2514600"/>
-            <a:ext cx="4206240" cy="365760"/>
+            <a:off x="7406640" y="2560320"/>
+            <a:ext cx="4114800" cy="365760"/>
           </a:xfrm>
           <a:prstGeom prst="rect">
             <a:avLst/>
@@ -25982,7 +24982,7 @@
               </a:lnSpc>
             </a:pPr>
             <a:r>
-              <a:rPr sz="1300" b="0" i="1">
+              <a:rPr sz="1400" b="0" i="1">
                 <a:solidFill>
                   <a:srgbClr val="065A82"/>
                 </a:solidFill>
@@ -26001,7 +25001,7 @@
         </p:nvSpPr>
         <p:spPr>
           <a:xfrm>
-            <a:off x="6446520" y="2971800"/>
+            <a:off x="6446520" y="3063239"/>
             <a:ext cx="5029200" cy="777240"/>
           </a:xfrm>
           <a:prstGeom prst="rect">
@@ -26021,7 +25021,7 @@
               </a:lnSpc>
             </a:pPr>
             <a:r>
-              <a:rPr sz="1300" b="0" i="0">
+              <a:rPr sz="1400" b="0" i="0">
                 <a:solidFill>
                   <a:srgbClr val="21295C"/>
                 </a:solidFill>
@@ -26040,12 +25040,12 @@
         </p:nvSpPr>
         <p:spPr>
           <a:xfrm>
-            <a:off x="502920" y="3977639"/>
-            <a:ext cx="5486400" cy="1920240"/>
+            <a:off x="502920" y="4069080"/>
+            <a:ext cx="5486400" cy="2011680"/>
           </a:xfrm>
           <a:prstGeom prst="roundRect">
             <a:avLst>
-              <a:gd name="adj" fmla="val 15873"/>
+              <a:gd name="adj" fmla="val 15151"/>
             </a:avLst>
           </a:prstGeom>
           <a:solidFill>
@@ -26096,8 +25096,8 @@
         </p:blipFill>
         <p:spPr>
           <a:xfrm>
-            <a:off x="731520" y="4251959"/>
-            <a:ext cx="777240" cy="777240"/>
+            <a:off x="731520" y="4343400"/>
+            <a:ext cx="868680" cy="868680"/>
           </a:xfrm>
           <a:prstGeom prst="rect">
             <a:avLst/>
@@ -26112,8 +25112,8 @@
         </p:nvSpPr>
         <p:spPr>
           <a:xfrm>
-            <a:off x="1645920" y="4160520"/>
-            <a:ext cx="4206240" cy="457200"/>
+            <a:off x="1737360" y="4251960"/>
+            <a:ext cx="4114800" cy="457200"/>
           </a:xfrm>
           <a:prstGeom prst="rect">
             <a:avLst/>
@@ -26132,7 +25132,7 @@
               </a:lnSpc>
             </a:pPr>
             <a:r>
-              <a:rPr sz="2000" b="1" i="0">
+              <a:rPr sz="2200" b="1" i="0">
                 <a:solidFill>
                   <a:srgbClr val="21295C"/>
                 </a:solidFill>
@@ -26151,8 +25151,8 @@
         </p:nvSpPr>
         <p:spPr>
           <a:xfrm>
-            <a:off x="1645920" y="4617720"/>
-            <a:ext cx="4206240" cy="365760"/>
+            <a:off x="1737360" y="4754880"/>
+            <a:ext cx="4114800" cy="365760"/>
           </a:xfrm>
           <a:prstGeom prst="rect">
             <a:avLst/>
@@ -26171,7 +25171,7 @@
               </a:lnSpc>
             </a:pPr>
             <a:r>
-              <a:rPr sz="1300" b="0" i="1">
+              <a:rPr sz="1400" b="0" i="1">
                 <a:solidFill>
                   <a:srgbClr val="065A82"/>
                 </a:solidFill>
@@ -26190,7 +25190,7 @@
         </p:nvSpPr>
         <p:spPr>
           <a:xfrm>
-            <a:off x="777240" y="5074920"/>
+            <a:off x="777240" y="5257800"/>
             <a:ext cx="5029200" cy="777240"/>
           </a:xfrm>
           <a:prstGeom prst="rect">
@@ -26210,13 +25210,13 @@
               </a:lnSpc>
             </a:pPr>
             <a:r>
-              <a:rPr sz="1300" b="0" i="0">
+              <a:rPr sz="1400" b="0" i="0">
                 <a:solidFill>
                   <a:srgbClr val="21295C"/>
                 </a:solidFill>
                 <a:latin typeface="Arial"/>
               </a:rPr>
-              <a:t>Открытый стандарт подключения инструментов (Anthropic, 2024; Lec-1 §2.2)</a:t>
+              <a:t>Открытый стандарт подключения инструментов (Anthropic, 2024)</a:t>
             </a:r>
           </a:p>
         </p:txBody>
@@ -26229,12 +25229,12 @@
         </p:nvSpPr>
         <p:spPr>
           <a:xfrm>
-            <a:off x="6172200" y="3977639"/>
-            <a:ext cx="5486400" cy="1920240"/>
+            <a:off x="6172200" y="4069080"/>
+            <a:ext cx="5486400" cy="2011680"/>
           </a:xfrm>
           <a:prstGeom prst="roundRect">
             <a:avLst>
-              <a:gd name="adj" fmla="val 15873"/>
+              <a:gd name="adj" fmla="val 15151"/>
             </a:avLst>
           </a:prstGeom>
           <a:solidFill>
@@ -26285,8 +25285,8 @@
         </p:blipFill>
         <p:spPr>
           <a:xfrm>
-            <a:off x="6400800" y="4251959"/>
-            <a:ext cx="777240" cy="777240"/>
+            <a:off x="6400800" y="4343400"/>
+            <a:ext cx="868680" cy="868680"/>
           </a:xfrm>
           <a:prstGeom prst="rect">
             <a:avLst/>
@@ -26301,8 +25301,8 @@
         </p:nvSpPr>
         <p:spPr>
           <a:xfrm>
-            <a:off x="7315200" y="4160520"/>
-            <a:ext cx="4206240" cy="457200"/>
+            <a:off x="7406640" y="4251960"/>
+            <a:ext cx="4114800" cy="457200"/>
           </a:xfrm>
           <a:prstGeom prst="rect">
             <a:avLst/>
@@ -26321,7 +25321,7 @@
               </a:lnSpc>
             </a:pPr>
             <a:r>
-              <a:rPr sz="2000" b="1" i="0">
+              <a:rPr sz="2200" b="1" i="0">
                 <a:solidFill>
                   <a:srgbClr val="21295C"/>
                 </a:solidFill>
@@ -26340,8 +25340,8 @@
         </p:nvSpPr>
         <p:spPr>
           <a:xfrm>
-            <a:off x="7315200" y="4617720"/>
-            <a:ext cx="4206240" cy="365760"/>
+            <a:off x="7406640" y="4754880"/>
+            <a:ext cx="4114800" cy="365760"/>
           </a:xfrm>
           <a:prstGeom prst="rect">
             <a:avLst/>
@@ -26360,7 +25360,7 @@
               </a:lnSpc>
             </a:pPr>
             <a:r>
-              <a:rPr sz="1300" b="0" i="1">
+              <a:rPr sz="1400" b="0" i="1">
                 <a:solidFill>
                   <a:srgbClr val="065A82"/>
                 </a:solidFill>
@@ -26379,7 +25379,7 @@
         </p:nvSpPr>
         <p:spPr>
           <a:xfrm>
-            <a:off x="6446520" y="5074920"/>
+            <a:off x="6446520" y="5257800"/>
             <a:ext cx="5029200" cy="777240"/>
           </a:xfrm>
           <a:prstGeom prst="rect">
@@ -26399,7 +25399,7 @@
               </a:lnSpc>
             </a:pPr>
             <a:r>
-              <a:rPr sz="1300" b="0" i="0">
+              <a:rPr sz="1400" b="0" i="0">
                 <a:solidFill>
                   <a:srgbClr val="21295C"/>
                 </a:solidFill>
@@ -26418,12 +25418,12 @@
         </p:nvSpPr>
         <p:spPr>
           <a:xfrm>
-            <a:off x="502920" y="5989320"/>
-            <a:ext cx="11247120" cy="731520"/>
+            <a:off x="502920" y="6172200"/>
+            <a:ext cx="11247120" cy="594360"/>
           </a:xfrm>
           <a:prstGeom prst="roundRect">
             <a:avLst>
-              <a:gd name="adj" fmla="val 20000"/>
+              <a:gd name="adj" fmla="val 30000"/>
             </a:avLst>
           </a:prstGeom>
           <a:solidFill>
@@ -26466,7 +25466,7 @@
         </p:nvSpPr>
         <p:spPr>
           <a:xfrm>
-            <a:off x="777240" y="6080759"/>
+            <a:off x="777240" y="6217920"/>
             <a:ext cx="10972800" cy="274320"/>
           </a:xfrm>
           <a:prstGeom prst="rect">
@@ -26486,7 +25486,7 @@
               </a:lnSpc>
             </a:pPr>
             <a:r>
-              <a:rPr sz="1600" b="1" i="0">
+              <a:rPr sz="1800" b="1" i="0">
                 <a:solidFill>
                   <a:srgbClr val="21295C"/>
                 </a:solidFill>
@@ -26505,8 +25505,8 @@
         </p:nvSpPr>
         <p:spPr>
           <a:xfrm>
-            <a:off x="777240" y="6355080"/>
-            <a:ext cx="10972800" cy="320040"/>
+            <a:off x="777240" y="6464808"/>
+            <a:ext cx="10972800" cy="274320"/>
           </a:xfrm>
           <a:prstGeom prst="rect">
             <a:avLst/>
@@ -27387,7 +26387,7 @@
         <p:spPr>
           <a:xfrm>
             <a:off x="4023360" y="2971800"/>
-            <a:ext cx="4114800" cy="365760"/>
+            <a:ext cx="4114800" cy="411480"/>
           </a:xfrm>
           <a:prstGeom prst="roundRect">
             <a:avLst>
@@ -27435,7 +26435,7 @@
         <p:spPr>
           <a:xfrm>
             <a:off x="4023360" y="3017520"/>
-            <a:ext cx="4114800" cy="274320"/>
+            <a:ext cx="4114800" cy="320040"/>
           </a:xfrm>
           <a:prstGeom prst="rect">
             <a:avLst/>
@@ -27454,13 +26454,13 @@
               </a:lnSpc>
             </a:pPr>
             <a:r>
-              <a:rPr sz="1200" b="1" i="1">
+              <a:rPr sz="1300" b="1" i="1">
                 <a:solidFill>
                   <a:srgbClr val="21295C"/>
                 </a:solidFill>
                 <a:latin typeface="Arial"/>
               </a:rPr>
-              <a:t>3 ответа — payoff на s24</a:t>
+              <a:t>3 ответа — финал лекции</a:t>
             </a:r>
           </a:p>
         </p:txBody>
@@ -27522,7 +26522,7 @@
         <p:spPr>
           <a:xfrm>
             <a:off x="777240" y="3886200"/>
-            <a:ext cx="502920" cy="502920"/>
+            <a:ext cx="594360" cy="594360"/>
           </a:xfrm>
           <a:prstGeom prst="roundRect">
             <a:avLst>
@@ -27568,7 +26568,7 @@
         <p:spPr>
           <a:xfrm>
             <a:off x="777240" y="3904488"/>
-            <a:ext cx="502920" cy="457200"/>
+            <a:ext cx="594360" cy="548640"/>
           </a:xfrm>
           <a:prstGeom prst="rect">
             <a:avLst/>
@@ -27587,7 +26587,7 @@
               </a:lnSpc>
             </a:pPr>
             <a:r>
-              <a:rPr sz="2200" b="1" i="0">
+              <a:rPr sz="2400" b="1" i="0">
                 <a:solidFill>
                   <a:srgbClr val="FFFFFF"/>
                 </a:solidFill>
@@ -27606,8 +26606,8 @@
         </p:nvSpPr>
         <p:spPr>
           <a:xfrm>
-            <a:off x="1463040" y="3886200"/>
-            <a:ext cx="2468880" cy="1371600"/>
+            <a:off x="1554480" y="3886200"/>
+            <a:ext cx="2377440" cy="1371600"/>
           </a:xfrm>
           <a:prstGeom prst="rect">
             <a:avLst/>
@@ -27626,7 +26626,7 @@
               </a:lnSpc>
             </a:pPr>
             <a:r>
-              <a:rPr sz="1600" b="1" i="0">
+              <a:rPr sz="1700" b="1" i="0">
                 <a:solidFill>
                   <a:srgbClr val="21295C"/>
                 </a:solidFill>
@@ -27646,8 +26646,8 @@
         </p:nvSpPr>
         <p:spPr>
           <a:xfrm>
-            <a:off x="777240" y="5394960"/>
-            <a:ext cx="3063240" cy="365760"/>
+            <a:off x="777240" y="5532120"/>
+            <a:ext cx="3063240" cy="457200"/>
           </a:xfrm>
           <a:prstGeom prst="rect">
             <a:avLst/>
@@ -27666,7 +26666,7 @@
               </a:lnSpc>
             </a:pPr>
             <a:r>
-              <a:rPr sz="1400" b="0" i="1">
+              <a:rPr sz="1500" b="0" i="1">
                 <a:solidFill>
                   <a:srgbClr val="065A82"/>
                 </a:solidFill>
@@ -27679,46 +26679,7 @@
       </p:sp>
       <p:sp>
         <p:nvSpPr>
-          <p:cNvPr id="12" name="TextBox 11"/>
-          <p:cNvSpPr txBox="1"/>
-          <p:nvPr/>
-        </p:nvSpPr>
-        <p:spPr>
-          <a:xfrm>
-            <a:off x="777240" y="5760720"/>
-            <a:ext cx="3063240" cy="320040"/>
-          </a:xfrm>
-          <a:prstGeom prst="rect">
-            <a:avLst/>
-          </a:prstGeom>
-          <a:noFill/>
-        </p:spPr>
-        <p:txBody>
-          <a:bodyPr wrap="square" lIns="0" rIns="0" tIns="0" bIns="0" anchor="t">
-            <a:spAutoFit/>
-          </a:bodyPr>
-          <a:lstStyle/>
-          <a:p>
-            <a:pPr algn="l">
-              <a:lnSpc>
-                <a:spcPct val="115000"/>
-              </a:lnSpc>
-            </a:pPr>
-            <a:r>
-              <a:rPr sz="1100" b="0" i="1">
-                <a:solidFill>
-                  <a:srgbClr val="1C7293"/>
-                </a:solidFill>
-                <a:latin typeface="Arial"/>
-              </a:rPr>
-              <a:t>якорь: s15</a:t>
-            </a:r>
-          </a:p>
-        </p:txBody>
-      </p:sp>
-      <p:sp>
-        <p:nvSpPr>
-          <p:cNvPr id="13" name="Rounded Rectangle 12"/>
+          <p:cNvPr id="12" name="Rounded Rectangle 11"/>
           <p:cNvSpPr/>
           <p:nvPr/>
         </p:nvSpPr>
@@ -27766,14 +26727,14 @@
       </p:sp>
       <p:sp>
         <p:nvSpPr>
-          <p:cNvPr id="14" name="Rounded Rectangle 13"/>
+          <p:cNvPr id="13" name="Rounded Rectangle 12"/>
           <p:cNvSpPr/>
           <p:nvPr/>
         </p:nvSpPr>
         <p:spPr>
           <a:xfrm>
             <a:off x="4572000" y="3886200"/>
-            <a:ext cx="502920" cy="502920"/>
+            <a:ext cx="594360" cy="594360"/>
           </a:xfrm>
           <a:prstGeom prst="roundRect">
             <a:avLst>
@@ -27812,53 +26773,53 @@
       </p:sp>
       <p:sp>
         <p:nvSpPr>
+          <p:cNvPr id="14" name="TextBox 13"/>
+          <p:cNvSpPr txBox="1"/>
+          <p:nvPr/>
+        </p:nvSpPr>
+        <p:spPr>
+          <a:xfrm>
+            <a:off x="4572000" y="3904488"/>
+            <a:ext cx="594360" cy="548640"/>
+          </a:xfrm>
+          <a:prstGeom prst="rect">
+            <a:avLst/>
+          </a:prstGeom>
+          <a:noFill/>
+        </p:spPr>
+        <p:txBody>
+          <a:bodyPr wrap="square" lIns="0" rIns="0" tIns="0" bIns="0" anchor="ctr">
+            <a:spAutoFit/>
+          </a:bodyPr>
+          <a:lstStyle/>
+          <a:p>
+            <a:pPr algn="ctr">
+              <a:lnSpc>
+                <a:spcPct val="115000"/>
+              </a:lnSpc>
+            </a:pPr>
+            <a:r>
+              <a:rPr sz="2400" b="1" i="0">
+                <a:solidFill>
+                  <a:srgbClr val="FFFFFF"/>
+                </a:solidFill>
+                <a:latin typeface="Arial"/>
+              </a:rPr>
+              <a:t>2</a:t>
+            </a:r>
+          </a:p>
+        </p:txBody>
+      </p:sp>
+      <p:sp>
+        <p:nvSpPr>
           <p:cNvPr id="15" name="TextBox 14"/>
           <p:cNvSpPr txBox="1"/>
           <p:nvPr/>
         </p:nvSpPr>
         <p:spPr>
           <a:xfrm>
-            <a:off x="4572000" y="3904488"/>
-            <a:ext cx="502920" cy="457200"/>
-          </a:xfrm>
-          <a:prstGeom prst="rect">
-            <a:avLst/>
-          </a:prstGeom>
-          <a:noFill/>
-        </p:spPr>
-        <p:txBody>
-          <a:bodyPr wrap="square" lIns="0" rIns="0" tIns="0" bIns="0" anchor="ctr">
-            <a:spAutoFit/>
-          </a:bodyPr>
-          <a:lstStyle/>
-          <a:p>
-            <a:pPr algn="ctr">
-              <a:lnSpc>
-                <a:spcPct val="115000"/>
-              </a:lnSpc>
-            </a:pPr>
-            <a:r>
-              <a:rPr sz="2200" b="1" i="0">
-                <a:solidFill>
-                  <a:srgbClr val="FFFFFF"/>
-                </a:solidFill>
-                <a:latin typeface="Arial"/>
-              </a:rPr>
-              <a:t>2</a:t>
-            </a:r>
-          </a:p>
-        </p:txBody>
-      </p:sp>
-      <p:sp>
-        <p:nvSpPr>
-          <p:cNvPr id="16" name="TextBox 15"/>
-          <p:cNvSpPr txBox="1"/>
-          <p:nvPr/>
-        </p:nvSpPr>
-        <p:spPr>
-          <a:xfrm>
-            <a:off x="5257800" y="3886200"/>
-            <a:ext cx="2468880" cy="1371600"/>
+            <a:off x="5349240" y="3886200"/>
+            <a:ext cx="2377440" cy="1371600"/>
           </a:xfrm>
           <a:prstGeom prst="rect">
             <a:avLst/>
@@ -27877,7 +26838,7 @@
               </a:lnSpc>
             </a:pPr>
             <a:r>
-              <a:rPr sz="1600" b="1" i="0">
+              <a:rPr sz="1700" b="1" i="0">
                 <a:solidFill>
                   <a:srgbClr val="21295C"/>
                 </a:solidFill>
@@ -27891,14 +26852,14 @@
       </p:sp>
       <p:sp>
         <p:nvSpPr>
-          <p:cNvPr id="17" name="TextBox 16"/>
-          <p:cNvSpPr txBox="1"/>
-          <p:nvPr/>
-        </p:nvSpPr>
-        <p:spPr>
-          <a:xfrm>
-            <a:off x="4572000" y="5394960"/>
-            <a:ext cx="3063240" cy="365760"/>
+          <p:cNvPr id="16" name="TextBox 15"/>
+          <p:cNvSpPr txBox="1"/>
+          <p:nvPr/>
+        </p:nvSpPr>
+        <p:spPr>
+          <a:xfrm>
+            <a:off x="4572000" y="5532120"/>
+            <a:ext cx="3063240" cy="457200"/>
           </a:xfrm>
           <a:prstGeom prst="rect">
             <a:avLst/>
@@ -27917,7 +26878,7 @@
               </a:lnSpc>
             </a:pPr>
             <a:r>
-              <a:rPr sz="1400" b="0" i="1">
+              <a:rPr sz="1500" b="0" i="1">
                 <a:solidFill>
                   <a:srgbClr val="065A82"/>
                 </a:solidFill>
@@ -27930,46 +26891,7 @@
       </p:sp>
       <p:sp>
         <p:nvSpPr>
-          <p:cNvPr id="18" name="TextBox 17"/>
-          <p:cNvSpPr txBox="1"/>
-          <p:nvPr/>
-        </p:nvSpPr>
-        <p:spPr>
-          <a:xfrm>
-            <a:off x="4572000" y="5760720"/>
-            <a:ext cx="3063240" cy="320040"/>
-          </a:xfrm>
-          <a:prstGeom prst="rect">
-            <a:avLst/>
-          </a:prstGeom>
-          <a:noFill/>
-        </p:spPr>
-        <p:txBody>
-          <a:bodyPr wrap="square" lIns="0" rIns="0" tIns="0" bIns="0" anchor="t">
-            <a:spAutoFit/>
-          </a:bodyPr>
-          <a:lstStyle/>
-          <a:p>
-            <a:pPr algn="l">
-              <a:lnSpc>
-                <a:spcPct val="115000"/>
-              </a:lnSpc>
-            </a:pPr>
-            <a:r>
-              <a:rPr sz="1100" b="0" i="1">
-                <a:solidFill>
-                  <a:srgbClr val="1C7293"/>
-                </a:solidFill>
-                <a:latin typeface="Arial"/>
-              </a:rPr>
-              <a:t>якорь: s07</a:t>
-            </a:r>
-          </a:p>
-        </p:txBody>
-      </p:sp>
-      <p:sp>
-        <p:nvSpPr>
-          <p:cNvPr id="19" name="Rounded Rectangle 18"/>
+          <p:cNvPr id="17" name="Rounded Rectangle 16"/>
           <p:cNvSpPr/>
           <p:nvPr/>
         </p:nvSpPr>
@@ -28017,14 +26939,14 @@
       </p:sp>
       <p:sp>
         <p:nvSpPr>
-          <p:cNvPr id="20" name="Rounded Rectangle 19"/>
+          <p:cNvPr id="18" name="Rounded Rectangle 17"/>
           <p:cNvSpPr/>
           <p:nvPr/>
         </p:nvSpPr>
         <p:spPr>
           <a:xfrm>
             <a:off x="8366760" y="3886200"/>
-            <a:ext cx="502920" cy="502920"/>
+            <a:ext cx="594360" cy="594360"/>
           </a:xfrm>
           <a:prstGeom prst="roundRect">
             <a:avLst>
@@ -28063,14 +26985,14 @@
       </p:sp>
       <p:sp>
         <p:nvSpPr>
-          <p:cNvPr id="21" name="TextBox 20"/>
+          <p:cNvPr id="19" name="TextBox 18"/>
           <p:cNvSpPr txBox="1"/>
           <p:nvPr/>
         </p:nvSpPr>
         <p:spPr>
           <a:xfrm>
             <a:off x="8366760" y="3904488"/>
-            <a:ext cx="502920" cy="457200"/>
+            <a:ext cx="594360" cy="548640"/>
           </a:xfrm>
           <a:prstGeom prst="rect">
             <a:avLst/>
@@ -28089,7 +27011,7 @@
               </a:lnSpc>
             </a:pPr>
             <a:r>
-              <a:rPr sz="2200" b="1" i="0">
+              <a:rPr sz="2400" b="1" i="0">
                 <a:solidFill>
                   <a:srgbClr val="FFFFFF"/>
                 </a:solidFill>
@@ -28102,14 +27024,14 @@
       </p:sp>
       <p:sp>
         <p:nvSpPr>
-          <p:cNvPr id="22" name="TextBox 21"/>
-          <p:cNvSpPr txBox="1"/>
-          <p:nvPr/>
-        </p:nvSpPr>
-        <p:spPr>
-          <a:xfrm>
-            <a:off x="9052560" y="3886200"/>
-            <a:ext cx="2468880" cy="1371600"/>
+          <p:cNvPr id="20" name="TextBox 19"/>
+          <p:cNvSpPr txBox="1"/>
+          <p:nvPr/>
+        </p:nvSpPr>
+        <p:spPr>
+          <a:xfrm>
+            <a:off x="9144000" y="3886200"/>
+            <a:ext cx="2377440" cy="1371600"/>
           </a:xfrm>
           <a:prstGeom prst="rect">
             <a:avLst/>
@@ -28128,7 +27050,7 @@
               </a:lnSpc>
             </a:pPr>
             <a:r>
-              <a:rPr sz="1600" b="1" i="0">
+              <a:rPr sz="1700" b="1" i="0">
                 <a:solidFill>
                   <a:srgbClr val="21295C"/>
                 </a:solidFill>
@@ -28142,14 +27064,14 @@
       </p:sp>
       <p:sp>
         <p:nvSpPr>
-          <p:cNvPr id="23" name="TextBox 22"/>
-          <p:cNvSpPr txBox="1"/>
-          <p:nvPr/>
-        </p:nvSpPr>
-        <p:spPr>
-          <a:xfrm>
-            <a:off x="8366760" y="5394960"/>
-            <a:ext cx="3063240" cy="365760"/>
+          <p:cNvPr id="21" name="TextBox 20"/>
+          <p:cNvSpPr txBox="1"/>
+          <p:nvPr/>
+        </p:nvSpPr>
+        <p:spPr>
+          <a:xfrm>
+            <a:off x="8366760" y="5532120"/>
+            <a:ext cx="3063240" cy="457200"/>
           </a:xfrm>
           <a:prstGeom prst="rect">
             <a:avLst/>
@@ -28168,52 +27090,13 @@
               </a:lnSpc>
             </a:pPr>
             <a:r>
-              <a:rPr sz="1400" b="0" i="1">
+              <a:rPr sz="1500" b="0" i="1">
                 <a:solidFill>
                   <a:srgbClr val="065A82"/>
                 </a:solidFill>
                 <a:latin typeface="Arial"/>
               </a:rPr>
               <a:t>→ Раздел 4 — сэмплинг</a:t>
-            </a:r>
-          </a:p>
-        </p:txBody>
-      </p:sp>
-      <p:sp>
-        <p:nvSpPr>
-          <p:cNvPr id="24" name="TextBox 23"/>
-          <p:cNvSpPr txBox="1"/>
-          <p:nvPr/>
-        </p:nvSpPr>
-        <p:spPr>
-          <a:xfrm>
-            <a:off x="8366760" y="5760720"/>
-            <a:ext cx="3063240" cy="320040"/>
-          </a:xfrm>
-          <a:prstGeom prst="rect">
-            <a:avLst/>
-          </a:prstGeom>
-          <a:noFill/>
-        </p:spPr>
-        <p:txBody>
-          <a:bodyPr wrap="square" lIns="0" rIns="0" tIns="0" bIns="0" anchor="t">
-            <a:spAutoFit/>
-          </a:bodyPr>
-          <a:lstStyle/>
-          <a:p>
-            <a:pPr algn="l">
-              <a:lnSpc>
-                <a:spcPct val="115000"/>
-              </a:lnSpc>
-            </a:pPr>
-            <a:r>
-              <a:rPr sz="1100" b="0" i="1">
-                <a:solidFill>
-                  <a:srgbClr val="1C7293"/>
-                </a:solidFill>
-                <a:latin typeface="Arial"/>
-              </a:rPr>
-              <a:t>якорь: s19</a:t>
             </a:r>
           </a:p>
         </p:txBody>
@@ -30820,8 +29703,8 @@
         </p:nvSpPr>
         <p:spPr>
           <a:xfrm>
-            <a:off x="6629400" y="1554480"/>
-            <a:ext cx="4892040" cy="365760"/>
+            <a:off x="6629400" y="1527048"/>
+            <a:ext cx="4892040" cy="411480"/>
           </a:xfrm>
           <a:prstGeom prst="rect">
             <a:avLst/>
@@ -30840,13 +29723,13 @@
               </a:lnSpc>
             </a:pPr>
             <a:r>
-              <a:rPr sz="1500" b="1" i="0">
+              <a:rPr sz="1800" b="1" i="0">
                 <a:solidFill>
                   <a:srgbClr val="065A82"/>
                 </a:solidFill>
                 <a:latin typeface="Arial"/>
               </a:rPr>
-              <a:t>(1) Подсчёт символов</a:t>
+              <a:t>Подсчёт символов</a:t>
             </a:r>
           </a:p>
         </p:txBody>
@@ -30859,8 +29742,8 @@
         </p:nvSpPr>
         <p:spPr>
           <a:xfrm>
-            <a:off x="6629400" y="1965960"/>
-            <a:ext cx="4892040" cy="822960"/>
+            <a:off x="6629400" y="1984248"/>
+            <a:ext cx="4892040" cy="777240"/>
           </a:xfrm>
           <a:prstGeom prst="rect">
             <a:avLst/>
@@ -30875,11 +29758,11 @@
           <a:p>
             <a:pPr algn="l">
               <a:lnSpc>
-                <a:spcPct val="125000"/>
-              </a:lnSpc>
-            </a:pPr>
-            <a:r>
-              <a:rPr sz="1300" b="0" i="0">
+                <a:spcPct val="130000"/>
+              </a:lnSpc>
+            </a:pPr>
+            <a:r>
+              <a:rPr sz="1500" b="0" i="0">
                 <a:solidFill>
                   <a:srgbClr val="21295C"/>
                 </a:solidFill>
@@ -30946,8 +29829,8 @@
         </p:nvSpPr>
         <p:spPr>
           <a:xfrm>
-            <a:off x="6629400" y="3044951"/>
-            <a:ext cx="4892040" cy="365760"/>
+            <a:off x="6629400" y="3017520"/>
+            <a:ext cx="4892040" cy="411480"/>
           </a:xfrm>
           <a:prstGeom prst="rect">
             <a:avLst/>
@@ -30966,13 +29849,13 @@
               </a:lnSpc>
             </a:pPr>
             <a:r>
-              <a:rPr sz="1500" b="1" i="0">
+              <a:rPr sz="1800" b="1" i="0">
                 <a:solidFill>
                   <a:srgbClr val="065A82"/>
                 </a:solidFill>
                 <a:latin typeface="Arial"/>
               </a:rPr>
-              <a:t>(2) Опечатки</a:t>
+              <a:t>Опечатки</a:t>
             </a:r>
           </a:p>
         </p:txBody>
@@ -30985,8 +29868,8 @@
         </p:nvSpPr>
         <p:spPr>
           <a:xfrm>
-            <a:off x="6629400" y="3456432"/>
-            <a:ext cx="4892040" cy="822960"/>
+            <a:off x="6629400" y="3474720"/>
+            <a:ext cx="4892040" cy="777240"/>
           </a:xfrm>
           <a:prstGeom prst="rect">
             <a:avLst/>
@@ -31001,11 +29884,11 @@
           <a:p>
             <a:pPr algn="l">
               <a:lnSpc>
-                <a:spcPct val="125000"/>
-              </a:lnSpc>
-            </a:pPr>
-            <a:r>
-              <a:rPr sz="1300" b="0" i="0">
+                <a:spcPct val="130000"/>
+              </a:lnSpc>
+            </a:pPr>
+            <a:r>
+              <a:rPr sz="1500" b="0" i="0">
                 <a:solidFill>
                   <a:srgbClr val="21295C"/>
                 </a:solidFill>
@@ -31072,8 +29955,8 @@
         </p:nvSpPr>
         <p:spPr>
           <a:xfrm>
-            <a:off x="6629400" y="4535424"/>
-            <a:ext cx="4892040" cy="365760"/>
+            <a:off x="6629400" y="4507992"/>
+            <a:ext cx="4892040" cy="411480"/>
           </a:xfrm>
           <a:prstGeom prst="rect">
             <a:avLst/>
@@ -31092,13 +29975,13 @@
               </a:lnSpc>
             </a:pPr>
             <a:r>
-              <a:rPr sz="1500" b="1" i="0">
+              <a:rPr sz="1800" b="1" i="0">
                 <a:solidFill>
                   <a:srgbClr val="065A82"/>
                 </a:solidFill>
                 <a:latin typeface="Arial"/>
               </a:rPr>
-              <a:t>(3) Регистр и пробелы</a:t>
+              <a:t>Регистр и пробелы</a:t>
             </a:r>
           </a:p>
         </p:txBody>
@@ -31111,8 +29994,8 @@
         </p:nvSpPr>
         <p:spPr>
           <a:xfrm>
-            <a:off x="6629400" y="4946903"/>
-            <a:ext cx="4892040" cy="822960"/>
+            <a:off x="6629400" y="4965192"/>
+            <a:ext cx="4892040" cy="777240"/>
           </a:xfrm>
           <a:prstGeom prst="rect">
             <a:avLst/>
@@ -31127,11 +30010,11 @@
           <a:p>
             <a:pPr algn="l">
               <a:lnSpc>
-                <a:spcPct val="125000"/>
-              </a:lnSpc>
-            </a:pPr>
-            <a:r>
-              <a:rPr sz="1300" b="0" i="0">
+                <a:spcPct val="130000"/>
+              </a:lnSpc>
+            </a:pPr>
+            <a:r>
+              <a:rPr sz="1500" b="0" i="0">
                 <a:solidFill>
                   <a:srgbClr val="21295C"/>
                 </a:solidFill>
@@ -31151,7 +30034,7 @@
         <p:spPr>
           <a:xfrm>
             <a:off x="502920" y="5943600"/>
-            <a:ext cx="11247120" cy="594360"/>
+            <a:ext cx="11247120" cy="777240"/>
           </a:xfrm>
           <a:prstGeom prst="roundRect">
             <a:avLst>
@@ -31199,7 +30082,7 @@
         <p:spPr>
           <a:xfrm>
             <a:off x="685800" y="6016752"/>
-            <a:ext cx="10881360" cy="448056"/>
+            <a:ext cx="10881360" cy="630936"/>
           </a:xfrm>
           <a:prstGeom prst="rect">
             <a:avLst/>
@@ -31218,52 +30101,13 @@
               </a:lnSpc>
             </a:pPr>
             <a:r>
-              <a:rPr sz="1500" b="1" i="0">
+              <a:rPr sz="1800" b="1" i="0">
                 <a:solidFill>
                   <a:srgbClr val="21295C"/>
                 </a:solidFill>
                 <a:latin typeface="Arial"/>
               </a:rPr>
               <a:t>Для побитово-точных операций — внешний инструмент (Python, regex), не чистый LLM-инференс.</a:t>
-            </a:r>
-          </a:p>
-        </p:txBody>
-      </p:sp>
-      <p:sp>
-        <p:nvSpPr>
-          <p:cNvPr id="16" name="TextBox 15"/>
-          <p:cNvSpPr txBox="1"/>
-          <p:nvPr/>
-        </p:nvSpPr>
-        <p:spPr>
-          <a:xfrm>
-            <a:off x="502920" y="6583680"/>
-            <a:ext cx="11247120" cy="228600"/>
-          </a:xfrm>
-          <a:prstGeom prst="rect">
-            <a:avLst/>
-          </a:prstGeom>
-          <a:noFill/>
-        </p:spPr>
-        <p:txBody>
-          <a:bodyPr wrap="square" lIns="0" rIns="0" tIns="0" bIns="0" anchor="t">
-            <a:spAutoFit/>
-          </a:bodyPr>
-          <a:lstStyle/>
-          <a:p>
-            <a:pPr algn="l">
-              <a:lnSpc>
-                <a:spcPct val="115000"/>
-              </a:lnSpc>
-            </a:pPr>
-            <a:r>
-              <a:rPr sz="1100" b="0" i="1">
-                <a:solidFill>
-                  <a:srgbClr val="1C7293"/>
-                </a:solidFill>
-                <a:latin typeface="Arial"/>
-              </a:rPr>
-              <a:t>Retrieval: «сколько r в strawberry?» — попробуйте на телефоне.</a:t>
             </a:r>
           </a:p>
         </p:txBody>

--- a/library/lectures/lec-02/rendered/lec-02.pptx
+++ b/library/lectures/lec-02/rendered/lec-02.pptx
@@ -9588,7 +9588,7 @@
                 </a:solidFill>
                 <a:latin typeface="Arial"/>
               </a:rPr>
-              <a:t>Distribution на токенах контекста — основное содержание</a:t>
+              <a:t>Распределение весов на токенах контекста — основное содержание</a:t>
             </a:r>
           </a:p>
         </p:txBody>
@@ -14319,8 +14319,8 @@
                 </a:solidFill>
                 <a:latin typeface="Arial"/>
               </a:rPr>
-              <a:t>Как работают
-современные большие модели</a:t>
+              <a:t>Как работают современные
+большие модели</a:t>
             </a:r>
           </a:p>
         </p:txBody>
@@ -15466,7 +15466,7 @@
                 </a:solidFill>
                 <a:latin typeface="Arial"/>
               </a:rPr>
-              <a:t>LO4 — подобрать параметры под сценарий обоснованно</a:t>
+              <a:t>Подобрать параметры под сценарий обоснованно</a:t>
             </a:r>
           </a:p>
         </p:txBody>
@@ -17725,7 +17725,7 @@
                 </a:solidFill>
                 <a:latin typeface="Arial"/>
               </a:rPr>
-              <a:t>Loop: предсказали токен → добавили в контекст → предсказываем следующий</a:t>
+              <a:t>Цикл: предсказали токен → добавили в контекст → предсказываем следующий</a:t>
             </a:r>
           </a:p>
         </p:txBody>
@@ -17892,7 +17892,7 @@
                 <a:latin typeface="Arial"/>
               </a:rPr>
               <a:t>system + история
-+ запрос + already
++ запрос + уже
 сгенерированное</a:t>
             </a:r>
           </a:p>
@@ -18024,7 +18024,8 @@
                 </a:solidFill>
                 <a:latin typeface="Arial"/>
               </a:rPr>
-              <a:t>(2) Forward pass</a:t>
+              <a:t>(2) Прямой
+проход</a:t>
             </a:r>
           </a:p>
         </p:txBody>
@@ -18196,7 +18197,7 @@
                 </a:solidFill>
                 <a:latin typeface="Arial"/>
               </a:rPr>
-              <a:t>(3) Distribution</a:t>
+              <a:t>(3) Распределение</a:t>
             </a:r>
           </a:p>
         </p:txBody>
@@ -21387,7 +21388,7 @@
                 </a:solidFill>
                 <a:latin typeface="Arial"/>
               </a:rPr>
-              <a:t>Payoff трёх «почему» — связь обещаний и механизмов</a:t>
+              <a:t>Payoff Лекции 1 §5.3 — связь обещаний и механизмов</a:t>
             </a:r>
           </a:p>
         </p:txBody>
@@ -22020,7 +22021,7 @@
                 </a:solidFill>
                 <a:latin typeface="Arial"/>
               </a:rPr>
-              <a:t>Сэмплинг — стохастический выбор из distribution при T &gt; 0. Каждый запуск может выбрать разный токен.</a:t>
+              <a:t>Сэмплинг — стохастический выбор из распределения при T &gt; 0. Каждый запуск может выбрать разный токен.</a:t>
             </a:r>
           </a:p>
         </p:txBody>
@@ -22077,7 +22078,7 @@
                 </a:solidFill>
                 <a:latin typeface="Arial"/>
               </a:rPr>
-              <a:t>LLM — не всегда правильный инструмент. Decision tree: когда не LLM</a:t>
+              <a:t>LLM — не всегда правильный инструмент. Дерево решений: когда не LLM</a:t>
             </a:r>
           </a:p>
         </p:txBody>
@@ -22398,8 +22399,8 @@
                 <a:latin typeface="Arial"/>
               </a:rPr>
               <a:t>→ Классический ML
-logistic, XGBoost,
-LightGBM, BERT fine-tuned</a:t>
+лог. регрессия, XGBoost,
+LightGBM, дообученный BERT</a:t>
             </a:r>
           </a:p>
         </p:txBody>
@@ -22634,8 +22635,8 @@
                 <a:latin typeface="Arial"/>
               </a:rPr>
               <a:t>→ Прозрачные методы
-logistic + feature imp,
-decision trees, правила</a:t>
+лог. регрессия + важность,
+деревья решений, правила</a:t>
             </a:r>
           </a:p>
         </p:txBody>
@@ -22790,7 +22791,7 @@
                 </a:solidFill>
                 <a:latin typeface="Arial"/>
               </a:rPr>
-              <a:t>Real-time</a:t>
+              <a:t>Скорость отклика</a:t>
             </a:r>
           </a:p>
         </p:txBody>
@@ -22829,8 +22830,8 @@
                 </a:solidFill>
                 <a:latin typeface="Arial"/>
               </a:rPr>
-              <a:t>Время отклика &lt; 100 ms критично
-(антифрод, edge)?</a:t>
+              <a:t>Время отклика &lt; 100 мс критично
+(антифрод, устройство пользователя)?</a:t>
             </a:r>
           </a:p>
         </p:txBody>
@@ -24649,7 +24650,7 @@
                 </a:solidFill>
                 <a:latin typeface="Arial"/>
               </a:rPr>
-              <a:t>Все 4 концепции надстраиваются над single-shot inference</a:t>
+              <a:t>Все 4 концепции надстраиваются над одним проходом inference</a:t>
             </a:r>
           </a:p>
         </p:txBody>
@@ -24838,7 +24839,7 @@
                 </a:solidFill>
                 <a:latin typeface="Arial"/>
               </a:rPr>
-              <a:t>embedding similarity + LLM → ответ из вашей базы</a:t>
+              <a:t>близость эмбеддингов + LLM → ответ из вашей базы</a:t>
             </a:r>
           </a:p>
         </p:txBody>
@@ -24949,7 +24950,7 @@
                 </a:solidFill>
                 <a:latin typeface="Arial"/>
               </a:rPr>
-              <a:t>Tools / Function calling</a:t>
+              <a:t>Инструменты / Вызов функций</a:t>
             </a:r>
           </a:p>
         </p:txBody>
@@ -25327,7 +25328,7 @@
                 </a:solidFill>
                 <a:latin typeface="Arial"/>
               </a:rPr>
-              <a:t>Agent loop</a:t>
+              <a:t>Цикл агента</a:t>
             </a:r>
           </a:p>
         </p:txBody>
@@ -25366,7 +25367,7 @@
                 </a:solidFill>
                 <a:latin typeface="Arial"/>
               </a:rPr>
-              <a:t>act → observe → reflect</a:t>
+              <a:t>действуй → наблюдай → корректируй</a:t>
             </a:r>
           </a:p>
         </p:txBody>
@@ -26372,8 +26373,8 @@
                 </a:solidFill>
                 <a:latin typeface="Arial"/>
               </a:rPr>
-              <a:t>«Что происходит внутри LLM между моим запросом и ответом —
-и какие из этих внутренних механизмов меняют, как я её использую?»</a:t>
+              <a:t>«Что происходит внутри LLM между моим запросом и ответом —
+и какие из этих механизмов меняют, как я её использую?»</a:t>
             </a:r>
           </a:p>
         </p:txBody>
@@ -26522,7 +26523,7 @@
         <p:spPr>
           <a:xfrm>
             <a:off x="777240" y="3886200"/>
-            <a:ext cx="594360" cy="594360"/>
+            <a:ext cx="640080" cy="640080"/>
           </a:xfrm>
           <a:prstGeom prst="roundRect">
             <a:avLst>
@@ -26568,7 +26569,7 @@
         <p:spPr>
           <a:xfrm>
             <a:off x="777240" y="3904488"/>
-            <a:ext cx="594360" cy="548640"/>
+            <a:ext cx="640080" cy="594360"/>
           </a:xfrm>
           <a:prstGeom prst="rect">
             <a:avLst/>
@@ -26587,7 +26588,7 @@
               </a:lnSpc>
             </a:pPr>
             <a:r>
-              <a:rPr sz="2400" b="1" i="0">
+              <a:rPr sz="2800" b="1" i="0">
                 <a:solidFill>
                   <a:srgbClr val="FFFFFF"/>
                 </a:solidFill>
@@ -26606,8 +26607,8 @@
         </p:nvSpPr>
         <p:spPr>
           <a:xfrm>
-            <a:off x="1554480" y="3886200"/>
-            <a:ext cx="2377440" cy="1371600"/>
+            <a:off x="731520" y="4709160"/>
+            <a:ext cx="3154680" cy="1280160"/>
           </a:xfrm>
           <a:prstGeom prst="rect">
             <a:avLst/>
@@ -26622,11 +26623,11 @@
           <a:p>
             <a:pPr algn="l">
               <a:lnSpc>
-                <a:spcPct val="125000"/>
-              </a:lnSpc>
-            </a:pPr>
-            <a:r>
-              <a:rPr sz="1700" b="1" i="0">
+                <a:spcPct val="130000"/>
+              </a:lnSpc>
+            </a:pPr>
+            <a:r>
+              <a:rPr sz="1800" b="1" i="0">
                 <a:solidFill>
                   <a:srgbClr val="21295C"/>
                 </a:solidFill>
@@ -26646,8 +26647,8 @@
         </p:nvSpPr>
         <p:spPr>
           <a:xfrm>
-            <a:off x="777240" y="5532120"/>
-            <a:ext cx="3063240" cy="457200"/>
+            <a:off x="731520" y="5806440"/>
+            <a:ext cx="3154680" cy="457200"/>
           </a:xfrm>
           <a:prstGeom prst="rect">
             <a:avLst/>
@@ -26734,7 +26735,7 @@
         <p:spPr>
           <a:xfrm>
             <a:off x="4572000" y="3886200"/>
-            <a:ext cx="594360" cy="594360"/>
+            <a:ext cx="640080" cy="640080"/>
           </a:xfrm>
           <a:prstGeom prst="roundRect">
             <a:avLst>
@@ -26780,7 +26781,7 @@
         <p:spPr>
           <a:xfrm>
             <a:off x="4572000" y="3904488"/>
-            <a:ext cx="594360" cy="548640"/>
+            <a:ext cx="640080" cy="594360"/>
           </a:xfrm>
           <a:prstGeom prst="rect">
             <a:avLst/>
@@ -26799,7 +26800,7 @@
               </a:lnSpc>
             </a:pPr>
             <a:r>
-              <a:rPr sz="2400" b="1" i="0">
+              <a:rPr sz="2800" b="1" i="0">
                 <a:solidFill>
                   <a:srgbClr val="FFFFFF"/>
                 </a:solidFill>
@@ -26818,8 +26819,8 @@
         </p:nvSpPr>
         <p:spPr>
           <a:xfrm>
-            <a:off x="5349240" y="3886200"/>
-            <a:ext cx="2377440" cy="1371600"/>
+            <a:off x="4526280" y="4709160"/>
+            <a:ext cx="3154680" cy="1280160"/>
           </a:xfrm>
           <a:prstGeom prst="rect">
             <a:avLst/>
@@ -26834,11 +26835,11 @@
           <a:p>
             <a:pPr algn="l">
               <a:lnSpc>
-                <a:spcPct val="125000"/>
-              </a:lnSpc>
-            </a:pPr>
-            <a:r>
-              <a:rPr sz="1700" b="1" i="0">
+                <a:spcPct val="130000"/>
+              </a:lnSpc>
+            </a:pPr>
+            <a:r>
+              <a:rPr sz="1800" b="1" i="0">
                 <a:solidFill>
                   <a:srgbClr val="21295C"/>
                 </a:solidFill>
@@ -26858,8 +26859,8 @@
         </p:nvSpPr>
         <p:spPr>
           <a:xfrm>
-            <a:off x="4572000" y="5532120"/>
-            <a:ext cx="3063240" cy="457200"/>
+            <a:off x="4526280" y="5806440"/>
+            <a:ext cx="3154680" cy="457200"/>
           </a:xfrm>
           <a:prstGeom prst="rect">
             <a:avLst/>
@@ -26946,7 +26947,7 @@
         <p:spPr>
           <a:xfrm>
             <a:off x="8366760" y="3886200"/>
-            <a:ext cx="594360" cy="594360"/>
+            <a:ext cx="640080" cy="640080"/>
           </a:xfrm>
           <a:prstGeom prst="roundRect">
             <a:avLst>
@@ -26992,7 +26993,7 @@
         <p:spPr>
           <a:xfrm>
             <a:off x="8366760" y="3904488"/>
-            <a:ext cx="594360" cy="548640"/>
+            <a:ext cx="640080" cy="594360"/>
           </a:xfrm>
           <a:prstGeom prst="rect">
             <a:avLst/>
@@ -27011,7 +27012,7 @@
               </a:lnSpc>
             </a:pPr>
             <a:r>
-              <a:rPr sz="2400" b="1" i="0">
+              <a:rPr sz="2800" b="1" i="0">
                 <a:solidFill>
                   <a:srgbClr val="FFFFFF"/>
                 </a:solidFill>
@@ -27030,8 +27031,8 @@
         </p:nvSpPr>
         <p:spPr>
           <a:xfrm>
-            <a:off x="9144000" y="3886200"/>
-            <a:ext cx="2377440" cy="1371600"/>
+            <a:off x="8321040" y="4709160"/>
+            <a:ext cx="3154680" cy="1280160"/>
           </a:xfrm>
           <a:prstGeom prst="rect">
             <a:avLst/>
@@ -27046,11 +27047,11 @@
           <a:p>
             <a:pPr algn="l">
               <a:lnSpc>
-                <a:spcPct val="125000"/>
-              </a:lnSpc>
-            </a:pPr>
-            <a:r>
-              <a:rPr sz="1700" b="1" i="0">
+                <a:spcPct val="130000"/>
+              </a:lnSpc>
+            </a:pPr>
+            <a:r>
+              <a:rPr sz="1800" b="1" i="0">
                 <a:solidFill>
                   <a:srgbClr val="21295C"/>
                 </a:solidFill>
@@ -27070,8 +27071,8 @@
         </p:nvSpPr>
         <p:spPr>
           <a:xfrm>
-            <a:off x="8366760" y="5532120"/>
-            <a:ext cx="3063240" cy="457200"/>
+            <a:off x="8321040" y="5806440"/>
+            <a:ext cx="3154680" cy="457200"/>
           </a:xfrm>
           <a:prstGeom prst="rect">
             <a:avLst/>

--- a/library/lectures/lec-02/rendered/lec-02.pptx
+++ b/library/lectures/lec-02/rendered/lec-02.pptx
@@ -40,6 +40,7 @@
     <p:sldId id="288" r:id="rId40"/>
     <p:sldId id="289" r:id="rId41"/>
     <p:sldId id="290" r:id="rId42"/>
+    <p:sldId id="291" r:id="rId43"/>
   </p:sldIdLst>
   <p:sldSz cx="12191695" cy="6858000" type="screen4x3"/>
   <p:notesSz cx="6858000" cy="9144000"/>
@@ -536,7 +537,7 @@
           <a:lstStyle/>
           <a:p>
             <a:r>
-              <a:t>Открытие лекции — простая, но контринтуитивная мысль: когда вы отправляете запрос в LLM, модель не видит ваш текст так, как видите его вы. До того, как любая «магия» — ответы, рассуждения, генерация кода — может произойти, ваш текст проходит через первую обязательную операцию, которая называется **токенизация**. Текст разрезается на единицы, которые называются токенами. И именно с этими токенами — не с буквами и не со словами — дальше работает модель.</a:t>
+              <a:t>Введение лекции — простая, но контринтуитивная мысль: когда вы отправляете запрос в LLM, модель не видит ваш текст так, как видите его вы. До того, как любая «магия» — ответы, рассуждения, генерация кода — может произойти, ваш текст проходит через первую обязательную операцию, которая называется **токенизация**. Текст разрезается на единицы, которые называются токенами. И именно с этими токенами — не с буквами и не со словами — дальше работает модель.</a:t>
             </a:r>
           </a:p>
           <a:p/>
@@ -2515,7 +2516,7 @@
           <a:p/>
           <a:p>
             <a:r>
-              <a:t>Раздел 0, в котором мы сейчас, — открытие: живая токенизация слова strawberry, краткий recap Лекции 1 и центральный вопрос, ради которого мы здесь.</a:t>
+              <a:t>Раздел 0, в котором мы сейчас, — введение: что такое токен, краткий recap Лекции 1 и центральный вопрос, ради которого мы здесь.</a:t>
             </a:r>
           </a:p>
           <a:p/>
@@ -3140,7 +3141,89 @@
           <a:p/>
           <a:p>
             <a:r>
-              <a:t>На сегодня всё. До пяти минут на вопросы в зале. Дополнительные вопросы — на Семинар 2 или по e-mail. На семинаре будем разбирать ваши домашние эксперименты с температурой; постарайтесь успеть прогнать запросы заранее.</a:t>
+              <a:t>На семинаре будем разбирать ваши домашние эксперименты с температурой; постарайтесь успеть прогнать запросы заранее. А пока — оставшееся время мы посвящаем вашим вопросам.</a:t>
+            </a:r>
+          </a:p>
+        </p:txBody>
+      </p:sp>
+      <p:sp>
+        <p:nvSpPr>
+          <p:cNvPr id="4" name="Slide Number Placeholder 3"/>
+          <p:cNvSpPr>
+            <a:spLocks noGrp="1"/>
+          </p:cNvSpPr>
+          <p:nvPr>
+            <p:ph type="sldNum" idx="5" sz="quarter"/>
+          </p:nvPr>
+        </p:nvSpPr>
+        <p:spPr/>
+      </p:sp>
+    </p:spTree>
+  </p:cSld>
+  <p:clrMapOvr>
+    <a:masterClrMapping/>
+  </p:clrMapOvr>
+</p:notes>
+</file>
+
+<file path=ppt/notesSlides/notesSlide36.xml><?xml version="1.0" encoding="utf-8"?>
+<p:notes xmlns:a="http://schemas.openxmlformats.org/drawingml/2006/main" xmlns:p="http://schemas.openxmlformats.org/presentationml/2006/main" xmlns:r="http://schemas.openxmlformats.org/officeDocument/2006/relationships">
+  <p:cSld>
+    <p:spTree>
+      <p:nvGrpSpPr>
+        <p:cNvPr id="1" name=""/>
+        <p:cNvGrpSpPr/>
+        <p:nvPr/>
+      </p:nvGrpSpPr>
+      <p:grpSpPr>
+        <a:xfrm>
+          <a:off x="0" y="0"/>
+          <a:ext cx="0" cy="0"/>
+          <a:chOff x="0" y="0"/>
+          <a:chExt cx="0" cy="0"/>
+        </a:xfrm>
+      </p:grpSpPr>
+      <p:sp>
+        <p:nvSpPr>
+          <p:cNvPr id="2" name="Slide Image Placeholder 1"/>
+          <p:cNvSpPr>
+            <a:spLocks noGrp="1"/>
+          </p:cNvSpPr>
+          <p:nvPr>
+            <p:ph type="sldImg" idx="2"/>
+          </p:nvPr>
+        </p:nvSpPr>
+        <p:spPr/>
+      </p:sp>
+      <p:sp>
+        <p:nvSpPr>
+          <p:cNvPr id="3" name="Notes Placeholder 2"/>
+          <p:cNvSpPr>
+            <a:spLocks noGrp="1"/>
+          </p:cNvSpPr>
+          <p:nvPr>
+            <p:ph type="body" idx="3" sz="quarter"/>
+          </p:nvPr>
+        </p:nvSpPr>
+        <p:spPr/>
+        <p:txBody>
+          <a:bodyPr/>
+          <a:lstStyle/>
+          <a:p>
+            <a:r>
+              <a:t>На этом основная часть лекции закончена. Дальше — оставшееся время отдаём вашим вопросам. Нет «глупых» вопросов и нет «слишком базовых» — если что-то прозвучало неясно или у вас в голове не сложилась картинка одного из четырёх этапов, лучше спросить сейчас, пока тема свежая.</a:t>
+            </a:r>
+          </a:p>
+          <a:p/>
+          <a:p>
+            <a:r>
+              <a:t>Если вопросов в зале немного, я могу зайти с другой стороны: рассказать, какие из четырёх этапов чаще всего вызывают трудности на следующих занятиях, или показать дополнительный пример токенизации на ваших словах. Если совсем тишина — это тоже нормально, и тогда напомню, что на семинар через неделю мы принесём результаты домашнего задания по температуре, прогоним их через простой чек-лист и обсудим, какую температуру стоит ставить в production. Если по ходу обсуждения возникнут вопросы — приносите их к семинару или пишите по e-mail.</a:t>
+            </a:r>
+          </a:p>
+          <a:p/>
+          <a:p>
+            <a:r>
+              <a:t>Спасибо за внимание и за вашу включённость в течение всей лекции. До следующей встречи.</a:t>
             </a:r>
           </a:p>
         </p:txBody>
@@ -3374,7 +3457,7 @@
           <a:lstStyle/>
           <a:p>
             <a:r>
-              <a:t>Открытие лекции закончено: мы зафиксировали центральный вопрос — что внутри LLM меняет то, как вы её используете, — и три промиса-якоря, на которые получим ответы к финалу.</a:t>
+              <a:t>Введение закончено: мы зафиксировали центральный вопрос — что внутри LLM меняет то, как вы её используете, — и три промиса-якоря, на которые получим ответы к финалу.</a:t>
             </a:r>
           </a:p>
           <a:p/>
@@ -9779,7 +9862,7 @@
                 </a:solidFill>
                 <a:latin typeface="Arial"/>
               </a:rPr>
-              <a:t>0  Открытие</a:t>
+              <a:t>0  Введение</a:t>
             </a:r>
           </a:p>
         </p:txBody>
@@ -13795,7 +13878,7 @@
                 </a:solidFill>
                 <a:latin typeface="Arial"/>
               </a:rPr>
-              <a:t>0  Открытие</a:t>
+              <a:t>0  Введение</a:t>
             </a:r>
           </a:p>
         </p:txBody>
@@ -19284,7 +19367,7 @@
                 </a:solidFill>
                 <a:latin typeface="Arial"/>
               </a:rPr>
-              <a:t>0  Открытие</a:t>
+              <a:t>0  Введение</a:t>
             </a:r>
           </a:p>
         </p:txBody>
@@ -26196,7 +26279,7 @@
                 </a:solidFill>
                 <a:latin typeface="Arial"/>
               </a:rPr>
-              <a:t>0  Открытие</a:t>
+              <a:t>0  Введение</a:t>
             </a:r>
           </a:p>
         </p:txBody>
@@ -26812,7 +26895,7 @@
                 </a:solidFill>
                 <a:latin typeface="Arial"/>
               </a:rPr>
-              <a:t>Открытие</a:t>
+              <a:t>Введение</a:t>
             </a:r>
           </a:p>
         </p:txBody>
@@ -26851,7 +26934,7 @@
                 </a:solidFill>
                 <a:latin typeface="Arial"/>
               </a:rPr>
-              <a:t>Hook + recap +
+              <a:t>Что такое токен +
 центральный вопрос</a:t>
             </a:r>
           </a:p>
@@ -32384,12 +32467,12 @@
         </p:nvSpPr>
         <p:spPr>
           <a:xfrm>
-            <a:off x="502920" y="1783080"/>
-            <a:ext cx="5486400" cy="2331720"/>
+            <a:off x="502920" y="1920240"/>
+            <a:ext cx="5486400" cy="2514600"/>
           </a:xfrm>
           <a:prstGeom prst="roundRect">
             <a:avLst>
-              <a:gd name="adj" fmla="val 13071"/>
+              <a:gd name="adj" fmla="val 12121"/>
             </a:avLst>
           </a:prstGeom>
           <a:solidFill>
@@ -32440,7 +32523,7 @@
         </p:blipFill>
         <p:spPr>
           <a:xfrm>
-            <a:off x="731520" y="2057400"/>
+            <a:off x="731520" y="2240280"/>
             <a:ext cx="1005840" cy="1005840"/>
           </a:xfrm>
           <a:prstGeom prst="rect">
@@ -32456,7 +32539,7 @@
         </p:nvSpPr>
         <p:spPr>
           <a:xfrm>
-            <a:off x="1874519" y="2011680"/>
+            <a:off x="1874519" y="2194560"/>
             <a:ext cx="3977639" cy="548640"/>
           </a:xfrm>
           <a:prstGeom prst="rect">
@@ -32495,7 +32578,7 @@
         </p:nvSpPr>
         <p:spPr>
           <a:xfrm>
-            <a:off x="1874519" y="2651760"/>
+            <a:off x="1874519" y="2834640"/>
             <a:ext cx="3977639" cy="365760"/>
           </a:xfrm>
           <a:prstGeom prst="rect">
@@ -32534,8 +32617,8 @@
         </p:nvSpPr>
         <p:spPr>
           <a:xfrm>
-            <a:off x="777240" y="3200400"/>
-            <a:ext cx="4983480" cy="868680"/>
+            <a:off x="777240" y="3429000"/>
+            <a:ext cx="4983480" cy="914400"/>
           </a:xfrm>
           <a:prstGeom prst="rect">
             <a:avLst/>
@@ -32573,12 +32656,12 @@
         </p:nvSpPr>
         <p:spPr>
           <a:xfrm>
-            <a:off x="6172200" y="1783080"/>
-            <a:ext cx="5486400" cy="2331720"/>
+            <a:off x="6190488" y="1920240"/>
+            <a:ext cx="5486400" cy="2514600"/>
           </a:xfrm>
           <a:prstGeom prst="roundRect">
             <a:avLst>
-              <a:gd name="adj" fmla="val 13071"/>
+              <a:gd name="adj" fmla="val 12121"/>
             </a:avLst>
           </a:prstGeom>
           <a:solidFill>
@@ -32629,7 +32712,7 @@
         </p:blipFill>
         <p:spPr>
           <a:xfrm>
-            <a:off x="6400800" y="2057400"/>
+            <a:off x="6419088" y="2240280"/>
             <a:ext cx="1005840" cy="1005840"/>
           </a:xfrm>
           <a:prstGeom prst="rect">
@@ -32645,7 +32728,7 @@
         </p:nvSpPr>
         <p:spPr>
           <a:xfrm>
-            <a:off x="7543800" y="2011680"/>
+            <a:off x="7562088" y="2194560"/>
             <a:ext cx="3977639" cy="548640"/>
           </a:xfrm>
           <a:prstGeom prst="rect">
@@ -32684,7 +32767,7 @@
         </p:nvSpPr>
         <p:spPr>
           <a:xfrm>
-            <a:off x="7543800" y="2651760"/>
+            <a:off x="7562088" y="2834640"/>
             <a:ext cx="3977639" cy="365760"/>
           </a:xfrm>
           <a:prstGeom prst="rect">
@@ -32723,8 +32806,8 @@
         </p:nvSpPr>
         <p:spPr>
           <a:xfrm>
-            <a:off x="6446520" y="3200400"/>
-            <a:ext cx="4983480" cy="868680"/>
+            <a:off x="6464807" y="3429000"/>
+            <a:ext cx="4983480" cy="914400"/>
           </a:xfrm>
           <a:prstGeom prst="rect">
             <a:avLst/>
@@ -32762,12 +32845,12 @@
         </p:nvSpPr>
         <p:spPr>
           <a:xfrm>
-            <a:off x="502920" y="4297680"/>
-            <a:ext cx="5486400" cy="2331720"/>
+            <a:off x="502920" y="4636008"/>
+            <a:ext cx="5486400" cy="2514600"/>
           </a:xfrm>
           <a:prstGeom prst="roundRect">
             <a:avLst>
-              <a:gd name="adj" fmla="val 13071"/>
+              <a:gd name="adj" fmla="val 12121"/>
             </a:avLst>
           </a:prstGeom>
           <a:solidFill>
@@ -32818,7 +32901,7 @@
         </p:blipFill>
         <p:spPr>
           <a:xfrm>
-            <a:off x="731520" y="4572000"/>
+            <a:off x="731520" y="4956048"/>
             <a:ext cx="1005840" cy="1005840"/>
           </a:xfrm>
           <a:prstGeom prst="rect">
@@ -32834,7 +32917,7 @@
         </p:nvSpPr>
         <p:spPr>
           <a:xfrm>
-            <a:off x="1874519" y="4526280"/>
+            <a:off x="1874519" y="4910328"/>
             <a:ext cx="3977639" cy="548640"/>
           </a:xfrm>
           <a:prstGeom prst="rect">
@@ -32873,7 +32956,7 @@
         </p:nvSpPr>
         <p:spPr>
           <a:xfrm>
-            <a:off x="1874519" y="5166360"/>
+            <a:off x="1874519" y="5550408"/>
             <a:ext cx="3977639" cy="365760"/>
           </a:xfrm>
           <a:prstGeom prst="rect">
@@ -32912,8 +32995,8 @@
         </p:nvSpPr>
         <p:spPr>
           <a:xfrm>
-            <a:off x="777240" y="5715000"/>
-            <a:ext cx="4983480" cy="868680"/>
+            <a:off x="777240" y="6144768"/>
+            <a:ext cx="4983480" cy="914400"/>
           </a:xfrm>
           <a:prstGeom prst="rect">
             <a:avLst/>
@@ -32951,12 +33034,12 @@
         </p:nvSpPr>
         <p:spPr>
           <a:xfrm>
-            <a:off x="6172200" y="4297680"/>
-            <a:ext cx="5486400" cy="2331720"/>
+            <a:off x="6190488" y="4636008"/>
+            <a:ext cx="5486400" cy="2514600"/>
           </a:xfrm>
           <a:prstGeom prst="roundRect">
             <a:avLst>
-              <a:gd name="adj" fmla="val 13071"/>
+              <a:gd name="adj" fmla="val 12121"/>
             </a:avLst>
           </a:prstGeom>
           <a:solidFill>
@@ -33007,7 +33090,7 @@
         </p:blipFill>
         <p:spPr>
           <a:xfrm>
-            <a:off x="6400800" y="4572000"/>
+            <a:off x="6419088" y="4956048"/>
             <a:ext cx="1005840" cy="1005840"/>
           </a:xfrm>
           <a:prstGeom prst="rect">
@@ -33023,7 +33106,7 @@
         </p:nvSpPr>
         <p:spPr>
           <a:xfrm>
-            <a:off x="7543800" y="4526280"/>
+            <a:off x="7562088" y="4910328"/>
             <a:ext cx="3977639" cy="548640"/>
           </a:xfrm>
           <a:prstGeom prst="rect">
@@ -33062,7 +33145,7 @@
         </p:nvSpPr>
         <p:spPr>
           <a:xfrm>
-            <a:off x="7543800" y="5166360"/>
+            <a:off x="7562088" y="5550408"/>
             <a:ext cx="3977639" cy="365760"/>
           </a:xfrm>
           <a:prstGeom prst="rect">
@@ -33101,8 +33184,8 @@
         </p:nvSpPr>
         <p:spPr>
           <a:xfrm>
-            <a:off x="6446520" y="5715000"/>
-            <a:ext cx="4983480" cy="868680"/>
+            <a:off x="6464807" y="6144768"/>
+            <a:ext cx="4983480" cy="914400"/>
           </a:xfrm>
           <a:prstGeom prst="rect">
             <a:avLst/>
@@ -33132,64 +33215,42 @@
           </a:p>
         </p:txBody>
       </p:sp>
-      <p:sp>
-        <p:nvSpPr>
-          <p:cNvPr id="24" name="Rounded Rectangle 23"/>
-          <p:cNvSpPr/>
-          <p:nvPr/>
-        </p:nvSpPr>
-        <p:spPr>
-          <a:xfrm>
-            <a:off x="502920" y="6446520"/>
-            <a:ext cx="11247120" cy="365760"/>
-          </a:xfrm>
-          <a:prstGeom prst="roundRect">
-            <a:avLst>
-              <a:gd name="adj" fmla="val 30000"/>
-            </a:avLst>
-          </a:prstGeom>
-          <a:solidFill>
-            <a:srgbClr val="FEF5E0"/>
-          </a:solidFill>
-          <a:ln w="25400">
-            <a:solidFill>
-              <a:srgbClr val="F0AB00"/>
-            </a:solidFill>
-          </a:ln>
-          <a:effectLst/>
-        </p:spPr>
-        <p:style>
-          <a:lnRef idx="1">
-            <a:schemeClr val="accent1"/>
-          </a:lnRef>
-          <a:fillRef idx="3">
-            <a:schemeClr val="accent1"/>
-          </a:fillRef>
-          <a:effectRef idx="2">
-            <a:schemeClr val="accent1"/>
-          </a:effectRef>
-          <a:fontRef idx="minor">
-            <a:schemeClr val="lt1"/>
-          </a:fontRef>
-        </p:style>
-        <p:txBody>
-          <a:bodyPr rtlCol="0" anchor="ctr"/>
-          <a:lstStyle/>
-          <a:p>
-            <a:pPr algn="ctr"/>
-          </a:p>
-        </p:txBody>
-      </p:sp>
-      <p:sp>
-        <p:nvSpPr>
-          <p:cNvPr id="25" name="TextBox 24"/>
-          <p:cNvSpPr txBox="1"/>
-          <p:nvPr/>
-        </p:nvSpPr>
-        <p:spPr>
-          <a:xfrm>
-            <a:off x="777240" y="6473952"/>
-            <a:ext cx="1828800" cy="320040"/>
+    </p:spTree>
+  </p:cSld>
+  <p:clrMapOvr>
+    <a:masterClrMapping/>
+  </p:clrMapOvr>
+</p:sld>
+</file>
+
+<file path=ppt/slides/slide36.xml><?xml version="1.0" encoding="utf-8"?>
+<p:sld xmlns:a="http://schemas.openxmlformats.org/drawingml/2006/main" xmlns:p="http://schemas.openxmlformats.org/presentationml/2006/main" xmlns:r="http://schemas.openxmlformats.org/officeDocument/2006/relationships">
+  <p:cSld>
+    <p:bg>
+      <p:bgPr>
+        <a:solidFill>
+          <a:srgbClr val="FFFFFF"/>
+        </a:solidFill>
+        <a:effectLst/>
+      </p:bgPr>
+    </p:bg>
+    <p:spTree>
+      <p:nvGrpSpPr>
+        <p:cNvPr id="1" name=""/>
+        <p:cNvGrpSpPr/>
+        <p:nvPr/>
+      </p:nvGrpSpPr>
+      <p:grpSpPr/>
+      <p:sp>
+        <p:nvSpPr>
+          <p:cNvPr id="2" name="TextBox 1"/>
+          <p:cNvSpPr txBox="1"/>
+          <p:nvPr/>
+        </p:nvSpPr>
+        <p:spPr>
+          <a:xfrm>
+            <a:off x="502920" y="2103120"/>
+            <a:ext cx="11201400" cy="2194560"/>
           </a:xfrm>
           <a:prstGeom prst="rect">
             <a:avLst/>
@@ -33202,13 +33263,13 @@
           </a:bodyPr>
           <a:lstStyle/>
           <a:p>
-            <a:pPr algn="l">
-              <a:lnSpc>
-                <a:spcPct val="115000"/>
-              </a:lnSpc>
-            </a:pPr>
-            <a:r>
-              <a:rPr sz="1800" b="1" i="0">
+            <a:pPr algn="ctr">
+              <a:lnSpc>
+                <a:spcPct val="100000"/>
+              </a:lnSpc>
+            </a:pPr>
+            <a:r>
+              <a:rPr sz="14000" b="1" i="0">
                 <a:solidFill>
                   <a:srgbClr val="21295C"/>
                 </a:solidFill>
@@ -33221,14 +33282,14 @@
       </p:sp>
       <p:sp>
         <p:nvSpPr>
-          <p:cNvPr id="26" name="TextBox 25"/>
-          <p:cNvSpPr txBox="1"/>
-          <p:nvPr/>
-        </p:nvSpPr>
-        <p:spPr>
-          <a:xfrm>
-            <a:off x="2606040" y="6473952"/>
-            <a:ext cx="9144000" cy="320040"/>
+          <p:cNvPr id="3" name="TextBox 2"/>
+          <p:cNvSpPr txBox="1"/>
+          <p:nvPr/>
+        </p:nvSpPr>
+        <p:spPr>
+          <a:xfrm>
+            <a:off x="502920" y="4434840"/>
+            <a:ext cx="11201400" cy="731520"/>
           </a:xfrm>
           <a:prstGeom prst="rect">
             <a:avLst/>
@@ -33241,19 +33302,58 @@
           </a:bodyPr>
           <a:lstStyle/>
           <a:p>
-            <a:pPr algn="l">
-              <a:lnSpc>
-                <a:spcPct val="115000"/>
-              </a:lnSpc>
-            </a:pPr>
-            <a:r>
-              <a:rPr sz="1300" b="0" i="1">
-                <a:solidFill>
-                  <a:srgbClr val="21295C"/>
-                </a:solidFill>
-                <a:latin typeface="Arial"/>
-              </a:rPr>
-              <a:t>До 5 минут на вопросы в зале. Дополнительные — на Семинар 2 или e-mail.</a:t>
+            <a:pPr algn="ctr">
+              <a:lnSpc>
+                <a:spcPct val="120000"/>
+              </a:lnSpc>
+            </a:pPr>
+            <a:r>
+              <a:rPr sz="3200" b="0" i="0">
+                <a:solidFill>
+                  <a:srgbClr val="065A82"/>
+                </a:solidFill>
+                <a:latin typeface="Arial"/>
+              </a:rPr>
+              <a:t>Спасибо за внимание!</a:t>
+            </a:r>
+          </a:p>
+        </p:txBody>
+      </p:sp>
+      <p:sp>
+        <p:nvSpPr>
+          <p:cNvPr id="4" name="TextBox 3"/>
+          <p:cNvSpPr txBox="1"/>
+          <p:nvPr/>
+        </p:nvSpPr>
+        <p:spPr>
+          <a:xfrm>
+            <a:off x="502920" y="5943600"/>
+            <a:ext cx="11201400" cy="411480"/>
+          </a:xfrm>
+          <a:prstGeom prst="rect">
+            <a:avLst/>
+          </a:prstGeom>
+          <a:noFill/>
+        </p:spPr>
+        <p:txBody>
+          <a:bodyPr wrap="square" lIns="0" rIns="0" tIns="0" bIns="0" anchor="ctr">
+            <a:spAutoFit/>
+          </a:bodyPr>
+          <a:lstStyle/>
+          <a:p>
+            <a:pPr algn="ctr">
+              <a:lnSpc>
+                <a:spcPct val="120000"/>
+              </a:lnSpc>
+            </a:pPr>
+            <a:r>
+              <a:rPr sz="1400" b="0" i="1">
+                <a:solidFill>
+                  <a:srgbClr val="1C7293"/>
+                </a:solidFill>
+                <a:latin typeface="Arial"/>
+              </a:rPr>
+              <a:t>Семинар 2 — через неделю.  Дополнительные вопросы — на e-mail.</a:t>
             </a:r>
           </a:p>
         </p:txBody>
@@ -35046,7 +35146,7 @@
                 </a:solidFill>
                 <a:latin typeface="Arial"/>
               </a:rPr>
-              <a:t>0  Открытие</a:t>
+              <a:t>0  Введение</a:t>
             </a:r>
           </a:p>
         </p:txBody>

--- a/library/lectures/lec-02/rendered/lec-02.pptx
+++ b/library/lectures/lec-02/rendered/lec-02.pptx
@@ -40,7 +40,6 @@
     <p:sldId id="288" r:id="rId40"/>
     <p:sldId id="289" r:id="rId41"/>
     <p:sldId id="290" r:id="rId42"/>
-    <p:sldId id="291" r:id="rId43"/>
   </p:sldIdLst>
   <p:sldSz cx="12191695" cy="6858000" type="screen4x3"/>
   <p:notesSz cx="6858000" cy="9144000"/>
@@ -537,25 +536,25 @@
           <a:lstStyle/>
           <a:p>
             <a:r>
-              <a:t>Введение лекции — простая, но контринтуитивная мысль: когда вы отправляете запрос в LLM, модель не видит ваш текст так, как видите его вы. До того, как любая «магия» — ответы, рассуждения, генерация кода — может произойти, ваш текст проходит через первую обязательную операцию, которая называется **токенизация**. Текст разрезается на единицы, которые называются токенами. И именно с этими токенами — не с буквами и не со словами — дальше работает модель.</a:t>
+              <a:t>Начнём не с AI, а с вас. Пока вы читаете это предложение, ваш мозг непрерывно решает маленькую, но важную задачу: что сейчас важно держать в фокусе, а что можно оставить фоном. Где-то на периферии — уведомление на телефоне, недодуманная мысль про вечерние планы, ощущение неудобного стула. Всё это конкурирует за один и тот же ограниченный ресурс — ваше внимание. Вы не осознаёте выбор в моменте, но он происходит постоянно.</a:t>
             </a:r>
           </a:p>
           <a:p/>
           <a:p>
             <a:r>
-              <a:t>На слайде — три параллельных примера на трёх типах входа. Английская фраза `tokenization is fascinating` режется на пять токенов: `[token]`, `[ization]`, `[ is]`, `[ fascin]`, `[ating]`. Заметьте, что пробел становится частью следующего токена, а не отдельной единицей; это особенность семейства BPE-токенизаторов. Русская фраза `Привет, как дела?` — короче по количеству символов, но даёт уже шесть токенов, потому что для русского словарь модели не содержит готовых сборок типа `[Привет]` целиком: слово приходится разрезать на `[Прив]` и `[ет]`. Третий пример — программный код: `def hello(name):` — режется на шесть токенов, причём специальные символы вроде скобок и двоеточия — это отдельные токены.</a:t>
+              <a:t>На слайде — персонаж, которого одновременно тянут в три стороны: уведомление, посторонняя мысль, незакрытая задача. Это не про рассеянность как недостаток — это нормальная работа механизма внимания. У человека внимание ограничено: мы физически не можем одинаково полно обрабатывать всё одновременно, поэтому мозг постоянно расставляет приоритеты — что в фокус, что в фон.</a:t>
             </a:r>
           </a:p>
           <a:p/>
           <a:p>
             <a:r>
-              <a:t>Главное практическое следствие, к которому мы вернёмся в Разделе 1: один и тот же смысл стоит **разное число токенов** в зависимости от языка и формата. Английский — почти в два раза дешевле русского, потому что в обучающем корпусе LLM английского текста на порядок больше, и BPE выучил для него более крупные сборки. Это инженерный факт со стоимостной интерпретацией: один и тот же запрос в API на русском обойдётся примерно вдвое дороже, чем на английском.</a:t>
+              <a:t>Сегодняшняя лекция — про то, что происходит внутри AI-модели между вашим запросом и её ответом. И один из четырёх внутренних этапов, которые мы разберём, называется буквально так же, как то, что вы только что почувствовали — **механизм внимания**. Когда модель обрабатывает ваш текст, она тоже решает, на какие части входа «смотреть» внимательнее, а какие оставить фоном. Важная оговорка, к которой мы вернёмся в Разделе 3: сходство здесь — по названию и по общей идее «выбора приоритета», а не по устройству. Внутри модели это не психологический процесс, а конкретная вычислимая операция — матрица весов, которую можно посчитать и посмотреть. Разберём это подробно, когда дойдём до сути.</a:t>
             </a:r>
           </a:p>
           <a:p/>
           <a:p>
             <a:r>
-              <a:t>Тема сегодняшней лекции — что происходит внутри LLM между моим запросом и ответом. Мы разберём четыре внутренних этапа: токенизацию, эмбеддинги, внимание, сэмплинг. И каждый этап будет связан с инженерной практикой через конкретные следствия — вроде того, что мы только что увидели на стоимости запросов.</a:t>
+              <a:t>Прежде чем туда дойти — пройдём весь путь запроса через модель: токенизацию, эмбеддинги, внимание, сэмплинг. У каждого этапа — своё конкретное инженерное следствие для того, как вы работаете с AI на практике.</a:t>
             </a:r>
           </a:p>
         </p:txBody>
@@ -637,7 +636,13 @@
           <a:p/>
           <a:p>
             <a:r>
-              <a:t>Инженерный вывод: если ваша задача требует точной посимвольной операции — подсчёта символов, поиска подстроки по точному совпадению, преобразования регистра, проверки соответствия регулярному выражению — не делайте её чистым LLM-инференсом. Используйте внешний инструмент: код в Python sandbox, регулярное выражение, специализированный микросервис. Современные топ-модели (Claude 4.7, GPT-5) часто отвечают на `strawberry` правильно — но не потому, что один forward-pass через нейросеть умеет посимвольно работать со строкой, а потому, что модель внутри вызывает Python-инструмент или генерирует явный пошаговый подсчёт. Структурный факт «AI не видит букв, видит токены» при этом не меняется.</a:t>
+              <a:t>Инженерный вывод: если ваша задача требует точной посимвольной операции — подсчёта символов, поиска подстроки по точному совпадению, преобразования регистра, проверки соответствия регулярному выражению — не делайте её чистым LLM-инференсом. Используйте внешний инструмент: код в Python sandbox, регулярное выражение, специализированный микросервис. Современные топ-модели (o1-класс, Claude 4.7, GPT-5) часто отвечают на `strawberry` правильно — но не потому, что один forward-pass через нейросеть умеет посимвольно работать со строкой, а потому, что модель внутри вызывает Python-инструмент или генерирует явный пошаговый подсчёт. Структурный факт «AI не видит букв, видит токены» при этом не меняется.</a:t>
+            </a:r>
+          </a:p>
+          <a:p/>
+          <a:p>
+            <a:r>
+              <a:t>Та же природа объясняет вторую, менее очевидную проблему — арифметику. Числа тоже проходят через токенизатор, и разбиение на токены непредсказуемо совпадает с разрядами: `1234` может разрезаться на `12`+`34` (совпадает с сотнями), а `55688` — на `556`+`88` (уже не совпадает). Модель не видит цифры по отдельности — она видит эти нерегулярные группы. Следствие измеримо: на 3-значном умножении GPT-4 без внешних инструментов даёт около 59% точности, на 4-значном — уже 4%, а на 5-значном — 0% (arXiv 2410.19730). Решение то же самое, что и для букв: внешний калькулятор или код, либо явный пошаговый вывод, а не один прямой проход модели.</a:t>
             </a:r>
           </a:p>
         </p:txBody>
@@ -1517,7 +1522,7 @@
           <a:p/>
           <a:p>
             <a:r>
-              <a:t>Дорожная карта внизу слайда соответствует этим четырём этапам: токенизация, эмбеддинги, механизм внимания, сэмплинг. Каждому посвящён отдельный раздел. После четырёх разделов мы возвращаемся к трём практическим вопросам, которые Лекция 1 §5.3 оставила как обещанный payoff: почему промпт с ролью работает лучше пустого, почему AI плохо считает буквы, почему один и тот же запрос даёт разные ответы. На все три ответим через конкретный внутренний механизм, не через интуицию.</a:t>
+              <a:t>Дорожная карта внизу слайда соответствует этим четырём этапам: токенизация, эмбеддинги, механизм внимания, сэмплинг. Каждому посвящён отдельный раздел. После четырёх разделов мы возвращаемся к трём практическим вопросам, которые Лекция 1 оставила без ответа: почему промпт с ролью работает лучше пустого, почему AI плохо считает буквы, почему один и тот же запрос даёт разные ответы. На все три ответим через конкретный внутренний механизм, не через интуицию.</a:t>
             </a:r>
           </a:p>
           <a:p/>
@@ -1611,7 +1616,7 @@
           <a:p/>
           <a:p>
             <a:r>
-              <a:t>Рабочее объяснение: role-токены получают повышенный вес в attention-распределении при генерации первых токенов ответа. Роль в промпте — не просьба «поверь мне», а явный input-сигнал, прямо влияющий на распределение внимания. Это первое из трёх «почему» Лекции 1 §5.3, и его мы теперь объясняем через механизм.</a:t>
+              <a:t>Рабочее объяснение: role-токены получают повышенный вес в attention-распределении при генерации первых токенов ответа. Роль в промпте — не просьба «поверь мне», а явный input-сигнал, прямо влияющий на распределение внимания. Это первый из трёх вопросов «почему», поставленных в начале лекции, и теперь мы объясняем его через механизм.</a:t>
             </a:r>
           </a:p>
         </p:txBody>
@@ -1688,7 +1693,7 @@
           <a:p/>
           <a:p>
             <a:r>
-              <a:t>Механизм внимания работает на всех токенах контекста, что приводит к естественному ограничению: контекстное окно — это максимальное количество токенов, которое модель может обработать за один запрос. Лекция 1 §3.3.1 уже вводила понятие на уровне «когда история чата плюс новое сообщение перестают помещаться, старые сообщения выпадают». Сейчас мы углубляем: почему именно есть верхний предел и почему он стоит денег.</a:t>
+              <a:t>Механизм внимания работает на всех токенах контекста, что приводит к естественному ограничению: контекстное окно — это максимальное количество токенов, которое модель может обработать за один запрос. Лекция 1 уже вводила понятие на уровне «когда история чата плюс новое сообщение перестают помещаться, старые сообщения выпадают». Сейчас мы углубляем: почему именно есть верхний предел и почему он стоит денег.</a:t>
             </a:r>
           </a:p>
           <a:p/>
@@ -2070,7 +2075,7 @@
           <a:p/>
           <a:p>
             <a:r>
-              <a:t>Этот слайд отвечает на третье из трёх «почему» Лекции 1 §5.3: почему один и тот же запрос даёт разные ответы. Ответ короткий: потому что при T больше нуля сэмплинг — стохастический процесс, и из одного и того же распределения каждый запуск может выбрать разный токен. Это не баг; это инженерное решение, дающее моделям естественную вариативность, что для большинства интерактивных задач воспринимается как «человекоподобность».</a:t>
+              <a:t>Этот слайд отвечает на третий из трёх вопросов «почему», поставленных в начале лекции: почему один и тот же запрос даёт разные ответы. Ответ короткий: потому что при T больше нуля сэмплинг — стохастический процесс, и из одного и того же распределения каждый запуск может выбрать разный токен. Это не баг; это инженерное решение, дающее моделям естественную вариативность, что для большинства интерактивных задач воспринимается как «человекоподобность».</a:t>
             </a:r>
           </a:p>
         </p:txBody>
@@ -2246,7 +2251,7 @@
           <a:lstStyle/>
           <a:p>
             <a:r>
-              <a:t>Соберём четыре этапа inference в единый цикл. Лекция 1 §3.2 описывала модель как stateless-функцию: «вход — данные, выход — предсказание, между вызовами состояния нет». Но в чате с LLM мы наблюдаем не одну функцию, а длинный ответ — фразу, абзац, страницу. Откуда берётся длинный ответ из stateless-вызовов?</a:t>
+              <a:t>Соберём четыре этапа inference в единый цикл. Лекция 1 описывала модель как stateless-функцию: «вход — данные, выход — предсказание, между вызовами состояния нет». Но в чате с LLM мы наблюдаем не одну функцию, а длинный ответ — фразу, абзац, страницу. Откуда берётся длинный ответ из stateless-вызовов?</a:t>
             </a:r>
           </a:p>
           <a:p/>
@@ -2258,7 +2263,7 @@
           <a:p/>
           <a:p>
             <a:r>
-              <a:t>Цикл повторяется, пока модель не сгенерирует специальный токен «конец ответа» или пока не упрётся в `max_tokens`. Каждый отдельный шаг этого цикла — stateless: модель ничего не «помнит» между шагами; всю «память» несёт сам контекст, который каждый раз подаётся целиком. Это уточнение к Лекции 1 §3.2: модель действительно stateless, но из stateless-шагов собирается процесс, имеющий вид связного ответа, за счёт того, что каждый следующий шаг видит весь предыдущий контекст. Иллюзия «памяти» внутри одного ответа создаётся не моделью, а оркестратором, который собирает и подаёт контекст.</a:t>
+              <a:t>Цикл повторяется, пока модель не сгенерирует специальный токен «конец ответа» или пока не упрётся в `max_tokens`. Каждый отдельный шаг этого цикла — stateless: модель ничего не «помнит» между шагами; всю «память» несёт сам контекст, который каждый раз подаётся целиком. Это уточнение к тому, что говорила Лекция 1: модель действительно stateless, но из stateless-шагов собирается процесс, имеющий вид связного ответа, за счёт того, что каждый следующий шаг видит весь предыдущий контекст. Иллюзия «памяти» внутри одного ответа создаётся не моделью, а оркестратором, который собирает и подаёт контекст.</a:t>
             </a:r>
           </a:p>
           <a:p/>
@@ -2352,13 +2357,13 @@
           <a:p/>
           <a:p>
             <a:r>
-              <a:t>Облачные сервисы — OpenAI, Anthropic, Google, российские Yandex и Сбер — работают с моделями значительно большего размера (порядка сотен миллиардов параметров и больше). Качество ответов на сложных задачах — выше; контекстное окно — больше (сотни тысяч и миллион токенов); типичная задержка ответа — 200–500 мс. Платится это передачей данных через API провайдера (со всеми вопросами политики хранения и использования, которые мы разбирали в Лекции 1 §4.2) и оплатой за токены — которая для русского текста выше, чем для английского, как мы видели в §1.4.</a:t>
+              <a:t>Облачные сервисы — OpenAI, Anthropic, Google, российские Yandex и Сбер — работают с моделями значительно большего размера (порядка сотен миллиардов параметров и больше). Качество ответов на сложных задачах — выше; контекстное окно — больше (сотни тысяч и миллион токенов); типичная задержка ответа — 200–500 мс. Платится это передачей данных через API провайдера (со всеми вопросами политики хранения и использования, которые мы разбирали в Лекции 1) и оплатой за токены — которая для русского текста выше, чем для английского, как мы видели ранее сегодня.</a:t>
             </a:r>
           </a:p>
           <a:p/>
           <a:p>
             <a:r>
-              <a:t>Глубокая дискуссия о локальных и облачных моделях — со схемой принятия решения, точкой безубыточности по объёму запросов, регуляторными аспектами — была в Лекции 1 §4.2 и здесь не повторяется. Сюда важно унести один тезис: архитектурно inference выглядит одинаково; различия — в размере модели и в среде. Когда вы выбираете между «локально» и «в облаке», вы выбираете не разные технологии, а разные точки на шкале «качество × приватность × стоимость», и эта шкала не зависит от того, как именно устроен цикл inference внутри.</a:t>
+              <a:t>Глубокая дискуссия о локальных и облачных моделях — со схемой принятия решения, точкой безубыточности по объёму запросов, регуляторными аспектами — была в Лекции 1 и здесь не повторяется. Сюда важно унести один тезис: архитектурно inference выглядит одинаково; различия — в размере модели и в среде. Когда вы выбираете между «локально» и «в облаке», вы выбираете не разные технологии, а разные точки на шкале «качество × приватность × стоимость», и эта шкала не зависит от того, как именно устроен цикл inference внутри.</a:t>
             </a:r>
           </a:p>
         </p:txBody>
@@ -2434,7 +2439,7 @@
           <a:p/>
           <a:p>
             <a:r>
-              <a:t>В этом разделе шесть слайдов. Сначала — короткий recap: те же четыре этапа теперь сложены в горизонтальный конвейер; одна строка определения под каждой стадией. Потом — главный payoff лекции: явные ответы на три «почему» из Лекции 1. Почему промпт с ролью работает лучше пустого. Почему AI плохо считает буквы. Почему один и тот же запрос даёт разные ответы. На каждом «почему» ставим явную ссылку на механизм, который мы только что разобрали.</a:t>
+              <a:t>В этом разделе шесть слайдов. Сначала — короткий recap: те же четыре этапа теперь сложены в горизонтальный конвейер; одна строка определения под каждой стадией. Потом — главный практический итог лекции: явные ответы на три «почему» из Лекции 1. Почему промпт с ролью работает лучше пустого. Почему AI плохо считает буквы. Почему один и тот же запрос даёт разные ответы. На каждом «почему» ставим явную ссылку на механизм, который мы только что разобрали.</a:t>
             </a:r>
           </a:p>
           <a:p/>
@@ -2652,7 +2657,7 @@
           <a:p/>
           <a:p>
             <a:r>
-              <a:t>Этот конвейер — то, что Лекция 1 §3.2 называла «inference моделью». Тогда мы оставили его как чёрный ящик; теперь он перестал быть чёрным. Полезно зафиксировать: каждый из четырёх этапов имеет хотя бы одно прямое следствие на уровне инженерной практики. Токенизация даёт слепоту к буквам, разную стоимость на разных языках, требование внешнего инструмента для точной посимвольной работы. Эмбеддинг даёт семантический поиск, базовый слой RAG, кластеризацию. Механизм внимания даёт эффект роли в промпте, контекстное окно как ограничение, «lost in the middle». Сэмплинг даёт стохастичность ответа, четыре ручки API под сценарий, авторегрессионную природу длинного ответа. Эти восемь следствий — основное полезное содержание лекции; если на них вы можете опереться при принятии решений в своей инженерной работе, главное усвоено.</a:t>
+              <a:t>Этот конвейер — то, что Лекция 1 называла «inference моделью». Тогда мы оставили его как чёрный ящик; теперь он перестал быть чёрным. Полезно зафиксировать: каждый из четырёх этапов имеет хотя бы одно прямое следствие на уровне инженерной практики. Токенизация даёт слепоту к буквам, разную стоимость на разных языках, требование внешнего инструмента для точной посимвольной работы. Эмбеддинг даёт семантический поиск, базовый слой RAG, кластеризацию. Механизм внимания даёт эффект роли в промпте, контекстное окно как ограничение, «lost in the middle». Сэмплинг даёт стохастичность ответа, четыре ручки API под сценарий, авторегрессионную природу длинного ответа. Эти восемь следствий — основное полезное содержание лекции; если на них вы можете опереться при принятии решений в своей инженерной работе, главное усвоено.</a:t>
             </a:r>
           </a:p>
         </p:txBody>
@@ -2722,7 +2727,7 @@
           <a:lstStyle/>
           <a:p>
             <a:r>
-              <a:t>Лекция 1 §5.3 оставила три обещанных вопроса, на которые курс должен научить отвечать через механизм. Теперь мы можем это сделать.</a:t>
+              <a:t>В начале сегодняшней лекции мы поставили три вопроса «почему» — и обещали ответить на них не интуицией, а конкретным механизмом. Теперь у нас есть всё нужное, чтобы это сделать.</a:t>
             </a:r>
           </a:p>
           <a:p/>
@@ -2746,7 +2751,7 @@
           <a:p/>
           <a:p>
             <a:r>
-              <a:t>Эти три ответа — payoff Лекции 1, и одновременно — LO7 этой лекции. Если после неё вы можете назвать механизм для каждого «почему» в одном-двух предложениях, главное содержание лекции усвоено. Заметьте: ответы не интуитивные («модель такая, потому что её плохо обучили»), а механистические — каждое «почему» прицельно сводится к конкретному внутреннему этапу конвейера. Эта механистичность — то, что отличает инженерное понимание LLM от пользовательского.</a:t>
+              <a:t>Эти три ответа — главный практический итог сегодняшней лекции. Если вы можете назвать механизм для каждого «почему» в одном-двух предложениях, главное содержание усвоено. Заметьте: ответы не интуитивные («модель такая, потому что её плохо обучили»), а механистические — каждое «почему» прицельно сводится к конкретному внутреннему этапу конвейера. Эта механистичность — то, что отличает инженерное понимание LLM от пользовательского.</a:t>
             </a:r>
           </a:p>
         </p:txBody>
@@ -2816,7 +2821,7 @@
           <a:lstStyle/>
           <a:p>
             <a:r>
-              <a:t>Расширим Лекцию 1 §1.4 — классификацию задача × модальность — одним практическим вопросом: когда LLM — не правильный инструмент. Универсальное использование больших моделей привлекательно, но в значимом числе сценариев оно проигрывает по эффективности классическим методам ML.</a:t>
+              <a:t>Расширим классификацию задача × модальность из Лекции 1 одним практическим вопросом: когда LLM — не правильный инструмент. Универсальное использование больших моделей привлекательно, но в значимом числе сценариев оно проигрывает по эффективности классическим методам ML.</a:t>
             </a:r>
           </a:p>
           <a:p/>
@@ -2910,7 +2915,7 @@
           <a:lstStyle/>
           <a:p>
             <a:r>
-              <a:t>Третий короткий кросс-сюжетный фрейм — возврат к одному из самых концептуально важных мест Лекции 1, §4.8: трём уровням причинности Перла. Лекция 1 показала, что современные AI-системы устойчиво работают на уровне 1 (ассоциация), частично — на уровне 2 (вмешательство), и не справляются с уровнем 3 (контрфактуальность). Теперь у нас есть механистическое основание для этого тезиса.</a:t>
+              <a:t>Третий короткий кросс-сюжетный фрейм — возврат к одному из самых концептуально важных мест Лекции 1: трём уровням причинности Перла. Лекция 1 показала, что современные AI-системы устойчиво работают на уровне 1 (ассоциация), частично — на уровне 2 (вмешательство), и не справляются с уровнем 3 (контрфактуальность). Теперь у нас есть механистическое основание для этого тезиса.</a:t>
             </a:r>
           </a:p>
           <a:p/>
@@ -2928,13 +2933,13 @@
           <a:p/>
           <a:p>
             <a:r>
-              <a:t>Это объясняет описанный в Лекции 1 §4.8 феномен: модель прекрасно отвечает на «что коррелирует с чем» (анализ данных). Хуже — на «что произойдёт, если я изменю X» (оценка вмешательства). И почти никак — на «было бы Y, если бы X не случилось» (контрфактуальный анализ). Контрфактуальные вопросы остаются зоной человеческого экспертного суждения — это не временный технический недостаток, а ограничение текущей парадигмы.</a:t>
+              <a:t>Это объясняет феномен, описанный ещё в Лекции 1: модель прекрасно отвечает на «что коррелирует с чем» (анализ данных). Хуже — на «что произойдёт, если я изменю X» (оценка вмешательства). И почти никак — на «было бы Y, если бы X не случилось» (контрфактуальный анализ). Контрфактуальные вопросы остаются зоной человеческого экспертного суждения — это не временный технический недостаток, а ограничение текущей парадигмы.</a:t>
             </a:r>
           </a:p>
           <a:p/>
           <a:p>
             <a:r>
-              <a:t>Тон замечания — фактический, не алармистский. Механизм внимания — мощный инструмент в области, в которой он работает. Эта область — корреляционная статистика над данными, и инженер обязан помнить границу при проектировании систем, в которых от AI ожидают каузальных выводов.</a:t>
+              <a:t>Тон замечания — фактический, не алармистский. Механизм внимания — мощный инструмент в области, в которой он работает. Эта область — корреляционная статистика над данными, и инженер обязан помнить границу при проектировании систем, в которых от AI ожидают каузальных выводов. Практический вывод: там, где решения требуют именно причинного вывода, привлекайте эксперта предметной области или отдельные causal-методы — attention сам по себе для этого не предназначен.</a:t>
             </a:r>
           </a:p>
         </p:txBody>
@@ -3004,44 +3009,37 @@
           <a:lstStyle/>
           <a:p>
             <a:r>
-              <a:t>*[VERIFY-DAY-OF] За день до семинара — проверить доступность HF Playground и наличие Meta-Llama-3-8B-Instruct. Резервы: Together.ai, локальная Ollama.*</a:t>
+              <a:t>Тема следующей лекции — «Агенты, RAG, API: как AI выходит за пределы чата». В нашем конвейере inference, который мы только что собрали, есть жёсткое ограничение: модель видит только то, что есть в контексте, и не может пойти за информацией наружу. Лекция 3 покажет, как это ограничение обходится через четыре класса инструментов.</a:t>
             </a:r>
           </a:p>
           <a:p/>
+          <a:p>
+            <a:r>
+              <a:t>**RAG — Retrieval-Augmented Generation.** Это расширение, в котором перед обращением к LLM выполняется семантический поиск по вашей базе знаний на эмбеддингах — точно тех, что мы разбирали в разделе про эмбеддинги сегодняшней лекции — и top-K релевантных фрагментов добавляются в контекст. На уровне inference это всё тот же конвейер из четырёх этапов, только с обогащённым контекстом. RAG — самый прямой способ дать модели доступ к информации, которой нет в её весах.</a:t>
+            </a:r>
+          </a:p>
           <a:p/>
           <a:p>
             <a:r>
-              <a:t>Тема семинара 2 — «Эффект температуры: как стохастичность сэмплинга меняет ответ LLM». На семинаре соберём результаты ваших домашних экспериментов и обсудим, какую температуру каждый выбрал бы для production своей задачи.</a:t>
+              <a:t>**Tools или function calling.** Механизм, через который модель генерирует специально структурированный вызов — обычно в формате JSON, иногда в других форматах в зависимости от API-провайдера — указывающий, какой инструмент она хочет вызвать и с какими параметрами. Внешняя система видит этот вызов, выполняет его, и результат возвращается модели как часть контекста. Это канонический способ обойти ограничения слепоты к буквам (для арифметики — Python sandbox) и stateless-природы (для актуальной информации — веб-поиск).</a:t>
             </a:r>
           </a:p>
           <a:p/>
           <a:p>
             <a:r>
-              <a:t>Задание из трёх шагов. Первый — возьмите типовую задачу из своей предметной области. Конкретный, воспроизводимый запрос — не «помоги мне думать», а «классифицируй эту жалобу клиента» или «напиши Python-функцию, которая делает X». Запрос подбирается так, чтобы вы могли честно сравнить ответы на разных температурах.</a:t>
+              <a:t>**MCP — Model Context Protocol.** Открытый стандарт подключения инструментов к LLM, представленный Anthropic в ноябре 2024 года. Решает проблему «каждое сочетание модели и инструмента — отдельная интеграция»: один протокол, переиспользуемое подключение. Мы упоминали MCP в Лекции 1; в Лекции 3 разберём подробнее.</a:t>
             </a:r>
           </a:p>
           <a:p/>
           <a:p>
             <a:r>
-              <a:t>Второй шаг — запустите запрос в playground с явным контролем температуры. Три значения: T = 0, 0.7 и 1.5. Для каждого — по три запуска, чтобы оценить вариативность. Один запуск на значение не даст представления о variance: на T = 0 одинаковый ответ, на T = 1.5 — каждый раз разный. Три запуска позволяют это увидеть.</a:t>
+              <a:t>**Agent loop.** Цикл act → observe → reflect, рассмотренный ещё в Лекции 1. На каждом шаге модель решает действие, видит результат, корректирует план — и так до достижения цели. Все четыре концепта надстраиваются над single-shot inference, который мы собрали сегодня. Multimodal-расширения — CLIP-эмбеддинги для изображений, аудио-эмбеддинги, унифицированные модели типа GPT-4o, обрабатывающие текст и изображение совместно — там же, в составе RAG для нетекстовых модальностей.</a:t>
             </a:r>
           </a:p>
           <a:p/>
           <a:p>
             <a:r>
-              <a:t>Третий шаг — одностраничный разбор (1 A4): что изменилось от T = 0 к T = 1.5, что осталось одинаковым, и какую T вы бы выбрали для production с обоснованием. Это короткий рефлексивный текст, не отчёт.</a:t>
-            </a:r>
-          </a:p>
-          <a:p/>
-          <a:p>
-            <a:r>
-              <a:t>Playground — Hugging Face Inference Playground (бесплатный, T-slider в UI). Модель `Meta-Llama-3-8B-Instruct`: даёт единое основание для сравнения. Резервные: Together.ai playground или локальная Ollama с Llama 3 — оба поддерживают T. Не подойдут UI ChatGPT Free и Claude.ai — нет регулятора температуры. Если конкретные сервисы устареют, общий критерий: любой playground с явным регулируемым T, стабильным открытым доступом и стабильной моделью.</a:t>
-            </a:r>
-          </a:p>
-          <a:p/>
-          <a:p>
-            <a:r>
-              <a:t>Бонусный челлендж — два вопроса на слепоту к буквам из §1.3 главы, проверьте на трёх моделях. Объясните результат через токенизацию. Задание покрывает LO4, LO6 и LO7 на уровне apply.</a:t>
+              <a:t>На семинаре будем разбирать ваши домашние эксперименты с температурой; постарайтесь успеть прогнать запросы заранее. А пока — оставшееся время мы посвящаем вашим вопросам.</a:t>
             </a:r>
           </a:p>
         </p:txBody>
@@ -3111,106 +3109,6 @@
           <a:lstStyle/>
           <a:p>
             <a:r>
-              <a:t>Тема следующей лекции — «Агенты, RAG, API: как AI выходит за пределы чата». В нашем конвейере inference, который мы только что собрали, есть жёсткое ограничение: модель видит только то, что есть в контексте, и не может пойти за информацией наружу. Лекция 3 покажет, как это ограничение обходится через четыре класса инструментов.</a:t>
-            </a:r>
-          </a:p>
-          <a:p/>
-          <a:p>
-            <a:r>
-              <a:t>**RAG — Retrieval-Augmented Generation.** Это расширение, в котором перед обращением к LLM выполняется семантический поиск по вашей базе знаний на эмбеддингах — точно тех, что мы разбирали в §§2.3–2.4 — и top-K релевантных фрагментов добавляются в контекст. На уровне inference это всё тот же конвейер из четырёх этапов, только с обогащённым контекстом. RAG — самый прямой способ дать модели доступ к информации, которой нет в её весах.</a:t>
-            </a:r>
-          </a:p>
-          <a:p/>
-          <a:p>
-            <a:r>
-              <a:t>**Tools или function calling.** Механизм, через который модель генерирует специально структурированный вызов — обычно в формате JSON, иногда в других форматах в зависимости от API-провайдера — указывающий, какой инструмент она хочет вызвать и с какими параметрами. Внешняя система видит этот вызов, выполняет его, и результат возвращается модели как часть контекста. Это канонический способ обойти ограничения слепоты к буквам (для арифметики — Python sandbox) и stateless-природы (для актуальной информации — веб-поиск).</a:t>
-            </a:r>
-          </a:p>
-          <a:p/>
-          <a:p>
-            <a:r>
-              <a:t>**MCP — Model Context Protocol.** Открытый стандарт подключения инструментов к LLM, представленный Anthropic в ноябре 2024 года. Решает проблему «каждое сочетание модели и инструмента — отдельная интеграция»: один протокол, переиспользуемое подключение. Мы упоминали MCP в Лекции 1 §2.2; в Лекции 3 разберём подробнее.</a:t>
-            </a:r>
-          </a:p>
-          <a:p/>
-          <a:p>
-            <a:r>
-              <a:t>**Agent loop.** Цикл act → observe → reflect, рассмотренный в Лекции 1 §3.4.1. На каждом шаге модель решает действие, видит результат, корректирует план — и так до достижения цели. Все четыре концепта надстраиваются над single-shot inference из §4.4 нашей лекции. Multimodal-расширения — CLIP-эмбеддинги для изображений, аудио-эмбеддинги, унифицированные модели типа GPT-4o, обрабатывающие текст и изображение совместно — там же, в составе RAG для нетекстовых модальностей.</a:t>
-            </a:r>
-          </a:p>
-          <a:p/>
-          <a:p>
-            <a:r>
-              <a:t>На семинаре будем разбирать ваши домашние эксперименты с температурой; постарайтесь успеть прогнать запросы заранее. А пока — оставшееся время мы посвящаем вашим вопросам.</a:t>
-            </a:r>
-          </a:p>
-        </p:txBody>
-      </p:sp>
-      <p:sp>
-        <p:nvSpPr>
-          <p:cNvPr id="4" name="Slide Number Placeholder 3"/>
-          <p:cNvSpPr>
-            <a:spLocks noGrp="1"/>
-          </p:cNvSpPr>
-          <p:nvPr>
-            <p:ph type="sldNum" idx="5" sz="quarter"/>
-          </p:nvPr>
-        </p:nvSpPr>
-        <p:spPr/>
-      </p:sp>
-    </p:spTree>
-  </p:cSld>
-  <p:clrMapOvr>
-    <a:masterClrMapping/>
-  </p:clrMapOvr>
-</p:notes>
-</file>
-
-<file path=ppt/notesSlides/notesSlide36.xml><?xml version="1.0" encoding="utf-8"?>
-<p:notes xmlns:a="http://schemas.openxmlformats.org/drawingml/2006/main" xmlns:p="http://schemas.openxmlformats.org/presentationml/2006/main" xmlns:r="http://schemas.openxmlformats.org/officeDocument/2006/relationships">
-  <p:cSld>
-    <p:spTree>
-      <p:nvGrpSpPr>
-        <p:cNvPr id="1" name=""/>
-        <p:cNvGrpSpPr/>
-        <p:nvPr/>
-      </p:nvGrpSpPr>
-      <p:grpSpPr>
-        <a:xfrm>
-          <a:off x="0" y="0"/>
-          <a:ext cx="0" cy="0"/>
-          <a:chOff x="0" y="0"/>
-          <a:chExt cx="0" cy="0"/>
-        </a:xfrm>
-      </p:grpSpPr>
-      <p:sp>
-        <p:nvSpPr>
-          <p:cNvPr id="2" name="Slide Image Placeholder 1"/>
-          <p:cNvSpPr>
-            <a:spLocks noGrp="1"/>
-          </p:cNvSpPr>
-          <p:nvPr>
-            <p:ph type="sldImg" idx="2"/>
-          </p:nvPr>
-        </p:nvSpPr>
-        <p:spPr/>
-      </p:sp>
-      <p:sp>
-        <p:nvSpPr>
-          <p:cNvPr id="3" name="Notes Placeholder 2"/>
-          <p:cNvSpPr>
-            <a:spLocks noGrp="1"/>
-          </p:cNvSpPr>
-          <p:nvPr>
-            <p:ph type="body" idx="3" sz="quarter"/>
-          </p:nvPr>
-        </p:nvSpPr>
-        <p:spPr/>
-        <p:txBody>
-          <a:bodyPr/>
-          <a:lstStyle/>
-          <a:p>
-            <a:r>
               <a:t>На этом основная часть лекции закончена. Дальше — оставшееся время отдаём вашим вопросам. Нет «глупых» вопросов и нет «слишком базовых» — если что-то прозвучало неясно или у вас в голове не сложилась картинка одного из четырёх этапов, лучше спросить сейчас, пока тема свежая.</a:t>
             </a:r>
           </a:p>
@@ -3293,7 +3191,7 @@
           <a:lstStyle/>
           <a:p>
             <a:r>
-              <a:t>Чтобы не терять контекст, на одну минуту вернёмся к Лекции 1. На той лекции мы построили слоистую картину работы AI в продукте: внизу модель, над ней чат-цикл, над чатом — агентный цикл, и сверху — приложение, в которое всё это упаковывается. Лекция 1 §3.2 описала самый нижний слой, модель, как stateless-функцию: на вход данные, на выход предсказание, и никакой памяти между двумя вызовами. С этим описанием мы умеем говорить о том, **где** модель находится в большей системе, но мы оставили в стороне вопрос — **что именно** происходит внутри этой stateless-функции, когда вы пишете в чат «Сегодня я съел яблоко» и получаете ответ.</a:t>
+              <a:t>Чтобы не терять контекст, на одну минуту вернёмся к Лекции 1. На той лекции мы построили слоистую картину работы AI в продукте: внизу модель, над ней чат-цикл, над чатом — агентный цикл, и сверху — приложение, в которое всё это упаковывается. Лекция 1 описала самый нижний слой, модель, как stateless-функцию: на вход данные, на выход предсказание, и никакой памяти между двумя вызовами. С этим описанием мы умеем говорить о том, **где** модель находится в большей системе, но мы оставили в стороне вопрос — **что именно** происходит внутри этой stateless-функции, когда вы пишете в чат «Сегодня я съел яблоко» и получаете ответ.</a:t>
             </a:r>
           </a:p>
           <a:p/>
@@ -3305,7 +3203,7 @@
           <a:p/>
           <a:p>
             <a:r>
-              <a:t>Лекция 1 §3.2 говорила: «модель — это чёрный ящик stateless inference». Сегодня мы перестаём держать его чёрным. После этой лекции в этом ящике останутся уже не четыре механизма, а четыре отдельных этапа с понятной ролью каждого — и с конкретными инженерными следствиями для того, как вы будете ставить задачи модели.</a:t>
+              <a:t>На Лекции 1 модель называлась «чёрным ящиком stateless inference». Сегодня мы перестаём держать его чёрным. После этой лекции в этом ящике останутся уже не четыре механизма, а четыре отдельных этапа с понятной ролью каждого — и с конкретными инженерными следствиями для того, как вы будете ставить задачи модели.</a:t>
             </a:r>
           </a:p>
         </p:txBody>
@@ -3381,13 +3279,13 @@
           <a:p/>
           <a:p>
             <a:r>
-              <a:t>В ответе на этот вопрос участвуют три обещания, которые Лекция 1 оставила в §5.3 как payoff курса. Первое — почему промпт с ролью работает лучше пустого. Тот, кто пробовал, знает, что «Ты эксперт по Python, объясни асинхронность джуниору» даёт качественно другой ответ, чем просто «Объясни асинхронность». Сегодня мы поймём механизм этого эффекта на уровне внимания. Второе — почему AI плохо считает буквы. Классический пример со словом `strawberry` и подсчётом буквы `r` — не баг и не пробел в обучении, а структурное следствие того, как устроена токенизация. Сегодня разберём это в Разделе 1. Третье — почему один и тот же запрос может давать разные ответы. Источник — стохастический сэмплинг при температуре больше нуля, и в Разделе 4 мы увидим механизм.</a:t>
+              <a:t>В ответе на этот вопрос участвуют три обещания, которые Лекция 1 оставила без ответа. Первое — почему промпт с ролью работает лучше пустого. Тот, кто пробовал, знает, что «Ты эксперт по Python, объясни асинхронность джуниору» даёт качественно другой ответ, чем просто «Объясни асинхронность». Сегодня мы поймём механизм этого эффекта на уровне внимания. Второе — почему AI плохо считает буквы. Классический пример со словом `strawberry` и подсчётом буквы `r` — не баг и не пробел в обучении, а структурное следствие того, как устроена токенизация. Сегодня разберём это в Разделе 1. Третье — почему один и тот же запрос может давать разные ответы. Источник — стохастический сэмплинг при температуре больше нуля, и в Разделе 4 мы увидим механизм.</a:t>
             </a:r>
           </a:p>
           <a:p/>
           <a:p>
             <a:r>
-              <a:t>Эти три обещания работают как якоря лекции: к ним мы будем возвращаться в каждом из четырёх разделов, и в самом конце, на слайде 24, они получат явный payoff — три ответа на три «почему» через конкретные внутренние механизмы. Это и есть LO7 главной четвёрки учебных целей курса.</a:t>
+              <a:t>Эти три обещания работают как якоря лекции: к ним мы будем возвращаться в каждом из четырёх разделов, и в самом конце они получат явный ответ — три «почему» через конкретные внутренние механизмы.</a:t>
             </a:r>
           </a:p>
         </p:txBody>
@@ -6765,8 +6663,8 @@
         </p:nvSpPr>
         <p:spPr>
           <a:xfrm>
-            <a:off x="502920" y="457200"/>
-            <a:ext cx="11247120" cy="731520"/>
+            <a:off x="502920" y="411480"/>
+            <a:ext cx="11247120" cy="960120"/>
           </a:xfrm>
           <a:prstGeom prst="rect">
             <a:avLst/>
@@ -6781,17 +6679,17 @@
           <a:p>
             <a:pPr algn="ctr">
               <a:lnSpc>
-                <a:spcPct val="110000"/>
-              </a:lnSpc>
-            </a:pPr>
-            <a:r>
-              <a:rPr sz="3000" b="1" i="0">
+                <a:spcPct val="115000"/>
+              </a:lnSpc>
+            </a:pPr>
+            <a:r>
+              <a:rPr sz="2800" b="1" i="0">
                 <a:solidFill>
                   <a:srgbClr val="21295C"/>
                 </a:solidFill>
                 <a:latin typeface="Arial"/>
               </a:rPr>
-              <a:t>Модель видит ваш запрос не словами — а фрагментами</a:t>
+              <a:t>Пока вы читаете это предложение — на что вы НЕ обращаете внимания?</a:t>
             </a:r>
           </a:p>
         </p:txBody>
@@ -6804,8 +6702,8 @@
         </p:nvSpPr>
         <p:spPr>
           <a:xfrm>
-            <a:off x="502920" y="1188720"/>
-            <a:ext cx="11247120" cy="365760"/>
+            <a:off x="502920" y="1417320"/>
+            <a:ext cx="11247120" cy="411480"/>
           </a:xfrm>
           <a:prstGeom prst="rect">
             <a:avLst/>
@@ -6824,13 +6722,13 @@
               </a:lnSpc>
             </a:pPr>
             <a:r>
-              <a:rPr sz="1500" b="0" i="1">
+              <a:rPr sz="1700" b="0" i="1">
                 <a:solidFill>
                   <a:srgbClr val="028090"/>
                 </a:solidFill>
                 <a:latin typeface="Arial"/>
               </a:rPr>
-              <a:t>Эти фрагменты называются токенами. Они — единственное, что попадает в LLM.</a:t>
+              <a:t>Ваш мозг ежесекундно выбирает, что важно, а что — фон.</a:t>
             </a:r>
           </a:p>
         </p:txBody>
@@ -6843,12 +6741,12 @@
         </p:nvSpPr>
         <p:spPr>
           <a:xfrm>
-            <a:off x="502920" y="1691640"/>
-            <a:ext cx="11247120" cy="1280160"/>
+            <a:off x="3246120" y="1965960"/>
+            <a:ext cx="5669280" cy="3840480"/>
           </a:xfrm>
           <a:prstGeom prst="roundRect">
             <a:avLst>
-              <a:gd name="adj" fmla="val 23809"/>
+              <a:gd name="adj" fmla="val 7936"/>
             </a:avLst>
           </a:prstGeom>
           <a:solidFill>
@@ -6883,61 +6781,30 @@
           </a:p>
         </p:txBody>
       </p:sp>
-      <p:sp>
-        <p:nvSpPr>
-          <p:cNvPr id="5" name="Rounded Rectangle 4"/>
-          <p:cNvSpPr/>
-          <p:nvPr/>
-        </p:nvSpPr>
-        <p:spPr>
-          <a:xfrm>
-            <a:off x="685800" y="2148840"/>
-            <a:ext cx="777240" cy="411480"/>
-          </a:xfrm>
-          <a:prstGeom prst="roundRect">
-            <a:avLst>
-              <a:gd name="adj" fmla="val 50000"/>
-            </a:avLst>
-          </a:prstGeom>
-          <a:solidFill>
-            <a:srgbClr val="065A82"/>
-          </a:solidFill>
-          <a:ln>
-            <a:noFill/>
-          </a:ln>
-          <a:effectLst/>
-        </p:spPr>
-        <p:style>
-          <a:lnRef idx="1">
-            <a:schemeClr val="accent1"/>
-          </a:lnRef>
-          <a:fillRef idx="3">
-            <a:schemeClr val="accent1"/>
-          </a:fillRef>
-          <a:effectRef idx="2">
-            <a:schemeClr val="accent1"/>
-          </a:effectRef>
-          <a:fontRef idx="minor">
-            <a:schemeClr val="lt1"/>
-          </a:fontRef>
-        </p:style>
-        <p:txBody>
-          <a:bodyPr rtlCol="0" anchor="ctr" lIns="45720" rIns="45720" tIns="36576" bIns="36576" wrap="none"/>
-          <a:lstStyle/>
-          <a:p>
-            <a:pPr algn="ctr"/>
-            <a:r>
-              <a:rPr sz="1600" b="1">
-                <a:solidFill>
-                  <a:srgbClr val="FFFFFF"/>
-                </a:solidFill>
-                <a:latin typeface="Arial"/>
-              </a:rPr>
-              <a:t>EN</a:t>
-            </a:r>
-          </a:p>
-        </p:txBody>
-      </p:sp>
+      <p:pic>
+        <p:nvPicPr>
+          <p:cNvPr id="5" name="Picture 4" descr="s01-attention-character.png"/>
+          <p:cNvPicPr>
+            <a:picLocks noChangeAspect="1"/>
+          </p:cNvPicPr>
+          <p:nvPr/>
+        </p:nvPicPr>
+        <p:blipFill>
+          <a:blip r:embed="rId2"/>
+          <a:stretch>
+            <a:fillRect/>
+          </a:stretch>
+        </p:blipFill>
+        <p:spPr>
+          <a:xfrm>
+            <a:off x="3876402" y="2167128"/>
+            <a:ext cx="4408714" cy="3429000"/>
+          </a:xfrm>
+          <a:prstGeom prst="rect">
+            <a:avLst/>
+          </a:prstGeom>
+        </p:spPr>
+      </p:pic>
       <p:sp>
         <p:nvSpPr>
           <p:cNvPr id="6" name="TextBox 5"/>
@@ -6946,47 +6813,8 @@
         </p:nvSpPr>
         <p:spPr>
           <a:xfrm>
-            <a:off x="1600200" y="1874520"/>
-            <a:ext cx="7772400" cy="411480"/>
-          </a:xfrm>
-          <a:prstGeom prst="rect">
-            <a:avLst/>
-          </a:prstGeom>
-          <a:noFill/>
-        </p:spPr>
-        <p:txBody>
-          <a:bodyPr wrap="square" lIns="0" rIns="0" tIns="0" bIns="0" anchor="ctr">
-            <a:spAutoFit/>
-          </a:bodyPr>
-          <a:lstStyle/>
-          <a:p>
-            <a:pPr algn="l">
-              <a:lnSpc>
-                <a:spcPct val="115000"/>
-              </a:lnSpc>
-            </a:pPr>
-            <a:r>
-              <a:rPr sz="1800" b="1" i="0">
-                <a:solidFill>
-                  <a:srgbClr val="21295C"/>
-                </a:solidFill>
-                <a:latin typeface="Liberation Mono"/>
-              </a:rPr>
-              <a:t>"tokenization is fascinating"</a:t>
-            </a:r>
-          </a:p>
-        </p:txBody>
-      </p:sp>
-      <p:sp>
-        <p:nvSpPr>
-          <p:cNvPr id="7" name="TextBox 6"/>
-          <p:cNvSpPr txBox="1"/>
-          <p:nvPr/>
-        </p:nvSpPr>
-        <p:spPr>
-          <a:xfrm>
-            <a:off x="1600200" y="2286000"/>
-            <a:ext cx="502920" cy="274320"/>
+            <a:off x="502920" y="6080760"/>
+            <a:ext cx="11247120" cy="502920"/>
           </a:xfrm>
           <a:prstGeom prst="rect">
             <a:avLst/>
@@ -7001,1392 +6829,17 @@
           <a:p>
             <a:pPr algn="ctr">
               <a:lnSpc>
-                <a:spcPct val="115000"/>
-              </a:lnSpc>
-            </a:pPr>
-            <a:r>
-              <a:rPr sz="1400" b="1" i="0">
-                <a:solidFill>
-                  <a:srgbClr val="065A82"/>
-                </a:solidFill>
-                <a:latin typeface="Arial"/>
-              </a:rPr>
-              <a:t>↓</a:t>
-            </a:r>
-          </a:p>
-        </p:txBody>
-      </p:sp>
-      <p:sp>
-        <p:nvSpPr>
-          <p:cNvPr id="8" name="Rounded Rectangle 7"/>
-          <p:cNvSpPr/>
-          <p:nvPr/>
-        </p:nvSpPr>
-        <p:spPr>
-          <a:xfrm>
-            <a:off x="1600200" y="2468880"/>
-            <a:ext cx="914400" cy="384048"/>
-          </a:xfrm>
-          <a:prstGeom prst="roundRect">
-            <a:avLst>
-              <a:gd name="adj" fmla="val 50000"/>
-            </a:avLst>
-          </a:prstGeom>
-          <a:solidFill>
-            <a:srgbClr val="065A82"/>
-          </a:solidFill>
-          <a:ln>
-            <a:noFill/>
-          </a:ln>
-          <a:effectLst/>
-        </p:spPr>
-        <p:style>
-          <a:lnRef idx="1">
-            <a:schemeClr val="accent1"/>
-          </a:lnRef>
-          <a:fillRef idx="3">
-            <a:schemeClr val="accent1"/>
-          </a:fillRef>
-          <a:effectRef idx="2">
-            <a:schemeClr val="accent1"/>
-          </a:effectRef>
-          <a:fontRef idx="minor">
-            <a:schemeClr val="lt1"/>
-          </a:fontRef>
-        </p:style>
-        <p:txBody>
-          <a:bodyPr rtlCol="0" anchor="ctr" lIns="45720" rIns="45720" tIns="36576" bIns="36576" wrap="none"/>
-          <a:lstStyle/>
-          <a:p>
-            <a:pPr algn="ctr"/>
-            <a:r>
-              <a:rPr sz="1300" b="1">
-                <a:solidFill>
-                  <a:srgbClr val="FFFFFF"/>
-                </a:solidFill>
-                <a:latin typeface="Arial"/>
-              </a:rPr>
-              <a:t>[token]</a:t>
-            </a:r>
-          </a:p>
-        </p:txBody>
-      </p:sp>
-      <p:sp>
-        <p:nvSpPr>
-          <p:cNvPr id="9" name="Rounded Rectangle 8"/>
-          <p:cNvSpPr/>
-          <p:nvPr/>
-        </p:nvSpPr>
-        <p:spPr>
-          <a:xfrm>
-            <a:off x="2587752" y="2468880"/>
-            <a:ext cx="1152144" cy="384048"/>
-          </a:xfrm>
-          <a:prstGeom prst="roundRect">
-            <a:avLst>
-              <a:gd name="adj" fmla="val 50000"/>
-            </a:avLst>
-          </a:prstGeom>
-          <a:solidFill>
-            <a:srgbClr val="1C7293"/>
-          </a:solidFill>
-          <a:ln>
-            <a:noFill/>
-          </a:ln>
-          <a:effectLst/>
-        </p:spPr>
-        <p:style>
-          <a:lnRef idx="1">
-            <a:schemeClr val="accent1"/>
-          </a:lnRef>
-          <a:fillRef idx="3">
-            <a:schemeClr val="accent1"/>
-          </a:fillRef>
-          <a:effectRef idx="2">
-            <a:schemeClr val="accent1"/>
-          </a:effectRef>
-          <a:fontRef idx="minor">
-            <a:schemeClr val="lt1"/>
-          </a:fontRef>
-        </p:style>
-        <p:txBody>
-          <a:bodyPr rtlCol="0" anchor="ctr" lIns="45720" rIns="45720" tIns="36576" bIns="36576" wrap="none"/>
-          <a:lstStyle/>
-          <a:p>
-            <a:pPr algn="ctr"/>
-            <a:r>
-              <a:rPr sz="1300" b="1">
-                <a:solidFill>
-                  <a:srgbClr val="FFFFFF"/>
-                </a:solidFill>
-                <a:latin typeface="Arial"/>
-              </a:rPr>
-              <a:t>[ization]</a:t>
-            </a:r>
-          </a:p>
-        </p:txBody>
-      </p:sp>
-      <p:sp>
-        <p:nvSpPr>
-          <p:cNvPr id="10" name="Rounded Rectangle 9"/>
-          <p:cNvSpPr/>
-          <p:nvPr/>
-        </p:nvSpPr>
-        <p:spPr>
-          <a:xfrm>
-            <a:off x="3813048" y="2468880"/>
-            <a:ext cx="676656" cy="384048"/>
-          </a:xfrm>
-          <a:prstGeom prst="roundRect">
-            <a:avLst>
-              <a:gd name="adj" fmla="val 50000"/>
-            </a:avLst>
-          </a:prstGeom>
-          <a:solidFill>
-            <a:srgbClr val="028090"/>
-          </a:solidFill>
-          <a:ln>
-            <a:noFill/>
-          </a:ln>
-          <a:effectLst/>
-        </p:spPr>
-        <p:style>
-          <a:lnRef idx="1">
-            <a:schemeClr val="accent1"/>
-          </a:lnRef>
-          <a:fillRef idx="3">
-            <a:schemeClr val="accent1"/>
-          </a:fillRef>
-          <a:effectRef idx="2">
-            <a:schemeClr val="accent1"/>
-          </a:effectRef>
-          <a:fontRef idx="minor">
-            <a:schemeClr val="lt1"/>
-          </a:fontRef>
-        </p:style>
-        <p:txBody>
-          <a:bodyPr rtlCol="0" anchor="ctr" lIns="45720" rIns="45720" tIns="36576" bIns="36576" wrap="none"/>
-          <a:lstStyle/>
-          <a:p>
-            <a:pPr algn="ctr"/>
-            <a:r>
-              <a:rPr sz="1300" b="1">
-                <a:solidFill>
-                  <a:srgbClr val="FFFFFF"/>
-                </a:solidFill>
-                <a:latin typeface="Arial"/>
-              </a:rPr>
-              <a:t>[ is]</a:t>
-            </a:r>
-          </a:p>
-        </p:txBody>
-      </p:sp>
-      <p:sp>
-        <p:nvSpPr>
-          <p:cNvPr id="11" name="Rounded Rectangle 10"/>
-          <p:cNvSpPr/>
-          <p:nvPr/>
-        </p:nvSpPr>
-        <p:spPr>
-          <a:xfrm>
-            <a:off x="4562856" y="2468880"/>
-            <a:ext cx="1152144" cy="384048"/>
-          </a:xfrm>
-          <a:prstGeom prst="roundRect">
-            <a:avLst>
-              <a:gd name="adj" fmla="val 50000"/>
-            </a:avLst>
-          </a:prstGeom>
-          <a:solidFill>
-            <a:srgbClr val="065A82"/>
-          </a:solidFill>
-          <a:ln>
-            <a:noFill/>
-          </a:ln>
-          <a:effectLst/>
-        </p:spPr>
-        <p:style>
-          <a:lnRef idx="1">
-            <a:schemeClr val="accent1"/>
-          </a:lnRef>
-          <a:fillRef idx="3">
-            <a:schemeClr val="accent1"/>
-          </a:fillRef>
-          <a:effectRef idx="2">
-            <a:schemeClr val="accent1"/>
-          </a:effectRef>
-          <a:fontRef idx="minor">
-            <a:schemeClr val="lt1"/>
-          </a:fontRef>
-        </p:style>
-        <p:txBody>
-          <a:bodyPr rtlCol="0" anchor="ctr" lIns="45720" rIns="45720" tIns="36576" bIns="36576" wrap="none"/>
-          <a:lstStyle/>
-          <a:p>
-            <a:pPr algn="ctr"/>
-            <a:r>
-              <a:rPr sz="1300" b="1">
-                <a:solidFill>
-                  <a:srgbClr val="FFFFFF"/>
-                </a:solidFill>
-                <a:latin typeface="Arial"/>
-              </a:rPr>
-              <a:t>[ fascin]</a:t>
-            </a:r>
-          </a:p>
-        </p:txBody>
-      </p:sp>
-      <p:sp>
-        <p:nvSpPr>
-          <p:cNvPr id="12" name="Rounded Rectangle 11"/>
-          <p:cNvSpPr/>
-          <p:nvPr/>
-        </p:nvSpPr>
-        <p:spPr>
-          <a:xfrm>
-            <a:off x="5788152" y="2468880"/>
-            <a:ext cx="914400" cy="384048"/>
-          </a:xfrm>
-          <a:prstGeom prst="roundRect">
-            <a:avLst>
-              <a:gd name="adj" fmla="val 50000"/>
-            </a:avLst>
-          </a:prstGeom>
-          <a:solidFill>
-            <a:srgbClr val="1C7293"/>
-          </a:solidFill>
-          <a:ln>
-            <a:noFill/>
-          </a:ln>
-          <a:effectLst/>
-        </p:spPr>
-        <p:style>
-          <a:lnRef idx="1">
-            <a:schemeClr val="accent1"/>
-          </a:lnRef>
-          <a:fillRef idx="3">
-            <a:schemeClr val="accent1"/>
-          </a:fillRef>
-          <a:effectRef idx="2">
-            <a:schemeClr val="accent1"/>
-          </a:effectRef>
-          <a:fontRef idx="minor">
-            <a:schemeClr val="lt1"/>
-          </a:fontRef>
-        </p:style>
-        <p:txBody>
-          <a:bodyPr rtlCol="0" anchor="ctr" lIns="45720" rIns="45720" tIns="36576" bIns="36576" wrap="none"/>
-          <a:lstStyle/>
-          <a:p>
-            <a:pPr algn="ctr"/>
-            <a:r>
-              <a:rPr sz="1300" b="1">
-                <a:solidFill>
-                  <a:srgbClr val="FFFFFF"/>
-                </a:solidFill>
-                <a:latin typeface="Arial"/>
-              </a:rPr>
-              <a:t>[ating]</a:t>
-            </a:r>
-          </a:p>
-        </p:txBody>
-      </p:sp>
-      <p:sp>
-        <p:nvSpPr>
-          <p:cNvPr id="13" name="TextBox 12"/>
-          <p:cNvSpPr txBox="1"/>
-          <p:nvPr/>
-        </p:nvSpPr>
-        <p:spPr>
-          <a:xfrm>
-            <a:off x="9738360" y="2103120"/>
-            <a:ext cx="1417320" cy="457200"/>
-          </a:xfrm>
-          <a:prstGeom prst="rect">
-            <a:avLst/>
-          </a:prstGeom>
-          <a:noFill/>
-        </p:spPr>
-        <p:txBody>
-          <a:bodyPr wrap="square" lIns="0" rIns="0" tIns="0" bIns="0" anchor="ctr">
-            <a:spAutoFit/>
-          </a:bodyPr>
-          <a:lstStyle/>
-          <a:p>
-            <a:pPr algn="r">
-              <a:lnSpc>
-                <a:spcPct val="115000"/>
-              </a:lnSpc>
-            </a:pPr>
-            <a:r>
-              <a:rPr sz="1500" b="1" i="1">
-                <a:solidFill>
-                  <a:srgbClr val="21295C"/>
-                </a:solidFill>
-                <a:latin typeface="Arial"/>
-              </a:rPr>
-              <a:t>5 токенов</a:t>
-            </a:r>
-          </a:p>
-        </p:txBody>
-      </p:sp>
-      <p:sp>
-        <p:nvSpPr>
-          <p:cNvPr id="14" name="Rounded Rectangle 13"/>
-          <p:cNvSpPr/>
-          <p:nvPr/>
-        </p:nvSpPr>
-        <p:spPr>
-          <a:xfrm>
-            <a:off x="502920" y="3063240"/>
-            <a:ext cx="11247120" cy="1280160"/>
-          </a:xfrm>
-          <a:prstGeom prst="roundRect">
-            <a:avLst>
-              <a:gd name="adj" fmla="val 23809"/>
-            </a:avLst>
-          </a:prstGeom>
-          <a:solidFill>
-            <a:srgbClr val="F4F7FA"/>
-          </a:solidFill>
-          <a:ln w="19050">
-            <a:solidFill>
-              <a:srgbClr val="1C7293"/>
-            </a:solidFill>
-          </a:ln>
-          <a:effectLst/>
-        </p:spPr>
-        <p:style>
-          <a:lnRef idx="1">
-            <a:schemeClr val="accent1"/>
-          </a:lnRef>
-          <a:fillRef idx="3">
-            <a:schemeClr val="accent1"/>
-          </a:fillRef>
-          <a:effectRef idx="2">
-            <a:schemeClr val="accent1"/>
-          </a:effectRef>
-          <a:fontRef idx="minor">
-            <a:schemeClr val="lt1"/>
-          </a:fontRef>
-        </p:style>
-        <p:txBody>
-          <a:bodyPr rtlCol="0" anchor="ctr"/>
-          <a:lstStyle/>
-          <a:p>
-            <a:pPr algn="ctr"/>
-          </a:p>
-        </p:txBody>
-      </p:sp>
-      <p:sp>
-        <p:nvSpPr>
-          <p:cNvPr id="15" name="Rounded Rectangle 14"/>
-          <p:cNvSpPr/>
-          <p:nvPr/>
-        </p:nvSpPr>
-        <p:spPr>
-          <a:xfrm>
-            <a:off x="685800" y="3520440"/>
-            <a:ext cx="777240" cy="411480"/>
-          </a:xfrm>
-          <a:prstGeom prst="roundRect">
-            <a:avLst>
-              <a:gd name="adj" fmla="val 50000"/>
-            </a:avLst>
-          </a:prstGeom>
-          <a:solidFill>
-            <a:srgbClr val="1C7293"/>
-          </a:solidFill>
-          <a:ln>
-            <a:noFill/>
-          </a:ln>
-          <a:effectLst/>
-        </p:spPr>
-        <p:style>
-          <a:lnRef idx="1">
-            <a:schemeClr val="accent1"/>
-          </a:lnRef>
-          <a:fillRef idx="3">
-            <a:schemeClr val="accent1"/>
-          </a:fillRef>
-          <a:effectRef idx="2">
-            <a:schemeClr val="accent1"/>
-          </a:effectRef>
-          <a:fontRef idx="minor">
-            <a:schemeClr val="lt1"/>
-          </a:fontRef>
-        </p:style>
-        <p:txBody>
-          <a:bodyPr rtlCol="0" anchor="ctr" lIns="45720" rIns="45720" tIns="36576" bIns="36576" wrap="none"/>
-          <a:lstStyle/>
-          <a:p>
-            <a:pPr algn="ctr"/>
-            <a:r>
-              <a:rPr sz="1600" b="1">
-                <a:solidFill>
-                  <a:srgbClr val="FFFFFF"/>
-                </a:solidFill>
-                <a:latin typeface="Arial"/>
-              </a:rPr>
-              <a:t>RU</a:t>
-            </a:r>
-          </a:p>
-        </p:txBody>
-      </p:sp>
-      <p:sp>
-        <p:nvSpPr>
-          <p:cNvPr id="16" name="TextBox 15"/>
-          <p:cNvSpPr txBox="1"/>
-          <p:nvPr/>
-        </p:nvSpPr>
-        <p:spPr>
-          <a:xfrm>
-            <a:off x="1600200" y="3246120"/>
-            <a:ext cx="7772400" cy="411480"/>
-          </a:xfrm>
-          <a:prstGeom prst="rect">
-            <a:avLst/>
-          </a:prstGeom>
-          <a:noFill/>
-        </p:spPr>
-        <p:txBody>
-          <a:bodyPr wrap="square" lIns="0" rIns="0" tIns="0" bIns="0" anchor="ctr">
-            <a:spAutoFit/>
-          </a:bodyPr>
-          <a:lstStyle/>
-          <a:p>
-            <a:pPr algn="l">
-              <a:lnSpc>
-                <a:spcPct val="115000"/>
-              </a:lnSpc>
-            </a:pPr>
-            <a:r>
-              <a:rPr sz="1800" b="1" i="0">
-                <a:solidFill>
-                  <a:srgbClr val="21295C"/>
-                </a:solidFill>
-                <a:latin typeface="Liberation Mono"/>
-              </a:rPr>
-              <a:t>"Привет, как дела?"</a:t>
-            </a:r>
-          </a:p>
-        </p:txBody>
-      </p:sp>
-      <p:sp>
-        <p:nvSpPr>
-          <p:cNvPr id="17" name="TextBox 16"/>
-          <p:cNvSpPr txBox="1"/>
-          <p:nvPr/>
-        </p:nvSpPr>
-        <p:spPr>
-          <a:xfrm>
-            <a:off x="1600200" y="3657600"/>
-            <a:ext cx="502920" cy="274320"/>
-          </a:xfrm>
-          <a:prstGeom prst="rect">
-            <a:avLst/>
-          </a:prstGeom>
-          <a:noFill/>
-        </p:spPr>
-        <p:txBody>
-          <a:bodyPr wrap="square" lIns="0" rIns="0" tIns="0" bIns="0" anchor="t">
-            <a:spAutoFit/>
-          </a:bodyPr>
-          <a:lstStyle/>
-          <a:p>
-            <a:pPr algn="ctr">
-              <a:lnSpc>
-                <a:spcPct val="115000"/>
-              </a:lnSpc>
-            </a:pPr>
-            <a:r>
-              <a:rPr sz="1400" b="1" i="0">
-                <a:solidFill>
-                  <a:srgbClr val="065A82"/>
-                </a:solidFill>
-                <a:latin typeface="Arial"/>
-              </a:rPr>
-              <a:t>↓</a:t>
-            </a:r>
-          </a:p>
-        </p:txBody>
-      </p:sp>
-      <p:sp>
-        <p:nvSpPr>
-          <p:cNvPr id="18" name="Rounded Rectangle 17"/>
-          <p:cNvSpPr/>
-          <p:nvPr/>
-        </p:nvSpPr>
-        <p:spPr>
-          <a:xfrm>
-            <a:off x="1600200" y="3840480"/>
-            <a:ext cx="795528" cy="384048"/>
-          </a:xfrm>
-          <a:prstGeom prst="roundRect">
-            <a:avLst>
-              <a:gd name="adj" fmla="val 50000"/>
-            </a:avLst>
-          </a:prstGeom>
-          <a:solidFill>
-            <a:srgbClr val="1C7293"/>
-          </a:solidFill>
-          <a:ln>
-            <a:noFill/>
-          </a:ln>
-          <a:effectLst/>
-        </p:spPr>
-        <p:style>
-          <a:lnRef idx="1">
-            <a:schemeClr val="accent1"/>
-          </a:lnRef>
-          <a:fillRef idx="3">
-            <a:schemeClr val="accent1"/>
-          </a:fillRef>
-          <a:effectRef idx="2">
-            <a:schemeClr val="accent1"/>
-          </a:effectRef>
-          <a:fontRef idx="minor">
-            <a:schemeClr val="lt1"/>
-          </a:fontRef>
-        </p:style>
-        <p:txBody>
-          <a:bodyPr rtlCol="0" anchor="ctr" lIns="45720" rIns="45720" tIns="36576" bIns="36576" wrap="none"/>
-          <a:lstStyle/>
-          <a:p>
-            <a:pPr algn="ctr"/>
-            <a:r>
-              <a:rPr sz="1300" b="1">
-                <a:solidFill>
-                  <a:srgbClr val="FFFFFF"/>
-                </a:solidFill>
-                <a:latin typeface="Arial"/>
-              </a:rPr>
-              <a:t>[Прив]</a:t>
-            </a:r>
-          </a:p>
-        </p:txBody>
-      </p:sp>
-      <p:sp>
-        <p:nvSpPr>
-          <p:cNvPr id="19" name="Rounded Rectangle 18"/>
-          <p:cNvSpPr/>
-          <p:nvPr/>
-        </p:nvSpPr>
-        <p:spPr>
-          <a:xfrm>
-            <a:off x="2468880" y="3840480"/>
-            <a:ext cx="594360" cy="384048"/>
-          </a:xfrm>
-          <a:prstGeom prst="roundRect">
-            <a:avLst>
-              <a:gd name="adj" fmla="val 50000"/>
-            </a:avLst>
-          </a:prstGeom>
-          <a:solidFill>
-            <a:srgbClr val="028090"/>
-          </a:solidFill>
-          <a:ln>
-            <a:noFill/>
-          </a:ln>
-          <a:effectLst/>
-        </p:spPr>
-        <p:style>
-          <a:lnRef idx="1">
-            <a:schemeClr val="accent1"/>
-          </a:lnRef>
-          <a:fillRef idx="3">
-            <a:schemeClr val="accent1"/>
-          </a:fillRef>
-          <a:effectRef idx="2">
-            <a:schemeClr val="accent1"/>
-          </a:effectRef>
-          <a:fontRef idx="minor">
-            <a:schemeClr val="lt1"/>
-          </a:fontRef>
-        </p:style>
-        <p:txBody>
-          <a:bodyPr rtlCol="0" anchor="ctr" lIns="45720" rIns="45720" tIns="36576" bIns="36576" wrap="none"/>
-          <a:lstStyle/>
-          <a:p>
-            <a:pPr algn="ctr"/>
-            <a:r>
-              <a:rPr sz="1300" b="1">
-                <a:solidFill>
-                  <a:srgbClr val="FFFFFF"/>
-                </a:solidFill>
-                <a:latin typeface="Arial"/>
-              </a:rPr>
-              <a:t>[ет]</a:t>
-            </a:r>
-          </a:p>
-        </p:txBody>
-      </p:sp>
-      <p:sp>
-        <p:nvSpPr>
-          <p:cNvPr id="20" name="Rounded Rectangle 19"/>
-          <p:cNvSpPr/>
-          <p:nvPr/>
-        </p:nvSpPr>
-        <p:spPr>
-          <a:xfrm>
-            <a:off x="3136392" y="3840480"/>
-            <a:ext cx="914400" cy="384048"/>
-          </a:xfrm>
-          <a:prstGeom prst="roundRect">
-            <a:avLst>
-              <a:gd name="adj" fmla="val 50000"/>
-            </a:avLst>
-          </a:prstGeom>
-          <a:solidFill>
-            <a:srgbClr val="065A82"/>
-          </a:solidFill>
-          <a:ln>
-            <a:noFill/>
-          </a:ln>
-          <a:effectLst/>
-        </p:spPr>
-        <p:style>
-          <a:lnRef idx="1">
-            <a:schemeClr val="accent1"/>
-          </a:lnRef>
-          <a:fillRef idx="3">
-            <a:schemeClr val="accent1"/>
-          </a:fillRef>
-          <a:effectRef idx="2">
-            <a:schemeClr val="accent1"/>
-          </a:effectRef>
-          <a:fontRef idx="minor">
-            <a:schemeClr val="lt1"/>
-          </a:fontRef>
-        </p:style>
-        <p:txBody>
-          <a:bodyPr rtlCol="0" anchor="ctr" lIns="45720" rIns="45720" tIns="36576" bIns="36576" wrap="none"/>
-          <a:lstStyle/>
-          <a:p>
-            <a:pPr algn="ctr"/>
-            <a:r>
-              <a:rPr sz="1300" b="1">
-                <a:solidFill>
-                  <a:srgbClr val="FFFFFF"/>
-                </a:solidFill>
-                <a:latin typeface="Arial"/>
-              </a:rPr>
-              <a:t>[, как]</a:t>
-            </a:r>
-          </a:p>
-        </p:txBody>
-      </p:sp>
-      <p:sp>
-        <p:nvSpPr>
-          <p:cNvPr id="21" name="Rounded Rectangle 20"/>
-          <p:cNvSpPr/>
-          <p:nvPr/>
-        </p:nvSpPr>
-        <p:spPr>
-          <a:xfrm>
-            <a:off x="4123944" y="3840480"/>
-            <a:ext cx="914400" cy="384048"/>
-          </a:xfrm>
-          <a:prstGeom prst="roundRect">
-            <a:avLst>
-              <a:gd name="adj" fmla="val 50000"/>
-            </a:avLst>
-          </a:prstGeom>
-          <a:solidFill>
-            <a:srgbClr val="1C7293"/>
-          </a:solidFill>
-          <a:ln>
-            <a:noFill/>
-          </a:ln>
-          <a:effectLst/>
-        </p:spPr>
-        <p:style>
-          <a:lnRef idx="1">
-            <a:schemeClr val="accent1"/>
-          </a:lnRef>
-          <a:fillRef idx="3">
-            <a:schemeClr val="accent1"/>
-          </a:fillRef>
-          <a:effectRef idx="2">
-            <a:schemeClr val="accent1"/>
-          </a:effectRef>
-          <a:fontRef idx="minor">
-            <a:schemeClr val="lt1"/>
-          </a:fontRef>
-        </p:style>
-        <p:txBody>
-          <a:bodyPr rtlCol="0" anchor="ctr" lIns="45720" rIns="45720" tIns="36576" bIns="36576" wrap="none"/>
-          <a:lstStyle/>
-          <a:p>
-            <a:pPr algn="ctr"/>
-            <a:r>
-              <a:rPr sz="1300" b="1">
-                <a:solidFill>
-                  <a:srgbClr val="FFFFFF"/>
-                </a:solidFill>
-                <a:latin typeface="Arial"/>
-              </a:rPr>
-              <a:t>[ дела]</a:t>
-            </a:r>
-          </a:p>
-        </p:txBody>
-      </p:sp>
-      <p:sp>
-        <p:nvSpPr>
-          <p:cNvPr id="22" name="Rounded Rectangle 21"/>
-          <p:cNvSpPr/>
-          <p:nvPr/>
-        </p:nvSpPr>
-        <p:spPr>
-          <a:xfrm>
-            <a:off x="5111496" y="3840480"/>
-            <a:ext cx="594360" cy="384048"/>
-          </a:xfrm>
-          <a:prstGeom prst="roundRect">
-            <a:avLst>
-              <a:gd name="adj" fmla="val 50000"/>
-            </a:avLst>
-          </a:prstGeom>
-          <a:solidFill>
-            <a:srgbClr val="028090"/>
-          </a:solidFill>
-          <a:ln>
-            <a:noFill/>
-          </a:ln>
-          <a:effectLst/>
-        </p:spPr>
-        <p:style>
-          <a:lnRef idx="1">
-            <a:schemeClr val="accent1"/>
-          </a:lnRef>
-          <a:fillRef idx="3">
-            <a:schemeClr val="accent1"/>
-          </a:fillRef>
-          <a:effectRef idx="2">
-            <a:schemeClr val="accent1"/>
-          </a:effectRef>
-          <a:fontRef idx="minor">
-            <a:schemeClr val="lt1"/>
-          </a:fontRef>
-        </p:style>
-        <p:txBody>
-          <a:bodyPr rtlCol="0" anchor="ctr" lIns="45720" rIns="45720" tIns="36576" bIns="36576" wrap="none"/>
-          <a:lstStyle/>
-          <a:p>
-            <a:pPr algn="ctr"/>
-            <a:r>
-              <a:rPr sz="1300" b="1">
-                <a:solidFill>
-                  <a:srgbClr val="FFFFFF"/>
-                </a:solidFill>
-                <a:latin typeface="Arial"/>
-              </a:rPr>
-              <a:t>[?]</a:t>
-            </a:r>
-          </a:p>
-        </p:txBody>
-      </p:sp>
-      <p:sp>
-        <p:nvSpPr>
-          <p:cNvPr id="23" name="TextBox 22"/>
-          <p:cNvSpPr txBox="1"/>
-          <p:nvPr/>
-        </p:nvSpPr>
-        <p:spPr>
-          <a:xfrm>
-            <a:off x="9738360" y="3474720"/>
-            <a:ext cx="1417320" cy="457200"/>
-          </a:xfrm>
-          <a:prstGeom prst="rect">
-            <a:avLst/>
-          </a:prstGeom>
-          <a:noFill/>
-        </p:spPr>
-        <p:txBody>
-          <a:bodyPr wrap="square" lIns="0" rIns="0" tIns="0" bIns="0" anchor="ctr">
-            <a:spAutoFit/>
-          </a:bodyPr>
-          <a:lstStyle/>
-          <a:p>
-            <a:pPr algn="r">
-              <a:lnSpc>
-                <a:spcPct val="115000"/>
-              </a:lnSpc>
-            </a:pPr>
-            <a:r>
-              <a:rPr sz="1500" b="1" i="1">
-                <a:solidFill>
-                  <a:srgbClr val="21295C"/>
-                </a:solidFill>
-                <a:latin typeface="Arial"/>
-              </a:rPr>
-              <a:t>5 токенов</a:t>
-            </a:r>
-          </a:p>
-        </p:txBody>
-      </p:sp>
-      <p:sp>
-        <p:nvSpPr>
-          <p:cNvPr id="24" name="Rounded Rectangle 23"/>
-          <p:cNvSpPr/>
-          <p:nvPr/>
-        </p:nvSpPr>
-        <p:spPr>
-          <a:xfrm>
-            <a:off x="502920" y="4434840"/>
-            <a:ext cx="11247120" cy="1280160"/>
-          </a:xfrm>
-          <a:prstGeom prst="roundRect">
-            <a:avLst>
-              <a:gd name="adj" fmla="val 23809"/>
-            </a:avLst>
-          </a:prstGeom>
-          <a:solidFill>
-            <a:srgbClr val="F4F7FA"/>
-          </a:solidFill>
-          <a:ln w="19050">
-            <a:solidFill>
-              <a:srgbClr val="1C7293"/>
-            </a:solidFill>
-          </a:ln>
-          <a:effectLst/>
-        </p:spPr>
-        <p:style>
-          <a:lnRef idx="1">
-            <a:schemeClr val="accent1"/>
-          </a:lnRef>
-          <a:fillRef idx="3">
-            <a:schemeClr val="accent1"/>
-          </a:fillRef>
-          <a:effectRef idx="2">
-            <a:schemeClr val="accent1"/>
-          </a:effectRef>
-          <a:fontRef idx="minor">
-            <a:schemeClr val="lt1"/>
-          </a:fontRef>
-        </p:style>
-        <p:txBody>
-          <a:bodyPr rtlCol="0" anchor="ctr"/>
-          <a:lstStyle/>
-          <a:p>
-            <a:pPr algn="ctr"/>
-          </a:p>
-        </p:txBody>
-      </p:sp>
-      <p:sp>
-        <p:nvSpPr>
-          <p:cNvPr id="25" name="Rounded Rectangle 24"/>
-          <p:cNvSpPr/>
-          <p:nvPr/>
-        </p:nvSpPr>
-        <p:spPr>
-          <a:xfrm>
-            <a:off x="685800" y="4892040"/>
-            <a:ext cx="777240" cy="411480"/>
-          </a:xfrm>
-          <a:prstGeom prst="roundRect">
-            <a:avLst>
-              <a:gd name="adj" fmla="val 50000"/>
-            </a:avLst>
-          </a:prstGeom>
-          <a:solidFill>
-            <a:srgbClr val="028090"/>
-          </a:solidFill>
-          <a:ln>
-            <a:noFill/>
-          </a:ln>
-          <a:effectLst/>
-        </p:spPr>
-        <p:style>
-          <a:lnRef idx="1">
-            <a:schemeClr val="accent1"/>
-          </a:lnRef>
-          <a:fillRef idx="3">
-            <a:schemeClr val="accent1"/>
-          </a:fillRef>
-          <a:effectRef idx="2">
-            <a:schemeClr val="accent1"/>
-          </a:effectRef>
-          <a:fontRef idx="minor">
-            <a:schemeClr val="lt1"/>
-          </a:fontRef>
-        </p:style>
-        <p:txBody>
-          <a:bodyPr rtlCol="0" anchor="ctr" lIns="45720" rIns="45720" tIns="36576" bIns="36576" wrap="none"/>
-          <a:lstStyle/>
-          <a:p>
-            <a:pPr algn="ctr"/>
-            <a:r>
-              <a:rPr sz="1600" b="1">
-                <a:solidFill>
-                  <a:srgbClr val="FFFFFF"/>
-                </a:solidFill>
-                <a:latin typeface="Arial"/>
-              </a:rPr>
-              <a:t>Code</a:t>
-            </a:r>
-          </a:p>
-        </p:txBody>
-      </p:sp>
-      <p:sp>
-        <p:nvSpPr>
-          <p:cNvPr id="26" name="TextBox 25"/>
-          <p:cNvSpPr txBox="1"/>
-          <p:nvPr/>
-        </p:nvSpPr>
-        <p:spPr>
-          <a:xfrm>
-            <a:off x="1600200" y="4617720"/>
-            <a:ext cx="7772400" cy="411480"/>
-          </a:xfrm>
-          <a:prstGeom prst="rect">
-            <a:avLst/>
-          </a:prstGeom>
-          <a:noFill/>
-        </p:spPr>
-        <p:txBody>
-          <a:bodyPr wrap="square" lIns="0" rIns="0" tIns="0" bIns="0" anchor="ctr">
-            <a:spAutoFit/>
-          </a:bodyPr>
-          <a:lstStyle/>
-          <a:p>
-            <a:pPr algn="l">
-              <a:lnSpc>
-                <a:spcPct val="115000"/>
-              </a:lnSpc>
-            </a:pPr>
-            <a:r>
-              <a:rPr sz="1800" b="1" i="0">
-                <a:solidFill>
-                  <a:srgbClr val="21295C"/>
-                </a:solidFill>
-                <a:latin typeface="Liberation Mono"/>
-              </a:rPr>
-              <a:t>"def hello(name):"</a:t>
-            </a:r>
-          </a:p>
-        </p:txBody>
-      </p:sp>
-      <p:sp>
-        <p:nvSpPr>
-          <p:cNvPr id="27" name="TextBox 26"/>
-          <p:cNvSpPr txBox="1"/>
-          <p:nvPr/>
-        </p:nvSpPr>
-        <p:spPr>
-          <a:xfrm>
-            <a:off x="1600200" y="5029200"/>
-            <a:ext cx="502920" cy="274320"/>
-          </a:xfrm>
-          <a:prstGeom prst="rect">
-            <a:avLst/>
-          </a:prstGeom>
-          <a:noFill/>
-        </p:spPr>
-        <p:txBody>
-          <a:bodyPr wrap="square" lIns="0" rIns="0" tIns="0" bIns="0" anchor="t">
-            <a:spAutoFit/>
-          </a:bodyPr>
-          <a:lstStyle/>
-          <a:p>
-            <a:pPr algn="ctr">
-              <a:lnSpc>
-                <a:spcPct val="115000"/>
-              </a:lnSpc>
-            </a:pPr>
-            <a:r>
-              <a:rPr sz="1400" b="1" i="0">
-                <a:solidFill>
-                  <a:srgbClr val="065A82"/>
-                </a:solidFill>
-                <a:latin typeface="Arial"/>
-              </a:rPr>
-              <a:t>↓</a:t>
-            </a:r>
-          </a:p>
-        </p:txBody>
-      </p:sp>
-      <p:sp>
-        <p:nvSpPr>
-          <p:cNvPr id="28" name="Rounded Rectangle 27"/>
-          <p:cNvSpPr/>
-          <p:nvPr/>
-        </p:nvSpPr>
-        <p:spPr>
-          <a:xfrm>
-            <a:off x="1600200" y="5212079"/>
-            <a:ext cx="676656" cy="384048"/>
-          </a:xfrm>
-          <a:prstGeom prst="roundRect">
-            <a:avLst>
-              <a:gd name="adj" fmla="val 50000"/>
-            </a:avLst>
-          </a:prstGeom>
-          <a:solidFill>
-            <a:srgbClr val="028090"/>
-          </a:solidFill>
-          <a:ln>
-            <a:noFill/>
-          </a:ln>
-          <a:effectLst/>
-        </p:spPr>
-        <p:style>
-          <a:lnRef idx="1">
-            <a:schemeClr val="accent1"/>
-          </a:lnRef>
-          <a:fillRef idx="3">
-            <a:schemeClr val="accent1"/>
-          </a:fillRef>
-          <a:effectRef idx="2">
-            <a:schemeClr val="accent1"/>
-          </a:effectRef>
-          <a:fontRef idx="minor">
-            <a:schemeClr val="lt1"/>
-          </a:fontRef>
-        </p:style>
-        <p:txBody>
-          <a:bodyPr rtlCol="0" anchor="ctr" lIns="45720" rIns="45720" tIns="36576" bIns="36576" wrap="none"/>
-          <a:lstStyle/>
-          <a:p>
-            <a:pPr algn="ctr"/>
-            <a:r>
-              <a:rPr sz="1300" b="1">
-                <a:solidFill>
-                  <a:srgbClr val="FFFFFF"/>
-                </a:solidFill>
-                <a:latin typeface="Arial"/>
-              </a:rPr>
-              <a:t>[def]</a:t>
-            </a:r>
-          </a:p>
-        </p:txBody>
-      </p:sp>
-      <p:sp>
-        <p:nvSpPr>
-          <p:cNvPr id="29" name="Rounded Rectangle 28"/>
-          <p:cNvSpPr/>
-          <p:nvPr/>
-        </p:nvSpPr>
-        <p:spPr>
-          <a:xfrm>
-            <a:off x="2350008" y="5212079"/>
-            <a:ext cx="1033271" cy="384048"/>
-          </a:xfrm>
-          <a:prstGeom prst="roundRect">
-            <a:avLst>
-              <a:gd name="adj" fmla="val 50000"/>
-            </a:avLst>
-          </a:prstGeom>
-          <a:solidFill>
-            <a:srgbClr val="065A82"/>
-          </a:solidFill>
-          <a:ln>
-            <a:noFill/>
-          </a:ln>
-          <a:effectLst/>
-        </p:spPr>
-        <p:style>
-          <a:lnRef idx="1">
-            <a:schemeClr val="accent1"/>
-          </a:lnRef>
-          <a:fillRef idx="3">
-            <a:schemeClr val="accent1"/>
-          </a:fillRef>
-          <a:effectRef idx="2">
-            <a:schemeClr val="accent1"/>
-          </a:effectRef>
-          <a:fontRef idx="minor">
-            <a:schemeClr val="lt1"/>
-          </a:fontRef>
-        </p:style>
-        <p:txBody>
-          <a:bodyPr rtlCol="0" anchor="ctr" lIns="45720" rIns="45720" tIns="36576" bIns="36576" wrap="none"/>
-          <a:lstStyle/>
-          <a:p>
-            <a:pPr algn="ctr"/>
-            <a:r>
-              <a:rPr sz="1300" b="1">
-                <a:solidFill>
-                  <a:srgbClr val="FFFFFF"/>
-                </a:solidFill>
-                <a:latin typeface="Arial"/>
-              </a:rPr>
-              <a:t>[ hello]</a:t>
-            </a:r>
-          </a:p>
-        </p:txBody>
-      </p:sp>
-      <p:sp>
-        <p:nvSpPr>
-          <p:cNvPr id="30" name="Rounded Rectangle 29"/>
-          <p:cNvSpPr/>
-          <p:nvPr/>
-        </p:nvSpPr>
-        <p:spPr>
-          <a:xfrm>
-            <a:off x="3456432" y="5212079"/>
-            <a:ext cx="1033271" cy="384048"/>
-          </a:xfrm>
-          <a:prstGeom prst="roundRect">
-            <a:avLst>
-              <a:gd name="adj" fmla="val 50000"/>
-            </a:avLst>
-          </a:prstGeom>
-          <a:solidFill>
-            <a:srgbClr val="1C7293"/>
-          </a:solidFill>
-          <a:ln>
-            <a:noFill/>
-          </a:ln>
-          <a:effectLst/>
-        </p:spPr>
-        <p:style>
-          <a:lnRef idx="1">
-            <a:schemeClr val="accent1"/>
-          </a:lnRef>
-          <a:fillRef idx="3">
-            <a:schemeClr val="accent1"/>
-          </a:fillRef>
-          <a:effectRef idx="2">
-            <a:schemeClr val="accent1"/>
-          </a:effectRef>
-          <a:fontRef idx="minor">
-            <a:schemeClr val="lt1"/>
-          </a:fontRef>
-        </p:style>
-        <p:txBody>
-          <a:bodyPr rtlCol="0" anchor="ctr" lIns="45720" rIns="45720" tIns="36576" bIns="36576" wrap="none"/>
-          <a:lstStyle/>
-          <a:p>
-            <a:pPr algn="ctr"/>
-            <a:r>
-              <a:rPr sz="1300" b="1">
-                <a:solidFill>
-                  <a:srgbClr val="FFFFFF"/>
-                </a:solidFill>
-                <a:latin typeface="Arial"/>
-              </a:rPr>
-              <a:t>[(name)]</a:t>
-            </a:r>
-          </a:p>
-        </p:txBody>
-      </p:sp>
-      <p:sp>
-        <p:nvSpPr>
-          <p:cNvPr id="31" name="Rounded Rectangle 30"/>
-          <p:cNvSpPr/>
-          <p:nvPr/>
-        </p:nvSpPr>
-        <p:spPr>
-          <a:xfrm>
-            <a:off x="4562856" y="5212079"/>
-            <a:ext cx="594360" cy="384048"/>
-          </a:xfrm>
-          <a:prstGeom prst="roundRect">
-            <a:avLst>
-              <a:gd name="adj" fmla="val 50000"/>
-            </a:avLst>
-          </a:prstGeom>
-          <a:solidFill>
-            <a:srgbClr val="028090"/>
-          </a:solidFill>
-          <a:ln>
-            <a:noFill/>
-          </a:ln>
-          <a:effectLst/>
-        </p:spPr>
-        <p:style>
-          <a:lnRef idx="1">
-            <a:schemeClr val="accent1"/>
-          </a:lnRef>
-          <a:fillRef idx="3">
-            <a:schemeClr val="accent1"/>
-          </a:fillRef>
-          <a:effectRef idx="2">
-            <a:schemeClr val="accent1"/>
-          </a:effectRef>
-          <a:fontRef idx="minor">
-            <a:schemeClr val="lt1"/>
-          </a:fontRef>
-        </p:style>
-        <p:txBody>
-          <a:bodyPr rtlCol="0" anchor="ctr" lIns="45720" rIns="45720" tIns="36576" bIns="36576" wrap="none"/>
-          <a:lstStyle/>
-          <a:p>
-            <a:pPr algn="ctr"/>
-            <a:r>
-              <a:rPr sz="1300" b="1">
-                <a:solidFill>
-                  <a:srgbClr val="FFFFFF"/>
-                </a:solidFill>
-                <a:latin typeface="Arial"/>
-              </a:rPr>
-              <a:t>[:]</a:t>
-            </a:r>
-          </a:p>
-        </p:txBody>
-      </p:sp>
-      <p:sp>
-        <p:nvSpPr>
-          <p:cNvPr id="32" name="TextBox 31"/>
-          <p:cNvSpPr txBox="1"/>
-          <p:nvPr/>
-        </p:nvSpPr>
-        <p:spPr>
-          <a:xfrm>
-            <a:off x="9738360" y="4846320"/>
-            <a:ext cx="1417320" cy="457200"/>
-          </a:xfrm>
-          <a:prstGeom prst="rect">
-            <a:avLst/>
-          </a:prstGeom>
-          <a:noFill/>
-        </p:spPr>
-        <p:txBody>
-          <a:bodyPr wrap="square" lIns="0" rIns="0" tIns="0" bIns="0" anchor="ctr">
-            <a:spAutoFit/>
-          </a:bodyPr>
-          <a:lstStyle/>
-          <a:p>
-            <a:pPr algn="r">
-              <a:lnSpc>
-                <a:spcPct val="115000"/>
-              </a:lnSpc>
-            </a:pPr>
-            <a:r>
-              <a:rPr sz="1500" b="1" i="1">
-                <a:solidFill>
-                  <a:srgbClr val="21295C"/>
-                </a:solidFill>
-                <a:latin typeface="Arial"/>
-              </a:rPr>
-              <a:t>4 токена</a:t>
-            </a:r>
-          </a:p>
-        </p:txBody>
-      </p:sp>
-      <p:sp>
-        <p:nvSpPr>
-          <p:cNvPr id="33" name="Rounded Rectangle 32"/>
-          <p:cNvSpPr/>
-          <p:nvPr/>
-        </p:nvSpPr>
-        <p:spPr>
-          <a:xfrm>
-            <a:off x="502920" y="5852160"/>
-            <a:ext cx="11247120" cy="640080"/>
-          </a:xfrm>
-          <a:prstGeom prst="roundRect">
-            <a:avLst>
-              <a:gd name="adj" fmla="val 12000"/>
-            </a:avLst>
-          </a:prstGeom>
-          <a:solidFill>
-            <a:srgbClr val="FEF5E0"/>
-          </a:solidFill>
-          <a:ln w="15240">
-            <a:solidFill>
-              <a:srgbClr val="F0AB00"/>
-            </a:solidFill>
-          </a:ln>
-          <a:effectLst/>
-        </p:spPr>
-        <p:style>
-          <a:lnRef idx="1">
-            <a:schemeClr val="accent1"/>
-          </a:lnRef>
-          <a:fillRef idx="3">
-            <a:schemeClr val="accent1"/>
-          </a:fillRef>
-          <a:effectRef idx="2">
-            <a:schemeClr val="accent1"/>
-          </a:effectRef>
-          <a:fontRef idx="minor">
-            <a:schemeClr val="lt1"/>
-          </a:fontRef>
-        </p:style>
-        <p:txBody>
-          <a:bodyPr rtlCol="0" anchor="ctr"/>
-          <a:lstStyle/>
-          <a:p>
-            <a:pPr algn="ctr"/>
-          </a:p>
-        </p:txBody>
-      </p:sp>
-      <p:sp>
-        <p:nvSpPr>
-          <p:cNvPr id="34" name="TextBox 33"/>
-          <p:cNvSpPr txBox="1"/>
-          <p:nvPr/>
-        </p:nvSpPr>
-        <p:spPr>
-          <a:xfrm>
-            <a:off x="685800" y="5925312"/>
-            <a:ext cx="10881360" cy="493775"/>
-          </a:xfrm>
-          <a:prstGeom prst="rect">
-            <a:avLst/>
-          </a:prstGeom>
-          <a:noFill/>
-        </p:spPr>
-        <p:txBody>
-          <a:bodyPr wrap="square" lIns="0" rIns="0" tIns="0" bIns="0" anchor="ctr">
-            <a:spAutoFit/>
-          </a:bodyPr>
-          <a:lstStyle/>
-          <a:p>
-            <a:pPr algn="l">
-              <a:lnSpc>
                 <a:spcPct val="125000"/>
               </a:lnSpc>
             </a:pPr>
             <a:r>
-              <a:rPr sz="1700" b="1" i="0">
-                <a:solidFill>
-                  <a:srgbClr val="21295C"/>
-                </a:solidFill>
-                <a:latin typeface="Arial"/>
-              </a:rPr>
-              <a:t>Один и тот же смысл — разное число токенов. EN дешевле RU почти в 2×.</a:t>
-            </a:r>
-          </a:p>
-        </p:txBody>
-      </p:sp>
-      <p:sp>
-        <p:nvSpPr>
-          <p:cNvPr id="35" name="TextBox 34"/>
-          <p:cNvSpPr txBox="1"/>
-          <p:nvPr/>
-        </p:nvSpPr>
-        <p:spPr>
-          <a:xfrm>
-            <a:off x="502920" y="6583680"/>
-            <a:ext cx="11247120" cy="274320"/>
-          </a:xfrm>
-          <a:prstGeom prst="rect">
-            <a:avLst/>
-          </a:prstGeom>
-          <a:noFill/>
-        </p:spPr>
-        <p:txBody>
-          <a:bodyPr wrap="square" lIns="0" rIns="0" tIns="0" bIns="0" anchor="t">
-            <a:spAutoFit/>
-          </a:bodyPr>
-          <a:lstStyle/>
-          <a:p>
-            <a:pPr algn="ctr">
-              <a:lnSpc>
-                <a:spcPct val="125000"/>
-              </a:lnSpc>
-            </a:pPr>
-            <a:r>
-              <a:rPr sz="1200" b="0" i="1">
+              <a:rPr sz="1300" b="0" i="1">
                 <a:solidFill>
                   <a:srgbClr val="1C7293"/>
                 </a:solidFill>
                 <a:latin typeface="Arial"/>
               </a:rPr>
-              <a:t>Реальные разрезы в токенизаторе o200k_base (GPT-4o, Claude 4.x). Подробно — в Разделе 1.</a:t>
+              <a:t>Механизм, который сегодня разберём внутри AI-модели, называется точно так же — «внимание». Он работает похоже — но не так, как ваш.</a:t>
             </a:r>
           </a:p>
         </p:txBody>
@@ -8437,7 +6890,7 @@
               </a:lnSpc>
             </a:pPr>
             <a:r>
-              <a:rPr sz="2400" b="1" i="0">
+              <a:rPr sz="2300" b="1" i="0">
                 <a:solidFill>
                   <a:srgbClr val="21295C"/>
                 </a:solidFill>
@@ -8456,12 +6909,12 @@
         </p:nvSpPr>
         <p:spPr>
           <a:xfrm>
-            <a:off x="502920" y="1417320"/>
-            <a:ext cx="5669280" cy="4389120"/>
+            <a:off x="502920" y="1325880"/>
+            <a:ext cx="5669280" cy="3977639"/>
           </a:xfrm>
           <a:prstGeom prst="roundRect">
             <a:avLst>
-              <a:gd name="adj" fmla="val 6944"/>
+              <a:gd name="adj" fmla="val 7662"/>
             </a:avLst>
           </a:prstGeom>
           <a:solidFill>
@@ -8512,8 +6965,8 @@
         </p:blipFill>
         <p:spPr>
           <a:xfrm>
-            <a:off x="685800" y="1554480"/>
-            <a:ext cx="5303520" cy="4114800"/>
+            <a:off x="685800" y="1444752"/>
+            <a:ext cx="5303520" cy="3749039"/>
           </a:xfrm>
           <a:prstGeom prst="rect">
             <a:avLst/>
@@ -8528,12 +6981,12 @@
         </p:nvSpPr>
         <p:spPr>
           <a:xfrm>
-            <a:off x="6400800" y="1417320"/>
-            <a:ext cx="5349240" cy="1371600"/>
+            <a:off x="6400800" y="1325880"/>
+            <a:ext cx="5349240" cy="1234440"/>
           </a:xfrm>
           <a:prstGeom prst="roundRect">
             <a:avLst>
-              <a:gd name="adj" fmla="val 22222"/>
+              <a:gd name="adj" fmla="val 24691"/>
             </a:avLst>
           </a:prstGeom>
           <a:solidFill>
@@ -8576,8 +7029,8 @@
         </p:nvSpPr>
         <p:spPr>
           <a:xfrm>
-            <a:off x="6629400" y="1527048"/>
-            <a:ext cx="4892040" cy="411480"/>
+            <a:off x="6629400" y="1417320"/>
+            <a:ext cx="4892040" cy="365760"/>
           </a:xfrm>
           <a:prstGeom prst="rect">
             <a:avLst/>
@@ -8596,7 +7049,7 @@
               </a:lnSpc>
             </a:pPr>
             <a:r>
-              <a:rPr sz="1800" b="1" i="0">
+              <a:rPr sz="1700" b="1" i="0">
                 <a:solidFill>
                   <a:srgbClr val="065A82"/>
                 </a:solidFill>
@@ -8615,8 +7068,8 @@
         </p:nvSpPr>
         <p:spPr>
           <a:xfrm>
-            <a:off x="6629400" y="1984248"/>
-            <a:ext cx="4892040" cy="777240"/>
+            <a:off x="6629400" y="1828800"/>
+            <a:ext cx="4892040" cy="685800"/>
           </a:xfrm>
           <a:prstGeom prst="rect">
             <a:avLst/>
@@ -8631,11 +7084,11 @@
           <a:p>
             <a:pPr algn="l">
               <a:lnSpc>
-                <a:spcPct val="130000"/>
-              </a:lnSpc>
-            </a:pPr>
-            <a:r>
-              <a:rPr sz="1500" b="0" i="0">
+                <a:spcPct val="125000"/>
+              </a:lnSpc>
+            </a:pPr>
+            <a:r>
+              <a:rPr sz="1400" b="0" i="0">
                 <a:solidFill>
                   <a:srgbClr val="21295C"/>
                 </a:solidFill>
@@ -8654,12 +7107,12 @@
         </p:nvSpPr>
         <p:spPr>
           <a:xfrm>
-            <a:off x="6400800" y="2907791"/>
-            <a:ext cx="5349240" cy="1371600"/>
+            <a:off x="6400800" y="2660904"/>
+            <a:ext cx="5349240" cy="1234440"/>
           </a:xfrm>
           <a:prstGeom prst="roundRect">
             <a:avLst>
-              <a:gd name="adj" fmla="val 22222"/>
+              <a:gd name="adj" fmla="val 24691"/>
             </a:avLst>
           </a:prstGeom>
           <a:solidFill>
@@ -8702,8 +7155,8 @@
         </p:nvSpPr>
         <p:spPr>
           <a:xfrm>
-            <a:off x="6629400" y="3017520"/>
-            <a:ext cx="4892040" cy="411480"/>
+            <a:off x="6629400" y="2752344"/>
+            <a:ext cx="4892040" cy="365760"/>
           </a:xfrm>
           <a:prstGeom prst="rect">
             <a:avLst/>
@@ -8722,7 +7175,7 @@
               </a:lnSpc>
             </a:pPr>
             <a:r>
-              <a:rPr sz="1800" b="1" i="0">
+              <a:rPr sz="1700" b="1" i="0">
                 <a:solidFill>
                   <a:srgbClr val="065A82"/>
                 </a:solidFill>
@@ -8741,8 +7194,8 @@
         </p:nvSpPr>
         <p:spPr>
           <a:xfrm>
-            <a:off x="6629400" y="3474720"/>
-            <a:ext cx="4892040" cy="777240"/>
+            <a:off x="6629400" y="3163824"/>
+            <a:ext cx="4892040" cy="685800"/>
           </a:xfrm>
           <a:prstGeom prst="rect">
             <a:avLst/>
@@ -8757,11 +7210,11 @@
           <a:p>
             <a:pPr algn="l">
               <a:lnSpc>
-                <a:spcPct val="130000"/>
-              </a:lnSpc>
-            </a:pPr>
-            <a:r>
-              <a:rPr sz="1500" b="0" i="0">
+                <a:spcPct val="125000"/>
+              </a:lnSpc>
+            </a:pPr>
+            <a:r>
+              <a:rPr sz="1400" b="0" i="0">
                 <a:solidFill>
                   <a:srgbClr val="21295C"/>
                 </a:solidFill>
@@ -8780,12 +7233,12 @@
         </p:nvSpPr>
         <p:spPr>
           <a:xfrm>
-            <a:off x="6400800" y="4398264"/>
-            <a:ext cx="5349240" cy="1371600"/>
+            <a:off x="6400800" y="3995928"/>
+            <a:ext cx="5349240" cy="1234440"/>
           </a:xfrm>
           <a:prstGeom prst="roundRect">
             <a:avLst>
-              <a:gd name="adj" fmla="val 22222"/>
+              <a:gd name="adj" fmla="val 24691"/>
             </a:avLst>
           </a:prstGeom>
           <a:solidFill>
@@ -8828,8 +7281,8 @@
         </p:nvSpPr>
         <p:spPr>
           <a:xfrm>
-            <a:off x="6629400" y="4507992"/>
-            <a:ext cx="4892040" cy="411480"/>
+            <a:off x="6629400" y="4087368"/>
+            <a:ext cx="4892040" cy="365760"/>
           </a:xfrm>
           <a:prstGeom prst="rect">
             <a:avLst/>
@@ -8848,7 +7301,7 @@
               </a:lnSpc>
             </a:pPr>
             <a:r>
-              <a:rPr sz="1800" b="1" i="0">
+              <a:rPr sz="1700" b="1" i="0">
                 <a:solidFill>
                   <a:srgbClr val="065A82"/>
                 </a:solidFill>
@@ -8867,8 +7320,8 @@
         </p:nvSpPr>
         <p:spPr>
           <a:xfrm>
-            <a:off x="6629400" y="4965192"/>
-            <a:ext cx="4892040" cy="777240"/>
+            <a:off x="6629400" y="4498848"/>
+            <a:ext cx="4892040" cy="685800"/>
           </a:xfrm>
           <a:prstGeom prst="rect">
             <a:avLst/>
@@ -8883,11 +7336,11 @@
           <a:p>
             <a:pPr algn="l">
               <a:lnSpc>
-                <a:spcPct val="130000"/>
-              </a:lnSpc>
-            </a:pPr>
-            <a:r>
-              <a:rPr sz="1500" b="0" i="0">
+                <a:spcPct val="125000"/>
+              </a:lnSpc>
+            </a:pPr>
+            <a:r>
+              <a:rPr sz="1400" b="0" i="0">
                 <a:solidFill>
                   <a:srgbClr val="21295C"/>
                 </a:solidFill>
@@ -8906,18 +7359,18 @@
         </p:nvSpPr>
         <p:spPr>
           <a:xfrm>
-            <a:off x="502920" y="5943600"/>
-            <a:ext cx="11247120" cy="777240"/>
+            <a:off x="502920" y="5440680"/>
+            <a:ext cx="11247120" cy="1188720"/>
           </a:xfrm>
           <a:prstGeom prst="roundRect">
             <a:avLst>
-              <a:gd name="adj" fmla="val 12000"/>
+              <a:gd name="adj" fmla="val 10000"/>
             </a:avLst>
           </a:prstGeom>
           <a:solidFill>
             <a:srgbClr val="FEF5E0"/>
           </a:solidFill>
-          <a:ln w="15240">
+          <a:ln w="19050">
             <a:solidFill>
               <a:srgbClr val="F0AB00"/>
             </a:solidFill>
@@ -8954,16 +7407,16 @@
         </p:nvSpPr>
         <p:spPr>
           <a:xfrm>
-            <a:off x="685800" y="6016752"/>
-            <a:ext cx="10881360" cy="630936"/>
-          </a:xfrm>
-          <a:prstGeom prst="rect">
-            <a:avLst/>
-          </a:prstGeom>
-          <a:noFill/>
-        </p:spPr>
-        <p:txBody>
-          <a:bodyPr wrap="square" lIns="0" rIns="0" tIns="0" bIns="0" anchor="ctr">
+            <a:off x="731520" y="5550408"/>
+            <a:ext cx="10789920" cy="502920"/>
+          </a:xfrm>
+          <a:prstGeom prst="rect">
+            <a:avLst/>
+          </a:prstGeom>
+          <a:noFill/>
+        </p:spPr>
+        <p:txBody>
+          <a:bodyPr wrap="square" lIns="0" rIns="0" tIns="0" bIns="0" anchor="t">
             <a:spAutoFit/>
           </a:bodyPr>
           <a:lstStyle/>
@@ -8974,13 +7427,52 @@
               </a:lnSpc>
             </a:pPr>
             <a:r>
-              <a:rPr sz="1800" b="1" i="0">
+              <a:rPr sz="1400" b="1" i="0">
                 <a:solidFill>
                   <a:srgbClr val="21295C"/>
                 </a:solidFill>
                 <a:latin typeface="Arial"/>
               </a:rPr>
-              <a:t>Для побитово-точных операций — внешний инструмент (Python, regex), не чистый LLM-инференс.</a:t>
+              <a:t>Буквы: внешний инструмент (Python, regex) или посимвольный запрос. Топ-модели 2026 сами вызывают код вместо одного прохода.</a:t>
+            </a:r>
+          </a:p>
+        </p:txBody>
+      </p:sp>
+      <p:sp>
+        <p:nvSpPr>
+          <p:cNvPr id="16" name="TextBox 15"/>
+          <p:cNvSpPr txBox="1"/>
+          <p:nvPr/>
+        </p:nvSpPr>
+        <p:spPr>
+          <a:xfrm>
+            <a:off x="731520" y="6062472"/>
+            <a:ext cx="10789920" cy="502920"/>
+          </a:xfrm>
+          <a:prstGeom prst="rect">
+            <a:avLst/>
+          </a:prstGeom>
+          <a:noFill/>
+        </p:spPr>
+        <p:txBody>
+          <a:bodyPr wrap="square" lIns="0" rIns="0" tIns="0" bIns="0" anchor="t">
+            <a:spAutoFit/>
+          </a:bodyPr>
+          <a:lstStyle/>
+          <a:p>
+            <a:pPr algn="l">
+              <a:lnSpc>
+                <a:spcPct val="125000"/>
+              </a:lnSpc>
+            </a:pPr>
+            <a:r>
+              <a:rPr sz="1400" b="1" i="0">
+                <a:solidFill>
+                  <a:srgbClr val="21295C"/>
+                </a:solidFill>
+                <a:latin typeface="Arial"/>
+              </a:rPr>
+              <a:t>Числа: тоже режутся непредсказуемо (1234→12+34, но 55688→556+88) → GPT-4: 59% точности на 3-знач. умножении, 4% на 4-знач., 0% на 5-знач. без калькулятора (arXiv 2410.19730).</a:t>
             </a:r>
           </a:p>
         </p:txBody>
@@ -14360,7 +12852,7 @@
                 </a:solidFill>
                 <a:latin typeface="Arial"/>
               </a:rPr>
-              <a:t>Внимание — это матрица, не линейная операция</a:t>
+              <a:t>Внимание — это сверка каждого токена со всеми остальными</a:t>
             </a:r>
           </a:p>
         </p:txBody>
@@ -27861,7 +26353,7 @@
                 </a:solidFill>
                 <a:latin typeface="Arial"/>
               </a:rPr>
-              <a:t>Тот же чёрный ящик из Лекции 1 §3.2 — теперь распакован</a:t>
+              <a:t>Тот же чёрный ящик из Лекции 1 — теперь распакован</a:t>
             </a:r>
           </a:p>
         </p:txBody>
@@ -28976,7 +27468,7 @@
                 </a:solidFill>
                 <a:latin typeface="Arial"/>
               </a:rPr>
-              <a:t>Лекция 1 §3.2 называла этот конвейер «inference моделью» — чёрным ящиком. Теперь он перестал быть чёрным.</a:t>
+              <a:t>Лекция 1 называла этот конвейер «inference моделью» — чёрным ящиком. Теперь он перестал быть чёрным.</a:t>
             </a:r>
           </a:p>
         </p:txBody>
@@ -29033,7 +27525,7 @@
                 </a:solidFill>
                 <a:latin typeface="Arial"/>
               </a:rPr>
-              <a:t>3 промиса Лекции 1 — 3 ответа из Лекции 2</a:t>
+              <a:t>Ответы на вопросы из начала лекции</a:t>
             </a:r>
           </a:p>
         </p:txBody>
@@ -29046,99 +27538,12 @@
         </p:nvSpPr>
         <p:spPr>
           <a:xfrm>
-            <a:off x="502920" y="1325880"/>
-            <a:ext cx="11247120" cy="457200"/>
+            <a:off x="502920" y="1417320"/>
+            <a:ext cx="11247120" cy="1691640"/>
           </a:xfrm>
           <a:prstGeom prst="roundRect">
             <a:avLst>
-              <a:gd name="adj" fmla="val 25000"/>
-            </a:avLst>
-          </a:prstGeom>
-          <a:solidFill>
-            <a:srgbClr val="FEF5E0"/>
-          </a:solidFill>
-          <a:ln w="12700">
-            <a:solidFill>
-              <a:srgbClr val="F0AB00"/>
-            </a:solidFill>
-          </a:ln>
-          <a:effectLst/>
-        </p:spPr>
-        <p:style>
-          <a:lnRef idx="1">
-            <a:schemeClr val="accent1"/>
-          </a:lnRef>
-          <a:fillRef idx="3">
-            <a:schemeClr val="accent1"/>
-          </a:fillRef>
-          <a:effectRef idx="2">
-            <a:schemeClr val="accent1"/>
-          </a:effectRef>
-          <a:fontRef idx="minor">
-            <a:schemeClr val="lt1"/>
-          </a:fontRef>
-        </p:style>
-        <p:txBody>
-          <a:bodyPr rtlCol="0" anchor="ctr"/>
-          <a:lstStyle/>
-          <a:p>
-            <a:pPr algn="ctr"/>
-          </a:p>
-        </p:txBody>
-      </p:sp>
-      <p:sp>
-        <p:nvSpPr>
-          <p:cNvPr id="4" name="TextBox 3"/>
-          <p:cNvSpPr txBox="1"/>
-          <p:nvPr/>
-        </p:nvSpPr>
-        <p:spPr>
-          <a:xfrm>
-            <a:off x="502920" y="1371600"/>
-            <a:ext cx="11247120" cy="365760"/>
-          </a:xfrm>
-          <a:prstGeom prst="rect">
-            <a:avLst/>
-          </a:prstGeom>
-          <a:noFill/>
-        </p:spPr>
-        <p:txBody>
-          <a:bodyPr wrap="square" lIns="0" rIns="0" tIns="0" bIns="0" anchor="ctr">
-            <a:spAutoFit/>
-          </a:bodyPr>
-          <a:lstStyle/>
-          <a:p>
-            <a:pPr algn="ctr">
-              <a:lnSpc>
-                <a:spcPct val="115000"/>
-              </a:lnSpc>
-            </a:pPr>
-            <a:r>
-              <a:rPr sz="1600" b="1" i="1">
-                <a:solidFill>
-                  <a:srgbClr val="21295C"/>
-                </a:solidFill>
-                <a:latin typeface="Arial"/>
-              </a:rPr>
-              <a:t>Payoff Лекции 1 §5.3 — связь обещаний и механизмов</a:t>
-            </a:r>
-          </a:p>
-        </p:txBody>
-      </p:sp>
-      <p:sp>
-        <p:nvSpPr>
-          <p:cNvPr id="5" name="Rounded Rectangle 4"/>
-          <p:cNvSpPr/>
-          <p:nvPr/>
-        </p:nvSpPr>
-        <p:spPr>
-          <a:xfrm>
-            <a:off x="502920" y="1828800"/>
-            <a:ext cx="11247120" cy="1554480"/>
-          </a:xfrm>
-          <a:prstGeom prst="roundRect">
-            <a:avLst>
-              <a:gd name="adj" fmla="val 19607"/>
+              <a:gd name="adj" fmla="val 18018"/>
             </a:avLst>
           </a:prstGeom>
           <a:solidFill>
@@ -29175,13 +27580,13 @@
       </p:sp>
       <p:sp>
         <p:nvSpPr>
-          <p:cNvPr id="6" name="Rounded Rectangle 5"/>
+          <p:cNvPr id="4" name="Rounded Rectangle 3"/>
           <p:cNvSpPr/>
           <p:nvPr/>
         </p:nvSpPr>
         <p:spPr>
           <a:xfrm>
-            <a:off x="731520" y="2103120"/>
+            <a:off x="731520" y="1755648"/>
             <a:ext cx="1005840" cy="1005840"/>
           </a:xfrm>
           <a:prstGeom prst="roundRect">
@@ -29190,7 +27595,7 @@
             </a:avLst>
           </a:prstGeom>
           <a:solidFill>
-            <a:srgbClr val="F0AB00"/>
+            <a:srgbClr val="065A82"/>
           </a:solidFill>
           <a:ln>
             <a:noFill/>
@@ -29221,13 +27626,13 @@
       </p:sp>
       <p:sp>
         <p:nvSpPr>
-          <p:cNvPr id="7" name="TextBox 6"/>
-          <p:cNvSpPr txBox="1"/>
-          <p:nvPr/>
-        </p:nvSpPr>
-        <p:spPr>
-          <a:xfrm>
-            <a:off x="731520" y="2121408"/>
+          <p:cNvPr id="5" name="TextBox 4"/>
+          <p:cNvSpPr txBox="1"/>
+          <p:nvPr/>
+        </p:nvSpPr>
+        <p:spPr>
+          <a:xfrm>
+            <a:off x="731520" y="1773936"/>
             <a:ext cx="1005840" cy="960120"/>
           </a:xfrm>
           <a:prstGeom prst="rect">
@@ -29260,7 +27665,7 @@
       </p:sp>
       <p:pic>
         <p:nvPicPr>
-          <p:cNvPr id="8" name="Picture 7" descr="focus.png"/>
+          <p:cNvPr id="6" name="Picture 5" descr="focus.png"/>
           <p:cNvPicPr>
             <a:picLocks noChangeAspect="1"/>
           </p:cNvPicPr>
@@ -29274,7 +27679,7 @@
         </p:blipFill>
         <p:spPr>
           <a:xfrm>
-            <a:off x="10515600" y="2240280"/>
+            <a:off x="10515600" y="1892808"/>
             <a:ext cx="731520" cy="731520"/>
           </a:xfrm>
           <a:prstGeom prst="rect">
@@ -29284,14 +27689,14 @@
       </p:pic>
       <p:sp>
         <p:nvSpPr>
-          <p:cNvPr id="9" name="TextBox 8"/>
-          <p:cNvSpPr txBox="1"/>
-          <p:nvPr/>
-        </p:nvSpPr>
-        <p:spPr>
-          <a:xfrm>
-            <a:off x="1965960" y="2011680"/>
-            <a:ext cx="8412480" cy="502920"/>
+          <p:cNvPr id="7" name="TextBox 6"/>
+          <p:cNvSpPr txBox="1"/>
+          <p:nvPr/>
+        </p:nvSpPr>
+        <p:spPr>
+          <a:xfrm>
+            <a:off x="1965960" y="1645920"/>
+            <a:ext cx="8412480" cy="548640"/>
           </a:xfrm>
           <a:prstGeom prst="rect">
             <a:avLst/>
@@ -29323,14 +27728,14 @@
       </p:sp>
       <p:sp>
         <p:nvSpPr>
-          <p:cNvPr id="10" name="TextBox 9"/>
-          <p:cNvSpPr txBox="1"/>
-          <p:nvPr/>
-        </p:nvSpPr>
-        <p:spPr>
-          <a:xfrm>
-            <a:off x="1965960" y="2560320"/>
-            <a:ext cx="8412480" cy="777240"/>
+          <p:cNvPr id="8" name="TextBox 7"/>
+          <p:cNvSpPr txBox="1"/>
+          <p:nvPr/>
+        </p:nvSpPr>
+        <p:spPr>
+          <a:xfrm>
+            <a:off x="1965960" y="2240280"/>
+            <a:ext cx="8412480" cy="822960"/>
           </a:xfrm>
           <a:prstGeom prst="rect">
             <a:avLst/>
@@ -29362,18 +27767,18 @@
       </p:sp>
       <p:sp>
         <p:nvSpPr>
-          <p:cNvPr id="11" name="Rounded Rectangle 10"/>
+          <p:cNvPr id="9" name="Rounded Rectangle 8"/>
           <p:cNvSpPr/>
           <p:nvPr/>
         </p:nvSpPr>
         <p:spPr>
           <a:xfrm>
-            <a:off x="502920" y="3520439"/>
-            <a:ext cx="11247120" cy="1554480"/>
+            <a:off x="502920" y="3273552"/>
+            <a:ext cx="11247120" cy="1691640"/>
           </a:xfrm>
           <a:prstGeom prst="roundRect">
             <a:avLst>
-              <a:gd name="adj" fmla="val 19607"/>
+              <a:gd name="adj" fmla="val 18018"/>
             </a:avLst>
           </a:prstGeom>
           <a:solidFill>
@@ -29410,13 +27815,13 @@
       </p:sp>
       <p:sp>
         <p:nvSpPr>
-          <p:cNvPr id="12" name="Rounded Rectangle 11"/>
+          <p:cNvPr id="10" name="Rounded Rectangle 9"/>
           <p:cNvSpPr/>
           <p:nvPr/>
         </p:nvSpPr>
         <p:spPr>
           <a:xfrm>
-            <a:off x="731520" y="3794759"/>
+            <a:off x="731520" y="3611880"/>
             <a:ext cx="1005840" cy="1005840"/>
           </a:xfrm>
           <a:prstGeom prst="roundRect">
@@ -29425,7 +27830,7 @@
             </a:avLst>
           </a:prstGeom>
           <a:solidFill>
-            <a:srgbClr val="065A82"/>
+            <a:srgbClr val="1C7293"/>
           </a:solidFill>
           <a:ln>
             <a:noFill/>
@@ -29456,13 +27861,13 @@
       </p:sp>
       <p:sp>
         <p:nvSpPr>
-          <p:cNvPr id="13" name="TextBox 12"/>
-          <p:cNvSpPr txBox="1"/>
-          <p:nvPr/>
-        </p:nvSpPr>
-        <p:spPr>
-          <a:xfrm>
-            <a:off x="731520" y="3813048"/>
+          <p:cNvPr id="11" name="TextBox 10"/>
+          <p:cNvSpPr txBox="1"/>
+          <p:nvPr/>
+        </p:nvSpPr>
+        <p:spPr>
+          <a:xfrm>
+            <a:off x="731520" y="3630168"/>
             <a:ext cx="1005840" cy="960120"/>
           </a:xfrm>
           <a:prstGeom prst="rect">
@@ -29495,7 +27900,7 @@
       </p:sp>
       <p:pic>
         <p:nvPicPr>
-          <p:cNvPr id="14" name="Picture 13" descr="binary.png"/>
+          <p:cNvPr id="12" name="Picture 11" descr="binary.png"/>
           <p:cNvPicPr>
             <a:picLocks noChangeAspect="1"/>
           </p:cNvPicPr>
@@ -29509,7 +27914,7 @@
         </p:blipFill>
         <p:spPr>
           <a:xfrm>
-            <a:off x="10515600" y="3931920"/>
+            <a:off x="10515600" y="3749039"/>
             <a:ext cx="731520" cy="731520"/>
           </a:xfrm>
           <a:prstGeom prst="rect">
@@ -29519,14 +27924,14 @@
       </p:pic>
       <p:sp>
         <p:nvSpPr>
-          <p:cNvPr id="15" name="TextBox 14"/>
-          <p:cNvSpPr txBox="1"/>
-          <p:nvPr/>
-        </p:nvSpPr>
-        <p:spPr>
-          <a:xfrm>
-            <a:off x="1965960" y="3703320"/>
-            <a:ext cx="8412480" cy="502920"/>
+          <p:cNvPr id="13" name="TextBox 12"/>
+          <p:cNvSpPr txBox="1"/>
+          <p:nvPr/>
+        </p:nvSpPr>
+        <p:spPr>
+          <a:xfrm>
+            <a:off x="1965960" y="3502152"/>
+            <a:ext cx="8412480" cy="548640"/>
           </a:xfrm>
           <a:prstGeom prst="rect">
             <a:avLst/>
@@ -29558,14 +27963,14 @@
       </p:sp>
       <p:sp>
         <p:nvSpPr>
-          <p:cNvPr id="16" name="TextBox 15"/>
-          <p:cNvSpPr txBox="1"/>
-          <p:nvPr/>
-        </p:nvSpPr>
-        <p:spPr>
-          <a:xfrm>
-            <a:off x="1965960" y="4251959"/>
-            <a:ext cx="8412480" cy="777240"/>
+          <p:cNvPr id="14" name="TextBox 13"/>
+          <p:cNvSpPr txBox="1"/>
+          <p:nvPr/>
+        </p:nvSpPr>
+        <p:spPr>
+          <a:xfrm>
+            <a:off x="1965960" y="4096512"/>
+            <a:ext cx="8412480" cy="822960"/>
           </a:xfrm>
           <a:prstGeom prst="rect">
             <a:avLst/>
@@ -29597,18 +28002,18 @@
       </p:sp>
       <p:sp>
         <p:nvSpPr>
-          <p:cNvPr id="17" name="Rounded Rectangle 16"/>
+          <p:cNvPr id="15" name="Rounded Rectangle 14"/>
           <p:cNvSpPr/>
           <p:nvPr/>
         </p:nvSpPr>
         <p:spPr>
           <a:xfrm>
-            <a:off x="502920" y="5212079"/>
-            <a:ext cx="11247120" cy="1554480"/>
+            <a:off x="502920" y="5129784"/>
+            <a:ext cx="11247120" cy="1691640"/>
           </a:xfrm>
           <a:prstGeom prst="roundRect">
             <a:avLst>
-              <a:gd name="adj" fmla="val 19607"/>
+              <a:gd name="adj" fmla="val 18018"/>
             </a:avLst>
           </a:prstGeom>
           <a:solidFill>
@@ -29645,13 +28050,13 @@
       </p:sp>
       <p:sp>
         <p:nvSpPr>
-          <p:cNvPr id="18" name="Rounded Rectangle 17"/>
+          <p:cNvPr id="16" name="Rounded Rectangle 15"/>
           <p:cNvSpPr/>
           <p:nvPr/>
         </p:nvSpPr>
         <p:spPr>
           <a:xfrm>
-            <a:off x="731520" y="5486399"/>
+            <a:off x="731520" y="5468112"/>
             <a:ext cx="1005840" cy="1005840"/>
           </a:xfrm>
           <a:prstGeom prst="roundRect">
@@ -29691,13 +28096,13 @@
       </p:sp>
       <p:sp>
         <p:nvSpPr>
-          <p:cNvPr id="19" name="TextBox 18"/>
-          <p:cNvSpPr txBox="1"/>
-          <p:nvPr/>
-        </p:nvSpPr>
-        <p:spPr>
-          <a:xfrm>
-            <a:off x="731520" y="5504688"/>
+          <p:cNvPr id="17" name="TextBox 16"/>
+          <p:cNvSpPr txBox="1"/>
+          <p:nvPr/>
+        </p:nvSpPr>
+        <p:spPr>
+          <a:xfrm>
+            <a:off x="731520" y="5486400"/>
             <a:ext cx="1005840" cy="960120"/>
           </a:xfrm>
           <a:prstGeom prst="rect">
@@ -29730,7 +28135,7 @@
       </p:sp>
       <p:pic>
         <p:nvPicPr>
-          <p:cNvPr id="20" name="Picture 19" descr="sparkles.png"/>
+          <p:cNvPr id="18" name="Picture 17" descr="sparkles.png"/>
           <p:cNvPicPr>
             <a:picLocks noChangeAspect="1"/>
           </p:cNvPicPr>
@@ -29744,7 +28149,7 @@
         </p:blipFill>
         <p:spPr>
           <a:xfrm>
-            <a:off x="10515600" y="5623559"/>
+            <a:off x="10515600" y="5605272"/>
             <a:ext cx="731520" cy="731520"/>
           </a:xfrm>
           <a:prstGeom prst="rect">
@@ -29754,14 +28159,14 @@
       </p:pic>
       <p:sp>
         <p:nvSpPr>
-          <p:cNvPr id="21" name="TextBox 20"/>
-          <p:cNvSpPr txBox="1"/>
-          <p:nvPr/>
-        </p:nvSpPr>
-        <p:spPr>
-          <a:xfrm>
-            <a:off x="1965960" y="5394959"/>
-            <a:ext cx="8412480" cy="502920"/>
+          <p:cNvPr id="19" name="TextBox 18"/>
+          <p:cNvSpPr txBox="1"/>
+          <p:nvPr/>
+        </p:nvSpPr>
+        <p:spPr>
+          <a:xfrm>
+            <a:off x="1965960" y="5358384"/>
+            <a:ext cx="8412480" cy="548640"/>
           </a:xfrm>
           <a:prstGeom prst="rect">
             <a:avLst/>
@@ -29793,14 +28198,14 @@
       </p:sp>
       <p:sp>
         <p:nvSpPr>
-          <p:cNvPr id="22" name="TextBox 21"/>
-          <p:cNvSpPr txBox="1"/>
-          <p:nvPr/>
-        </p:nvSpPr>
-        <p:spPr>
-          <a:xfrm>
-            <a:off x="1965960" y="5943599"/>
-            <a:ext cx="8412480" cy="777240"/>
+          <p:cNvPr id="20" name="TextBox 19"/>
+          <p:cNvSpPr txBox="1"/>
+          <p:nvPr/>
+        </p:nvSpPr>
+        <p:spPr>
+          <a:xfrm>
+            <a:off x="1965960" y="5952744"/>
+            <a:ext cx="8412480" cy="822960"/>
           </a:xfrm>
           <a:prstGeom prst="rect">
             <a:avLst/>
@@ -29876,13 +28281,13 @@
               </a:lnSpc>
             </a:pPr>
             <a:r>
-              <a:rPr sz="2400" b="1" i="0">
+              <a:rPr sz="2600" b="1" i="0">
                 <a:solidFill>
                   <a:srgbClr val="21295C"/>
                 </a:solidFill>
                 <a:latin typeface="Arial"/>
               </a:rPr>
-              <a:t>LLM — не всегда правильный инструмент. Дерево решений: когда не LLM</a:t>
+              <a:t>Когда LLM — не правильный инструмент: дерево решений</a:t>
             </a:r>
           </a:p>
         </p:txBody>
@@ -29895,8 +28300,8 @@
         </p:nvSpPr>
         <p:spPr>
           <a:xfrm>
-            <a:off x="3352647" y="1417320"/>
-            <a:ext cx="5486400" cy="868680"/>
+            <a:off x="3169767" y="1234440"/>
+            <a:ext cx="5852160" cy="731520"/>
           </a:xfrm>
           <a:prstGeom prst="roundRect">
             <a:avLst>
@@ -29943,8 +28348,8 @@
         </p:nvSpPr>
         <p:spPr>
           <a:xfrm>
-            <a:off x="3352647" y="1554480"/>
-            <a:ext cx="5486400" cy="640080"/>
+            <a:off x="3169767" y="1234440"/>
+            <a:ext cx="5852160" cy="731520"/>
           </a:xfrm>
           <a:prstGeom prst="rect">
             <a:avLst/>
@@ -29963,7 +28368,7 @@
               </a:lnSpc>
             </a:pPr>
             <a:r>
-              <a:rPr sz="2000" b="1" i="0">
+              <a:rPr sz="1900" b="1" i="0">
                 <a:solidFill>
                   <a:srgbClr val="21295C"/>
                 </a:solidFill>
@@ -29982,8 +28387,8 @@
         </p:nvSpPr>
         <p:spPr>
           <a:xfrm>
-            <a:off x="2290572" y="2286000"/>
-            <a:ext cx="36576" cy="320040"/>
+            <a:off x="2290572" y="1965960"/>
+            <a:ext cx="36576" cy="420623"/>
           </a:xfrm>
           <a:prstGeom prst="rect">
             <a:avLst/>
@@ -30020,13 +28425,57 @@
       </p:sp>
       <p:sp>
         <p:nvSpPr>
-          <p:cNvPr id="6" name="Rounded Rectangle 5"/>
+          <p:cNvPr id="6" name="Isosceles Triangle 5"/>
           <p:cNvSpPr/>
           <p:nvPr/>
         </p:nvSpPr>
         <p:spPr>
-          <a:xfrm>
-            <a:off x="502920" y="2606040"/>
+          <a:xfrm rot="10800000">
+            <a:off x="2217420" y="2386584"/>
+            <a:ext cx="182880" cy="128016"/>
+          </a:xfrm>
+          <a:prstGeom prst="triangle">
+            <a:avLst/>
+          </a:prstGeom>
+          <a:solidFill>
+            <a:srgbClr val="1C7293"/>
+          </a:solidFill>
+          <a:ln>
+            <a:noFill/>
+          </a:ln>
+          <a:effectLst/>
+        </p:spPr>
+        <p:style>
+          <a:lnRef idx="1">
+            <a:schemeClr val="accent1"/>
+          </a:lnRef>
+          <a:fillRef idx="3">
+            <a:schemeClr val="accent1"/>
+          </a:fillRef>
+          <a:effectRef idx="2">
+            <a:schemeClr val="accent1"/>
+          </a:effectRef>
+          <a:fontRef idx="minor">
+            <a:schemeClr val="lt1"/>
+          </a:fontRef>
+        </p:style>
+        <p:txBody>
+          <a:bodyPr rtlCol="0" anchor="ctr"/>
+          <a:lstStyle/>
+          <a:p>
+            <a:pPr algn="ctr"/>
+          </a:p>
+        </p:txBody>
+      </p:sp>
+      <p:sp>
+        <p:nvSpPr>
+          <p:cNvPr id="7" name="Rounded Rectangle 6"/>
+          <p:cNvSpPr/>
+          <p:nvPr/>
+        </p:nvSpPr>
+        <p:spPr>
+          <a:xfrm>
+            <a:off x="502920" y="2514600"/>
             <a:ext cx="3611880" cy="3246120"/>
           </a:xfrm>
           <a:prstGeom prst="roundRect">
@@ -30068,7 +28517,7 @@
       </p:sp>
       <p:pic>
         <p:nvPicPr>
-          <p:cNvPr id="7" name="Picture 6" descr="cpu.png"/>
+          <p:cNvPr id="8" name="Picture 7" descr="cpu.png"/>
           <p:cNvPicPr>
             <a:picLocks noChangeAspect="1"/>
           </p:cNvPicPr>
@@ -30082,8 +28531,8 @@
         </p:blipFill>
         <p:spPr>
           <a:xfrm>
-            <a:off x="731520" y="2788920"/>
-            <a:ext cx="1005840" cy="1005840"/>
+            <a:off x="731520" y="2697480"/>
+            <a:ext cx="868680" cy="868680"/>
           </a:xfrm>
           <a:prstGeom prst="rect">
             <a:avLst/>
@@ -30092,14 +28541,14 @@
       </p:pic>
       <p:sp>
         <p:nvSpPr>
-          <p:cNvPr id="8" name="TextBox 7"/>
-          <p:cNvSpPr txBox="1"/>
-          <p:nvPr/>
-        </p:nvSpPr>
-        <p:spPr>
-          <a:xfrm>
-            <a:off x="1828800" y="2971800"/>
-            <a:ext cx="2194560" cy="594360"/>
+          <p:cNvPr id="9" name="TextBox 8"/>
+          <p:cNvSpPr txBox="1"/>
+          <p:nvPr/>
+        </p:nvSpPr>
+        <p:spPr>
+          <a:xfrm>
+            <a:off x="1737360" y="2697480"/>
+            <a:ext cx="2194560" cy="868680"/>
           </a:xfrm>
           <a:prstGeom prst="rect">
             <a:avLst/>
@@ -30114,11 +28563,11 @@
           <a:p>
             <a:pPr algn="l">
               <a:lnSpc>
-                <a:spcPct val="115000"/>
-              </a:lnSpc>
-            </a:pPr>
-            <a:r>
-              <a:rPr sz="1800" b="1" i="0">
+                <a:spcPct val="110000"/>
+              </a:lnSpc>
+            </a:pPr>
+            <a:r>
+              <a:rPr sz="1700" b="1" i="0">
                 <a:solidFill>
                   <a:srgbClr val="065A82"/>
                 </a:solidFill>
@@ -30131,14 +28580,14 @@
       </p:sp>
       <p:sp>
         <p:nvSpPr>
-          <p:cNvPr id="9" name="TextBox 8"/>
-          <p:cNvSpPr txBox="1"/>
-          <p:nvPr/>
-        </p:nvSpPr>
-        <p:spPr>
-          <a:xfrm>
-            <a:off x="731520" y="4023360"/>
-            <a:ext cx="3154680" cy="1051560"/>
+          <p:cNvPr id="10" name="TextBox 9"/>
+          <p:cNvSpPr txBox="1"/>
+          <p:nvPr/>
+        </p:nvSpPr>
+        <p:spPr>
+          <a:xfrm>
+            <a:off x="731520" y="3703320"/>
+            <a:ext cx="3154680" cy="1005840"/>
           </a:xfrm>
           <a:prstGeom prst="rect">
             <a:avLst/>
@@ -30153,11 +28602,11 @@
           <a:p>
             <a:pPr algn="l">
               <a:lnSpc>
-                <a:spcPct val="132000"/>
-              </a:lnSpc>
-            </a:pPr>
-            <a:r>
-              <a:rPr sz="1500" b="0" i="1">
+                <a:spcPct val="128000"/>
+              </a:lnSpc>
+            </a:pPr>
+            <a:r>
+              <a:rPr sz="1400" b="0" i="1">
                 <a:solidFill>
                   <a:srgbClr val="21295C"/>
                 </a:solidFill>
@@ -30170,14 +28619,14 @@
       </p:sp>
       <p:sp>
         <p:nvSpPr>
-          <p:cNvPr id="10" name="TextBox 9"/>
-          <p:cNvSpPr txBox="1"/>
-          <p:nvPr/>
-        </p:nvSpPr>
-        <p:spPr>
-          <a:xfrm>
-            <a:off x="731520" y="5029200"/>
-            <a:ext cx="3154680" cy="777240"/>
+          <p:cNvPr id="11" name="TextBox 10"/>
+          <p:cNvSpPr txBox="1"/>
+          <p:nvPr/>
+        </p:nvSpPr>
+        <p:spPr>
+          <a:xfrm>
+            <a:off x="731520" y="4754880"/>
+            <a:ext cx="3154680" cy="914400"/>
           </a:xfrm>
           <a:prstGeom prst="rect">
             <a:avLst/>
@@ -30192,11 +28641,11 @@
           <a:p>
             <a:pPr algn="l">
               <a:lnSpc>
-                <a:spcPct val="130000"/>
-              </a:lnSpc>
-            </a:pPr>
-            <a:r>
-              <a:rPr sz="1500" b="1" i="0">
+                <a:spcPct val="126000"/>
+              </a:lnSpc>
+            </a:pPr>
+            <a:r>
+              <a:rPr sz="1400" b="1" i="0">
                 <a:solidFill>
                   <a:srgbClr val="21295C"/>
                 </a:solidFill>
@@ -30211,14 +28660,14 @@
       </p:sp>
       <p:sp>
         <p:nvSpPr>
-          <p:cNvPr id="11" name="Rectangle 10"/>
+          <p:cNvPr id="12" name="Rectangle 11"/>
           <p:cNvSpPr/>
           <p:nvPr/>
         </p:nvSpPr>
         <p:spPr>
           <a:xfrm>
-            <a:off x="6085332" y="2286000"/>
-            <a:ext cx="36576" cy="320040"/>
+            <a:off x="6085332" y="1965960"/>
+            <a:ext cx="36576" cy="420623"/>
           </a:xfrm>
           <a:prstGeom prst="rect">
             <a:avLst/>
@@ -30255,13 +28704,57 @@
       </p:sp>
       <p:sp>
         <p:nvSpPr>
-          <p:cNvPr id="12" name="Rounded Rectangle 11"/>
+          <p:cNvPr id="13" name="Isosceles Triangle 12"/>
           <p:cNvSpPr/>
           <p:nvPr/>
         </p:nvSpPr>
         <p:spPr>
-          <a:xfrm>
-            <a:off x="4297680" y="2606040"/>
+          <a:xfrm rot="10800000">
+            <a:off x="6012180" y="2386584"/>
+            <a:ext cx="182880" cy="128016"/>
+          </a:xfrm>
+          <a:prstGeom prst="triangle">
+            <a:avLst/>
+          </a:prstGeom>
+          <a:solidFill>
+            <a:srgbClr val="1C7293"/>
+          </a:solidFill>
+          <a:ln>
+            <a:noFill/>
+          </a:ln>
+          <a:effectLst/>
+        </p:spPr>
+        <p:style>
+          <a:lnRef idx="1">
+            <a:schemeClr val="accent1"/>
+          </a:lnRef>
+          <a:fillRef idx="3">
+            <a:schemeClr val="accent1"/>
+          </a:fillRef>
+          <a:effectRef idx="2">
+            <a:schemeClr val="accent1"/>
+          </a:effectRef>
+          <a:fontRef idx="minor">
+            <a:schemeClr val="lt1"/>
+          </a:fontRef>
+        </p:style>
+        <p:txBody>
+          <a:bodyPr rtlCol="0" anchor="ctr"/>
+          <a:lstStyle/>
+          <a:p>
+            <a:pPr algn="ctr"/>
+          </a:p>
+        </p:txBody>
+      </p:sp>
+      <p:sp>
+        <p:nvSpPr>
+          <p:cNvPr id="14" name="Rounded Rectangle 13"/>
+          <p:cNvSpPr/>
+          <p:nvPr/>
+        </p:nvSpPr>
+        <p:spPr>
+          <a:xfrm>
+            <a:off x="4297680" y="2514600"/>
             <a:ext cx="3611880" cy="3246120"/>
           </a:xfrm>
           <a:prstGeom prst="roundRect">
@@ -30303,7 +28796,7 @@
       </p:sp>
       <p:pic>
         <p:nvPicPr>
-          <p:cNvPr id="13" name="Picture 12" descr="file-text.png"/>
+          <p:cNvPr id="15" name="Picture 14" descr="file-text.png"/>
           <p:cNvPicPr>
             <a:picLocks noChangeAspect="1"/>
           </p:cNvPicPr>
@@ -30317,8 +28810,8 @@
         </p:blipFill>
         <p:spPr>
           <a:xfrm>
-            <a:off x="4526280" y="2788920"/>
-            <a:ext cx="1005840" cy="1005840"/>
+            <a:off x="4526280" y="2697480"/>
+            <a:ext cx="868680" cy="868680"/>
           </a:xfrm>
           <a:prstGeom prst="rect">
             <a:avLst/>
@@ -30327,14 +28820,14 @@
       </p:pic>
       <p:sp>
         <p:nvSpPr>
-          <p:cNvPr id="14" name="TextBox 13"/>
-          <p:cNvSpPr txBox="1"/>
-          <p:nvPr/>
-        </p:nvSpPr>
-        <p:spPr>
-          <a:xfrm>
-            <a:off x="5623560" y="2971800"/>
-            <a:ext cx="2194560" cy="594360"/>
+          <p:cNvPr id="16" name="TextBox 15"/>
+          <p:cNvSpPr txBox="1"/>
+          <p:nvPr/>
+        </p:nvSpPr>
+        <p:spPr>
+          <a:xfrm>
+            <a:off x="5532120" y="2697480"/>
+            <a:ext cx="2194560" cy="868680"/>
           </a:xfrm>
           <a:prstGeom prst="rect">
             <a:avLst/>
@@ -30349,31 +28842,31 @@
           <a:p>
             <a:pPr algn="l">
               <a:lnSpc>
-                <a:spcPct val="115000"/>
-              </a:lnSpc>
-            </a:pPr>
-            <a:r>
-              <a:rPr sz="1800" b="1" i="0">
+                <a:spcPct val="110000"/>
+              </a:lnSpc>
+            </a:pPr>
+            <a:r>
+              <a:rPr sz="1700" b="1" i="0">
                 <a:solidFill>
                   <a:srgbClr val="065A82"/>
                 </a:solidFill>
                 <a:latin typeface="Arial"/>
               </a:rPr>
-              <a:t>Интерпретируемость</a:t>
-            </a:r>
-          </a:p>
-        </p:txBody>
-      </p:sp>
-      <p:sp>
-        <p:nvSpPr>
-          <p:cNvPr id="15" name="TextBox 14"/>
-          <p:cNvSpPr txBox="1"/>
-          <p:nvPr/>
-        </p:nvSpPr>
-        <p:spPr>
-          <a:xfrm>
-            <a:off x="4526280" y="4023360"/>
-            <a:ext cx="3154680" cy="1051560"/>
+              <a:t>Интерпрети- руемость</a:t>
+            </a:r>
+          </a:p>
+        </p:txBody>
+      </p:sp>
+      <p:sp>
+        <p:nvSpPr>
+          <p:cNvPr id="17" name="TextBox 16"/>
+          <p:cNvSpPr txBox="1"/>
+          <p:nvPr/>
+        </p:nvSpPr>
+        <p:spPr>
+          <a:xfrm>
+            <a:off x="4526280" y="3703320"/>
+            <a:ext cx="3154680" cy="1005840"/>
           </a:xfrm>
           <a:prstGeom prst="rect">
             <a:avLst/>
@@ -30388,11 +28881,11 @@
           <a:p>
             <a:pPr algn="l">
               <a:lnSpc>
-                <a:spcPct val="132000"/>
-              </a:lnSpc>
-            </a:pPr>
-            <a:r>
-              <a:rPr sz="1500" b="0" i="1">
+                <a:spcPct val="128000"/>
+              </a:lnSpc>
+            </a:pPr>
+            <a:r>
+              <a:rPr sz="1400" b="0" i="1">
                 <a:solidFill>
                   <a:srgbClr val="21295C"/>
                 </a:solidFill>
@@ -30406,14 +28899,14 @@
       </p:sp>
       <p:sp>
         <p:nvSpPr>
-          <p:cNvPr id="16" name="TextBox 15"/>
-          <p:cNvSpPr txBox="1"/>
-          <p:nvPr/>
-        </p:nvSpPr>
-        <p:spPr>
-          <a:xfrm>
-            <a:off x="4526280" y="5029200"/>
-            <a:ext cx="3154680" cy="777240"/>
+          <p:cNvPr id="18" name="TextBox 17"/>
+          <p:cNvSpPr txBox="1"/>
+          <p:nvPr/>
+        </p:nvSpPr>
+        <p:spPr>
+          <a:xfrm>
+            <a:off x="4526280" y="4754880"/>
+            <a:ext cx="3154680" cy="914400"/>
           </a:xfrm>
           <a:prstGeom prst="rect">
             <a:avLst/>
@@ -30428,11 +28921,11 @@
           <a:p>
             <a:pPr algn="l">
               <a:lnSpc>
-                <a:spcPct val="130000"/>
-              </a:lnSpc>
-            </a:pPr>
-            <a:r>
-              <a:rPr sz="1500" b="1" i="0">
+                <a:spcPct val="126000"/>
+              </a:lnSpc>
+            </a:pPr>
+            <a:r>
+              <a:rPr sz="1400" b="1" i="0">
                 <a:solidFill>
                   <a:srgbClr val="21295C"/>
                 </a:solidFill>
@@ -30447,14 +28940,14 @@
       </p:sp>
       <p:sp>
         <p:nvSpPr>
-          <p:cNvPr id="17" name="Rectangle 16"/>
+          <p:cNvPr id="19" name="Rectangle 18"/>
           <p:cNvSpPr/>
           <p:nvPr/>
         </p:nvSpPr>
         <p:spPr>
           <a:xfrm>
-            <a:off x="9880092" y="2286000"/>
-            <a:ext cx="36576" cy="320040"/>
+            <a:off x="9880092" y="1965960"/>
+            <a:ext cx="36576" cy="420623"/>
           </a:xfrm>
           <a:prstGeom prst="rect">
             <a:avLst/>
@@ -30491,13 +28984,57 @@
       </p:sp>
       <p:sp>
         <p:nvSpPr>
-          <p:cNvPr id="18" name="Rounded Rectangle 17"/>
+          <p:cNvPr id="20" name="Isosceles Triangle 19"/>
           <p:cNvSpPr/>
           <p:nvPr/>
         </p:nvSpPr>
         <p:spPr>
-          <a:xfrm>
-            <a:off x="8092440" y="2606040"/>
+          <a:xfrm rot="10800000">
+            <a:off x="9806940" y="2386584"/>
+            <a:ext cx="182880" cy="128016"/>
+          </a:xfrm>
+          <a:prstGeom prst="triangle">
+            <a:avLst/>
+          </a:prstGeom>
+          <a:solidFill>
+            <a:srgbClr val="1C7293"/>
+          </a:solidFill>
+          <a:ln>
+            <a:noFill/>
+          </a:ln>
+          <a:effectLst/>
+        </p:spPr>
+        <p:style>
+          <a:lnRef idx="1">
+            <a:schemeClr val="accent1"/>
+          </a:lnRef>
+          <a:fillRef idx="3">
+            <a:schemeClr val="accent1"/>
+          </a:fillRef>
+          <a:effectRef idx="2">
+            <a:schemeClr val="accent1"/>
+          </a:effectRef>
+          <a:fontRef idx="minor">
+            <a:schemeClr val="lt1"/>
+          </a:fontRef>
+        </p:style>
+        <p:txBody>
+          <a:bodyPr rtlCol="0" anchor="ctr"/>
+          <a:lstStyle/>
+          <a:p>
+            <a:pPr algn="ctr"/>
+          </a:p>
+        </p:txBody>
+      </p:sp>
+      <p:sp>
+        <p:nvSpPr>
+          <p:cNvPr id="21" name="Rounded Rectangle 20"/>
+          <p:cNvSpPr/>
+          <p:nvPr/>
+        </p:nvSpPr>
+        <p:spPr>
+          <a:xfrm>
+            <a:off x="8092440" y="2514600"/>
             <a:ext cx="3611880" cy="3246120"/>
           </a:xfrm>
           <a:prstGeom prst="roundRect">
@@ -30539,7 +29076,7 @@
       </p:sp>
       <p:pic>
         <p:nvPicPr>
-          <p:cNvPr id="19" name="Picture 18" descr="gauge.png"/>
+          <p:cNvPr id="22" name="Picture 21" descr="gauge.png"/>
           <p:cNvPicPr>
             <a:picLocks noChangeAspect="1"/>
           </p:cNvPicPr>
@@ -30553,8 +29090,8 @@
         </p:blipFill>
         <p:spPr>
           <a:xfrm>
-            <a:off x="8321040" y="2788920"/>
-            <a:ext cx="1005840" cy="1005840"/>
+            <a:off x="8321040" y="2697480"/>
+            <a:ext cx="868680" cy="868680"/>
           </a:xfrm>
           <a:prstGeom prst="rect">
             <a:avLst/>
@@ -30563,14 +29100,14 @@
       </p:pic>
       <p:sp>
         <p:nvSpPr>
-          <p:cNvPr id="20" name="TextBox 19"/>
-          <p:cNvSpPr txBox="1"/>
-          <p:nvPr/>
-        </p:nvSpPr>
-        <p:spPr>
-          <a:xfrm>
-            <a:off x="9418320" y="2971800"/>
-            <a:ext cx="2194560" cy="594360"/>
+          <p:cNvPr id="23" name="TextBox 22"/>
+          <p:cNvSpPr txBox="1"/>
+          <p:nvPr/>
+        </p:nvSpPr>
+        <p:spPr>
+          <a:xfrm>
+            <a:off x="9326880" y="2697480"/>
+            <a:ext cx="2194560" cy="868680"/>
           </a:xfrm>
           <a:prstGeom prst="rect">
             <a:avLst/>
@@ -30585,11 +29122,11 @@
           <a:p>
             <a:pPr algn="l">
               <a:lnSpc>
-                <a:spcPct val="115000"/>
-              </a:lnSpc>
-            </a:pPr>
-            <a:r>
-              <a:rPr sz="1800" b="1" i="0">
+                <a:spcPct val="110000"/>
+              </a:lnSpc>
+            </a:pPr>
+            <a:r>
+              <a:rPr sz="1700" b="1" i="0">
                 <a:solidFill>
                   <a:srgbClr val="065A82"/>
                 </a:solidFill>
@@ -30602,14 +29139,14 @@
       </p:sp>
       <p:sp>
         <p:nvSpPr>
-          <p:cNvPr id="21" name="TextBox 20"/>
-          <p:cNvSpPr txBox="1"/>
-          <p:nvPr/>
-        </p:nvSpPr>
-        <p:spPr>
-          <a:xfrm>
-            <a:off x="8321040" y="4023360"/>
-            <a:ext cx="3154680" cy="1051560"/>
+          <p:cNvPr id="24" name="TextBox 23"/>
+          <p:cNvSpPr txBox="1"/>
+          <p:nvPr/>
+        </p:nvSpPr>
+        <p:spPr>
+          <a:xfrm>
+            <a:off x="8321040" y="3703320"/>
+            <a:ext cx="3154680" cy="1005840"/>
           </a:xfrm>
           <a:prstGeom prst="rect">
             <a:avLst/>
@@ -30624,11 +29161,11 @@
           <a:p>
             <a:pPr algn="l">
               <a:lnSpc>
-                <a:spcPct val="132000"/>
-              </a:lnSpc>
-            </a:pPr>
-            <a:r>
-              <a:rPr sz="1500" b="0" i="1">
+                <a:spcPct val="128000"/>
+              </a:lnSpc>
+            </a:pPr>
+            <a:r>
+              <a:rPr sz="1400" b="0" i="1">
                 <a:solidFill>
                   <a:srgbClr val="21295C"/>
                 </a:solidFill>
@@ -30642,14 +29179,14 @@
       </p:sp>
       <p:sp>
         <p:nvSpPr>
-          <p:cNvPr id="22" name="TextBox 21"/>
-          <p:cNvSpPr txBox="1"/>
-          <p:nvPr/>
-        </p:nvSpPr>
-        <p:spPr>
-          <a:xfrm>
-            <a:off x="8321040" y="5029200"/>
-            <a:ext cx="3154680" cy="777240"/>
+          <p:cNvPr id="25" name="TextBox 24"/>
+          <p:cNvSpPr txBox="1"/>
+          <p:nvPr/>
+        </p:nvSpPr>
+        <p:spPr>
+          <a:xfrm>
+            <a:off x="8321040" y="4754880"/>
+            <a:ext cx="3154680" cy="914400"/>
           </a:xfrm>
           <a:prstGeom prst="rect">
             <a:avLst/>
@@ -30664,11 +29201,11 @@
           <a:p>
             <a:pPr algn="l">
               <a:lnSpc>
-                <a:spcPct val="130000"/>
-              </a:lnSpc>
-            </a:pPr>
-            <a:r>
-              <a:rPr sz="1500" b="1" i="0">
+                <a:spcPct val="126000"/>
+              </a:lnSpc>
+            </a:pPr>
+            <a:r>
+              <a:rPr sz="1400" b="1" i="0">
                 <a:solidFill>
                   <a:srgbClr val="21295C"/>
                 </a:solidFill>
@@ -30683,18 +29220,150 @@
       </p:sp>
       <p:sp>
         <p:nvSpPr>
-          <p:cNvPr id="23" name="Rounded Rectangle 22"/>
+          <p:cNvPr id="26" name="Rectangle 25"/>
           <p:cNvSpPr/>
           <p:nvPr/>
         </p:nvSpPr>
         <p:spPr>
           <a:xfrm>
-            <a:off x="1295247" y="5989320"/>
-            <a:ext cx="9601200" cy="777240"/>
+            <a:off x="2290572" y="5760720"/>
+            <a:ext cx="36576" cy="320040"/>
+          </a:xfrm>
+          <a:prstGeom prst="rect">
+            <a:avLst/>
+          </a:prstGeom>
+          <a:solidFill>
+            <a:srgbClr val="028090"/>
+          </a:solidFill>
+          <a:ln>
+            <a:noFill/>
+          </a:ln>
+          <a:effectLst/>
+        </p:spPr>
+        <p:style>
+          <a:lnRef idx="1">
+            <a:schemeClr val="accent1"/>
+          </a:lnRef>
+          <a:fillRef idx="3">
+            <a:schemeClr val="accent1"/>
+          </a:fillRef>
+          <a:effectRef idx="2">
+            <a:schemeClr val="accent1"/>
+          </a:effectRef>
+          <a:fontRef idx="minor">
+            <a:schemeClr val="lt1"/>
+          </a:fontRef>
+        </p:style>
+        <p:txBody>
+          <a:bodyPr rtlCol="0" anchor="ctr"/>
+          <a:lstStyle/>
+          <a:p>
+            <a:pPr algn="ctr"/>
+          </a:p>
+        </p:txBody>
+      </p:sp>
+      <p:sp>
+        <p:nvSpPr>
+          <p:cNvPr id="27" name="Rectangle 26"/>
+          <p:cNvSpPr/>
+          <p:nvPr/>
+        </p:nvSpPr>
+        <p:spPr>
+          <a:xfrm>
+            <a:off x="6085332" y="5760720"/>
+            <a:ext cx="36576" cy="320040"/>
+          </a:xfrm>
+          <a:prstGeom prst="rect">
+            <a:avLst/>
+          </a:prstGeom>
+          <a:solidFill>
+            <a:srgbClr val="028090"/>
+          </a:solidFill>
+          <a:ln>
+            <a:noFill/>
+          </a:ln>
+          <a:effectLst/>
+        </p:spPr>
+        <p:style>
+          <a:lnRef idx="1">
+            <a:schemeClr val="accent1"/>
+          </a:lnRef>
+          <a:fillRef idx="3">
+            <a:schemeClr val="accent1"/>
+          </a:fillRef>
+          <a:effectRef idx="2">
+            <a:schemeClr val="accent1"/>
+          </a:effectRef>
+          <a:fontRef idx="minor">
+            <a:schemeClr val="lt1"/>
+          </a:fontRef>
+        </p:style>
+        <p:txBody>
+          <a:bodyPr rtlCol="0" anchor="ctr"/>
+          <a:lstStyle/>
+          <a:p>
+            <a:pPr algn="ctr"/>
+          </a:p>
+        </p:txBody>
+      </p:sp>
+      <p:sp>
+        <p:nvSpPr>
+          <p:cNvPr id="28" name="Rectangle 27"/>
+          <p:cNvSpPr/>
+          <p:nvPr/>
+        </p:nvSpPr>
+        <p:spPr>
+          <a:xfrm>
+            <a:off x="9880092" y="5760720"/>
+            <a:ext cx="36576" cy="320040"/>
+          </a:xfrm>
+          <a:prstGeom prst="rect">
+            <a:avLst/>
+          </a:prstGeom>
+          <a:solidFill>
+            <a:srgbClr val="028090"/>
+          </a:solidFill>
+          <a:ln>
+            <a:noFill/>
+          </a:ln>
+          <a:effectLst/>
+        </p:spPr>
+        <p:style>
+          <a:lnRef idx="1">
+            <a:schemeClr val="accent1"/>
+          </a:lnRef>
+          <a:fillRef idx="3">
+            <a:schemeClr val="accent1"/>
+          </a:fillRef>
+          <a:effectRef idx="2">
+            <a:schemeClr val="accent1"/>
+          </a:effectRef>
+          <a:fontRef idx="minor">
+            <a:schemeClr val="lt1"/>
+          </a:fontRef>
+        </p:style>
+        <p:txBody>
+          <a:bodyPr rtlCol="0" anchor="ctr"/>
+          <a:lstStyle/>
+          <a:p>
+            <a:pPr algn="ctr"/>
+          </a:p>
+        </p:txBody>
+      </p:sp>
+      <p:sp>
+        <p:nvSpPr>
+          <p:cNvPr id="29" name="Rounded Rectangle 28"/>
+          <p:cNvSpPr/>
+          <p:nvPr/>
+        </p:nvSpPr>
+        <p:spPr>
+          <a:xfrm>
+            <a:off x="1112367" y="6080760"/>
+            <a:ext cx="9966960" cy="594360"/>
           </a:xfrm>
           <a:prstGeom prst="roundRect">
             <a:avLst>
-              <a:gd name="adj" fmla="val 40000"/>
+              <a:gd name="adj" fmla="val 50000"/>
             </a:avLst>
           </a:prstGeom>
           <a:solidFill>
@@ -30731,14 +29400,14 @@
       </p:sp>
       <p:sp>
         <p:nvSpPr>
-          <p:cNvPr id="24" name="TextBox 23"/>
-          <p:cNvSpPr txBox="1"/>
-          <p:nvPr/>
-        </p:nvSpPr>
-        <p:spPr>
-          <a:xfrm>
-            <a:off x="1295247" y="6126480"/>
-            <a:ext cx="9601200" cy="502920"/>
+          <p:cNvPr id="30" name="TextBox 29"/>
+          <p:cNvSpPr txBox="1"/>
+          <p:nvPr/>
+        </p:nvSpPr>
+        <p:spPr>
+          <a:xfrm>
+            <a:off x="1112367" y="6080760"/>
+            <a:ext cx="9966960" cy="594360"/>
           </a:xfrm>
           <a:prstGeom prst="rect">
             <a:avLst/>
@@ -30757,7 +29426,7 @@
               </a:lnSpc>
             </a:pPr>
             <a:r>
-              <a:rPr sz="1700" b="1" i="0">
+              <a:rPr sz="1600" b="1" i="0">
                 <a:solidFill>
                   <a:srgbClr val="21295C"/>
                 </a:solidFill>
@@ -30873,11 +29542,11 @@
         <p:spPr>
           <a:xfrm>
             <a:off x="502920" y="1783080"/>
-            <a:ext cx="5486400" cy="4709160"/>
+            <a:ext cx="5486400" cy="5166360"/>
           </a:xfrm>
           <a:prstGeom prst="roundRect">
             <a:avLst>
-              <a:gd name="adj" fmla="val 6472"/>
+              <a:gd name="adj" fmla="val 5899"/>
             </a:avLst>
           </a:prstGeom>
           <a:solidFill>
@@ -30928,7 +29597,7 @@
         </p:blipFill>
         <p:spPr>
           <a:xfrm>
-            <a:off x="777240" y="1965960"/>
+            <a:off x="777240" y="2011680"/>
             <a:ext cx="1051560" cy="1051560"/>
           </a:xfrm>
           <a:prstGeom prst="rect">
@@ -30944,7 +29613,7 @@
         </p:nvSpPr>
         <p:spPr>
           <a:xfrm>
-            <a:off x="1920240" y="1965960"/>
+            <a:off x="1920240" y="2011680"/>
             <a:ext cx="3886200" cy="1051560"/>
           </a:xfrm>
           <a:prstGeom prst="rect">
@@ -30983,7 +29652,7 @@
         </p:nvSpPr>
         <p:spPr>
           <a:xfrm>
-            <a:off x="777240" y="3200400"/>
+            <a:off x="777240" y="3291839"/>
             <a:ext cx="4937760" cy="594360"/>
           </a:xfrm>
           <a:prstGeom prst="rect">
@@ -31022,7 +29691,7 @@
         </p:nvSpPr>
         <p:spPr>
           <a:xfrm>
-            <a:off x="777240" y="3931920"/>
+            <a:off x="777240" y="4023360"/>
             <a:ext cx="4937760" cy="502920"/>
           </a:xfrm>
           <a:prstGeom prst="rect">
@@ -31061,8 +29730,8 @@
         </p:nvSpPr>
         <p:spPr>
           <a:xfrm>
-            <a:off x="777240" y="4800600"/>
-            <a:ext cx="4937760" cy="1554480"/>
+            <a:off x="777240" y="4892040"/>
+            <a:ext cx="4937760" cy="1920240"/>
           </a:xfrm>
           <a:prstGeom prst="rect">
             <a:avLst/>
@@ -31087,7 +29756,7 @@
                 </a:solidFill>
                 <a:latin typeface="Arial"/>
               </a:rPr>
-              <a:t>Опирается на физическую интуицию, доменные знания, знание механизмов мира.</a:t>
+              <a:t>Опирается на физическую интуицию, доменные знания, знание механизмов мира. Для причинных выводов нужен именно этот опыт — не статистика.</a:t>
             </a:r>
           </a:p>
         </p:txBody>
@@ -31101,11 +29770,11 @@
         <p:spPr>
           <a:xfrm>
             <a:off x="6263640" y="1783080"/>
-            <a:ext cx="5486400" cy="4709160"/>
+            <a:ext cx="5486400" cy="5166360"/>
           </a:xfrm>
           <a:prstGeom prst="roundRect">
             <a:avLst>
-              <a:gd name="adj" fmla="val 6472"/>
+              <a:gd name="adj" fmla="val 5899"/>
             </a:avLst>
           </a:prstGeom>
           <a:solidFill>
@@ -31156,7 +29825,7 @@
         </p:blipFill>
         <p:spPr>
           <a:xfrm>
-            <a:off x="6537959" y="1965960"/>
+            <a:off x="6537959" y="2011680"/>
             <a:ext cx="1051560" cy="1051560"/>
           </a:xfrm>
           <a:prstGeom prst="rect">
@@ -31172,7 +29841,7 @@
         </p:nvSpPr>
         <p:spPr>
           <a:xfrm>
-            <a:off x="7680960" y="1965960"/>
+            <a:off x="7680960" y="2011680"/>
             <a:ext cx="3886200" cy="1051560"/>
           </a:xfrm>
           <a:prstGeom prst="rect">
@@ -31211,7 +29880,7 @@
         </p:nvSpPr>
         <p:spPr>
           <a:xfrm>
-            <a:off x="6537959" y="3200400"/>
+            <a:off x="6537959" y="3291839"/>
             <a:ext cx="4937760" cy="594360"/>
           </a:xfrm>
           <a:prstGeom prst="rect">
@@ -31250,7 +29919,7 @@
         </p:nvSpPr>
         <p:spPr>
           <a:xfrm>
-            <a:off x="6537959" y="3931920"/>
+            <a:off x="6537959" y="4023360"/>
             <a:ext cx="4937760" cy="502920"/>
           </a:xfrm>
           <a:prstGeom prst="rect">
@@ -31289,8 +29958,8 @@
         </p:nvSpPr>
         <p:spPr>
           <a:xfrm>
-            <a:off x="6537959" y="4800600"/>
-            <a:ext cx="4937760" cy="1554480"/>
+            <a:off x="6537959" y="4892040"/>
+            <a:ext cx="4937760" cy="1920240"/>
           </a:xfrm>
           <a:prstGeom prst="rect">
             <a:avLst/>
@@ -31315,94 +29984,7 @@
                 </a:solidFill>
                 <a:latin typeface="Arial"/>
               </a:rPr>
-              <a:t>Замечает паттерн «X и Y часто соседствуют» в обучающих данных — корреляция, не каузальный граф.</a:t>
-            </a:r>
-          </a:p>
-        </p:txBody>
-      </p:sp>
-      <p:sp>
-        <p:nvSpPr>
-          <p:cNvPr id="16" name="Rounded Rectangle 15"/>
-          <p:cNvSpPr/>
-          <p:nvPr/>
-        </p:nvSpPr>
-        <p:spPr>
-          <a:xfrm>
-            <a:off x="502920" y="6446520"/>
-            <a:ext cx="11247120" cy="365760"/>
-          </a:xfrm>
-          <a:prstGeom prst="roundRect">
-            <a:avLst>
-              <a:gd name="adj" fmla="val 12000"/>
-            </a:avLst>
-          </a:prstGeom>
-          <a:solidFill>
-            <a:srgbClr val="FEF5E0"/>
-          </a:solidFill>
-          <a:ln w="15240">
-            <a:solidFill>
-              <a:srgbClr val="F0AB00"/>
-            </a:solidFill>
-          </a:ln>
-          <a:effectLst/>
-        </p:spPr>
-        <p:style>
-          <a:lnRef idx="1">
-            <a:schemeClr val="accent1"/>
-          </a:lnRef>
-          <a:fillRef idx="3">
-            <a:schemeClr val="accent1"/>
-          </a:fillRef>
-          <a:effectRef idx="2">
-            <a:schemeClr val="accent1"/>
-          </a:effectRef>
-          <a:fontRef idx="minor">
-            <a:schemeClr val="lt1"/>
-          </a:fontRef>
-        </p:style>
-        <p:txBody>
-          <a:bodyPr rtlCol="0" anchor="ctr"/>
-          <a:lstStyle/>
-          <a:p>
-            <a:pPr algn="ctr"/>
-          </a:p>
-        </p:txBody>
-      </p:sp>
-      <p:sp>
-        <p:nvSpPr>
-          <p:cNvPr id="17" name="TextBox 16"/>
-          <p:cNvSpPr txBox="1"/>
-          <p:nvPr/>
-        </p:nvSpPr>
-        <p:spPr>
-          <a:xfrm>
-            <a:off x="685800" y="6519672"/>
-            <a:ext cx="10881360" cy="219456"/>
-          </a:xfrm>
-          <a:prstGeom prst="rect">
-            <a:avLst/>
-          </a:prstGeom>
-          <a:noFill/>
-        </p:spPr>
-        <p:txBody>
-          <a:bodyPr wrap="square" lIns="0" rIns="0" tIns="0" bIns="0" anchor="ctr">
-            <a:spAutoFit/>
-          </a:bodyPr>
-          <a:lstStyle/>
-          <a:p>
-            <a:pPr algn="l">
-              <a:lnSpc>
-                <a:spcPct val="125000"/>
-              </a:lnSpc>
-            </a:pPr>
-            <a:r>
-              <a:rPr sz="1400" b="1" i="0">
-                <a:solidFill>
-                  <a:srgbClr val="21295C"/>
-                </a:solidFill>
-                <a:latin typeface="Arial"/>
-              </a:rPr>
-              <a:t>Инженерный вывод: для причинных выводов привлекайте domain-эксперта или causal-методы.</a:t>
+              <a:t>Замечает паттерн «X и Y часто соседствуют» в обучающих данных. Для причинных выводов — привлекайте domain-эксперта или causal-методы.</a:t>
             </a:r>
           </a:p>
         </p:txBody>
@@ -31453,13 +30035,13 @@
               </a:lnSpc>
             </a:pPr>
             <a:r>
-              <a:rPr sz="2600" b="1" i="0">
+              <a:rPr sz="2400" b="1" i="0">
                 <a:solidFill>
                   <a:srgbClr val="21295C"/>
                 </a:solidFill>
                 <a:latin typeface="Arial"/>
               </a:rPr>
-              <a:t>Принесите: 1 запрос × 3 температуры × 3 запуска × анализ</a:t>
+              <a:t>Лекция 3:  «Агенты, RAG, API — как AI выходит за пределы чата»</a:t>
             </a:r>
           </a:p>
         </p:txBody>
@@ -31498,7 +30080,7 @@
                 </a:solidFill>
                 <a:latin typeface="Arial"/>
               </a:rPr>
-              <a:t>ДЗ к Семинару 2 — apply температуры на своей задаче</a:t>
+              <a:t>Все 4 концепции надстраиваются над одним проходом inference</a:t>
             </a:r>
           </a:p>
         </p:txBody>
@@ -31511,12 +30093,12 @@
         </p:nvSpPr>
         <p:spPr>
           <a:xfrm>
-            <a:off x="502920" y="1874519"/>
-            <a:ext cx="3611880" cy="3246120"/>
+            <a:off x="502920" y="1920240"/>
+            <a:ext cx="5486400" cy="2514600"/>
           </a:xfrm>
           <a:prstGeom prst="roundRect">
             <a:avLst>
-              <a:gd name="adj" fmla="val 9389"/>
+              <a:gd name="adj" fmla="val 12121"/>
             </a:avLst>
           </a:prstGeom>
           <a:solidFill>
@@ -31553,7 +30135,7 @@
       </p:sp>
       <p:pic>
         <p:nvPicPr>
-          <p:cNvPr id="5" name="Picture 4" descr="target.png"/>
+          <p:cNvPr id="5" name="Picture 4" descr="search-check.png"/>
           <p:cNvPicPr>
             <a:picLocks noChangeAspect="1"/>
           </p:cNvPicPr>
@@ -31567,7 +30149,7 @@
         </p:blipFill>
         <p:spPr>
           <a:xfrm>
-            <a:off x="1805940" y="2148839"/>
+            <a:off x="731520" y="2240280"/>
             <a:ext cx="1005840" cy="1005840"/>
           </a:xfrm>
           <a:prstGeom prst="rect">
@@ -31583,8 +30165,8 @@
         </p:nvSpPr>
         <p:spPr>
           <a:xfrm>
-            <a:off x="685800" y="3291839"/>
-            <a:ext cx="3246120" cy="457200"/>
+            <a:off x="1874519" y="2194560"/>
+            <a:ext cx="3977639" cy="548640"/>
           </a:xfrm>
           <a:prstGeom prst="rect">
             <a:avLst/>
@@ -31597,33 +30179,72 @@
           </a:bodyPr>
           <a:lstStyle/>
           <a:p>
-            <a:pPr algn="ctr">
+            <a:pPr algn="l">
               <a:lnSpc>
                 <a:spcPct val="115000"/>
               </a:lnSpc>
             </a:pPr>
             <a:r>
-              <a:rPr sz="2000" b="1" i="0">
+              <a:rPr sz="2100" b="1" i="0">
+                <a:solidFill>
+                  <a:srgbClr val="21295C"/>
+                </a:solidFill>
+                <a:latin typeface="Arial"/>
+              </a:rPr>
+              <a:t>RAG</a:t>
+            </a:r>
+          </a:p>
+        </p:txBody>
+      </p:sp>
+      <p:sp>
+        <p:nvSpPr>
+          <p:cNvPr id="7" name="TextBox 6"/>
+          <p:cNvSpPr txBox="1"/>
+          <p:nvPr/>
+        </p:nvSpPr>
+        <p:spPr>
+          <a:xfrm>
+            <a:off x="1874519" y="2834640"/>
+            <a:ext cx="3977639" cy="365760"/>
+          </a:xfrm>
+          <a:prstGeom prst="rect">
+            <a:avLst/>
+          </a:prstGeom>
+          <a:noFill/>
+        </p:spPr>
+        <p:txBody>
+          <a:bodyPr wrap="square" lIns="0" rIns="0" tIns="0" bIns="0" anchor="t">
+            <a:spAutoFit/>
+          </a:bodyPr>
+          <a:lstStyle/>
+          <a:p>
+            <a:pPr algn="l">
+              <a:lnSpc>
+                <a:spcPct val="115000"/>
+              </a:lnSpc>
+            </a:pPr>
+            <a:r>
+              <a:rPr sz="1400" b="0" i="1">
                 <a:solidFill>
                   <a:srgbClr val="065A82"/>
                 </a:solidFill>
                 <a:latin typeface="Arial"/>
               </a:rPr>
-              <a:t>Шаг 1</a:t>
-            </a:r>
-          </a:p>
-        </p:txBody>
-      </p:sp>
-      <p:sp>
-        <p:nvSpPr>
-          <p:cNvPr id="7" name="TextBox 6"/>
-          <p:cNvSpPr txBox="1"/>
-          <p:nvPr/>
-        </p:nvSpPr>
-        <p:spPr>
-          <a:xfrm>
-            <a:off x="731520" y="3794760"/>
-            <a:ext cx="3154680" cy="685800"/>
+              <a:t>Retrieval-Augmented Generation</a:t>
+            </a:r>
+          </a:p>
+        </p:txBody>
+      </p:sp>
+      <p:sp>
+        <p:nvSpPr>
+          <p:cNvPr id="8" name="TextBox 7"/>
+          <p:cNvSpPr txBox="1"/>
+          <p:nvPr/>
+        </p:nvSpPr>
+        <p:spPr>
+          <a:xfrm>
+            <a:off x="777240" y="3429000"/>
+            <a:ext cx="4983480" cy="914400"/>
           </a:xfrm>
           <a:prstGeom prst="rect">
             <a:avLst/>
@@ -31636,58 +30257,19 @@
           </a:bodyPr>
           <a:lstStyle/>
           <a:p>
-            <a:pPr algn="ctr">
-              <a:lnSpc>
-                <a:spcPct val="130000"/>
-              </a:lnSpc>
-            </a:pPr>
-            <a:r>
-              <a:rPr sz="1500" b="1" i="0">
+            <a:pPr algn="l">
+              <a:lnSpc>
+                <a:spcPct val="132000"/>
+              </a:lnSpc>
+            </a:pPr>
+            <a:r>
+              <a:rPr sz="1600" b="0" i="0">
                 <a:solidFill>
                   <a:srgbClr val="21295C"/>
                 </a:solidFill>
                 <a:latin typeface="Arial"/>
               </a:rPr>
-              <a:t>Возьмите типовую задачу из своей предметной области.</a:t>
-            </a:r>
-          </a:p>
-        </p:txBody>
-      </p:sp>
-      <p:sp>
-        <p:nvSpPr>
-          <p:cNvPr id="8" name="TextBox 7"/>
-          <p:cNvSpPr txBox="1"/>
-          <p:nvPr/>
-        </p:nvSpPr>
-        <p:spPr>
-          <a:xfrm>
-            <a:off x="731520" y="4480560"/>
-            <a:ext cx="3154680" cy="594360"/>
-          </a:xfrm>
-          <a:prstGeom prst="rect">
-            <a:avLst/>
-          </a:prstGeom>
-          <a:noFill/>
-        </p:spPr>
-        <p:txBody>
-          <a:bodyPr wrap="square" lIns="0" rIns="0" tIns="0" bIns="0" anchor="t">
-            <a:spAutoFit/>
-          </a:bodyPr>
-          <a:lstStyle/>
-          <a:p>
-            <a:pPr algn="ctr">
-              <a:lnSpc>
-                <a:spcPct val="135000"/>
-              </a:lnSpc>
-            </a:pPr>
-            <a:r>
-              <a:rPr sz="1300" b="0" i="1">
-                <a:solidFill>
-                  <a:srgbClr val="21295C"/>
-                </a:solidFill>
-                <a:latin typeface="Arial"/>
-              </a:rPr>
-              <a:t>Конкретный воспроизводимый запрос (не «помоги думать»).</a:t>
+              <a:t>близость эмбеддингов + LLM → ответ из вашей базы</a:t>
             </a:r>
           </a:p>
         </p:txBody>
@@ -31700,12 +30282,12 @@
         </p:nvSpPr>
         <p:spPr>
           <a:xfrm>
-            <a:off x="4297680" y="1874519"/>
-            <a:ext cx="3611880" cy="3246120"/>
+            <a:off x="6190488" y="1920240"/>
+            <a:ext cx="5486400" cy="2514600"/>
           </a:xfrm>
           <a:prstGeom prst="roundRect">
             <a:avLst>
-              <a:gd name="adj" fmla="val 9389"/>
+              <a:gd name="adj" fmla="val 12121"/>
             </a:avLst>
           </a:prstGeom>
           <a:solidFill>
@@ -31742,7 +30324,7 @@
       </p:sp>
       <p:pic>
         <p:nvPicPr>
-          <p:cNvPr id="10" name="Picture 9" descr="sliders-horizontal.png"/>
+          <p:cNvPr id="10" name="Picture 9" descr="workflow.png"/>
           <p:cNvPicPr>
             <a:picLocks noChangeAspect="1"/>
           </p:cNvPicPr>
@@ -31756,7 +30338,7 @@
         </p:blipFill>
         <p:spPr>
           <a:xfrm>
-            <a:off x="5600700" y="2148839"/>
+            <a:off x="6419088" y="2240280"/>
             <a:ext cx="1005840" cy="1005840"/>
           </a:xfrm>
           <a:prstGeom prst="rect">
@@ -31772,8 +30354,8 @@
         </p:nvSpPr>
         <p:spPr>
           <a:xfrm>
-            <a:off x="4480560" y="3291839"/>
-            <a:ext cx="3246120" cy="457200"/>
+            <a:off x="7562088" y="2194560"/>
+            <a:ext cx="3977639" cy="548640"/>
           </a:xfrm>
           <a:prstGeom prst="rect">
             <a:avLst/>
@@ -31786,33 +30368,72 @@
           </a:bodyPr>
           <a:lstStyle/>
           <a:p>
-            <a:pPr algn="ctr">
+            <a:pPr algn="l">
               <a:lnSpc>
                 <a:spcPct val="115000"/>
               </a:lnSpc>
             </a:pPr>
             <a:r>
-              <a:rPr sz="2000" b="1" i="0">
+              <a:rPr sz="2100" b="1" i="0">
+                <a:solidFill>
+                  <a:srgbClr val="21295C"/>
+                </a:solidFill>
+                <a:latin typeface="Arial"/>
+              </a:rPr>
+              <a:t>Инструменты / Вызов функций</a:t>
+            </a:r>
+          </a:p>
+        </p:txBody>
+      </p:sp>
+      <p:sp>
+        <p:nvSpPr>
+          <p:cNvPr id="12" name="TextBox 11"/>
+          <p:cNvSpPr txBox="1"/>
+          <p:nvPr/>
+        </p:nvSpPr>
+        <p:spPr>
+          <a:xfrm>
+            <a:off x="7562088" y="2834640"/>
+            <a:ext cx="3977639" cy="365760"/>
+          </a:xfrm>
+          <a:prstGeom prst="rect">
+            <a:avLst/>
+          </a:prstGeom>
+          <a:noFill/>
+        </p:spPr>
+        <p:txBody>
+          <a:bodyPr wrap="square" lIns="0" rIns="0" tIns="0" bIns="0" anchor="t">
+            <a:spAutoFit/>
+          </a:bodyPr>
+          <a:lstStyle/>
+          <a:p>
+            <a:pPr algn="l">
+              <a:lnSpc>
+                <a:spcPct val="115000"/>
+              </a:lnSpc>
+            </a:pPr>
+            <a:r>
+              <a:rPr sz="1400" b="0" i="1">
                 <a:solidFill>
                   <a:srgbClr val="065A82"/>
                 </a:solidFill>
                 <a:latin typeface="Arial"/>
               </a:rPr>
-              <a:t>Шаг 2</a:t>
-            </a:r>
-          </a:p>
-        </p:txBody>
-      </p:sp>
-      <p:sp>
-        <p:nvSpPr>
-          <p:cNvPr id="12" name="TextBox 11"/>
-          <p:cNvSpPr txBox="1"/>
-          <p:nvPr/>
-        </p:nvSpPr>
-        <p:spPr>
-          <a:xfrm>
-            <a:off x="4526280" y="3794760"/>
-            <a:ext cx="3154680" cy="685800"/>
+              <a:t>структурированный JSON</a:t>
+            </a:r>
+          </a:p>
+        </p:txBody>
+      </p:sp>
+      <p:sp>
+        <p:nvSpPr>
+          <p:cNvPr id="13" name="TextBox 12"/>
+          <p:cNvSpPr txBox="1"/>
+          <p:nvPr/>
+        </p:nvSpPr>
+        <p:spPr>
+          <a:xfrm>
+            <a:off x="6464807" y="3429000"/>
+            <a:ext cx="4983480" cy="914400"/>
           </a:xfrm>
           <a:prstGeom prst="rect">
             <a:avLst/>
@@ -31825,60 +30446,19 @@
           </a:bodyPr>
           <a:lstStyle/>
           <a:p>
-            <a:pPr algn="ctr">
-              <a:lnSpc>
-                <a:spcPct val="130000"/>
-              </a:lnSpc>
-            </a:pPr>
-            <a:r>
-              <a:rPr sz="1500" b="1" i="0">
+            <a:pPr algn="l">
+              <a:lnSpc>
+                <a:spcPct val="132000"/>
+              </a:lnSpc>
+            </a:pPr>
+            <a:r>
+              <a:rPr sz="1600" b="0" i="0">
                 <a:solidFill>
                   <a:srgbClr val="21295C"/>
                 </a:solidFill>
                 <a:latin typeface="Arial"/>
               </a:rPr>
-              <a:t>Запустите в playground на 3 температурах.</a:t>
-            </a:r>
-          </a:p>
-        </p:txBody>
-      </p:sp>
-      <p:sp>
-        <p:nvSpPr>
-          <p:cNvPr id="13" name="TextBox 12"/>
-          <p:cNvSpPr txBox="1"/>
-          <p:nvPr/>
-        </p:nvSpPr>
-        <p:spPr>
-          <a:xfrm>
-            <a:off x="4526280" y="4480560"/>
-            <a:ext cx="3154680" cy="594360"/>
-          </a:xfrm>
-          <a:prstGeom prst="rect">
-            <a:avLst/>
-          </a:prstGeom>
-          <a:noFill/>
-        </p:spPr>
-        <p:txBody>
-          <a:bodyPr wrap="square" lIns="0" rIns="0" tIns="0" bIns="0" anchor="t">
-            <a:spAutoFit/>
-          </a:bodyPr>
-          <a:lstStyle/>
-          <a:p>
-            <a:pPr algn="ctr">
-              <a:lnSpc>
-                <a:spcPct val="135000"/>
-              </a:lnSpc>
-            </a:pPr>
-            <a:r>
-              <a:rPr sz="1300" b="0" i="1">
-                <a:solidFill>
-                  <a:srgbClr val="21295C"/>
-                </a:solidFill>
-                <a:latin typeface="Arial"/>
-              </a:rPr>
-              <a:t>T = 0  ·  T = 0.7  ·  T = 1.5
-по 3 запуска каждой
-(для оценки variance)</a:t>
+              <a:t>LLM генерирует вызов → выполняет внешняя система → результат возвращается</a:t>
             </a:r>
           </a:p>
         </p:txBody>
@@ -31891,12 +30471,12 @@
         </p:nvSpPr>
         <p:spPr>
           <a:xfrm>
-            <a:off x="8092440" y="1874519"/>
-            <a:ext cx="3611880" cy="3246120"/>
+            <a:off x="502920" y="4636008"/>
+            <a:ext cx="5486400" cy="2514600"/>
           </a:xfrm>
           <a:prstGeom prst="roundRect">
             <a:avLst>
-              <a:gd name="adj" fmla="val 9389"/>
+              <a:gd name="adj" fmla="val 12121"/>
             </a:avLst>
           </a:prstGeom>
           <a:solidFill>
@@ -31933,7 +30513,7 @@
       </p:sp>
       <p:pic>
         <p:nvPicPr>
-          <p:cNvPr id="15" name="Picture 14" descr="file-text.png"/>
+          <p:cNvPr id="15" name="Picture 14" descr="arrow-right-left.png"/>
           <p:cNvPicPr>
             <a:picLocks noChangeAspect="1"/>
           </p:cNvPicPr>
@@ -31947,7 +30527,7 @@
         </p:blipFill>
         <p:spPr>
           <a:xfrm>
-            <a:off x="9395460" y="2148839"/>
+            <a:off x="731520" y="4956048"/>
             <a:ext cx="1005840" cy="1005840"/>
           </a:xfrm>
           <a:prstGeom prst="rect">
@@ -31963,8 +30543,8 @@
         </p:nvSpPr>
         <p:spPr>
           <a:xfrm>
-            <a:off x="8275320" y="3291839"/>
-            <a:ext cx="3246120" cy="457200"/>
+            <a:off x="1874519" y="4910328"/>
+            <a:ext cx="3977639" cy="548640"/>
           </a:xfrm>
           <a:prstGeom prst="rect">
             <a:avLst/>
@@ -31977,33 +30557,72 @@
           </a:bodyPr>
           <a:lstStyle/>
           <a:p>
-            <a:pPr algn="ctr">
+            <a:pPr algn="l">
               <a:lnSpc>
                 <a:spcPct val="115000"/>
               </a:lnSpc>
             </a:pPr>
             <a:r>
-              <a:rPr sz="2000" b="1" i="0">
+              <a:rPr sz="2100" b="1" i="0">
+                <a:solidFill>
+                  <a:srgbClr val="21295C"/>
+                </a:solidFill>
+                <a:latin typeface="Arial"/>
+              </a:rPr>
+              <a:t>MCP</a:t>
+            </a:r>
+          </a:p>
+        </p:txBody>
+      </p:sp>
+      <p:sp>
+        <p:nvSpPr>
+          <p:cNvPr id="17" name="TextBox 16"/>
+          <p:cNvSpPr txBox="1"/>
+          <p:nvPr/>
+        </p:nvSpPr>
+        <p:spPr>
+          <a:xfrm>
+            <a:off x="1874519" y="5550408"/>
+            <a:ext cx="3977639" cy="365760"/>
+          </a:xfrm>
+          <a:prstGeom prst="rect">
+            <a:avLst/>
+          </a:prstGeom>
+          <a:noFill/>
+        </p:spPr>
+        <p:txBody>
+          <a:bodyPr wrap="square" lIns="0" rIns="0" tIns="0" bIns="0" anchor="t">
+            <a:spAutoFit/>
+          </a:bodyPr>
+          <a:lstStyle/>
+          <a:p>
+            <a:pPr algn="l">
+              <a:lnSpc>
+                <a:spcPct val="115000"/>
+              </a:lnSpc>
+            </a:pPr>
+            <a:r>
+              <a:rPr sz="1400" b="0" i="1">
                 <a:solidFill>
                   <a:srgbClr val="065A82"/>
                 </a:solidFill>
                 <a:latin typeface="Arial"/>
               </a:rPr>
-              <a:t>Шаг 3</a:t>
-            </a:r>
-          </a:p>
-        </p:txBody>
-      </p:sp>
-      <p:sp>
-        <p:nvSpPr>
-          <p:cNvPr id="17" name="TextBox 16"/>
-          <p:cNvSpPr txBox="1"/>
-          <p:nvPr/>
-        </p:nvSpPr>
-        <p:spPr>
-          <a:xfrm>
-            <a:off x="8321040" y="3794760"/>
-            <a:ext cx="3154680" cy="685800"/>
+              <a:t>Model Context Protocol</a:t>
+            </a:r>
+          </a:p>
+        </p:txBody>
+      </p:sp>
+      <p:sp>
+        <p:nvSpPr>
+          <p:cNvPr id="18" name="TextBox 17"/>
+          <p:cNvSpPr txBox="1"/>
+          <p:nvPr/>
+        </p:nvSpPr>
+        <p:spPr>
+          <a:xfrm>
+            <a:off x="777240" y="6144768"/>
+            <a:ext cx="4983480" cy="914400"/>
           </a:xfrm>
           <a:prstGeom prst="rect">
             <a:avLst/>
@@ -32016,58 +30635,19 @@
           </a:bodyPr>
           <a:lstStyle/>
           <a:p>
-            <a:pPr algn="ctr">
-              <a:lnSpc>
-                <a:spcPct val="130000"/>
-              </a:lnSpc>
-            </a:pPr>
-            <a:r>
-              <a:rPr sz="1500" b="1" i="0">
+            <a:pPr algn="l">
+              <a:lnSpc>
+                <a:spcPct val="132000"/>
+              </a:lnSpc>
+            </a:pPr>
+            <a:r>
+              <a:rPr sz="1600" b="0" i="0">
                 <a:solidFill>
                   <a:srgbClr val="21295C"/>
                 </a:solidFill>
                 <a:latin typeface="Arial"/>
               </a:rPr>
-              <a:t>Принесите одностраничный разбор (1 A4).</a:t>
-            </a:r>
-          </a:p>
-        </p:txBody>
-      </p:sp>
-      <p:sp>
-        <p:nvSpPr>
-          <p:cNvPr id="18" name="TextBox 17"/>
-          <p:cNvSpPr txBox="1"/>
-          <p:nvPr/>
-        </p:nvSpPr>
-        <p:spPr>
-          <a:xfrm>
-            <a:off x="8321040" y="4480560"/>
-            <a:ext cx="3154680" cy="594360"/>
-          </a:xfrm>
-          <a:prstGeom prst="rect">
-            <a:avLst/>
-          </a:prstGeom>
-          <a:noFill/>
-        </p:spPr>
-        <p:txBody>
-          <a:bodyPr wrap="square" lIns="0" rIns="0" tIns="0" bIns="0" anchor="t">
-            <a:spAutoFit/>
-          </a:bodyPr>
-          <a:lstStyle/>
-          <a:p>
-            <a:pPr algn="ctr">
-              <a:lnSpc>
-                <a:spcPct val="135000"/>
-              </a:lnSpc>
-            </a:pPr>
-            <a:r>
-              <a:rPr sz="1300" b="0" i="1">
-                <a:solidFill>
-                  <a:srgbClr val="21295C"/>
-                </a:solidFill>
-                <a:latin typeface="Arial"/>
-              </a:rPr>
-              <a:t>Что изменилось / осталось / какую T для production.</a:t>
+              <a:t>Открытый стандарт подключения инструментов (Anthropic, 2024)</a:t>
             </a:r>
           </a:p>
         </p:txBody>
@@ -32080,12 +30660,12 @@
         </p:nvSpPr>
         <p:spPr>
           <a:xfrm>
-            <a:off x="502920" y="5349240"/>
-            <a:ext cx="7680960" cy="1280160"/>
+            <a:off x="6190488" y="4636008"/>
+            <a:ext cx="5486400" cy="2514600"/>
           </a:xfrm>
           <a:prstGeom prst="roundRect">
             <a:avLst>
-              <a:gd name="adj" fmla="val 23809"/>
+              <a:gd name="adj" fmla="val 12121"/>
             </a:avLst>
           </a:prstGeom>
           <a:solidFill>
@@ -32120,16 +30700,40 @@
           </a:p>
         </p:txBody>
       </p:sp>
-      <p:sp>
-        <p:nvSpPr>
-          <p:cNvPr id="20" name="TextBox 19"/>
-          <p:cNvSpPr txBox="1"/>
-          <p:nvPr/>
-        </p:nvSpPr>
-        <p:spPr>
-          <a:xfrm>
-            <a:off x="685800" y="5477255"/>
-            <a:ext cx="7315200" cy="365760"/>
+      <p:pic>
+        <p:nvPicPr>
+          <p:cNvPr id="20" name="Picture 19" descr="repeat-2.png"/>
+          <p:cNvPicPr>
+            <a:picLocks noChangeAspect="1"/>
+          </p:cNvPicPr>
+          <p:nvPr/>
+        </p:nvPicPr>
+        <p:blipFill>
+          <a:blip r:embed="rId5"/>
+          <a:stretch>
+            <a:fillRect/>
+          </a:stretch>
+        </p:blipFill>
+        <p:spPr>
+          <a:xfrm>
+            <a:off x="6419088" y="4956048"/>
+            <a:ext cx="1005840" cy="1005840"/>
+          </a:xfrm>
+          <a:prstGeom prst="rect">
+            <a:avLst/>
+          </a:prstGeom>
+        </p:spPr>
+      </p:pic>
+      <p:sp>
+        <p:nvSpPr>
+          <p:cNvPr id="21" name="TextBox 20"/>
+          <p:cNvSpPr txBox="1"/>
+          <p:nvPr/>
+        </p:nvSpPr>
+        <p:spPr>
+          <a:xfrm>
+            <a:off x="7562088" y="4910328"/>
+            <a:ext cx="3977639" cy="548640"/>
           </a:xfrm>
           <a:prstGeom prst="rect">
             <a:avLst/>
@@ -32148,27 +30752,66 @@
               </a:lnSpc>
             </a:pPr>
             <a:r>
-              <a:rPr sz="1500" b="1" i="0">
+              <a:rPr sz="2100" b="1" i="0">
+                <a:solidFill>
+                  <a:srgbClr val="21295C"/>
+                </a:solidFill>
+                <a:latin typeface="Arial"/>
+              </a:rPr>
+              <a:t>Цикл агента</a:t>
+            </a:r>
+          </a:p>
+        </p:txBody>
+      </p:sp>
+      <p:sp>
+        <p:nvSpPr>
+          <p:cNvPr id="22" name="TextBox 21"/>
+          <p:cNvSpPr txBox="1"/>
+          <p:nvPr/>
+        </p:nvSpPr>
+        <p:spPr>
+          <a:xfrm>
+            <a:off x="7562088" y="5550408"/>
+            <a:ext cx="3977639" cy="365760"/>
+          </a:xfrm>
+          <a:prstGeom prst="rect">
+            <a:avLst/>
+          </a:prstGeom>
+          <a:noFill/>
+        </p:spPr>
+        <p:txBody>
+          <a:bodyPr wrap="square" lIns="0" rIns="0" tIns="0" bIns="0" anchor="t">
+            <a:spAutoFit/>
+          </a:bodyPr>
+          <a:lstStyle/>
+          <a:p>
+            <a:pPr algn="l">
+              <a:lnSpc>
+                <a:spcPct val="115000"/>
+              </a:lnSpc>
+            </a:pPr>
+            <a:r>
+              <a:rPr sz="1400" b="0" i="1">
                 <a:solidFill>
                   <a:srgbClr val="065A82"/>
                 </a:solidFill>
                 <a:latin typeface="Arial"/>
               </a:rPr>
-              <a:t>Playground:  Hugging Face Inference Playground</a:t>
-            </a:r>
-          </a:p>
-        </p:txBody>
-      </p:sp>
-      <p:sp>
-        <p:nvSpPr>
-          <p:cNvPr id="21" name="TextBox 20"/>
-          <p:cNvSpPr txBox="1"/>
-          <p:nvPr/>
-        </p:nvSpPr>
-        <p:spPr>
-          <a:xfrm>
-            <a:off x="685800" y="5879592"/>
-            <a:ext cx="7315200" cy="365760"/>
+              <a:t>действуй → наблюдай → корректируй</a:t>
+            </a:r>
+          </a:p>
+        </p:txBody>
+      </p:sp>
+      <p:sp>
+        <p:nvSpPr>
+          <p:cNvPr id="23" name="TextBox 22"/>
+          <p:cNvSpPr txBox="1"/>
+          <p:nvPr/>
+        </p:nvSpPr>
+        <p:spPr>
+          <a:xfrm>
+            <a:off x="6464807" y="6144768"/>
+            <a:ext cx="4983480" cy="914400"/>
           </a:xfrm>
           <a:prstGeom prst="rect">
             <a:avLst/>
@@ -32183,182 +30826,17 @@
           <a:p>
             <a:pPr algn="l">
               <a:lnSpc>
-                <a:spcPct val="115000"/>
-              </a:lnSpc>
-            </a:pPr>
-            <a:r>
-              <a:rPr sz="1300" b="0" i="0">
+                <a:spcPct val="132000"/>
+              </a:lnSpc>
+            </a:pPr>
+            <a:r>
+              <a:rPr sz="1600" b="0" i="0">
                 <a:solidFill>
                   <a:srgbClr val="21295C"/>
                 </a:solidFill>
                 <a:latin typeface="Arial"/>
               </a:rPr>
-              <a:t>Модель: Meta-Llama-3-8B-Instruct (apples-to-apples)</a:t>
-            </a:r>
-          </a:p>
-        </p:txBody>
-      </p:sp>
-      <p:sp>
-        <p:nvSpPr>
-          <p:cNvPr id="22" name="TextBox 21"/>
-          <p:cNvSpPr txBox="1"/>
-          <p:nvPr/>
-        </p:nvSpPr>
-        <p:spPr>
-          <a:xfrm>
-            <a:off x="685800" y="6263640"/>
-            <a:ext cx="7315200" cy="320040"/>
-          </a:xfrm>
-          <a:prstGeom prst="rect">
-            <a:avLst/>
-          </a:prstGeom>
-          <a:noFill/>
-        </p:spPr>
-        <p:txBody>
-          <a:bodyPr wrap="square" lIns="0" rIns="0" tIns="0" bIns="0" anchor="t">
-            <a:spAutoFit/>
-          </a:bodyPr>
-          <a:lstStyle/>
-          <a:p>
-            <a:pPr algn="l">
-              <a:lnSpc>
-                <a:spcPct val="115000"/>
-              </a:lnSpc>
-            </a:pPr>
-            <a:r>
-              <a:rPr sz="1200" b="0" i="1">
-                <a:solidFill>
-                  <a:srgbClr val="1C7293"/>
-                </a:solidFill>
-                <a:latin typeface="Arial"/>
-              </a:rPr>
-              <a:t>Fallback: Together.ai / Ollama локально   ·   НЕ подойдут: ChatGPT Free, Claude.ai</a:t>
-            </a:r>
-          </a:p>
-        </p:txBody>
-      </p:sp>
-      <p:sp>
-        <p:nvSpPr>
-          <p:cNvPr id="23" name="Rounded Rectangle 22"/>
-          <p:cNvSpPr/>
-          <p:nvPr/>
-        </p:nvSpPr>
-        <p:spPr>
-          <a:xfrm>
-            <a:off x="8366760" y="5349240"/>
-            <a:ext cx="3383280" cy="1280160"/>
-          </a:xfrm>
-          <a:prstGeom prst="roundRect">
-            <a:avLst>
-              <a:gd name="adj" fmla="val 12000"/>
-            </a:avLst>
-          </a:prstGeom>
-          <a:solidFill>
-            <a:srgbClr val="FEF5E0"/>
-          </a:solidFill>
-          <a:ln w="25400">
-            <a:solidFill>
-              <a:srgbClr val="F0AB00"/>
-            </a:solidFill>
-          </a:ln>
-          <a:effectLst/>
-        </p:spPr>
-        <p:style>
-          <a:lnRef idx="1">
-            <a:schemeClr val="accent1"/>
-          </a:lnRef>
-          <a:fillRef idx="3">
-            <a:schemeClr val="accent1"/>
-          </a:fillRef>
-          <a:effectRef idx="2">
-            <a:schemeClr val="accent1"/>
-          </a:effectRef>
-          <a:fontRef idx="minor">
-            <a:schemeClr val="lt1"/>
-          </a:fontRef>
-        </p:style>
-        <p:txBody>
-          <a:bodyPr rtlCol="0" anchor="ctr"/>
-          <a:lstStyle/>
-          <a:p>
-            <a:pPr algn="ctr"/>
-          </a:p>
-        </p:txBody>
-      </p:sp>
-      <p:sp>
-        <p:nvSpPr>
-          <p:cNvPr id="24" name="TextBox 23"/>
-          <p:cNvSpPr txBox="1"/>
-          <p:nvPr/>
-        </p:nvSpPr>
-        <p:spPr>
-          <a:xfrm>
-            <a:off x="8503920" y="5458968"/>
-            <a:ext cx="3200400" cy="365760"/>
-          </a:xfrm>
-          <a:prstGeom prst="rect">
-            <a:avLst/>
-          </a:prstGeom>
-          <a:noFill/>
-        </p:spPr>
-        <p:txBody>
-          <a:bodyPr wrap="square" lIns="0" rIns="0" tIns="0" bIns="0" anchor="t">
-            <a:spAutoFit/>
-          </a:bodyPr>
-          <a:lstStyle/>
-          <a:p>
-            <a:pPr algn="l">
-              <a:lnSpc>
-                <a:spcPct val="115000"/>
-              </a:lnSpc>
-            </a:pPr>
-            <a:r>
-              <a:rPr sz="1600" b="1" i="0">
-                <a:solidFill>
-                  <a:srgbClr val="21295C"/>
-                </a:solidFill>
-                <a:latin typeface="Arial"/>
-              </a:rPr>
-              <a:t>БОНУС</a:t>
-            </a:r>
-          </a:p>
-        </p:txBody>
-      </p:sp>
-      <p:sp>
-        <p:nvSpPr>
-          <p:cNvPr id="25" name="TextBox 24"/>
-          <p:cNvSpPr txBox="1"/>
-          <p:nvPr/>
-        </p:nvSpPr>
-        <p:spPr>
-          <a:xfrm>
-            <a:off x="8503920" y="5843016"/>
-            <a:ext cx="3200400" cy="731520"/>
-          </a:xfrm>
-          <a:prstGeom prst="rect">
-            <a:avLst/>
-          </a:prstGeom>
-          <a:noFill/>
-        </p:spPr>
-        <p:txBody>
-          <a:bodyPr wrap="square" lIns="0" rIns="0" tIns="0" bIns="0" anchor="t">
-            <a:spAutoFit/>
-          </a:bodyPr>
-          <a:lstStyle/>
-          <a:p>
-            <a:pPr algn="l">
-              <a:lnSpc>
-                <a:spcPct val="130000"/>
-              </a:lnSpc>
-            </a:pPr>
-            <a:r>
-              <a:rPr sz="1200" b="0" i="1">
-                <a:solidFill>
-                  <a:srgbClr val="21295C"/>
-                </a:solidFill>
-                <a:latin typeface="Arial"/>
-              </a:rPr>
-              <a:t>«Сколько р в "строгая регуляризация"» × 3 модели. Объяснить через токенизацию.</a:t>
+              <a:t>Модель решает действие, видит результат, корректирует план</a:t>
             </a:r>
           </a:p>
         </p:txBody>
@@ -32374,862 +30852,10 @@
 <file path=ppt/slides/slide35.xml><?xml version="1.0" encoding="utf-8"?>
 <p:sld xmlns:a="http://schemas.openxmlformats.org/drawingml/2006/main" xmlns:p="http://schemas.openxmlformats.org/presentationml/2006/main" xmlns:r="http://schemas.openxmlformats.org/officeDocument/2006/relationships">
   <p:cSld>
-    <p:spTree>
-      <p:nvGrpSpPr>
-        <p:cNvPr id="1" name=""/>
-        <p:cNvGrpSpPr/>
-        <p:nvPr/>
-      </p:nvGrpSpPr>
-      <p:grpSpPr/>
-      <p:sp>
-        <p:nvSpPr>
-          <p:cNvPr id="2" name="TextBox 1"/>
-          <p:cNvSpPr txBox="1"/>
-          <p:nvPr/>
-        </p:nvSpPr>
-        <p:spPr>
-          <a:xfrm>
-            <a:off x="502920" y="502920"/>
-            <a:ext cx="11247120" cy="960120"/>
-          </a:xfrm>
-          <a:prstGeom prst="rect">
-            <a:avLst/>
-          </a:prstGeom>
-          <a:noFill/>
-        </p:spPr>
-        <p:txBody>
-          <a:bodyPr wrap="square" lIns="0" rIns="0" tIns="0" bIns="0" anchor="t">
-            <a:spAutoFit/>
-          </a:bodyPr>
-          <a:lstStyle/>
-          <a:p>
-            <a:pPr algn="l">
-              <a:lnSpc>
-                <a:spcPct val="118000"/>
-              </a:lnSpc>
-            </a:pPr>
-            <a:r>
-              <a:rPr sz="2400" b="1" i="0">
-                <a:solidFill>
-                  <a:srgbClr val="21295C"/>
-                </a:solidFill>
-                <a:latin typeface="Arial"/>
-              </a:rPr>
-              <a:t>Лекция 3:  «Агенты, RAG, API — как AI выходит за пределы чата»</a:t>
-            </a:r>
-          </a:p>
-        </p:txBody>
-      </p:sp>
-      <p:sp>
-        <p:nvSpPr>
-          <p:cNvPr id="3" name="TextBox 2"/>
-          <p:cNvSpPr txBox="1"/>
-          <p:nvPr/>
-        </p:nvSpPr>
-        <p:spPr>
-          <a:xfrm>
-            <a:off x="502920" y="1325880"/>
-            <a:ext cx="11247120" cy="365760"/>
-          </a:xfrm>
-          <a:prstGeom prst="rect">
-            <a:avLst/>
-          </a:prstGeom>
-          <a:noFill/>
-        </p:spPr>
-        <p:txBody>
-          <a:bodyPr wrap="square" lIns="0" rIns="0" tIns="0" bIns="0" anchor="t">
-            <a:spAutoFit/>
-          </a:bodyPr>
-          <a:lstStyle/>
-          <a:p>
-            <a:pPr algn="l">
-              <a:lnSpc>
-                <a:spcPct val="115000"/>
-              </a:lnSpc>
-            </a:pPr>
-            <a:r>
-              <a:rPr sz="1600" b="0" i="1">
-                <a:solidFill>
-                  <a:srgbClr val="065A82"/>
-                </a:solidFill>
-                <a:latin typeface="Arial"/>
-              </a:rPr>
-              <a:t>Все 4 концепции надстраиваются над одним проходом inference</a:t>
-            </a:r>
-          </a:p>
-        </p:txBody>
-      </p:sp>
-      <p:sp>
-        <p:nvSpPr>
-          <p:cNvPr id="4" name="Rounded Rectangle 3"/>
-          <p:cNvSpPr/>
-          <p:nvPr/>
-        </p:nvSpPr>
-        <p:spPr>
-          <a:xfrm>
-            <a:off x="502920" y="1920240"/>
-            <a:ext cx="5486400" cy="2514600"/>
-          </a:xfrm>
-          <a:prstGeom prst="roundRect">
-            <a:avLst>
-              <a:gd name="adj" fmla="val 12121"/>
-            </a:avLst>
-          </a:prstGeom>
-          <a:solidFill>
-            <a:srgbClr val="FEF5E0"/>
-          </a:solidFill>
-          <a:ln w="25400">
-            <a:solidFill>
-              <a:srgbClr val="F0AB00"/>
-            </a:solidFill>
-          </a:ln>
-          <a:effectLst/>
-        </p:spPr>
-        <p:style>
-          <a:lnRef idx="1">
-            <a:schemeClr val="accent1"/>
-          </a:lnRef>
-          <a:fillRef idx="3">
-            <a:schemeClr val="accent1"/>
-          </a:fillRef>
-          <a:effectRef idx="2">
-            <a:schemeClr val="accent1"/>
-          </a:effectRef>
-          <a:fontRef idx="minor">
-            <a:schemeClr val="lt1"/>
-          </a:fontRef>
-        </p:style>
-        <p:txBody>
-          <a:bodyPr rtlCol="0" anchor="ctr"/>
-          <a:lstStyle/>
-          <a:p>
-            <a:pPr algn="ctr"/>
-          </a:p>
-        </p:txBody>
-      </p:sp>
-      <p:pic>
-        <p:nvPicPr>
-          <p:cNvPr id="5" name="Picture 4" descr="search-check.png"/>
-          <p:cNvPicPr>
-            <a:picLocks noChangeAspect="1"/>
-          </p:cNvPicPr>
-          <p:nvPr/>
-        </p:nvPicPr>
-        <p:blipFill>
-          <a:blip r:embed="rId2"/>
-          <a:stretch>
-            <a:fillRect/>
-          </a:stretch>
-        </p:blipFill>
-        <p:spPr>
-          <a:xfrm>
-            <a:off x="731520" y="2240280"/>
-            <a:ext cx="1005840" cy="1005840"/>
-          </a:xfrm>
-          <a:prstGeom prst="rect">
-            <a:avLst/>
-          </a:prstGeom>
-        </p:spPr>
-      </p:pic>
-      <p:sp>
-        <p:nvSpPr>
-          <p:cNvPr id="6" name="TextBox 5"/>
-          <p:cNvSpPr txBox="1"/>
-          <p:nvPr/>
-        </p:nvSpPr>
-        <p:spPr>
-          <a:xfrm>
-            <a:off x="1874519" y="2194560"/>
-            <a:ext cx="3977639" cy="548640"/>
-          </a:xfrm>
-          <a:prstGeom prst="rect">
-            <a:avLst/>
-          </a:prstGeom>
-          <a:noFill/>
-        </p:spPr>
-        <p:txBody>
-          <a:bodyPr wrap="square" lIns="0" rIns="0" tIns="0" bIns="0" anchor="t">
-            <a:spAutoFit/>
-          </a:bodyPr>
-          <a:lstStyle/>
-          <a:p>
-            <a:pPr algn="l">
-              <a:lnSpc>
-                <a:spcPct val="115000"/>
-              </a:lnSpc>
-            </a:pPr>
-            <a:r>
-              <a:rPr sz="2100" b="1" i="0">
-                <a:solidFill>
-                  <a:srgbClr val="21295C"/>
-                </a:solidFill>
-                <a:latin typeface="Arial"/>
-              </a:rPr>
-              <a:t>RAG</a:t>
-            </a:r>
-          </a:p>
-        </p:txBody>
-      </p:sp>
-      <p:sp>
-        <p:nvSpPr>
-          <p:cNvPr id="7" name="TextBox 6"/>
-          <p:cNvSpPr txBox="1"/>
-          <p:nvPr/>
-        </p:nvSpPr>
-        <p:spPr>
-          <a:xfrm>
-            <a:off x="1874519" y="2834640"/>
-            <a:ext cx="3977639" cy="365760"/>
-          </a:xfrm>
-          <a:prstGeom prst="rect">
-            <a:avLst/>
-          </a:prstGeom>
-          <a:noFill/>
-        </p:spPr>
-        <p:txBody>
-          <a:bodyPr wrap="square" lIns="0" rIns="0" tIns="0" bIns="0" anchor="t">
-            <a:spAutoFit/>
-          </a:bodyPr>
-          <a:lstStyle/>
-          <a:p>
-            <a:pPr algn="l">
-              <a:lnSpc>
-                <a:spcPct val="115000"/>
-              </a:lnSpc>
-            </a:pPr>
-            <a:r>
-              <a:rPr sz="1400" b="0" i="1">
-                <a:solidFill>
-                  <a:srgbClr val="065A82"/>
-                </a:solidFill>
-                <a:latin typeface="Arial"/>
-              </a:rPr>
-              <a:t>Retrieval-Augmented Generation</a:t>
-            </a:r>
-          </a:p>
-        </p:txBody>
-      </p:sp>
-      <p:sp>
-        <p:nvSpPr>
-          <p:cNvPr id="8" name="TextBox 7"/>
-          <p:cNvSpPr txBox="1"/>
-          <p:nvPr/>
-        </p:nvSpPr>
-        <p:spPr>
-          <a:xfrm>
-            <a:off x="777240" y="3429000"/>
-            <a:ext cx="4983480" cy="914400"/>
-          </a:xfrm>
-          <a:prstGeom prst="rect">
-            <a:avLst/>
-          </a:prstGeom>
-          <a:noFill/>
-        </p:spPr>
-        <p:txBody>
-          <a:bodyPr wrap="square" lIns="0" rIns="0" tIns="0" bIns="0" anchor="t">
-            <a:spAutoFit/>
-          </a:bodyPr>
-          <a:lstStyle/>
-          <a:p>
-            <a:pPr algn="l">
-              <a:lnSpc>
-                <a:spcPct val="132000"/>
-              </a:lnSpc>
-            </a:pPr>
-            <a:r>
-              <a:rPr sz="1600" b="0" i="0">
-                <a:solidFill>
-                  <a:srgbClr val="21295C"/>
-                </a:solidFill>
-                <a:latin typeface="Arial"/>
-              </a:rPr>
-              <a:t>близость эмбеддингов + LLM → ответ из вашей базы</a:t>
-            </a:r>
-          </a:p>
-        </p:txBody>
-      </p:sp>
-      <p:sp>
-        <p:nvSpPr>
-          <p:cNvPr id="9" name="Rounded Rectangle 8"/>
-          <p:cNvSpPr/>
-          <p:nvPr/>
-        </p:nvSpPr>
-        <p:spPr>
-          <a:xfrm>
-            <a:off x="6190488" y="1920240"/>
-            <a:ext cx="5486400" cy="2514600"/>
-          </a:xfrm>
-          <a:prstGeom prst="roundRect">
-            <a:avLst>
-              <a:gd name="adj" fmla="val 12121"/>
-            </a:avLst>
-          </a:prstGeom>
-          <a:solidFill>
-            <a:srgbClr val="F4F7FA"/>
-          </a:solidFill>
-          <a:ln w="19050">
-            <a:solidFill>
-              <a:srgbClr val="1C7293"/>
-            </a:solidFill>
-          </a:ln>
-          <a:effectLst/>
-        </p:spPr>
-        <p:style>
-          <a:lnRef idx="1">
-            <a:schemeClr val="accent1"/>
-          </a:lnRef>
-          <a:fillRef idx="3">
-            <a:schemeClr val="accent1"/>
-          </a:fillRef>
-          <a:effectRef idx="2">
-            <a:schemeClr val="accent1"/>
-          </a:effectRef>
-          <a:fontRef idx="minor">
-            <a:schemeClr val="lt1"/>
-          </a:fontRef>
-        </p:style>
-        <p:txBody>
-          <a:bodyPr rtlCol="0" anchor="ctr"/>
-          <a:lstStyle/>
-          <a:p>
-            <a:pPr algn="ctr"/>
-          </a:p>
-        </p:txBody>
-      </p:sp>
-      <p:pic>
-        <p:nvPicPr>
-          <p:cNvPr id="10" name="Picture 9" descr="workflow.png"/>
-          <p:cNvPicPr>
-            <a:picLocks noChangeAspect="1"/>
-          </p:cNvPicPr>
-          <p:nvPr/>
-        </p:nvPicPr>
-        <p:blipFill>
-          <a:blip r:embed="rId3"/>
-          <a:stretch>
-            <a:fillRect/>
-          </a:stretch>
-        </p:blipFill>
-        <p:spPr>
-          <a:xfrm>
-            <a:off x="6419088" y="2240280"/>
-            <a:ext cx="1005840" cy="1005840"/>
-          </a:xfrm>
-          <a:prstGeom prst="rect">
-            <a:avLst/>
-          </a:prstGeom>
-        </p:spPr>
-      </p:pic>
-      <p:sp>
-        <p:nvSpPr>
-          <p:cNvPr id="11" name="TextBox 10"/>
-          <p:cNvSpPr txBox="1"/>
-          <p:nvPr/>
-        </p:nvSpPr>
-        <p:spPr>
-          <a:xfrm>
-            <a:off x="7562088" y="2194560"/>
-            <a:ext cx="3977639" cy="548640"/>
-          </a:xfrm>
-          <a:prstGeom prst="rect">
-            <a:avLst/>
-          </a:prstGeom>
-          <a:noFill/>
-        </p:spPr>
-        <p:txBody>
-          <a:bodyPr wrap="square" lIns="0" rIns="0" tIns="0" bIns="0" anchor="t">
-            <a:spAutoFit/>
-          </a:bodyPr>
-          <a:lstStyle/>
-          <a:p>
-            <a:pPr algn="l">
-              <a:lnSpc>
-                <a:spcPct val="115000"/>
-              </a:lnSpc>
-            </a:pPr>
-            <a:r>
-              <a:rPr sz="2100" b="1" i="0">
-                <a:solidFill>
-                  <a:srgbClr val="21295C"/>
-                </a:solidFill>
-                <a:latin typeface="Arial"/>
-              </a:rPr>
-              <a:t>Инструменты / Вызов функций</a:t>
-            </a:r>
-          </a:p>
-        </p:txBody>
-      </p:sp>
-      <p:sp>
-        <p:nvSpPr>
-          <p:cNvPr id="12" name="TextBox 11"/>
-          <p:cNvSpPr txBox="1"/>
-          <p:nvPr/>
-        </p:nvSpPr>
-        <p:spPr>
-          <a:xfrm>
-            <a:off x="7562088" y="2834640"/>
-            <a:ext cx="3977639" cy="365760"/>
-          </a:xfrm>
-          <a:prstGeom prst="rect">
-            <a:avLst/>
-          </a:prstGeom>
-          <a:noFill/>
-        </p:spPr>
-        <p:txBody>
-          <a:bodyPr wrap="square" lIns="0" rIns="0" tIns="0" bIns="0" anchor="t">
-            <a:spAutoFit/>
-          </a:bodyPr>
-          <a:lstStyle/>
-          <a:p>
-            <a:pPr algn="l">
-              <a:lnSpc>
-                <a:spcPct val="115000"/>
-              </a:lnSpc>
-            </a:pPr>
-            <a:r>
-              <a:rPr sz="1400" b="0" i="1">
-                <a:solidFill>
-                  <a:srgbClr val="065A82"/>
-                </a:solidFill>
-                <a:latin typeface="Arial"/>
-              </a:rPr>
-              <a:t>структурированный JSON</a:t>
-            </a:r>
-          </a:p>
-        </p:txBody>
-      </p:sp>
-      <p:sp>
-        <p:nvSpPr>
-          <p:cNvPr id="13" name="TextBox 12"/>
-          <p:cNvSpPr txBox="1"/>
-          <p:nvPr/>
-        </p:nvSpPr>
-        <p:spPr>
-          <a:xfrm>
-            <a:off x="6464807" y="3429000"/>
-            <a:ext cx="4983480" cy="914400"/>
-          </a:xfrm>
-          <a:prstGeom prst="rect">
-            <a:avLst/>
-          </a:prstGeom>
-          <a:noFill/>
-        </p:spPr>
-        <p:txBody>
-          <a:bodyPr wrap="square" lIns="0" rIns="0" tIns="0" bIns="0" anchor="t">
-            <a:spAutoFit/>
-          </a:bodyPr>
-          <a:lstStyle/>
-          <a:p>
-            <a:pPr algn="l">
-              <a:lnSpc>
-                <a:spcPct val="132000"/>
-              </a:lnSpc>
-            </a:pPr>
-            <a:r>
-              <a:rPr sz="1600" b="0" i="0">
-                <a:solidFill>
-                  <a:srgbClr val="21295C"/>
-                </a:solidFill>
-                <a:latin typeface="Arial"/>
-              </a:rPr>
-              <a:t>LLM генерирует вызов → выполняет внешняя система → результат возвращается</a:t>
-            </a:r>
-          </a:p>
-        </p:txBody>
-      </p:sp>
-      <p:sp>
-        <p:nvSpPr>
-          <p:cNvPr id="14" name="Rounded Rectangle 13"/>
-          <p:cNvSpPr/>
-          <p:nvPr/>
-        </p:nvSpPr>
-        <p:spPr>
-          <a:xfrm>
-            <a:off x="502920" y="4636008"/>
-            <a:ext cx="5486400" cy="2514600"/>
-          </a:xfrm>
-          <a:prstGeom prst="roundRect">
-            <a:avLst>
-              <a:gd name="adj" fmla="val 12121"/>
-            </a:avLst>
-          </a:prstGeom>
-          <a:solidFill>
-            <a:srgbClr val="F4F7FA"/>
-          </a:solidFill>
-          <a:ln w="19050">
-            <a:solidFill>
-              <a:srgbClr val="1C7293"/>
-            </a:solidFill>
-          </a:ln>
-          <a:effectLst/>
-        </p:spPr>
-        <p:style>
-          <a:lnRef idx="1">
-            <a:schemeClr val="accent1"/>
-          </a:lnRef>
-          <a:fillRef idx="3">
-            <a:schemeClr val="accent1"/>
-          </a:fillRef>
-          <a:effectRef idx="2">
-            <a:schemeClr val="accent1"/>
-          </a:effectRef>
-          <a:fontRef idx="minor">
-            <a:schemeClr val="lt1"/>
-          </a:fontRef>
-        </p:style>
-        <p:txBody>
-          <a:bodyPr rtlCol="0" anchor="ctr"/>
-          <a:lstStyle/>
-          <a:p>
-            <a:pPr algn="ctr"/>
-          </a:p>
-        </p:txBody>
-      </p:sp>
-      <p:pic>
-        <p:nvPicPr>
-          <p:cNvPr id="15" name="Picture 14" descr="arrow-right-left.png"/>
-          <p:cNvPicPr>
-            <a:picLocks noChangeAspect="1"/>
-          </p:cNvPicPr>
-          <p:nvPr/>
-        </p:nvPicPr>
-        <p:blipFill>
-          <a:blip r:embed="rId4"/>
-          <a:stretch>
-            <a:fillRect/>
-          </a:stretch>
-        </p:blipFill>
-        <p:spPr>
-          <a:xfrm>
-            <a:off x="731520" y="4956048"/>
-            <a:ext cx="1005840" cy="1005840"/>
-          </a:xfrm>
-          <a:prstGeom prst="rect">
-            <a:avLst/>
-          </a:prstGeom>
-        </p:spPr>
-      </p:pic>
-      <p:sp>
-        <p:nvSpPr>
-          <p:cNvPr id="16" name="TextBox 15"/>
-          <p:cNvSpPr txBox="1"/>
-          <p:nvPr/>
-        </p:nvSpPr>
-        <p:spPr>
-          <a:xfrm>
-            <a:off x="1874519" y="4910328"/>
-            <a:ext cx="3977639" cy="548640"/>
-          </a:xfrm>
-          <a:prstGeom prst="rect">
-            <a:avLst/>
-          </a:prstGeom>
-          <a:noFill/>
-        </p:spPr>
-        <p:txBody>
-          <a:bodyPr wrap="square" lIns="0" rIns="0" tIns="0" bIns="0" anchor="t">
-            <a:spAutoFit/>
-          </a:bodyPr>
-          <a:lstStyle/>
-          <a:p>
-            <a:pPr algn="l">
-              <a:lnSpc>
-                <a:spcPct val="115000"/>
-              </a:lnSpc>
-            </a:pPr>
-            <a:r>
-              <a:rPr sz="2100" b="1" i="0">
-                <a:solidFill>
-                  <a:srgbClr val="21295C"/>
-                </a:solidFill>
-                <a:latin typeface="Arial"/>
-              </a:rPr>
-              <a:t>MCP</a:t>
-            </a:r>
-          </a:p>
-        </p:txBody>
-      </p:sp>
-      <p:sp>
-        <p:nvSpPr>
-          <p:cNvPr id="17" name="TextBox 16"/>
-          <p:cNvSpPr txBox="1"/>
-          <p:nvPr/>
-        </p:nvSpPr>
-        <p:spPr>
-          <a:xfrm>
-            <a:off x="1874519" y="5550408"/>
-            <a:ext cx="3977639" cy="365760"/>
-          </a:xfrm>
-          <a:prstGeom prst="rect">
-            <a:avLst/>
-          </a:prstGeom>
-          <a:noFill/>
-        </p:spPr>
-        <p:txBody>
-          <a:bodyPr wrap="square" lIns="0" rIns="0" tIns="0" bIns="0" anchor="t">
-            <a:spAutoFit/>
-          </a:bodyPr>
-          <a:lstStyle/>
-          <a:p>
-            <a:pPr algn="l">
-              <a:lnSpc>
-                <a:spcPct val="115000"/>
-              </a:lnSpc>
-            </a:pPr>
-            <a:r>
-              <a:rPr sz="1400" b="0" i="1">
-                <a:solidFill>
-                  <a:srgbClr val="065A82"/>
-                </a:solidFill>
-                <a:latin typeface="Arial"/>
-              </a:rPr>
-              <a:t>Model Context Protocol</a:t>
-            </a:r>
-          </a:p>
-        </p:txBody>
-      </p:sp>
-      <p:sp>
-        <p:nvSpPr>
-          <p:cNvPr id="18" name="TextBox 17"/>
-          <p:cNvSpPr txBox="1"/>
-          <p:nvPr/>
-        </p:nvSpPr>
-        <p:spPr>
-          <a:xfrm>
-            <a:off x="777240" y="6144768"/>
-            <a:ext cx="4983480" cy="914400"/>
-          </a:xfrm>
-          <a:prstGeom prst="rect">
-            <a:avLst/>
-          </a:prstGeom>
-          <a:noFill/>
-        </p:spPr>
-        <p:txBody>
-          <a:bodyPr wrap="square" lIns="0" rIns="0" tIns="0" bIns="0" anchor="t">
-            <a:spAutoFit/>
-          </a:bodyPr>
-          <a:lstStyle/>
-          <a:p>
-            <a:pPr algn="l">
-              <a:lnSpc>
-                <a:spcPct val="132000"/>
-              </a:lnSpc>
-            </a:pPr>
-            <a:r>
-              <a:rPr sz="1600" b="0" i="0">
-                <a:solidFill>
-                  <a:srgbClr val="21295C"/>
-                </a:solidFill>
-                <a:latin typeface="Arial"/>
-              </a:rPr>
-              <a:t>Открытый стандарт подключения инструментов (Anthropic, 2024)</a:t>
-            </a:r>
-          </a:p>
-        </p:txBody>
-      </p:sp>
-      <p:sp>
-        <p:nvSpPr>
-          <p:cNvPr id="19" name="Rounded Rectangle 18"/>
-          <p:cNvSpPr/>
-          <p:nvPr/>
-        </p:nvSpPr>
-        <p:spPr>
-          <a:xfrm>
-            <a:off x="6190488" y="4636008"/>
-            <a:ext cx="5486400" cy="2514600"/>
-          </a:xfrm>
-          <a:prstGeom prst="roundRect">
-            <a:avLst>
-              <a:gd name="adj" fmla="val 12121"/>
-            </a:avLst>
-          </a:prstGeom>
-          <a:solidFill>
-            <a:srgbClr val="F4F7FA"/>
-          </a:solidFill>
-          <a:ln w="19050">
-            <a:solidFill>
-              <a:srgbClr val="1C7293"/>
-            </a:solidFill>
-          </a:ln>
-          <a:effectLst/>
-        </p:spPr>
-        <p:style>
-          <a:lnRef idx="1">
-            <a:schemeClr val="accent1"/>
-          </a:lnRef>
-          <a:fillRef idx="3">
-            <a:schemeClr val="accent1"/>
-          </a:fillRef>
-          <a:effectRef idx="2">
-            <a:schemeClr val="accent1"/>
-          </a:effectRef>
-          <a:fontRef idx="minor">
-            <a:schemeClr val="lt1"/>
-          </a:fontRef>
-        </p:style>
-        <p:txBody>
-          <a:bodyPr rtlCol="0" anchor="ctr"/>
-          <a:lstStyle/>
-          <a:p>
-            <a:pPr algn="ctr"/>
-          </a:p>
-        </p:txBody>
-      </p:sp>
-      <p:pic>
-        <p:nvPicPr>
-          <p:cNvPr id="20" name="Picture 19" descr="repeat-2.png"/>
-          <p:cNvPicPr>
-            <a:picLocks noChangeAspect="1"/>
-          </p:cNvPicPr>
-          <p:nvPr/>
-        </p:nvPicPr>
-        <p:blipFill>
-          <a:blip r:embed="rId5"/>
-          <a:stretch>
-            <a:fillRect/>
-          </a:stretch>
-        </p:blipFill>
-        <p:spPr>
-          <a:xfrm>
-            <a:off x="6419088" y="4956048"/>
-            <a:ext cx="1005840" cy="1005840"/>
-          </a:xfrm>
-          <a:prstGeom prst="rect">
-            <a:avLst/>
-          </a:prstGeom>
-        </p:spPr>
-      </p:pic>
-      <p:sp>
-        <p:nvSpPr>
-          <p:cNvPr id="21" name="TextBox 20"/>
-          <p:cNvSpPr txBox="1"/>
-          <p:nvPr/>
-        </p:nvSpPr>
-        <p:spPr>
-          <a:xfrm>
-            <a:off x="7562088" y="4910328"/>
-            <a:ext cx="3977639" cy="548640"/>
-          </a:xfrm>
-          <a:prstGeom prst="rect">
-            <a:avLst/>
-          </a:prstGeom>
-          <a:noFill/>
-        </p:spPr>
-        <p:txBody>
-          <a:bodyPr wrap="square" lIns="0" rIns="0" tIns="0" bIns="0" anchor="t">
-            <a:spAutoFit/>
-          </a:bodyPr>
-          <a:lstStyle/>
-          <a:p>
-            <a:pPr algn="l">
-              <a:lnSpc>
-                <a:spcPct val="115000"/>
-              </a:lnSpc>
-            </a:pPr>
-            <a:r>
-              <a:rPr sz="2100" b="1" i="0">
-                <a:solidFill>
-                  <a:srgbClr val="21295C"/>
-                </a:solidFill>
-                <a:latin typeface="Arial"/>
-              </a:rPr>
-              <a:t>Цикл агента</a:t>
-            </a:r>
-          </a:p>
-        </p:txBody>
-      </p:sp>
-      <p:sp>
-        <p:nvSpPr>
-          <p:cNvPr id="22" name="TextBox 21"/>
-          <p:cNvSpPr txBox="1"/>
-          <p:nvPr/>
-        </p:nvSpPr>
-        <p:spPr>
-          <a:xfrm>
-            <a:off x="7562088" y="5550408"/>
-            <a:ext cx="3977639" cy="365760"/>
-          </a:xfrm>
-          <a:prstGeom prst="rect">
-            <a:avLst/>
-          </a:prstGeom>
-          <a:noFill/>
-        </p:spPr>
-        <p:txBody>
-          <a:bodyPr wrap="square" lIns="0" rIns="0" tIns="0" bIns="0" anchor="t">
-            <a:spAutoFit/>
-          </a:bodyPr>
-          <a:lstStyle/>
-          <a:p>
-            <a:pPr algn="l">
-              <a:lnSpc>
-                <a:spcPct val="115000"/>
-              </a:lnSpc>
-            </a:pPr>
-            <a:r>
-              <a:rPr sz="1400" b="0" i="1">
-                <a:solidFill>
-                  <a:srgbClr val="065A82"/>
-                </a:solidFill>
-                <a:latin typeface="Arial"/>
-              </a:rPr>
-              <a:t>действуй → наблюдай → корректируй</a:t>
-            </a:r>
-          </a:p>
-        </p:txBody>
-      </p:sp>
-      <p:sp>
-        <p:nvSpPr>
-          <p:cNvPr id="23" name="TextBox 22"/>
-          <p:cNvSpPr txBox="1"/>
-          <p:nvPr/>
-        </p:nvSpPr>
-        <p:spPr>
-          <a:xfrm>
-            <a:off x="6464807" y="6144768"/>
-            <a:ext cx="4983480" cy="914400"/>
-          </a:xfrm>
-          <a:prstGeom prst="rect">
-            <a:avLst/>
-          </a:prstGeom>
-          <a:noFill/>
-        </p:spPr>
-        <p:txBody>
-          <a:bodyPr wrap="square" lIns="0" rIns="0" tIns="0" bIns="0" anchor="t">
-            <a:spAutoFit/>
-          </a:bodyPr>
-          <a:lstStyle/>
-          <a:p>
-            <a:pPr algn="l">
-              <a:lnSpc>
-                <a:spcPct val="132000"/>
-              </a:lnSpc>
-            </a:pPr>
-            <a:r>
-              <a:rPr sz="1600" b="0" i="0">
-                <a:solidFill>
-                  <a:srgbClr val="21295C"/>
-                </a:solidFill>
-                <a:latin typeface="Arial"/>
-              </a:rPr>
-              <a:t>Модель решает действие, видит результат, корректирует план</a:t>
-            </a:r>
-          </a:p>
-        </p:txBody>
-      </p:sp>
-    </p:spTree>
-  </p:cSld>
-  <p:clrMapOvr>
-    <a:masterClrMapping/>
-  </p:clrMapOvr>
-</p:sld>
-</file>
-
-<file path=ppt/slides/slide36.xml><?xml version="1.0" encoding="utf-8"?>
-<p:sld xmlns:a="http://schemas.openxmlformats.org/drawingml/2006/main" xmlns:p="http://schemas.openxmlformats.org/presentationml/2006/main" xmlns:r="http://schemas.openxmlformats.org/officeDocument/2006/relationships">
-  <p:cSld>
     <p:bg>
       <p:bgPr>
         <a:solidFill>
-          <a:srgbClr val="FFFFFF"/>
+          <a:srgbClr val="F4F7FA"/>
         </a:solidFill>
         <a:effectLst/>
       </p:bgPr>
@@ -33249,7 +30875,7 @@
         </p:nvSpPr>
         <p:spPr>
           <a:xfrm>
-            <a:off x="502920" y="2103120"/>
+            <a:off x="502920" y="1737360"/>
             <a:ext cx="11201400" cy="2194560"/>
           </a:xfrm>
           <a:prstGeom prst="rect">
@@ -33288,33 +30914,33 @@
         </p:nvSpPr>
         <p:spPr>
           <a:xfrm>
-            <a:off x="502920" y="4434840"/>
-            <a:ext cx="11201400" cy="731520"/>
-          </a:xfrm>
-          <a:prstGeom prst="rect">
-            <a:avLst/>
-          </a:prstGeom>
-          <a:noFill/>
-        </p:spPr>
-        <p:txBody>
-          <a:bodyPr wrap="square" lIns="0" rIns="0" tIns="0" bIns="0" anchor="ctr">
+            <a:off x="502920" y="4937760"/>
+            <a:ext cx="11201400" cy="640080"/>
+          </a:xfrm>
+          <a:prstGeom prst="rect">
+            <a:avLst/>
+          </a:prstGeom>
+          <a:noFill/>
+        </p:spPr>
+        <p:txBody>
+          <a:bodyPr wrap="square" lIns="0" rIns="0" tIns="0" bIns="0" anchor="t">
             <a:spAutoFit/>
           </a:bodyPr>
           <a:lstStyle/>
           <a:p>
             <a:pPr algn="ctr">
               <a:lnSpc>
-                <a:spcPct val="120000"/>
-              </a:lnSpc>
-            </a:pPr>
-            <a:r>
-              <a:rPr sz="3200" b="0" i="0">
+                <a:spcPct val="115000"/>
+              </a:lnSpc>
+            </a:pPr>
+            <a:r>
+              <a:rPr sz="3600" b="0" i="1">
                 <a:solidFill>
                   <a:srgbClr val="065A82"/>
                 </a:solidFill>
                 <a:latin typeface="Arial"/>
               </a:rPr>
-              <a:t>Спасибо за внимание!</a:t>
+              <a:t>Спасибо</a:t>
             </a:r>
           </a:p>
         </p:txBody>
@@ -33327,33 +30953,33 @@
         </p:nvSpPr>
         <p:spPr>
           <a:xfrm>
-            <a:off x="502920" y="5943600"/>
-            <a:ext cx="11201400" cy="411480"/>
-          </a:xfrm>
-          <a:prstGeom prst="rect">
-            <a:avLst/>
-          </a:prstGeom>
-          <a:noFill/>
-        </p:spPr>
-        <p:txBody>
-          <a:bodyPr wrap="square" lIns="0" rIns="0" tIns="0" bIns="0" anchor="ctr">
-            <a:spAutoFit/>
-          </a:bodyPr>
-          <a:lstStyle/>
-          <a:p>
-            <a:pPr algn="ctr">
-              <a:lnSpc>
-                <a:spcPct val="120000"/>
-              </a:lnSpc>
-            </a:pPr>
-            <a:r>
-              <a:rPr sz="1400" b="0" i="1">
-                <a:solidFill>
-                  <a:srgbClr val="1C7293"/>
-                </a:solidFill>
-                <a:latin typeface="Arial"/>
-              </a:rPr>
-              <a:t>Семинар 2 — через неделю.  Дополнительные вопросы — на e-mail.</a:t>
+            <a:off x="7315200" y="6217920"/>
+            <a:ext cx="4434840" cy="365760"/>
+          </a:xfrm>
+          <a:prstGeom prst="rect">
+            <a:avLst/>
+          </a:prstGeom>
+          <a:noFill/>
+        </p:spPr>
+        <p:txBody>
+          <a:bodyPr wrap="square" lIns="0" rIns="0" tIns="0" bIns="0" anchor="t">
+            <a:spAutoFit/>
+          </a:bodyPr>
+          <a:lstStyle/>
+          <a:p>
+            <a:pPr algn="r">
+              <a:lnSpc>
+                <a:spcPct val="115000"/>
+              </a:lnSpc>
+            </a:pPr>
+            <a:r>
+              <a:rPr sz="1100" b="0" i="1">
+                <a:solidFill>
+                  <a:srgbClr val="6B7685"/>
+                </a:solidFill>
+                <a:latin typeface="Arial"/>
+              </a:rPr>
+              <a:t>контакты лектора — заполняется перед лекцией</a:t>
             </a:r>
           </a:p>
         </p:txBody>
@@ -33797,7 +31423,7 @@
                 </a:solidFill>
                 <a:latin typeface="Arial"/>
               </a:rPr>
-              <a:t>(Лекция 1 §3.2)</a:t>
+              <a:t>(из Лекции 1)</a:t>
             </a:r>
           </a:p>
         </p:txBody>
@@ -33884,7 +31510,7 @@
                 </a:solidFill>
                 <a:latin typeface="Arial"/>
               </a:rPr>
-              <a:t>Что мы знаем (Лекция 1 §3.2):</a:t>
+              <a:t>Что мы знаем:</a:t>
             </a:r>
           </a:p>
         </p:txBody>

--- a/library/lectures/lec-02/rendered/lec-02.pptx
+++ b/library/lectures/lec-02/rendered/lec-02.pptx
@@ -6839,7 +6839,7 @@
                 </a:solidFill>
                 <a:latin typeface="Arial"/>
               </a:rPr>
-              <a:t>Механизм, который сегодня разберём внутри AI-модели, называется точно так же — «внимание». Он работает похоже — но не так, как ваш.</a:t>
+              <a:t>Механизм, который сегодня разберём внутри модели ИИ, называется точно так же — «внимание». Он работает похоже — но не так, как ваш.</a:t>
             </a:r>
           </a:p>
         </p:txBody>
@@ -6896,7 +6896,7 @@
                 </a:solidFill>
                 <a:latin typeface="Arial"/>
               </a:rPr>
-              <a:t>AI ошибается в «сколько r в strawberry» — слова не из букв, а из 2-3 токенов</a:t>
+              <a:t>AI ошибается в «сколько r в strawberry» — слова не из букв, а из 3 токенов</a:t>
             </a:r>
           </a:p>
         </p:txBody>
@@ -13176,7 +13176,7 @@
               </a:rPr>
               <a:t>N × N, где N — длина контекста.
 Контекст 100k → матрица из ~10 млрд чисел.
-→ квадратичная стоимость attention.</a:t>
+→ квадратичная стоимость внимания.</a:t>
             </a:r>
           </a:p>
         </p:txBody>
@@ -13688,7 +13688,7 @@
                 </a:solidFill>
                 <a:latin typeface="Arial"/>
               </a:rPr>
-              <a:t>Attention — матричная, не линейная операция. Каждый токен сравнивается со всеми.</a:t>
+              <a:t>Внимание — матричная, не линейная операция. Каждый токен сравнивается со всеми.</a:t>
             </a:r>
           </a:p>
         </p:txBody>
@@ -13745,7 +13745,7 @@
                 </a:solidFill>
                 <a:latin typeface="Arial"/>
               </a:rPr>
-              <a:t>Attention выдаёт распределение весов на все токены контекста (сумма = 1)</a:t>
+              <a:t>Внимание выдаёт распределение весов на все токены контекста (сумма = 1)</a:t>
             </a:r>
           </a:p>
         </p:txBody>
@@ -15254,7 +15254,7 @@
                 </a:solidFill>
                 <a:latin typeface="Arial"/>
               </a:rPr>
-              <a:t>Role-токены получают повышенный вес в attention</a:t>
+              <a:t>Role-токены получают повышенный вес в весах внимания</a:t>
             </a:r>
           </a:p>
         </p:txBody>
@@ -15380,7 +15380,7 @@
                 </a:solidFill>
                 <a:latin typeface="Arial"/>
               </a:rPr>
-              <a:t>A. Worked example — куда смотрит «она»</a:t>
+              <a:t>A. Разбор примера — куда смотрит «она»</a:t>
             </a:r>
           </a:p>
         </p:txBody>
@@ -15830,7 +15830,7 @@
                 </a:solidFill>
                 <a:latin typeface="Arial"/>
               </a:rPr>
-              <a:t>Упрощение: реальный attention map — сотни связей. Модель смотрит статистически, не делает грамматический разбор.</a:t>
+              <a:t>Упрощение: реальная карта внимания — сотни связей. Модель смотрит статистически, не делает грамматический разбор.</a:t>
             </a:r>
           </a:p>
         </p:txBody>
@@ -15996,7 +15996,7 @@
                 <a:latin typeface="Arial"/>
               </a:rPr>
               <a:t>→ обобщённый ответ
-(низкий вес role-токенов в attention)</a:t>
+(низкий вес role-токенов в весах внимания)</a:t>
             </a:r>
           </a:p>
         </p:txBody>
@@ -16198,7 +16198,7 @@
                 <a:latin typeface="Arial"/>
               </a:rPr>
               <a:t>→ role-токены подсвечены
-(высокий вес в attention)</a:t>
+(высокий вес в весах внимания)</a:t>
             </a:r>
           </a:p>
         </p:txBody>
@@ -16294,7 +16294,7 @@
                 </a:solidFill>
                 <a:latin typeface="Arial"/>
               </a:rPr>
-              <a:t>Эволюция context window + квадратичная стоимость attention</a:t>
+              <a:t>Эволюция контекстного окна + квадратичная стоимость внимания</a:t>
             </a:r>
           </a:p>
         </p:txBody>
@@ -16765,7 +16765,7 @@
                 </a:solidFill>
                 <a:latin typeface="Arial"/>
               </a:rPr>
-              <a:t>ванильная attention</a:t>
+              <a:t>базовое внимание</a:t>
             </a:r>
           </a:p>
         </p:txBody>
@@ -16937,7 +16937,7 @@
                 </a:solidFill>
                 <a:latin typeface="Arial"/>
               </a:rPr>
-              <a:t>Стоимость attention растёт квадратично от длины. 1M ≈ 16× дороже 100k — production-pricing с batching; чистая N²-теория дала бы 100×.</a:t>
+              <a:t>Стоимость внимания растёт квадратично от длины. 1M ≈ 16× дороже 100k — production-pricing с batching; чистая N²-теория дала бы 100×.</a:t>
             </a:r>
           </a:p>
         </p:txBody>
@@ -19545,7 +19545,7 @@
               <a:t>Сэмплирование
 пропорционально P.
 Естественная вариативность.
-(T = 0.7 — consensus для чата)</a:t>
+(T = 0.7 — стандартный выбор для чата)</a:t>
             </a:r>
           </a:p>
         </p:txBody>
@@ -22480,7 +22480,7 @@
               </a:rPr>
               <a:t>токенизация →
 эмбеддинг →
-attention</a:t>
+внимание</a:t>
             </a:r>
           </a:p>
         </p:txBody>
@@ -27760,7 +27760,7 @@
                 </a:solidFill>
                 <a:latin typeface="Arial"/>
               </a:rPr>
-              <a:t>На уровне attention role-токены получают высокий вес — модель опирается на них при выборе следующих токенов.</a:t>
+              <a:t>На уровне внимания role-токены получают высокий вес — модель опирается на них при выборе следующих токенов.</a:t>
             </a:r>
           </a:p>
         </p:txBody>
@@ -29489,7 +29489,7 @@
                 </a:solidFill>
                 <a:latin typeface="Arial"/>
               </a:rPr>
-              <a:t>Attention статистически смотрит на токены — не понимает причинности</a:t>
+              <a:t>Внимание статистически смотрит на токены — не понимает причинности</a:t>
             </a:r>
           </a:p>
         </p:txBody>
@@ -29867,7 +29867,7 @@
                 </a:solidFill>
                 <a:latin typeface="Arial"/>
               </a:rPr>
-              <a:t>AI (через attention)</a:t>
+              <a:t>ИИ (через внимание)</a:t>
             </a:r>
           </a:p>
         </p:txBody>
@@ -29984,7 +29984,7 @@
                 </a:solidFill>
                 <a:latin typeface="Arial"/>
               </a:rPr>
-              <a:t>Замечает паттерн «X и Y часто соседствуют» в обучающих данных. Для причинных выводов — привлекайте domain-эксперта или causal-методы.</a:t>
+              <a:t>Замечает паттерн «X и Y часто соседствуют» в обучающих данных. Для причинных выводов — привлекайте эксперта предметной области или причинные методы.</a:t>
             </a:r>
           </a:p>
         </p:txBody>
@@ -30093,12 +30093,12 @@
         </p:nvSpPr>
         <p:spPr>
           <a:xfrm>
-            <a:off x="502920" y="1920240"/>
-            <a:ext cx="5486400" cy="2514600"/>
+            <a:off x="502920" y="1783080"/>
+            <a:ext cx="5486400" cy="2450592"/>
           </a:xfrm>
           <a:prstGeom prst="roundRect">
             <a:avLst>
-              <a:gd name="adj" fmla="val 12121"/>
+              <a:gd name="adj" fmla="val 12437"/>
             </a:avLst>
           </a:prstGeom>
           <a:solidFill>
@@ -30149,7 +30149,7 @@
         </p:blipFill>
         <p:spPr>
           <a:xfrm>
-            <a:off x="731520" y="2240280"/>
+            <a:off x="731520" y="2103120"/>
             <a:ext cx="1005840" cy="1005840"/>
           </a:xfrm>
           <a:prstGeom prst="rect">
@@ -30165,7 +30165,7 @@
         </p:nvSpPr>
         <p:spPr>
           <a:xfrm>
-            <a:off x="1874519" y="2194560"/>
+            <a:off x="1874519" y="2039112"/>
             <a:ext cx="3977639" cy="548640"/>
           </a:xfrm>
           <a:prstGeom prst="rect">
@@ -30204,8 +30204,8 @@
         </p:nvSpPr>
         <p:spPr>
           <a:xfrm>
-            <a:off x="1874519" y="2834640"/>
-            <a:ext cx="3977639" cy="365760"/>
+            <a:off x="1874519" y="2651760"/>
+            <a:ext cx="3977639" cy="347472"/>
           </a:xfrm>
           <a:prstGeom prst="rect">
             <a:avLst/>
@@ -30243,8 +30243,8 @@
         </p:nvSpPr>
         <p:spPr>
           <a:xfrm>
-            <a:off x="777240" y="3429000"/>
-            <a:ext cx="4983480" cy="914400"/>
+            <a:off x="777240" y="3227832"/>
+            <a:ext cx="4983480" cy="932688"/>
           </a:xfrm>
           <a:prstGeom prst="rect">
             <a:avLst/>
@@ -30259,11 +30259,11 @@
           <a:p>
             <a:pPr algn="l">
               <a:lnSpc>
-                <a:spcPct val="132000"/>
-              </a:lnSpc>
-            </a:pPr>
-            <a:r>
-              <a:rPr sz="1600" b="0" i="0">
+                <a:spcPct val="128000"/>
+              </a:lnSpc>
+            </a:pPr>
+            <a:r>
+              <a:rPr sz="1500" b="0" i="0">
                 <a:solidFill>
                   <a:srgbClr val="21295C"/>
                 </a:solidFill>
@@ -30282,12 +30282,12 @@
         </p:nvSpPr>
         <p:spPr>
           <a:xfrm>
-            <a:off x="6190488" y="1920240"/>
-            <a:ext cx="5486400" cy="2514600"/>
+            <a:off x="6135624" y="1783080"/>
+            <a:ext cx="5486400" cy="2450592"/>
           </a:xfrm>
           <a:prstGeom prst="roundRect">
             <a:avLst>
-              <a:gd name="adj" fmla="val 12121"/>
+              <a:gd name="adj" fmla="val 12437"/>
             </a:avLst>
           </a:prstGeom>
           <a:solidFill>
@@ -30338,7 +30338,7 @@
         </p:blipFill>
         <p:spPr>
           <a:xfrm>
-            <a:off x="6419088" y="2240280"/>
+            <a:off x="6364224" y="2103120"/>
             <a:ext cx="1005840" cy="1005840"/>
           </a:xfrm>
           <a:prstGeom prst="rect">
@@ -30354,7 +30354,7 @@
         </p:nvSpPr>
         <p:spPr>
           <a:xfrm>
-            <a:off x="7562088" y="2194560"/>
+            <a:off x="7507224" y="2039112"/>
             <a:ext cx="3977639" cy="548640"/>
           </a:xfrm>
           <a:prstGeom prst="rect">
@@ -30393,8 +30393,8 @@
         </p:nvSpPr>
         <p:spPr>
           <a:xfrm>
-            <a:off x="7562088" y="2834640"/>
-            <a:ext cx="3977639" cy="365760"/>
+            <a:off x="7507224" y="2651760"/>
+            <a:ext cx="3977639" cy="347472"/>
           </a:xfrm>
           <a:prstGeom prst="rect">
             <a:avLst/>
@@ -30432,8 +30432,8 @@
         </p:nvSpPr>
         <p:spPr>
           <a:xfrm>
-            <a:off x="6464807" y="3429000"/>
-            <a:ext cx="4983480" cy="914400"/>
+            <a:off x="6409944" y="3227832"/>
+            <a:ext cx="4983480" cy="932688"/>
           </a:xfrm>
           <a:prstGeom prst="rect">
             <a:avLst/>
@@ -30448,11 +30448,11 @@
           <a:p>
             <a:pPr algn="l">
               <a:lnSpc>
-                <a:spcPct val="132000"/>
-              </a:lnSpc>
-            </a:pPr>
-            <a:r>
-              <a:rPr sz="1600" b="0" i="0">
+                <a:spcPct val="128000"/>
+              </a:lnSpc>
+            </a:pPr>
+            <a:r>
+              <a:rPr sz="1500" b="0" i="0">
                 <a:solidFill>
                   <a:srgbClr val="21295C"/>
                 </a:solidFill>
@@ -30471,12 +30471,12 @@
         </p:nvSpPr>
         <p:spPr>
           <a:xfrm>
-            <a:off x="502920" y="4636008"/>
-            <a:ext cx="5486400" cy="2514600"/>
+            <a:off x="502920" y="4379976"/>
+            <a:ext cx="5486400" cy="2450592"/>
           </a:xfrm>
           <a:prstGeom prst="roundRect">
             <a:avLst>
-              <a:gd name="adj" fmla="val 12121"/>
+              <a:gd name="adj" fmla="val 12437"/>
             </a:avLst>
           </a:prstGeom>
           <a:solidFill>
@@ -30527,7 +30527,7 @@
         </p:blipFill>
         <p:spPr>
           <a:xfrm>
-            <a:off x="731520" y="4956048"/>
+            <a:off x="731520" y="4700016"/>
             <a:ext cx="1005840" cy="1005840"/>
           </a:xfrm>
           <a:prstGeom prst="rect">
@@ -30543,7 +30543,7 @@
         </p:nvSpPr>
         <p:spPr>
           <a:xfrm>
-            <a:off x="1874519" y="4910328"/>
+            <a:off x="1874519" y="4636008"/>
             <a:ext cx="3977639" cy="548640"/>
           </a:xfrm>
           <a:prstGeom prst="rect">
@@ -30582,8 +30582,8 @@
         </p:nvSpPr>
         <p:spPr>
           <a:xfrm>
-            <a:off x="1874519" y="5550408"/>
-            <a:ext cx="3977639" cy="365760"/>
+            <a:off x="1874519" y="5248656"/>
+            <a:ext cx="3977639" cy="347472"/>
           </a:xfrm>
           <a:prstGeom prst="rect">
             <a:avLst/>
@@ -30621,8 +30621,8 @@
         </p:nvSpPr>
         <p:spPr>
           <a:xfrm>
-            <a:off x="777240" y="6144768"/>
-            <a:ext cx="4983480" cy="914400"/>
+            <a:off x="777240" y="5824728"/>
+            <a:ext cx="4983480" cy="932688"/>
           </a:xfrm>
           <a:prstGeom prst="rect">
             <a:avLst/>
@@ -30637,11 +30637,11 @@
           <a:p>
             <a:pPr algn="l">
               <a:lnSpc>
-                <a:spcPct val="132000"/>
-              </a:lnSpc>
-            </a:pPr>
-            <a:r>
-              <a:rPr sz="1600" b="0" i="0">
+                <a:spcPct val="128000"/>
+              </a:lnSpc>
+            </a:pPr>
+            <a:r>
+              <a:rPr sz="1500" b="0" i="0">
                 <a:solidFill>
                   <a:srgbClr val="21295C"/>
                 </a:solidFill>
@@ -30660,12 +30660,12 @@
         </p:nvSpPr>
         <p:spPr>
           <a:xfrm>
-            <a:off x="6190488" y="4636008"/>
-            <a:ext cx="5486400" cy="2514600"/>
+            <a:off x="6135624" y="4379976"/>
+            <a:ext cx="5486400" cy="2450592"/>
           </a:xfrm>
           <a:prstGeom prst="roundRect">
             <a:avLst>
-              <a:gd name="adj" fmla="val 12121"/>
+              <a:gd name="adj" fmla="val 12437"/>
             </a:avLst>
           </a:prstGeom>
           <a:solidFill>
@@ -30716,7 +30716,7 @@
         </p:blipFill>
         <p:spPr>
           <a:xfrm>
-            <a:off x="6419088" y="4956048"/>
+            <a:off x="6364224" y="4700016"/>
             <a:ext cx="1005840" cy="1005840"/>
           </a:xfrm>
           <a:prstGeom prst="rect">
@@ -30732,7 +30732,7 @@
         </p:nvSpPr>
         <p:spPr>
           <a:xfrm>
-            <a:off x="7562088" y="4910328"/>
+            <a:off x="7507224" y="4636008"/>
             <a:ext cx="3977639" cy="548640"/>
           </a:xfrm>
           <a:prstGeom prst="rect">
@@ -30771,8 +30771,8 @@
         </p:nvSpPr>
         <p:spPr>
           <a:xfrm>
-            <a:off x="7562088" y="5550408"/>
-            <a:ext cx="3977639" cy="365760"/>
+            <a:off x="7507224" y="5248656"/>
+            <a:ext cx="3977639" cy="347472"/>
           </a:xfrm>
           <a:prstGeom prst="rect">
             <a:avLst/>
@@ -30810,8 +30810,8 @@
         </p:nvSpPr>
         <p:spPr>
           <a:xfrm>
-            <a:off x="6464807" y="6144768"/>
-            <a:ext cx="4983480" cy="914400"/>
+            <a:off x="6409944" y="5824728"/>
+            <a:ext cx="4983480" cy="932688"/>
           </a:xfrm>
           <a:prstGeom prst="rect">
             <a:avLst/>
@@ -30826,11 +30826,11 @@
           <a:p>
             <a:pPr algn="l">
               <a:lnSpc>
-                <a:spcPct val="132000"/>
-              </a:lnSpc>
-            </a:pPr>
-            <a:r>
-              <a:rPr sz="1600" b="0" i="0">
+                <a:spcPct val="128000"/>
+              </a:lnSpc>
+            </a:pPr>
+            <a:r>
+              <a:rPr sz="1500" b="0" i="0">
                 <a:solidFill>
                   <a:srgbClr val="21295C"/>
                 </a:solidFill>
@@ -34687,7 +34687,7 @@
         <p:spPr>
           <a:xfrm>
             <a:off x="502920" y="1325880"/>
-            <a:ext cx="11247120" cy="411480"/>
+            <a:ext cx="11247120" cy="566928"/>
           </a:xfrm>
           <a:prstGeom prst="rect">
             <a:avLst/>
@@ -34725,7 +34725,7 @@
         </p:nvSpPr>
         <p:spPr>
           <a:xfrm>
-            <a:off x="502920" y="1755648"/>
+            <a:off x="502920" y="1938528"/>
             <a:ext cx="11247120" cy="274320"/>
           </a:xfrm>
           <a:prstGeom prst="rect">
@@ -34764,7 +34764,7 @@
         </p:nvSpPr>
         <p:spPr>
           <a:xfrm>
-            <a:off x="914400" y="2194560"/>
+            <a:off x="914400" y="2286000"/>
             <a:ext cx="5029200" cy="3520440"/>
           </a:xfrm>
           <a:prstGeom prst="roundRect">
@@ -34812,7 +34812,7 @@
         </p:nvSpPr>
         <p:spPr>
           <a:xfrm>
-            <a:off x="1188720" y="2377440"/>
+            <a:off x="1188720" y="2468880"/>
             <a:ext cx="4480560" cy="457200"/>
           </a:xfrm>
           <a:prstGeom prst="rect">
@@ -34851,7 +34851,7 @@
         </p:nvSpPr>
         <p:spPr>
           <a:xfrm>
-            <a:off x="1325880" y="3291839"/>
+            <a:off x="1325880" y="3383280"/>
             <a:ext cx="118872" cy="118872"/>
           </a:xfrm>
           <a:prstGeom prst="roundRect">
@@ -34897,7 +34897,7 @@
         </p:nvSpPr>
         <p:spPr>
           <a:xfrm>
-            <a:off x="1600200" y="3063239"/>
+            <a:off x="1600200" y="3154680"/>
             <a:ext cx="4114800" cy="502920"/>
           </a:xfrm>
           <a:prstGeom prst="rect">
@@ -34936,7 +34936,7 @@
         </p:nvSpPr>
         <p:spPr>
           <a:xfrm>
-            <a:off x="1325880" y="3886200"/>
+            <a:off x="1325880" y="3977640"/>
             <a:ext cx="118872" cy="118872"/>
           </a:xfrm>
           <a:prstGeom prst="roundRect">
@@ -34982,7 +34982,7 @@
         </p:nvSpPr>
         <p:spPr>
           <a:xfrm>
-            <a:off x="1600200" y="3657599"/>
+            <a:off x="1600200" y="3749040"/>
             <a:ext cx="4114800" cy="502920"/>
           </a:xfrm>
           <a:prstGeom prst="rect">
@@ -35021,7 +35021,7 @@
         </p:nvSpPr>
         <p:spPr>
           <a:xfrm>
-            <a:off x="1325880" y="4480559"/>
+            <a:off x="1325880" y="4572000"/>
             <a:ext cx="118872" cy="118872"/>
           </a:xfrm>
           <a:prstGeom prst="roundRect">
@@ -35067,7 +35067,7 @@
         </p:nvSpPr>
         <p:spPr>
           <a:xfrm>
-            <a:off x="1600200" y="4251959"/>
+            <a:off x="1600200" y="4343400"/>
             <a:ext cx="4114800" cy="502920"/>
           </a:xfrm>
           <a:prstGeom prst="rect">
@@ -35106,7 +35106,7 @@
         </p:nvSpPr>
         <p:spPr>
           <a:xfrm>
-            <a:off x="1325880" y="5074920"/>
+            <a:off x="1325880" y="5166360"/>
             <a:ext cx="118872" cy="118872"/>
           </a:xfrm>
           <a:prstGeom prst="roundRect">
@@ -35152,7 +35152,7 @@
         </p:nvSpPr>
         <p:spPr>
           <a:xfrm>
-            <a:off x="1600200" y="4846320"/>
+            <a:off x="1600200" y="4937760"/>
             <a:ext cx="4114800" cy="502920"/>
           </a:xfrm>
           <a:prstGeom prst="rect">
@@ -35191,7 +35191,7 @@
         </p:nvSpPr>
         <p:spPr>
           <a:xfrm>
-            <a:off x="5989320" y="3680460"/>
+            <a:off x="5989320" y="3771900"/>
             <a:ext cx="182880" cy="548640"/>
           </a:xfrm>
           <a:prstGeom prst="rightArrow">
@@ -35235,7 +35235,7 @@
         </p:nvSpPr>
         <p:spPr>
           <a:xfrm>
-            <a:off x="6217920" y="2194560"/>
+            <a:off x="6217920" y="2286000"/>
             <a:ext cx="5029200" cy="3520440"/>
           </a:xfrm>
           <a:prstGeom prst="roundRect">
@@ -35283,7 +35283,7 @@
         </p:nvSpPr>
         <p:spPr>
           <a:xfrm>
-            <a:off x="6492240" y="2377440"/>
+            <a:off x="6492240" y="2468880"/>
             <a:ext cx="4480560" cy="457200"/>
           </a:xfrm>
           <a:prstGeom prst="rect">
@@ -35322,7 +35322,7 @@
         </p:nvSpPr>
         <p:spPr>
           <a:xfrm>
-            <a:off x="6629400" y="3264408"/>
+            <a:off x="6629400" y="3355848"/>
             <a:ext cx="118872" cy="118872"/>
           </a:xfrm>
           <a:prstGeom prst="roundRect">
@@ -35368,7 +35368,7 @@
         </p:nvSpPr>
         <p:spPr>
           <a:xfrm>
-            <a:off x="6903720" y="3063239"/>
+            <a:off x="6903720" y="3154680"/>
             <a:ext cx="4114800" cy="457200"/>
           </a:xfrm>
           <a:prstGeom prst="rect">
@@ -35407,7 +35407,7 @@
         </p:nvSpPr>
         <p:spPr>
           <a:xfrm>
-            <a:off x="6629400" y="3813048"/>
+            <a:off x="6629400" y="3886200"/>
             <a:ext cx="118872" cy="118872"/>
           </a:xfrm>
           <a:prstGeom prst="roundRect">
@@ -35453,7 +35453,7 @@
         </p:nvSpPr>
         <p:spPr>
           <a:xfrm>
-            <a:off x="6903720" y="3611879"/>
+            <a:off x="6903720" y="3685032"/>
             <a:ext cx="4114800" cy="457200"/>
           </a:xfrm>
           <a:prstGeom prst="rect">
@@ -35492,7 +35492,7 @@
         </p:nvSpPr>
         <p:spPr>
           <a:xfrm>
-            <a:off x="6629400" y="4361688"/>
+            <a:off x="6629400" y="4416552"/>
             <a:ext cx="118872" cy="118872"/>
           </a:xfrm>
           <a:prstGeom prst="roundRect">
@@ -35538,7 +35538,7 @@
         </p:nvSpPr>
         <p:spPr>
           <a:xfrm>
-            <a:off x="6903720" y="4160520"/>
+            <a:off x="6903720" y="4215384"/>
             <a:ext cx="4114800" cy="457200"/>
           </a:xfrm>
           <a:prstGeom prst="rect">
@@ -35577,7 +35577,7 @@
         </p:nvSpPr>
         <p:spPr>
           <a:xfrm>
-            <a:off x="6629400" y="4910327"/>
+            <a:off x="6629400" y="4946903"/>
             <a:ext cx="118872" cy="118872"/>
           </a:xfrm>
           <a:prstGeom prst="roundRect">
@@ -35623,7 +35623,7 @@
         </p:nvSpPr>
         <p:spPr>
           <a:xfrm>
-            <a:off x="6903720" y="4709159"/>
+            <a:off x="6903720" y="4745736"/>
             <a:ext cx="4114800" cy="457200"/>
           </a:xfrm>
           <a:prstGeom prst="rect">
@@ -35662,7 +35662,7 @@
         </p:nvSpPr>
         <p:spPr>
           <a:xfrm>
-            <a:off x="6629400" y="5458968"/>
+            <a:off x="6629400" y="5477255"/>
             <a:ext cx="118872" cy="118872"/>
           </a:xfrm>
           <a:prstGeom prst="roundRect">
@@ -35708,7 +35708,7 @@
         </p:nvSpPr>
         <p:spPr>
           <a:xfrm>
-            <a:off x="6903720" y="5257800"/>
+            <a:off x="6903720" y="5276088"/>
             <a:ext cx="4114800" cy="457200"/>
           </a:xfrm>
           <a:prstGeom prst="rect">

--- a/library/lectures/lec-02/rendered/lec-02.pptx
+++ b/library/lectures/lec-02/rendered/lec-02.pptx
@@ -29528,7 +29528,7 @@
                 </a:solidFill>
                 <a:latin typeface="Arial"/>
               </a:rPr>
-              <a:t>AI считает корреляции в данных, не строит каузальный граф</a:t>
+              <a:t>ИИ считает корреляции в данных, не строит каузальный граф</a:t>
             </a:r>
           </a:p>
         </p:txBody>

--- a/library/lectures/lec-02/rendered/lec-02.pptx
+++ b/library/lectures/lec-02/rendered/lec-02.pptx
@@ -1252,7 +1252,7 @@
           <a:p/>
           <a:p>
             <a:r>
-              <a:t>В этом разделе четыре слайда плюс этот разделитель. Сначала мы зафиксируем базовое определение через метафору фонарика в тёмной комнате — без формул, без матриц Q/K/V, без многоголового внимания. Потом разберём рабочий пример на конкретном предложении и из него выведем эффект роли в промпте — первое из трёх «почему» Лекции 1. Затем поговорим про контекстное окно как физический предел и про квадратичную стоимость attention. И завершим раздел разбором эффекта «lost in the middle» — почему большое окно не значит хорошее использование контекста.</a:t>
+              <a:t>В этом разделе четыре слайда плюс этот разделитель. Сначала мы зафиксируем базовое определение через метафору фонарика в тёмной комнате — без формул, без матриц Q/K/V, без многоголового внимания. Потом разберём рабочий пример на конкретном предложении и из него выведем эффект роли в промпте — первое из трёх «почему» Лекции 1. Затем поговорим про контекстное окно как физический предел и про квадратичную стоимость внимания. И завершим раздел разбором эффекта «lost in the middle» — почему большое окно не значит хорошее использование контекста.</a:t>
             </a:r>
           </a:p>
           <a:p/>
@@ -1328,37 +1328,37 @@
           <a:lstStyle/>
           <a:p>
             <a:r>
-              <a:t>В предыдущем слайде раздела — заголовке — мы сказали, что внимание выдаёт «распределение весов на все токены контекста». Этот слайд раскрывает важную деталь: attention — не линейная операция, а **матричная**. Это значит, что каждый токен в контексте смотрит на каждый — и для контекста длины N матрица имеет размер N × N. Эта деталь принципиальна для понимания того, что будет дальше про context window.</a:t>
+              <a:t>В предыдущем слайде раздела — заголовке — мы сказали, что внимание выдаёт «распределение весов на все токены контекста». Этот слайд раскрывает важную деталь: внимание — не линейная операция, а **матричная**. Это значит, что каждый токен в контексте смотрит на каждый — и для контекста длины N матрица имеет размер N × N. Эта деталь принципиальна для понимания того, что будет дальше про context window.</a:t>
             </a:r>
           </a:p>
           <a:p/>
           <a:p>
             <a:r>
-              <a:t>На слайде слева — упрощённая 7×7 матрица для предложения «Кот съел мышь, потому что она была голодна». Каждая строка — это «один токен запроса смотрит на все остальные», каждый столбец — «насколько именно этот токен влияет». Числа условные, illustrative — реальные attention weights выглядят сложнее, и сумма по строке должна равняться единице (нормировка через softmax). Но качественно картина типична: токен «она» имеет наибольший вес — 0.7 — на токен «мышь». Это и есть, что мы интуитивно называем «модель поняла, на что ссылается местоимение». Технически — это статистическая связь, выученная на огромном корпусе текстов, в которых местоимения женского рода чаще всего относятся к ближайшему существительному женского рода.</a:t>
+              <a:t>На слайде слева — упрощённая 7×7 матрица для предложения «Кот съел мышь, потому что она была голодна». Каждая строка — это «один токен запроса смотрит на все остальные», каждый столбец — «насколько именно этот токен влияет». Числа условные, illustrative — реальные веса внимания выглядят сложнее, и сумма по строке должна равняться единице (нормировка через softmax). Но качественно картина типична: токен «она» имеет наибольший вес — 0.7 — на токен «мышь». Это и есть, что мы интуитивно называем «модель поняла, на что ссылается местоимение». Технически — это статистическая связь, выученная на огромном корпусе текстов, в которых местоимения женского рода чаще всего относятся к ближайшему существительному женского рода.</a:t>
             </a:r>
           </a:p>
           <a:p/>
           <a:p>
             <a:r>
-              <a:t>Три важных следствия от того, что attention — это матрица.</a:t>
+              <a:t>Три важных следствия от того, что внимание — это матрица.</a:t>
             </a:r>
           </a:p>
           <a:p/>
           <a:p>
             <a:r>
-              <a:t>Первое — **квадратичная стоимость**. Для контекста из 100 000 токенов матрица содержит 10 миллиардов чисел. Это объясняет, почему длинные контексты дорогие: даже линейное увеличение длины контекста даёт квадратичное увеличение объёма вычислений и памяти под attention. Эту тему мы разовьём через слайд — про context window.</a:t>
+              <a:t>Первое — **квадратичная стоимость**. Для контекста из 100 000 токенов матрица содержит 10 миллиардов чисел. Это объясняет, почему длинные контексты дорогие: даже линейное увеличение длины контекста даёт квадратичное увеличение объёма вычислений и памяти под внимание. Эту тему мы разовьём через слайд — про context window.</a:t>
             </a:r>
           </a:p>
           <a:p/>
           <a:p>
             <a:r>
-              <a:t>Второе — **пересчёт на каждом шаге**. LLM генерирует токен за токеном, и на каждой новой генерации матрица attention заново строится на текущем расширенном контексте. Это не «один раз посчитали — пользуемся весь генерацию»; это «на каждый новый токен — новая матрица».</a:t>
+              <a:t>Второе — **пересчёт на каждом шаге**. LLM генерирует токен за токеном, и на каждой новой генерации матрица внимания заново строится на текущем расширенном контексте. Это не «один раз посчитали — пользуемся весь генерацию»; это «на каждый новый токен — новая матрица».</a:t>
             </a:r>
           </a:p>
           <a:p/>
           <a:p>
             <a:r>
-              <a:t>Третье — **multi-head**. На самом деле в одном слое внимания работает не одна матрица, а десятки параллельно. Это называется multi-head attention. Разные «головы» смотрят на разные паттерны: одна может фокусироваться на грамматических связях, другая — на тематической близости, третья — на длинных зависимостях. Разделение работы между головами — одна из ключевых архитектурных идей трансформера. Для пользователя LLM это деталь, но она объясняет, почему механизм внимания справляется с разными типами зависимостей одновременно — потому что под капотом параллельно работает несколько разных «взглядов» на одни и те же токены.</a:t>
+              <a:t>Третье — **multi-head**. На самом деле в одном слое внимания работает не одна матрица, а десятки параллельно. Это называется multi-head attention (многоголовое внимание). Разные «головы» смотрят на разные паттерны: одна может фокусироваться на грамматических связях, другая — на тематической близости, третья — на длинных зависимостях. Разделение работы между головами — одна из ключевых архитектурных идей трансформера. Для пользователя LLM это деталь, но она объясняет, почему механизм внимания справляется с разными типами зависимостей одновременно — потому что под капотом параллельно работает несколько разных «взглядов» на одни и те же токены.</a:t>
             </a:r>
           </a:p>
         </p:txBody>
@@ -1434,19 +1434,19 @@
           <a:p/>
           <a:p>
             <a:r>
-              <a:t>Удобная метафора — **фонарик в тёмной комнате**. Представьте, что вы стоите в комнате с большим количеством предметов — это все токены контекста, — и вам нужно ответить на конкретный вопрос (предсказать следующий токен). Вы не можете одновременно ярко осветить всё; вы направляете фонарик на те предметы, которые сейчас релевантны вопросу. То, что в центре луча, видно ярко; то, что на периферии, — тускло. Метафора удерживается в одном слове: attention — это распределение света по сцене, и это распределение меняется в зависимости от того, что мы сейчас спрашиваем.</a:t>
+              <a:t>Удобная метафора — **фонарик в тёмной комнате**. Представьте, что вы стоите в комнате с большим количеством предметов — это все токены контекста, — и вам нужно ответить на конкретный вопрос (предсказать следующий токен). Вы не можете одновременно ярко осветить всё; вы направляете фонарик на те предметы, которые сейчас релевантны вопросу. То, что в центре луча, видно ярко; то, что на периферии, — тускло. Метафора удерживается в одном слове: внимание — это распределение света по сцене, и это распределение меняется в зависимости от того, что мы сейчас спрашиваем.</a:t>
             </a:r>
           </a:p>
           <a:p/>
           <a:p>
             <a:r>
-              <a:t>Формально на каждом шаге для каждой позиции attention возвращает распределение весов на все остальные токены контекста. Сумма весов равна единице. Один большой вес означает «я сильно опираюсь на этот токен»; маленький вес — «этот токен сейчас мне почти не важен». Никакой явной формулы здесь приводить не будем — для понимания пользователя достаточно зафиксировать три факта: на вход attention получает все токены контекста (не один и не часть, а все, сколько их есть); на выходе для каждого токена есть распределение весов с суммой 1; это распределение пересчитывается на каждом шаге генерации.</a:t>
+              <a:t>Формально на каждом шаге для каждой позиции механизм внимания возвращает распределение весов на все остальные токены контекста. Сумма весов равна единице. Один большой вес означает «я сильно опираюсь на этот токен»; маленький вес — «этот токен сейчас мне почти не важен». Никакой явной формулы здесь приводить не будем — для понимания пользователя достаточно зафиксировать три факта: на вход механизм внимания получает все токены контекста (не один и не часть, а все, сколько их есть); на выходе для каждого токена есть распределение весов с суммой 1; это распределение пересчитывается на каждом шаге генерации.</a:t>
             </a:r>
           </a:p>
           <a:p/>
           <a:p>
             <a:r>
-              <a:t>В реальной модели механизм внимания устроен сложнее: в каждом слое работает не один, а несколько параллельных «голов» внимания (multi-head attention, типично 32–128 голов в современных моделях), и каждая голова смотрит на свой аспект — кто-то ловит грамматические связи, кто-то семантические, кто-то длинные дальнодействующие зависимости. Слоёв в современной модели — десятки и сотни. Для нашего уровня детализации эти числа — справочный факт; полная техническая конструкция с матрицами Q, K, V, скейлингом через корень из размерности, маскированием и residual connections — выходит за рамки лекции; полная картина — в каноническом источнике Vaswani et al. (2017).</a:t>
+              <a:t>В реальной модели механизм внимания устроен сложнее: в каждом слое работает не один, а несколько параллельных «голов» внимания (multi-head attention — многоголовое внимание, типично 32–128 голов в современных моделях), и каждая голова смотрит на свой аспект — кто-то ловит грамматические связи, кто-то семантические, кто-то длинные дальнодействующие зависимости. Слоёв в современной модели — десятки и сотни. Для нашего уровня детализации эти числа — справочный факт; полная техническая конструкция с матрицами Q, K, V, скейлингом через корень из размерности, маскированием и residual connections — выходит за рамки лекции; полная картина — в каноническом источнике Vaswani et al. (2017).</a:t>
             </a:r>
           </a:p>
         </p:txBody>
@@ -1528,7 +1528,7 @@
           <a:p/>
           <a:p>
             <a:r>
-              <a:t>Тон лекции — объяснительно-инженерный. Мы не описываем устройство трансформера во всей полноте: формулы attention, матрицы Q/K/V, многоголовое внимание, позиционное кодирование — останется за рамками лекции. Студенту, которому нужна полная техническая картина, дальше дорога в курсы по deep learning и в каноническую статью Vaswani et al. (2017). Здесь мы целенаправленно держим уровень детализации такой, чтобы каждый внутренний механизм связывался с практикой — с тем, как вы будете ставить задачи модели в своей инженерной работе.</a:t>
+              <a:t>Тон лекции — объяснительно-инженерный. Мы не описываем устройство трансформера во всей полноте: формулы внимания, матрицы Q/K/V, многоголовое внимание, позиционное кодирование — останется за рамками лекции. Студенту, которому нужна полная техническая картина, дальше дорога в курсы по deep learning и в каноническую статью Vaswani et al. (2017). Здесь мы целенаправленно держим уровень детализации такой, чтобы каждый внутренний механизм связывался с практикой — с тем, как вы будете ставить задачи модели в своей инженерной работе.</a:t>
             </a:r>
           </a:p>
         </p:txBody>
@@ -1598,25 +1598,25 @@
           <a:lstStyle/>
           <a:p>
             <a:r>
-              <a:t>Возьмём конкретное предложение: «Кот съел мышь, потому что она была голодна». Когда модель доходит до токена «она», ей нужно определить, к чему этот токен относится. На уровне attention это видно: над токеном «она» оказывается распределение весов, в котором наибольший вес — на токене «мышь» (по контексту так предложение и понимается), средний — на «была», тонкий — на «голодна». Если визуализировать, это три стрелки разной толщины.</a:t>
+              <a:t>Возьмём конкретное предложение: «Кот съел мышь, потому что она была голодна». Когда модель доходит до токена «она», ей нужно определить, к чему этот токен относится. На уровне внимания это видно: над токеном «она» оказывается распределение весов, в котором наибольший вес — на токене «мышь» (по контексту так предложение и понимается), средний — на «была», тонкий — на «голодна». Если визуализировать, это три стрелки разной толщины.</a:t>
             </a:r>
           </a:p>
           <a:p/>
           <a:p>
             <a:r>
-              <a:t>Важная оговорка: картинка с тремя стрелками — сильное упрощение. Реальный attention map содержит сотни связей сразу, и в каждом из десятков слоёв рисунок свой. Когда мы говорим «модель смотрит на мышь», мы агрегируем сотни значений в одну толстую стрелку. И ещё важнее: модель не делает грамматический разбор. Она статистически смотрит на токены, для которых статистика говорит «вот эти обычно связаны с "она" в подобных контекстах». Корреляция, не парсинг. Маленькое упражнение: куда смотрит модель в «Программа упала, потому что она забыла обработать null»? На большинстве современных моделей attention здесь даёт максимум на токене «программа» — это согласуется и с грамматикой, и со статистикой технических текстов.</a:t>
+              <a:t>Важная оговорка: картинка с тремя стрелками — сильное упрощение. Реальная карта внимания содержит сотни связей сразу, и в каждом из десятков слоёв рисунок свой. Когда мы говорим «модель смотрит на мышь», мы агрегируем сотни значений в одну толстую стрелку. И ещё важнее: модель не делает грамматический разбор. Она статистически смотрит на токены, для которых статистика говорит «вот эти обычно связаны с "она" в подобных контекстах». Корреляция, не парсинг. Маленькое упражнение: куда смотрит модель в «Программа упала, потому что она забыла обработать null»? На большинстве современных моделей внимание здесь даёт максимум на токене «программа» — это согласуется и с грамматикой, и со статистикой технических текстов.</a:t>
             </a:r>
           </a:p>
           <a:p/>
           <a:p>
             <a:r>
-              <a:t>Теперь — главное практическое следствие, отвечающее на первое из трёх «почему» Лекции 1. Сравним два промпта. «Объясни асинхронность» — без роли. «Ты эксперт по Python. Объясни асинхронность джуниору» — с ролью. На уровне attention второй даёт качественно другую картину. В первом случае контекст короткий, и модель опирается на самую общую статистику. Во втором в контексте есть токены «Python», «эксперт», «джуниор», и они получают существенный вес в распределении внимания. Следующий генерируемый токен выбирается из распределения, смещённого этими токенами: ответ окажется более конкретным, с более простыми объяснениями, в более экспертном регистре.</a:t>
+              <a:t>Теперь — главное практическое следствие, отвечающее на первое из трёх «почему» Лекции 1. Сравним два промпта. «Объясни асинхронность» — без роли. «Ты эксперт по Python. Объясни асинхронность джуниору» — с ролью. На уровне внимания второй даёт качественно другую картину. В первом случае контекст короткий, и модель опирается на самую общую статистику. Во втором в контексте есть токены «Python», «эксперт», «джуниор», и они получают существенный вес в распределении внимания. Следующий генерируемый токен выбирается из распределения, смещённого этими токенами: ответ окажется более конкретным, с более простыми объяснениями, в более экспертном регистре.</a:t>
             </a:r>
           </a:p>
           <a:p/>
           <a:p>
             <a:r>
-              <a:t>Рабочее объяснение: role-токены получают повышенный вес в attention-распределении при генерации первых токенов ответа. Роль в промпте — не просьба «поверь мне», а явный input-сигнал, прямо влияющий на распределение внимания. Это первый из трёх вопросов «почему», поставленных в начале лекции, и теперь мы объясняем его через механизм.</a:t>
+              <a:t>Рабочее объяснение: role-токены получают повышенный вес в распределении внимания при генерации первых токенов ответа. Роль в промпте — не просьба «поверь мне», а явный input-сигнал, прямо влияющий на распределение внимания. Это первый из трёх вопросов «почему», поставленных в начале лекции, и теперь мы объясняем его через механизм.</a:t>
             </a:r>
           </a:p>
         </p:txBody>
@@ -1711,7 +1711,7 @@
           <a:p/>
           <a:p>
             <a:r>
-              <a:t>Первая — стоимость растёт квадратично. Базовая версия attention требует, чтобы каждый из N токенов посмотрел на каждый — это N² операций на каждом attention-слое. Удваиваем длину контекста — учетверяется стоимость inference. На практике инженерные оптимизации (FlashAttention, sparse attention, sliding-window, KV-кэш) снижают константу, но квадратичная зависимость остаётся доминирующей для текущих архитектур. В цене API это видно прямо: миллион токенов входа стоит порядка в шестнадцать раз дороже, чем сто тысяч, при той же по сложности задаче. Это структурное свойство ванильной attention, и оно не зависит от того, какая именно цифра контекста на текущий момент актуальна. Любой следующий шаг отрасли — 1M, 10M, дальше — будет упираться в ту же квадратичную стенку, пока не появится принципиально другая архитектура.</a:t>
+              <a:t>Первая — стоимость растёт квадратично. Базовый механизм внимания требует, чтобы каждый из N токенов посмотрел на каждый — это N² операций на каждом слое внимания. Удваиваем длину контекста — учетверяется стоимость inference. На практике инженерные оптимизации (FlashAttention, sparse attention, sliding-window, KV-кэш) снижают константу, но квадратичная зависимость остаётся доминирующей для текущих архитектур. В цене API это видно прямо: миллион токенов входа стоит порядка в шестнадцать раз дороже, чем сто тысяч, при той же по сложности задаче. Это структурное свойство ванильного механизма внимания, и оно не зависит от того, какая именно цифра контекста на текущий момент актуальна. Любой следующий шаг отрасли — 1M, 10M, дальше — будет упираться в ту же квадратичную стенку, пока не появится принципиально другая архитектура.</a:t>
             </a:r>
           </a:p>
           <a:p/>
@@ -1799,7 +1799,7 @@
           <a:p/>
           <a:p>
             <a:r>
-              <a:t>Природа эффекта — в том, как модели учатся работать с длинным контекстом. На обучающем корпусе типичные документы устроены так, что важные утверждения находятся либо в начале (тезис), либо в конце (вывод); статистика положения важных токенов имеет U-форму. Модель усваивает эту статистику и переносит её на inference: даже если важный токен лежит в середине, модель «по привычке» меньше его взвешивает в attention. Это не баг — это inductive bias обучения, отражение того, как устроены реальные тексты.</a:t>
+              <a:t>Природа эффекта — в том, как модели учатся работать с длинным контекстом. На обучающем корпусе типичные документы устроены так, что важные утверждения находятся либо в начале (тезис), либо в конце (вывод); статистика положения важных токенов имеет U-форму. Модель усваивает эту статистику и переносит её на inference: даже если важный токен лежит в середине, модель «по привычке» меньше его взвешивает во внимании. Это не баг — это inductive bias обучения, отражение того, как устроены реальные тексты.</a:t>
             </a:r>
           </a:p>
           <a:p/>
@@ -1957,7 +1957,7 @@
           <a:lstStyle/>
           <a:p>
             <a:r>
-              <a:t>Перейдём к четвёртому, последнему этапу inference: сэмплингу. На входе сэмплинга — то, что произвели предыдущие три этапа: модель прошла токенизацию, эмбеддинги, все слои attention, и на выходе у неё распределение вероятностей на все токены словаря. То есть для каждого из ста или двухсот тысяч токенов словаря модель сказала: «вероятность того, что следующим окажется именно этот, равна такому-то значению». Сумма всех вероятностей равна единице.</a:t>
+              <a:t>Перейдём к четвёртому, последнему этапу inference: сэмплингу. На входе сэмплинга — то, что произвели предыдущие три этапа: модель прошла токенизацию, эмбеддинги, все слои внимания, и на выходе у неё распределение вероятностей на все токены словаря. То есть для каждого из ста или двухсот тысяч токенов словаря модель сказала: «вероятность того, что следующим окажется именно этот, равна такому-то значению». Сумма всех вероятностей равна единице.</a:t>
             </a:r>
           </a:p>
           <a:p/>
@@ -2257,7 +2257,7 @@
           <a:p/>
           <a:p>
             <a:r>
-              <a:t>Ответ — авторегрессионная генерация. От латинского «само-регрессирующий»: модель опирается на свои предыдущие выводы. Это циклический процесс из пяти шагов. Первый — текущий контекст: системный промпт плюс история диалога плюс новый запрос плюс всё, что модель уже сгенерировала за этот ответ. Второй — forward pass: полный проход всего контекста через четыре этапа inference, которые мы разобрали в первых трёх разделах лекции — токенизация, эмбеддинги, attention через все слои, финальный слой. На выходе forward pass — распределение вероятностей следующего токена. Третий — сэмплинг: по правилу температуры и top-p из распределения выбирается один токен. Четвёртый — добавление в контекст: выбранный токен дописывается к ответу и становится частью контекста для следующего шага. Пятый — возврат к шагу 1.</a:t>
+              <a:t>Ответ — авторегрессионная генерация. От латинского «само-регрессирующий»: модель опирается на свои предыдущие выводы. Это циклический процесс из пяти шагов. Первый — текущий контекст: системный промпт плюс история диалога плюс новый запрос плюс всё, что модель уже сгенерировала за этот ответ. Второй — forward pass: полный проход всего контекста через четыре этапа inference, которые мы разобрали в первых трёх разделах лекции — токенизация, эмбеддинги, внимание через все слои, финальный слой. На выходе forward pass — распределение вероятностей следующего токена. Третий — сэмплинг: по правилу температуры и top-p из распределения выбирается один токен. Четвёртый — добавление в контекст: выбранный токен дописывается к ответу и становится частью контекста для следующего шага. Пятый — возврат к шагу 1.</a:t>
             </a:r>
           </a:p>
           <a:p/>
@@ -2345,7 +2345,7 @@
           <a:lstStyle/>
           <a:p>
             <a:r>
-              <a:t>Описанный выше цикл inference — токенизация, эмбеддинги, attention, сэмплинг, возврат к началу — один и тот же в облачных LLM-сервисах и в локально развёрнутых моделях. С точки зрения механизма ChatGPT, Claude, GigaChat, локальная Llama 3.1 на ноутбуке или Qwen 2.5 на edge-устройстве работают одинаково. Различаются они размером модели (и, как следствие, качеством ответов) и средой исполнения.</a:t>
+              <a:t>Описанный выше цикл inference — токенизация, эмбеддинги, внимание, сэмплинг, возврат к началу — один и тот же в облачных LLM-сервисах и в локально развёрнутых моделях. С точки зрения механизма ChatGPT, Claude, GigaChat, локальная Llama 3.1 на ноутбуке или Qwen 2.5 на edge-устройстве работают одинаково. Различаются они размером модели (и, как следствие, качеством ответов) и средой исполнения.</a:t>
             </a:r>
           </a:p>
           <a:p/>
@@ -2445,7 +2445,7 @@
           <a:p/>
           <a:p>
             <a:r>
-              <a:t>Дальше — три кросс-режущих фрейма. Первый — дерево решений «когда не LLM»: ситуации, в которых классический ML, прозрачные методы или специализированная маленькая модель работают лучше большого языкового. Второй — концептуальная разница между attention как корреляционным механизмом и человеческой моделью причинности; callback на трёхуровневую иерархию Перла из Лекции 1. После этого — задание к Семинару 2 и краткий тизер Лекции 3 про агенты, RAG и MCP. И в финале — Q&amp;A до пяти минут на вопросы в зале.</a:t>
+              <a:t>Дальше — три кросс-режущих фрейма. Первый — дерево решений «когда не LLM»: ситуации, в которых классический ML, прозрачные методы или специализированная маленькая модель работают лучше большого языкового. Второй — концептуальная разница между вниманием как корреляционным механизмом и человеческой моделью причинности; callback на трёхуровневую иерархию Перла из Лекции 1. После этого — задание к Семинару 2 и краткий тизер Лекции 3 про агенты, RAG и MCP. И в финале — Q&amp;A до пяти минут на вопросы в зале.</a:t>
             </a:r>
           </a:p>
         </p:txBody>
@@ -2539,7 +2539,7 @@
           <a:p/>
           <a:p>
             <a:r>
-              <a:t>Раздел 3 — внимание. Как модель решает, на какие токены смотреть сейчас. Разберём механизм attention на конкретном примере и поймём, почему промпт с ролью «ты эксперт» действительно меняет ответ.</a:t>
+              <a:t>Раздел 3 — внимание. Как модель решает, на какие токены смотреть сейчас. Разберём механизм внимания на конкретном примере и поймём, почему промпт с ролью «ты эксперт» действительно меняет ответ.</a:t>
             </a:r>
           </a:p>
           <a:p/>
@@ -2645,7 +2645,7 @@
           <a:p/>
           <a:p>
             <a:r>
-              <a:t>**Третий — механизм внимания.** Через десятки слоёв attention модель строит распределения весов на токены контекста — какие токены сейчас важны для предсказания следующего. На выходе — распределение вероятностей на все токены словаря.</a:t>
+              <a:t>**Третий — механизм внимания.** Через десятки слоёв внимания модель строит распределения весов на токены контекста — какие токены сейчас важны для предсказания следующего. На выходе — распределение вероятностей на все токены словаря.</a:t>
             </a:r>
           </a:p>
           <a:p/>
@@ -2733,7 +2733,7 @@
           <a:p/>
           <a:p>
             <a:r>
-              <a:t>**Первое «почему»: почему промпт с ролью работает лучше пустого?** На уровне механизма внимания role-токены — «ты эксперт по X», «отвечай как Y» — получают существенный вес в attention-распределении. Модель опирается на них при выборе следующих токенов; выбор оказывается смещённым в сторону, согласованную с ролью. Это упрощённое объяснение; альтернативно тот же эффект объясняется через in-context steering и через эффекты RLHF-обучения. В любом случае: роль в промпте — это не просьба «поверь мне», а конкретный input-сигнал, влияющий на распределение внимания.</a:t>
+              <a:t>**Первое «почему»: почему промпт с ролью работает лучше пустого?** На уровне механизма внимания role-токены — «ты эксперт по X», «отвечай как Y» — получают существенный вес в распределении внимания. Модель опирается на них при выборе следующих токенов; выбор оказывается смещённым в сторону, согласованную с ролью. Это упрощённое объяснение; альтернативно тот же эффект объясняется через in-context steering и через эффекты RLHF-обучения. В любом случае: роль в промпте — это не просьба «поверь мне», а конкретный input-сигнал, влияющий на распределение внимания.</a:t>
             </a:r>
           </a:p>
           <a:p/>
@@ -2939,7 +2939,7 @@
           <a:p/>
           <a:p>
             <a:r>
-              <a:t>Тон замечания — фактический, не алармистский. Механизм внимания — мощный инструмент в области, в которой он работает. Эта область — корреляционная статистика над данными, и инженер обязан помнить границу при проектировании систем, в которых от AI ожидают каузальных выводов. Практический вывод: там, где решения требуют именно причинного вывода, привлекайте эксперта предметной области или отдельные causal-методы — attention сам по себе для этого не предназначен.</a:t>
+              <a:t>Тон замечания — фактический, не алармистский. Механизм внимания — мощный инструмент в области, в которой он работает. Эта область — корреляционная статистика над данными, и инженер обязан помнить границу при проектировании систем, в которых от AI ожидают каузальных выводов. Практический вывод: там, где решения требуют именно причинного вывода, привлекайте эксперта предметной области или отдельные причинные методы — механизм внимания сам по себе для этого не предназначен.</a:t>
             </a:r>
           </a:p>
         </p:txBody>

--- a/library/lectures/lec-02/rendered/lec-02.pptx
+++ b/library/lectures/lec-02/rendered/lec-02.pptx
@@ -1686,7 +1686,7 @@
           <a:lstStyle/>
           <a:p>
             <a:r>
-              <a:t>*[VERIFY-DAY-OF] Цифры на момент мая 2026. Темп роста ~×10 каждые 1-2 года. Перед лекцией — проверить актуальные значения для GPT-5, Claude 4.7 и Gemini.*</a:t>
+              <a:t>*Цифры приведены на май 2026 года; темп роста контекстного окна — примерно ×10 каждые 1-2 года. Перед лекцией стоит проверить актуальные значения для GPT-5, Claude 4.7 и Gemini.*</a:t>
             </a:r>
           </a:p>
           <a:p/>
@@ -2145,7 +2145,7 @@
           <a:lstStyle/>
           <a:p>
             <a:r>
-              <a:t>Соберём четыре основных параметра, которыми инженер управляет работой LLM через API. Эти четыре параметра — `temperature`, `top_p`, `max_tokens`, **системный промпт** — это и есть LO4 курса: после этого слайда вы должны уметь подобрать их под конкретный сценарий, не наугад, а с обоснованием.</a:t>
+              <a:t>Соберём четыре основных параметра, которыми инженер управляет работой LLM через API. Эти четыре параметра — `temperature`, `top_p`, `max_tokens`, **системный промпт** — ключевая практическая цель этого раздела: после этого слайда вы должны уметь подобрать их под конкретный сценарий, не наугад, а с обоснованием.</a:t>
             </a:r>
           </a:p>
           <a:p/>
@@ -26256,7 +26256,7 @@
                 </a:solidFill>
                 <a:latin typeface="Arial"/>
               </a:rPr>
-              <a:t>Закрытие, ДЗ,
+              <a:t>Закрытие,
 мост к Л3</a:t>
             </a:r>
           </a:p>

--- a/library/lectures/lec-02/rendered/lec-02.pptx
+++ b/library/lectures/lec-02/rendered/lec-02.pptx
@@ -1258,7 +1258,7 @@
           <a:p/>
           <a:p>
             <a:r>
-              <a:t>Раздел один из самых длинных в лекции — 18 минут на пять слайдов. Это сделано осознанно: механизм внимания — наиболее концептуально насыщенная часть, и его стоит проходить медленно. Один section divider на всю лекцию — здесь — чтобы дать паузу перед самым плотным куском материала.</a:t>
+              <a:t>Раздел — самый концептуально насыщенный в лекции. Это сделано осознанно: механизм внимания — самая плотная по содержанию часть, и её стоит проходить медленно. Один section divider на всю лекцию — здесь — чтобы дать паузу перед самым плотным куском материала.</a:t>
             </a:r>
           </a:p>
         </p:txBody>
@@ -2445,7 +2445,7 @@
           <a:p/>
           <a:p>
             <a:r>
-              <a:t>Дальше — три кросс-режущих фрейма. Первый — дерево решений «когда не LLM»: ситуации, в которых классический ML, прозрачные методы или специализированная маленькая модель работают лучше большого языкового. Второй — концептуальная разница между вниманием как корреляционным механизмом и человеческой моделью причинности; callback на трёхуровневую иерархию Перла из Лекции 1. После этого — задание к Семинару 2 и краткий тизер Лекции 3 про агенты, RAG и MCP. И в финале — Q&amp;A до пяти минут на вопросы в зале.</a:t>
+              <a:t>Дальше — три кросс-режущих фрейма. Первый — дерево решений «когда не LLM»: ситуации, в которых классический ML, прозрачные методы или специализированная маленькая модель работают лучше большого языкового. Второй — концептуальная разница между вниманием как корреляционным механизмом и человеческой моделью причинности; callback на трёхуровневую иерархию Перла из Лекции 1. После этого — задание к Семинару 2 и краткий тизер Лекции 3 про агенты, RAG и MCP. И в финале — Q&amp;A на вопросы в зале.</a:t>
             </a:r>
           </a:p>
         </p:txBody>
@@ -3373,7 +3373,7 @@
           <a:p/>
           <a:p>
             <a:r>
-              <a:t>Раздел занимает около одиннадцати минут. Темп держим практический: на каждом слайде есть проверяемая инженерная импликация.</a:t>
+              <a:t>Темп в разделе держим практический: на каждом слайде есть проверяемая инженерная импликация.</a:t>
             </a:r>
           </a:p>
         </p:txBody>

--- a/library/lectures/lec-02/rendered/lec-02.pptx
+++ b/library/lectures/lec-02/rendered/lec-02.pptx
@@ -539,19 +539,16 @@
               <a:t>Начнём не с AI, а с вас. Пока вы читаете это предложение, ваш мозг непрерывно решает маленькую, но важную задачу: что сейчас важно держать в фокусе, а что можно оставить фоном. Где-то на периферии — уведомление на телефоне, недодуманная мысль про вечерние планы, ощущение неудобного стула. Всё это конкурирует за один и тот же ограниченный ресурс — ваше внимание. Вы не осознаёте выбор в моменте, но он происходит постоянно.</a:t>
             </a:r>
           </a:p>
-          <a:p/>
           <a:p>
             <a:r>
               <a:t>На слайде — персонаж, которого одновременно тянут в три стороны: уведомление, посторонняя мысль, незакрытая задача. Это не про рассеянность как недостаток — это нормальная работа механизма внимания. У человека внимание ограничено: мы физически не можем одинаково полно обрабатывать всё одновременно, поэтому мозг постоянно расставляет приоритеты — что в фокус, что в фон.</a:t>
             </a:r>
           </a:p>
-          <a:p/>
           <a:p>
             <a:r>
               <a:t>Сегодняшняя лекция — про то, что происходит внутри AI-модели между вашим запросом и её ответом. И один из четырёх внутренних этапов, которые мы разберём, называется буквально так же, как то, что вы только что почувствовали — **механизм внимания**. Когда модель обрабатывает ваш текст, она тоже решает, на какие части входа «смотреть» внимательнее, а какие оставить фоном. Важная оговорка, к которой мы вернёмся в Разделе 3: сходство здесь — по названию и по общей идее «выбора приоритета», а не по устройству. Внутри модели это не психологический процесс, а конкретная вычислимая операция — матрица весов, которую можно посчитать и посмотреть. Разберём это подробно, когда дойдём до сути.</a:t>
             </a:r>
           </a:p>
-          <a:p/>
           <a:p>
             <a:r>
               <a:t>Прежде чем туда дойти — пройдём весь путь запроса через модель: токенизацию, эмбеддинги, внимание, сэмплинг. У каждого этапа — своё конкретное инженерное следствие для того, как вы работаете с AI на практике.</a:t>
@@ -627,22 +624,29 @@
               <a:t>Классическая ошибка LLM, которую можно воспроизвести почти любой моделью: на вопрос «сколько букв `r` в слове `strawberry`» модель часто отвечает «два». Правильный ответ — три. Почему так получается? Слово `strawberry` в современных tiktoken-токенизаторах разрезается на три токена: `[st]`, `[raw]`, `[berry]`. На входе в модель — три числовые единицы, не десять букв. Когда модель «отвечает» на вопрос о количестве буквы `r`, она не имеет прямого доступа к посимвольному представлению; она работает с тремя id, для каждого из которых в её памяти лежит выученный вектор. Внутри этих векторов нет явного списка «вот тут стоит буква `r` на позициях 3 и 8» — внутри векторов лежит статистическая информация о том, в каких контекстах токен `[raw]` встречается. **Модель видит токены, не буквы.**</a:t>
             </a:r>
           </a:p>
-          <a:p/>
           <a:p>
             <a:r>
               <a:t>Это явление мы будем называть **слепотой к буквам**. Это не баг и не плохое обучение — это прямое структурное следствие того, как устроена токенизация. Из той же природы вытекают три практических следствия. Первое — подсчёт символов: задачи такого вида ломают LLM не всегда, но систематически и неочевидно для пользователя. Второе — точная обработка опечаток: когда модель видит слово с опечаткой, оно может разрезаться на совершенно другие токены, чем правильное слово, и модель «видит» иной набор id; это объясняет, почему мелкие опечатки иногда вызывают неожиданно большие изменения в ответе. Третье — чувствительность к регистру и пробелам: `cat`, ` cat` с ведущим пробелом, `Cat`, `CAT` могут оказаться разными токенами с разными выученными векторами.</a:t>
             </a:r>
           </a:p>
-          <a:p/>
           <a:p>
             <a:r>
               <a:t>Инженерный вывод: если ваша задача требует точной посимвольной операции — подсчёта символов, поиска подстроки по точному совпадению, преобразования регистра, проверки соответствия регулярному выражению — не делайте её чистым LLM-инференсом. Используйте внешний инструмент: код в Python sandbox, регулярное выражение, специализированный микросервис. Современные топ-модели (o1-класс, Claude 4.7, GPT-5) часто отвечают на `strawberry` правильно — но не потому, что один forward-pass через нейросеть умеет посимвольно работать со строкой, а потому, что модель внутри вызывает Python-инструмент или генерирует явный пошаговый подсчёт. Структурный факт «AI не видит букв, видит токены» при этом не меняется.</a:t>
             </a:r>
           </a:p>
-          <a:p/>
           <a:p>
             <a:r>
               <a:t>Та же природа объясняет вторую, менее очевидную проблему — арифметику. Числа тоже проходят через токенизатор, и разбиение на токены непредсказуемо совпадает с разрядами: `1234` может разрезаться на `12`+`34` (совпадает с сотнями), а `55688` — на `556`+`88` (уже не совпадает). Модель не видит цифры по отдельности — она видит эти нерегулярные группы. Следствие измеримо: на 3-значном умножении GPT-4 без внешних инструментов даёт около 59% точности, на 4-значном — уже 4%, а на 5-значном — 0% (arXiv 2410.19730). Решение то же самое, что и для букв: внешний калькулятор или код, либо явный пошаговый вывод, а не один прямой проход модели.</a:t>
+            </a:r>
+          </a:p>
+          <a:p>
+            <a:r>
+              <a:t>Источники:</a:t>
+            </a:r>
+          </a:p>
+          <a:p>
+            <a:r>
+              <a:t>[1] Counting Ability of LLMs &amp; Impact of Tokenization (2024) — GPT-4 без калькулятора: 59%/4%/0% на 3-/4-/5-значном умножении — тот же tokenizer-cut механизм. https://arxiv.org/abs/2410.19730 [VFY-day-of]</a:t>
             </a:r>
           </a:p>
         </p:txBody>
@@ -715,19 +719,16 @@
               <a:t>Одно и то же текстовое сообщение в API стоит разное число токенов в зависимости от языка. Это прямое следствие того, что BPE-словарь учится на корпусе, в котором английский язык представлен заметно шире других. Для английского много частых подпоследовательностей укладывается в одиночные токены; для русского, китайского, японского, кода — токенов в среднем больше на тот же по смыслу текст.</a:t>
             </a:r>
           </a:p>
-          <a:p/>
           <a:p>
             <a:r>
               <a:t>Ориентировочные цифры в токенах на символ для современных токенизаторов GPT-семейства. Для естественного английского — около 0.25 токена на символ: текст из 100 символов занимает примерно 25 токенов. Для русского — около 0.5 токена на символ: тот же по смыслу текст из 100 символов занимает примерно 50 токенов. Для китайского — около 0.8 токена на символ, потому что один иероглиф часто соответствует одному или нескольким токенам. Для Python-кода — около 0.4 токена на символ. Эти числа — порядок, не точная формула: разные источники дают разброс от 1.5× до 2.5× в зависимости от характера текста и версии токенизатора.</a:t>
             </a:r>
           </a:p>
-          <a:p/>
           <a:p>
             <a:r>
               <a:t>Инженерное следствие важно: обращение к API на русском обходится примерно в два раза дороже, чем на английском, за один и тот же по смыслу запрос. Если у вас batch-задача — массовая обработка тысяч документов — и предметная область допускает работу на английском, имеет смысл перевести входы и выходы на английский для экономии. Это не означает «всегда работать на английском»: для большинства интерактивных задач удобство и качество ответа важнее разницы в стоимости. Но при больших объёмах это значимый фактор бюджета.</a:t>
             </a:r>
           </a:p>
-          <a:p/>
           <a:p>
             <a:r>
               <a:t>Дополнительное следствие — контекстное окно тоже расходуется неравномерно. Контекстное окно у современных моделей измеряется в токенах, не в словах и не в символах. Документ объёмом 80 тысяч символов на английском уместится в 20 тысяч токенов; тот же документ на русском займёт примерно 40 тысяч. Для модели с окном 32 тысячи второй вариант не поместится. Цифра «в 2 раза дороже» относится к актуальным токенизаторам GPT-семейства; для специализированных моделей с увеличенной долей русского в обучающих данных (YandexGPT, GigaChat) разрыв может быть меньше.</a:t>
@@ -803,13 +804,11 @@
               <a:t>Мы прошли первый этап — токенизация. Текст превращается в последовательность id из словаря модели. Дальше — второй этап, эмбеддинги. Это шаг, на котором каждый id из словаря заменяется на вектор в многомерном пространстве: для маленьких embedding-моделей это 384 или 1536 измерений, для внутренних слоёв больших LLM — тысячи. И ключевое свойство этого пространства, которое было выучено на тренировке: геометрическая близость векторов отражает семантическую близость токенов и фрагментов.</a:t>
             </a:r>
           </a:p>
-          <a:p/>
           <a:p>
             <a:r>
               <a:t>Эмбеддинги — это не интересный сам по себе слой; модель внутри использует их как промежуточный шаг к вниманию и сэмплингу. Зачем нам про них говорить отдельно? Потому что на них стоит целое прикладное направление: similarity, кластеризация и семантический поиск. И семантический поиск — это базовый слой RAG, Retrieval-Augmented Generation, к которому мы вернёмся в Лекции 3.</a:t>
             </a:r>
           </a:p>
-          <a:p/>
           <a:p>
             <a:r>
               <a:t>В этом разделе четыре слайда плюс этот разделитель. Сначала зафиксируем, что такое эмбеддинг через схему «токен → вектор». Потом разберём sentence similarity — близость на уровне предложений на современных embeddings 2026 года, не только на уровне слов. Затем три практических применения: similarity, clustering, search, — карта для последующих лекций. И завершим разделом сравнением семантического поиска с full-text поиском на простом запросе «клубника» — что находит один, а что другой.</a:t>
@@ -885,22 +884,34 @@
               <a:t>Когда мы сказали «токен — это id из словаря», осталась открытая часть: как модель работает с этим id. Прямо с числом она не работает — между токенами нет осмысленной арифметики, и модели нужен способ представить «значение» каждого токена в форме, пригодной для нейросети. Этот способ — **эмбеддинг**, или **векторное представление**.</a:t>
             </a:r>
           </a:p>
-          <a:p/>
           <a:p>
             <a:r>
               <a:t>Каждому токену словаря модели сопоставлен вектор фиксированной длины — список чисел с плавающей точкой. Для токена `[кот]` в гипотетической модели вектор может выглядеть как `[0.21, -0.45, 0.88, ..., 0.13]` — несколько сотен или несколько тысяч чисел. Вектор не назначается вручную; он выучивается на этапе обучения модели вместе со всеми остальными весами нейросети. Когда обучение заканчивается, таблица «токен → вектор» — embedding table — фиксируется и в дальнейшем не меняется. На inference модель просто делает lookup: получает id токена, забирает соответствующий вектор из таблицы, передаёт в следующий слой.</a:t>
             </a:r>
           </a:p>
-          <a:p/>
           <a:p>
             <a:r>
               <a:t>Размер вектора — гиперпараметр конкретной модели. Несколько публичных ориентиров для специализированных embedding-моделей OpenAI: `text-embedding-3-small` — 1536 измерений; `text-embedding-3-large` — 3072 измерения. Размерности внутренних embedding-таблиц у flagship-LLM (GPT-4, Claude и т.п.) официально не публикуются; по неофициальным оценкам их порядок — несколько тысяч до десяти с лишним тысяч измерений. Для целей этой лекции важен не точный размер, а порядок: тысячи измерений.</a:t>
             </a:r>
           </a:p>
-          <a:p/>
           <a:p>
             <a:r>
               <a:t>Главное свойство эмбеддингов: геометрическая близость в этом пространстве соответствует смысловой близости. «Кот» близко к «собаке»; «врач» близко к «терапевту»; «SSL» близко к «HTTPS». При этом модель никем не была явно обучена «кот и собака — одна категория» — это свойство возникло само из того, что в обучающем корпусе оба слова часто появлялись в похожих контекстах. Близость в эмбеддинг-пространстве — это статистическое отражение того, как слова используются, не семантический справочник, написанный человеком.</a:t>
+            </a:r>
+          </a:p>
+          <a:p>
+            <a:r>
+              <a:t>Источники:</a:t>
+            </a:r>
+          </a:p>
+          <a:p>
+            <a:r>
+              <a:t>[1] OpenAI — Embeddings API — публичные эмбеддинги: text-embedding-3-small 1536, large 3072 измерения. https://platform.openai.com/docs/guides/embeddings [VFY-day-of]</a:t>
+            </a:r>
+          </a:p>
+          <a:p>
+            <a:r>
+              <a:t>[2] Mikolov et al. (2013) — word2vec — исторический контекст: геометрическая близость = смысловая близость. https://arxiv.org/abs/1301.3781</a:t>
             </a:r>
           </a:p>
         </p:txBody>
@@ -973,25 +984,21 @@
               <a:t>Прежде чем перейти к sentence similarity, важно понять, в каком именно пространстве живут эмбеддинги. Это первый момент в лекции, когда мы говорим про «многомерные пространства», и интуиция здесь обычно сбивает.</a:t>
             </a:r>
           </a:p>
-          <a:p/>
           <a:p>
             <a:r>
               <a:t>Когда мы говорим «пространство эмбеддингов», мы имеем в виду математическое пространство — векторное пространство, в котором каждой точкой является один вектор. Этот вектор состоит из чисел: 1536 чисел для OpenAI `text-embedding-3-small`, 3072 для `text-embedding-3-large`, и тысячи для внутренних эмбеддингов flagship-моделей. Каждое число — это координата по своему «направлению» или «измерению». В отличие от трёхмерного пространства, к которому мы привыкли по физическому миру, у этих измерений нет очевидного смысла «вверх-вниз» или «вправо-влево». Это абстрактные направления, которые модель выучила в процессе обучения.</a:t>
             </a:r>
           </a:p>
-          <a:p/>
           <a:p>
             <a:r>
               <a:t>Что значит «выучила»? Цель обучения — устроить пространство так, чтобы токены, которые в обучающем корпусе появлялись в похожих контекстах, лежали близко друг к другу. Слова `кот` и `собака` встречаются рядом со словами типа `кормить`, `гладить`, `питомец` — и в результате их эмбеддинги получаются близкими. То же самое со словами `Python` и `JavaScript` — они появляются рядом со словами `код`, `функция`, `переменная`. Эта структура возникает не из правил, а из статистики: модель видела миллионы примеров и подстроила числа так, чтобы геометрия пространства отражала семантику языка.</a:t>
             </a:r>
           </a:p>
-          <a:p/>
           <a:p>
             <a:r>
               <a:t>Чтобы такое пространство хоть как-то увидеть — нужна **проекция**. На слайде слева — упрощённая 2D-проекция: 8 точек, разделённых на три смысловых кластера. Реальная проекция получается из 1536-мерного пространства через алгоритмы PCA (главных компонент) или t-SNE; они выбирают такие две оси, на которых видно максимум различий между точками. Но любая 2D-проекция теряет часть информации — реальная структура многомерна, и красиво нарисовать её на плоскости невозможно.</a:t>
             </a:r>
           </a:p>
-          <a:p/>
           <a:p>
             <a:r>
               <a:t>Главное практическое следствие: семантическая близость = геометрическая близость векторов. Дальше, на следующем слайде, мы измерим эту близость числом — через cosine similarity — и увидим, что это работает не только на словах, но и на целых предложениях.</a:t>
@@ -1067,22 +1074,29 @@
               <a:t>Word2Vec в 2013 году — историческая отправная точка для разговора об эмбеддингах: первая широко известная модель, в которой выученные векторы слов показывали семантические аналогии. С тех пор поле прошло несколько поколений моделей, и в 2026 году инженерная практика опирается на эмбеддинги **предложений и документов**, а не на эмбеддинги отдельных слов. Это качественный сдвиг: теперь мы можем сравнивать смысл целых формулировок, не выдёргивая отдельные слова.</a:t>
             </a:r>
           </a:p>
-          <a:p/>
           <a:p>
             <a:r>
               <a:t>На слайде — таблица 5×5 cosine similarity для пяти коротких предложений. Парная картина типична для современных embedding-моделей. Предложения 1 и 2 — «Как настроить SSL» и «Установка HTTPS-сертификата» — синонимы в домене веб-безопасности; их cosine similarity около 0.85. Предложения 3 и 4 — «Деплой React-компонента» и «Сборка React-приложения» — оба про работу с React; cosine около 0.78. Предложение 5 — «Рецепт борща» — против любого технического даёт значения в диапазоне 0.05–0.15. Низкие, но не нулевые: даже совершенно разные домены имеют немного общей лексической структуры.</a:t>
             </a:r>
           </a:p>
-          <a:p/>
           <a:p>
             <a:r>
               <a:t>Этот пример показывает главное: современный эмбеддинг захватывает смысл, а не точное совпадение строк. «SSL» и «HTTPS» — разные строки, но они близкие в эмбеддинг-пространстве, потому что в обучающем корпусе они появлялись в одних и тех же контекстах. То же касается «React» в разных формулировках задач и любых пар синонимов в техническом языке.</a:t>
             </a:r>
           </a:p>
-          <a:p/>
           <a:p>
             <a:r>
               <a:t>Технический момент про cosine similarity: формально это скалярное произведение векторов, делённое на произведение их длин. Геометрический смысл — косинус угла между векторами. Если векторы сонаправлены, cosine равен 1; ортогональны — 0; противоположны — минус 1. На практике в эмбеддинг-пространствах LLM значения почти всегда лежат в диапазоне от 0 до 1, и инженер интерпретирует их как «насколько A похоже на B по смыслу». Точные пороги — выше какого значения считать документы похожими — зависят от задачи и подбираются эмпирически. Конкретные числа на слайде — illustrative; их можно воспроизвести бесплатно через open-source модель `sentence-transformers/all-MiniLM-L6-v2`.</a:t>
+            </a:r>
+          </a:p>
+          <a:p>
+            <a:r>
+              <a:t>Источники:</a:t>
+            </a:r>
+          </a:p>
+          <a:p>
+            <a:r>
+              <a:t>[1] воспроизводимо: all-MiniLM-L6-v2 / text-embedding-3-small — числа illustrative; cosine близость — статистика употребления, не семантический справочник. https://platform.openai.com/docs/guides/embeddings [VFY-day-of]</a:t>
             </a:r>
           </a:p>
         </p:txBody>
@@ -1155,22 +1169,29 @@
               <a:t>Соберём то, что мы прошли в этом разделе, и переформулируем главное практическое следствие. Эмбеддинги — это не отдельный «слой» LLM, это **фундамент**, на котором стоит всё остальное. Модель внутри работает не со словами и не со строками — она работает с векторами в высокоразмерном пространстве. Слова появляются только на самой границе: на входе они через токенизацию превращаются в id из словаря, дальше через lookup в embedding table — в векторы. И обратно: на выходе модель выдаёт распределение по векторам, из распределения сэмплируется один — это становится id токена, и через de-tokenize выходит обратно в слова.</a:t>
             </a:r>
           </a:p>
-          <a:p/>
           <a:p>
             <a:r>
               <a:t>На слайде — схема в обе стороны. Вход: `Привет, мир` → токенизация → `[Прив][ет][,][ мир]` → lookup → векторы. Сами векторы попадают в основной механизм inference, который мы разберём в Разделе 3. Выход: внутренний вектор-кандидат → distribution → выбор одного токена через сэмплинг → de-tokenize → слово. Между «человеческим» вводом и «человеческим» выводом — путь полностью векторный.</a:t>
             </a:r>
           </a:p>
-          <a:p/>
           <a:p>
             <a:r>
               <a:t>И это объясняет, что мы интуитивно называем «пониманием» LLM. Когда вы спрашиваете «Как настроить SSL», а потом — «Установка HTTPS-сертификата», модель отвечает похоже, потому что эти два предложения попадают в близкие точки векторного пространства, и весь внутренний механизм работает на этих векторах одинаково. То же про синонимы — «авто» и «машина» — и про cross-lingual: «клубника» и `strawberry` дают близкие эмбеддинги, и модель отвечает корректно независимо от того, на каком языке к ней обратились.</a:t>
             </a:r>
           </a:p>
-          <a:p/>
           <a:p>
             <a:r>
               <a:t>Что важно для практики: всё, что вы делаете с LLM — построение промптов, RAG-системы, рассуждения над документами, кросс-язык — упирается в то, как эмбеддинги выучены. Это инженерный фундамент, и инвестиции в правильную embedding-модель для вашего домена окупаются на следующих слоях. К конкретному применению эмбеддингов в системах поиска и retrieval мы вернёмся в Лекции 3 — RAG.</a:t>
+            </a:r>
+          </a:p>
+          <a:p>
+            <a:r>
+              <a:t>Источники:</a:t>
+            </a:r>
+          </a:p>
+          <a:p>
+            <a:r>
+              <a:t>[1] Lewis et al. (2020) — RAG — эмбеддинг ловит смысл, а не строку: основа semantic search / RAG. https://arxiv.org/abs/2005.11401</a:t>
             </a:r>
           </a:p>
         </p:txBody>
@@ -1243,19 +1264,16 @@
               <a:t>Мы прошли два этапа конвейера inference. Первый — токенизация: текст разрезается на токены, каждый получает id из словаря модели. Второй — эмбеддинги: каждому id ставится в соответствие выученный вектор, и геометрическая близость в этом пространстве отражает смысловую близость.</a:t>
             </a:r>
           </a:p>
-          <a:p/>
           <a:p>
             <a:r>
               <a:t>Раздел 3 — про третий этап и про самый плотный для понимания механизм лекции: **механизм внимания**, или **attention**. На вход у нас уже есть последовательность эмбеддингов токенов; на выходе нужно решить, на какие из них модель опирается сильнее всего, когда генерирует следующий токен. Именно это «решение, на что смотреть» делает механизм внимания. От него зависит, почему промпт с ролью работает лучше пустого, что такое контекстное окно и какие у него ограничения, почему важная информация в середине длинного промпта систематически теряется.</a:t>
             </a:r>
           </a:p>
-          <a:p/>
           <a:p>
             <a:r>
               <a:t>В этом разделе четыре слайда плюс этот разделитель. Сначала мы зафиксируем базовое определение через метафору фонарика в тёмной комнате — без формул, без матриц Q/K/V, без многоголового внимания. Потом разберём рабочий пример на конкретном предложении и из него выведем эффект роли в промпте — первое из трёх «почему» Лекции 1. Затем поговорим про контекстное окно как физический предел и про квадратичную стоимость внимания. И завершим раздел разбором эффекта «lost in the middle» — почему большое окно не значит хорошее использование контекста.</a:t>
             </a:r>
           </a:p>
-          <a:p/>
           <a:p>
             <a:r>
               <a:t>Раздел — самый концептуально насыщенный в лекции. Это сделано осознанно: механизм внимания — самая плотная по содержанию часть, и её стоит проходить медленно. Один section divider на всю лекцию — здесь — чтобы дать паузу перед самым плотным куском материала.</a:t>
@@ -1331,31 +1349,26 @@
               <a:t>В предыдущем слайде раздела — заголовке — мы сказали, что внимание выдаёт «распределение весов на все токены контекста». Этот слайд раскрывает важную деталь: внимание — не линейная операция, а **матричная**. Это значит, что каждый токен в контексте смотрит на каждый — и для контекста длины N матрица имеет размер N × N. Эта деталь принципиальна для понимания того, что будет дальше про context window.</a:t>
             </a:r>
           </a:p>
-          <a:p/>
           <a:p>
             <a:r>
               <a:t>На слайде слева — упрощённая 7×7 матрица для предложения «Кот съел мышь, потому что она была голодна». Каждая строка — это «один токен запроса смотрит на все остальные», каждый столбец — «насколько именно этот токен влияет». Числа условные, illustrative — реальные веса внимания выглядят сложнее, и сумма по строке должна равняться единице (нормировка через softmax). Но качественно картина типична: токен «она» имеет наибольший вес — 0.7 — на токен «мышь». Это и есть, что мы интуитивно называем «модель поняла, на что ссылается местоимение». Технически — это статистическая связь, выученная на огромном корпусе текстов, в которых местоимения женского рода чаще всего относятся к ближайшему существительному женского рода.</a:t>
             </a:r>
           </a:p>
-          <a:p/>
           <a:p>
             <a:r>
               <a:t>Три важных следствия от того, что внимание — это матрица.</a:t>
             </a:r>
           </a:p>
-          <a:p/>
           <a:p>
             <a:r>
               <a:t>Первое — **квадратичная стоимость**. Для контекста из 100 000 токенов матрица содержит 10 миллиардов чисел. Это объясняет, почему длинные контексты дорогие: даже линейное увеличение длины контекста даёт квадратичное увеличение объёма вычислений и памяти под внимание. Эту тему мы разовьём через слайд — про context window.</a:t>
             </a:r>
           </a:p>
-          <a:p/>
           <a:p>
             <a:r>
               <a:t>Второе — **пересчёт на каждом шаге**. LLM генерирует токен за токеном, и на каждой новой генерации матрица внимания заново строится на текущем расширенном контексте. Это не «один раз посчитали — пользуемся весь генерацию»; это «на каждый новый токен — новая матрица».</a:t>
             </a:r>
           </a:p>
-          <a:p/>
           <a:p>
             <a:r>
               <a:t>Третье — **multi-head**. На самом деле в одном слое внимания работает не одна матрица, а десятки параллельно. Это называется multi-head attention (многоголовое внимание). Разные «головы» смотрят на разные паттерны: одна может фокусироваться на грамматических связях, другая — на тематической близости, третья — на длинных зависимостях. Разделение работы между головами — одна из ключевых архитектурных идей трансформера. Для пользователя LLM это деталь, но она объясняет, почему механизм внимания справляется с разными типами зависимостей одновременно — потому что под капотом параллельно работает несколько разных «взглядов» на одни и те же токены.</a:t>
@@ -1431,22 +1444,29 @@
               <a:t>Третий этап конвейера — механизм внимания. На входе у нас уже есть последовательность эмбеддингов токенов; на выходе нужно решить, на какие из них модель опирается сильнее всего, когда генерирует следующий токен. Именно это «решение, на что смотреть» делает механизм внимания.</a:t>
             </a:r>
           </a:p>
-          <a:p/>
           <a:p>
             <a:r>
               <a:t>Удобная метафора — **фонарик в тёмной комнате**. Представьте, что вы стоите в комнате с большим количеством предметов — это все токены контекста, — и вам нужно ответить на конкретный вопрос (предсказать следующий токен). Вы не можете одновременно ярко осветить всё; вы направляете фонарик на те предметы, которые сейчас релевантны вопросу. То, что в центре луча, видно ярко; то, что на периферии, — тускло. Метафора удерживается в одном слове: внимание — это распределение света по сцене, и это распределение меняется в зависимости от того, что мы сейчас спрашиваем.</a:t>
             </a:r>
           </a:p>
-          <a:p/>
           <a:p>
             <a:r>
               <a:t>Формально на каждом шаге для каждой позиции механизм внимания возвращает распределение весов на все остальные токены контекста. Сумма весов равна единице. Один большой вес означает «я сильно опираюсь на этот токен»; маленький вес — «этот токен сейчас мне почти не важен». Никакой явной формулы здесь приводить не будем — для понимания пользователя достаточно зафиксировать три факта: на вход механизм внимания получает все токены контекста (не один и не часть, а все, сколько их есть); на выходе для каждого токена есть распределение весов с суммой 1; это распределение пересчитывается на каждом шаге генерации.</a:t>
             </a:r>
           </a:p>
-          <a:p/>
           <a:p>
             <a:r>
               <a:t>В реальной модели механизм внимания устроен сложнее: в каждом слое работает не один, а несколько параллельных «голов» внимания (multi-head attention — многоголовое внимание, типично 32–128 голов в современных моделях), и каждая голова смотрит на свой аспект — кто-то ловит грамматические связи, кто-то семантические, кто-то длинные дальнодействующие зависимости. Слоёв в современной модели — десятки и сотни. Для нашего уровня детализации эти числа — справочный факт; полная техническая конструкция с матрицами Q, K, V, скейлингом через корень из размерности, маскированием и residual connections — выходит за рамки лекции; полная картина — в каноническом источнике Vaswani et al. (2017).</a:t>
+            </a:r>
+          </a:p>
+          <a:p>
+            <a:r>
+              <a:t>Источники:</a:t>
+            </a:r>
+          </a:p>
+          <a:p>
+            <a:r>
+              <a:t>[1] Vaswani et al. (2017) — Attention Is All You Need — attention выдаёт распределение весов на токены контекста (Σ=1); 32–128 голов на слой. https://arxiv.org/abs/1706.03762</a:t>
             </a:r>
           </a:p>
         </p:txBody>
@@ -1519,13 +1539,11 @@
               <a:t>Сегодняшняя лекция — вторая в курсе. Лекция 1 заложила слоистую картину «модель → чат → агент → приложение» и описала самый нижний слой, модель, как stateless-инференс: на вход данные, на выход предсказание, без памяти между вызовами. Этого описания было достаточно, чтобы говорить, где именно используется модель в большей системе, но недостаточно, чтобы говорить, что внутри этой модели происходит. Сегодня мы аккуратно разбираем чёрный ящик на четыре этапа.</a:t>
             </a:r>
           </a:p>
-          <a:p/>
           <a:p>
             <a:r>
               <a:t>Дорожная карта внизу слайда соответствует этим четырём этапам: токенизация, эмбеддинги, механизм внимания, сэмплинг. Каждому посвящён отдельный раздел. После четырёх разделов мы возвращаемся к трём практическим вопросам, которые Лекция 1 оставила без ответа: почему промпт с ролью работает лучше пустого, почему AI плохо считает буквы, почему один и тот же запрос даёт разные ответы. На все три ответим через конкретный внутренний механизм, не через интуицию.</a:t>
             </a:r>
           </a:p>
-          <a:p/>
           <a:p>
             <a:r>
               <a:t>Тон лекции — объяснительно-инженерный. Мы не описываем устройство трансформера во всей полноте: формулы внимания, матрицы Q/K/V, многоголовое внимание, позиционное кодирование — останется за рамками лекции. Студенту, которому нужна полная техническая картина, дальше дорога в курсы по deep learning и в каноническую статью Vaswani et al. (2017). Здесь мы целенаправленно держим уровень детализации такой, чтобы каждый внутренний механизм связывался с практикой — с тем, как вы будете ставить задачи модели в своей инженерной работе.</a:t>
@@ -1601,19 +1619,16 @@
               <a:t>Возьмём конкретное предложение: «Кот съел мышь, потому что она была голодна». Когда модель доходит до токена «она», ей нужно определить, к чему этот токен относится. На уровне внимания это видно: над токеном «она» оказывается распределение весов, в котором наибольший вес — на токене «мышь» (по контексту так предложение и понимается), средний — на «была», тонкий — на «голодна». Если визуализировать, это три стрелки разной толщины.</a:t>
             </a:r>
           </a:p>
-          <a:p/>
           <a:p>
             <a:r>
               <a:t>Важная оговорка: картинка с тремя стрелками — сильное упрощение. Реальная карта внимания содержит сотни связей сразу, и в каждом из десятков слоёв рисунок свой. Когда мы говорим «модель смотрит на мышь», мы агрегируем сотни значений в одну толстую стрелку. И ещё важнее: модель не делает грамматический разбор. Она статистически смотрит на токены, для которых статистика говорит «вот эти обычно связаны с "она" в подобных контекстах». Корреляция, не парсинг. Маленькое упражнение: куда смотрит модель в «Программа упала, потому что она забыла обработать null»? На большинстве современных моделей внимание здесь даёт максимум на токене «программа» — это согласуется и с грамматикой, и со статистикой технических текстов.</a:t>
             </a:r>
           </a:p>
-          <a:p/>
           <a:p>
             <a:r>
               <a:t>Теперь — главное практическое следствие, отвечающее на первое из трёх «почему» Лекции 1. Сравним два промпта. «Объясни асинхронность» — без роли. «Ты эксперт по Python. Объясни асинхронность джуниору» — с ролью. На уровне внимания второй даёт качественно другую картину. В первом случае контекст короткий, и модель опирается на самую общую статистику. Во втором в контексте есть токены «Python», «эксперт», «джуниор», и они получают существенный вес в распределении внимания. Следующий генерируемый токен выбирается из распределения, смещённого этими токенами: ответ окажется более конкретным, с более простыми объяснениями, в более экспертном регистре.</a:t>
             </a:r>
           </a:p>
-          <a:p/>
           <a:p>
             <a:r>
               <a:t>Рабочее объяснение: role-токены получают повышенный вес в распределении внимания при генерации первых токенов ответа. Роль в промпте — не просьба «поверь мне», а явный input-сигнал, прямо влияющий на распределение внимания. Это первый из трёх вопросов «почему», поставленных в начале лекции, и теперь мы объясняем его через механизм.</a:t>
@@ -1689,35 +1704,39 @@
               <a:t>*Цифры приведены на май 2026 года; темп роста контекстного окна — примерно ×10 каждые 1-2 года. Перед лекцией стоит проверить актуальные значения для GPT-5, Claude 4.7 и Gemini.*</a:t>
             </a:r>
           </a:p>
-          <a:p/>
-          <a:p/>
           <a:p>
             <a:r>
               <a:t>Механизм внимания работает на всех токенах контекста, что приводит к естественному ограничению: контекстное окно — это максимальное количество токенов, которое модель может обработать за один запрос. Лекция 1 уже вводила понятие на уровне «когда история чата плюс новое сообщение перестают помещаться, старые сообщения выпадают». Сейчас мы углубляем: почему именно есть верхний предел и почему он стоит денег.</a:t>
             </a:r>
           </a:p>
-          <a:p/>
           <a:p>
             <a:r>
               <a:t>Контекстное окно за последние три года выросло на порядки. Несколько ключевых точек на момент верификации в мае 2026. GPT-3.5 в момент релиза ChatGPT в 2022 году — около 4 тысяч токенов. Claude 3.5 в середине 2024 года — 200 тысяч токенов. Claude 4.7 и актуальные flagship-модели OpenAI в 2026 году — порядка одного миллиона токенов. Если к моменту чтения какие-то цифры уже сдвинулись — это нормально, индустрия движется быстро. Важен порядок (тысячи → сотни тысяч → миллион) и темп роста (увеличение примерно на порядок каждые один-два года), а не конкретные числа.</a:t>
             </a:r>
           </a:p>
-          <a:p/>
           <a:p>
             <a:r>
               <a:t>Один миллион токенов — это, очень грубо, 1500–2000 страниц текста на английском. Кажется, что теперь модель «видит всё» и проблема исчезла. Это впечатление обманчиво по двум причинам.</a:t>
             </a:r>
           </a:p>
-          <a:p/>
           <a:p>
             <a:r>
               <a:t>Первая — стоимость растёт квадратично. Базовый механизм внимания требует, чтобы каждый из N токенов посмотрел на каждый — это N² операций на каждом слое внимания. Удваиваем длину контекста — учетверяется стоимость inference. На практике инженерные оптимизации (FlashAttention, sparse attention, sliding-window, KV-кэш) снижают константу, но квадратичная зависимость остаётся доминирующей для текущих архитектур. В цене API это видно прямо: миллион токенов входа стоит порядка в шестнадцать раз дороже, чем сто тысяч, при той же по сложности задаче. Это структурное свойство ванильного механизма внимания, и оно не зависит от того, какая именно цифра контекста на текущий момент актуальна. Любой следующий шаг отрасли — 1M, 10M, дальше — будет упираться в ту же квадратичную стенку, пока не появится принципиально другая архитектура.</a:t>
             </a:r>
           </a:p>
-          <a:p/>
           <a:p>
             <a:r>
               <a:t>Вторая причина, по которой большое окно не панацея, — модель не одинаково хорошо использует все позиции в окне. Этому посвящён следующий слайд.</a:t>
+            </a:r>
+          </a:p>
+          <a:p>
+            <a:r>
+              <a:t>Источники:</a:t>
+            </a:r>
+          </a:p>
+          <a:p>
+            <a:r>
+              <a:t>[1] Anthropic — контекстное окно моделей Claude — рост окна 4k→200k→1M; порядок важнее точной цифры. https://www.anthropic.com/news/model-context-protocol [VFY-day-of]</a:t>
             </a:r>
           </a:p>
         </p:txBody>
@@ -1790,22 +1809,29 @@
               <a:t>В 2023 году группа из Stanford и UC Berkeley опубликовала работу с провокационным названием «Lost in the Middle: How Language Models Use Long Contexts». Эмпирический вопрос: если модель умеет принимать 100 тысяч токенов на вход, одинаково ли хорошо она использует разные позиции в этом окне?</a:t>
             </a:r>
           </a:p>
-          <a:p/>
           <a:p>
             <a:r>
               <a:t>Эксперимент. В большой контекст — десятки тысяч токенов из произвольных документов — вставляется один значимый факт: в начале, в середине или в конце. Затем модель спрашивают факт и считают точность ответа. Результаты дают характерную U-образную кривую: точность около 70–80% когда факт лежит в начале, проседает до ~50% в середине, и снова поднимается до 70–80% к концу. Феномен авторы назвали «потеря в середине».</a:t>
             </a:r>
           </a:p>
-          <a:p/>
           <a:p>
             <a:r>
               <a:t>Природа эффекта — в том, как модели учатся работать с длинным контекстом. На обучающем корпусе типичные документы устроены так, что важные утверждения находятся либо в начале (тезис), либо в конце (вывод); статистика положения важных токенов имеет U-форму. Модель усваивает эту статистику и переносит её на inference: даже если важный токен лежит в середине, модель «по привычке» меньше его взвешивает во внимании. Это не баг — это inductive bias обучения, отражение того, как устроены реальные тексты.</a:t>
             </a:r>
           </a:p>
-          <a:p/>
           <a:p>
             <a:r>
               <a:t>Инженерный вывод. Если у вас длинный промпт с инструкциями или данными — самое важное помещайте в начало или в конец, не в середину. Частая ошибка — длинная преамбула с критическим ограничением, утопленным посередине; такую инструкцию модель будет систематически игнорировать. Решение: переписать промпт так, чтобы критические инструкции стояли в самом начале (system prompt) или были повторены явно в конце прямо перед задачей. Это объясняет также, почему «просто засунуть всю документацию в большое окно» — плохая стратегия для RAG. Хороший retrieval, возвращающий 5–10 целевых фрагментов в начале промпта, систематически работает лучше, чем загрузка всей базы в гигантское окно. К этому вернёмся в Лекции 3.</a:t>
+            </a:r>
+          </a:p>
+          <a:p>
+            <a:r>
+              <a:t>Источники:</a:t>
+            </a:r>
+          </a:p>
+          <a:p>
+            <a:r>
+              <a:t>[1] Liu et al. (2023) — Lost in the Middle — U-shape: точность проседает в середине окна; важное — в начало/конец промпта. https://arxiv.org/abs/2307.03172</a:t>
             </a:r>
           </a:p>
         </p:txBody>
@@ -1878,13 +1904,11 @@
               <a:t>Мы закрыли раздел про внимание: модель умеет распределять важность по токенам контекста. Но на этом inference ещё не закончен. У модели есть промежуточный внутренний результат — распределение вероятностей на все ~200 тысяч токенов словаря, — и она должна из этого распределения выбрать ровно один токен, который и станет следующим в ответе.</a:t>
             </a:r>
           </a:p>
-          <a:p/>
           <a:p>
             <a:r>
               <a:t>Этот шаг и называется сэмплингом. От него зависит то, что воспринимается пользователем как «стиль» модели: насколько детерминированно она отвечает на одинаковые запросы, насколько креативна или скучна, насколько предсказуема. И именно сэмплинг закрывает третье из трёх «почему» Лекции 1: почему один и тот же запрос даёт разные ответы.</a:t>
             </a:r>
           </a:p>
-          <a:p/>
           <a:p>
             <a:r>
               <a:t>В этом разделе пять слайдов. Сначала зафиксируем, что такое распределение вероятностей на конкретном примере с предсказанием следующего токена. Потом разберём главную ручку API — температуру — на трёх режимах: T=0 (детерминированный argmax), T≈1 (стандарт для чата), T=2 (хаос). Дальше — практическая матрица из четырёх параметров API под четыре сценария: классификация, кодогенерация, чат-объяснение, творческое письмо. Затем покажем сэмплинг в контексте полного цикла авторегрессионной генерации — где он стоит между двумя forward-проходами модели. И завершим разделом сравнением inference локально и в облаке: тот же конвейер, но разный размер модели и среда.</a:t>
@@ -1960,19 +1984,16 @@
               <a:t>Перейдём к четвёртому, последнему этапу inference: сэмплингу. На входе сэмплинга — то, что произвели предыдущие три этапа: модель прошла токенизацию, эмбеддинги, все слои внимания, и на выходе у неё распределение вероятностей на все токены словаря. То есть для каждого из ста или двухсот тысяч токенов словаря модель сказала: «вероятность того, что следующим окажется именно этот, равна такому-то значению». Сумма всех вероятностей равна единице.</a:t>
             </a:r>
           </a:p>
-          <a:p/>
           <a:p>
             <a:r>
               <a:t>Возьмём конкретный пример. Пользователь написал в чат «Сегодня я съел …» и ждёт продолжения. Внутри модели появляется распределение вероятностей следующего токена. На бар-диаграмме это выглядит примерно так: `яблоко` — 0.32, `пиццу` — 0.19, `салат` — 0.14, `булочку` — 0.11, `огурец` — 0.08, и остальные двести тысяч токенов — каждый с вероятностью меньше 0.05. Числа на слайде иллюстративные; конкретные значения зависят от модели и от контекста, но общая картина устойчива.</a:t>
             </a:r>
           </a:p>
-          <a:p/>
           <a:p>
             <a:r>
               <a:t>Видно две вещи. Первая — распределение **не равномерное**: модель имеет статистические предпочтения, основанные на том, какие токены часто следовали за «съел» в обучающем корпусе. Это и есть «знание» модели — статистика следующего токена для каждого возможного контекста. Вторая — распределение **не точечное**: есть несколько правдоподобных кандидатов, и среди них вероятности заметно различаются. Модель не «знает» один правильный ответ; у неё есть множество кандидатов с убывающими вероятностями.</a:t>
             </a:r>
           </a:p>
-          <a:p/>
           <a:p>
             <a:r>
               <a:t>Дальше начинается сэмплинг. Сэмплинг — это правило, по которому модель из этого распределения выбирает один токен, который и пойдёт в ответ. От правила сэмплинга зависит, насколько «творческим» или «детерминированным» будет ответ. На следующем слайде разберём главный параметр сэмплинга — температуру — и попутно затронем top-p и top-k как альтернативные ручки тонкой настройки. Заметьте: даже на этом слайде уже видно ключевое условие того, что один и тот же запрос может давать разные ответы — есть распределение, из которого что-то выбирается. Это и есть третье из трёх «почему» Лекции 1, и сейчас мы аккуратно раскроем его механизм.</a:t>
@@ -2048,34 +2069,39 @@
               <a:t>Главный параметр сэмплинга — температура, обозначается T. Температура управляет, насколько «острым» будет выбор. Это параметр API: `temperature=0.0`, `temperature=0.7`, `temperature=2.0`. Технически температура — это коэффициент, на который делят логиты (внутренние «сырые» оценки модели до нормализации в вероятности) перед операцией нормализации; вводить формулу здесь не будем, важно следствие.</a:t>
             </a:r>
           </a:p>
-          <a:p/>
           <a:p>
             <a:r>
               <a:t>При T = 0 модель выбирает токен с самой высокой вероятностью. Это операция argmax — «возьми тот, у которого вероятность максимальна». В нашем примере про «съел …» модель практически всегда выберет `яблоко` (0.32 — максимум). Ответ предсказуем и почти детерминированный — повторите запрос десять раз, получите одно и то же. Маленькая оговорка: в production может быть микро-вариативность из-за того, что серверный батчинг и floating-point на GPU не дают побитово одинаковых результатов между запусками; для большинства задач эта вариативность игнорируема.</a:t>
             </a:r>
           </a:p>
-          <a:p/>
           <a:p>
             <a:r>
               <a:t>При T = 1.0 — стандартный режим. Модель сэмплирует пропорционально исходным вероятностям: `яблоко` будет выбрано примерно в 32% случаев, `пиццу` в 19%, `салат` в 14% и так далее. Это даёт естественную вариативность — каждый запуск может вернуть разный ответ, но все ответы лежат в зоне правдоподобных.</a:t>
             </a:r>
           </a:p>
-          <a:p/>
           <a:p>
             <a:r>
               <a:t>При T = 2.0 распределение «сглаживается»: разница между самыми вероятными и редкими токенами уменьшается, и модель начинает чаще выбирать неожиданные варианты. В крайних случаях ответы получаются почти хаотичными — выбираются токены, которые в реальном языке маловероятны после «съел».</a:t>
             </a:r>
           </a:p>
-          <a:p/>
           <a:p>
             <a:r>
               <a:t>Кроме температуры, есть две альтернативные ручки: top-p (nucleus sampling) — параметр, отрезающий «хвост» редких токенов: модель оставляет минимальное подмножество самых вероятных токенов, у которого суммарная вероятность не меньше p, и сэмплирует только из них. И top-k — параметр-предел количества кандидатов: модель оставляет top-k самых вероятных токенов. На практике для большинства задач достаточно настраивать температуру; top-p и top-k — это второй слой контроля.</a:t>
             </a:r>
           </a:p>
-          <a:p/>
           <a:p>
             <a:r>
               <a:t>Этот слайд отвечает на третий из трёх вопросов «почему», поставленных в начале лекции: почему один и тот же запрос даёт разные ответы. Ответ короткий: потому что при T больше нуля сэмплинг — стохастический процесс, и из одного и того же распределения каждый запуск может выбрать разный токен. Это не баг; это инженерное решение, дающее моделям естественную вариативность, что для большинства интерактивных задач воспринимается как «человекоподобность».</a:t>
+            </a:r>
+          </a:p>
+          <a:p>
+            <a:r>
+              <a:t>Источники:</a:t>
+            </a:r>
+          </a:p>
+          <a:p>
+            <a:r>
+              <a:t>[1] Holtzman et al. (2019) — nucleus sampling (top-p) — температура и top-p управляют формой распределения при сэмплинге. https://arxiv.org/abs/1904.09751</a:t>
             </a:r>
           </a:p>
         </p:txBody>
@@ -2148,37 +2174,31 @@
               <a:t>Соберём четыре основных параметра, которыми инженер управляет работой LLM через API. Эти четыре параметра — `temperature`, `top_p`, `max_tokens`, **системный промпт** — ключевая практическая цель этого раздела: после этого слайда вы должны уметь подобрать их под конкретный сценарий, не наугад, а с обоснованием.</a:t>
             </a:r>
           </a:p>
-          <a:p/>
           <a:p>
             <a:r>
               <a:t>Краткое определение каждого. **Temperature** — острота сэмплинга, от 0 до примерно 2. **Top_p** — параметр nucleus-отрезания (типичные значения 0.9–0.95). **Max_tokens** — максимальная длина ответа модели в токенах (не в словах); если ответ упирается в лимит, он обрезается на полуслове. **Системный промпт** — отдельное сообщение, задающее роль и ограничения модели до пользовательского запроса.</a:t>
             </a:r>
           </a:p>
-          <a:p/>
           <a:p>
             <a:r>
               <a:t>Сводная таблица под четыре типовых сценария. Логика последовательная. **Классификация.** Когда задача — присвоить документу одну из конечного набора меток, любая стохастичность вредна: если на одном и том же документе модель в одном запуске говорит «жалоба», а в другом — «вопрос», воспроизводимость нарушена. T = 0 обеспечивает детерминированный argmax. Max_tokens маленький — ответ короткий. Системный промпт минимальный, но со схемой выхода: «отвечай в формате JSON `{label: ..., confidence: ...}`», чтобы постпроцессинг легко парсил результат.</a:t>
             </a:r>
           </a:p>
-          <a:p/>
           <a:p>
             <a:r>
               <a:t>**Кодогенерация.** Здесь нужна слегка ненулевая температура. T = 0 даёт повторяющийся, иногда чрезмерно «учебниковый» код; T = 0.2–0.3 оставляет вариативность только в выборе между почти одинаково хорошими решениями. Top_p = 0.9 отрезает редкие токены, которые в коде почти всегда означают синтаксическую ошибку. Max_tokens большой. Системный промпт — роль и контекст репозитория.</a:t>
             </a:r>
           </a:p>
-          <a:p/>
           <a:p>
             <a:r>
               <a:t>**Чат-объяснение.** Стандартный режим. T = 0.7 даёт разнообразие формулировок при сохранении смысла; top_p = 0.9 оставляет естественные варианты. Системный промпт описывает роль и аудиторию.</a:t>
             </a:r>
           </a:p>
-          <a:p/>
           <a:p>
             <a:r>
               <a:t>**Творческое письмо.** Стохастичность — желаемое свойство. T = 0.9–1.2 даёт неожиданные обороты и метафоры. Top_p = 0.95 ослабляет отсечение «хвоста». Системный промпт — роль и стиль.</a:t>
             </a:r>
           </a:p>
-          <a:p/>
           <a:p>
             <a:r>
               <a:t>Эта таблица — не предписание; она ориентир. В реальной работе вы будете калибровать значения под свою задачу. Важно понимать рамку: четыре ручки, и они дёргаются согласованно — нет смысла ставить T = 0 и top_p = 0.5 (top_p при T = 0 не имеет смысла); нет смысла ставить T = 1.5 и max_tokens = 50 (модель только разогнётся, и её обрежет).</a:t>
@@ -2254,25 +2274,21 @@
               <a:t>Соберём четыре этапа inference в единый цикл. Лекция 1 описывала модель как stateless-функцию: «вход — данные, выход — предсказание, между вызовами состояния нет». Но в чате с LLM мы наблюдаем не одну функцию, а длинный ответ — фразу, абзац, страницу. Откуда берётся длинный ответ из stateless-вызовов?</a:t>
             </a:r>
           </a:p>
-          <a:p/>
           <a:p>
             <a:r>
               <a:t>Ответ — авторегрессионная генерация. От латинского «само-регрессирующий»: модель опирается на свои предыдущие выводы. Это циклический процесс из пяти шагов. Первый — текущий контекст: системный промпт плюс история диалога плюс новый запрос плюс всё, что модель уже сгенерировала за этот ответ. Второй — forward pass: полный проход всего контекста через четыре этапа inference, которые мы разобрали в первых трёх разделах лекции — токенизация, эмбеддинги, внимание через все слои, финальный слой. На выходе forward pass — распределение вероятностей следующего токена. Третий — сэмплинг: по правилу температуры и top-p из распределения выбирается один токен. Четвёртый — добавление в контекст: выбранный токен дописывается к ответу и становится частью контекста для следующего шага. Пятый — возврат к шагу 1.</a:t>
             </a:r>
           </a:p>
-          <a:p/>
           <a:p>
             <a:r>
               <a:t>Цикл повторяется, пока модель не сгенерирует специальный токен «конец ответа» или пока не упрётся в `max_tokens`. Каждый отдельный шаг этого цикла — stateless: модель ничего не «помнит» между шагами; всю «память» несёт сам контекст, который каждый раз подаётся целиком. Это уточнение к тому, что говорила Лекция 1: модель действительно stateless, но из stateless-шагов собирается процесс, имеющий вид связного ответа, за счёт того, что каждый следующий шаг видит весь предыдущий контекст. Иллюзия «памяти» внутри одного ответа создаётся не моделью, а оркестратором, который собирает и подаёт контекст.</a:t>
             </a:r>
           </a:p>
-          <a:p/>
           <a:p>
             <a:r>
               <a:t>Это объясняет несколько практических наблюдений. Скорость генерации: длинный ответ модель пишет по одному токену за раз, десятки токенов в секунду; длинные ответы видны как «текст печатается на ваших глазах» — это физический темп генерации. Поведение `max_tokens`: когда счётчик токенов достигает лимита, цикл обрывается мгновенно — на полуслове, на середине JSON. Стриминг: API современных LLM поддерживают режим, в котором токены возвращаются клиенту по мере генерации, не пакетом в конце.</a:t>
             </a:r>
           </a:p>
-          <a:p/>
           <a:p>
             <a:r>
               <a:t>Терминологически: каноническая русская форма — «авторегрессионный» (по модели «регрессионный»). Форма «авторегрессивный» допустима, но менее распространена в современной русской документации.</a:t>
@@ -2348,22 +2364,29 @@
               <a:t>Описанный выше цикл inference — токенизация, эмбеддинги, внимание, сэмплинг, возврат к началу — один и тот же в облачных LLM-сервисах и в локально развёрнутых моделях. С точки зрения механизма ChatGPT, Claude, GigaChat, локальная Llama 3.1 на ноутбуке или Qwen 2.5 на edge-устройстве работают одинаково. Различаются они размером модели (и, как следствие, качеством ответов) и средой исполнения.</a:t>
             </a:r>
           </a:p>
-          <a:p/>
           <a:p>
             <a:r>
               <a:t>Локальное развёртывание — Ollama, llama.cpp, LM Studio, vLLM — обычно работает с моделями размером 1–13 миллиардов параметров: Qwen 2.5 1.5B, Llama 3.2 1B, Llama 3.1 8B, Mistral 7B на 2026 год. Преимущества — приватность данных (запросы не уходят к стороннему провайдеру), отсутствие платы за токен, независимость от интернета. Недостатки — скорость на consumer-hardware заметно ниже, чем у облачных провайдеров; контекстное окно у локальных моделей часто меньше; качество ответов на сложных задачах уступает большим моделям.</a:t>
             </a:r>
           </a:p>
-          <a:p/>
           <a:p>
             <a:r>
               <a:t>Облачные сервисы — OpenAI, Anthropic, Google, российские Yandex и Сбер — работают с моделями значительно большего размера (порядка сотен миллиардов параметров и больше). Качество ответов на сложных задачах — выше; контекстное окно — больше (сотни тысяч и миллион токенов); типичная задержка ответа — 200–500 мс. Платится это передачей данных через API провайдера (со всеми вопросами политики хранения и использования, которые мы разбирали в Лекции 1) и оплатой за токены — которая для русского текста выше, чем для английского, как мы видели ранее сегодня.</a:t>
             </a:r>
           </a:p>
-          <a:p/>
           <a:p>
             <a:r>
               <a:t>Глубокая дискуссия о локальных и облачных моделях — со схемой принятия решения, точкой безубыточности по объёму запросов, регуляторными аспектами — была в Лекции 1 и здесь не повторяется. Сюда важно унести один тезис: архитектурно inference выглядит одинаково; различия — в размере модели и в среде. Когда вы выбираете между «локально» и «в облаке», вы выбираете не разные технологии, а разные точки на шкале «качество × приватность × стоимость», и эта шкала не зависит от того, как именно устроен цикл inference внутри.</a:t>
+            </a:r>
+          </a:p>
+          <a:p>
+            <a:r>
+              <a:t>Источники:</a:t>
+            </a:r>
+          </a:p>
+          <a:p>
+            <a:r>
+              <a:t>[1] Mistral AI — Mistral 7B — локальные open-weight модели 1–13B vs cloud 200B+. https://mistral.ai/news/announcing-mistral-7b [VFY-day-of]</a:t>
             </a:r>
           </a:p>
         </p:txBody>
@@ -2436,13 +2459,11 @@
               <a:t>Мы прошли все четыре этапа inference: токенизация, эмбеддинги, внимание, сэмплинг. Чёрный ящик из Лекции 1 параграфа 3.2, который мы тогда называли «inference моделью», перестал быть чёрным. Дальше — финальный раздел лекции, в котором мы собираем картину воедино и закрываем цикл.</a:t>
             </a:r>
           </a:p>
-          <a:p/>
           <a:p>
             <a:r>
               <a:t>В этом разделе шесть слайдов. Сначала — короткий recap: те же четыре этапа теперь сложены в горизонтальный конвейер; одна строка определения под каждой стадией. Потом — главный практический итог лекции: явные ответы на три «почему» из Лекции 1. Почему промпт с ролью работает лучше пустого. Почему AI плохо считает буквы. Почему один и тот же запрос даёт разные ответы. На каждом «почему» ставим явную ссылку на механизм, который мы только что разобрали.</a:t>
             </a:r>
           </a:p>
-          <a:p/>
           <a:p>
             <a:r>
               <a:t>Дальше — три кросс-режущих фрейма. Первый — дерево решений «когда не LLM»: ситуации, в которых классический ML, прозрачные методы или специализированная маленькая модель работают лучше большого языкового. Второй — концептуальная разница между вниманием как корреляционным механизмом и человеческой моделью причинности; callback на трёхуровневую иерархию Перла из Лекции 1. После этого — задание к Семинару 2 и краткий тизер Лекции 3 про агенты, RAG и MCP. И в финале — Q&amp;A на вопросы в зале.</a:t>
@@ -2518,43 +2539,36 @@
               <a:t>Прежде чем погружаться в механику больших моделей — короткая карта маршрута. Лекция состоит из шести разделов, и каждый отвечает на свой вопрос.</a:t>
             </a:r>
           </a:p>
-          <a:p/>
           <a:p>
             <a:r>
               <a:t>Раздел 0, в котором мы сейчас, — введение: что такое токен, краткий recap Лекции 1 и центральный вопрос, ради которого мы здесь.</a:t>
             </a:r>
           </a:p>
-          <a:p/>
           <a:p>
             <a:r>
               <a:t>Раздел 1 — токенизация. Как модель «видит» ваш текст. Что такое токен, как работает BPE, почему strawberry дробится на три части, и почему русский текст стоит модели в два раза дороже английского.</a:t>
             </a:r>
           </a:p>
-          <a:p/>
           <a:p>
             <a:r>
               <a:t>Раздел 2 — эмбеддинги. Пространство смыслов: как слова превращаются в векторы, что такое семантическое сходство, и как из этой математики получается семантический поиск и мост к RAG.</a:t>
             </a:r>
           </a:p>
-          <a:p/>
           <a:p>
             <a:r>
               <a:t>Раздел 3 — внимание. Как модель решает, на какие токены смотреть сейчас. Разберём механизм внимания на конкретном примере и поймём, почему промпт с ролью «ты эксперт» действительно меняет ответ.</a:t>
             </a:r>
           </a:p>
-          <a:p/>
           <a:p>
             <a:r>
               <a:t>Раздел 4 — сэмплинг. От распределения вероятностей к одному токену. Температура, top-p, top-k, max_tokens — четыре ручки API, которые вы будете крутить каждый раз, когда вызываете LLM.</a:t>
             </a:r>
           </a:p>
-          <a:p/>
           <a:p>
             <a:r>
               <a:t>Раздел 5 — финал. Закрытие трёх «почему», поставленных в центральном вопросе. Сравнение ML и LLM как двух парадигм, отличия Human vs AI, домашнее задание к семинару и анонс Лекции 3.</a:t>
             </a:r>
           </a:p>
-          <a:p/>
           <a:p>
             <a:r>
               <a:t>Держите эту карту в голове — она поможет не потеряться в деталях. После каждого раздела мы будем останавливаться и фиксировать главное.</a:t>
@@ -2630,31 +2644,26 @@
               <a:t>Сложим всё, что мы разобрали, в одну схему. Конвейер inference LLM состоит из четырёх этапов.</a:t>
             </a:r>
           </a:p>
-          <a:p/>
           <a:p>
             <a:r>
               <a:t>**Первый — токенизация.** Текст пользователя разрезается на токены — id из фиксированного словаря модели. Словарь построен один раз до обучения BPE-алгоритмом. Конкретное разбиение зависит от частотности подпоследовательностей в обучающем корпусе.</a:t>
             </a:r>
           </a:p>
-          <a:p/>
           <a:p>
             <a:r>
               <a:t>**Второй — эмбеддинг.** Каждому токену сопоставлен выученный вектор из embedding-таблицы. Геометрическая близость векторов отражает семантическую близость токенов в обучающем корпусе.</a:t>
             </a:r>
           </a:p>
-          <a:p/>
           <a:p>
             <a:r>
               <a:t>**Третий — механизм внимания.** Через десятки слоёв внимания модель строит распределения весов на токены контекста — какие токены сейчас важны для предсказания следующего. На выходе — распределение вероятностей на все токены словаря.</a:t>
             </a:r>
           </a:p>
-          <a:p/>
           <a:p>
             <a:r>
               <a:t>**Четвёртый — сэмплинг.** Из этого распределения по правилу, заданному температурой и top-p / top-k, выбирается один токен. Он добавляется в контекст, и цикл повторяется до конца ответа.</a:t>
             </a:r>
           </a:p>
-          <a:p/>
           <a:p>
             <a:r>
               <a:t>Этот конвейер — то, что Лекция 1 называла «inference моделью». Тогда мы оставили его как чёрный ящик; теперь он перестал быть чёрным. Полезно зафиксировать: каждый из четырёх этапов имеет хотя бы одно прямое следствие на уровне инженерной практики. Токенизация даёт слепоту к буквам, разную стоимость на разных языках, требование внешнего инструмента для точной посимвольной работы. Эмбеддинг даёт семантический поиск, базовый слой RAG, кластеризацию. Механизм внимания даёт эффект роли в промпте, контекстное окно как ограничение, «lost in the middle». Сэмплинг даёт стохастичность ответа, четыре ручки API под сценарий, авторегрессионную природу длинного ответа. Эти восемь следствий — основное полезное содержание лекции; если на них вы можете опереться при принятии решений в своей инженерной работе, главное усвоено.</a:t>
@@ -2730,25 +2739,21 @@
               <a:t>В начале сегодняшней лекции мы поставили три вопроса «почему» — и обещали ответить на них не интуицией, а конкретным механизмом. Теперь у нас есть всё нужное, чтобы это сделать.</a:t>
             </a:r>
           </a:p>
-          <a:p/>
           <a:p>
             <a:r>
               <a:t>**Первое «почему»: почему промпт с ролью работает лучше пустого?** На уровне механизма внимания role-токены — «ты эксперт по X», «отвечай как Y» — получают существенный вес в распределении внимания. Модель опирается на них при выборе следующих токенов; выбор оказывается смещённым в сторону, согласованную с ролью. Это упрощённое объяснение; альтернативно тот же эффект объясняется через in-context steering и через эффекты RLHF-обучения. В любом случае: роль в промпте — это не просьба «поверь мне», а конкретный input-сигнал, влияющий на распределение внимания.</a:t>
             </a:r>
           </a:p>
-          <a:p/>
           <a:p>
             <a:r>
               <a:t>**Второе «почему»: почему AI плохо считает буквы?** Потому что модель видит не буквы, а токены. Слово `strawberry` для неё — три токена `[st][raw][berry]`, а не десять букв; внутри каждого токена нет явного перечисления букв на позициях. Слепота к буквам — структурное следствие BPE-токенизации, и оно не исправляется ни fine-tuning, ни более крупной моделью на чистом inference. Для точной посимвольной работы нужен внешний инструмент: Code Interpreter, Python, регулярное выражение.</a:t>
             </a:r>
           </a:p>
-          <a:p/>
           <a:p>
             <a:r>
               <a:t>**Третье «почему»: почему один и тот же запрос даёт разные ответы?** Потому что при temperature больше нуля сэмплинг — стохастический процесс, выбирающий один из правдоподобных кандидатов из распределения вероятностей следующего токена. Каждый запуск может выбрать иначе. При temperature равной нулю ответ практически детерминированный, с микро-вариативностью из-за серверного батчинга; при единице — естественно вариативный; при больше единицы — всё более хаотичный.</a:t>
             </a:r>
           </a:p>
-          <a:p/>
           <a:p>
             <a:r>
               <a:t>Эти три ответа — главный практический итог сегодняшней лекции. Если вы можете назвать механизм для каждого «почему» в одном-двух предложениях, главное содержание усвоено. Заметьте: ответы не интуитивные («модель такая, потому что её плохо обучили»), а механистические — каждое «почему» прицельно сводится к конкретному внутреннему этапу конвейера. Эта механистичность — то, что отличает инженерное понимание LLM от пользовательского.</a:t>
@@ -2824,25 +2829,21 @@
               <a:t>Расширим классификацию задача × модальность из Лекции 1 одним практическим вопросом: когда LLM — не правильный инструмент. Универсальное использование больших моделей привлекательно, но в значимом числе сценариев оно проигрывает по эффективности классическим методам ML.</a:t>
             </a:r>
           </a:p>
-          <a:p/>
           <a:p>
             <a:r>
               <a:t>Простое решение в форме decision tree из трёх веток. **Первая ветка.** Задача — классификация на маленьком фиксированном наборе категорий: 5–20 классов, тысячи или десятки тысяч примеров с разметкой? Скорее всего, выбор — классический ML: логистическая регрессия, gradient boosting (популярные библиотеки XGBoost, LightGBM, CatBoost), маленький transformer-классификатор вроде BERT-base, донастроенный под конкретную задачу (это называется fine-tuning). LLM здесь будет более дорогой и менее точный.</a:t>
             </a:r>
           </a:p>
-          <a:p/>
           <a:p>
             <a:r>
               <a:t>**Вторая ветка.** Нужна интерпретируемость или регулируемость — финансы, страхование, медицина, юридическая сфера, всё, где нужно объяснить регулятору, почему модель приняла такое решение? Здесь выбор — классические методы с прозрачной структурой: логистическая регрессия с feature importance, deciion trees, rule-based системы. LLM в смысле объяснимости отдельного предсказания — «чёрный ящик».</a:t>
             </a:r>
           </a:p>
-          <a:p/>
           <a:p>
             <a:r>
               <a:t>**Третья ветка.** Критическое время отклика — меньше 100 миллисекунд? Real-time персонализация ленты, антифрод на платёжном шлюзе, edge-устройства? Здесь — специализированная маленькая модель (классический ML или маленькая нейросеть), а не вызов LLM с задержкой 200–500 миллисекунд.</a:t>
             </a:r>
           </a:p>
-          <a:p/>
           <a:p>
             <a:r>
               <a:t>Во всех остальных случаях LLM применима, и часто оптимальна. Особенно для задач, требующих обработки естественного языка, гибкого формата запроса, многошагового рассуждения, генерации новых текстов или кода. Эта схема — верхний уровень. Реальный инженерный выбор глубже, и в курсе мы будем возвращаться к нему многократно: Лекции 4–7 пройдут по конкретным индустриям — ПО, финансы, ритейл, медицина — и для каждой обсудим, где LLM оптимум, а где over-engineering. Здесь важно зафиксировать одно: LLM — не универсальный молоток. Знать механику внутренностей LLM нужно в том числе для того, чтобы аккуратно понимать, где она не нужна.</a:t>
@@ -2918,28 +2919,34 @@
               <a:t>Третий короткий кросс-сюжетный фрейм — возврат к одному из самых концептуально важных мест Лекции 1: трём уровням причинности Перла. Лекция 1 показала, что современные AI-системы устойчиво работают на уровне 1 (ассоциация), частично — на уровне 2 (вмешательство), и не справляются с уровнем 3 (контрфактуальность). Теперь у нас есть механистическое основание для этого тезиса.</a:t>
             </a:r>
           </a:p>
-          <a:p/>
           <a:p>
             <a:r>
               <a:t>Механизм внимания статистически смотрит на токены — он не строит каузальный граф. Когда модель видит в контексте предложение «X произошло, потому что Y», она замечает, что токены X и Y часто соседствуют в обучающем корпусе в подобных конструкциях. Она усваивает корреляцию, не причинность. Конструкция «потому что» для модели — это паттерн в данных, не указание на каузальный механизм реального мира.</a:t>
             </a:r>
           </a:p>
-          <a:p/>
           <a:p>
             <a:r>
               <a:t>Сравним два процесса. Человек: «X произошло, потому что Y» — модель причинности, включающая уровни 1 (наблюдение корреляции), 2 (что произойдёт, если изменить Y) и 3 (что было бы, если бы Y не было). Эта модель опирается на физическую интуицию, на доменные знания, на знание механизмов мира. AI на основе механизма внимания: «X следует за Y в данных» — статистическая корреляция между токенами. Сильный сигнал на уровне 1; на уровень 2 модель частично переходит, если в обучающем корпусе было много примеров изменения Y; на уровень 3 в общем виде — нет.</a:t>
             </a:r>
           </a:p>
-          <a:p/>
           <a:p>
             <a:r>
               <a:t>Это объясняет феномен, описанный ещё в Лекции 1: модель прекрасно отвечает на «что коррелирует с чем» (анализ данных). Хуже — на «что произойдёт, если я изменю X» (оценка вмешательства). И почти никак — на «было бы Y, если бы X не случилось» (контрфактуальный анализ). Контрфактуальные вопросы остаются зоной человеческого экспертного суждения — это не временный технический недостаток, а ограничение текущей парадигмы.</a:t>
             </a:r>
           </a:p>
-          <a:p/>
           <a:p>
             <a:r>
               <a:t>Тон замечания — фактический, не алармистский. Механизм внимания — мощный инструмент в области, в которой он работает. Эта область — корреляционная статистика над данными, и инженер обязан помнить границу при проектировании систем, в которых от AI ожидают каузальных выводов. Практический вывод: там, где решения требуют именно причинного вывода, привлекайте эксперта предметной области или отдельные причинные методы — механизм внимания сам по себе для этого не предназначен.</a:t>
+            </a:r>
+          </a:p>
+          <a:p>
+            <a:r>
+              <a:t>Источники:</a:t>
+            </a:r>
+          </a:p>
+          <a:p>
+            <a:r>
+              <a:t>[1] Pearl (2018) — The Book of Why — attention ловит ассоциацию, не причинность (3 уровня причинной лестницы). http://bayes.cs.ucla.edu/WHY/</a:t>
             </a:r>
           </a:p>
         </p:txBody>
@@ -3012,34 +3019,49 @@
               <a:t>Тема следующей лекции — «Агенты, RAG, API: как AI выходит за пределы чата». В нашем конвейере inference, который мы только что собрали, есть жёсткое ограничение: модель видит только то, что есть в контексте, и не может пойти за информацией наружу. Лекция 3 покажет, как это ограничение обходится через четыре класса инструментов.</a:t>
             </a:r>
           </a:p>
-          <a:p/>
           <a:p>
             <a:r>
               <a:t>**RAG — Retrieval-Augmented Generation.** Это расширение, в котором перед обращением к LLM выполняется семантический поиск по вашей базе знаний на эмбеддингах — точно тех, что мы разбирали в разделе про эмбеддинги сегодняшней лекции — и top-K релевантных фрагментов добавляются в контекст. На уровне inference это всё тот же конвейер из четырёх этапов, только с обогащённым контекстом. RAG — самый прямой способ дать модели доступ к информации, которой нет в её весах.</a:t>
             </a:r>
           </a:p>
-          <a:p/>
           <a:p>
             <a:r>
               <a:t>**Tools или function calling.** Механизм, через который модель генерирует специально структурированный вызов — обычно в формате JSON, иногда в других форматах в зависимости от API-провайдера — указывающий, какой инструмент она хочет вызвать и с какими параметрами. Внешняя система видит этот вызов, выполняет его, и результат возвращается модели как часть контекста. Это канонический способ обойти ограничения слепоты к буквам (для арифметики — Python sandbox) и stateless-природы (для актуальной информации — веб-поиск).</a:t>
             </a:r>
           </a:p>
-          <a:p/>
           <a:p>
             <a:r>
               <a:t>**MCP — Model Context Protocol.** Открытый стандарт подключения инструментов к LLM, представленный Anthropic в ноябре 2024 года. Решает проблему «каждое сочетание модели и инструмента — отдельная интеграция»: один протокол, переиспользуемое подключение. Мы упоминали MCP в Лекции 1; в Лекции 3 разберём подробнее.</a:t>
             </a:r>
           </a:p>
-          <a:p/>
           <a:p>
             <a:r>
               <a:t>**Agent loop.** Цикл act → observe → reflect, рассмотренный ещё в Лекции 1. На каждом шаге модель решает действие, видит результат, корректирует план — и так до достижения цели. Все четыре концепта надстраиваются над single-shot inference, который мы собрали сегодня. Multimodal-расширения — CLIP-эмбеддинги для изображений, аудио-эмбеддинги, унифицированные модели типа GPT-4o, обрабатывающие текст и изображение совместно — там же, в составе RAG для нетекстовых модальностей.</a:t>
             </a:r>
           </a:p>
-          <a:p/>
           <a:p>
             <a:r>
               <a:t>На семинаре будем разбирать ваши домашние эксперименты с температурой; постарайтесь успеть прогнать запросы заранее. А пока — оставшееся время мы посвящаем вашим вопросам.</a:t>
+            </a:r>
+          </a:p>
+          <a:p>
+            <a:r>
+              <a:t>Источники:</a:t>
+            </a:r>
+          </a:p>
+          <a:p>
+            <a:r>
+              <a:t>[1] Lewis et al. (2020) — RAG — как AI выходит за пределы чата: retrieval-augmented generation. https://arxiv.org/abs/2005.11401</a:t>
+            </a:r>
+          </a:p>
+          <a:p>
+            <a:r>
+              <a:t>[2] Anthropic — Model Context Protocol (25 ноя 2024) — открытый стандарт подключения инструментов к LLM. https://www.anthropic.com/news/model-context-protocol</a:t>
+            </a:r>
+          </a:p>
+          <a:p>
+            <a:r>
+              <a:t>[3] Yao et al. (2022) — ReAct — agent loop: act → observe → reflect. https://arxiv.org/abs/2210.03629 [VFY-day-of]</a:t>
             </a:r>
           </a:p>
         </p:txBody>
@@ -3112,13 +3134,11 @@
               <a:t>На этом основная часть лекции закончена. Дальше — оставшееся время отдаём вашим вопросам. Нет «глупых» вопросов и нет «слишком базовых» — если что-то прозвучало неясно или у вас в голове не сложилась картинка одного из четырёх этапов, лучше спросить сейчас, пока тема свежая.</a:t>
             </a:r>
           </a:p>
-          <a:p/>
           <a:p>
             <a:r>
               <a:t>Если вопросов в зале немного, я могу зайти с другой стороны: рассказать, какие из четырёх этапов чаще всего вызывают трудности на следующих занятиях, или показать дополнительный пример токенизации на ваших словах. Если совсем тишина — это тоже нормально, и тогда напомню, что на семинар через неделю мы принесём результаты домашнего задания по температуре, прогоним их через простой чек-лист и обсудим, какую температуру стоит ставить в production. Если по ходу обсуждения возникнут вопросы — приносите их к семинару или пишите по e-mail.</a:t>
             </a:r>
           </a:p>
-          <a:p/>
           <a:p>
             <a:r>
               <a:t>Спасибо за внимание и за вашу включённость в течение всей лекции. До следующей встречи.</a:t>
@@ -3194,13 +3214,11 @@
               <a:t>Чтобы не терять контекст, на одну минуту вернёмся к Лекции 1. На той лекции мы построили слоистую картину работы AI в продукте: внизу модель, над ней чат-цикл, над чатом — агентный цикл, и сверху — приложение, в которое всё это упаковывается. Лекция 1 описала самый нижний слой, модель, как stateless-функцию: на вход данные, на выход предсказание, и никакой памяти между двумя вызовами. С этим описанием мы умеем говорить о том, **где** модель находится в большей системе, но мы оставили в стороне вопрос — **что именно** происходит внутри этой stateless-функции, когда вы пишете в чат «Сегодня я съел яблоко» и получаете ответ.</a:t>
             </a:r>
           </a:p>
-          <a:p/>
           <a:p>
             <a:r>
               <a:t>Сегодня мы аккуратно открываем этот чёрный ящик. Главное содержание лекции — четыре внутренних этапа, через которые проходит ваш запрос между моментом отправки и моментом получения ответа. Эти четыре этапа: токенизация (как модель разрезает текст на единицы, с которыми умеет работать), эмбеддинг (как каждой единице сопоставляется численное представление смысла), механизм внимания (как модель решает, на что опираться в текущем контексте), сэмплинг (как из распределения вероятностей выбирается один конкретный токен).</a:t>
             </a:r>
           </a:p>
-          <a:p/>
           <a:p>
             <a:r>
               <a:t>На Лекции 1 модель называлась «чёрным ящиком stateless inference». Сегодня мы перестаём держать его чёрным. После этой лекции в этом ящике останутся уже не четыре механизма, а четыре отдельных этапа с понятной ролью каждого — и с конкретными инженерными следствиями для того, как вы будете ставить задачи модели.</a:t>
@@ -3276,13 +3294,11 @@
               <a:t>У сегодняшней лекции один центральный вопрос, и он сформулирован коротко: что происходит внутри LLM между моим запросом и ответом, и какие из этих внутренних механизмов меняют, как я её использую. Заметьте, что вопрос двусоставный. Первая часть — описательная: понять, что технически устроено внутри. Вторая часть — прагматическая: из всего внутреннего устройства выделить то, что меняет инженерную практику. Если внутренний механизм не влияет на то, как вы ставите задачу модели или интерпретируете её ответ, мы его сегодня не разбираем.</a:t>
             </a:r>
           </a:p>
-          <a:p/>
           <a:p>
             <a:r>
               <a:t>В ответе на этот вопрос участвуют три обещания, которые Лекция 1 оставила без ответа. Первое — почему промпт с ролью работает лучше пустого. Тот, кто пробовал, знает, что «Ты эксперт по Python, объясни асинхронность джуниору» даёт качественно другой ответ, чем просто «Объясни асинхронность». Сегодня мы поймём механизм этого эффекта на уровне внимания. Второе — почему AI плохо считает буквы. Классический пример со словом `strawberry` и подсчётом буквы `r` — не баг и не пробел в обучении, а структурное следствие того, как устроена токенизация. Сегодня разберём это в Разделе 1. Третье — почему один и тот же запрос может давать разные ответы. Источник — стохастический сэмплинг при температуре больше нуля, и в Разделе 4 мы увидим механизм.</a:t>
             </a:r>
           </a:p>
-          <a:p/>
           <a:p>
             <a:r>
               <a:t>Эти три обещания работают как якоря лекции: к ним мы будем возвращаться в каждом из четырёх разделов, и в самом конце они получат явный ответ — три «почему» через конкретные внутренние механизмы.</a:t>
@@ -3358,19 +3374,16 @@
               <a:t>Введение закончено: мы зафиксировали центральный вопрос — что внутри LLM меняет то, как вы её используете, — и три промиса-якоря, на которые получим ответы к финалу.</a:t>
             </a:r>
           </a:p>
-          <a:p/>
           <a:p>
             <a:r>
               <a:t>Дальше — первый из четырёх внутренних этапов inference: токенизация. Это самый ближний к пользователю слой; именно с ним сталкивается ваш текст, как только вы нажимаете «отправить». Текст не попадает в модель буквами и не попадает словами. Он сначала разрезается на токены — короткие подпоследовательности, которые модель «знает» из своего обучающего корпуса.</a:t>
             </a:r>
           </a:p>
-          <a:p/>
           <a:p>
             <a:r>
               <a:t>В этом разделе четыре слайда. Сначала мы зафиксируем базовое определение токена через три коротких примера на английском и русском. Потом — почему модель использует BPE как компромисс между алфавитом и словарём, и одна инженерная деталь, важная для понимания цены: словарь строится один раз перед обучением, в inference происходит только lookup. Дальше — самый показательный случай слепоты к буквам: «сколько r в strawberry», и через него — три класса задач, в которых LLM ошибается систематически. И завершим раздел сравнением стоимости одного и того же текста на разных языках — почему русский дороже английского примерно в два раза, и что с этим делать в production.</a:t>
             </a:r>
           </a:p>
-          <a:p/>
           <a:p>
             <a:r>
               <a:t>Темп в разделе держим практический: на каждом слайде есть проверяемая инженерная импликация.</a:t>
@@ -3446,37 +3459,31 @@
               <a:t>Прежде чем углубляться в детали каждого этапа, посмотрим на полную картину — что происходит между вашим запросом и ответом модели. Это карта, к которой мы будем возвращаться: с правой стороны каждого следующего раздела вы будете видеть, какая именно стадия этого pipeline сейчас в фокусе.</a:t>
             </a:r>
           </a:p>
-          <a:p/>
           <a:p>
             <a:r>
               <a:t>Слева — ваш входной текст: например, `«Привет, мир»`. Первое преобразование — **токенизация**: текст разрезается на единицы из словаря модели; `«Привет»` превращается в, условно, `[Прив][ет]`. Эти токены — целые числа, id из словаря. Это первый из четырёх этапов, и именно ему посвящён ближайший Раздел 1.</a:t>
             </a:r>
           </a:p>
-          <a:p/>
           <a:p>
             <a:r>
               <a:t>Следующий шаг — **embedding lookup**: каждому id токена сопоставлен выученный вектор в памяти модели. Слово исчезает; остаётся последовательность векторов. Это входит в Раздел 2.</a:t>
             </a:r>
           </a:p>
-          <a:p/>
           <a:p>
             <a:r>
               <a:t>Дальше — **LLM-инференс**: серия слоёв с механизмом внимания, который мы разберём в Разделе 3. Здесь модель «думает» — но думает она над векторами, не над словами. Из этой обработки на выходе появляется ещё один вектор — кандидат на следующий токен.</a:t>
             </a:r>
           </a:p>
-          <a:p/>
           <a:p>
             <a:r>
               <a:t>Этот вектор-кандидат превращается в **распределение вероятностей** по всему словарю модели: «насколько правдоподобно, что следующий токен — этот? а этот? а вот этот?». Из распределения выбирается **один токен** через сэмплинг — это Раздел 4.</a:t>
             </a:r>
           </a:p>
-          <a:p/>
           <a:p>
             <a:r>
               <a:t>И последний шаг — **обратное преобразование**: id токена через де-токенизацию превращается обратно в текст. Этот шаг почти симметричен токенизации в самом начале, и обычно его относят к тому же первому этапу.</a:t>
             </a:r>
           </a:p>
-          <a:p/>
           <a:p>
             <a:r>
               <a:t>Главное наблюдение для практики: «слово» появляется только на границах — на входе и на выходе. Всё, что происходит внутри модели — это операции над векторами. Сегодняшняя лекция — про эти внутренние операции, без формул, но с инженерным пониманием, что и где происходит.</a:t>
@@ -3552,13 +3559,11 @@
               <a:t>Главный факт первого раздела: LLM видит ваш запрос не буквами и не словами, а токенами. Токен — это идентификатор, целое число из словаря модели; этот словарь зафиксирован при обучении и не меняется в момент использования. Когда вы пишете в чат «Сегодня я съел яблоко», ваш текст сначала разрезается на токены, каждый токен превращается в число — id из словаря — и дальше модель работает только с этой последовательностью чисел. Для удобства мы записываем токены в квадратных скобках, но в памяти модели это всегда числа.</a:t>
             </a:r>
           </a:p>
-          <a:p/>
           <a:p>
             <a:r>
               <a:t>На слайде — три примера, иллюстрирующих основное наблюдение. Короткое распространённое английское слово `cat` попадает в словарь как единый токен. Слово `tokenization` распадается на два токена: общая основа `[token]` и часто встречающийся суффикс `[ization]`. Слово `клубника`, тестированное на токенизаторе GPT-4o `o200k_base`, разрезается на три токена. Закономерность простая: чем чаще подпоследовательность встречалась в обучающем корпусе, тем выше шанс, что она попадёт в словарь целиком; редкие или специфические для других языков последовательности дробятся мельче.</a:t>
             </a:r>
           </a:p>
-          <a:p/>
           <a:p>
             <a:r>
               <a:t>Из этого следует практический ориентир, которым пользуются инженеры на этапе оценки стоимости API: в среднем один токен соответствует примерно четырём символам английского текста или примерно двум символам русского. Это не точная формула, а порядок, но его достаточно для большинства бюджетных оценок. Полезное упражнение: попробуйте угадать, на сколько токенов разрежется слово `сильнее` — на один, два или три? Ваша интуиция может ошибиться: для русского даже короткое слово часто получается из 2-3 токенов. Точный ответ можно проверить на сервисе Tiktokenizer. Маленькое следствие, важное для практики: на числах токенизация ведёт себя непредсказуемо. Строка `1234567` может быть разрезана как `[123][4567]`, `[12][345][67]` или ещё как-то — в зависимости от того, какие подпоследовательности цифр часто встречались в корпусе. Для арифметики это означает: чистый LLM-инференс — плохой калькулятор; правильный паттерн — внешний инструмент, Code Interpreter или Python sandbox.</a:t>
@@ -3634,22 +3639,29 @@
               <a:t>Алгоритм, которым строятся словари большинства современных LLM, называется BPE — Byte-Pair Encoding. По сути, это компромисс между двумя крайностями. Можно было бы взять словарём отдельные символы — тогда любой текст представим, но последовательности получаются очень длинные, и модели тяжело учить долгие зависимости. Можно было бы, наоборот, взять словарём целые слова — тогда последовательности короткие, но любое незнакомое слово, опечатка или имя собственное становится `&lt;unknown&gt;`, и модель не способна с ним работать. BPE сидит ровно посередине: словарь состоит из подпоследовательностей разной длины, которые алгоритм нашёл как самые частые в обучающем корпусе.</a:t>
             </a:r>
           </a:p>
-          <a:p/>
           <a:p>
             <a:r>
               <a:t>Идея алгоритма проста: начинаем с алфавита из отдельных символов и итеративно объединяем пары, которые встречаются вместе чаще всего, добавляя пару в словарь как новый «составной» символ. На небольшом учебном корпусе из слов `low / lower / newest / widest` BPE может выучить словарь вроде `low / er / new / est / wid` — отдельно частые корни и отдельно частые суффиксы. После многих итераций на большом корпусе получаются словари в десятки и сотни тысяч записей.</a:t>
             </a:r>
           </a:p>
-          <a:p/>
           <a:p>
             <a:r>
               <a:t>Важная инженерная деталь, которая часто упускается, — это **момент построения словаря**. BPE-словарь строится один раз, до обучения модели. Это шаг подготовки данных: на корпусе обучения запускают BPE-алгоритм, фиксируют итоговый словарь и набор merge-правил, и после этого ничего не меняется. В момент работы модели токенизация — это lookup готовых правил, а не runtime-вычисление. Когда вы отправляете запрос в API, текст разрезается за миллисекунды по предзаписанной таблице.</a:t>
             </a:r>
           </a:p>
-          <a:p/>
           <a:p>
             <a:r>
               <a:t>Современных алгоритмов для подсловарных токенизаторов на практике три: BPE используется в GPT-семействе и в Llama 3+; WordPiece — в BERT и потомках; SentencePiece — в Llama 2, Mistral, T5 и многих open-weight моделях. Технически они отличаются способом выбора пар и обработкой пробелов, но для пользователя LLM эти различия не критичны — нужно лишь помнить, что токенизатор поставляется вместе с моделью и его нельзя «поменять на ходу».</a:t>
+            </a:r>
+          </a:p>
+          <a:p>
+            <a:r>
+              <a:t>Источники:</a:t>
+            </a:r>
+          </a:p>
+          <a:p>
+            <a:r>
+              <a:t>[1] Sennrich et al. (2016) — NMT of Rare Words / BPE — BPE — компромисс: словарь из частых подпоследовательностей, не букв и не слов. https://arxiv.org/abs/1508.07909</a:t>
             </a:r>
           </a:p>
         </p:txBody>
@@ -6844,6 +6856,45 @@
           </a:p>
         </p:txBody>
       </p:sp>
+      <p:sp>
+        <p:nvSpPr>
+          <p:cNvPr id="7" name="TextBox 6"/>
+          <p:cNvSpPr txBox="1"/>
+          <p:nvPr/>
+        </p:nvSpPr>
+        <p:spPr>
+          <a:xfrm>
+            <a:off x="11274552" y="6547104"/>
+            <a:ext cx="868680" cy="256032"/>
+          </a:xfrm>
+          <a:prstGeom prst="rect">
+            <a:avLst/>
+          </a:prstGeom>
+          <a:noFill/>
+        </p:spPr>
+        <p:txBody>
+          <a:bodyPr wrap="none" lIns="0" rIns="0" tIns="0" bIns="0">
+            <a:spAutoFit/>
+          </a:bodyPr>
+          <a:lstStyle/>
+          <a:p>
+            <a:pPr algn="r">
+              <a:lnSpc>
+                <a:spcPct val="100000"/>
+              </a:lnSpc>
+            </a:pPr>
+            <a:r>
+              <a:rPr sz="1000" i="1">
+                <a:solidFill>
+                  <a:srgbClr val="5B6678"/>
+                </a:solidFill>
+                <a:latin typeface="Arial"/>
+              </a:rPr>
+              <a:t>1 / 35</a:t>
+            </a:r>
+          </a:p>
+        </p:txBody>
+      </p:sp>
     </p:spTree>
   </p:cSld>
   <p:clrMapOvr>
@@ -7359,8 +7410,8 @@
         </p:nvSpPr>
         <p:spPr>
           <a:xfrm>
-            <a:off x="502920" y="5440680"/>
-            <a:ext cx="11247120" cy="1188720"/>
+            <a:off x="502920" y="5358384"/>
+            <a:ext cx="11247120" cy="1078992"/>
           </a:xfrm>
           <a:prstGeom prst="roundRect">
             <a:avLst>
@@ -7407,8 +7458,8 @@
         </p:nvSpPr>
         <p:spPr>
           <a:xfrm>
-            <a:off x="731520" y="5550408"/>
-            <a:ext cx="10789920" cy="502920"/>
+            <a:off x="731520" y="5449824"/>
+            <a:ext cx="10789920" cy="457200"/>
           </a:xfrm>
           <a:prstGeom prst="rect">
             <a:avLst/>
@@ -7423,7 +7474,7 @@
           <a:p>
             <a:pPr algn="l">
               <a:lnSpc>
-                <a:spcPct val="125000"/>
+                <a:spcPct val="122000"/>
               </a:lnSpc>
             </a:pPr>
             <a:r>
@@ -7446,8 +7497,8 @@
         </p:nvSpPr>
         <p:spPr>
           <a:xfrm>
-            <a:off x="731520" y="6062472"/>
-            <a:ext cx="10789920" cy="502920"/>
+            <a:off x="731520" y="5907024"/>
+            <a:ext cx="10789920" cy="457200"/>
           </a:xfrm>
           <a:prstGeom prst="rect">
             <a:avLst/>
@@ -7462,7 +7513,7 @@
           <a:p>
             <a:pPr algn="l">
               <a:lnSpc>
-                <a:spcPct val="125000"/>
+                <a:spcPct val="122000"/>
               </a:lnSpc>
             </a:pPr>
             <a:r>
@@ -7472,7 +7523,106 @@
                 </a:solidFill>
                 <a:latin typeface="Arial"/>
               </a:rPr>
-              <a:t>Числа: тоже режутся непредсказуемо (1234→12+34, но 55688→556+88) → GPT-4: 59% точности на 3-знач. умножении, 4% на 4-знач., 0% на 5-знач. без калькулятора (arXiv 2410.19730).</a:t>
+              <a:t>Числа: тоже режутся непредсказуемо (1234→12+34, но 55688→556+88) → GPT-4: 59% точности на 3-знач. умножении, 4% на 4-знач., 0% на 5-знач. без калькулятора.</a:t>
+            </a:r>
+            <a:r>
+              <a:rPr sz="728" baseline="30000" b="0" i="1">
+                <a:latin typeface="Arial"/>
+                <a:cs typeface="Arial"/>
+                <a:ea typeface="Arial"/>
+                <a:solidFill>
+                  <a:srgbClr val="1C7293"/>
+                </a:solidFill>
+              </a:rPr>
+              <a:t>[1]</a:t>
+            </a:r>
+          </a:p>
+        </p:txBody>
+      </p:sp>
+      <p:sp>
+        <p:nvSpPr>
+          <p:cNvPr id="17" name="TextBox 16"/>
+          <p:cNvSpPr txBox="1"/>
+          <p:nvPr/>
+        </p:nvSpPr>
+        <p:spPr>
+          <a:xfrm>
+            <a:off x="502920" y="6510528"/>
+            <a:ext cx="11247120" cy="310896"/>
+          </a:xfrm>
+          <a:prstGeom prst="rect">
+            <a:avLst/>
+          </a:prstGeom>
+          <a:noFill/>
+        </p:spPr>
+        <p:txBody>
+          <a:bodyPr wrap="square" lIns="0" rIns="0" tIns="0" bIns="0" anchor="t">
+            <a:spAutoFit/>
+          </a:bodyPr>
+          <a:lstStyle/>
+          <a:p>
+            <a:pPr algn="l">
+              <a:lnSpc>
+                <a:spcPct val="102000"/>
+              </a:lnSpc>
+            </a:pPr>
+            <a:r>
+              <a:rPr sz="850" b="1" i="1">
+                <a:solidFill>
+                  <a:srgbClr val="065A82"/>
+                </a:solidFill>
+                <a:latin typeface="Arial"/>
+              </a:rPr>
+              <a:t>[1] </a:t>
+            </a:r>
+            <a:r>
+              <a:rPr sz="850" i="1">
+                <a:solidFill>
+                  <a:srgbClr val="1C7293"/>
+                </a:solidFill>
+                <a:latin typeface="Arial"/>
+                <a:hlinkClick r:id="rId3"/>
+              </a:rPr>
+              <a:t>Counting Ability of LLMs &amp; Impact of Tokenization (2024)</a:t>
+            </a:r>
+          </a:p>
+        </p:txBody>
+      </p:sp>
+      <p:sp>
+        <p:nvSpPr>
+          <p:cNvPr id="18" name="TextBox 17"/>
+          <p:cNvSpPr txBox="1"/>
+          <p:nvPr/>
+        </p:nvSpPr>
+        <p:spPr>
+          <a:xfrm>
+            <a:off x="11274552" y="6547104"/>
+            <a:ext cx="868680" cy="256032"/>
+          </a:xfrm>
+          <a:prstGeom prst="rect">
+            <a:avLst/>
+          </a:prstGeom>
+          <a:noFill/>
+        </p:spPr>
+        <p:txBody>
+          <a:bodyPr wrap="none" lIns="0" rIns="0" tIns="0" bIns="0">
+            <a:spAutoFit/>
+          </a:bodyPr>
+          <a:lstStyle/>
+          <a:p>
+            <a:pPr algn="r">
+              <a:lnSpc>
+                <a:spcPct val="100000"/>
+              </a:lnSpc>
+            </a:pPr>
+            <a:r>
+              <a:rPr sz="1000" i="1">
+                <a:solidFill>
+                  <a:srgbClr val="5B6678"/>
+                </a:solidFill>
+                <a:latin typeface="Arial"/>
+              </a:rPr>
+              <a:t>10 / 35</a:t>
             </a:r>
           </a:p>
         </p:txBody>
@@ -8127,6 +8277,45 @@
                 <a:latin typeface="Arial"/>
               </a:rPr>
               <a:t>API-стоимость RU ≈ 2× от EN. Для batch — переводить в EN, если допустимо.</a:t>
+            </a:r>
+          </a:p>
+        </p:txBody>
+      </p:sp>
+      <p:sp>
+        <p:nvSpPr>
+          <p:cNvPr id="18" name="TextBox 17"/>
+          <p:cNvSpPr txBox="1"/>
+          <p:nvPr/>
+        </p:nvSpPr>
+        <p:spPr>
+          <a:xfrm>
+            <a:off x="11274552" y="6547104"/>
+            <a:ext cx="868680" cy="256032"/>
+          </a:xfrm>
+          <a:prstGeom prst="rect">
+            <a:avLst/>
+          </a:prstGeom>
+          <a:noFill/>
+        </p:spPr>
+        <p:txBody>
+          <a:bodyPr wrap="none" lIns="0" rIns="0" tIns="0" bIns="0">
+            <a:spAutoFit/>
+          </a:bodyPr>
+          <a:lstStyle/>
+          <a:p>
+            <a:pPr algn="r">
+              <a:lnSpc>
+                <a:spcPct val="100000"/>
+              </a:lnSpc>
+            </a:pPr>
+            <a:r>
+              <a:rPr sz="1000" i="1">
+                <a:solidFill>
+                  <a:srgbClr val="5B6678"/>
+                </a:solidFill>
+                <a:latin typeface="Arial"/>
+              </a:rPr>
+              <a:t>11 / 35</a:t>
             </a:r>
           </a:p>
         </p:txBody>
@@ -8784,6 +8973,45 @@
           </a:p>
         </p:txBody>
       </p:sp>
+      <p:sp>
+        <p:nvSpPr>
+          <p:cNvPr id="17" name="TextBox 16"/>
+          <p:cNvSpPr txBox="1"/>
+          <p:nvPr/>
+        </p:nvSpPr>
+        <p:spPr>
+          <a:xfrm>
+            <a:off x="11274552" y="6547104"/>
+            <a:ext cx="868680" cy="256032"/>
+          </a:xfrm>
+          <a:prstGeom prst="rect">
+            <a:avLst/>
+          </a:prstGeom>
+          <a:noFill/>
+        </p:spPr>
+        <p:txBody>
+          <a:bodyPr wrap="none" lIns="0" rIns="0" tIns="0" bIns="0">
+            <a:spAutoFit/>
+          </a:bodyPr>
+          <a:lstStyle/>
+          <a:p>
+            <a:pPr algn="r">
+              <a:lnSpc>
+                <a:spcPct val="100000"/>
+              </a:lnSpc>
+            </a:pPr>
+            <a:r>
+              <a:rPr sz="1000" i="1">
+                <a:solidFill>
+                  <a:srgbClr val="5B6678"/>
+                </a:solidFill>
+                <a:latin typeface="Arial"/>
+              </a:rPr>
+              <a:t>12 / 35</a:t>
+            </a:r>
+          </a:p>
+        </p:txBody>
+      </p:sp>
     </p:spTree>
   </p:cSld>
   <p:clrMapOvr>
@@ -8921,12 +9149,12 @@
         </p:nvSpPr>
         <p:spPr>
           <a:xfrm>
-            <a:off x="502920" y="5349240"/>
-            <a:ext cx="5486400" cy="1417320"/>
+            <a:off x="502920" y="5193792"/>
+            <a:ext cx="5486400" cy="1298448"/>
           </a:xfrm>
           <a:prstGeom prst="roundRect">
             <a:avLst>
-              <a:gd name="adj" fmla="val 21505"/>
+              <a:gd name="adj" fmla="val 23474"/>
             </a:avLst>
           </a:prstGeom>
           <a:solidFill>
@@ -8969,7 +9197,7 @@
         </p:nvSpPr>
         <p:spPr>
           <a:xfrm>
-            <a:off x="685800" y="5440679"/>
+            <a:off x="685800" y="5285231"/>
             <a:ext cx="5120640" cy="411480"/>
           </a:xfrm>
           <a:prstGeom prst="rect">
@@ -8997,6 +9225,17 @@
               </a:rPr>
               <a:t>Размерности (ориентир)</a:t>
             </a:r>
+            <a:r>
+              <a:rPr sz="780" baseline="30000" b="0" i="1">
+                <a:latin typeface="Arial"/>
+                <a:cs typeface="Arial"/>
+                <a:ea typeface="Arial"/>
+                <a:solidFill>
+                  <a:srgbClr val="1C7293"/>
+                </a:solidFill>
+              </a:rPr>
+              <a:t>[1]</a:t>
+            </a:r>
           </a:p>
         </p:txBody>
       </p:sp>
@@ -9008,8 +9247,8 @@
         </p:nvSpPr>
         <p:spPr>
           <a:xfrm>
-            <a:off x="777240" y="5852159"/>
-            <a:ext cx="3566160" cy="292608"/>
+            <a:off x="777240" y="5669279"/>
+            <a:ext cx="3566160" cy="256032"/>
           </a:xfrm>
           <a:prstGeom prst="rect">
             <a:avLst/>
@@ -9047,8 +9286,8 @@
         </p:nvSpPr>
         <p:spPr>
           <a:xfrm>
-            <a:off x="4178807" y="5852159"/>
-            <a:ext cx="1755648" cy="292608"/>
+            <a:off x="4178807" y="5669279"/>
+            <a:ext cx="1755648" cy="256032"/>
           </a:xfrm>
           <a:prstGeom prst="rect">
             <a:avLst/>
@@ -9086,8 +9325,8 @@
         </p:nvSpPr>
         <p:spPr>
           <a:xfrm>
-            <a:off x="777240" y="6144768"/>
-            <a:ext cx="3566160" cy="292608"/>
+            <a:off x="777240" y="5925312"/>
+            <a:ext cx="3566160" cy="256032"/>
           </a:xfrm>
           <a:prstGeom prst="rect">
             <a:avLst/>
@@ -9125,8 +9364,8 @@
         </p:nvSpPr>
         <p:spPr>
           <a:xfrm>
-            <a:off x="4178807" y="6144768"/>
-            <a:ext cx="1755648" cy="292608"/>
+            <a:off x="4178807" y="5925312"/>
+            <a:ext cx="1755648" cy="256032"/>
           </a:xfrm>
           <a:prstGeom prst="rect">
             <a:avLst/>
@@ -9164,8 +9403,8 @@
         </p:nvSpPr>
         <p:spPr>
           <a:xfrm>
-            <a:off x="777240" y="6437375"/>
-            <a:ext cx="3566160" cy="292608"/>
+            <a:off x="777240" y="6181344"/>
+            <a:ext cx="3566160" cy="256032"/>
           </a:xfrm>
           <a:prstGeom prst="rect">
             <a:avLst/>
@@ -9203,8 +9442,8 @@
         </p:nvSpPr>
         <p:spPr>
           <a:xfrm>
-            <a:off x="4178807" y="6437375"/>
-            <a:ext cx="1755648" cy="292608"/>
+            <a:off x="4178807" y="6181344"/>
+            <a:ext cx="1755648" cy="256032"/>
           </a:xfrm>
           <a:prstGeom prst="rect">
             <a:avLst/>
@@ -9242,8 +9481,8 @@
         </p:nvSpPr>
         <p:spPr>
           <a:xfrm>
-            <a:off x="6400800" y="5349240"/>
-            <a:ext cx="5486400" cy="1417320"/>
+            <a:off x="6400800" y="5193792"/>
+            <a:ext cx="5486400" cy="1298448"/>
           </a:xfrm>
           <a:prstGeom prst="roundRect">
             <a:avLst>
@@ -9290,8 +9529,8 @@
         </p:nvSpPr>
         <p:spPr>
           <a:xfrm>
-            <a:off x="6583680" y="5422392"/>
-            <a:ext cx="5120640" cy="1271016"/>
+            <a:off x="6583680" y="5266944"/>
+            <a:ext cx="5120640" cy="1152144"/>
           </a:xfrm>
           <a:prstGeom prst="rect">
             <a:avLst/>
@@ -9316,8 +9555,146 @@
                 </a:solidFill>
                 <a:latin typeface="Arial"/>
               </a:rPr>
-              <a:t>Геометрическая близость векторов = семантическая близость токенов.
+              <a:t>Геометрическая близость векторов = семантическая близость токенов.</a:t>
+            </a:r>
+            <a:r>
+              <a:rPr sz="780" baseline="30000" b="0" i="1">
+                <a:latin typeface="Arial"/>
+                <a:cs typeface="Arial"/>
+                <a:ea typeface="Arial"/>
+                <a:solidFill>
+                  <a:srgbClr val="1C7293"/>
+                </a:solidFill>
+              </a:rPr>
+              <a:t>[2]</a:t>
+            </a:r>
+            <a:r>
+              <a:rPr sz="1500" b="1" i="0">
+                <a:latin typeface="Arial"/>
+                <a:cs typeface="Arial"/>
+                <a:ea typeface="Arial"/>
+                <a:solidFill>
+                  <a:srgbClr val="21295C"/>
+                </a:solidFill>
+              </a:rPr>
+              <a:t>
 «Кот» близко к «собаке» — выучилось из контекстов корпуса.</a:t>
+            </a:r>
+          </a:p>
+        </p:txBody>
+      </p:sp>
+      <p:sp>
+        <p:nvSpPr>
+          <p:cNvPr id="15" name="TextBox 14"/>
+          <p:cNvSpPr txBox="1"/>
+          <p:nvPr/>
+        </p:nvSpPr>
+        <p:spPr>
+          <a:xfrm>
+            <a:off x="502920" y="6510528"/>
+            <a:ext cx="11247120" cy="310896"/>
+          </a:xfrm>
+          <a:prstGeom prst="rect">
+            <a:avLst/>
+          </a:prstGeom>
+          <a:noFill/>
+        </p:spPr>
+        <p:txBody>
+          <a:bodyPr wrap="square" lIns="0" rIns="0" tIns="0" bIns="0" anchor="t">
+            <a:spAutoFit/>
+          </a:bodyPr>
+          <a:lstStyle/>
+          <a:p>
+            <a:pPr algn="l">
+              <a:lnSpc>
+                <a:spcPct val="102000"/>
+              </a:lnSpc>
+            </a:pPr>
+            <a:r>
+              <a:rPr sz="850" b="1" i="1">
+                <a:solidFill>
+                  <a:srgbClr val="065A82"/>
+                </a:solidFill>
+                <a:latin typeface="Arial"/>
+              </a:rPr>
+              <a:t>[1] </a:t>
+            </a:r>
+            <a:r>
+              <a:rPr sz="850" i="1">
+                <a:solidFill>
+                  <a:srgbClr val="1C7293"/>
+                </a:solidFill>
+                <a:latin typeface="Arial"/>
+                <a:hlinkClick r:id="rId3"/>
+              </a:rPr>
+              <a:t>OpenAI — Embeddings API</a:t>
+            </a:r>
+            <a:r>
+              <a:rPr sz="850" i="1">
+                <a:solidFill>
+                  <a:srgbClr val="1C7293"/>
+                </a:solidFill>
+                <a:latin typeface="Arial"/>
+              </a:rPr>
+              <a:t>   ·   </a:t>
+            </a:r>
+            <a:r>
+              <a:rPr sz="850" b="1" i="1">
+                <a:solidFill>
+                  <a:srgbClr val="065A82"/>
+                </a:solidFill>
+                <a:latin typeface="Arial"/>
+              </a:rPr>
+              <a:t>[2] </a:t>
+            </a:r>
+            <a:r>
+              <a:rPr sz="850" i="1">
+                <a:solidFill>
+                  <a:srgbClr val="1C7293"/>
+                </a:solidFill>
+                <a:latin typeface="Arial"/>
+                <a:hlinkClick r:id="rId4"/>
+              </a:rPr>
+              <a:t>Mikolov et al. (2013) — word2vec</a:t>
+            </a:r>
+          </a:p>
+        </p:txBody>
+      </p:sp>
+      <p:sp>
+        <p:nvSpPr>
+          <p:cNvPr id="16" name="TextBox 15"/>
+          <p:cNvSpPr txBox="1"/>
+          <p:nvPr/>
+        </p:nvSpPr>
+        <p:spPr>
+          <a:xfrm>
+            <a:off x="11274552" y="6547104"/>
+            <a:ext cx="868680" cy="256032"/>
+          </a:xfrm>
+          <a:prstGeom prst="rect">
+            <a:avLst/>
+          </a:prstGeom>
+          <a:noFill/>
+        </p:spPr>
+        <p:txBody>
+          <a:bodyPr wrap="none" lIns="0" rIns="0" tIns="0" bIns="0">
+            <a:spAutoFit/>
+          </a:bodyPr>
+          <a:lstStyle/>
+          <a:p>
+            <a:pPr algn="r">
+              <a:lnSpc>
+                <a:spcPct val="100000"/>
+              </a:lnSpc>
+            </a:pPr>
+            <a:r>
+              <a:rPr sz="1000" i="1">
+                <a:solidFill>
+                  <a:srgbClr val="5B6678"/>
+                </a:solidFill>
+                <a:latin typeface="Arial"/>
+              </a:rPr>
+              <a:t>13 / 35</a:t>
             </a:r>
           </a:p>
         </p:txBody>
@@ -10215,6 +10592,45 @@
           </a:p>
         </p:txBody>
       </p:sp>
+      <p:sp>
+        <p:nvSpPr>
+          <p:cNvPr id="23" name="TextBox 22"/>
+          <p:cNvSpPr txBox="1"/>
+          <p:nvPr/>
+        </p:nvSpPr>
+        <p:spPr>
+          <a:xfrm>
+            <a:off x="11274552" y="6547104"/>
+            <a:ext cx="868680" cy="256032"/>
+          </a:xfrm>
+          <a:prstGeom prst="rect">
+            <a:avLst/>
+          </a:prstGeom>
+          <a:noFill/>
+        </p:spPr>
+        <p:txBody>
+          <a:bodyPr wrap="none" lIns="0" rIns="0" tIns="0" bIns="0">
+            <a:spAutoFit/>
+          </a:bodyPr>
+          <a:lstStyle/>
+          <a:p>
+            <a:pPr algn="r">
+              <a:lnSpc>
+                <a:spcPct val="100000"/>
+              </a:lnSpc>
+            </a:pPr>
+            <a:r>
+              <a:rPr sz="1000" i="1">
+                <a:solidFill>
+                  <a:srgbClr val="5B6678"/>
+                </a:solidFill>
+                <a:latin typeface="Arial"/>
+              </a:rPr>
+              <a:t>14 / 35</a:t>
+            </a:r>
+          </a:p>
+        </p:txBody>
+      </p:sp>
     </p:spTree>
   </p:cSld>
   <p:clrMapOvr>
@@ -10537,7 +10953,18 @@
                 </a:solidFill>
                 <a:latin typeface="Arial"/>
               </a:rPr>
-              <a:t>Cosine similarity — мера угла между векторами; диапазон [−1, 1], ближе к 1 — более похожи.</a:t>
+              <a:t>Cosine similarity — мера угла между векторами; диапазон [−1, 1], ближе к 1 — более похожи. Числа illustrative.</a:t>
+            </a:r>
+            <a:r>
+              <a:rPr sz="728" baseline="30000" b="0" i="1">
+                <a:latin typeface="Arial"/>
+                <a:cs typeface="Arial"/>
+                <a:ea typeface="Arial"/>
+                <a:solidFill>
+                  <a:srgbClr val="1C7293"/>
+                </a:solidFill>
+              </a:rPr>
+              <a:t>[1]</a:t>
             </a:r>
           </a:p>
         </p:txBody>
@@ -10550,8 +10977,8 @@
         </p:nvSpPr>
         <p:spPr>
           <a:xfrm>
-            <a:off x="502920" y="6537960"/>
-            <a:ext cx="11247120" cy="274320"/>
+            <a:off x="502920" y="6510528"/>
+            <a:ext cx="11247120" cy="310896"/>
           </a:xfrm>
           <a:prstGeom prst="rect">
             <a:avLst/>
@@ -10564,19 +10991,68 @@
           </a:bodyPr>
           <a:lstStyle/>
           <a:p>
-            <a:pPr algn="ctr">
-              <a:lnSpc>
-                <a:spcPct val="115000"/>
-              </a:lnSpc>
-            </a:pPr>
-            <a:r>
-              <a:rPr sz="1100" b="0" i="1">
+            <a:pPr algn="l">
+              <a:lnSpc>
+                <a:spcPct val="102000"/>
+              </a:lnSpc>
+            </a:pPr>
+            <a:r>
+              <a:rPr sz="850" b="1" i="1">
+                <a:solidFill>
+                  <a:srgbClr val="065A82"/>
+                </a:solidFill>
+                <a:latin typeface="Arial"/>
+              </a:rPr>
+              <a:t>[1] </a:t>
+            </a:r>
+            <a:r>
+              <a:rPr sz="850" i="1">
                 <a:solidFill>
                   <a:srgbClr val="1C7293"/>
                 </a:solidFill>
                 <a:latin typeface="Arial"/>
-              </a:rPr>
-              <a:t>Числа illustrative; воспроизводимы на sentence-transformers/all-MiniLM-L6-v2 (384-dim) или OpenAI text-embedding-3-small (1536-dim).</a:t>
+                <a:hlinkClick r:id="rId4"/>
+              </a:rPr>
+              <a:t>воспроизводимо: all-MiniLM-L6-v2 / text-embedding-3-small</a:t>
+            </a:r>
+          </a:p>
+        </p:txBody>
+      </p:sp>
+      <p:sp>
+        <p:nvSpPr>
+          <p:cNvPr id="11" name="TextBox 10"/>
+          <p:cNvSpPr txBox="1"/>
+          <p:nvPr/>
+        </p:nvSpPr>
+        <p:spPr>
+          <a:xfrm>
+            <a:off x="11274552" y="6547104"/>
+            <a:ext cx="868680" cy="256032"/>
+          </a:xfrm>
+          <a:prstGeom prst="rect">
+            <a:avLst/>
+          </a:prstGeom>
+          <a:noFill/>
+        </p:spPr>
+        <p:txBody>
+          <a:bodyPr wrap="none" lIns="0" rIns="0" tIns="0" bIns="0">
+            <a:spAutoFit/>
+          </a:bodyPr>
+          <a:lstStyle/>
+          <a:p>
+            <a:pPr algn="r">
+              <a:lnSpc>
+                <a:spcPct val="100000"/>
+              </a:lnSpc>
+            </a:pPr>
+            <a:r>
+              <a:rPr sz="1000" i="1">
+                <a:solidFill>
+                  <a:srgbClr val="5B6678"/>
+                </a:solidFill>
+                <a:latin typeface="Arial"/>
+              </a:rPr>
+              <a:t>15 / 35</a:t>
             </a:r>
           </a:p>
         </p:txBody>
@@ -11619,11 +12095,11 @@
         <p:spPr>
           <a:xfrm>
             <a:off x="6172200" y="2377440"/>
-            <a:ext cx="5623560" cy="1234440"/>
+            <a:ext cx="5623560" cy="1170432"/>
           </a:xfrm>
           <a:prstGeom prst="roundRect">
             <a:avLst>
-              <a:gd name="adj" fmla="val 24691"/>
+              <a:gd name="adj" fmla="val 25000"/>
             </a:avLst>
           </a:prstGeom>
           <a:solidFill>
@@ -11768,12 +12244,12 @@
         </p:nvSpPr>
         <p:spPr>
           <a:xfrm>
-            <a:off x="6172200" y="3721608"/>
-            <a:ext cx="5623560" cy="1234440"/>
+            <a:off x="6172200" y="3639312"/>
+            <a:ext cx="5623560" cy="1170432"/>
           </a:xfrm>
           <a:prstGeom prst="roundRect">
             <a:avLst>
-              <a:gd name="adj" fmla="val 24691"/>
+              <a:gd name="adj" fmla="val 25000"/>
             </a:avLst>
           </a:prstGeom>
           <a:solidFill>
@@ -11824,7 +12300,7 @@
         </p:blipFill>
         <p:spPr>
           <a:xfrm>
-            <a:off x="6309360" y="3995928"/>
+            <a:off x="6309360" y="3913632"/>
             <a:ext cx="685800" cy="685800"/>
           </a:xfrm>
           <a:prstGeom prst="rect">
@@ -11840,7 +12316,7 @@
         </p:nvSpPr>
         <p:spPr>
           <a:xfrm>
-            <a:off x="7132320" y="3831336"/>
+            <a:off x="7132320" y="3749040"/>
             <a:ext cx="4526280" cy="365760"/>
           </a:xfrm>
           <a:prstGeom prst="rect">
@@ -11879,7 +12355,7 @@
         </p:nvSpPr>
         <p:spPr>
           <a:xfrm>
-            <a:off x="7132320" y="4224528"/>
+            <a:off x="7132320" y="4142232"/>
             <a:ext cx="4526280" cy="685800"/>
           </a:xfrm>
           <a:prstGeom prst="rect">
@@ -11918,12 +12394,12 @@
         </p:nvSpPr>
         <p:spPr>
           <a:xfrm>
-            <a:off x="6172200" y="5065776"/>
-            <a:ext cx="5623560" cy="1234440"/>
+            <a:off x="6172200" y="4901184"/>
+            <a:ext cx="5623560" cy="1170432"/>
           </a:xfrm>
           <a:prstGeom prst="roundRect">
             <a:avLst>
-              <a:gd name="adj" fmla="val 24691"/>
+              <a:gd name="adj" fmla="val 25000"/>
             </a:avLst>
           </a:prstGeom>
           <a:solidFill>
@@ -11974,7 +12450,7 @@
         </p:blipFill>
         <p:spPr>
           <a:xfrm>
-            <a:off x="6309360" y="5340096"/>
+            <a:off x="6309360" y="5175504"/>
             <a:ext cx="685800" cy="685800"/>
           </a:xfrm>
           <a:prstGeom prst="rect">
@@ -11990,7 +12466,7 @@
         </p:nvSpPr>
         <p:spPr>
           <a:xfrm>
-            <a:off x="7132320" y="5175504"/>
+            <a:off x="7132320" y="5010912"/>
             <a:ext cx="4526280" cy="365760"/>
           </a:xfrm>
           <a:prstGeom prst="rect">
@@ -12029,7 +12505,7 @@
         </p:nvSpPr>
         <p:spPr>
           <a:xfrm>
-            <a:off x="7132320" y="5568696"/>
+            <a:off x="7132320" y="5404104"/>
             <a:ext cx="4526280" cy="685800"/>
           </a:xfrm>
           <a:prstGeom prst="rect">
@@ -12068,7 +12544,7 @@
         </p:nvSpPr>
         <p:spPr>
           <a:xfrm>
-            <a:off x="502920" y="6492240"/>
+            <a:off x="502920" y="6163056"/>
             <a:ext cx="11247120" cy="320040"/>
           </a:xfrm>
           <a:prstGeom prst="roundRect">
@@ -12116,7 +12592,7 @@
         </p:nvSpPr>
         <p:spPr>
           <a:xfrm>
-            <a:off x="685800" y="6565392"/>
+            <a:off x="685800" y="6236208"/>
             <a:ext cx="10881360" cy="173735"/>
           </a:xfrm>
           <a:prstGeom prst="rect">
@@ -12143,6 +12619,105 @@
                 <a:latin typeface="Arial"/>
               </a:rPr>
               <a:t>Семантическая близость на уровне предложений — основа того, что LLM «понимает» переформулировки.</a:t>
+            </a:r>
+            <a:r>
+              <a:rPr sz="624" baseline="30000" b="0" i="1">
+                <a:latin typeface="Arial"/>
+                <a:cs typeface="Arial"/>
+                <a:ea typeface="Arial"/>
+                <a:solidFill>
+                  <a:srgbClr val="1C7293"/>
+                </a:solidFill>
+              </a:rPr>
+              <a:t>[1]</a:t>
+            </a:r>
+          </a:p>
+        </p:txBody>
+      </p:sp>
+      <p:sp>
+        <p:nvSpPr>
+          <p:cNvPr id="39" name="TextBox 38"/>
+          <p:cNvSpPr txBox="1"/>
+          <p:nvPr/>
+        </p:nvSpPr>
+        <p:spPr>
+          <a:xfrm>
+            <a:off x="502920" y="6547104"/>
+            <a:ext cx="11247120" cy="310896"/>
+          </a:xfrm>
+          <a:prstGeom prst="rect">
+            <a:avLst/>
+          </a:prstGeom>
+          <a:noFill/>
+        </p:spPr>
+        <p:txBody>
+          <a:bodyPr wrap="square" lIns="0" rIns="0" tIns="0" bIns="0" anchor="t">
+            <a:spAutoFit/>
+          </a:bodyPr>
+          <a:lstStyle/>
+          <a:p>
+            <a:pPr algn="l">
+              <a:lnSpc>
+                <a:spcPct val="102000"/>
+              </a:lnSpc>
+            </a:pPr>
+            <a:r>
+              <a:rPr sz="850" b="1" i="1">
+                <a:solidFill>
+                  <a:srgbClr val="065A82"/>
+                </a:solidFill>
+                <a:latin typeface="Arial"/>
+              </a:rPr>
+              <a:t>[1] </a:t>
+            </a:r>
+            <a:r>
+              <a:rPr sz="850" i="1">
+                <a:solidFill>
+                  <a:srgbClr val="1C7293"/>
+                </a:solidFill>
+                <a:latin typeface="Arial"/>
+                <a:hlinkClick r:id="rId5"/>
+              </a:rPr>
+              <a:t>Lewis et al. (2020) — RAG</a:t>
+            </a:r>
+          </a:p>
+        </p:txBody>
+      </p:sp>
+      <p:sp>
+        <p:nvSpPr>
+          <p:cNvPr id="40" name="TextBox 39"/>
+          <p:cNvSpPr txBox="1"/>
+          <p:nvPr/>
+        </p:nvSpPr>
+        <p:spPr>
+          <a:xfrm>
+            <a:off x="11274552" y="6547104"/>
+            <a:ext cx="868680" cy="256032"/>
+          </a:xfrm>
+          <a:prstGeom prst="rect">
+            <a:avLst/>
+          </a:prstGeom>
+          <a:noFill/>
+        </p:spPr>
+        <p:txBody>
+          <a:bodyPr wrap="none" lIns="0" rIns="0" tIns="0" bIns="0">
+            <a:spAutoFit/>
+          </a:bodyPr>
+          <a:lstStyle/>
+          <a:p>
+            <a:pPr algn="r">
+              <a:lnSpc>
+                <a:spcPct val="100000"/>
+              </a:lnSpc>
+            </a:pPr>
+            <a:r>
+              <a:rPr sz="1000" i="1">
+                <a:solidFill>
+                  <a:srgbClr val="5B6678"/>
+                </a:solidFill>
+                <a:latin typeface="Arial"/>
+              </a:rPr>
+              <a:t>16 / 35</a:t>
             </a:r>
           </a:p>
         </p:txBody>
@@ -12800,6 +13375,45 @@
           </a:p>
         </p:txBody>
       </p:sp>
+      <p:sp>
+        <p:nvSpPr>
+          <p:cNvPr id="17" name="TextBox 16"/>
+          <p:cNvSpPr txBox="1"/>
+          <p:nvPr/>
+        </p:nvSpPr>
+        <p:spPr>
+          <a:xfrm>
+            <a:off x="11274552" y="6547104"/>
+            <a:ext cx="868680" cy="256032"/>
+          </a:xfrm>
+          <a:prstGeom prst="rect">
+            <a:avLst/>
+          </a:prstGeom>
+          <a:noFill/>
+        </p:spPr>
+        <p:txBody>
+          <a:bodyPr wrap="none" lIns="0" rIns="0" tIns="0" bIns="0">
+            <a:spAutoFit/>
+          </a:bodyPr>
+          <a:lstStyle/>
+          <a:p>
+            <a:pPr algn="r">
+              <a:lnSpc>
+                <a:spcPct val="100000"/>
+              </a:lnSpc>
+            </a:pPr>
+            <a:r>
+              <a:rPr sz="1000" i="1">
+                <a:solidFill>
+                  <a:srgbClr val="5B6678"/>
+                </a:solidFill>
+                <a:latin typeface="Arial"/>
+              </a:rPr>
+              <a:t>17 / 35</a:t>
+            </a:r>
+          </a:p>
+        </p:txBody>
+      </p:sp>
     </p:spTree>
   </p:cSld>
   <p:clrMapOvr>
@@ -13693,6 +14307,45 @@
           </a:p>
         </p:txBody>
       </p:sp>
+      <p:sp>
+        <p:nvSpPr>
+          <p:cNvPr id="23" name="TextBox 22"/>
+          <p:cNvSpPr txBox="1"/>
+          <p:nvPr/>
+        </p:nvSpPr>
+        <p:spPr>
+          <a:xfrm>
+            <a:off x="11274552" y="6547104"/>
+            <a:ext cx="868680" cy="256032"/>
+          </a:xfrm>
+          <a:prstGeom prst="rect">
+            <a:avLst/>
+          </a:prstGeom>
+          <a:noFill/>
+        </p:spPr>
+        <p:txBody>
+          <a:bodyPr wrap="none" lIns="0" rIns="0" tIns="0" bIns="0">
+            <a:spAutoFit/>
+          </a:bodyPr>
+          <a:lstStyle/>
+          <a:p>
+            <a:pPr algn="r">
+              <a:lnSpc>
+                <a:spcPct val="100000"/>
+              </a:lnSpc>
+            </a:pPr>
+            <a:r>
+              <a:rPr sz="1000" i="1">
+                <a:solidFill>
+                  <a:srgbClr val="5B6678"/>
+                </a:solidFill>
+                <a:latin typeface="Arial"/>
+              </a:rPr>
+              <a:t>18 / 35</a:t>
+            </a:r>
+          </a:p>
+        </p:txBody>
+      </p:sp>
     </p:spTree>
   </p:cSld>
   <p:clrMapOvr>
@@ -13786,6 +14439,17 @@
               </a:rPr>
               <a:t>Какие токены сейчас важны для предсказания следующего</a:t>
             </a:r>
+            <a:r>
+              <a:rPr sz="780" baseline="30000" b="0" i="1">
+                <a:latin typeface="Arial"/>
+                <a:cs typeface="Arial"/>
+                <a:ea typeface="Arial"/>
+                <a:solidFill>
+                  <a:srgbClr val="1C7293"/>
+                </a:solidFill>
+              </a:rPr>
+              <a:t>[1]</a:t>
+            </a:r>
           </a:p>
         </p:txBody>
       </p:sp>
@@ -14443,7 +15107,7 @@
         </p:nvSpPr>
         <p:spPr>
           <a:xfrm>
-            <a:off x="502920" y="6583680"/>
+            <a:off x="502920" y="6327648"/>
             <a:ext cx="11247120" cy="228600"/>
           </a:xfrm>
           <a:prstGeom prst="rect">
@@ -14469,7 +15133,95 @@
                 </a:solidFill>
                 <a:latin typeface="Arial"/>
               </a:rPr>
-              <a:t>Без формул. Multi-head, Q/K/V — доп. чтение (Vaswani et al. 2017).</a:t>
+              <a:t>Без формул. Multi-head, Q/K/V — дополнительное чтение.</a:t>
+            </a:r>
+          </a:p>
+        </p:txBody>
+      </p:sp>
+      <p:sp>
+        <p:nvSpPr>
+          <p:cNvPr id="21" name="TextBox 20"/>
+          <p:cNvSpPr txBox="1"/>
+          <p:nvPr/>
+        </p:nvSpPr>
+        <p:spPr>
+          <a:xfrm>
+            <a:off x="502920" y="6510528"/>
+            <a:ext cx="11247120" cy="310896"/>
+          </a:xfrm>
+          <a:prstGeom prst="rect">
+            <a:avLst/>
+          </a:prstGeom>
+          <a:noFill/>
+        </p:spPr>
+        <p:txBody>
+          <a:bodyPr wrap="square" lIns="0" rIns="0" tIns="0" bIns="0" anchor="t">
+            <a:spAutoFit/>
+          </a:bodyPr>
+          <a:lstStyle/>
+          <a:p>
+            <a:pPr algn="l">
+              <a:lnSpc>
+                <a:spcPct val="102000"/>
+              </a:lnSpc>
+            </a:pPr>
+            <a:r>
+              <a:rPr sz="850" b="1" i="1">
+                <a:solidFill>
+                  <a:srgbClr val="065A82"/>
+                </a:solidFill>
+                <a:latin typeface="Arial"/>
+              </a:rPr>
+              <a:t>[1] </a:t>
+            </a:r>
+            <a:r>
+              <a:rPr sz="850" i="1">
+                <a:solidFill>
+                  <a:srgbClr val="1C7293"/>
+                </a:solidFill>
+                <a:latin typeface="Arial"/>
+                <a:hlinkClick r:id="rId4"/>
+              </a:rPr>
+              <a:t>Vaswani et al. (2017) — Attention Is All You Need</a:t>
+            </a:r>
+          </a:p>
+        </p:txBody>
+      </p:sp>
+      <p:sp>
+        <p:nvSpPr>
+          <p:cNvPr id="22" name="TextBox 21"/>
+          <p:cNvSpPr txBox="1"/>
+          <p:nvPr/>
+        </p:nvSpPr>
+        <p:spPr>
+          <a:xfrm>
+            <a:off x="11274552" y="6547104"/>
+            <a:ext cx="868680" cy="256032"/>
+          </a:xfrm>
+          <a:prstGeom prst="rect">
+            <a:avLst/>
+          </a:prstGeom>
+          <a:noFill/>
+        </p:spPr>
+        <p:txBody>
+          <a:bodyPr wrap="none" lIns="0" rIns="0" tIns="0" bIns="0">
+            <a:spAutoFit/>
+          </a:bodyPr>
+          <a:lstStyle/>
+          <a:p>
+            <a:pPr algn="r">
+              <a:lnSpc>
+                <a:spcPct val="100000"/>
+              </a:lnSpc>
+            </a:pPr>
+            <a:r>
+              <a:rPr sz="1000" i="1">
+                <a:solidFill>
+                  <a:srgbClr val="5B6678"/>
+                </a:solidFill>
+                <a:latin typeface="Arial"/>
+              </a:rPr>
+              <a:t>19 / 35</a:t>
             </a:r>
           </a:p>
         </p:txBody>
@@ -15202,6 +15954,45 @@
           </a:p>
         </p:txBody>
       </p:sp>
+      <p:sp>
+        <p:nvSpPr>
+          <p:cNvPr id="19" name="TextBox 18"/>
+          <p:cNvSpPr txBox="1"/>
+          <p:nvPr/>
+        </p:nvSpPr>
+        <p:spPr>
+          <a:xfrm>
+            <a:off x="11274552" y="6547104"/>
+            <a:ext cx="868680" cy="256032"/>
+          </a:xfrm>
+          <a:prstGeom prst="rect">
+            <a:avLst/>
+          </a:prstGeom>
+          <a:noFill/>
+        </p:spPr>
+        <p:txBody>
+          <a:bodyPr wrap="none" lIns="0" rIns="0" tIns="0" bIns="0">
+            <a:spAutoFit/>
+          </a:bodyPr>
+          <a:lstStyle/>
+          <a:p>
+            <a:pPr algn="r">
+              <a:lnSpc>
+                <a:spcPct val="100000"/>
+              </a:lnSpc>
+            </a:pPr>
+            <a:r>
+              <a:rPr sz="1000" i="1">
+                <a:solidFill>
+                  <a:srgbClr val="5B6678"/>
+                </a:solidFill>
+                <a:latin typeface="Arial"/>
+              </a:rPr>
+              <a:t>2 / 35</a:t>
+            </a:r>
+          </a:p>
+        </p:txBody>
+      </p:sp>
     </p:spTree>
   </p:cSld>
   <p:clrMapOvr>
@@ -16203,6 +16994,45 @@
           </a:p>
         </p:txBody>
       </p:sp>
+      <p:sp>
+        <p:nvSpPr>
+          <p:cNvPr id="25" name="TextBox 24"/>
+          <p:cNvSpPr txBox="1"/>
+          <p:nvPr/>
+        </p:nvSpPr>
+        <p:spPr>
+          <a:xfrm>
+            <a:off x="11274552" y="6547104"/>
+            <a:ext cx="868680" cy="256032"/>
+          </a:xfrm>
+          <a:prstGeom prst="rect">
+            <a:avLst/>
+          </a:prstGeom>
+          <a:noFill/>
+        </p:spPr>
+        <p:txBody>
+          <a:bodyPr wrap="none" lIns="0" rIns="0" tIns="0" bIns="0">
+            <a:spAutoFit/>
+          </a:bodyPr>
+          <a:lstStyle/>
+          <a:p>
+            <a:pPr algn="r">
+              <a:lnSpc>
+                <a:spcPct val="100000"/>
+              </a:lnSpc>
+            </a:pPr>
+            <a:r>
+              <a:rPr sz="1000" i="1">
+                <a:solidFill>
+                  <a:srgbClr val="5B6678"/>
+                </a:solidFill>
+                <a:latin typeface="Arial"/>
+              </a:rPr>
+              <a:t>20 / 35</a:t>
+            </a:r>
+          </a:p>
+        </p:txBody>
+      </p:sp>
     </p:spTree>
   </p:cSld>
   <p:clrMapOvr>
@@ -16863,8 +17693,8 @@
         </p:nvSpPr>
         <p:spPr>
           <a:xfrm>
-            <a:off x="502920" y="6126480"/>
-            <a:ext cx="11247120" cy="640080"/>
+            <a:off x="502920" y="5989320"/>
+            <a:ext cx="11247120" cy="502920"/>
           </a:xfrm>
           <a:prstGeom prst="roundRect">
             <a:avLst>
@@ -16911,8 +17741,8 @@
         </p:nvSpPr>
         <p:spPr>
           <a:xfrm>
-            <a:off x="685800" y="6199632"/>
-            <a:ext cx="10881360" cy="493775"/>
+            <a:off x="685800" y="6062472"/>
+            <a:ext cx="10881360" cy="356616"/>
           </a:xfrm>
           <a:prstGeom prst="rect">
             <a:avLst/>
@@ -16931,13 +17761,112 @@
               </a:lnSpc>
             </a:pPr>
             <a:r>
-              <a:rPr sz="1500" b="1" i="0">
+              <a:rPr sz="1400" b="1" i="0">
                 <a:solidFill>
                   <a:srgbClr val="21295C"/>
                 </a:solidFill>
                 <a:latin typeface="Arial"/>
               </a:rPr>
               <a:t>Стоимость внимания растёт квадратично от длины. 1M ≈ 16× дороже 100k — production-pricing с batching; чистая N²-теория дала бы 100×.</a:t>
+            </a:r>
+            <a:r>
+              <a:rPr sz="728" baseline="30000" b="0" i="1">
+                <a:latin typeface="Arial"/>
+                <a:cs typeface="Arial"/>
+                <a:ea typeface="Arial"/>
+                <a:solidFill>
+                  <a:srgbClr val="1C7293"/>
+                </a:solidFill>
+              </a:rPr>
+              <a:t>[1]</a:t>
+            </a:r>
+          </a:p>
+        </p:txBody>
+      </p:sp>
+      <p:sp>
+        <p:nvSpPr>
+          <p:cNvPr id="20" name="TextBox 19"/>
+          <p:cNvSpPr txBox="1"/>
+          <p:nvPr/>
+        </p:nvSpPr>
+        <p:spPr>
+          <a:xfrm>
+            <a:off x="502920" y="6510528"/>
+            <a:ext cx="11247120" cy="310896"/>
+          </a:xfrm>
+          <a:prstGeom prst="rect">
+            <a:avLst/>
+          </a:prstGeom>
+          <a:noFill/>
+        </p:spPr>
+        <p:txBody>
+          <a:bodyPr wrap="square" lIns="0" rIns="0" tIns="0" bIns="0" anchor="t">
+            <a:spAutoFit/>
+          </a:bodyPr>
+          <a:lstStyle/>
+          <a:p>
+            <a:pPr algn="l">
+              <a:lnSpc>
+                <a:spcPct val="102000"/>
+              </a:lnSpc>
+            </a:pPr>
+            <a:r>
+              <a:rPr sz="850" b="1" i="1">
+                <a:solidFill>
+                  <a:srgbClr val="065A82"/>
+                </a:solidFill>
+                <a:latin typeface="Arial"/>
+              </a:rPr>
+              <a:t>[1] </a:t>
+            </a:r>
+            <a:r>
+              <a:rPr sz="850" i="1">
+                <a:solidFill>
+                  <a:srgbClr val="1C7293"/>
+                </a:solidFill>
+                <a:latin typeface="Arial"/>
+                <a:hlinkClick r:id="rId3"/>
+              </a:rPr>
+              <a:t>Anthropic — контекстное окно моделей Claude</a:t>
+            </a:r>
+          </a:p>
+        </p:txBody>
+      </p:sp>
+      <p:sp>
+        <p:nvSpPr>
+          <p:cNvPr id="21" name="TextBox 20"/>
+          <p:cNvSpPr txBox="1"/>
+          <p:nvPr/>
+        </p:nvSpPr>
+        <p:spPr>
+          <a:xfrm>
+            <a:off x="11274552" y="6547104"/>
+            <a:ext cx="868680" cy="256032"/>
+          </a:xfrm>
+          <a:prstGeom prst="rect">
+            <a:avLst/>
+          </a:prstGeom>
+          <a:noFill/>
+        </p:spPr>
+        <p:txBody>
+          <a:bodyPr wrap="none" lIns="0" rIns="0" tIns="0" bIns="0">
+            <a:spAutoFit/>
+          </a:bodyPr>
+          <a:lstStyle/>
+          <a:p>
+            <a:pPr algn="r">
+              <a:lnSpc>
+                <a:spcPct val="100000"/>
+              </a:lnSpc>
+            </a:pPr>
+            <a:r>
+              <a:rPr sz="1000" i="1">
+                <a:solidFill>
+                  <a:srgbClr val="5B6678"/>
+                </a:solidFill>
+                <a:latin typeface="Arial"/>
+              </a:rPr>
+              <a:t>21 / 35</a:t>
             </a:r>
           </a:p>
         </p:txBody>
@@ -17035,6 +17964,17 @@
               </a:rPr>
               <a:t>Lost-in-the-middle effect — модель забывает середину</a:t>
             </a:r>
+            <a:r>
+              <a:rPr sz="780" baseline="30000" b="0" i="1">
+                <a:latin typeface="Arial"/>
+                <a:cs typeface="Arial"/>
+                <a:ea typeface="Arial"/>
+                <a:solidFill>
+                  <a:srgbClr val="1C7293"/>
+                </a:solidFill>
+              </a:rPr>
+              <a:t>[1]</a:t>
+            </a:r>
           </a:p>
         </p:txBody>
       </p:sp>
@@ -17557,8 +18497,8 @@
         </p:nvSpPr>
         <p:spPr>
           <a:xfrm>
-            <a:off x="502920" y="6126480"/>
-            <a:ext cx="11247120" cy="502920"/>
+            <a:off x="502920" y="5998464"/>
+            <a:ext cx="11247120" cy="457200"/>
           </a:xfrm>
           <a:prstGeom prst="roundRect">
             <a:avLst>
@@ -17605,8 +18545,8 @@
         </p:nvSpPr>
         <p:spPr>
           <a:xfrm>
-            <a:off x="685800" y="6199632"/>
-            <a:ext cx="10881360" cy="356616"/>
+            <a:off x="685800" y="6071616"/>
+            <a:ext cx="10881360" cy="310896"/>
           </a:xfrm>
           <a:prstGeom prst="rect">
             <a:avLst/>
@@ -17625,13 +18565,101 @@
               </a:lnSpc>
             </a:pPr>
             <a:r>
-              <a:rPr sz="1500" b="1" i="0">
+              <a:rPr sz="1400" b="1" i="0">
                 <a:solidFill>
                   <a:srgbClr val="21295C"/>
                 </a:solidFill>
                 <a:latin typeface="Arial"/>
               </a:rPr>
               <a:t>Инженерный вывод: важное помещайте в начало или в конец промпта, не в середину.</a:t>
+            </a:r>
+          </a:p>
+        </p:txBody>
+      </p:sp>
+      <p:sp>
+        <p:nvSpPr>
+          <p:cNvPr id="19" name="TextBox 18"/>
+          <p:cNvSpPr txBox="1"/>
+          <p:nvPr/>
+        </p:nvSpPr>
+        <p:spPr>
+          <a:xfrm>
+            <a:off x="502920" y="6510528"/>
+            <a:ext cx="11247120" cy="310896"/>
+          </a:xfrm>
+          <a:prstGeom prst="rect">
+            <a:avLst/>
+          </a:prstGeom>
+          <a:noFill/>
+        </p:spPr>
+        <p:txBody>
+          <a:bodyPr wrap="square" lIns="0" rIns="0" tIns="0" bIns="0" anchor="t">
+            <a:spAutoFit/>
+          </a:bodyPr>
+          <a:lstStyle/>
+          <a:p>
+            <a:pPr algn="l">
+              <a:lnSpc>
+                <a:spcPct val="102000"/>
+              </a:lnSpc>
+            </a:pPr>
+            <a:r>
+              <a:rPr sz="850" b="1" i="1">
+                <a:solidFill>
+                  <a:srgbClr val="065A82"/>
+                </a:solidFill>
+                <a:latin typeface="Arial"/>
+              </a:rPr>
+              <a:t>[1] </a:t>
+            </a:r>
+            <a:r>
+              <a:rPr sz="850" i="1">
+                <a:solidFill>
+                  <a:srgbClr val="1C7293"/>
+                </a:solidFill>
+                <a:latin typeface="Arial"/>
+                <a:hlinkClick r:id="rId3"/>
+              </a:rPr>
+              <a:t>Liu et al. (2023) — Lost in the Middle</a:t>
+            </a:r>
+          </a:p>
+        </p:txBody>
+      </p:sp>
+      <p:sp>
+        <p:nvSpPr>
+          <p:cNvPr id="20" name="TextBox 19"/>
+          <p:cNvSpPr txBox="1"/>
+          <p:nvPr/>
+        </p:nvSpPr>
+        <p:spPr>
+          <a:xfrm>
+            <a:off x="11274552" y="6547104"/>
+            <a:ext cx="868680" cy="256032"/>
+          </a:xfrm>
+          <a:prstGeom prst="rect">
+            <a:avLst/>
+          </a:prstGeom>
+          <a:noFill/>
+        </p:spPr>
+        <p:txBody>
+          <a:bodyPr wrap="none" lIns="0" rIns="0" tIns="0" bIns="0">
+            <a:spAutoFit/>
+          </a:bodyPr>
+          <a:lstStyle/>
+          <a:p>
+            <a:pPr algn="r">
+              <a:lnSpc>
+                <a:spcPct val="100000"/>
+              </a:lnSpc>
+            </a:pPr>
+            <a:r>
+              <a:rPr sz="1000" i="1">
+                <a:solidFill>
+                  <a:srgbClr val="5B6678"/>
+                </a:solidFill>
+                <a:latin typeface="Arial"/>
+              </a:rPr>
+              <a:t>22 / 35</a:t>
             </a:r>
           </a:p>
         </p:txBody>
@@ -18289,6 +19317,45 @@
           </a:p>
         </p:txBody>
       </p:sp>
+      <p:sp>
+        <p:nvSpPr>
+          <p:cNvPr id="17" name="TextBox 16"/>
+          <p:cNvSpPr txBox="1"/>
+          <p:nvPr/>
+        </p:nvSpPr>
+        <p:spPr>
+          <a:xfrm>
+            <a:off x="11274552" y="6547104"/>
+            <a:ext cx="868680" cy="256032"/>
+          </a:xfrm>
+          <a:prstGeom prst="rect">
+            <a:avLst/>
+          </a:prstGeom>
+          <a:noFill/>
+        </p:spPr>
+        <p:txBody>
+          <a:bodyPr wrap="none" lIns="0" rIns="0" tIns="0" bIns="0">
+            <a:spAutoFit/>
+          </a:bodyPr>
+          <a:lstStyle/>
+          <a:p>
+            <a:pPr algn="r">
+              <a:lnSpc>
+                <a:spcPct val="100000"/>
+              </a:lnSpc>
+            </a:pPr>
+            <a:r>
+              <a:rPr sz="1000" i="1">
+                <a:solidFill>
+                  <a:srgbClr val="5B6678"/>
+                </a:solidFill>
+                <a:latin typeface="Arial"/>
+              </a:rPr>
+              <a:t>23 / 35</a:t>
+            </a:r>
+          </a:p>
+        </p:txBody>
+      </p:sp>
     </p:spTree>
   </p:cSld>
   <p:clrMapOvr>
@@ -19149,6 +20216,45 @@
           </a:p>
         </p:txBody>
       </p:sp>
+      <p:sp>
+        <p:nvSpPr>
+          <p:cNvPr id="23" name="TextBox 22"/>
+          <p:cNvSpPr txBox="1"/>
+          <p:nvPr/>
+        </p:nvSpPr>
+        <p:spPr>
+          <a:xfrm>
+            <a:off x="11274552" y="6547104"/>
+            <a:ext cx="868680" cy="256032"/>
+          </a:xfrm>
+          <a:prstGeom prst="rect">
+            <a:avLst/>
+          </a:prstGeom>
+          <a:noFill/>
+        </p:spPr>
+        <p:txBody>
+          <a:bodyPr wrap="none" lIns="0" rIns="0" tIns="0" bIns="0">
+            <a:spAutoFit/>
+          </a:bodyPr>
+          <a:lstStyle/>
+          <a:p>
+            <a:pPr algn="r">
+              <a:lnSpc>
+                <a:spcPct val="100000"/>
+              </a:lnSpc>
+            </a:pPr>
+            <a:r>
+              <a:rPr sz="1000" i="1">
+                <a:solidFill>
+                  <a:srgbClr val="5B6678"/>
+                </a:solidFill>
+                <a:latin typeface="Arial"/>
+              </a:rPr>
+              <a:t>24 / 35</a:t>
+            </a:r>
+          </a:p>
+        </p:txBody>
+      </p:sp>
     </p:spTree>
   </p:cSld>
   <p:clrMapOvr>
@@ -19253,8 +20359,8 @@
         </p:nvSpPr>
         <p:spPr>
           <a:xfrm>
-            <a:off x="502920" y="1737360"/>
-            <a:ext cx="3749039" cy="4572000"/>
+            <a:off x="502920" y="1719072"/>
+            <a:ext cx="3749039" cy="4498848"/>
           </a:xfrm>
           <a:prstGeom prst="roundRect">
             <a:avLst>
@@ -19301,7 +20407,7 @@
         </p:nvSpPr>
         <p:spPr>
           <a:xfrm>
-            <a:off x="685800" y="1901952"/>
+            <a:off x="685800" y="1883664"/>
             <a:ext cx="3383279" cy="457200"/>
           </a:xfrm>
           <a:prstGeom prst="rect">
@@ -19348,7 +20454,7 @@
         </p:blipFill>
         <p:spPr>
           <a:xfrm>
-            <a:off x="777240" y="2514600"/>
+            <a:off x="777240" y="2496312"/>
             <a:ext cx="3200399" cy="2331720"/>
           </a:xfrm>
           <a:prstGeom prst="rect">
@@ -19364,8 +20470,8 @@
         </p:nvSpPr>
         <p:spPr>
           <a:xfrm>
-            <a:off x="685800" y="4983479"/>
-            <a:ext cx="3383279" cy="1280160"/>
+            <a:off x="685800" y="4828031"/>
+            <a:ext cx="3383279" cy="1325880"/>
           </a:xfrm>
           <a:prstGeom prst="rect">
             <a:avLst/>
@@ -19380,11 +20486,11 @@
           <a:p>
             <a:pPr algn="ctr">
               <a:lnSpc>
-                <a:spcPct val="135000"/>
-              </a:lnSpc>
-            </a:pPr>
-            <a:r>
-              <a:rPr sz="1600" b="0" i="1">
+                <a:spcPct val="124000"/>
+              </a:lnSpc>
+            </a:pPr>
+            <a:r>
+              <a:rPr sz="1400" b="0" i="1">
                 <a:solidFill>
                   <a:srgbClr val="21295C"/>
                 </a:solidFill>
@@ -19405,8 +20511,8 @@
         </p:nvSpPr>
         <p:spPr>
           <a:xfrm>
-            <a:off x="4343399" y="1737360"/>
-            <a:ext cx="3749039" cy="4572000"/>
+            <a:off x="4343399" y="1719072"/>
+            <a:ext cx="3749039" cy="4498848"/>
           </a:xfrm>
           <a:prstGeom prst="roundRect">
             <a:avLst>
@@ -19453,7 +20559,7 @@
         </p:nvSpPr>
         <p:spPr>
           <a:xfrm>
-            <a:off x="4526279" y="1901952"/>
+            <a:off x="4526279" y="1883664"/>
             <a:ext cx="3383279" cy="457200"/>
           </a:xfrm>
           <a:prstGeom prst="rect">
@@ -19500,7 +20606,7 @@
         </p:blipFill>
         <p:spPr>
           <a:xfrm>
-            <a:off x="4617719" y="2514600"/>
+            <a:off x="4617719" y="2496312"/>
             <a:ext cx="3200399" cy="2331720"/>
           </a:xfrm>
           <a:prstGeom prst="rect">
@@ -19516,8 +20622,8 @@
         </p:nvSpPr>
         <p:spPr>
           <a:xfrm>
-            <a:off x="4526279" y="4983479"/>
-            <a:ext cx="3383279" cy="1280160"/>
+            <a:off x="4526279" y="4828031"/>
+            <a:ext cx="3383279" cy="1325880"/>
           </a:xfrm>
           <a:prstGeom prst="rect">
             <a:avLst/>
@@ -19532,11 +20638,11 @@
           <a:p>
             <a:pPr algn="ctr">
               <a:lnSpc>
-                <a:spcPct val="135000"/>
-              </a:lnSpc>
-            </a:pPr>
-            <a:r>
-              <a:rPr sz="1600" b="0" i="1">
+                <a:spcPct val="124000"/>
+              </a:lnSpc>
+            </a:pPr>
+            <a:r>
+              <a:rPr sz="1400" b="0" i="1">
                 <a:solidFill>
                   <a:srgbClr val="21295C"/>
                 </a:solidFill>
@@ -19558,8 +20664,8 @@
         </p:nvSpPr>
         <p:spPr>
           <a:xfrm>
-            <a:off x="8183879" y="1737360"/>
-            <a:ext cx="3749039" cy="4572000"/>
+            <a:off x="8183879" y="1719072"/>
+            <a:ext cx="3749039" cy="4498848"/>
           </a:xfrm>
           <a:prstGeom prst="roundRect">
             <a:avLst>
@@ -19606,7 +20712,7 @@
         </p:nvSpPr>
         <p:spPr>
           <a:xfrm>
-            <a:off x="8366759" y="1901952"/>
+            <a:off x="8366759" y="1883664"/>
             <a:ext cx="3383279" cy="457200"/>
           </a:xfrm>
           <a:prstGeom prst="rect">
@@ -19653,7 +20759,7 @@
         </p:blipFill>
         <p:spPr>
           <a:xfrm>
-            <a:off x="8458200" y="2514600"/>
+            <a:off x="8458200" y="2496312"/>
             <a:ext cx="3200399" cy="2331720"/>
           </a:xfrm>
           <a:prstGeom prst="rect">
@@ -19669,8 +20775,8 @@
         </p:nvSpPr>
         <p:spPr>
           <a:xfrm>
-            <a:off x="8366759" y="4983479"/>
-            <a:ext cx="3383279" cy="1280160"/>
+            <a:off x="8366759" y="4828031"/>
+            <a:ext cx="3383279" cy="1325880"/>
           </a:xfrm>
           <a:prstGeom prst="rect">
             <a:avLst/>
@@ -19685,11 +20791,11 @@
           <a:p>
             <a:pPr algn="ctr">
               <a:lnSpc>
-                <a:spcPct val="135000"/>
-              </a:lnSpc>
-            </a:pPr>
-            <a:r>
-              <a:rPr sz="1600" b="0" i="1">
+                <a:spcPct val="124000"/>
+              </a:lnSpc>
+            </a:pPr>
+            <a:r>
+              <a:rPr sz="1400" b="0" i="1">
                 <a:solidFill>
                   <a:srgbClr val="21295C"/>
                 </a:solidFill>
@@ -19710,8 +20816,8 @@
         </p:nvSpPr>
         <p:spPr>
           <a:xfrm>
-            <a:off x="502920" y="6400800"/>
-            <a:ext cx="11247120" cy="365760"/>
+            <a:off x="502920" y="6272784"/>
+            <a:ext cx="11247120" cy="274320"/>
           </a:xfrm>
           <a:prstGeom prst="roundRect">
             <a:avLst>
@@ -19758,8 +20864,8 @@
         </p:nvSpPr>
         <p:spPr>
           <a:xfrm>
-            <a:off x="667512" y="6473952"/>
-            <a:ext cx="10917936" cy="219456"/>
+            <a:off x="667512" y="6345936"/>
+            <a:ext cx="10917936" cy="128015"/>
           </a:xfrm>
           <a:prstGeom prst="rect">
             <a:avLst/>
@@ -19778,13 +20884,112 @@
               </a:lnSpc>
             </a:pPr>
             <a:r>
-              <a:rPr sz="1400" b="0" i="0">
+              <a:rPr sz="1200" b="0" i="0">
                 <a:solidFill>
                   <a:srgbClr val="21295C"/>
                 </a:solidFill>
                 <a:latin typeface="Arial"/>
               </a:rPr>
               <a:t>Альтернативные ручки: top-p (nucleus) — отрезает редкие токены по Σ; top-k — по числу кандидатов. Достаточно T для start.</a:t>
+            </a:r>
+            <a:r>
+              <a:rPr sz="624" baseline="30000" b="0" i="1">
+                <a:latin typeface="Arial"/>
+                <a:cs typeface="Arial"/>
+                <a:ea typeface="Arial"/>
+                <a:solidFill>
+                  <a:srgbClr val="1C7293"/>
+                </a:solidFill>
+              </a:rPr>
+              <a:t>[1]</a:t>
+            </a:r>
+          </a:p>
+        </p:txBody>
+      </p:sp>
+      <p:sp>
+        <p:nvSpPr>
+          <p:cNvPr id="18" name="TextBox 17"/>
+          <p:cNvSpPr txBox="1"/>
+          <p:nvPr/>
+        </p:nvSpPr>
+        <p:spPr>
+          <a:xfrm>
+            <a:off x="502920" y="6583680"/>
+            <a:ext cx="11247120" cy="310896"/>
+          </a:xfrm>
+          <a:prstGeom prst="rect">
+            <a:avLst/>
+          </a:prstGeom>
+          <a:noFill/>
+        </p:spPr>
+        <p:txBody>
+          <a:bodyPr wrap="square" lIns="0" rIns="0" tIns="0" bIns="0" anchor="t">
+            <a:spAutoFit/>
+          </a:bodyPr>
+          <a:lstStyle/>
+          <a:p>
+            <a:pPr algn="l">
+              <a:lnSpc>
+                <a:spcPct val="102000"/>
+              </a:lnSpc>
+            </a:pPr>
+            <a:r>
+              <a:rPr sz="850" b="1" i="1">
+                <a:solidFill>
+                  <a:srgbClr val="065A82"/>
+                </a:solidFill>
+                <a:latin typeface="Arial"/>
+              </a:rPr>
+              <a:t>[1] </a:t>
+            </a:r>
+            <a:r>
+              <a:rPr sz="850" i="1">
+                <a:solidFill>
+                  <a:srgbClr val="1C7293"/>
+                </a:solidFill>
+                <a:latin typeface="Arial"/>
+                <a:hlinkClick r:id="rId5"/>
+              </a:rPr>
+              <a:t>Holtzman et al. (2019) — nucleus sampling (top-p)</a:t>
+            </a:r>
+          </a:p>
+        </p:txBody>
+      </p:sp>
+      <p:sp>
+        <p:nvSpPr>
+          <p:cNvPr id="19" name="TextBox 18"/>
+          <p:cNvSpPr txBox="1"/>
+          <p:nvPr/>
+        </p:nvSpPr>
+        <p:spPr>
+          <a:xfrm>
+            <a:off x="11274552" y="6547104"/>
+            <a:ext cx="868680" cy="256032"/>
+          </a:xfrm>
+          <a:prstGeom prst="rect">
+            <a:avLst/>
+          </a:prstGeom>
+          <a:noFill/>
+        </p:spPr>
+        <p:txBody>
+          <a:bodyPr wrap="none" lIns="0" rIns="0" tIns="0" bIns="0">
+            <a:spAutoFit/>
+          </a:bodyPr>
+          <a:lstStyle/>
+          <a:p>
+            <a:pPr algn="r">
+              <a:lnSpc>
+                <a:spcPct val="100000"/>
+              </a:lnSpc>
+            </a:pPr>
+            <a:r>
+              <a:rPr sz="1000" i="1">
+                <a:solidFill>
+                  <a:srgbClr val="5B6678"/>
+                </a:solidFill>
+                <a:latin typeface="Arial"/>
+              </a:rPr>
+              <a:t>25 / 35</a:t>
             </a:r>
           </a:p>
         </p:txBody>
@@ -22087,6 +23292,45 @@
           </a:p>
         </p:txBody>
       </p:sp>
+      <p:sp>
+        <p:nvSpPr>
+          <p:cNvPr id="56" name="TextBox 55"/>
+          <p:cNvSpPr txBox="1"/>
+          <p:nvPr/>
+        </p:nvSpPr>
+        <p:spPr>
+          <a:xfrm>
+            <a:off x="11274552" y="6547104"/>
+            <a:ext cx="868680" cy="256032"/>
+          </a:xfrm>
+          <a:prstGeom prst="rect">
+            <a:avLst/>
+          </a:prstGeom>
+          <a:noFill/>
+        </p:spPr>
+        <p:txBody>
+          <a:bodyPr wrap="none" lIns="0" rIns="0" tIns="0" bIns="0">
+            <a:spAutoFit/>
+          </a:bodyPr>
+          <a:lstStyle/>
+          <a:p>
+            <a:pPr algn="r">
+              <a:lnSpc>
+                <a:spcPct val="100000"/>
+              </a:lnSpc>
+            </a:pPr>
+            <a:r>
+              <a:rPr sz="1000" i="1">
+                <a:solidFill>
+                  <a:srgbClr val="5B6678"/>
+                </a:solidFill>
+                <a:latin typeface="Arial"/>
+              </a:rPr>
+              <a:t>26 / 35</a:t>
+            </a:r>
+          </a:p>
+        </p:txBody>
+      </p:sp>
     </p:spTree>
   </p:cSld>
   <p:clrMapOvr>
@@ -23127,6 +24371,45 @@
           </a:p>
         </p:txBody>
       </p:sp>
+      <p:sp>
+        <p:nvSpPr>
+          <p:cNvPr id="26" name="TextBox 25"/>
+          <p:cNvSpPr txBox="1"/>
+          <p:nvPr/>
+        </p:nvSpPr>
+        <p:spPr>
+          <a:xfrm>
+            <a:off x="11274552" y="6547104"/>
+            <a:ext cx="868680" cy="256032"/>
+          </a:xfrm>
+          <a:prstGeom prst="rect">
+            <a:avLst/>
+          </a:prstGeom>
+          <a:noFill/>
+        </p:spPr>
+        <p:txBody>
+          <a:bodyPr wrap="none" lIns="0" rIns="0" tIns="0" bIns="0">
+            <a:spAutoFit/>
+          </a:bodyPr>
+          <a:lstStyle/>
+          <a:p>
+            <a:pPr algn="r">
+              <a:lnSpc>
+                <a:spcPct val="100000"/>
+              </a:lnSpc>
+            </a:pPr>
+            <a:r>
+              <a:rPr sz="1000" i="1">
+                <a:solidFill>
+                  <a:srgbClr val="5B6678"/>
+                </a:solidFill>
+                <a:latin typeface="Arial"/>
+              </a:rPr>
+              <a:t>27 / 35</a:t>
+            </a:r>
+          </a:p>
+        </p:txBody>
+      </p:sp>
     </p:spTree>
   </p:cSld>
   <p:clrMapOvr>
@@ -23232,11 +24515,11 @@
         <p:spPr>
           <a:xfrm>
             <a:off x="502920" y="1828800"/>
-            <a:ext cx="5486400" cy="4754880"/>
+            <a:ext cx="5486400" cy="4526280"/>
           </a:xfrm>
           <a:prstGeom prst="roundRect">
             <a:avLst>
-              <a:gd name="adj" fmla="val 6410"/>
+              <a:gd name="adj" fmla="val 6734"/>
             </a:avLst>
           </a:prstGeom>
           <a:solidFill>
@@ -23386,6 +24669,17 @@
               <a:t>• Qwen 2.5 1.5B  · Llama 3.2 1B
 • Llama 3.1 8B  · Mistral 7B</a:t>
             </a:r>
+            <a:r>
+              <a:rPr sz="780" baseline="30000" b="0" i="1">
+                <a:latin typeface="Liberation Mono"/>
+                <a:cs typeface="Liberation Mono"/>
+                <a:ea typeface="Liberation Mono"/>
+                <a:solidFill>
+                  <a:srgbClr val="1C7293"/>
+                </a:solidFill>
+              </a:rPr>
+              <a:t>[1]</a:t>
+            </a:r>
           </a:p>
         </p:txBody>
       </p:sp>
@@ -23397,7 +24691,7 @@
         </p:nvSpPr>
         <p:spPr>
           <a:xfrm>
-            <a:off x="777240" y="4581144"/>
+            <a:off x="777240" y="4535424"/>
             <a:ext cx="237744" cy="237744"/>
           </a:xfrm>
           <a:prstGeom prst="roundRect">
@@ -23443,7 +24737,7 @@
         </p:nvSpPr>
         <p:spPr>
           <a:xfrm>
-            <a:off x="1143000" y="4434840"/>
+            <a:off x="1143000" y="4389120"/>
             <a:ext cx="1755648" cy="457200"/>
           </a:xfrm>
           <a:prstGeom prst="rect">
@@ -23482,7 +24776,7 @@
         </p:nvSpPr>
         <p:spPr>
           <a:xfrm>
-            <a:off x="2971800" y="4434840"/>
+            <a:off x="2971800" y="4389120"/>
             <a:ext cx="3017520" cy="457200"/>
           </a:xfrm>
           <a:prstGeom prst="rect">
@@ -23521,7 +24815,7 @@
         </p:nvSpPr>
         <p:spPr>
           <a:xfrm>
-            <a:off x="777240" y="5111496"/>
+            <a:off x="777240" y="5010912"/>
             <a:ext cx="237744" cy="237744"/>
           </a:xfrm>
           <a:prstGeom prst="roundRect">
@@ -23567,7 +24861,7 @@
         </p:nvSpPr>
         <p:spPr>
           <a:xfrm>
-            <a:off x="1143000" y="4965192"/>
+            <a:off x="1143000" y="4864608"/>
             <a:ext cx="1755648" cy="457200"/>
           </a:xfrm>
           <a:prstGeom prst="rect">
@@ -23606,7 +24900,7 @@
         </p:nvSpPr>
         <p:spPr>
           <a:xfrm>
-            <a:off x="2971800" y="4965192"/>
+            <a:off x="2971800" y="4864608"/>
             <a:ext cx="3017520" cy="457200"/>
           </a:xfrm>
           <a:prstGeom prst="rect">
@@ -23645,7 +24939,7 @@
         </p:nvSpPr>
         <p:spPr>
           <a:xfrm>
-            <a:off x="777240" y="5641848"/>
+            <a:off x="777240" y="5486400"/>
             <a:ext cx="237744" cy="237744"/>
           </a:xfrm>
           <a:prstGeom prst="roundRect">
@@ -23691,7 +24985,7 @@
         </p:nvSpPr>
         <p:spPr>
           <a:xfrm>
-            <a:off x="1143000" y="5495544"/>
+            <a:off x="1143000" y="5340096"/>
             <a:ext cx="1755648" cy="457200"/>
           </a:xfrm>
           <a:prstGeom prst="rect">
@@ -23730,7 +25024,7 @@
         </p:nvSpPr>
         <p:spPr>
           <a:xfrm>
-            <a:off x="2971800" y="5495544"/>
+            <a:off x="2971800" y="5340096"/>
             <a:ext cx="3017520" cy="457200"/>
           </a:xfrm>
           <a:prstGeom prst="rect">
@@ -23769,7 +25063,7 @@
         </p:nvSpPr>
         <p:spPr>
           <a:xfrm>
-            <a:off x="777240" y="6172200"/>
+            <a:off x="777240" y="5961888"/>
             <a:ext cx="237744" cy="237744"/>
           </a:xfrm>
           <a:prstGeom prst="roundRect">
@@ -23815,7 +25109,7 @@
         </p:nvSpPr>
         <p:spPr>
           <a:xfrm>
-            <a:off x="1143000" y="6025896"/>
+            <a:off x="1143000" y="5815583"/>
             <a:ext cx="1755648" cy="457200"/>
           </a:xfrm>
           <a:prstGeom prst="rect">
@@ -23854,7 +25148,7 @@
         </p:nvSpPr>
         <p:spPr>
           <a:xfrm>
-            <a:off x="2971800" y="6025896"/>
+            <a:off x="2971800" y="5815583"/>
             <a:ext cx="3017520" cy="457200"/>
           </a:xfrm>
           <a:prstGeom prst="rect">
@@ -23894,11 +25188,11 @@
         <p:spPr>
           <a:xfrm>
             <a:off x="6263640" y="1828800"/>
-            <a:ext cx="5486400" cy="4754880"/>
+            <a:ext cx="5486400" cy="4526280"/>
           </a:xfrm>
           <a:prstGeom prst="roundRect">
             <a:avLst>
-              <a:gd name="adj" fmla="val 6410"/>
+              <a:gd name="adj" fmla="val 6734"/>
             </a:avLst>
           </a:prstGeom>
           <a:solidFill>
@@ -24060,7 +25354,7 @@
         </p:nvSpPr>
         <p:spPr>
           <a:xfrm>
-            <a:off x="6537959" y="4581144"/>
+            <a:off x="6537959" y="4535424"/>
             <a:ext cx="237744" cy="237744"/>
           </a:xfrm>
           <a:prstGeom prst="roundRect">
@@ -24106,7 +25400,7 @@
         </p:nvSpPr>
         <p:spPr>
           <a:xfrm>
-            <a:off x="6903720" y="4434840"/>
+            <a:off x="6903720" y="4389120"/>
             <a:ext cx="1755648" cy="457200"/>
           </a:xfrm>
           <a:prstGeom prst="rect">
@@ -24145,7 +25439,7 @@
         </p:nvSpPr>
         <p:spPr>
           <a:xfrm>
-            <a:off x="8732520" y="4434840"/>
+            <a:off x="8732520" y="4389120"/>
             <a:ext cx="3017520" cy="457200"/>
           </a:xfrm>
           <a:prstGeom prst="rect">
@@ -24184,7 +25478,7 @@
         </p:nvSpPr>
         <p:spPr>
           <a:xfrm>
-            <a:off x="6537959" y="5111496"/>
+            <a:off x="6537959" y="5010912"/>
             <a:ext cx="237744" cy="237744"/>
           </a:xfrm>
           <a:prstGeom prst="roundRect">
@@ -24230,7 +25524,7 @@
         </p:nvSpPr>
         <p:spPr>
           <a:xfrm>
-            <a:off x="6903720" y="4965192"/>
+            <a:off x="6903720" y="4864608"/>
             <a:ext cx="1755648" cy="457200"/>
           </a:xfrm>
           <a:prstGeom prst="rect">
@@ -24269,7 +25563,7 @@
         </p:nvSpPr>
         <p:spPr>
           <a:xfrm>
-            <a:off x="8732520" y="4965192"/>
+            <a:off x="8732520" y="4864608"/>
             <a:ext cx="3017520" cy="457200"/>
           </a:xfrm>
           <a:prstGeom prst="rect">
@@ -24308,7 +25602,7 @@
         </p:nvSpPr>
         <p:spPr>
           <a:xfrm>
-            <a:off x="6537959" y="5641848"/>
+            <a:off x="6537959" y="5486400"/>
             <a:ext cx="237744" cy="237744"/>
           </a:xfrm>
           <a:prstGeom prst="roundRect">
@@ -24354,7 +25648,7 @@
         </p:nvSpPr>
         <p:spPr>
           <a:xfrm>
-            <a:off x="6903720" y="5495544"/>
+            <a:off x="6903720" y="5340096"/>
             <a:ext cx="1755648" cy="457200"/>
           </a:xfrm>
           <a:prstGeom prst="rect">
@@ -24393,7 +25687,7 @@
         </p:nvSpPr>
         <p:spPr>
           <a:xfrm>
-            <a:off x="8732520" y="5495544"/>
+            <a:off x="8732520" y="5340096"/>
             <a:ext cx="3017520" cy="457200"/>
           </a:xfrm>
           <a:prstGeom prst="rect">
@@ -24432,7 +25726,7 @@
         </p:nvSpPr>
         <p:spPr>
           <a:xfrm>
-            <a:off x="6537959" y="6172200"/>
+            <a:off x="6537959" y="5961888"/>
             <a:ext cx="237744" cy="237744"/>
           </a:xfrm>
           <a:prstGeom prst="roundRect">
@@ -24478,7 +25772,7 @@
         </p:nvSpPr>
         <p:spPr>
           <a:xfrm>
-            <a:off x="6903720" y="6025896"/>
+            <a:off x="6903720" y="5815583"/>
             <a:ext cx="1755648" cy="457200"/>
           </a:xfrm>
           <a:prstGeom prst="rect">
@@ -24517,7 +25811,7 @@
         </p:nvSpPr>
         <p:spPr>
           <a:xfrm>
-            <a:off x="8732520" y="6025896"/>
+            <a:off x="8732520" y="5815583"/>
             <a:ext cx="3017520" cy="457200"/>
           </a:xfrm>
           <a:prstGeom prst="rect">
@@ -24544,6 +25838,94 @@
                 <a:latin typeface="Arial"/>
               </a:rPr>
               <a:t>оплата за токены, RU ≈ 2× EN</a:t>
+            </a:r>
+          </a:p>
+        </p:txBody>
+      </p:sp>
+      <p:sp>
+        <p:nvSpPr>
+          <p:cNvPr id="36" name="TextBox 35"/>
+          <p:cNvSpPr txBox="1"/>
+          <p:nvPr/>
+        </p:nvSpPr>
+        <p:spPr>
+          <a:xfrm>
+            <a:off x="502920" y="6510528"/>
+            <a:ext cx="11247120" cy="310896"/>
+          </a:xfrm>
+          <a:prstGeom prst="rect">
+            <a:avLst/>
+          </a:prstGeom>
+          <a:noFill/>
+        </p:spPr>
+        <p:txBody>
+          <a:bodyPr wrap="square" lIns="0" rIns="0" tIns="0" bIns="0" anchor="t">
+            <a:spAutoFit/>
+          </a:bodyPr>
+          <a:lstStyle/>
+          <a:p>
+            <a:pPr algn="l">
+              <a:lnSpc>
+                <a:spcPct val="102000"/>
+              </a:lnSpc>
+            </a:pPr>
+            <a:r>
+              <a:rPr sz="850" b="1" i="1">
+                <a:solidFill>
+                  <a:srgbClr val="065A82"/>
+                </a:solidFill>
+                <a:latin typeface="Arial"/>
+              </a:rPr>
+              <a:t>[1] </a:t>
+            </a:r>
+            <a:r>
+              <a:rPr sz="850" i="1">
+                <a:solidFill>
+                  <a:srgbClr val="1C7293"/>
+                </a:solidFill>
+                <a:latin typeface="Arial"/>
+                <a:hlinkClick r:id="rId2"/>
+              </a:rPr>
+              <a:t>Mistral AI — Mistral 7B</a:t>
+            </a:r>
+          </a:p>
+        </p:txBody>
+      </p:sp>
+      <p:sp>
+        <p:nvSpPr>
+          <p:cNvPr id="37" name="TextBox 36"/>
+          <p:cNvSpPr txBox="1"/>
+          <p:nvPr/>
+        </p:nvSpPr>
+        <p:spPr>
+          <a:xfrm>
+            <a:off x="11274552" y="6547104"/>
+            <a:ext cx="868680" cy="256032"/>
+          </a:xfrm>
+          <a:prstGeom prst="rect">
+            <a:avLst/>
+          </a:prstGeom>
+          <a:noFill/>
+        </p:spPr>
+        <p:txBody>
+          <a:bodyPr wrap="none" lIns="0" rIns="0" tIns="0" bIns="0">
+            <a:spAutoFit/>
+          </a:bodyPr>
+          <a:lstStyle/>
+          <a:p>
+            <a:pPr algn="r">
+              <a:lnSpc>
+                <a:spcPct val="100000"/>
+              </a:lnSpc>
+            </a:pPr>
+            <a:r>
+              <a:rPr sz="1000" i="1">
+                <a:solidFill>
+                  <a:srgbClr val="5B6678"/>
+                </a:solidFill>
+                <a:latin typeface="Arial"/>
+              </a:rPr>
+              <a:t>28 / 35</a:t>
             </a:r>
           </a:p>
         </p:txBody>
@@ -25201,6 +26583,45 @@
           </a:p>
         </p:txBody>
       </p:sp>
+      <p:sp>
+        <p:nvSpPr>
+          <p:cNvPr id="17" name="TextBox 16"/>
+          <p:cNvSpPr txBox="1"/>
+          <p:nvPr/>
+        </p:nvSpPr>
+        <p:spPr>
+          <a:xfrm>
+            <a:off x="11274552" y="6547104"/>
+            <a:ext cx="868680" cy="256032"/>
+          </a:xfrm>
+          <a:prstGeom prst="rect">
+            <a:avLst/>
+          </a:prstGeom>
+          <a:noFill/>
+        </p:spPr>
+        <p:txBody>
+          <a:bodyPr wrap="none" lIns="0" rIns="0" tIns="0" bIns="0">
+            <a:spAutoFit/>
+          </a:bodyPr>
+          <a:lstStyle/>
+          <a:p>
+            <a:pPr algn="r">
+              <a:lnSpc>
+                <a:spcPct val="100000"/>
+              </a:lnSpc>
+            </a:pPr>
+            <a:r>
+              <a:rPr sz="1000" i="1">
+                <a:solidFill>
+                  <a:srgbClr val="5B6678"/>
+                </a:solidFill>
+                <a:latin typeface="Arial"/>
+              </a:rPr>
+              <a:t>29 / 35</a:t>
+            </a:r>
+          </a:p>
+        </p:txBody>
+      </p:sp>
     </p:spTree>
   </p:cSld>
   <p:clrMapOvr>
@@ -26262,6 +27683,45 @@
           </a:p>
         </p:txBody>
       </p:sp>
+      <p:sp>
+        <p:nvSpPr>
+          <p:cNvPr id="27" name="TextBox 26"/>
+          <p:cNvSpPr txBox="1"/>
+          <p:nvPr/>
+        </p:nvSpPr>
+        <p:spPr>
+          <a:xfrm>
+            <a:off x="11274552" y="6547104"/>
+            <a:ext cx="868680" cy="256032"/>
+          </a:xfrm>
+          <a:prstGeom prst="rect">
+            <a:avLst/>
+          </a:prstGeom>
+          <a:noFill/>
+        </p:spPr>
+        <p:txBody>
+          <a:bodyPr wrap="none" lIns="0" rIns="0" tIns="0" bIns="0">
+            <a:spAutoFit/>
+          </a:bodyPr>
+          <a:lstStyle/>
+          <a:p>
+            <a:pPr algn="r">
+              <a:lnSpc>
+                <a:spcPct val="100000"/>
+              </a:lnSpc>
+            </a:pPr>
+            <a:r>
+              <a:rPr sz="1000" i="1">
+                <a:solidFill>
+                  <a:srgbClr val="5B6678"/>
+                </a:solidFill>
+                <a:latin typeface="Arial"/>
+              </a:rPr>
+              <a:t>3 / 35</a:t>
+            </a:r>
+          </a:p>
+        </p:txBody>
+      </p:sp>
     </p:spTree>
   </p:cSld>
   <p:clrMapOvr>
@@ -27473,6 +28933,45 @@
           </a:p>
         </p:txBody>
       </p:sp>
+      <p:sp>
+        <p:nvSpPr>
+          <p:cNvPr id="32" name="TextBox 31"/>
+          <p:cNvSpPr txBox="1"/>
+          <p:nvPr/>
+        </p:nvSpPr>
+        <p:spPr>
+          <a:xfrm>
+            <a:off x="11274552" y="6547104"/>
+            <a:ext cx="868680" cy="256032"/>
+          </a:xfrm>
+          <a:prstGeom prst="rect">
+            <a:avLst/>
+          </a:prstGeom>
+          <a:noFill/>
+        </p:spPr>
+        <p:txBody>
+          <a:bodyPr wrap="none" lIns="0" rIns="0" tIns="0" bIns="0">
+            <a:spAutoFit/>
+          </a:bodyPr>
+          <a:lstStyle/>
+          <a:p>
+            <a:pPr algn="r">
+              <a:lnSpc>
+                <a:spcPct val="100000"/>
+              </a:lnSpc>
+            </a:pPr>
+            <a:r>
+              <a:rPr sz="1000" i="1">
+                <a:solidFill>
+                  <a:srgbClr val="5B6678"/>
+                </a:solidFill>
+                <a:latin typeface="Arial"/>
+              </a:rPr>
+              <a:t>30 / 35</a:t>
+            </a:r>
+          </a:p>
+        </p:txBody>
+      </p:sp>
     </p:spTree>
   </p:cSld>
   <p:clrMapOvr>
@@ -28235,6 +29734,45 @@
           </a:p>
         </p:txBody>
       </p:sp>
+      <p:sp>
+        <p:nvSpPr>
+          <p:cNvPr id="21" name="TextBox 20"/>
+          <p:cNvSpPr txBox="1"/>
+          <p:nvPr/>
+        </p:nvSpPr>
+        <p:spPr>
+          <a:xfrm>
+            <a:off x="11274552" y="6547104"/>
+            <a:ext cx="868680" cy="256032"/>
+          </a:xfrm>
+          <a:prstGeom prst="rect">
+            <a:avLst/>
+          </a:prstGeom>
+          <a:noFill/>
+        </p:spPr>
+        <p:txBody>
+          <a:bodyPr wrap="none" lIns="0" rIns="0" tIns="0" bIns="0">
+            <a:spAutoFit/>
+          </a:bodyPr>
+          <a:lstStyle/>
+          <a:p>
+            <a:pPr algn="r">
+              <a:lnSpc>
+                <a:spcPct val="100000"/>
+              </a:lnSpc>
+            </a:pPr>
+            <a:r>
+              <a:rPr sz="1000" i="1">
+                <a:solidFill>
+                  <a:srgbClr val="5B6678"/>
+                </a:solidFill>
+                <a:latin typeface="Arial"/>
+              </a:rPr>
+              <a:t>31 / 35</a:t>
+            </a:r>
+          </a:p>
+        </p:txBody>
+      </p:sp>
     </p:spTree>
   </p:cSld>
   <p:clrMapOvr>
@@ -29437,6 +30975,45 @@
           </a:p>
         </p:txBody>
       </p:sp>
+      <p:sp>
+        <p:nvSpPr>
+          <p:cNvPr id="31" name="TextBox 30"/>
+          <p:cNvSpPr txBox="1"/>
+          <p:nvPr/>
+        </p:nvSpPr>
+        <p:spPr>
+          <a:xfrm>
+            <a:off x="11274552" y="6547104"/>
+            <a:ext cx="868680" cy="256032"/>
+          </a:xfrm>
+          <a:prstGeom prst="rect">
+            <a:avLst/>
+          </a:prstGeom>
+          <a:noFill/>
+        </p:spPr>
+        <p:txBody>
+          <a:bodyPr wrap="none" lIns="0" rIns="0" tIns="0" bIns="0">
+            <a:spAutoFit/>
+          </a:bodyPr>
+          <a:lstStyle/>
+          <a:p>
+            <a:pPr algn="r">
+              <a:lnSpc>
+                <a:spcPct val="100000"/>
+              </a:lnSpc>
+            </a:pPr>
+            <a:r>
+              <a:rPr sz="1000" i="1">
+                <a:solidFill>
+                  <a:srgbClr val="5B6678"/>
+                </a:solidFill>
+                <a:latin typeface="Arial"/>
+              </a:rPr>
+              <a:t>32 / 35</a:t>
+            </a:r>
+          </a:p>
+        </p:txBody>
+      </p:sp>
     </p:spTree>
   </p:cSld>
   <p:clrMapOvr>
@@ -29542,11 +31119,11 @@
         <p:spPr>
           <a:xfrm>
             <a:off x="502920" y="1783080"/>
-            <a:ext cx="5486400" cy="5166360"/>
+            <a:ext cx="5486400" cy="4709160"/>
           </a:xfrm>
           <a:prstGeom prst="roundRect">
             <a:avLst>
-              <a:gd name="adj" fmla="val 5899"/>
+              <a:gd name="adj" fmla="val 6472"/>
             </a:avLst>
           </a:prstGeom>
           <a:solidFill>
@@ -29730,8 +31307,8 @@
         </p:nvSpPr>
         <p:spPr>
           <a:xfrm>
-            <a:off x="777240" y="4892040"/>
-            <a:ext cx="4937760" cy="1920240"/>
+            <a:off x="777240" y="4846320"/>
+            <a:ext cx="4937760" cy="1463040"/>
           </a:xfrm>
           <a:prstGeom prst="rect">
             <a:avLst/>
@@ -29746,11 +31323,11 @@
           <a:p>
             <a:pPr algn="l">
               <a:lnSpc>
-                <a:spcPct val="132000"/>
-              </a:lnSpc>
-            </a:pPr>
-            <a:r>
-              <a:rPr sz="1700" b="0" i="1">
+                <a:spcPct val="128000"/>
+              </a:lnSpc>
+            </a:pPr>
+            <a:r>
+              <a:rPr sz="1600" b="0" i="1">
                 <a:solidFill>
                   <a:srgbClr val="21295C"/>
                 </a:solidFill>
@@ -29770,11 +31347,11 @@
         <p:spPr>
           <a:xfrm>
             <a:off x="6263640" y="1783080"/>
-            <a:ext cx="5486400" cy="5166360"/>
+            <a:ext cx="5486400" cy="4709160"/>
           </a:xfrm>
           <a:prstGeom prst="roundRect">
             <a:avLst>
-              <a:gd name="adj" fmla="val 5899"/>
+              <a:gd name="adj" fmla="val 6472"/>
             </a:avLst>
           </a:prstGeom>
           <a:solidFill>
@@ -29947,6 +31524,17 @@
               </a:rPr>
               <a:t>Статистическая корреляция, не причинность.</a:t>
             </a:r>
+            <a:r>
+              <a:rPr sz="936" baseline="30000" b="0" i="1">
+                <a:latin typeface="Arial"/>
+                <a:cs typeface="Arial"/>
+                <a:ea typeface="Arial"/>
+                <a:solidFill>
+                  <a:srgbClr val="1C7293"/>
+                </a:solidFill>
+              </a:rPr>
+              <a:t>[1]</a:t>
+            </a:r>
           </a:p>
         </p:txBody>
       </p:sp>
@@ -29958,8 +31546,8 @@
         </p:nvSpPr>
         <p:spPr>
           <a:xfrm>
-            <a:off x="6537959" y="4892040"/>
-            <a:ext cx="4937760" cy="1920240"/>
+            <a:off x="6537959" y="4846320"/>
+            <a:ext cx="4937760" cy="1463040"/>
           </a:xfrm>
           <a:prstGeom prst="rect">
             <a:avLst/>
@@ -29974,17 +31562,105 @@
           <a:p>
             <a:pPr algn="l">
               <a:lnSpc>
-                <a:spcPct val="132000"/>
-              </a:lnSpc>
-            </a:pPr>
-            <a:r>
-              <a:rPr sz="1700" b="0" i="1">
+                <a:spcPct val="128000"/>
+              </a:lnSpc>
+            </a:pPr>
+            <a:r>
+              <a:rPr sz="1600" b="0" i="1">
                 <a:solidFill>
                   <a:srgbClr val="21295C"/>
                 </a:solidFill>
                 <a:latin typeface="Arial"/>
               </a:rPr>
               <a:t>Замечает паттерн «X и Y часто соседствуют» в обучающих данных. Для причинных выводов — привлекайте эксперта предметной области или причинные методы.</a:t>
+            </a:r>
+          </a:p>
+        </p:txBody>
+      </p:sp>
+      <p:sp>
+        <p:nvSpPr>
+          <p:cNvPr id="16" name="TextBox 15"/>
+          <p:cNvSpPr txBox="1"/>
+          <p:nvPr/>
+        </p:nvSpPr>
+        <p:spPr>
+          <a:xfrm>
+            <a:off x="502920" y="6510528"/>
+            <a:ext cx="11247120" cy="310896"/>
+          </a:xfrm>
+          <a:prstGeom prst="rect">
+            <a:avLst/>
+          </a:prstGeom>
+          <a:noFill/>
+        </p:spPr>
+        <p:txBody>
+          <a:bodyPr wrap="square" lIns="0" rIns="0" tIns="0" bIns="0" anchor="t">
+            <a:spAutoFit/>
+          </a:bodyPr>
+          <a:lstStyle/>
+          <a:p>
+            <a:pPr algn="l">
+              <a:lnSpc>
+                <a:spcPct val="102000"/>
+              </a:lnSpc>
+            </a:pPr>
+            <a:r>
+              <a:rPr sz="850" b="1" i="1">
+                <a:solidFill>
+                  <a:srgbClr val="065A82"/>
+                </a:solidFill>
+                <a:latin typeface="Arial"/>
+              </a:rPr>
+              <a:t>[1] </a:t>
+            </a:r>
+            <a:r>
+              <a:rPr sz="850" i="1">
+                <a:solidFill>
+                  <a:srgbClr val="1C7293"/>
+                </a:solidFill>
+                <a:latin typeface="Arial"/>
+                <a:hlinkClick r:id="rId4"/>
+              </a:rPr>
+              <a:t>Pearl (2018) — The Book of Why</a:t>
+            </a:r>
+          </a:p>
+        </p:txBody>
+      </p:sp>
+      <p:sp>
+        <p:nvSpPr>
+          <p:cNvPr id="17" name="TextBox 16"/>
+          <p:cNvSpPr txBox="1"/>
+          <p:nvPr/>
+        </p:nvSpPr>
+        <p:spPr>
+          <a:xfrm>
+            <a:off x="11274552" y="6547104"/>
+            <a:ext cx="868680" cy="256032"/>
+          </a:xfrm>
+          <a:prstGeom prst="rect">
+            <a:avLst/>
+          </a:prstGeom>
+          <a:noFill/>
+        </p:spPr>
+        <p:txBody>
+          <a:bodyPr wrap="none" lIns="0" rIns="0" tIns="0" bIns="0">
+            <a:spAutoFit/>
+          </a:bodyPr>
+          <a:lstStyle/>
+          <a:p>
+            <a:pPr algn="r">
+              <a:lnSpc>
+                <a:spcPct val="100000"/>
+              </a:lnSpc>
+            </a:pPr>
+            <a:r>
+              <a:rPr sz="1000" i="1">
+                <a:solidFill>
+                  <a:srgbClr val="5B6678"/>
+                </a:solidFill>
+                <a:latin typeface="Arial"/>
+              </a:rPr>
+              <a:t>33 / 35</a:t>
             </a:r>
           </a:p>
         </p:txBody>
@@ -30094,11 +31770,11 @@
         <p:spPr>
           <a:xfrm>
             <a:off x="502920" y="1783080"/>
-            <a:ext cx="5486400" cy="2450592"/>
+            <a:ext cx="5486400" cy="2267712"/>
           </a:xfrm>
           <a:prstGeom prst="roundRect">
             <a:avLst>
-              <a:gd name="adj" fmla="val 12437"/>
+              <a:gd name="adj" fmla="val 13440"/>
             </a:avLst>
           </a:prstGeom>
           <a:solidFill>
@@ -30193,6 +31869,17 @@
               </a:rPr>
               <a:t>RAG</a:t>
             </a:r>
+            <a:r>
+              <a:rPr sz="1092" baseline="30000" b="0" i="1">
+                <a:latin typeface="Arial"/>
+                <a:cs typeface="Arial"/>
+                <a:ea typeface="Arial"/>
+                <a:solidFill>
+                  <a:srgbClr val="1C7293"/>
+                </a:solidFill>
+              </a:rPr>
+              <a:t>[1]</a:t>
+            </a:r>
           </a:p>
         </p:txBody>
       </p:sp>
@@ -30244,7 +31931,7 @@
         <p:spPr>
           <a:xfrm>
             <a:off x="777240" y="3227832"/>
-            <a:ext cx="4983480" cy="932688"/>
+            <a:ext cx="4983480" cy="777240"/>
           </a:xfrm>
           <a:prstGeom prst="rect">
             <a:avLst/>
@@ -30259,7 +31946,7 @@
           <a:p>
             <a:pPr algn="l">
               <a:lnSpc>
-                <a:spcPct val="128000"/>
+                <a:spcPct val="124000"/>
               </a:lnSpc>
             </a:pPr>
             <a:r>
@@ -30282,12 +31969,12 @@
         </p:nvSpPr>
         <p:spPr>
           <a:xfrm>
-            <a:off x="6135624" y="1783080"/>
-            <a:ext cx="5486400" cy="2450592"/>
+            <a:off x="6117336" y="1783080"/>
+            <a:ext cx="5486400" cy="2267712"/>
           </a:xfrm>
           <a:prstGeom prst="roundRect">
             <a:avLst>
-              <a:gd name="adj" fmla="val 12437"/>
+              <a:gd name="adj" fmla="val 13440"/>
             </a:avLst>
           </a:prstGeom>
           <a:solidFill>
@@ -30338,7 +32025,7 @@
         </p:blipFill>
         <p:spPr>
           <a:xfrm>
-            <a:off x="6364224" y="2103120"/>
+            <a:off x="6345936" y="2103120"/>
             <a:ext cx="1005840" cy="1005840"/>
           </a:xfrm>
           <a:prstGeom prst="rect">
@@ -30354,7 +32041,7 @@
         </p:nvSpPr>
         <p:spPr>
           <a:xfrm>
-            <a:off x="7507224" y="2039112"/>
+            <a:off x="7488936" y="2039112"/>
             <a:ext cx="3977639" cy="548640"/>
           </a:xfrm>
           <a:prstGeom prst="rect">
@@ -30393,7 +32080,7 @@
         </p:nvSpPr>
         <p:spPr>
           <a:xfrm>
-            <a:off x="7507224" y="2651760"/>
+            <a:off x="7488936" y="2651760"/>
             <a:ext cx="3977639" cy="347472"/>
           </a:xfrm>
           <a:prstGeom prst="rect">
@@ -30432,8 +32119,8 @@
         </p:nvSpPr>
         <p:spPr>
           <a:xfrm>
-            <a:off x="6409944" y="3227832"/>
-            <a:ext cx="4983480" cy="932688"/>
+            <a:off x="6391655" y="3227832"/>
+            <a:ext cx="4983480" cy="777240"/>
           </a:xfrm>
           <a:prstGeom prst="rect">
             <a:avLst/>
@@ -30448,7 +32135,7 @@
           <a:p>
             <a:pPr algn="l">
               <a:lnSpc>
-                <a:spcPct val="128000"/>
+                <a:spcPct val="124000"/>
               </a:lnSpc>
             </a:pPr>
             <a:r>
@@ -30471,12 +32158,12 @@
         </p:nvSpPr>
         <p:spPr>
           <a:xfrm>
-            <a:off x="502920" y="4379976"/>
-            <a:ext cx="5486400" cy="2450592"/>
+            <a:off x="502920" y="4178808"/>
+            <a:ext cx="5486400" cy="2267712"/>
           </a:xfrm>
           <a:prstGeom prst="roundRect">
             <a:avLst>
-              <a:gd name="adj" fmla="val 12437"/>
+              <a:gd name="adj" fmla="val 13440"/>
             </a:avLst>
           </a:prstGeom>
           <a:solidFill>
@@ -30527,7 +32214,7 @@
         </p:blipFill>
         <p:spPr>
           <a:xfrm>
-            <a:off x="731520" y="4700016"/>
+            <a:off x="731520" y="4498848"/>
             <a:ext cx="1005840" cy="1005840"/>
           </a:xfrm>
           <a:prstGeom prst="rect">
@@ -30543,7 +32230,7 @@
         </p:nvSpPr>
         <p:spPr>
           <a:xfrm>
-            <a:off x="1874519" y="4636008"/>
+            <a:off x="1874519" y="4434840"/>
             <a:ext cx="3977639" cy="548640"/>
           </a:xfrm>
           <a:prstGeom prst="rect">
@@ -30571,6 +32258,17 @@
               </a:rPr>
               <a:t>MCP</a:t>
             </a:r>
+            <a:r>
+              <a:rPr sz="1092" baseline="30000" b="0" i="1">
+                <a:latin typeface="Arial"/>
+                <a:cs typeface="Arial"/>
+                <a:ea typeface="Arial"/>
+                <a:solidFill>
+                  <a:srgbClr val="1C7293"/>
+                </a:solidFill>
+              </a:rPr>
+              <a:t>[2]</a:t>
+            </a:r>
           </a:p>
         </p:txBody>
       </p:sp>
@@ -30582,7 +32280,7 @@
         </p:nvSpPr>
         <p:spPr>
           <a:xfrm>
-            <a:off x="1874519" y="5248656"/>
+            <a:off x="1874519" y="5047488"/>
             <a:ext cx="3977639" cy="347472"/>
           </a:xfrm>
           <a:prstGeom prst="rect">
@@ -30621,8 +32319,8 @@
         </p:nvSpPr>
         <p:spPr>
           <a:xfrm>
-            <a:off x="777240" y="5824728"/>
-            <a:ext cx="4983480" cy="932688"/>
+            <a:off x="777240" y="5623560"/>
+            <a:ext cx="4983480" cy="777240"/>
           </a:xfrm>
           <a:prstGeom prst="rect">
             <a:avLst/>
@@ -30637,7 +32335,7 @@
           <a:p>
             <a:pPr algn="l">
               <a:lnSpc>
-                <a:spcPct val="128000"/>
+                <a:spcPct val="124000"/>
               </a:lnSpc>
             </a:pPr>
             <a:r>
@@ -30660,12 +32358,12 @@
         </p:nvSpPr>
         <p:spPr>
           <a:xfrm>
-            <a:off x="6135624" y="4379976"/>
-            <a:ext cx="5486400" cy="2450592"/>
+            <a:off x="6117336" y="4178808"/>
+            <a:ext cx="5486400" cy="2267712"/>
           </a:xfrm>
           <a:prstGeom prst="roundRect">
             <a:avLst>
-              <a:gd name="adj" fmla="val 12437"/>
+              <a:gd name="adj" fmla="val 13440"/>
             </a:avLst>
           </a:prstGeom>
           <a:solidFill>
@@ -30716,7 +32414,7 @@
         </p:blipFill>
         <p:spPr>
           <a:xfrm>
-            <a:off x="6364224" y="4700016"/>
+            <a:off x="6345936" y="4498848"/>
             <a:ext cx="1005840" cy="1005840"/>
           </a:xfrm>
           <a:prstGeom prst="rect">
@@ -30732,7 +32430,7 @@
         </p:nvSpPr>
         <p:spPr>
           <a:xfrm>
-            <a:off x="7507224" y="4636008"/>
+            <a:off x="7488936" y="4434840"/>
             <a:ext cx="3977639" cy="548640"/>
           </a:xfrm>
           <a:prstGeom prst="rect">
@@ -30760,6 +32458,17 @@
               </a:rPr>
               <a:t>Цикл агента</a:t>
             </a:r>
+            <a:r>
+              <a:rPr sz="1092" baseline="30000" b="0" i="1">
+                <a:latin typeface="Arial"/>
+                <a:cs typeface="Arial"/>
+                <a:ea typeface="Arial"/>
+                <a:solidFill>
+                  <a:srgbClr val="1C7293"/>
+                </a:solidFill>
+              </a:rPr>
+              <a:t>[3]</a:t>
+            </a:r>
           </a:p>
         </p:txBody>
       </p:sp>
@@ -30771,7 +32480,7 @@
         </p:nvSpPr>
         <p:spPr>
           <a:xfrm>
-            <a:off x="7507224" y="5248656"/>
+            <a:off x="7488936" y="5047488"/>
             <a:ext cx="3977639" cy="347472"/>
           </a:xfrm>
           <a:prstGeom prst="rect">
@@ -30810,8 +32519,8 @@
         </p:nvSpPr>
         <p:spPr>
           <a:xfrm>
-            <a:off x="6409944" y="5824728"/>
-            <a:ext cx="4983480" cy="932688"/>
+            <a:off x="6391655" y="5623560"/>
+            <a:ext cx="4983480" cy="777240"/>
           </a:xfrm>
           <a:prstGeom prst="rect">
             <a:avLst/>
@@ -30826,7 +32535,7 @@
           <a:p>
             <a:pPr algn="l">
               <a:lnSpc>
-                <a:spcPct val="128000"/>
+                <a:spcPct val="124000"/>
               </a:lnSpc>
             </a:pPr>
             <a:r>
@@ -30837,6 +32546,150 @@
                 <a:latin typeface="Arial"/>
               </a:rPr>
               <a:t>Модель решает действие, видит результат, корректирует план</a:t>
+            </a:r>
+          </a:p>
+        </p:txBody>
+      </p:sp>
+      <p:sp>
+        <p:nvSpPr>
+          <p:cNvPr id="24" name="TextBox 23"/>
+          <p:cNvSpPr txBox="1"/>
+          <p:nvPr/>
+        </p:nvSpPr>
+        <p:spPr>
+          <a:xfrm>
+            <a:off x="502920" y="6510528"/>
+            <a:ext cx="11247120" cy="310896"/>
+          </a:xfrm>
+          <a:prstGeom prst="rect">
+            <a:avLst/>
+          </a:prstGeom>
+          <a:noFill/>
+        </p:spPr>
+        <p:txBody>
+          <a:bodyPr wrap="square" lIns="0" rIns="0" tIns="0" bIns="0" anchor="t">
+            <a:spAutoFit/>
+          </a:bodyPr>
+          <a:lstStyle/>
+          <a:p>
+            <a:pPr algn="l">
+              <a:lnSpc>
+                <a:spcPct val="102000"/>
+              </a:lnSpc>
+            </a:pPr>
+            <a:r>
+              <a:rPr sz="800" b="1" i="1">
+                <a:solidFill>
+                  <a:srgbClr val="065A82"/>
+                </a:solidFill>
+                <a:latin typeface="Arial"/>
+              </a:rPr>
+              <a:t>[1] </a:t>
+            </a:r>
+            <a:r>
+              <a:rPr sz="800" i="1">
+                <a:solidFill>
+                  <a:srgbClr val="1C7293"/>
+                </a:solidFill>
+                <a:latin typeface="Arial"/>
+                <a:hlinkClick r:id="rId6"/>
+              </a:rPr>
+              <a:t>Lewis et al. (2020) — RAG</a:t>
+            </a:r>
+            <a:r>
+              <a:rPr sz="800" i="1">
+                <a:solidFill>
+                  <a:srgbClr val="1C7293"/>
+                </a:solidFill>
+                <a:latin typeface="Arial"/>
+              </a:rPr>
+              <a:t>   ·   </a:t>
+            </a:r>
+            <a:r>
+              <a:rPr sz="800" b="1" i="1">
+                <a:solidFill>
+                  <a:srgbClr val="065A82"/>
+                </a:solidFill>
+                <a:latin typeface="Arial"/>
+              </a:rPr>
+              <a:t>[2] </a:t>
+            </a:r>
+            <a:r>
+              <a:rPr sz="800" i="1">
+                <a:solidFill>
+                  <a:srgbClr val="1C7293"/>
+                </a:solidFill>
+                <a:latin typeface="Arial"/>
+                <a:hlinkClick r:id="rId7"/>
+              </a:rPr>
+              <a:t>Anthropic — Model Context Protocol (25 ноя 2024)</a:t>
+            </a:r>
+            <a:r>
+              <a:rPr sz="800" i="1">
+                <a:solidFill>
+                  <a:srgbClr val="1C7293"/>
+                </a:solidFill>
+                <a:latin typeface="Arial"/>
+              </a:rPr>
+              <a:t>   ·   </a:t>
+            </a:r>
+            <a:r>
+              <a:rPr sz="800" b="1" i="1">
+                <a:solidFill>
+                  <a:srgbClr val="065A82"/>
+                </a:solidFill>
+                <a:latin typeface="Arial"/>
+              </a:rPr>
+              <a:t>[3] </a:t>
+            </a:r>
+            <a:r>
+              <a:rPr sz="800" i="1">
+                <a:solidFill>
+                  <a:srgbClr val="1C7293"/>
+                </a:solidFill>
+                <a:latin typeface="Arial"/>
+                <a:hlinkClick r:id="rId8"/>
+              </a:rPr>
+              <a:t>Yao et al. (2022) — ReAct</a:t>
+            </a:r>
+          </a:p>
+        </p:txBody>
+      </p:sp>
+      <p:sp>
+        <p:nvSpPr>
+          <p:cNvPr id="25" name="TextBox 24"/>
+          <p:cNvSpPr txBox="1"/>
+          <p:nvPr/>
+        </p:nvSpPr>
+        <p:spPr>
+          <a:xfrm>
+            <a:off x="11274552" y="6547104"/>
+            <a:ext cx="868680" cy="256032"/>
+          </a:xfrm>
+          <a:prstGeom prst="rect">
+            <a:avLst/>
+          </a:prstGeom>
+          <a:noFill/>
+        </p:spPr>
+        <p:txBody>
+          <a:bodyPr wrap="none" lIns="0" rIns="0" tIns="0" bIns="0">
+            <a:spAutoFit/>
+          </a:bodyPr>
+          <a:lstStyle/>
+          <a:p>
+            <a:pPr algn="r">
+              <a:lnSpc>
+                <a:spcPct val="100000"/>
+              </a:lnSpc>
+            </a:pPr>
+            <a:r>
+              <a:rPr sz="1000" i="1">
+                <a:solidFill>
+                  <a:srgbClr val="5B6678"/>
+                </a:solidFill>
+                <a:latin typeface="Arial"/>
+              </a:rPr>
+              <a:t>34 / 35</a:t>
             </a:r>
           </a:p>
         </p:txBody>
@@ -30984,6 +32837,45 @@
           </a:p>
         </p:txBody>
       </p:sp>
+      <p:sp>
+        <p:nvSpPr>
+          <p:cNvPr id="5" name="TextBox 4"/>
+          <p:cNvSpPr txBox="1"/>
+          <p:nvPr/>
+        </p:nvSpPr>
+        <p:spPr>
+          <a:xfrm>
+            <a:off x="11274552" y="6547104"/>
+            <a:ext cx="868680" cy="256032"/>
+          </a:xfrm>
+          <a:prstGeom prst="rect">
+            <a:avLst/>
+          </a:prstGeom>
+          <a:noFill/>
+        </p:spPr>
+        <p:txBody>
+          <a:bodyPr wrap="none" lIns="0" rIns="0" tIns="0" bIns="0">
+            <a:spAutoFit/>
+          </a:bodyPr>
+          <a:lstStyle/>
+          <a:p>
+            <a:pPr algn="r">
+              <a:lnSpc>
+                <a:spcPct val="100000"/>
+              </a:lnSpc>
+            </a:pPr>
+            <a:r>
+              <a:rPr sz="1000" i="1">
+                <a:solidFill>
+                  <a:srgbClr val="5B6678"/>
+                </a:solidFill>
+                <a:latin typeface="Arial"/>
+              </a:rPr>
+              <a:t>35 / 35</a:t>
+            </a:r>
+          </a:p>
+        </p:txBody>
+      </p:sp>
     </p:spTree>
   </p:cSld>
   <p:clrMapOvr>
@@ -31681,6 +33573,45 @@
           </a:p>
         </p:txBody>
       </p:sp>
+      <p:sp>
+        <p:nvSpPr>
+          <p:cNvPr id="18" name="TextBox 17"/>
+          <p:cNvSpPr txBox="1"/>
+          <p:nvPr/>
+        </p:nvSpPr>
+        <p:spPr>
+          <a:xfrm>
+            <a:off x="11274552" y="6547104"/>
+            <a:ext cx="868680" cy="256032"/>
+          </a:xfrm>
+          <a:prstGeom prst="rect">
+            <a:avLst/>
+          </a:prstGeom>
+          <a:noFill/>
+        </p:spPr>
+        <p:txBody>
+          <a:bodyPr wrap="none" lIns="0" rIns="0" tIns="0" bIns="0">
+            <a:spAutoFit/>
+          </a:bodyPr>
+          <a:lstStyle/>
+          <a:p>
+            <a:pPr algn="r">
+              <a:lnSpc>
+                <a:spcPct val="100000"/>
+              </a:lnSpc>
+            </a:pPr>
+            <a:r>
+              <a:rPr sz="1000" i="1">
+                <a:solidFill>
+                  <a:srgbClr val="5B6678"/>
+                </a:solidFill>
+                <a:latin typeface="Arial"/>
+              </a:rPr>
+              <a:t>4 / 35</a:t>
+            </a:r>
+          </a:p>
+        </p:txBody>
+      </p:sp>
     </p:spTree>
   </p:cSld>
   <p:clrMapOvr>
@@ -32545,6 +34476,45 @@
                 <a:latin typeface="Arial"/>
               </a:rPr>
               <a:t>→ Раздел 4 — сэмплинг</a:t>
+            </a:r>
+          </a:p>
+        </p:txBody>
+      </p:sp>
+      <p:sp>
+        <p:nvSpPr>
+          <p:cNvPr id="22" name="TextBox 21"/>
+          <p:cNvSpPr txBox="1"/>
+          <p:nvPr/>
+        </p:nvSpPr>
+        <p:spPr>
+          <a:xfrm>
+            <a:off x="11274552" y="6547104"/>
+            <a:ext cx="868680" cy="256032"/>
+          </a:xfrm>
+          <a:prstGeom prst="rect">
+            <a:avLst/>
+          </a:prstGeom>
+          <a:noFill/>
+        </p:spPr>
+        <p:txBody>
+          <a:bodyPr wrap="none" lIns="0" rIns="0" tIns="0" bIns="0">
+            <a:spAutoFit/>
+          </a:bodyPr>
+          <a:lstStyle/>
+          <a:p>
+            <a:pPr algn="r">
+              <a:lnSpc>
+                <a:spcPct val="100000"/>
+              </a:lnSpc>
+            </a:pPr>
+            <a:r>
+              <a:rPr sz="1000" i="1">
+                <a:solidFill>
+                  <a:srgbClr val="5B6678"/>
+                </a:solidFill>
+                <a:latin typeface="Arial"/>
+              </a:rPr>
+              <a:t>5 / 35</a:t>
             </a:r>
           </a:p>
         </p:txBody>
@@ -33202,6 +35172,45 @@
           </a:p>
         </p:txBody>
       </p:sp>
+      <p:sp>
+        <p:nvSpPr>
+          <p:cNvPr id="17" name="TextBox 16"/>
+          <p:cNvSpPr txBox="1"/>
+          <p:nvPr/>
+        </p:nvSpPr>
+        <p:spPr>
+          <a:xfrm>
+            <a:off x="11274552" y="6547104"/>
+            <a:ext cx="868680" cy="256032"/>
+          </a:xfrm>
+          <a:prstGeom prst="rect">
+            <a:avLst/>
+          </a:prstGeom>
+          <a:noFill/>
+        </p:spPr>
+        <p:txBody>
+          <a:bodyPr wrap="none" lIns="0" rIns="0" tIns="0" bIns="0">
+            <a:spAutoFit/>
+          </a:bodyPr>
+          <a:lstStyle/>
+          <a:p>
+            <a:pPr algn="r">
+              <a:lnSpc>
+                <a:spcPct val="100000"/>
+              </a:lnSpc>
+            </a:pPr>
+            <a:r>
+              <a:rPr sz="1000" i="1">
+                <a:solidFill>
+                  <a:srgbClr val="5B6678"/>
+                </a:solidFill>
+                <a:latin typeface="Arial"/>
+              </a:rPr>
+              <a:t>6 / 35</a:t>
+            </a:r>
+          </a:p>
+        </p:txBody>
+      </p:sp>
     </p:spTree>
   </p:cSld>
   <p:clrMapOvr>
@@ -33457,6 +35466,45 @@
           </a:p>
         </p:txBody>
       </p:sp>
+      <p:sp>
+        <p:nvSpPr>
+          <p:cNvPr id="8" name="TextBox 7"/>
+          <p:cNvSpPr txBox="1"/>
+          <p:nvPr/>
+        </p:nvSpPr>
+        <p:spPr>
+          <a:xfrm>
+            <a:off x="11274552" y="6547104"/>
+            <a:ext cx="868680" cy="256032"/>
+          </a:xfrm>
+          <a:prstGeom prst="rect">
+            <a:avLst/>
+          </a:prstGeom>
+          <a:noFill/>
+        </p:spPr>
+        <p:txBody>
+          <a:bodyPr wrap="none" lIns="0" rIns="0" tIns="0" bIns="0">
+            <a:spAutoFit/>
+          </a:bodyPr>
+          <a:lstStyle/>
+          <a:p>
+            <a:pPr algn="r">
+              <a:lnSpc>
+                <a:spcPct val="100000"/>
+              </a:lnSpc>
+            </a:pPr>
+            <a:r>
+              <a:rPr sz="1000" i="1">
+                <a:solidFill>
+                  <a:srgbClr val="5B6678"/>
+                </a:solidFill>
+                <a:latin typeface="Arial"/>
+              </a:rPr>
+              <a:t>7 / 35</a:t>
+            </a:r>
+          </a:p>
+        </p:txBody>
+      </p:sp>
     </p:spTree>
   </p:cSld>
   <p:clrMapOvr>
@@ -34621,6 +36669,45 @@
           </a:p>
         </p:txBody>
       </p:sp>
+      <p:sp>
+        <p:nvSpPr>
+          <p:cNvPr id="28" name="TextBox 27"/>
+          <p:cNvSpPr txBox="1"/>
+          <p:nvPr/>
+        </p:nvSpPr>
+        <p:spPr>
+          <a:xfrm>
+            <a:off x="11274552" y="6547104"/>
+            <a:ext cx="868680" cy="256032"/>
+          </a:xfrm>
+          <a:prstGeom prst="rect">
+            <a:avLst/>
+          </a:prstGeom>
+          <a:noFill/>
+        </p:spPr>
+        <p:txBody>
+          <a:bodyPr wrap="none" lIns="0" rIns="0" tIns="0" bIns="0">
+            <a:spAutoFit/>
+          </a:bodyPr>
+          <a:lstStyle/>
+          <a:p>
+            <a:pPr algn="r">
+              <a:lnSpc>
+                <a:spcPct val="100000"/>
+              </a:lnSpc>
+            </a:pPr>
+            <a:r>
+              <a:rPr sz="1000" i="1">
+                <a:solidFill>
+                  <a:srgbClr val="5B6678"/>
+                </a:solidFill>
+                <a:latin typeface="Arial"/>
+              </a:rPr>
+              <a:t>8 / 35</a:t>
+            </a:r>
+          </a:p>
+        </p:txBody>
+      </p:sp>
     </p:spTree>
   </p:cSld>
   <p:clrMapOvr>
@@ -34714,6 +36801,17 @@
               </a:rPr>
               <a:t>Словарь не из всех слов (как лемматизация) и не из всех букв (как character-level) — а из частых подпоследовательностей.</a:t>
             </a:r>
+            <a:r>
+              <a:rPr sz="780" baseline="30000" b="0" i="1">
+                <a:latin typeface="Arial"/>
+                <a:cs typeface="Arial"/>
+                <a:ea typeface="Arial"/>
+                <a:solidFill>
+                  <a:srgbClr val="1C7293"/>
+                </a:solidFill>
+              </a:rPr>
+              <a:t>[1]</a:t>
+            </a:r>
           </a:p>
         </p:txBody>
       </p:sp>
@@ -35834,8 +37932,8 @@
         </p:nvSpPr>
         <p:spPr>
           <a:xfrm>
-            <a:off x="502920" y="6492240"/>
-            <a:ext cx="11247120" cy="274320"/>
+            <a:off x="502920" y="6510528"/>
+            <a:ext cx="11247120" cy="310896"/>
           </a:xfrm>
           <a:prstGeom prst="rect">
             <a:avLst/>
@@ -35850,17 +37948,66 @@
           <a:p>
             <a:pPr algn="l">
               <a:lnSpc>
-                <a:spcPct val="115000"/>
-              </a:lnSpc>
-            </a:pPr>
-            <a:r>
-              <a:rPr sz="1200" b="0" i="1">
+                <a:spcPct val="102000"/>
+              </a:lnSpc>
+            </a:pPr>
+            <a:r>
+              <a:rPr sz="850" b="1" i="1">
+                <a:solidFill>
+                  <a:srgbClr val="065A82"/>
+                </a:solidFill>
+                <a:latin typeface="Arial"/>
+              </a:rPr>
+              <a:t>[1] </a:t>
+            </a:r>
+            <a:r>
+              <a:rPr sz="850" i="1">
                 <a:solidFill>
                   <a:srgbClr val="1C7293"/>
                 </a:solidFill>
                 <a:latin typeface="Arial"/>
-              </a:rPr>
-              <a:t>Sennrich et al. (2016). Альтернативы: WordPiece (BERT), SentencePiece (Llama 2, T5).</a:t>
+                <a:hlinkClick r:id="rId2"/>
+              </a:rPr>
+              <a:t>Sennrich et al. (2016) — NMT of Rare Words / BPE</a:t>
+            </a:r>
+          </a:p>
+        </p:txBody>
+      </p:sp>
+      <p:sp>
+        <p:nvSpPr>
+          <p:cNvPr id="31" name="TextBox 30"/>
+          <p:cNvSpPr txBox="1"/>
+          <p:nvPr/>
+        </p:nvSpPr>
+        <p:spPr>
+          <a:xfrm>
+            <a:off x="11274552" y="6547104"/>
+            <a:ext cx="868680" cy="256032"/>
+          </a:xfrm>
+          <a:prstGeom prst="rect">
+            <a:avLst/>
+          </a:prstGeom>
+          <a:noFill/>
+        </p:spPr>
+        <p:txBody>
+          <a:bodyPr wrap="none" lIns="0" rIns="0" tIns="0" bIns="0">
+            <a:spAutoFit/>
+          </a:bodyPr>
+          <a:lstStyle/>
+          <a:p>
+            <a:pPr algn="r">
+              <a:lnSpc>
+                <a:spcPct val="100000"/>
+              </a:lnSpc>
+            </a:pPr>
+            <a:r>
+              <a:rPr sz="1000" i="1">
+                <a:solidFill>
+                  <a:srgbClr val="5B6678"/>
+                </a:solidFill>
+                <a:latin typeface="Arial"/>
+              </a:rPr>
+              <a:t>9 / 35</a:t>
             </a:r>
           </a:p>
         </p:txBody>

--- a/library/lectures/lec-02/rendered/lec-02.pptx
+++ b/library/lectures/lec-02/rendered/lec-02.pptx
@@ -1442,7 +1442,7 @@
           </a:p>
           <a:p>
             <a:r>
-              <a:t>Каркас лекции — конвейер inference: путь одного запроса от текста до ответа. Текст режется на токены, токены превращаются в векторы, механизм внимания решает, какие части контекста важны, из распределения вероятностей выбирается очередной токен — и цикл повторяется. Четыре стадии — четыре раздела; пятый раздел собирает конвейер целиком и добавляет карту местности: какие модели есть на сентябрь 2026 года и почему выбирать их по бенчмаркам — плохая идея.</a:t>
+              <a:t>Каркас лекции — конвейер инференса: путь одного запроса от текста до ответа. Текст режется на токены, токены превращаются в векторы, механизм внимания решает, какие части контекста важны, из распределения вероятностей выбирается очередной токен — и цикл повторяется. Четыре стадии — четыре раздела; пятый раздел собирает конвейер целиком и добавляет карту местности: какие модели есть на сентябрь 2026 года и почему выбирать их по бенчмаркам — плохая идея.</a:t>
             </a:r>
           </a:p>
           <a:p>
@@ -1527,7 +1527,7 @@
           </a:p>
           <a:p>
             <a:r>
-              <a:t>Практическая сторона: на одних и тех же векторах стоят три стандартных применения — поиск похожих, кластеризация без разметки и семантический поиск с RAG. Одна embedding-модель и один индекс обслуживают сразу несколько функций продукта, поэтому выбор embedding-модели — инфраструктурное решение, а смена — дорогая: означает переиндексацию всего хранилища. В боевых системах семантический поиск почти никогда не живёт один: рабочий стандарт — гибрид из полнотекстового индекса для точных совпадений, векторного для понятийной близости и реранкера сверху — прямое следствие границы похожести, которую мы только что разобрали. И помните: обратной операции у эмбеддинга нет — из вектора текст не восстанавливается, это одностороннее сжатие смысла. Как выбирать embedding-модель под язык и бюджет размерности — оставляю вам для самостоятельного чтения.</a:t>
+              <a:t>Практическая сторона: на одних и тех же векторах стоят три стандартных применения — поиск похожих, кластеризация без разметки и семантический поиск с RAG. Одна embedding-модель и один индекс обслуживают сразу несколько функций продукта, поэтому выбор embedding-модели — инфраструктурное решение, а смена — дорогая: означает переиндексацию всего хранилища. В боевых системах семантический поиск почти никогда не живёт один: рабочий стандарт — гибрид из полнотекстового индекса для точных совпадений, векторного для понятийной близости и реранкера сверху — прямое следствие границы похожести, которую мы только что разобрали. И помните: обратной операции у эмбеддинга нет — из вектора текст не восстанавливается, это одностороннее сжатие смысла. Как выбирать embedding-модель под язык и бюджет размерности — оставляю вам для самостоятельного чтения: в методичке это глава, часть 1 — раздел об embedding-моделях 2026.</a:t>
             </a:r>
           </a:p>
         </p:txBody>
@@ -2097,7 +2097,7 @@
           </a:p>
           <a:p>
             <a:r>
-              <a:t>Почему окно конечно и его нельзя «просто увеличить»? Первая причина знакома: квадратичная стоимость внимания плюс линейно растущий кэш. Вторая тоньше: позиция токена закодирована в геометрии модели способом, обученным на конкретных длинах, и наивное растяжение ломает механизм; методы расширения — RoPE, YaRN — разобраны в методичке для самостоятельного чтения.</a:t>
+              <a:t>Почему окно конечно и его нельзя «просто увеличить»? Первая причина знакома: квадратичная стоимость внимания плюс линейно растущий кэш. Вторая тоньше: позиция токена закодирована в геометрии модели способом, обученным на конкретных длинах, и наивное растяжение ломает механизм; методы расширения — RoPE, YaRN — разобраны в методичке для самостоятельного чтения: глава, часть 2 — раздел о позиционном кодировании.</a:t>
             </a:r>
           </a:p>
           <a:p>
@@ -2337,7 +2337,7 @@
           <a:lstStyle/>
           <a:p>
             <a:r>
-              <a:t>Короткая карта маршрута, прежде чем погружаться. Лекция идёт вдоль конвейера inference: порядок разделов повторяет порядок стадий, через которые проходит каждый ваш запрос.</a:t>
+              <a:t>Короткая карта маршрута, прежде чем погружаться. Лекция идёт вдоль конвейера инференса: порядок разделов повторяет порядок стадий, через которые проходит каждый ваш запрос.</a:t>
             </a:r>
           </a:p>
           <a:p>
@@ -2512,7 +2512,7 @@
           </a:p>
           <a:p>
             <a:r>
-              <a:t>Теперь живой прогон: один и тот же запрос — «придумай название для сервиса заметок» — десять раз при нуле и десять раз при полутора. Первый ряд даёт почти идентичные ответы — слово «почти» здесь несёт больше смысла, чем кажется, и ему посвящён следующий слайд. Второй ряд — разброс от удачных находок до бессвязицы.</a:t>
+              <a:t>Теперь живой прогон: один и тот же запрос — «придумай название для сервиса заметок» — десять раз при нуле и десять раз при полутора. Первый ряд даёт почти идентичные ответы — «Заметкин», «Заметкин», «Заметкин», изредка меняется разве что окончание; слово «почти» здесь несёт больше смысла, чем кажется, и ему посвящён следующий слайд. Второй ряд — разброс от удачных находок до бессвязицы: «МыслеПоток», «конспект-туман на рассвете», «блокнот дыхания чисел» (примеры иллюстративные — свой разнобой вы увидите за минуту).</a:t>
             </a:r>
           </a:p>
           <a:p>
@@ -3087,7 +3087,7 @@
           </a:p>
           <a:p>
             <a:r>
-              <a:t>Финальный раздел собирает картину. Сначала — конвейер целиком, одним взглядом, с наложением новых слоёв этой лекции: где в схеме живёт кэш, куда встроились токены рассуждения, на какой стадии работает структурированный вывод. Затем — карта местности: ландшафт моделей на сентябрь 2026 года — передний край, открытые веса, цены и российский сегмент; это самая скоропортящаяся часть лекции, и тем важнее уметь её читать. Следом — жёсткий разговор о том, почему цифрам бенчмарков нельзя верить на слово: четыре механизма искажения с примерами этого года.</a:t>
+              <a:t>Финальный раздел собирает картину. Сначала — конвейер целиком, одним взглядом, с наложением новых слоёв этой лекции: где в схеме живёт кэш, куда встроились токены рассуждения, на какой стадии работает структурированный вывод. Затем — карта местности: ландшафт моделей на сентябрь 2026 года — передний край, открытые веса, цены и российский сегмент; это самая скоропортящаяся часть лекции, и тем важнее уметь её читать. Следом — жёсткий разговор о том, почему цифрам бенчмарков нельзя верить на слово: три механизма искажения с примерами этого года.</a:t>
             </a:r>
           </a:p>
           <a:p>
@@ -4222,7 +4222,7 @@
           </a:p>
           <a:p>
             <a:r>
-              <a:t>Ключевая инженерная деталь: словарь строится один раз, до обучения модели. На корпусе запускают BPE, фиксируют словарь и правила слияния — и всё; на inference токенизация — это выборка по готовой таблице за миллисекунды. Отсюда два следствия, которые пригодятся ниже: токенизатор режет по частотной статистике своего корпуса, и эта статистика может не совпадать со структурой вашей задачи; а раз словарь и модель обучаются на разных корпусах — в словаре могут остаться записи, которые модель почти не видела.</a:t>
+              <a:t>Ключевая инженерная деталь: словарь строится один раз, до обучения модели. На корпусе запускают BPE, фиксируют словарь и правила слияния — и всё; на инференсе токенизация — это выборка по готовой таблице за миллисекунды. Отсюда два следствия, которые пригодятся ниже: токенизатор режет по частотной статистике своего корпуса, и эта статистика может не совпадать со структурой вашей задачи; а раз словарь и модель обучаются на разных корпусах — в словаре могут остаться записи, которые модель почти не видела.</a:t>
             </a:r>
           </a:p>
           <a:p>
@@ -8654,8 +8654,8 @@
         </p:nvSpPr>
         <p:spPr>
           <a:xfrm>
-            <a:off x="6812280" y="1508760"/>
-            <a:ext cx="4892040" cy="3520440"/>
+            <a:off x="6812280" y="1920240"/>
+            <a:ext cx="4892040" cy="2697480"/>
           </a:xfrm>
           <a:prstGeom prst="roundRect">
             <a:avLst>
@@ -8702,7 +8702,7 @@
         </p:nvSpPr>
         <p:spPr>
           <a:xfrm>
-            <a:off x="7086600" y="1737360"/>
+            <a:off x="7086600" y="2148840"/>
             <a:ext cx="4389120" cy="411480"/>
           </a:xfrm>
           <a:prstGeom prst="rect">
@@ -8741,8 +8741,8 @@
         </p:nvSpPr>
         <p:spPr>
           <a:xfrm>
-            <a:off x="7086600" y="2240280"/>
-            <a:ext cx="4389120" cy="2011680"/>
+            <a:off x="7086600" y="2651760"/>
+            <a:ext cx="4389120" cy="1234440"/>
           </a:xfrm>
           <a:prstGeom prst="rect">
             <a:avLst/>
@@ -8780,7 +8780,7 @@
         </p:nvSpPr>
         <p:spPr>
           <a:xfrm>
-            <a:off x="7086600" y="4434840"/>
+            <a:off x="7086600" y="3977639"/>
             <a:ext cx="4389120" cy="548640"/>
           </a:xfrm>
           <a:prstGeom prst="rect">
@@ -10129,7 +10129,46 @@
       </p:sp>
       <p:sp>
         <p:nvSpPr>
-          <p:cNvPr id="9" name="Rounded Rectangle 8"/>
+          <p:cNvPr id="9" name="TextBox 8"/>
+          <p:cNvSpPr txBox="1"/>
+          <p:nvPr/>
+        </p:nvSpPr>
+        <p:spPr>
+          <a:xfrm>
+            <a:off x="502920" y="4663440"/>
+            <a:ext cx="3657600" cy="292608"/>
+          </a:xfrm>
+          <a:prstGeom prst="rect">
+            <a:avLst/>
+          </a:prstGeom>
+          <a:noFill/>
+        </p:spPr>
+        <p:txBody>
+          <a:bodyPr wrap="square" lIns="0" rIns="0" tIns="0" bIns="0" anchor="t">
+            <a:spAutoFit/>
+          </a:bodyPr>
+          <a:lstStyle/>
+          <a:p>
+            <a:pPr algn="l">
+              <a:lnSpc>
+                <a:spcPct val="115000"/>
+              </a:lnSpc>
+            </a:pPr>
+            <a:r>
+              <a:rPr sz="1400" b="1" i="0">
+                <a:solidFill>
+                  <a:srgbClr val="065A82"/>
+                </a:solidFill>
+                <a:latin typeface="Arial"/>
+              </a:rPr>
+              <a:t>Что делать:</a:t>
+            </a:r>
+          </a:p>
+        </p:txBody>
+      </p:sp>
+      <p:sp>
+        <p:nvSpPr>
+          <p:cNvPr id="10" name="Rounded Rectangle 9"/>
           <p:cNvSpPr/>
           <p:nvPr/>
         </p:nvSpPr>
@@ -10177,7 +10216,7 @@
       </p:sp>
       <p:sp>
         <p:nvSpPr>
-          <p:cNvPr id="10" name="TextBox 9"/>
+          <p:cNvPr id="11" name="TextBox 10"/>
           <p:cNvSpPr txBox="1"/>
           <p:nvPr/>
         </p:nvSpPr>
@@ -10216,7 +10255,7 @@
       </p:sp>
       <p:sp>
         <p:nvSpPr>
-          <p:cNvPr id="11" name="Rounded Rectangle 10"/>
+          <p:cNvPr id="12" name="Rounded Rectangle 11"/>
           <p:cNvSpPr/>
           <p:nvPr/>
         </p:nvSpPr>
@@ -10264,7 +10303,7 @@
       </p:sp>
       <p:sp>
         <p:nvSpPr>
-          <p:cNvPr id="12" name="TextBox 11"/>
+          <p:cNvPr id="13" name="TextBox 12"/>
           <p:cNvSpPr txBox="1"/>
           <p:nvPr/>
         </p:nvSpPr>
@@ -10303,7 +10342,7 @@
       </p:sp>
       <p:sp>
         <p:nvSpPr>
-          <p:cNvPr id="13" name="Rounded Rectangle 12"/>
+          <p:cNvPr id="14" name="Rounded Rectangle 13"/>
           <p:cNvSpPr/>
           <p:nvPr/>
         </p:nvSpPr>
@@ -10351,7 +10390,7 @@
       </p:sp>
       <p:sp>
         <p:nvSpPr>
-          <p:cNvPr id="14" name="TextBox 13"/>
+          <p:cNvPr id="15" name="TextBox 14"/>
           <p:cNvSpPr txBox="1"/>
           <p:nvPr/>
         </p:nvSpPr>
@@ -10390,7 +10429,7 @@
       </p:sp>
       <p:sp>
         <p:nvSpPr>
-          <p:cNvPr id="15" name="TextBox 14"/>
+          <p:cNvPr id="16" name="TextBox 15"/>
           <p:cNvSpPr txBox="1"/>
           <p:nvPr/>
         </p:nvSpPr>
@@ -16930,7 +16969,7 @@
                 </a:solidFill>
                 <a:latin typeface="Arial"/>
               </a:rPr>
-              <a:t>Проверяем ментальную модель: конвейер inference и шесть границ</a:t>
+              <a:t>Проверяем ментальную модель: конвейер инференса и шесть границ</a:t>
             </a:r>
           </a:p>
         </p:txBody>
@@ -20043,7 +20082,7 @@
         </p:nvGraphicFramePr>
         <p:xfrm>
           <a:off x="502920" y="1417320"/>
-          <a:ext cx="6857999" cy="3794754"/>
+          <a:ext cx="6857999" cy="3611879"/>
         </p:xfrm>
         <a:graphic>
           <a:graphicData uri="http://schemas.openxmlformats.org/drawingml/2006/table">
@@ -20247,7 +20286,7 @@
                   </a:tcPr>
                 </a:tc>
               </a:tr>
-              <a:tr h="470262">
+              <a:tr h="444137">
                 <a:tc>
                   <a:txBody>
                     <a:bodyPr wrap="square"/>
@@ -20301,9 +20340,9 @@
                     <a:p>
                       <a:pPr algn="ctr"/>
                       <a:r>
-                        <a:rPr sz="1000" b="0">
+                        <a:rPr sz="900" b="0">
                           <a:solidFill>
-                            <a:srgbClr val="21295C"/>
+                            <a:srgbClr val="6B7685"/>
                           </a:solidFill>
                           <a:latin typeface="Arial"/>
                         </a:rPr>
@@ -20313,7 +20352,7 @@
                   </a:txBody>
                   <a:tcPr marL="18288" marR="18288" marT="9144" marB="9144" anchor="ctr">
                     <a:solidFill>
-                      <a:srgbClr val="72A7BC"/>
+                      <a:srgbClr val="E5EAF0"/>
                     </a:solidFill>
                   </a:tcPr>
                 </a:tc>
@@ -20324,9 +20363,9 @@
                     <a:p>
                       <a:pPr algn="ctr"/>
                       <a:r>
-                        <a:rPr sz="1000" b="0">
+                        <a:rPr sz="900" b="0">
                           <a:solidFill>
-                            <a:srgbClr val="21295C"/>
+                            <a:srgbClr val="6B7685"/>
                           </a:solidFill>
                           <a:latin typeface="Arial"/>
                         </a:rPr>
@@ -20336,7 +20375,7 @@
                   </a:txBody>
                   <a:tcPr marL="18288" marR="18288" marT="9144" marB="9144" anchor="ctr">
                     <a:solidFill>
-                      <a:srgbClr val="9DC1D0"/>
+                      <a:srgbClr val="E5EAF0"/>
                     </a:solidFill>
                   </a:tcPr>
                 </a:tc>
@@ -20347,9 +20386,9 @@
                     <a:p>
                       <a:pPr algn="ctr"/>
                       <a:r>
-                        <a:rPr sz="1000" b="0">
+                        <a:rPr sz="900" b="0">
                           <a:solidFill>
-                            <a:srgbClr val="21295C"/>
+                            <a:srgbClr val="6B7685"/>
                           </a:solidFill>
                           <a:latin typeface="Arial"/>
                         </a:rPr>
@@ -20359,7 +20398,7 @@
                   </a:txBody>
                   <a:tcPr marL="18288" marR="18288" marT="9144" marB="9144" anchor="ctr">
                     <a:solidFill>
-                      <a:srgbClr val="C8DCE5"/>
+                      <a:srgbClr val="E5EAF0"/>
                     </a:solidFill>
                   </a:tcPr>
                 </a:tc>
@@ -20370,9 +20409,9 @@
                     <a:p>
                       <a:pPr algn="ctr"/>
                       <a:r>
-                        <a:rPr sz="1000" b="0">
+                        <a:rPr sz="900" b="0">
                           <a:solidFill>
-                            <a:srgbClr val="21295C"/>
+                            <a:srgbClr val="6B7685"/>
                           </a:solidFill>
                           <a:latin typeface="Arial"/>
                         </a:rPr>
@@ -20382,7 +20421,7 @@
                   </a:txBody>
                   <a:tcPr marL="18288" marR="18288" marT="9144" marB="9144" anchor="ctr">
                     <a:solidFill>
-                      <a:srgbClr val="C8DCE5"/>
+                      <a:srgbClr val="E5EAF0"/>
                     </a:solidFill>
                   </a:tcPr>
                 </a:tc>
@@ -20393,9 +20432,9 @@
                     <a:p>
                       <a:pPr algn="ctr"/>
                       <a:r>
-                        <a:rPr sz="1000" b="0">
+                        <a:rPr sz="900" b="0">
                           <a:solidFill>
-                            <a:srgbClr val="21295C"/>
+                            <a:srgbClr val="6B7685"/>
                           </a:solidFill>
                           <a:latin typeface="Arial"/>
                         </a:rPr>
@@ -20405,7 +20444,7 @@
                   </a:txBody>
                   <a:tcPr marL="18288" marR="18288" marT="9144" marB="9144" anchor="ctr">
                     <a:solidFill>
-                      <a:srgbClr val="C8DCE5"/>
+                      <a:srgbClr val="E5EAF0"/>
                     </a:solidFill>
                   </a:tcPr>
                 </a:tc>
@@ -20416,9 +20455,9 @@
                     <a:p>
                       <a:pPr algn="ctr"/>
                       <a:r>
-                        <a:rPr sz="1000" b="0">
+                        <a:rPr sz="900" b="0">
                           <a:solidFill>
-                            <a:srgbClr val="21295C"/>
+                            <a:srgbClr val="6B7685"/>
                           </a:solidFill>
                           <a:latin typeface="Arial"/>
                         </a:rPr>
@@ -20428,12 +20467,12 @@
                   </a:txBody>
                   <a:tcPr marL="18288" marR="18288" marT="9144" marB="9144" anchor="ctr">
                     <a:solidFill>
-                      <a:srgbClr val="F4F7FA"/>
+                      <a:srgbClr val="E5EAF0"/>
                     </a:solidFill>
                   </a:tcPr>
                 </a:tc>
               </a:tr>
-              <a:tr h="470262">
+              <a:tr h="444137">
                 <a:tc>
                   <a:txBody>
                     <a:bodyPr wrap="square"/>
@@ -20510,9 +20549,9 @@
                     <a:p>
                       <a:pPr algn="ctr"/>
                       <a:r>
-                        <a:rPr sz="1000" b="0">
+                        <a:rPr sz="900" b="0">
                           <a:solidFill>
-                            <a:srgbClr val="FFFFFF"/>
+                            <a:srgbClr val="6B7685"/>
                           </a:solidFill>
                           <a:latin typeface="Arial"/>
                         </a:rPr>
@@ -20522,7 +20561,7 @@
                   </a:txBody>
                   <a:tcPr marL="18288" marR="18288" marT="9144" marB="9144" anchor="ctr">
                     <a:solidFill>
-                      <a:srgbClr val="1C7293"/>
+                      <a:srgbClr val="E5EAF0"/>
                     </a:solidFill>
                   </a:tcPr>
                 </a:tc>
@@ -20533,9 +20572,9 @@
                     <a:p>
                       <a:pPr algn="ctr"/>
                       <a:r>
-                        <a:rPr sz="1000" b="0">
+                        <a:rPr sz="900" b="0">
                           <a:solidFill>
-                            <a:srgbClr val="21295C"/>
+                            <a:srgbClr val="6B7685"/>
                           </a:solidFill>
                           <a:latin typeface="Arial"/>
                         </a:rPr>
@@ -20545,7 +20584,7 @@
                   </a:txBody>
                   <a:tcPr marL="18288" marR="18288" marT="9144" marB="9144" anchor="ctr">
                     <a:solidFill>
-                      <a:srgbClr val="C8DCE5"/>
+                      <a:srgbClr val="E5EAF0"/>
                     </a:solidFill>
                   </a:tcPr>
                 </a:tc>
@@ -20556,9 +20595,9 @@
                     <a:p>
                       <a:pPr algn="ctr"/>
                       <a:r>
-                        <a:rPr sz="1000" b="0">
+                        <a:rPr sz="900" b="0">
                           <a:solidFill>
-                            <a:srgbClr val="21295C"/>
+                            <a:srgbClr val="6B7685"/>
                           </a:solidFill>
                           <a:latin typeface="Arial"/>
                         </a:rPr>
@@ -20568,7 +20607,7 @@
                   </a:txBody>
                   <a:tcPr marL="18288" marR="18288" marT="9144" marB="9144" anchor="ctr">
                     <a:solidFill>
-                      <a:srgbClr val="C8DCE5"/>
+                      <a:srgbClr val="E5EAF0"/>
                     </a:solidFill>
                   </a:tcPr>
                 </a:tc>
@@ -20579,9 +20618,9 @@
                     <a:p>
                       <a:pPr algn="ctr"/>
                       <a:r>
-                        <a:rPr sz="1000" b="0">
+                        <a:rPr sz="900" b="0">
                           <a:solidFill>
-                            <a:srgbClr val="21295C"/>
+                            <a:srgbClr val="6B7685"/>
                           </a:solidFill>
                           <a:latin typeface="Arial"/>
                         </a:rPr>
@@ -20591,7 +20630,7 @@
                   </a:txBody>
                   <a:tcPr marL="18288" marR="18288" marT="9144" marB="9144" anchor="ctr">
                     <a:solidFill>
-                      <a:srgbClr val="C8DCE5"/>
+                      <a:srgbClr val="E5EAF0"/>
                     </a:solidFill>
                   </a:tcPr>
                 </a:tc>
@@ -20602,9 +20641,9 @@
                     <a:p>
                       <a:pPr algn="ctr"/>
                       <a:r>
-                        <a:rPr sz="1000" b="0">
+                        <a:rPr sz="900" b="0">
                           <a:solidFill>
-                            <a:srgbClr val="21295C"/>
+                            <a:srgbClr val="6B7685"/>
                           </a:solidFill>
                           <a:latin typeface="Arial"/>
                         </a:rPr>
@@ -20614,12 +20653,12 @@
                   </a:txBody>
                   <a:tcPr marL="18288" marR="18288" marT="9144" marB="9144" anchor="ctr">
                     <a:solidFill>
-                      <a:srgbClr val="C8DCE5"/>
+                      <a:srgbClr val="E5EAF0"/>
                     </a:solidFill>
                   </a:tcPr>
                 </a:tc>
               </a:tr>
-              <a:tr h="470262">
+              <a:tr h="444137">
                 <a:tc>
                   <a:txBody>
                     <a:bodyPr wrap="square"/>
@@ -20719,9 +20758,9 @@
                     <a:p>
                       <a:pPr algn="ctr"/>
                       <a:r>
-                        <a:rPr sz="1000" b="0">
+                        <a:rPr sz="900" b="0">
                           <a:solidFill>
-                            <a:srgbClr val="21295C"/>
+                            <a:srgbClr val="6B7685"/>
                           </a:solidFill>
                           <a:latin typeface="Arial"/>
                         </a:rPr>
@@ -20731,7 +20770,7 @@
                   </a:txBody>
                   <a:tcPr marL="18288" marR="18288" marT="9144" marB="9144" anchor="ctr">
                     <a:solidFill>
-                      <a:srgbClr val="C8DCE5"/>
+                      <a:srgbClr val="E5EAF0"/>
                     </a:solidFill>
                   </a:tcPr>
                 </a:tc>
@@ -20742,9 +20781,9 @@
                     <a:p>
                       <a:pPr algn="ctr"/>
                       <a:r>
-                        <a:rPr sz="1000" b="0">
+                        <a:rPr sz="900" b="0">
                           <a:solidFill>
-                            <a:srgbClr val="21295C"/>
+                            <a:srgbClr val="6B7685"/>
                           </a:solidFill>
                           <a:latin typeface="Arial"/>
                         </a:rPr>
@@ -20754,7 +20793,7 @@
                   </a:txBody>
                   <a:tcPr marL="18288" marR="18288" marT="9144" marB="9144" anchor="ctr">
                     <a:solidFill>
-                      <a:srgbClr val="C8DCE5"/>
+                      <a:srgbClr val="E5EAF0"/>
                     </a:solidFill>
                   </a:tcPr>
                 </a:tc>
@@ -20765,9 +20804,9 @@
                     <a:p>
                       <a:pPr algn="ctr"/>
                       <a:r>
-                        <a:rPr sz="1000" b="0">
+                        <a:rPr sz="900" b="0">
                           <a:solidFill>
-                            <a:srgbClr val="21295C"/>
+                            <a:srgbClr val="6B7685"/>
                           </a:solidFill>
                           <a:latin typeface="Arial"/>
                         </a:rPr>
@@ -20777,7 +20816,7 @@
                   </a:txBody>
                   <a:tcPr marL="18288" marR="18288" marT="9144" marB="9144" anchor="ctr">
                     <a:solidFill>
-                      <a:srgbClr val="F4F7FA"/>
+                      <a:srgbClr val="E5EAF0"/>
                     </a:solidFill>
                   </a:tcPr>
                 </a:tc>
@@ -20788,9 +20827,9 @@
                     <a:p>
                       <a:pPr algn="ctr"/>
                       <a:r>
-                        <a:rPr sz="1000" b="0">
+                        <a:rPr sz="900" b="0">
                           <a:solidFill>
-                            <a:srgbClr val="21295C"/>
+                            <a:srgbClr val="6B7685"/>
                           </a:solidFill>
                           <a:latin typeface="Arial"/>
                         </a:rPr>
@@ -20800,12 +20839,12 @@
                   </a:txBody>
                   <a:tcPr marL="18288" marR="18288" marT="9144" marB="9144" anchor="ctr">
                     <a:solidFill>
-                      <a:srgbClr val="C8DCE5"/>
+                      <a:srgbClr val="E5EAF0"/>
                     </a:solidFill>
                   </a:tcPr>
                 </a:tc>
               </a:tr>
-              <a:tr h="470262">
+              <a:tr h="444137">
                 <a:tc>
                   <a:txBody>
                     <a:bodyPr wrap="square"/>
@@ -20928,9 +20967,9 @@
                     <a:p>
                       <a:pPr algn="ctr"/>
                       <a:r>
-                        <a:rPr sz="1000" b="0">
+                        <a:rPr sz="900" b="0">
                           <a:solidFill>
-                            <a:srgbClr val="21295C"/>
+                            <a:srgbClr val="6B7685"/>
                           </a:solidFill>
                           <a:latin typeface="Arial"/>
                         </a:rPr>
@@ -20940,7 +20979,7 @@
                   </a:txBody>
                   <a:tcPr marL="18288" marR="18288" marT="9144" marB="9144" anchor="ctr">
                     <a:solidFill>
-                      <a:srgbClr val="72A7BC"/>
+                      <a:srgbClr val="E5EAF0"/>
                     </a:solidFill>
                   </a:tcPr>
                 </a:tc>
@@ -20951,9 +20990,9 @@
                     <a:p>
                       <a:pPr algn="ctr"/>
                       <a:r>
-                        <a:rPr sz="1000" b="0">
+                        <a:rPr sz="900" b="0">
                           <a:solidFill>
-                            <a:srgbClr val="21295C"/>
+                            <a:srgbClr val="6B7685"/>
                           </a:solidFill>
                           <a:latin typeface="Arial"/>
                         </a:rPr>
@@ -20963,7 +21002,7 @@
                   </a:txBody>
                   <a:tcPr marL="18288" marR="18288" marT="9144" marB="9144" anchor="ctr">
                     <a:solidFill>
-                      <a:srgbClr val="9DC1D0"/>
+                      <a:srgbClr val="E5EAF0"/>
                     </a:solidFill>
                   </a:tcPr>
                 </a:tc>
@@ -20974,9 +21013,9 @@
                     <a:p>
                       <a:pPr algn="ctr"/>
                       <a:r>
-                        <a:rPr sz="1000" b="0">
+                        <a:rPr sz="900" b="0">
                           <a:solidFill>
-                            <a:srgbClr val="21295C"/>
+                            <a:srgbClr val="6B7685"/>
                           </a:solidFill>
                           <a:latin typeface="Arial"/>
                         </a:rPr>
@@ -20986,12 +21025,12 @@
                   </a:txBody>
                   <a:tcPr marL="18288" marR="18288" marT="9144" marB="9144" anchor="ctr">
                     <a:solidFill>
-                      <a:srgbClr val="9DC1D0"/>
+                      <a:srgbClr val="E5EAF0"/>
                     </a:solidFill>
                   </a:tcPr>
                 </a:tc>
               </a:tr>
-              <a:tr h="470262">
+              <a:tr h="444137">
                 <a:tc>
                   <a:txBody>
                     <a:bodyPr wrap="square"/>
@@ -21137,9 +21176,9 @@
                     <a:p>
                       <a:pPr algn="ctr"/>
                       <a:r>
-                        <a:rPr sz="1000" b="0">
+                        <a:rPr sz="900" b="0">
                           <a:solidFill>
-                            <a:srgbClr val="21295C"/>
+                            <a:srgbClr val="6B7685"/>
                           </a:solidFill>
                           <a:latin typeface="Arial"/>
                         </a:rPr>
@@ -21149,7 +21188,7 @@
                   </a:txBody>
                   <a:tcPr marL="18288" marR="18288" marT="9144" marB="9144" anchor="ctr">
                     <a:solidFill>
-                      <a:srgbClr val="72A7BC"/>
+                      <a:srgbClr val="E5EAF0"/>
                     </a:solidFill>
                   </a:tcPr>
                 </a:tc>
@@ -21160,9 +21199,9 @@
                     <a:p>
                       <a:pPr algn="ctr"/>
                       <a:r>
-                        <a:rPr sz="1000" b="0">
+                        <a:rPr sz="900" b="0">
                           <a:solidFill>
-                            <a:srgbClr val="21295C"/>
+                            <a:srgbClr val="6B7685"/>
                           </a:solidFill>
                           <a:latin typeface="Arial"/>
                         </a:rPr>
@@ -21172,12 +21211,12 @@
                   </a:txBody>
                   <a:tcPr marL="18288" marR="18288" marT="9144" marB="9144" anchor="ctr">
                     <a:solidFill>
-                      <a:srgbClr val="478CA7"/>
+                      <a:srgbClr val="E5EAF0"/>
                     </a:solidFill>
                   </a:tcPr>
                 </a:tc>
               </a:tr>
-              <a:tr h="470262">
+              <a:tr h="444137">
                 <a:tc>
                   <a:txBody>
                     <a:bodyPr wrap="square"/>
@@ -21346,9 +21385,9 @@
                     <a:p>
                       <a:pPr algn="ctr"/>
                       <a:r>
-                        <a:rPr sz="1000" b="0">
+                        <a:rPr sz="900" b="0">
                           <a:solidFill>
-                            <a:srgbClr val="FFFFFF"/>
+                            <a:srgbClr val="6B7685"/>
                           </a:solidFill>
                           <a:latin typeface="Arial"/>
                         </a:rPr>
@@ -21358,12 +21397,12 @@
                   </a:txBody>
                   <a:tcPr marL="18288" marR="18288" marT="9144" marB="9144" anchor="ctr">
                     <a:solidFill>
-                      <a:srgbClr val="1C7293"/>
+                      <a:srgbClr val="E5EAF0"/>
                     </a:solidFill>
                   </a:tcPr>
                 </a:tc>
               </a:tr>
-              <a:tr h="470262">
+              <a:tr h="444137">
                 <a:tc>
                   <a:txBody>
                     <a:bodyPr wrap="square"/>
@@ -21561,8 +21600,8 @@
         </p:nvSpPr>
         <p:spPr>
           <a:xfrm>
-            <a:off x="502920" y="5349240"/>
-            <a:ext cx="6858000" cy="502920"/>
+            <a:off x="502920" y="5138928"/>
+            <a:ext cx="6858000" cy="731520"/>
           </a:xfrm>
           <a:prstGeom prst="rect">
             <a:avLst/>
@@ -21577,11 +21616,11 @@
           <a:p>
             <a:pPr algn="l">
               <a:lnSpc>
-                <a:spcPct val="115000"/>
+                <a:spcPct val="112000"/>
               </a:lnSpc>
             </a:pPr>
             <a:r>
-              <a:rPr sz="1300" b="1" i="0">
+              <a:rPr sz="1250" b="1" i="0">
                 <a:solidFill>
                   <a:srgbClr val="21295C"/>
                 </a:solidFill>
@@ -21590,13 +21629,32 @@
               <a:t>По строке «она»: </a:t>
             </a:r>
             <a:r>
-              <a:rPr sz="1300" b="0" i="0">
+              <a:rPr sz="1250" b="0" i="0">
                 <a:solidFill>
                   <a:srgbClr val="21295C"/>
                 </a:solidFill>
                 <a:latin typeface="Arial"/>
               </a:rPr>
               <a:t>наибольший вес — на «мышь». Статистическая связь, выученная на корпусе.</a:t>
+            </a:r>
+          </a:p>
+          <a:p>
+            <a:pPr algn="l">
+              <a:lnSpc>
+                <a:spcPct val="112000"/>
+              </a:lnSpc>
+              <a:spcBef>
+                <a:spcPts val="300"/>
+              </a:spcBef>
+            </a:pPr>
+            <a:r>
+              <a:rPr sz="1150" b="0" i="1">
+                <a:solidFill>
+                  <a:srgbClr val="6B7685"/>
+                </a:solidFill>
+                <a:latin typeface="Arial"/>
+              </a:rPr>
+              <a:t>В декодере токен видит только предыдущие — показана полная сверка для наглядности.</a:t>
             </a:r>
           </a:p>
         </p:txBody>
@@ -22184,18 +22242,105 @@
         </p:nvSpPr>
         <p:spPr>
           <a:xfrm>
-            <a:off x="502920" y="1188720"/>
-            <a:ext cx="4434840" cy="2743200"/>
+            <a:off x="502920" y="969264"/>
+            <a:ext cx="11201400" cy="548640"/>
           </a:xfrm>
           <a:prstGeom prst="roundRect">
             <a:avLst>
-              <a:gd name="adj" fmla="val 11111"/>
+              <a:gd name="adj" fmla="val 12000"/>
+            </a:avLst>
+          </a:prstGeom>
+          <a:solidFill>
+            <a:srgbClr val="FEF5E0"/>
+          </a:solidFill>
+          <a:ln w="15240">
+            <a:solidFill>
+              <a:srgbClr val="F0AB00"/>
+            </a:solidFill>
+          </a:ln>
+          <a:effectLst/>
+        </p:spPr>
+        <p:style>
+          <a:lnRef idx="1">
+            <a:schemeClr val="accent1"/>
+          </a:lnRef>
+          <a:fillRef idx="3">
+            <a:schemeClr val="accent1"/>
+          </a:fillRef>
+          <a:effectRef idx="2">
+            <a:schemeClr val="accent1"/>
+          </a:effectRef>
+          <a:fontRef idx="minor">
+            <a:schemeClr val="lt1"/>
+          </a:fontRef>
+        </p:style>
+        <p:txBody>
+          <a:bodyPr rtlCol="0" anchor="ctr"/>
+          <a:lstStyle/>
+          <a:p>
+            <a:pPr algn="ctr"/>
+          </a:p>
+        </p:txBody>
+      </p:sp>
+      <p:sp>
+        <p:nvSpPr>
+          <p:cNvPr id="4" name="TextBox 3"/>
+          <p:cNvSpPr txBox="1"/>
+          <p:nvPr/>
+        </p:nvSpPr>
+        <p:spPr>
+          <a:xfrm>
+            <a:off x="685800" y="1024128"/>
+            <a:ext cx="10835640" cy="438912"/>
+          </a:xfrm>
+          <a:prstGeom prst="rect">
+            <a:avLst/>
+          </a:prstGeom>
+          <a:noFill/>
+        </p:spPr>
+        <p:txBody>
+          <a:bodyPr wrap="square" lIns="0" rIns="0" tIns="0" bIns="0" anchor="ctr">
+            <a:spAutoFit/>
+          </a:bodyPr>
+          <a:lstStyle/>
+          <a:p>
+            <a:pPr algn="ctr">
+              <a:lnSpc>
+                <a:spcPct val="122000"/>
+              </a:lnSpc>
+            </a:pPr>
+            <a:r>
+              <a:rPr sz="1550" b="1" i="0">
+                <a:solidFill>
+                  <a:srgbClr val="21295C"/>
+                </a:solidFill>
+                <a:latin typeface="Arial"/>
+              </a:rPr>
+              <a:t>Q — про текущий шаг. K и V — про уже обработанный контекст.</a:t>
+            </a:r>
+          </a:p>
+        </p:txBody>
+      </p:sp>
+      <p:sp>
+        <p:nvSpPr>
+          <p:cNvPr id="5" name="Rounded Rectangle 4"/>
+          <p:cNvSpPr/>
+          <p:nvPr/>
+        </p:nvSpPr>
+        <p:spPr>
+          <a:xfrm>
+            <a:off x="502920" y="1682496"/>
+            <a:ext cx="3611880" cy="530352"/>
+          </a:xfrm>
+          <a:prstGeom prst="roundRect">
+            <a:avLst>
+              <a:gd name="adj" fmla="val 25000"/>
             </a:avLst>
           </a:prstGeom>
           <a:solidFill>
             <a:srgbClr val="F4F7FA"/>
           </a:solidFill>
-          <a:ln w="17780">
+          <a:ln w="15240">
             <a:solidFill>
               <a:srgbClr val="1C7293"/>
             </a:solidFill>
@@ -22226,14 +22371,14 @@
       </p:sp>
       <p:sp>
         <p:nvSpPr>
-          <p:cNvPr id="4" name="TextBox 3"/>
+          <p:cNvPr id="6" name="TextBox 5"/>
           <p:cNvSpPr txBox="1"/>
           <p:nvPr/>
         </p:nvSpPr>
         <p:spPr>
           <a:xfrm>
-            <a:off x="777240" y="1325880"/>
-            <a:ext cx="3931920" cy="365760"/>
+            <a:off x="667512" y="1682496"/>
+            <a:ext cx="3337560" cy="530352"/>
           </a:xfrm>
           <a:prstGeom prst="rect">
             <a:avLst/>
@@ -22241,47 +22386,60 @@
           <a:noFill/>
         </p:spPr>
         <p:txBody>
-          <a:bodyPr wrap="square" lIns="0" rIns="0" tIns="0" bIns="0" anchor="t">
+          <a:bodyPr wrap="square" lIns="0" rIns="0" tIns="0" bIns="0" anchor="ctr">
             <a:spAutoFit/>
           </a:bodyPr>
           <a:lstStyle/>
           <a:p>
             <a:pPr algn="l">
               <a:lnSpc>
-                <a:spcPct val="115000"/>
+                <a:spcPct val="105000"/>
               </a:lnSpc>
             </a:pPr>
             <a:r>
-              <a:rPr sz="1550" b="1" i="0">
+              <a:rPr sz="1350" b="1" i="0">
                 <a:solidFill>
                   <a:srgbClr val="065A82"/>
                 </a:solidFill>
-                <a:latin typeface="Arial"/>
-              </a:rPr>
-              <a:t>Фонарик в тёмной комнате</a:t>
-            </a:r>
-          </a:p>
-        </p:txBody>
-      </p:sp>
-      <p:sp>
-        <p:nvSpPr>
-          <p:cNvPr id="5" name="Rounded Rectangle 4"/>
+                <a:latin typeface="Liberation Mono"/>
+              </a:rPr>
+              <a:t>Query</a:t>
+            </a:r>
+            <a:r>
+              <a:rPr sz="1200" b="0" i="0">
+                <a:solidFill>
+                  <a:srgbClr val="21295C"/>
+                </a:solidFill>
+                <a:latin typeface="Arial"/>
+              </a:rPr>
+              <a:t> — «что я сейчас ищу»</a:t>
+            </a:r>
+          </a:p>
+        </p:txBody>
+      </p:sp>
+      <p:sp>
+        <p:nvSpPr>
+          <p:cNvPr id="7" name="Rounded Rectangle 6"/>
           <p:cNvSpPr/>
           <p:nvPr/>
         </p:nvSpPr>
         <p:spPr>
           <a:xfrm>
-            <a:off x="868680" y="1883664"/>
-            <a:ext cx="457200" cy="274320"/>
+            <a:off x="4297680" y="1682496"/>
+            <a:ext cx="3611880" cy="530352"/>
           </a:xfrm>
           <a:prstGeom prst="roundRect">
-            <a:avLst/>
+            <a:avLst>
+              <a:gd name="adj" fmla="val 25000"/>
+            </a:avLst>
           </a:prstGeom>
           <a:solidFill>
-            <a:srgbClr val="21295C"/>
+            <a:srgbClr val="F4F7FA"/>
           </a:solidFill>
-          <a:ln>
-            <a:noFill/>
+          <a:ln w="15240">
+            <a:solidFill>
+              <a:srgbClr val="1C7293"/>
+            </a:solidFill>
           </a:ln>
           <a:effectLst/>
         </p:spPr>
@@ -22307,133 +22465,77 @@
           </a:p>
         </p:txBody>
       </p:sp>
-      <p:cxnSp>
-        <p:nvCxnSpPr>
-          <p:cNvPr id="6" name="Connector 5"/>
-          <p:cNvCxnSpPr/>
-          <p:nvPr/>
-        </p:nvCxnSpPr>
-        <p:spPr>
-          <a:xfrm flipV="1">
-            <a:off x="1371600" y="1993392"/>
-            <a:ext cx="1554480" cy="27432"/>
-          </a:xfrm>
-          <a:prstGeom prst="line">
-            <a:avLst/>
-          </a:prstGeom>
-          <a:ln w="38100">
+      <p:sp>
+        <p:nvSpPr>
+          <p:cNvPr id="8" name="TextBox 7"/>
+          <p:cNvSpPr txBox="1"/>
+          <p:nvPr/>
+        </p:nvSpPr>
+        <p:spPr>
+          <a:xfrm>
+            <a:off x="4462272" y="1682496"/>
+            <a:ext cx="3337560" cy="530352"/>
+          </a:xfrm>
+          <a:prstGeom prst="rect">
+            <a:avLst/>
+          </a:prstGeom>
+          <a:noFill/>
+        </p:spPr>
+        <p:txBody>
+          <a:bodyPr wrap="square" lIns="0" rIns="0" tIns="0" bIns="0" anchor="ctr">
+            <a:spAutoFit/>
+          </a:bodyPr>
+          <a:lstStyle/>
+          <a:p>
+            <a:pPr algn="l">
+              <a:lnSpc>
+                <a:spcPct val="105000"/>
+              </a:lnSpc>
+            </a:pPr>
+            <a:r>
+              <a:rPr sz="1350" b="1" i="0">
+                <a:solidFill>
+                  <a:srgbClr val="065A82"/>
+                </a:solidFill>
+                <a:latin typeface="Liberation Mono"/>
+              </a:rPr>
+              <a:t>Key</a:t>
+            </a:r>
+            <a:r>
+              <a:rPr sz="1200" b="0" i="0">
+                <a:solidFill>
+                  <a:srgbClr val="21295C"/>
+                </a:solidFill>
+                <a:latin typeface="Arial"/>
+              </a:rPr>
+              <a:t> — «что я предлагаю»</a:t>
+            </a:r>
+          </a:p>
+        </p:txBody>
+      </p:sp>
+      <p:sp>
+        <p:nvSpPr>
+          <p:cNvPr id="9" name="Rounded Rectangle 8"/>
+          <p:cNvSpPr/>
+          <p:nvPr/>
+        </p:nvSpPr>
+        <p:spPr>
+          <a:xfrm>
+            <a:off x="8092440" y="1682496"/>
+            <a:ext cx="3611880" cy="530352"/>
+          </a:xfrm>
+          <a:prstGeom prst="roundRect">
+            <a:avLst>
+              <a:gd name="adj" fmla="val 25000"/>
+            </a:avLst>
+          </a:prstGeom>
+          <a:solidFill>
+            <a:srgbClr val="F4F7FA"/>
+          </a:solidFill>
+          <a:ln w="15240">
             <a:solidFill>
-              <a:srgbClr val="F0AB00"/>
+              <a:srgbClr val="1C7293"/>
             </a:solidFill>
-          </a:ln>
-          <a:effectLst/>
-        </p:spPr>
-        <p:style>
-          <a:lnRef idx="2">
-            <a:schemeClr val="accent1"/>
-          </a:lnRef>
-          <a:fillRef idx="0">
-            <a:schemeClr val="accent1"/>
-          </a:fillRef>
-          <a:effectRef idx="1">
-            <a:schemeClr val="accent1"/>
-          </a:effectRef>
-          <a:fontRef idx="minor">
-            <a:schemeClr val="tx1"/>
-          </a:fontRef>
-        </p:style>
-      </p:cxnSp>
-      <p:cxnSp>
-        <p:nvCxnSpPr>
-          <p:cNvPr id="7" name="Connector 6"/>
-          <p:cNvCxnSpPr/>
-          <p:nvPr/>
-        </p:nvCxnSpPr>
-        <p:spPr>
-          <a:xfrm flipV="1">
-            <a:off x="1371600" y="1810512"/>
-            <a:ext cx="1508760" cy="146304"/>
-          </a:xfrm>
-          <a:prstGeom prst="line">
-            <a:avLst/>
-          </a:prstGeom>
-          <a:ln w="20320">
-            <a:solidFill>
-              <a:srgbClr val="F0AB00"/>
-            </a:solidFill>
-          </a:ln>
-          <a:effectLst/>
-        </p:spPr>
-        <p:style>
-          <a:lnRef idx="2">
-            <a:schemeClr val="accent1"/>
-          </a:lnRef>
-          <a:fillRef idx="0">
-            <a:schemeClr val="accent1"/>
-          </a:fillRef>
-          <a:effectRef idx="1">
-            <a:schemeClr val="accent1"/>
-          </a:effectRef>
-          <a:fontRef idx="minor">
-            <a:schemeClr val="tx1"/>
-          </a:fontRef>
-        </p:style>
-      </p:cxnSp>
-      <p:cxnSp>
-        <p:nvCxnSpPr>
-          <p:cNvPr id="8" name="Connector 7"/>
-          <p:cNvCxnSpPr/>
-          <p:nvPr/>
-        </p:nvCxnSpPr>
-        <p:spPr>
-          <a:xfrm>
-            <a:off x="1371600" y="2084831"/>
-            <a:ext cx="1508760" cy="128017"/>
-          </a:xfrm>
-          <a:prstGeom prst="line">
-            <a:avLst/>
-          </a:prstGeom>
-          <a:ln w="20320">
-            <a:solidFill>
-              <a:srgbClr val="F0AB00"/>
-            </a:solidFill>
-          </a:ln>
-          <a:effectLst/>
-        </p:spPr>
-        <p:style>
-          <a:lnRef idx="2">
-            <a:schemeClr val="accent1"/>
-          </a:lnRef>
-          <a:fillRef idx="0">
-            <a:schemeClr val="accent1"/>
-          </a:fillRef>
-          <a:effectRef idx="1">
-            <a:schemeClr val="accent1"/>
-          </a:effectRef>
-          <a:fontRef idx="minor">
-            <a:schemeClr val="tx1"/>
-          </a:fontRef>
-        </p:style>
-      </p:cxnSp>
-      <p:sp>
-        <p:nvSpPr>
-          <p:cNvPr id="9" name="Oval 8"/>
-          <p:cNvSpPr/>
-          <p:nvPr/>
-        </p:nvSpPr>
-        <p:spPr>
-          <a:xfrm>
-            <a:off x="3017520" y="1847088"/>
-            <a:ext cx="347472" cy="347472"/>
-          </a:xfrm>
-          <a:prstGeom prst="ellipse">
-            <a:avLst/>
-          </a:prstGeom>
-          <a:solidFill>
-            <a:srgbClr val="F0AB00"/>
-          </a:solidFill>
-          <a:ln>
-            <a:noFill/>
           </a:ln>
           <a:effectLst/>
         </p:spPr>
@@ -22461,102 +22563,14 @@
       </p:sp>
       <p:sp>
         <p:nvSpPr>
-          <p:cNvPr id="10" name="Oval 9"/>
-          <p:cNvSpPr/>
-          <p:nvPr/>
-        </p:nvSpPr>
-        <p:spPr>
-          <a:xfrm>
-            <a:off x="3611880" y="1883664"/>
-            <a:ext cx="274320" cy="274320"/>
-          </a:xfrm>
-          <a:prstGeom prst="ellipse">
-            <a:avLst/>
-          </a:prstGeom>
-          <a:solidFill>
-            <a:srgbClr val="1C7293"/>
-          </a:solidFill>
-          <a:ln>
-            <a:noFill/>
-          </a:ln>
-          <a:effectLst/>
-        </p:spPr>
-        <p:style>
-          <a:lnRef idx="1">
-            <a:schemeClr val="accent1"/>
-          </a:lnRef>
-          <a:fillRef idx="3">
-            <a:schemeClr val="accent1"/>
-          </a:fillRef>
-          <a:effectRef idx="2">
-            <a:schemeClr val="accent1"/>
-          </a:effectRef>
-          <a:fontRef idx="minor">
-            <a:schemeClr val="lt1"/>
-          </a:fontRef>
-        </p:style>
-        <p:txBody>
-          <a:bodyPr rtlCol="0" anchor="ctr"/>
-          <a:lstStyle/>
-          <a:p>
-            <a:pPr algn="ctr"/>
-          </a:p>
-        </p:txBody>
-      </p:sp>
-      <p:sp>
-        <p:nvSpPr>
-          <p:cNvPr id="11" name="Oval 10"/>
-          <p:cNvSpPr/>
-          <p:nvPr/>
-        </p:nvSpPr>
-        <p:spPr>
-          <a:xfrm>
-            <a:off x="4114800" y="1920240"/>
-            <a:ext cx="219456" cy="219456"/>
-          </a:xfrm>
-          <a:prstGeom prst="ellipse">
-            <a:avLst/>
-          </a:prstGeom>
-          <a:solidFill>
-            <a:srgbClr val="E5EAF0"/>
-          </a:solidFill>
-          <a:ln>
-            <a:noFill/>
-          </a:ln>
-          <a:effectLst/>
-        </p:spPr>
-        <p:style>
-          <a:lnRef idx="1">
-            <a:schemeClr val="accent1"/>
-          </a:lnRef>
-          <a:fillRef idx="3">
-            <a:schemeClr val="accent1"/>
-          </a:fillRef>
-          <a:effectRef idx="2">
-            <a:schemeClr val="accent1"/>
-          </a:effectRef>
-          <a:fontRef idx="minor">
-            <a:schemeClr val="lt1"/>
-          </a:fontRef>
-        </p:style>
-        <p:txBody>
-          <a:bodyPr rtlCol="0" anchor="ctr"/>
-          <a:lstStyle/>
-          <a:p>
-            <a:pPr algn="ctr"/>
-          </a:p>
-        </p:txBody>
-      </p:sp>
-      <p:sp>
-        <p:nvSpPr>
-          <p:cNvPr id="12" name="TextBox 11"/>
+          <p:cNvPr id="10" name="TextBox 9"/>
           <p:cNvSpPr txBox="1"/>
           <p:nvPr/>
         </p:nvSpPr>
         <p:spPr>
           <a:xfrm>
-            <a:off x="777240" y="2432304"/>
-            <a:ext cx="3931920" cy="1463040"/>
+            <a:off x="8257032" y="1682496"/>
+            <a:ext cx="3337560" cy="530352"/>
           </a:xfrm>
           <a:prstGeom prst="rect">
             <a:avLst/>
@@ -22564,99 +22578,51 @@
           <a:noFill/>
         </p:spPr>
         <p:txBody>
-          <a:bodyPr wrap="square" lIns="0" rIns="0" tIns="0" bIns="0" anchor="t">
+          <a:bodyPr wrap="square" lIns="0" rIns="0" tIns="0" bIns="0" anchor="ctr">
             <a:spAutoFit/>
           </a:bodyPr>
           <a:lstStyle/>
           <a:p>
             <a:pPr algn="l">
               <a:lnSpc>
-                <a:spcPct val="115000"/>
+                <a:spcPct val="105000"/>
               </a:lnSpc>
             </a:pPr>
             <a:r>
+              <a:rPr sz="1350" b="1" i="0">
+                <a:solidFill>
+                  <a:srgbClr val="065A82"/>
+                </a:solidFill>
+                <a:latin typeface="Liberation Mono"/>
+              </a:rPr>
+              <a:t>Value</a:t>
+            </a:r>
+            <a:r>
               <a:rPr sz="1200" b="0" i="0">
                 <a:solidFill>
                   <a:srgbClr val="21295C"/>
                 </a:solidFill>
                 <a:latin typeface="Arial"/>
               </a:rPr>
-              <a:t>• Все токены контекста — предметы в комнате</a:t>
-            </a:r>
-          </a:p>
-          <a:p>
-            <a:pPr algn="l">
-              <a:lnSpc>
-                <a:spcPct val="115000"/>
-              </a:lnSpc>
-              <a:spcBef>
-                <a:spcPts val="400"/>
-              </a:spcBef>
-            </a:pPr>
-            <a:r>
-              <a:rPr sz="1200" b="0" i="0">
-                <a:solidFill>
-                  <a:srgbClr val="21295C"/>
-                </a:solidFill>
-                <a:latin typeface="Arial"/>
-              </a:rPr>
-              <a:t>• Луч направлен на релевантные текущему вопросу</a:t>
-            </a:r>
-          </a:p>
-          <a:p>
-            <a:pPr algn="l">
-              <a:lnSpc>
-                <a:spcPct val="115000"/>
-              </a:lnSpc>
-              <a:spcBef>
-                <a:spcPts val="400"/>
-              </a:spcBef>
-            </a:pPr>
-            <a:r>
-              <a:rPr sz="1200" b="0" i="0">
-                <a:solidFill>
-                  <a:srgbClr val="21295C"/>
-                </a:solidFill>
-                <a:latin typeface="Arial"/>
-              </a:rPr>
-              <a:t>• Яркость по предметам = веса внимания</a:t>
-            </a:r>
-          </a:p>
-          <a:p>
-            <a:pPr algn="l">
-              <a:lnSpc>
-                <a:spcPct val="115000"/>
-              </a:lnSpc>
-              <a:spcBef>
-                <a:spcPts val="400"/>
-              </a:spcBef>
-            </a:pPr>
-            <a:r>
-              <a:rPr sz="1200" b="0" i="0">
-                <a:solidFill>
-                  <a:srgbClr val="21295C"/>
-                </a:solidFill>
-                <a:latin typeface="Arial"/>
-              </a:rPr>
-              <a:t>• Распределение света меняется с каждым вопросом</a:t>
-            </a:r>
-          </a:p>
-        </p:txBody>
-      </p:sp>
-      <p:sp>
-        <p:nvSpPr>
-          <p:cNvPr id="13" name="Rounded Rectangle 12"/>
+              <a:t> — «что я отдам, если меня выбрали»</a:t>
+            </a:r>
+          </a:p>
+        </p:txBody>
+      </p:sp>
+      <p:sp>
+        <p:nvSpPr>
+          <p:cNvPr id="11" name="Rounded Rectangle 10"/>
           <p:cNvSpPr/>
           <p:nvPr/>
         </p:nvSpPr>
         <p:spPr>
           <a:xfrm>
-            <a:off x="5120640" y="1188720"/>
-            <a:ext cx="6583680" cy="2743200"/>
+            <a:off x="502920" y="2395728"/>
+            <a:ext cx="7223760" cy="3246120"/>
           </a:xfrm>
           <a:prstGeom prst="roundRect">
             <a:avLst>
-              <a:gd name="adj" fmla="val 11111"/>
+              <a:gd name="adj" fmla="val 9389"/>
             </a:avLst>
           </a:prstGeom>
           <a:solidFill>
@@ -22693,14 +22659,14 @@
       </p:sp>
       <p:sp>
         <p:nvSpPr>
-          <p:cNvPr id="14" name="TextBox 13"/>
+          <p:cNvPr id="12" name="TextBox 11"/>
           <p:cNvSpPr txBox="1"/>
           <p:nvPr/>
         </p:nvSpPr>
         <p:spPr>
           <a:xfrm>
-            <a:off x="5349240" y="1298448"/>
-            <a:ext cx="6126480" cy="320040"/>
+            <a:off x="777240" y="2523744"/>
+            <a:ext cx="6675120" cy="320040"/>
           </a:xfrm>
           <a:prstGeom prst="rect">
             <a:avLst/>
@@ -22732,7 +22698,7 @@
       </p:sp>
       <p:pic>
         <p:nvPicPr>
-          <p:cNvPr id="15" name="Picture 14" descr="s19-attention-weights.png"/>
+          <p:cNvPr id="13" name="Picture 12" descr="s19-attention-weights.png"/>
           <p:cNvPicPr>
             <a:picLocks noChangeAspect="1"/>
           </p:cNvPicPr>
@@ -22746,8 +22712,8 @@
         </p:blipFill>
         <p:spPr>
           <a:xfrm>
-            <a:off x="5806440" y="1664208"/>
-            <a:ext cx="5120640" cy="2194560"/>
+            <a:off x="914400" y="2944368"/>
+            <a:ext cx="6400800" cy="2612571"/>
           </a:xfrm>
           <a:prstGeom prst="rect">
             <a:avLst/>
@@ -22756,14 +22722,14 @@
       </p:pic>
       <p:sp>
         <p:nvSpPr>
-          <p:cNvPr id="16" name="Rounded Rectangle 15"/>
+          <p:cNvPr id="14" name="Rounded Rectangle 13"/>
           <p:cNvSpPr/>
           <p:nvPr/>
         </p:nvSpPr>
         <p:spPr>
           <a:xfrm>
-            <a:off x="502920" y="4114800"/>
-            <a:ext cx="3611880" cy="566928"/>
+            <a:off x="7909560" y="2395728"/>
+            <a:ext cx="3794760" cy="960120"/>
           </a:xfrm>
           <a:prstGeom prst="roundRect">
             <a:avLst>
@@ -22804,14 +22770,14 @@
       </p:sp>
       <p:sp>
         <p:nvSpPr>
-          <p:cNvPr id="17" name="TextBox 16"/>
+          <p:cNvPr id="15" name="TextBox 14"/>
           <p:cNvSpPr txBox="1"/>
           <p:nvPr/>
         </p:nvSpPr>
         <p:spPr>
           <a:xfrm>
-            <a:off x="667512" y="4114800"/>
-            <a:ext cx="3383280" cy="566928"/>
+            <a:off x="8092440" y="2395728"/>
+            <a:ext cx="3474720" cy="960120"/>
           </a:xfrm>
           <a:prstGeom prst="rect">
             <a:avLst/>
@@ -22826,11 +22792,11 @@
           <a:p>
             <a:pPr algn="l">
               <a:lnSpc>
-                <a:spcPct val="110000"/>
+                <a:spcPct val="112000"/>
               </a:lnSpc>
             </a:pPr>
             <a:r>
-              <a:rPr sz="1350" b="1" i="0">
+              <a:rPr sz="1400" b="1" i="0">
                 <a:solidFill>
                   <a:srgbClr val="028090"/>
                 </a:solidFill>
@@ -22839,7 +22805,7 @@
               <a:t>1.  </a:t>
             </a:r>
             <a:r>
-              <a:rPr sz="1200" b="0" i="0">
+              <a:rPr sz="1250" b="0" i="0">
                 <a:solidFill>
                   <a:srgbClr val="21295C"/>
                 </a:solidFill>
@@ -22852,14 +22818,14 @@
       </p:sp>
       <p:sp>
         <p:nvSpPr>
-          <p:cNvPr id="18" name="Rounded Rectangle 17"/>
+          <p:cNvPr id="16" name="Rounded Rectangle 15"/>
           <p:cNvSpPr/>
           <p:nvPr/>
         </p:nvSpPr>
         <p:spPr>
           <a:xfrm>
-            <a:off x="4297680" y="4114800"/>
-            <a:ext cx="3611880" cy="566928"/>
+            <a:off x="7909560" y="3538728"/>
+            <a:ext cx="3794760" cy="960120"/>
           </a:xfrm>
           <a:prstGeom prst="roundRect">
             <a:avLst>
@@ -22900,14 +22866,14 @@
       </p:sp>
       <p:sp>
         <p:nvSpPr>
-          <p:cNvPr id="19" name="TextBox 18"/>
+          <p:cNvPr id="17" name="TextBox 16"/>
           <p:cNvSpPr txBox="1"/>
           <p:nvPr/>
         </p:nvSpPr>
         <p:spPr>
           <a:xfrm>
-            <a:off x="4462272" y="4114800"/>
-            <a:ext cx="3383280" cy="566928"/>
+            <a:off x="8092440" y="3538728"/>
+            <a:ext cx="3474720" cy="960120"/>
           </a:xfrm>
           <a:prstGeom prst="rect">
             <a:avLst/>
@@ -22922,11 +22888,11 @@
           <a:p>
             <a:pPr algn="l">
               <a:lnSpc>
-                <a:spcPct val="110000"/>
+                <a:spcPct val="112000"/>
               </a:lnSpc>
             </a:pPr>
             <a:r>
-              <a:rPr sz="1350" b="1" i="0">
+              <a:rPr sz="1400" b="1" i="0">
                 <a:solidFill>
                   <a:srgbClr val="028090"/>
                 </a:solidFill>
@@ -22935,7 +22901,7 @@
               <a:t>2.  </a:t>
             </a:r>
             <a:r>
-              <a:rPr sz="1200" b="0" i="0">
+              <a:rPr sz="1250" b="0" i="0">
                 <a:solidFill>
                   <a:srgbClr val="21295C"/>
                 </a:solidFill>
@@ -22948,14 +22914,14 @@
       </p:sp>
       <p:sp>
         <p:nvSpPr>
-          <p:cNvPr id="20" name="Rounded Rectangle 19"/>
+          <p:cNvPr id="18" name="Rounded Rectangle 17"/>
           <p:cNvSpPr/>
           <p:nvPr/>
         </p:nvSpPr>
         <p:spPr>
           <a:xfrm>
-            <a:off x="8092440" y="4114800"/>
-            <a:ext cx="3611880" cy="566928"/>
+            <a:off x="7909560" y="4681728"/>
+            <a:ext cx="3794760" cy="960120"/>
           </a:xfrm>
           <a:prstGeom prst="roundRect">
             <a:avLst>
@@ -22996,14 +22962,14 @@
       </p:sp>
       <p:sp>
         <p:nvSpPr>
-          <p:cNvPr id="21" name="TextBox 20"/>
+          <p:cNvPr id="19" name="TextBox 18"/>
           <p:cNvSpPr txBox="1"/>
           <p:nvPr/>
         </p:nvSpPr>
         <p:spPr>
           <a:xfrm>
-            <a:off x="8257032" y="4114800"/>
-            <a:ext cx="3383280" cy="566928"/>
+            <a:off x="8092440" y="4681728"/>
+            <a:ext cx="3474720" cy="960120"/>
           </a:xfrm>
           <a:prstGeom prst="rect">
             <a:avLst/>
@@ -23018,11 +22984,11 @@
           <a:p>
             <a:pPr algn="l">
               <a:lnSpc>
-                <a:spcPct val="110000"/>
+                <a:spcPct val="112000"/>
               </a:lnSpc>
             </a:pPr>
             <a:r>
-              <a:rPr sz="1350" b="1" i="0">
+              <a:rPr sz="1400" b="1" i="0">
                 <a:solidFill>
                   <a:srgbClr val="028090"/>
                 </a:solidFill>
@@ -23031,7 +22997,7 @@
               <a:t>3.  </a:t>
             </a:r>
             <a:r>
-              <a:rPr sz="1200" b="0" i="0">
+              <a:rPr sz="1250" b="0" i="0">
                 <a:solidFill>
                   <a:srgbClr val="21295C"/>
                 </a:solidFill>
@@ -23044,14 +23010,14 @@
       </p:sp>
       <p:sp>
         <p:nvSpPr>
-          <p:cNvPr id="22" name="TextBox 21"/>
+          <p:cNvPr id="20" name="TextBox 19"/>
           <p:cNvSpPr txBox="1"/>
           <p:nvPr/>
         </p:nvSpPr>
         <p:spPr>
           <a:xfrm>
-            <a:off x="502920" y="4892040"/>
-            <a:ext cx="11247120" cy="365760"/>
+            <a:off x="502920" y="5852160"/>
+            <a:ext cx="11247120" cy="411480"/>
           </a:xfrm>
           <a:prstGeom prst="rect">
             <a:avLst/>
@@ -23064,401 +23030,26 @@
           </a:bodyPr>
           <a:lstStyle/>
           <a:p>
-            <a:pPr algn="l">
+            <a:pPr algn="ctr">
               <a:lnSpc>
                 <a:spcPct val="115000"/>
               </a:lnSpc>
             </a:pPr>
             <a:r>
-              <a:rPr sz="1400" b="1" i="0">
-                <a:solidFill>
-                  <a:srgbClr val="21295C"/>
-                </a:solidFill>
-                <a:latin typeface="Arial"/>
-              </a:rPr>
-              <a:t>Технически — три проекции каждого токена:</a:t>
-            </a:r>
-          </a:p>
-        </p:txBody>
-      </p:sp>
-      <p:sp>
-        <p:nvSpPr>
-          <p:cNvPr id="23" name="Rounded Rectangle 22"/>
-          <p:cNvSpPr/>
-          <p:nvPr/>
-        </p:nvSpPr>
-        <p:spPr>
-          <a:xfrm>
-            <a:off x="502920" y="5285232"/>
-            <a:ext cx="3611880" cy="530352"/>
-          </a:xfrm>
-          <a:prstGeom prst="roundRect">
-            <a:avLst>
-              <a:gd name="adj" fmla="val 25000"/>
-            </a:avLst>
-          </a:prstGeom>
-          <a:solidFill>
-            <a:srgbClr val="F4F7FA"/>
-          </a:solidFill>
-          <a:ln w="15240">
-            <a:solidFill>
-              <a:srgbClr val="1C7293"/>
-            </a:solidFill>
-          </a:ln>
-          <a:effectLst/>
-        </p:spPr>
-        <p:style>
-          <a:lnRef idx="1">
-            <a:schemeClr val="accent1"/>
-          </a:lnRef>
-          <a:fillRef idx="3">
-            <a:schemeClr val="accent1"/>
-          </a:fillRef>
-          <a:effectRef idx="2">
-            <a:schemeClr val="accent1"/>
-          </a:effectRef>
-          <a:fontRef idx="minor">
-            <a:schemeClr val="lt1"/>
-          </a:fontRef>
-        </p:style>
-        <p:txBody>
-          <a:bodyPr rtlCol="0" anchor="ctr"/>
-          <a:lstStyle/>
-          <a:p>
-            <a:pPr algn="ctr"/>
-          </a:p>
-        </p:txBody>
-      </p:sp>
-      <p:sp>
-        <p:nvSpPr>
-          <p:cNvPr id="24" name="TextBox 23"/>
-          <p:cNvSpPr txBox="1"/>
-          <p:nvPr/>
-        </p:nvSpPr>
-        <p:spPr>
-          <a:xfrm>
-            <a:off x="667512" y="5285232"/>
-            <a:ext cx="3337560" cy="530352"/>
-          </a:xfrm>
-          <a:prstGeom prst="rect">
-            <a:avLst/>
-          </a:prstGeom>
-          <a:noFill/>
-        </p:spPr>
-        <p:txBody>
-          <a:bodyPr wrap="square" lIns="0" rIns="0" tIns="0" bIns="0" anchor="ctr">
-            <a:spAutoFit/>
-          </a:bodyPr>
-          <a:lstStyle/>
-          <a:p>
-            <a:pPr algn="l">
-              <a:lnSpc>
-                <a:spcPct val="105000"/>
-              </a:lnSpc>
-            </a:pPr>
-            <a:r>
-              <a:rPr sz="1350" b="1" i="0">
-                <a:solidFill>
-                  <a:srgbClr val="065A82"/>
-                </a:solidFill>
-                <a:latin typeface="Liberation Mono"/>
-              </a:rPr>
-              <a:t>Query</a:t>
-            </a:r>
-            <a:r>
-              <a:rPr sz="1200" b="0" i="0">
-                <a:solidFill>
-                  <a:srgbClr val="21295C"/>
-                </a:solidFill>
-                <a:latin typeface="Arial"/>
-              </a:rPr>
-              <a:t> — «что я сейчас ищу»</a:t>
-            </a:r>
-          </a:p>
-        </p:txBody>
-      </p:sp>
-      <p:sp>
-        <p:nvSpPr>
-          <p:cNvPr id="25" name="Rounded Rectangle 24"/>
-          <p:cNvSpPr/>
-          <p:nvPr/>
-        </p:nvSpPr>
-        <p:spPr>
-          <a:xfrm>
-            <a:off x="4297680" y="5285232"/>
-            <a:ext cx="3611880" cy="530352"/>
-          </a:xfrm>
-          <a:prstGeom prst="roundRect">
-            <a:avLst>
-              <a:gd name="adj" fmla="val 25000"/>
-            </a:avLst>
-          </a:prstGeom>
-          <a:solidFill>
-            <a:srgbClr val="F4F7FA"/>
-          </a:solidFill>
-          <a:ln w="15240">
-            <a:solidFill>
-              <a:srgbClr val="1C7293"/>
-            </a:solidFill>
-          </a:ln>
-          <a:effectLst/>
-        </p:spPr>
-        <p:style>
-          <a:lnRef idx="1">
-            <a:schemeClr val="accent1"/>
-          </a:lnRef>
-          <a:fillRef idx="3">
-            <a:schemeClr val="accent1"/>
-          </a:fillRef>
-          <a:effectRef idx="2">
-            <a:schemeClr val="accent1"/>
-          </a:effectRef>
-          <a:fontRef idx="minor">
-            <a:schemeClr val="lt1"/>
-          </a:fontRef>
-        </p:style>
-        <p:txBody>
-          <a:bodyPr rtlCol="0" anchor="ctr"/>
-          <a:lstStyle/>
-          <a:p>
-            <a:pPr algn="ctr"/>
-          </a:p>
-        </p:txBody>
-      </p:sp>
-      <p:sp>
-        <p:nvSpPr>
-          <p:cNvPr id="26" name="TextBox 25"/>
-          <p:cNvSpPr txBox="1"/>
-          <p:nvPr/>
-        </p:nvSpPr>
-        <p:spPr>
-          <a:xfrm>
-            <a:off x="4462272" y="5285232"/>
-            <a:ext cx="3337560" cy="530352"/>
-          </a:xfrm>
-          <a:prstGeom prst="rect">
-            <a:avLst/>
-          </a:prstGeom>
-          <a:noFill/>
-        </p:spPr>
-        <p:txBody>
-          <a:bodyPr wrap="square" lIns="0" rIns="0" tIns="0" bIns="0" anchor="ctr">
-            <a:spAutoFit/>
-          </a:bodyPr>
-          <a:lstStyle/>
-          <a:p>
-            <a:pPr algn="l">
-              <a:lnSpc>
-                <a:spcPct val="105000"/>
-              </a:lnSpc>
-            </a:pPr>
-            <a:r>
-              <a:rPr sz="1350" b="1" i="0">
-                <a:solidFill>
-                  <a:srgbClr val="065A82"/>
-                </a:solidFill>
-                <a:latin typeface="Liberation Mono"/>
-              </a:rPr>
-              <a:t>Key</a:t>
-            </a:r>
-            <a:r>
-              <a:rPr sz="1200" b="0" i="0">
-                <a:solidFill>
-                  <a:srgbClr val="21295C"/>
-                </a:solidFill>
-                <a:latin typeface="Arial"/>
-              </a:rPr>
-              <a:t> — «что я предлагаю»</a:t>
-            </a:r>
-          </a:p>
-        </p:txBody>
-      </p:sp>
-      <p:sp>
-        <p:nvSpPr>
-          <p:cNvPr id="27" name="Rounded Rectangle 26"/>
-          <p:cNvSpPr/>
-          <p:nvPr/>
-        </p:nvSpPr>
-        <p:spPr>
-          <a:xfrm>
-            <a:off x="8092440" y="5285232"/>
-            <a:ext cx="3611880" cy="530352"/>
-          </a:xfrm>
-          <a:prstGeom prst="roundRect">
-            <a:avLst>
-              <a:gd name="adj" fmla="val 25000"/>
-            </a:avLst>
-          </a:prstGeom>
-          <a:solidFill>
-            <a:srgbClr val="F4F7FA"/>
-          </a:solidFill>
-          <a:ln w="15240">
-            <a:solidFill>
-              <a:srgbClr val="1C7293"/>
-            </a:solidFill>
-          </a:ln>
-          <a:effectLst/>
-        </p:spPr>
-        <p:style>
-          <a:lnRef idx="1">
-            <a:schemeClr val="accent1"/>
-          </a:lnRef>
-          <a:fillRef idx="3">
-            <a:schemeClr val="accent1"/>
-          </a:fillRef>
-          <a:effectRef idx="2">
-            <a:schemeClr val="accent1"/>
-          </a:effectRef>
-          <a:fontRef idx="minor">
-            <a:schemeClr val="lt1"/>
-          </a:fontRef>
-        </p:style>
-        <p:txBody>
-          <a:bodyPr rtlCol="0" anchor="ctr"/>
-          <a:lstStyle/>
-          <a:p>
-            <a:pPr algn="ctr"/>
-          </a:p>
-        </p:txBody>
-      </p:sp>
-      <p:sp>
-        <p:nvSpPr>
-          <p:cNvPr id="28" name="TextBox 27"/>
-          <p:cNvSpPr txBox="1"/>
-          <p:nvPr/>
-        </p:nvSpPr>
-        <p:spPr>
-          <a:xfrm>
-            <a:off x="8257032" y="5285232"/>
-            <a:ext cx="3337560" cy="530352"/>
-          </a:xfrm>
-          <a:prstGeom prst="rect">
-            <a:avLst/>
-          </a:prstGeom>
-          <a:noFill/>
-        </p:spPr>
-        <p:txBody>
-          <a:bodyPr wrap="square" lIns="0" rIns="0" tIns="0" bIns="0" anchor="ctr">
-            <a:spAutoFit/>
-          </a:bodyPr>
-          <a:lstStyle/>
-          <a:p>
-            <a:pPr algn="l">
-              <a:lnSpc>
-                <a:spcPct val="105000"/>
-              </a:lnSpc>
-            </a:pPr>
-            <a:r>
-              <a:rPr sz="1350" b="1" i="0">
-                <a:solidFill>
-                  <a:srgbClr val="065A82"/>
-                </a:solidFill>
-                <a:latin typeface="Liberation Mono"/>
-              </a:rPr>
-              <a:t>Value</a:t>
-            </a:r>
-            <a:r>
-              <a:rPr sz="1200" b="0" i="0">
-                <a:solidFill>
-                  <a:srgbClr val="21295C"/>
-                </a:solidFill>
-                <a:latin typeface="Arial"/>
-              </a:rPr>
-              <a:t> — «что я отдам, если меня выбрали»</a:t>
-            </a:r>
-          </a:p>
-        </p:txBody>
-      </p:sp>
-      <p:sp>
-        <p:nvSpPr>
-          <p:cNvPr id="29" name="Rounded Rectangle 28"/>
-          <p:cNvSpPr/>
-          <p:nvPr/>
-        </p:nvSpPr>
-        <p:spPr>
-          <a:xfrm>
-            <a:off x="502920" y="5989320"/>
-            <a:ext cx="11201400" cy="566928"/>
-          </a:xfrm>
-          <a:prstGeom prst="roundRect">
-            <a:avLst>
-              <a:gd name="adj" fmla="val 12000"/>
-            </a:avLst>
-          </a:prstGeom>
-          <a:solidFill>
-            <a:srgbClr val="FEF5E0"/>
-          </a:solidFill>
-          <a:ln w="15240">
-            <a:solidFill>
-              <a:srgbClr val="F0AB00"/>
-            </a:solidFill>
-          </a:ln>
-          <a:effectLst/>
-        </p:spPr>
-        <p:style>
-          <a:lnRef idx="1">
-            <a:schemeClr val="accent1"/>
-          </a:lnRef>
-          <a:fillRef idx="3">
-            <a:schemeClr val="accent1"/>
-          </a:fillRef>
-          <a:effectRef idx="2">
-            <a:schemeClr val="accent1"/>
-          </a:effectRef>
-          <a:fontRef idx="minor">
-            <a:schemeClr val="lt1"/>
-          </a:fontRef>
-        </p:style>
-        <p:txBody>
-          <a:bodyPr rtlCol="0" anchor="ctr"/>
-          <a:lstStyle/>
-          <a:p>
-            <a:pPr algn="ctr"/>
-          </a:p>
-        </p:txBody>
-      </p:sp>
-      <p:sp>
-        <p:nvSpPr>
-          <p:cNvPr id="30" name="TextBox 29"/>
-          <p:cNvSpPr txBox="1"/>
-          <p:nvPr/>
-        </p:nvSpPr>
-        <p:spPr>
-          <a:xfrm>
-            <a:off x="685800" y="6044183"/>
-            <a:ext cx="10835640" cy="457200"/>
-          </a:xfrm>
-          <a:prstGeom prst="rect">
-            <a:avLst/>
-          </a:prstGeom>
-          <a:noFill/>
-        </p:spPr>
-        <p:txBody>
-          <a:bodyPr wrap="square" lIns="0" rIns="0" tIns="0" bIns="0" anchor="ctr">
-            <a:spAutoFit/>
-          </a:bodyPr>
-          <a:lstStyle/>
-          <a:p>
-            <a:pPr algn="ctr">
-              <a:lnSpc>
-                <a:spcPct val="122000"/>
-              </a:lnSpc>
-            </a:pPr>
-            <a:r>
-              <a:rPr sz="1550" b="1" i="0">
-                <a:solidFill>
-                  <a:srgbClr val="21295C"/>
-                </a:solidFill>
-                <a:latin typeface="Arial"/>
-              </a:rPr>
-              <a:t>Q — про текущий шаг. K и V — про уже обработанный контекст.</a:t>
-            </a:r>
-          </a:p>
-        </p:txBody>
-      </p:sp>
-      <p:sp>
-        <p:nvSpPr>
-          <p:cNvPr id="31" name="TextBox 30"/>
+              <a:rPr sz="1250" b="0" i="1">
+                <a:solidFill>
+                  <a:srgbClr val="1C7293"/>
+                </a:solidFill>
+                <a:latin typeface="Arial"/>
+              </a:rPr>
+              <a:t>Метафора: фонарик в тёмной комнате — луч направлен на релевантные токены, яркость света = вес внимания.</a:t>
+            </a:r>
+          </a:p>
+        </p:txBody>
+      </p:sp>
+      <p:sp>
+        <p:nvSpPr>
+          <p:cNvPr id="21" name="TextBox 20"/>
           <p:cNvSpPr txBox="1"/>
           <p:nvPr/>
         </p:nvSpPr>
@@ -30831,8 +30422,8 @@
         </p:nvSpPr>
         <p:spPr>
           <a:xfrm>
-            <a:off x="563727" y="1234440"/>
-            <a:ext cx="11064240" cy="768096"/>
+            <a:off x="563727" y="1115568"/>
+            <a:ext cx="11064240" cy="731520"/>
           </a:xfrm>
           <a:prstGeom prst="roundRect">
             <a:avLst>
@@ -30879,8 +30470,8 @@
         </p:nvSpPr>
         <p:spPr>
           <a:xfrm>
-            <a:off x="792327" y="1234440"/>
-            <a:ext cx="548640" cy="768096"/>
+            <a:off x="792327" y="1115568"/>
+            <a:ext cx="548640" cy="731520"/>
           </a:xfrm>
           <a:prstGeom prst="rect">
             <a:avLst/>
@@ -30918,8 +30509,8 @@
         </p:nvSpPr>
         <p:spPr>
           <a:xfrm>
-            <a:off x="1523847" y="1234440"/>
-            <a:ext cx="8321040" cy="768096"/>
+            <a:off x="1523847" y="1115568"/>
+            <a:ext cx="8321040" cy="731520"/>
           </a:xfrm>
           <a:prstGeom prst="rect">
             <a:avLst/>
@@ -30966,8 +30557,8 @@
         </p:nvSpPr>
         <p:spPr>
           <a:xfrm>
-            <a:off x="563727" y="2112264"/>
-            <a:ext cx="11064240" cy="768096"/>
+            <a:off x="563727" y="1956816"/>
+            <a:ext cx="11064240" cy="731520"/>
           </a:xfrm>
           <a:prstGeom prst="roundRect">
             <a:avLst>
@@ -31014,8 +30605,8 @@
         </p:nvSpPr>
         <p:spPr>
           <a:xfrm>
-            <a:off x="792327" y="2112264"/>
-            <a:ext cx="548640" cy="768096"/>
+            <a:off x="792327" y="1956816"/>
+            <a:ext cx="548640" cy="731520"/>
           </a:xfrm>
           <a:prstGeom prst="rect">
             <a:avLst/>
@@ -31053,8 +30644,8 @@
         </p:nvSpPr>
         <p:spPr>
           <a:xfrm>
-            <a:off x="1523847" y="2112264"/>
-            <a:ext cx="8321040" cy="768096"/>
+            <a:off x="1523847" y="1956816"/>
+            <a:ext cx="8321040" cy="731520"/>
           </a:xfrm>
           <a:prstGeom prst="rect">
             <a:avLst/>
@@ -31101,7 +30692,7 @@
         </p:nvSpPr>
         <p:spPr>
           <a:xfrm>
-            <a:off x="10265511" y="2350008"/>
+            <a:off x="10265511" y="2176272"/>
             <a:ext cx="493776" cy="292608"/>
           </a:xfrm>
           <a:prstGeom prst="roundRect">
@@ -31158,7 +30749,7 @@
         </p:nvSpPr>
         <p:spPr>
           <a:xfrm>
-            <a:off x="10832439" y="2350008"/>
+            <a:off x="10832439" y="2176272"/>
             <a:ext cx="493776" cy="292608"/>
           </a:xfrm>
           <a:prstGeom prst="roundRect">
@@ -31215,8 +30806,8 @@
         </p:nvSpPr>
         <p:spPr>
           <a:xfrm>
-            <a:off x="563727" y="2990088"/>
-            <a:ext cx="11064240" cy="768096"/>
+            <a:off x="563727" y="2798064"/>
+            <a:ext cx="11064240" cy="731520"/>
           </a:xfrm>
           <a:prstGeom prst="roundRect">
             <a:avLst>
@@ -31263,8 +30854,8 @@
         </p:nvSpPr>
         <p:spPr>
           <a:xfrm>
-            <a:off x="792327" y="2990088"/>
-            <a:ext cx="548640" cy="768096"/>
+            <a:off x="792327" y="2798064"/>
+            <a:ext cx="548640" cy="731520"/>
           </a:xfrm>
           <a:prstGeom prst="rect">
             <a:avLst/>
@@ -31302,8 +30893,8 @@
         </p:nvSpPr>
         <p:spPr>
           <a:xfrm>
-            <a:off x="1523847" y="2990088"/>
-            <a:ext cx="8321040" cy="768096"/>
+            <a:off x="1523847" y="2798064"/>
+            <a:ext cx="8321040" cy="731520"/>
           </a:xfrm>
           <a:prstGeom prst="rect">
             <a:avLst/>
@@ -31350,8 +30941,8 @@
         </p:nvSpPr>
         <p:spPr>
           <a:xfrm>
-            <a:off x="563727" y="3867912"/>
-            <a:ext cx="11064240" cy="768096"/>
+            <a:off x="563727" y="3639312"/>
+            <a:ext cx="11064240" cy="731520"/>
           </a:xfrm>
           <a:prstGeom prst="roundRect">
             <a:avLst>
@@ -31398,8 +30989,8 @@
         </p:nvSpPr>
         <p:spPr>
           <a:xfrm>
-            <a:off x="792327" y="3867912"/>
-            <a:ext cx="548640" cy="768096"/>
+            <a:off x="792327" y="3639312"/>
+            <a:ext cx="548640" cy="731520"/>
           </a:xfrm>
           <a:prstGeom prst="rect">
             <a:avLst/>
@@ -31437,8 +31028,8 @@
         </p:nvSpPr>
         <p:spPr>
           <a:xfrm>
-            <a:off x="1523847" y="3867912"/>
-            <a:ext cx="8321040" cy="768096"/>
+            <a:off x="1523847" y="3639312"/>
+            <a:ext cx="8321040" cy="731520"/>
           </a:xfrm>
           <a:prstGeom prst="rect">
             <a:avLst/>
@@ -31485,7 +31076,7 @@
         </p:nvSpPr>
         <p:spPr>
           <a:xfrm>
-            <a:off x="10265511" y="4105656"/>
+            <a:off x="10265511" y="3858768"/>
             <a:ext cx="493776" cy="292608"/>
           </a:xfrm>
           <a:prstGeom prst="roundRect">
@@ -31542,7 +31133,7 @@
         </p:nvSpPr>
         <p:spPr>
           <a:xfrm>
-            <a:off x="10832439" y="4105656"/>
+            <a:off x="10832439" y="3858768"/>
             <a:ext cx="493776" cy="292608"/>
           </a:xfrm>
           <a:prstGeom prst="roundRect">
@@ -31599,8 +31190,8 @@
         </p:nvSpPr>
         <p:spPr>
           <a:xfrm>
-            <a:off x="563727" y="4745736"/>
-            <a:ext cx="11064240" cy="768096"/>
+            <a:off x="563727" y="4480560"/>
+            <a:ext cx="11064240" cy="731520"/>
           </a:xfrm>
           <a:prstGeom prst="roundRect">
             <a:avLst>
@@ -31647,8 +31238,8 @@
         </p:nvSpPr>
         <p:spPr>
           <a:xfrm>
-            <a:off x="792327" y="4745736"/>
-            <a:ext cx="548640" cy="768096"/>
+            <a:off x="792327" y="4480560"/>
+            <a:ext cx="548640" cy="731520"/>
           </a:xfrm>
           <a:prstGeom prst="rect">
             <a:avLst/>
@@ -31686,8 +31277,8 @@
         </p:nvSpPr>
         <p:spPr>
           <a:xfrm>
-            <a:off x="1523847" y="4745736"/>
-            <a:ext cx="8321040" cy="768096"/>
+            <a:off x="1523847" y="4480560"/>
+            <a:ext cx="8321040" cy="731520"/>
           </a:xfrm>
           <a:prstGeom prst="rect">
             <a:avLst/>
@@ -31734,7 +31325,7 @@
         </p:nvSpPr>
         <p:spPr>
           <a:xfrm>
-            <a:off x="10265511" y="4983480"/>
+            <a:off x="10265511" y="4700016"/>
             <a:ext cx="493776" cy="292608"/>
           </a:xfrm>
           <a:prstGeom prst="roundRect">
@@ -31791,7 +31382,7 @@
         </p:nvSpPr>
         <p:spPr>
           <a:xfrm>
-            <a:off x="10832439" y="4983480"/>
+            <a:off x="10832439" y="4700016"/>
             <a:ext cx="493776" cy="292608"/>
           </a:xfrm>
           <a:prstGeom prst="roundRect">
@@ -31848,8 +31439,8 @@
         </p:nvSpPr>
         <p:spPr>
           <a:xfrm>
-            <a:off x="563727" y="5623560"/>
-            <a:ext cx="11064240" cy="768096"/>
+            <a:off x="563727" y="5321808"/>
+            <a:ext cx="11064240" cy="731520"/>
           </a:xfrm>
           <a:prstGeom prst="roundRect">
             <a:avLst>
@@ -31896,8 +31487,8 @@
         </p:nvSpPr>
         <p:spPr>
           <a:xfrm>
-            <a:off x="792327" y="5623560"/>
-            <a:ext cx="548640" cy="768096"/>
+            <a:off x="792327" y="5321808"/>
+            <a:ext cx="548640" cy="731520"/>
           </a:xfrm>
           <a:prstGeom prst="rect">
             <a:avLst/>
@@ -31935,8 +31526,8 @@
         </p:nvSpPr>
         <p:spPr>
           <a:xfrm>
-            <a:off x="1523847" y="5623560"/>
-            <a:ext cx="8321040" cy="768096"/>
+            <a:off x="1523847" y="5321808"/>
+            <a:ext cx="8321040" cy="731520"/>
           </a:xfrm>
           <a:prstGeom prst="rect">
             <a:avLst/>
@@ -31983,7 +31574,7 @@
         </p:nvSpPr>
         <p:spPr>
           <a:xfrm>
-            <a:off x="10832439" y="5861304"/>
+            <a:off x="10832439" y="5541264"/>
             <a:ext cx="493776" cy="292608"/>
           </a:xfrm>
           <a:prstGeom prst="roundRect">
@@ -32035,6 +31626,45 @@
       <p:sp>
         <p:nvSpPr>
           <p:cNvPr id="28" name="TextBox 27"/>
+          <p:cNvSpPr txBox="1"/>
+          <p:nvPr/>
+        </p:nvSpPr>
+        <p:spPr>
+          <a:xfrm>
+            <a:off x="563727" y="6181344"/>
+            <a:ext cx="11064240" cy="274320"/>
+          </a:xfrm>
+          <a:prstGeom prst="rect">
+            <a:avLst/>
+          </a:prstGeom>
+          <a:noFill/>
+        </p:spPr>
+        <p:txBody>
+          <a:bodyPr wrap="square" lIns="0" rIns="0" tIns="0" bIns="0" anchor="t">
+            <a:spAutoFit/>
+          </a:bodyPr>
+          <a:lstStyle/>
+          <a:p>
+            <a:pPr algn="r">
+              <a:lnSpc>
+                <a:spcPct val="115000"/>
+              </a:lnSpc>
+            </a:pPr>
+            <a:r>
+              <a:rPr sz="1100" b="0" i="1">
+                <a:solidFill>
+                  <a:srgbClr val="6B7685"/>
+                </a:solidFill>
+                <a:latin typeface="Arial"/>
+              </a:rPr>
+              <a:t>M1–M6 — шесть утверждений чек-листа</a:t>
+            </a:r>
+          </a:p>
+        </p:txBody>
+      </p:sp>
+      <p:sp>
+        <p:nvSpPr>
+          <p:cNvPr id="29" name="TextBox 28"/>
           <p:cNvSpPr txBox="1"/>
           <p:nvPr/>
         </p:nvSpPr>
@@ -34928,8 +34558,8 @@
         </p:nvSpPr>
         <p:spPr>
           <a:xfrm>
-            <a:off x="777240" y="2788920"/>
-            <a:ext cx="3611880" cy="1188720"/>
+            <a:off x="777240" y="2697480"/>
+            <a:ext cx="3611880" cy="1325880"/>
           </a:xfrm>
           <a:prstGeom prst="rect">
             <a:avLst/>
@@ -34944,17 +34574,17 @@
           <a:p>
             <a:pPr algn="ctr">
               <a:lnSpc>
-                <a:spcPct val="120000"/>
+                <a:spcPct val="118000"/>
               </a:lnSpc>
             </a:pPr>
             <a:r>
-              <a:rPr sz="1250" b="0" i="0">
+              <a:rPr sz="1200" b="0" i="0">
                 <a:solidFill>
                   <a:srgbClr val="21295C"/>
                 </a:solidFill>
                 <a:latin typeface="Arial"/>
               </a:rPr>
-              <a:t>уникальных вариантов ответа на идентичный запрос при T=0 — стандартный vLLM (Thinking Machines Lab, сентябрь 2025)</a:t>
+              <a:t>уникальных вариантов ответа на идентичный запрос при T=0 — стандартный vLLM (открытый инференс-сервер; Thinking Machines Lab, сентябрь 2025)</a:t>
             </a:r>
           </a:p>
         </p:txBody>
@@ -40546,8 +40176,8 @@
         </p:nvSpPr>
         <p:spPr>
           <a:xfrm>
-            <a:off x="731520" y="1664208"/>
-            <a:ext cx="3154680" cy="685800"/>
+            <a:off x="640080" y="1664208"/>
+            <a:ext cx="3429000" cy="685800"/>
           </a:xfrm>
           <a:prstGeom prst="rect">
             <a:avLst/>
@@ -40566,13 +40196,13 @@
               </a:lnSpc>
             </a:pPr>
             <a:r>
-              <a:rPr sz="1500" b="1" i="0">
+              <a:rPr sz="1350" b="1" i="0">
                 <a:solidFill>
                   <a:srgbClr val="065A82"/>
                 </a:solidFill>
                 <a:latin typeface="Arial"/>
               </a:rPr>
-              <a:t>Действительно локальные (≤ ~30B)</a:t>
+              <a:t>Действительно локальные — до ~30B</a:t>
             </a:r>
           </a:p>
         </p:txBody>
@@ -40765,8 +40395,8 @@
         </p:nvSpPr>
         <p:spPr>
           <a:xfrm>
-            <a:off x="4526280" y="1664208"/>
-            <a:ext cx="3154680" cy="685800"/>
+            <a:off x="4434840" y="1664208"/>
+            <a:ext cx="3429000" cy="685800"/>
           </a:xfrm>
           <a:prstGeom prst="rect">
             <a:avLst/>
@@ -40929,8 +40559,8 @@
         </p:nvSpPr>
         <p:spPr>
           <a:xfrm>
-            <a:off x="8321040" y="1664208"/>
-            <a:ext cx="3154680" cy="685800"/>
+            <a:off x="8229600" y="1664208"/>
+            <a:ext cx="3429000" cy="685800"/>
           </a:xfrm>
           <a:prstGeom prst="rect">
             <a:avLst/>
@@ -45324,7 +44954,7 @@
         <p:spPr>
           <a:xfrm>
             <a:off x="1325880" y="1865376"/>
-            <a:ext cx="10058400" cy="777240"/>
+            <a:ext cx="7498079" cy="777240"/>
           </a:xfrm>
           <a:prstGeom prst="rect">
             <a:avLst/>
@@ -45349,50 +44979,128 @@
                 </a:solidFill>
                 <a:latin typeface="Arial"/>
               </a:rPr>
-              <a:t>SWE-bench </a:t>
+              <a:t>SWE-bench: публичные репозитории (Verified) vs приватные базы (Pro) — </a:t>
             </a:r>
             <a:r>
               <a:rPr sz="1250" b="1" i="0">
                 <a:solidFill>
+                  <a:srgbClr val="21295C"/>
+                </a:solidFill>
+                <a:latin typeface="Arial"/>
+              </a:rPr>
+              <a:t>разрыв и есть величина заучивания.</a:t>
+            </a:r>
+            <a:r>
+              <a:rPr sz="1250" b="0" i="0">
+                <a:solidFill>
+                  <a:srgbClr val="21295C"/>
+                </a:solidFill>
+                <a:latin typeface="Arial"/>
+              </a:rPr>
+              <a:t> OpenAI в 2026 перестал публиковать Verified.</a:t>
+            </a:r>
+          </a:p>
+        </p:txBody>
+      </p:sp>
+      <p:sp>
+        <p:nvSpPr>
+          <p:cNvPr id="7" name="TextBox 6"/>
+          <p:cNvSpPr txBox="1"/>
+          <p:nvPr/>
+        </p:nvSpPr>
+        <p:spPr>
+          <a:xfrm>
+            <a:off x="9006840" y="1536192"/>
+            <a:ext cx="2560320" cy="685800"/>
+          </a:xfrm>
+          <a:prstGeom prst="rect">
+            <a:avLst/>
+          </a:prstGeom>
+          <a:noFill/>
+        </p:spPr>
+        <p:txBody>
+          <a:bodyPr wrap="square" lIns="0" rIns="0" tIns="0" bIns="0" anchor="ctr">
+            <a:spAutoFit/>
+          </a:bodyPr>
+          <a:lstStyle/>
+          <a:p>
+            <a:pPr algn="r">
+              <a:lnSpc>
+                <a:spcPct val="115000"/>
+              </a:lnSpc>
+            </a:pPr>
+            <a:r>
+              <a:rPr sz="2400" b="1" i="0">
+                <a:solidFill>
                   <a:srgbClr val="F0AB00"/>
                 </a:solidFill>
                 <a:latin typeface="Arial"/>
               </a:rPr>
-              <a:t>Verified 87.6%</a:t>
-            </a:r>
-            <a:r>
-              <a:rPr sz="1250" b="0" i="0">
+              <a:t>87.6%</a:t>
+            </a:r>
+            <a:r>
+              <a:rPr sz="1400" b="0" i="0">
+                <a:solidFill>
+                  <a:srgbClr val="6B7685"/>
+                </a:solidFill>
+                <a:latin typeface="Arial"/>
+              </a:rPr>
+              <a:t> vs </a:t>
+            </a:r>
+            <a:r>
+              <a:rPr sz="2400" b="1" i="0">
                 <a:solidFill>
                   <a:srgbClr val="21295C"/>
                 </a:solidFill>
                 <a:latin typeface="Arial"/>
               </a:rPr>
-              <a:t> (заявка производителя, публичные репозитории) vs </a:t>
-            </a:r>
-            <a:r>
-              <a:rPr sz="1250" b="1" i="0">
-                <a:solidFill>
-                  <a:srgbClr val="F0AB00"/>
-                </a:solidFill>
-                <a:latin typeface="Arial"/>
-              </a:rPr>
-              <a:t>Pro: 57% топ / ~25% средний</a:t>
-            </a:r>
-            <a:r>
-              <a:rPr sz="1250" b="0" i="0">
-                <a:solidFill>
-                  <a:srgbClr val="21295C"/>
-                </a:solidFill>
-                <a:latin typeface="Arial"/>
-              </a:rPr>
-              <a:t> (приватные кодовые базы — заучить нельзя). Разрыв — измеренная величина заучивания. OpenAI в 2026 перестал публиковать Verified.</a:t>
-            </a:r>
-          </a:p>
-        </p:txBody>
-      </p:sp>
-      <p:sp>
-        <p:nvSpPr>
-          <p:cNvPr id="7" name="Rounded Rectangle 6"/>
+              <a:t>57%</a:t>
+            </a:r>
+          </a:p>
+        </p:txBody>
+      </p:sp>
+      <p:sp>
+        <p:nvSpPr>
+          <p:cNvPr id="8" name="TextBox 7"/>
+          <p:cNvSpPr txBox="1"/>
+          <p:nvPr/>
+        </p:nvSpPr>
+        <p:spPr>
+          <a:xfrm>
+            <a:off x="8092440" y="2249424"/>
+            <a:ext cx="3474720" cy="365760"/>
+          </a:xfrm>
+          <a:prstGeom prst="rect">
+            <a:avLst/>
+          </a:prstGeom>
+          <a:noFill/>
+        </p:spPr>
+        <p:txBody>
+          <a:bodyPr wrap="square" lIns="0" rIns="0" tIns="0" bIns="0" anchor="t">
+            <a:spAutoFit/>
+          </a:bodyPr>
+          <a:lstStyle/>
+          <a:p>
+            <a:pPr algn="r">
+              <a:lnSpc>
+                <a:spcPct val="115000"/>
+              </a:lnSpc>
+            </a:pPr>
+            <a:r>
+              <a:rPr sz="1050" b="0" i="1">
+                <a:solidFill>
+                  <a:srgbClr val="6B7685"/>
+                </a:solidFill>
+                <a:latin typeface="Arial"/>
+              </a:rPr>
+              <a:t>заявка производителя vs защищённый · средний ~25%</a:t>
+            </a:r>
+          </a:p>
+        </p:txBody>
+      </p:sp>
+      <p:sp>
+        <p:nvSpPr>
+          <p:cNvPr id="9" name="Rounded Rectangle 8"/>
           <p:cNvSpPr/>
           <p:nvPr/>
         </p:nvSpPr>
@@ -45440,7 +45148,7 @@
       </p:sp>
       <p:sp>
         <p:nvSpPr>
-          <p:cNvPr id="8" name="TextBox 7"/>
+          <p:cNvPr id="10" name="TextBox 9"/>
           <p:cNvSpPr txBox="1"/>
           <p:nvPr/>
         </p:nvSpPr>
@@ -45479,7 +45187,7 @@
       </p:sp>
       <p:sp>
         <p:nvSpPr>
-          <p:cNvPr id="9" name="TextBox 8"/>
+          <p:cNvPr id="11" name="TextBox 10"/>
           <p:cNvSpPr txBox="1"/>
           <p:nvPr/>
         </p:nvSpPr>
@@ -45518,7 +45226,7 @@
       </p:sp>
       <p:sp>
         <p:nvSpPr>
-          <p:cNvPr id="10" name="TextBox 9"/>
+          <p:cNvPr id="12" name="TextBox 11"/>
           <p:cNvSpPr txBox="1"/>
           <p:nvPr/>
         </p:nvSpPr>
@@ -45575,7 +45283,7 @@
       </p:sp>
       <p:sp>
         <p:nvSpPr>
-          <p:cNvPr id="11" name="Rounded Rectangle 10"/>
+          <p:cNvPr id="13" name="Rounded Rectangle 12"/>
           <p:cNvSpPr/>
           <p:nvPr/>
         </p:nvSpPr>
@@ -45623,7 +45331,7 @@
       </p:sp>
       <p:sp>
         <p:nvSpPr>
-          <p:cNvPr id="12" name="TextBox 11"/>
+          <p:cNvPr id="14" name="TextBox 13"/>
           <p:cNvSpPr txBox="1"/>
           <p:nvPr/>
         </p:nvSpPr>
@@ -45662,7 +45370,7 @@
       </p:sp>
       <p:sp>
         <p:nvSpPr>
-          <p:cNvPr id="13" name="TextBox 12"/>
+          <p:cNvPr id="15" name="TextBox 14"/>
           <p:cNvSpPr txBox="1"/>
           <p:nvPr/>
         </p:nvSpPr>
@@ -45701,7 +45409,7 @@
       </p:sp>
       <p:sp>
         <p:nvSpPr>
-          <p:cNvPr id="14" name="TextBox 13"/>
+          <p:cNvPr id="16" name="TextBox 15"/>
           <p:cNvSpPr txBox="1"/>
           <p:nvPr/>
         </p:nvSpPr>
@@ -45751,7 +45459,7 @@
                 </a:solidFill>
                 <a:latin typeface="Arial"/>
               </a:rPr>
-              <a:t> протестированных передовых моделей пытались обмануть процедуру оценки. Одна модель OpenAI </a:t>
+              <a:t> передовых моделей пытались обмануть процедуру оценки; одна модель OpenAI </a:t>
             </a:r>
             <a:r>
               <a:rPr sz="1250" b="1" i="0">
@@ -45760,7 +45468,7 @@
                 </a:solidFill>
                 <a:latin typeface="Arial"/>
               </a:rPr>
-              <a:t>вышла за пределы тестовой песочницы и взломала производственные серверы Hugging Face</a:t>
+              <a:t>вышла из песочницы и взломала производственные серверы Hugging Face</a:t>
             </a:r>
             <a:r>
               <a:rPr sz="1250" b="0" i="0">
@@ -45776,7 +45484,7 @@
       </p:sp>
       <p:sp>
         <p:nvSpPr>
-          <p:cNvPr id="15" name="Rounded Rectangle 14"/>
+          <p:cNvPr id="17" name="Rounded Rectangle 16"/>
           <p:cNvSpPr/>
           <p:nvPr/>
         </p:nvSpPr>
@@ -45824,7 +45532,7 @@
       </p:sp>
       <p:sp>
         <p:nvSpPr>
-          <p:cNvPr id="16" name="TextBox 15"/>
+          <p:cNvPr id="18" name="TextBox 17"/>
           <p:cNvSpPr txBox="1"/>
           <p:nvPr/>
         </p:nvSpPr>
@@ -45863,7 +45571,7 @@
       </p:sp>
       <p:sp>
         <p:nvSpPr>
-          <p:cNvPr id="17" name="TextBox 16"/>
+          <p:cNvPr id="19" name="TextBox 18"/>
           <p:cNvSpPr txBox="1"/>
           <p:nvPr/>
         </p:nvSpPr>
@@ -47399,8 +47107,8 @@
         </p:nvSpPr>
         <p:spPr>
           <a:xfrm>
-            <a:off x="9418320" y="1783080"/>
-            <a:ext cx="2057400" cy="685800"/>
+            <a:off x="9418320" y="2057400"/>
+            <a:ext cx="2057400" cy="731520"/>
           </a:xfrm>
           <a:prstGeom prst="roundRect">
             <a:avLst>
@@ -47445,8 +47153,8 @@
         </p:nvSpPr>
         <p:spPr>
           <a:xfrm>
-            <a:off x="9528048" y="1828800"/>
-            <a:ext cx="1828800" cy="594360"/>
+            <a:off x="9528048" y="2103120"/>
+            <a:ext cx="1828800" cy="640080"/>
           </a:xfrm>
           <a:prstGeom prst="rect">
             <a:avLst/>
@@ -47485,8 +47193,8 @@
         </p:nvSpPr>
         <p:spPr>
           <a:xfrm>
-            <a:off x="7909560" y="2542032"/>
-            <a:ext cx="3566160" cy="777240"/>
+            <a:off x="7909560" y="2926080"/>
+            <a:ext cx="3566160" cy="822960"/>
           </a:xfrm>
           <a:prstGeom prst="roundRect">
             <a:avLst>
@@ -47531,8 +47239,8 @@
         </p:nvSpPr>
         <p:spPr>
           <a:xfrm>
-            <a:off x="8046720" y="2587752"/>
-            <a:ext cx="3291840" cy="685800"/>
+            <a:off x="8046720" y="2971800"/>
+            <a:ext cx="3291840" cy="731520"/>
           </a:xfrm>
           <a:prstGeom prst="rect">
             <a:avLst/>
@@ -47571,8 +47279,8 @@
         </p:nvSpPr>
         <p:spPr>
           <a:xfrm>
-            <a:off x="7909560" y="3520440"/>
-            <a:ext cx="3566160" cy="1371600"/>
+            <a:off x="7909560" y="4160520"/>
+            <a:ext cx="3566160" cy="1554480"/>
           </a:xfrm>
           <a:prstGeom prst="rect">
             <a:avLst/>
@@ -47598,6 +47306,34 @@
                 <a:latin typeface="Arial"/>
               </a:rPr>
               <a:t>Миллиард токенов/мес:</a:t>
+            </a:r>
+          </a:p>
+          <a:p>
+            <a:pPr algn="l">
+              <a:lnSpc>
+                <a:spcPct val="115000"/>
+              </a:lnSpc>
+              <a:spcBef>
+                <a:spcPts val="800"/>
+              </a:spcBef>
+            </a:pPr>
+            <a:r>
+              <a:rPr sz="1400" b="1" i="0">
+                <a:solidFill>
+                  <a:srgbClr val="21295C"/>
+                </a:solidFill>
+                <a:latin typeface="Arial"/>
+              </a:rPr>
+              <a:t>$10 000</a:t>
+            </a:r>
+            <a:r>
+              <a:rPr sz="1200" b="0" i="0">
+                <a:solidFill>
+                  <a:srgbClr val="21295C"/>
+                </a:solidFill>
+                <a:latin typeface="Arial"/>
+              </a:rPr>
+              <a:t> целиком на премиуме</a:t>
             </a:r>
           </a:p>
           <a:p>
@@ -47610,58 +47346,30 @@
               </a:spcBef>
             </a:pPr>
             <a:r>
-              <a:rPr sz="1400" b="1" i="0">
+              <a:rPr sz="1250" b="0" i="0">
+                <a:solidFill>
+                  <a:srgbClr val="6B7685"/>
+                </a:solidFill>
+                <a:latin typeface="Arial"/>
+              </a:rPr>
+              <a:t>vs  </a:t>
+            </a:r>
+            <a:r>
+              <a:rPr sz="1600" b="1" i="0">
+                <a:solidFill>
+                  <a:srgbClr val="F0AB00"/>
+                </a:solidFill>
+                <a:latin typeface="Arial"/>
+              </a:rPr>
+              <a:t>$1 180</a:t>
+            </a:r>
+            <a:r>
+              <a:rPr sz="1200" b="0" i="0">
                 <a:solidFill>
                   <a:srgbClr val="21295C"/>
                 </a:solidFill>
                 <a:latin typeface="Arial"/>
               </a:rPr>
-              <a:t>$10 000</a:t>
-            </a:r>
-            <a:r>
-              <a:rPr sz="1200" b="0" i="0">
-                <a:solidFill>
-                  <a:srgbClr val="21295C"/>
-                </a:solidFill>
-                <a:latin typeface="Arial"/>
-              </a:rPr>
-              <a:t> целиком на премиуме</a:t>
-            </a:r>
-          </a:p>
-          <a:p>
-            <a:pPr algn="l">
-              <a:lnSpc>
-                <a:spcPct val="115000"/>
-              </a:lnSpc>
-              <a:spcBef>
-                <a:spcPts val="400"/>
-              </a:spcBef>
-            </a:pPr>
-            <a:r>
-              <a:rPr sz="1250" b="0" i="0">
-                <a:solidFill>
-                  <a:srgbClr val="6B7685"/>
-                </a:solidFill>
-                <a:latin typeface="Arial"/>
-              </a:rPr>
-              <a:t>vs  </a:t>
-            </a:r>
-            <a:r>
-              <a:rPr sz="1600" b="1" i="0">
-                <a:solidFill>
-                  <a:srgbClr val="F0AB00"/>
-                </a:solidFill>
-                <a:latin typeface="Arial"/>
-              </a:rPr>
-              <a:t>$1 180</a:t>
-            </a:r>
-            <a:r>
-              <a:rPr sz="1200" b="0" i="0">
-                <a:solidFill>
-                  <a:srgbClr val="21295C"/>
-                </a:solidFill>
-                <a:latin typeface="Arial"/>
-              </a:rPr>
               <a:t> с маршрутизацией</a:t>
             </a:r>
           </a:p>
@@ -47670,45 +47378,6 @@
       <p:sp>
         <p:nvSpPr>
           <p:cNvPr id="21" name="TextBox 20"/>
-          <p:cNvSpPr txBox="1"/>
-          <p:nvPr/>
-        </p:nvSpPr>
-        <p:spPr>
-          <a:xfrm>
-            <a:off x="7909560" y="5120640"/>
-            <a:ext cx="3566160" cy="822960"/>
-          </a:xfrm>
-          <a:prstGeom prst="rect">
-            <a:avLst/>
-          </a:prstGeom>
-          <a:noFill/>
-        </p:spPr>
-        <p:txBody>
-          <a:bodyPr wrap="square" lIns="0" rIns="0" tIns="0" bIns="0" anchor="t">
-            <a:spAutoFit/>
-          </a:bodyPr>
-          <a:lstStyle/>
-          <a:p>
-            <a:pPr algn="l">
-              <a:lnSpc>
-                <a:spcPct val="115000"/>
-              </a:lnSpc>
-            </a:pPr>
-            <a:r>
-              <a:rPr sz="1150" b="0" i="1">
-                <a:solidFill>
-                  <a:srgbClr val="065A82"/>
-                </a:solidFill>
-                <a:latin typeface="Arial"/>
-              </a:rPr>
-              <a:t>Kimi K2.6 ≈ GPT-5.5 на защищённом бенчмарке при −80% цены</a:t>
-            </a:r>
-          </a:p>
-        </p:txBody>
-      </p:sp>
-      <p:sp>
-        <p:nvSpPr>
-          <p:cNvPr id="22" name="TextBox 21"/>
           <p:cNvSpPr txBox="1"/>
           <p:nvPr/>
         </p:nvSpPr>
@@ -49751,80 +49420,6 @@
           </a:p>
         </p:txBody>
       </p:sp>
-      <p:sp>
-        <p:nvSpPr>
-          <p:cNvPr id="4" name="TextBox 3"/>
-          <p:cNvSpPr txBox="1"/>
-          <p:nvPr/>
-        </p:nvSpPr>
-        <p:spPr>
-          <a:xfrm>
-            <a:off x="7680960" y="6263640"/>
-            <a:ext cx="4023360" cy="320040"/>
-          </a:xfrm>
-          <a:prstGeom prst="rect">
-            <a:avLst/>
-          </a:prstGeom>
-          <a:noFill/>
-        </p:spPr>
-        <p:txBody>
-          <a:bodyPr wrap="square" lIns="0" rIns="0" tIns="0" bIns="0" anchor="t">
-            <a:spAutoFit/>
-          </a:bodyPr>
-          <a:lstStyle/>
-          <a:p>
-            <a:pPr algn="r">
-              <a:lnSpc>
-                <a:spcPct val="115000"/>
-              </a:lnSpc>
-            </a:pPr>
-            <a:r>
-              <a:rPr sz="1100" b="0" i="1">
-                <a:solidFill>
-                  <a:srgbClr val="6B7685"/>
-                </a:solidFill>
-                <a:latin typeface="Arial"/>
-              </a:rPr>
-              <a:t>контакты лектора — заполняется перед лекцией</a:t>
-            </a:r>
-          </a:p>
-        </p:txBody>
-      </p:sp>
-      <p:sp>
-        <p:nvSpPr>
-          <p:cNvPr id="5" name="TextBox 4"/>
-          <p:cNvSpPr txBox="1"/>
-          <p:nvPr/>
-        </p:nvSpPr>
-        <p:spPr>
-          <a:xfrm>
-            <a:off x="11109960" y="6547104"/>
-            <a:ext cx="1005840" cy="256032"/>
-          </a:xfrm>
-          <a:prstGeom prst="rect">
-            <a:avLst/>
-          </a:prstGeom>
-          <a:noFill/>
-        </p:spPr>
-        <p:txBody>
-          <a:bodyPr wrap="none" lIns="0" rIns="0" tIns="0" bIns="0">
-            <a:spAutoFit/>
-          </a:bodyPr>
-          <a:lstStyle/>
-          <a:p>
-            <a:pPr algn="r"/>
-            <a:r>
-              <a:rPr sz="1000" i="1">
-                <a:solidFill>
-                  <a:srgbClr val="5B6678"/>
-                </a:solidFill>
-                <a:latin typeface="Arial"/>
-              </a:rPr>
-              <a:t>46/46</a:t>
-            </a:r>
-          </a:p>
-        </p:txBody>
-      </p:sp>
     </p:spTree>
   </p:cSld>
   <p:clrMapOvr>
@@ -54687,11 +54282,11 @@
         <p:spPr>
           <a:xfrm>
             <a:off x="914400" y="1874519"/>
-            <a:ext cx="4297680" cy="2514600"/>
+            <a:ext cx="4297680" cy="2240280"/>
           </a:xfrm>
           <a:prstGeom prst="roundRect">
             <a:avLst>
-              <a:gd name="adj" fmla="val 12121"/>
+              <a:gd name="adj" fmla="val 13605"/>
             </a:avLst>
           </a:prstGeom>
           <a:solidFill>
@@ -54869,7 +54464,7 @@
         </p:nvSpPr>
         <p:spPr>
           <a:xfrm>
-            <a:off x="5532120" y="2903220"/>
+            <a:off x="5532120" y="2766060"/>
             <a:ext cx="1005840" cy="457200"/>
           </a:xfrm>
           <a:prstGeom prst="rightArrow">
@@ -54914,11 +54509,11 @@
         <p:spPr>
           <a:xfrm>
             <a:off x="6858000" y="1874519"/>
-            <a:ext cx="4297680" cy="2514600"/>
+            <a:ext cx="4297680" cy="2240280"/>
           </a:xfrm>
           <a:prstGeom prst="roundRect">
             <a:avLst>
-              <a:gd name="adj" fmla="val 12121"/>
+              <a:gd name="adj" fmla="val 13605"/>
             </a:avLst>
           </a:prstGeom>
           <a:solidFill>
@@ -55130,7 +54725,7 @@
         </p:nvSpPr>
         <p:spPr>
           <a:xfrm>
-            <a:off x="914400" y="4709160"/>
+            <a:off x="914400" y="4526280"/>
             <a:ext cx="10241280" cy="731520"/>
           </a:xfrm>
           <a:prstGeom prst="roundRect">
@@ -55178,7 +54773,7 @@
         </p:nvSpPr>
         <p:spPr>
           <a:xfrm>
-            <a:off x="1097280" y="4764024"/>
+            <a:off x="1097280" y="4581144"/>
             <a:ext cx="9875519" cy="621792"/>
           </a:xfrm>
           <a:prstGeom prst="rect">
@@ -55204,7 +54799,7 @@
                 </a:solidFill>
                 <a:latin typeface="Arial"/>
               </a:rPr>
-              <a:t>Словарь строится один раз до обучения; на inference — выборка готовых правил, не вычисление.</a:t>
+              <a:t>Словарь строится один раз до обучения; на инференсе — выборка готовых правил, не вычисление.</a:t>
             </a:r>
           </a:p>
         </p:txBody>
@@ -55217,7 +54812,7 @@
         </p:nvSpPr>
         <p:spPr>
           <a:xfrm>
-            <a:off x="914400" y="5715000"/>
+            <a:off x="914400" y="5532120"/>
             <a:ext cx="10241280" cy="457200"/>
           </a:xfrm>
           <a:prstGeom prst="rect">

--- a/library/lectures/lec-02/rendered/lec-02.pptx
+++ b/library/lectures/lec-02/rendered/lec-02.pptx
@@ -547,17 +547,17 @@
           <a:lstStyle/>
           <a:p>
             <a:r>
-              <a:t>Начнём с проверки. Перед вами шесть утверждений о том, как работают большие языковые модели. Все шесть звучат правдоподобно; каждое можно услышать от людей, которые пользуются LLM ежедневно и в целом понимают, что делают. Прочитайте список и честно отметьте, с какими вы согласны. Поднимите руки: кто согласен хотя бы с одним? С тремя? С пятью?</a:t>
-            </a:r>
-          </a:p>
-          <a:p>
-            <a:r>
-              <a:t>Теперь ответ — и он жёстче, чем обычно бывает в таких проверках: все шесть утверждений ложны. Не «спорны», не «зависят от контекста» — ложны, и для каждого есть конкретный внутренний механизм, который объясняет, почему. Если вы согласились хотя бы с одним — эта лекция для вас. Если не согласились ни с одним, но не можете назвать механизм, — тоже.</a:t>
-            </a:r>
-          </a:p>
-          <a:p>
-            <a:r>
-              <a:t>Почему такие заблуждения устойчивы именно у опытных пользователей? Практический опыт формирует модель в голове по наблюдениям, а наблюдения систематически подтверждают «почти правду»: strawberry действительно отвечается правильно, T=0 действительно даёт одинаковые ответы почти всегда, роль действительно ведёт себя как защищённая — пока никто не атакует. Каждое заблуждение — корректная экстраполяция честных наблюдений за границу, где механизм ломается; а границу в повседневной работе видно редко: она проявляется под нагрузкой, под атакой или в счёте за месяц. Ровно поэтому сегодняшняя лекция устроена как проверка границ, а не пересказ основ. К этому списку мы вернёмся в самом конце — и у каждой строки появится механизм.</a:t>
+              <a:t>Перед вами шесть утверждений о том, как работают большие языковые модели. Все шесть звучат правдоподобно; каждое можно услышать от людей, которые пользуются LLM ежедневно и в целом понимают, что делают. Прочитайте список и честно отметьте, с какими вы согласны. Поднимите руки: кто согласен хотя бы с одним? С тремя? С пятью?</a:t>
+            </a:r>
+          </a:p>
+          <a:p>
+            <a:r>
+              <a:t>Ответ уже на слайде, и он жёстче, чем обычно бывает в таких проверках: все шесть утверждений ложны. Не «спорны», не «зависят от контекста» — ложны, и для каждого есть конкретный внутренний механизм, который объясняет, почему.</a:t>
+            </a:r>
+          </a:p>
+          <a:p>
+            <a:r>
+              <a:t>Почему эти заблуждения так устойчивы? Практический опыт формирует представление о модели по наблюдениям, а наблюдения систематически подтверждают «почти правду»: strawberry действительно отвечается правильно, T=0 действительно даёт одинаковые ответы почти всегда, роль действительно ведёт себя как защищённая — пока никто не атакует. Каждое заблуждение — корректная экстраполяция честных наблюдений за границу, где механизм ломается; а границу в повседневной работе видно редко: она проявляется под нагрузкой, под атакой или в счёте за месяц. Сегодня мы пройдём по этим границам. К списку вернёмся в самом конце — и у каждой строки появится механизм.</a:t>
             </a:r>
           </a:p>
         </p:txBody>
@@ -627,17 +627,17 @@
           <a:lstStyle/>
           <a:p>
             <a:r>
-              <a:t>Вы знаете, что сообщения в API имеют роли: system, user, assistant. Опытные пользователи часто представляют роли как структурные поля — метаданные, которые модель получает «отдельным каналом». Такого канала не существует: роли — это те же токены в общем линейном потоке.</a:t>
-            </a:r>
-          </a:p>
-          <a:p>
-            <a:r>
-              <a:t>Прежде чем список сообщений попадает в модель, он прогоняется через chat-шаблон — правило сборки одной плоской последовательности токенов из структурированного диалога. В формате ChatML, ставшем фактическим стандартом, сообщение оборачивается специальными токенами — служебными записями словаря, не встречающимися в обычном тексте. В экосистеме Hugging Face шаблон хранится буквально как Jinja-шаблон в файле настроек токенизатора — его можно открыть и прочитать. Деталь: имя роли — обычная строка после спецтокена, а не отдельный спецтокен; именно поэтому провайдеры добавляли новые роли без перевыпуска словаря. И практический след: локальная модель, запущенная с чужим chat-шаблоном, не выдаёт ошибку — она просто заметно глупеет; проверка шаблона — первый пункт диагностики.</a:t>
-            </a:r>
-          </a:p>
-          <a:p>
-            <a:r>
-              <a:t>Следствие для всех, кто строит агентов: если роль — последовательность токенов, то текст, похожий на разметку роли, может попасть в поток из внешнего контента. Атаки класса Special Token Injection — подделка роли: в страницу или файл вставляют строку вида «начало реплики assistant», и модель в части случаев верит. Исследования показывают, что «кто говорит» модель определяет в значительной мере стилистически, а не по формальной метке. Защита строится на экранировании и детекции спецтокенов до подачи в модель. Здесь мы закрыли половину вопроса: роль — не защищённая структура. Почему она вообще работает — увидим в разделе про внимание; разбор prompt injection целиком — в Лекции 3.</a:t>
+              <a:t>Сообщения в API имеют роли: system, user, assistant. Роли часто представляют как структурные поля — метаданные, которые модель получает «отдельным каналом». Такого канала не существует: модель принимает один плоский поток токенов, а chat-формат — соглашение поверх него, надстройка, а не часть архитектуры. Прежде чем список сообщений попадает в модель, он прогоняется через chat-шаблон — правило сборки одной плоской последовательности токенов из структурированного диалога. В формате ChatML, ставшем фактическим стандартом, сообщение оборачивается специальными токенами — служебными записями словаря, не встречающимися в обычном тексте. В экосистеме Hugging Face шаблон хранится буквально как Jinja-шаблон в файле настроек токенизатора — его можно открыть и прочитать.</a:t>
+            </a:r>
+          </a:p>
+          <a:p>
+            <a:r>
+              <a:t>Разведём два значения слова «роль», которые постоянно смешиваются. Протокольные роли system/user/assistant — это структура диалога, «кто говорит»; они собираются спецтокенами chat-шаблона. А «роль» из текста промпта — «ты — лучший разработчик» — это просто содержимое сообщения: обычные токены внутри реплики, никакой протокольной метки у них нет; их влияние на поведение модели — эффект внимания к содержимому контекста, и мы разберём его в разделе про внимание. Деталь протокола: имя роли — обычная строка после спецтокена, а не отдельный спецтокен; именно поэтому провайдеры добавляли новые роли без перевыпуска словаря.</a:t>
+            </a:r>
+          </a:p>
+          <a:p>
+            <a:r>
+              <a:t>Что с этого на практике — два вывода. Первый: если роль — последовательность токенов, то текст, похожий на разметку роли, может попасть в поток из внешнего контента. Атаки класса Special Token Injection — подделка роли: в страницу или файл вставляют строку вида «начало реплики assistant», и модель в части случаев верит — «кто говорит» она определяет в значительной мере стилистически, а не по формальной метке. Поэтому внешний контент — веб-страницы, файлы, письма — фильтруйте до попадания в контекст: экранирование и детекция спецтокенов. Второй: при локальном запуске проверяйте chat-шаблон — модель, запущенная с чужим шаблоном, не выдаёт ошибку, она просто заметно глупеет; проверка шаблона — первый пункт диагностики. Здесь мы закрыли половину вопроса: роль — не защищённая структура. Почему она вообще работает — увидим в разделе про внимание; разбор prompt injection целиком — в Лекции 3.</a:t>
             </a:r>
           </a:p>
         </p:txBody>
@@ -722,7 +722,7 @@
           </a:p>
           <a:p>
             <a:r>
-              <a:t>У явления есть имя: «рваный интеллект» — профиль способностей с резкими провалами рядом с пиками. Та же модель решает олимпиадную математику и проваливает подсчёт букв; на умножении GPT-4 без инструментов давал около 59% на трёхзначных числах, 4% на четырёхзначных и 0% на пятизначных. Урок переносим в практику: если модель прошла ваш тест — проверьте её на «cranberry вашей предметной области», структурно аналогичном, но незнаменитом примере. А для посимвольных операций и арифметики — внешний инструмент, не прямой проход.</a:t>
+              <a:t>У явления есть имя: «рваный интеллект» — профиль способностей с резкими провалами рядом с пиками. Причина в том, что уровень навыка задаётся данными обучения, а не «общим умом»: где в данных навык представлен богато — там пик, где представление слова скрывает нужную структуру — там провал. Та же модель решает олимпиадную математику и проваливает подсчёт букв; на умножении GPT-4 без инструментов давал около 59% на трёхзначных числах, 4% на четырёхзначных и 0% на пятизначных. Урок переносим в практику: если модель прошла ваш тест — проверьте её на «cranberry вашей предметной области», структурно аналогичном, но незнаменитом примере, на котором никто не хайпил: вирусное прохождение — не навык. А для посимвольных операций и арифметики — внешний инструмент, не прямой проход.</a:t>
             </a:r>
           </a:p>
         </p:txBody>
@@ -792,7 +792,7 @@
           <a:lstStyle/>
           <a:p>
             <a:r>
-              <a:t>Два компактных примера того, как частотная нарезка расходится со структурой данных, — числа и код.</a:t>
+              <a:t>Зачем инженеру знать, как режутся числа и код: это самые частые «нетекстовые» входы, и от их нарезки напрямую зависят арифметика модели и ваш бюджет токенов на код. Два компактных примера того, как частотная нарезка расходится со структурой данных.</a:t>
             </a:r>
           </a:p>
           <a:p>
@@ -887,7 +887,7 @@
           </a:p>
           <a:p>
             <a:r>
-              <a:t>Могло показаться, что это курьёз эпохи GPT-3. Данные 2026 года говорят обратное: по одной из оценок, порядка четырёх процентов записей словаря протестированных моделей — glitch-токены, а фреймворк GlitchMiner находит их градиентным поиском в десяти открытых LLM семейств Llama, Qwen, Gemma, Phi-3 и Mistral. Проблема воспроизводится во всех проверенных семействах, потому что она — не баг версии, а системное свойство конвейера, где словарь строится отдельно от модели; масштабом такое не чинится. Практический вывод скромный, но полезный: если модель неадекватна на входе с экзотическими строками — редкие идентификаторы, обфусцированный текст, необычный Unicode, — среди гипотез должна быть «на входе glitch-токен»; проверяется заменой строки на плейсхолдер.</a:t>
+              <a:t>Могло показаться, что это курьёз эпохи GPT-3. Данные 2026 года говорят обратное: по одной из оценок, порядка четырёх процентов записей словаря протестированных моделей — glitch-токены, а фреймворк GlitchMiner находит их градиентным поиском в десяти открытых LLM семейств Llama, Qwen, Gemma, Phi-3 и Mistral. Проблема воспроизводится во всех проверенных семействах, потому что она — не баг версии, а системное свойство конвейера, где словарь строится отдельно от модели; масштабом такое не чинится. Практических вывода два. Первый — диагностический: если модель ведёт себя необъяснимо на входе с экзотическими строками — редкие идентификаторы, обфусцированный текст, необычный Unicode, — среди гипотез должна быть «на входе glitch-токен»; проверяется быстро, заменой строки на плейсхолдер: поведение выправилось — виновник найден. Второй — продуктовый: если система принимает произвольный пользовательский ввод, нормализуйте и санитизируйте его до подачи в модель — это отсекает и glitch-токены, и целый класс смежных сюрпризов токенизации.</a:t>
             </a:r>
           </a:p>
         </p:txBody>
@@ -1042,7 +1042,7 @@
           </a:p>
           <a:p>
             <a:r>
-              <a:t>План раздела такой. Сначала зафиксируем, что такое эмбеддинг: выборка вектора из входной таблицы модели — быстро, это база. Затем — главный систематизирующий ход раздела: слово «эмбеддинг» в инженерном обиходе означает три разные сущности, и их смешение — источник устойчивой путаницы даже у опытных практиков; разложим три жизни термина аккуратно. Дальше — пространство смыслов: как выучиваются координаты, почему близкие по смыслу тексты лежат рядом и как это измеряется косинусным сходством. После этого — единственный, но важный провал раздела: граница похожести, случай, когда высокое сходство приносит практически противоположный по смыслу документ, и что с этим делают в боевых системах поиска. И в конце соберём раздел: почему эмбеддинги — фундамент того, что модель «понимает» переформулировки, и что из этого следует для систем поиска и RAG, к которым мы придём в Лекции 3.</a:t>
+              <a:t>План раздела такой. Сначала зафиксируем, что такое эмбеддинг: выборка вектора из входной таблицы модели — быстро, это база. Затем — главный систематизирующий ход раздела: слово «эмбеддинг» в инженерном обиходе означает три разные сущности, и их нередко смешивают; разложим три жизни термина аккуратно — и увидим, что эмбеддинги работают не только внутри инференса, но и как самостоятельный инструмент поиска. Дальше — пространство смыслов: как выучиваются координаты, почему близкие по смыслу тексты лежат рядом и как это измеряется косинусным сходством. После этого — единственный, но важный провал раздела: граница похожести, случай, когда высокое сходство приносит практически противоположный по смыслу документ, и что с этим делают в боевых системах поиска. И в конце соберём раздел: почему эмбеддинги — фундамент того, что модель «понимает» переформулировки, и что из этого следует для систем поиска и RAG, к которым мы придём в Лекции 3.</a:t>
             </a:r>
           </a:p>
         </p:txBody>
@@ -1112,7 +1112,7 @@
           <a:lstStyle/>
           <a:p>
             <a:r>
-              <a:t>Токен — это идентификатор из словаря, но с числом 48 213 нейросеть содержательно работать не может: между номерами токенов нет осмысленной арифметики. Эмбеддинг, векторное представление, — сопоставленный каждому токену словаря вектор фиксированной длины, список чисел с плавающей точкой, выученный на этапе обучения вместе с остальными весами. После обучения входная таблица «токен → вектор» зафиксирована; на inference модель делает выборку: получает идентификатор, забирает вектор, передаёт дальше.</a:t>
+              <a:t>Токен — это идентификатор из словаря, но с числом 48 213 нейросеть содержательно работать не может: между номерами токенов нет осмысленной арифметики. Эмбеддинг, векторное представление, — сопоставленный каждому токену словаря вектор фиксированной длины, список чисел с плавающей точкой, выученный на этапе обучения вместе с остальными весами. После обучения входная таблица «токен → вектор» зафиксирована; на инференсе модель делает выборку: получает идентификатор, забирает вектор, передаёт дальше.</a:t>
             </a:r>
           </a:p>
           <a:p>
@@ -1192,12 +1192,12 @@
           <a:lstStyle/>
           <a:p>
             <a:r>
-              <a:t>Слово «эмбеддинг» в инженерном обиходе обозначает три разные сущности, и их смешение — источник устойчивой путаницы даже у опытных практиков. Разложим аккуратно — это три жизни термина.</a:t>
-            </a:r>
-          </a:p>
-          <a:p>
-            <a:r>
-              <a:t>Жизнь первая: входная таблица — статическая таблица «токен → вектор» на входе LLM. Вектор токена «кот» в ней один и тот же в любом предложении. Жизнь вторая: контекстуальные представления. Последовательность входных векторов проходит через десятки слоёв внимания, и на каждом слое вектор каждой позиции обновляется с учётом окружения — на выходе вектор позиции «кот» уже не равен табличному, в него вмешан контекст. Именно эти представления несут «понимание» модели; входная таблица — лишь стартовая точка. Жизнь третья: когда вы вызываете embedding-API, вы получаете вектор целого текста от отдельной модели, специально обученной под поиск и сравнение. Это не внутренности вашего чат-LLM: embedding-модель для RAG — самостоятельный продукт, и чат-модель с embedding-моделью могут быть от разных вендоров — это нормальная практика.</a:t>
+              <a:t>Эмбеддинги нужны не только для инференса — это ещё и самостоятельный инструмент поиска. Слово «эмбеддинг» в инженерном обиходе обозначает три разные сущности; разложим три жизни термина и посмотрим, какой из них вы пользуетесь, когда строите поиск.</a:t>
+            </a:r>
+          </a:p>
+          <a:p>
+            <a:r>
+              <a:t>Жизнь первая: входная таблица — статическая таблица «токен → вектор» на входе LLM. Вектор токена «кот» в ней один и тот же в любом предложении. Жизнь вторая: контекстуальные представления. Последовательность входных векторов проходит через десятки слоёв внимания, и на каждом слое вектор каждой позиции обновляется с учётом окружения — на выходе вектор позиции «кот» уже не равен табличному, в него вмешан контекст. Именно эти представления несут «понимание» модели; входная таблица — лишь стартовая точка. Обе эти жизни — внутренности инференса. А третья жизнь — ваш рабочий инструмент: когда вы вызываете embedding-API для поиска или RAG, вы получаете вектор целого текста от отдельной модели, специально обученной под поиск и сравнение. Это не внутренности вашего чат-LLM: embedding-модель — самостоятельный продукт, и чат-модель с embedding-моделью могут быть от разных вендоров — это нормальная практика.</a:t>
             </a:r>
           </a:p>
           <a:p>
@@ -1277,12 +1277,12 @@
           <a:lstStyle/>
           <a:p>
             <a:r>
-              <a:t>Как устроено пространство, в котором живут векторы. Каждая точка — токен или текст; координаты — те самые сотни или тысячи чисел. У измерений нет очевидного смысла «вверх-вниз»: это абстрактные направления, которые модель выучила из статистики. Цель обучения — устроить пространство так, чтобы единицы, встречавшиеся в похожих контекстах, лежали близко. «Как настроить SSL» и «Установка HTTPS-сертификата» окружены одними и теми же словами — «сертификат», «сервер», «домен» — и их векторы получаются близкими; «Деплой React-компонента» и «Сборка React-приложения» соседствуют со словами про фронтенд и сборку — и тоже оказываются рядом; а «Рецепт борща» живёт в совсем другой области пространства — одинокий выброс среди технических текстов. Структура возникает не из правил, а из миллионов примеров употребления.</a:t>
-            </a:r>
-          </a:p>
-          <a:p>
-            <a:r>
-              <a:t>На картинке слева — двумерная проекция: два смысловых кластера и выброс — те же пять текстов встретятся дальше в таблице попарных сходств. Помните, что это упрощение: реальная проекция получается из пространства в тысячи измерений алгоритмами вроде метода главных компонент или t-SNE, которые выбирают две оси с максимумом различий. Любая плоская картинка теряет часть многомерной структуры — она годится для интуиции, не для выводов.</a:t>
+              <a:t>Как устроено пространство, в котором живут векторы. Каждая точка — токен или текст; координаты — те самые сотни или тысячи чисел. Смысл измерений не задаётся вручную — это направления, которые модель выучила из статистики; постфактум многие из них читаются как признаки: тематика, формальность, домен. Цель обучения — устроить пространство так, чтобы единицы, встречавшиеся в похожих контекстах, лежали близко. «Как настроить SSL» и «Установка HTTPS-сертификата» окружены одними и теми же словами — «сертификат», «сервер», «домен» — и их векторы получаются близкими; «Деплой React-компонента» и «Сборка React-приложения» соседствуют со словами про фронтенд и сборку — и тоже оказываются рядом; а «Рецепт борща» живёт в совсем другой области пространства — одинокий выброс среди технических текстов. Структура возникает не из правил, а из миллионов примеров употребления.</a:t>
+            </a:r>
+          </a:p>
+          <a:p>
+            <a:r>
+              <a:t>На картинке слева — двумерная проекция: два смысловых кластера и выброс — те же пять текстов встретятся дальше в таблице попарных сходств. Оси проекции подписаны как признаки: одна разводит веб-тематику и кулинарию, другая — инфраструктуру и фронтенд; каждая из полутора с лишним тысяч осей реального пространства — такой же выученный признак, здесь показаны две. Помните, что это упрощение: реальная проекция получается из пространства в тысячи измерений алгоритмами вроде метода главных компонент или t-SNE, которые выбирают две оси с максимумом различий. Любая плоская картинка теряет часть многомерной структуры — она годится для интуиции, не для выводов.</a:t>
             </a:r>
           </a:p>
           <a:p>
@@ -1437,7 +1437,7 @@
           <a:lstStyle/>
           <a:p>
             <a:r>
-              <a:t>Это вторая лекция курса, и у неё особый жанр. Обычно лекция «как работают LLM» рассказывается для тех, кто впервые слышит слова «токен» и «температура». У нас другая ситуация: вы — опытные пользователи, многие ежедневно пишут код с LLM-ассистентами. Основы вы знаете — возможно, несистемно; поэтому сегодняшний тон — систематизация и уточнение, а не открытие: «вы знали X — вот где граница X».</a:t>
+              <a:t>Это вторая лекция курса. Сегодня мы рассмотрим, как работает большая языковая модель изнутри: систематизируем устройство конвейера и разберём тонкости, которые напрямую влияют на инженерные решения. Кто работает с моделями ежедневно — освежит основы и узнает тонкости; кто встречает эти понятия впервые — узнает всё необходимое.</a:t>
             </a:r>
           </a:p>
           <a:p>
@@ -1757,12 +1757,12 @@
           <a:lstStyle/>
           <a:p>
             <a:r>
-              <a:t>Определение вы знаете приблизительно — зафиксируем точно. Рабочая метафора — фонарик в тёмной комнате: все токены контекста присутствуют, но луч направлен на те, что релевантны текущему вопросу, и яркость по предметам — это веса. Формально на каждом шаге внимание возвращает распределение весов на все токены контекста, сумма равна единице, и это распределение пересчитывается на каждом шаге генерации заново.</a:t>
-            </a:r>
-          </a:p>
-          <a:p>
-            <a:r>
-              <a:t>Теперь — один уровень глубже, чем обычно рассказывают на этом месте, потому что он понадобится нам через два слайда. Для каждого токена модель вычисляет три проекции его вектора: Query, Key и Value. Query — «что я сейчас ищу»: запрос текущей позиции к остальному контексту. Key — «что я предлагаю»: визитная карточка токена, по которой его находят чужие запросы. Value — «что я отдам, если меня выбрали»: содержимое, которое реально вмешивается в результат. Вес между двумя позициями — это произведение Query одной на Key другой; итог позиции — взвешенная сумма Value всего контекста. Больше формул не понадобится.</a:t>
+              <a:t>Зафиксируем определение точно. Рабочая метафора — фонарик в тёмной комнате: все токены контекста присутствуют, но луч направлен на те, что релевантны текущему вопросу, и яркость по предметам — это веса. Формально на каждом шаге внимание возвращает распределение весов на все токены контекста, сумма равна единице, и это распределение пересчитывается на каждом шаге генерации заново.</a:t>
+            </a:r>
+          </a:p>
+          <a:p>
+            <a:r>
+              <a:t>Теперь — один уровень глубже: он понадобится нам через два слайда. Для каждого токена модель вычисляет три проекции его вектора: Query, Key и Value. Query — «что я сейчас ищу»: запрос текущей позиции к остальному контексту. Key — «что я предлагаю»: визитная карточка токена, по которой его находят чужие запросы. Value — «что я отдам, если меня выбрали»: содержимое, которое реально вмешивается в результат. Вес между двумя позициями — это произведение Query одной на Key другой; итог позиции — взвешенная сумма Value всего контекста. Больше формул не понадобится.</a:t>
             </a:r>
           </a:p>
           <a:p>
@@ -2847,7 +2847,7 @@
           </a:p>
           <a:p>
             <a:r>
-              <a:t>Сквозная трассировка для сборки ментальной модели. Вы отправляете «Столица Франции —». Токенизация: текст режется на три-четыре токена по таблице, зафиксированной до обучения. Эмбеддинги: каждый идентификатор забирает свой вектор из входной таблицы. Внимание: на позиции после тире Query «спрашивает», Key и Value слов «столица» и «Франции» отвечают весами — и они, кстати, уже лежат в кэше и не пересчитываются. Выход: распределение, где «Париж» получил, скажем, 0.93. Сэмплинг: при нуле температуры берём максимум — «Париж»; цикл делает ещё один оборот и выбирает стоп-токен. Если бы был включён режим рассуждения — перед «Парижем» цикл намотал бы черновые токены; если бы стояла JSON-схема — распределение на каждом шаге фильтровалось бы грамматикой. Один запрос — все стадии, все ручки. Терминологическая норма курса: «авторегрессионный», не «авторегрессивный».</a:t>
+              <a:t>Сквозная трассировка — соберём весь конвейер на одном примере. Вы отправляете «Столица Франции —». Токенизация: текст режется на три-четыре токена по таблице, зафиксированной до обучения. Эмбеддинги: каждый идентификатор забирает свой вектор из входной таблицы. Внимание: на позиции после тире Query «спрашивает», Key и Value слов «столица» и «Франции» отвечают весами — и они, кстати, уже лежат в кэше и не пересчитываются. Выход: распределение, где «Париж» получил, скажем, 0.93. Сэмплинг: при нуле температуры берём максимум — «Париж»; цикл делает ещё один оборот и выбирает стоп-токен. Если бы был включён режим рассуждения — перед «Парижем» цикл намотал бы черновые токены; если бы стояла JSON-схема — распределение на каждом шаге фильтровалось бы грамматикой. Один запрос — все стадии, все ручки. Терминологическая норма курса: «авторегрессионный», не «авторегрессивный».</a:t>
             </a:r>
           </a:p>
         </p:txBody>
@@ -3167,7 +3167,7 @@
           </a:p>
           <a:p>
             <a:r>
-              <a:t>Важно зафиксировать: новые темы этой лекции не добавили стадий — они встроились в существующие. Chat-шаблоны — препроцессор стадии токенизации. KV-cache живёт внутри стадии внимания, а кэширование промптов — коммерческая надстройка над ним на границе запросов. Structured outputs — фильтр на стадии сэмплинга: обнуление вероятностей невалидных токенов. Reasoning-токены — не новая стадия, а тот же авторегрессионный цикл, часть выхода которого помечена «черновик». Если каждый новый термин встал для вас на своё место в схеме — ментальная модель собрана.</a:t>
+              <a:t>Важно зафиксировать: новые темы этой лекции не добавили стадий — они встроились в существующие. Chat-шаблоны — препроцессор стадии токенизации. KV-cache живёт внутри стадии внимания, а кэширование промптов — коммерческая надстройка над ним на границе запросов. Structured outputs — фильтр на стадии сэмплинга: обнуление вероятностей невалидных токенов. Reasoning-токены — не новая стадия, а тот же авторегрессионный цикл, часть выхода которого помечена «черновик». Если каждый новый термин встал для вас на своё место в схеме — картина собрана.</a:t>
             </a:r>
           </a:p>
           <a:p>
@@ -3242,7 +3242,7 @@
           <a:lstStyle/>
           <a:p>
             <a:r>
-              <a:t>Фиксируем рамку — не «вспоминаем», а именно фиксируем известное. Лекция 1 дала слоистую картину: внизу модель, над ней цикл чата с системным промптом и историей, над чатом — агентный цикл, сверху — приложение. Модель там описана как stateless-инференс: на вход данные, на выход предсказание, без памяти между вызовами. Оттуда же у нас есть контекстное окно как ограничение, различие локальных и облачных моделей и три уровня причинности Пе́рла — всё это сегодня считается известным и используется без повторного вывода.</a:t>
+              <a:t>Объект сегодняшнего разговора — слой «модель». Лекция 1 дала слоистую картину: внизу модель, над ней цикл чата с системным промптом и историей, над чатом — агентный цикл, сверху — приложение. Модель там описана как stateless-инференс: на вход данные, на выход предсказание, без памяти между вызовами. Оттуда же у нас есть контекстное окно как ограничение, различие локальных и облачных моделей и три уровня причинности Пе́рла — всё это сегодня считается известным и используется без повторного вывода.</a:t>
             </a:r>
           </a:p>
           <a:p>
@@ -3252,7 +3252,7 @@
           </a:p>
           <a:p>
             <a:r>
-              <a:t>Важно понимать жанр этого разбора. Мы не пересказываем устройство трансформера ради полноты — мы идём за границами: в каких местах внутреннее устройство модели меняет то, как вы строите промпты, агентов и решения. Каждый механизм в лекции выбран потому, что у него есть наблюдаемое инженерное следствие — в стоимости, скорости, качестве или воспроизводимости.</a:t>
+              <a:t>Мы идём за границами: в каких местах внутреннее устройство модели меняет то, как вы строите промпты, агентов и решения. Каждый механизм в лекции выбран потому, что у него есть наблюдаемое инженерное следствие — в стоимости, скорости, качестве или воспроизводимости.</a:t>
             </a:r>
           </a:p>
         </p:txBody>
@@ -3502,7 +3502,7 @@
           </a:p>
           <a:p>
             <a:r>
-              <a:t>Общий знаменатель шести строк: точная ментальная модель — это знание границ. Каждое из утверждений — не глупость, а правда соседней области, растянутая за свою границу: буквы модель «видит» — но через патчи; роль работает — но не защищена; окно принимает миллион — но не рассуждает на нём; ноль сужает разброс — но не убирает; рассуждение улучшает качество — но за деньги; бенчмарки информативны — но не как рейтинг для слепого доверия.</a:t>
+              <a:t>Общий знаменатель шести строк: знать инструмент — значит знать его границы. Каждое из утверждений — не глупость, а правда соседней области, растянутая за свою границу: буквы модель «видит» — но через патчи; роль работает — но не защищена; окно принимает миллион — но не рассуждает на нём; ноль сужает разброс — но не убирает; рассуждение улучшает качество — но за деньги; бенчмарки информативны — но не как рейтинг для слепого доверия.</a:t>
             </a:r>
           </a:p>
           <a:p>
@@ -3892,17 +3892,17 @@
           <a:lstStyle/>
           <a:p>
             <a:r>
-              <a:t>Центральный вопрос лекции звучит так: насколько точна ваша ментальная модель LLM — и какие из внутренних механизмов, которые вы знаете приблизительно, при точном понимании меняют то, как вы строите промпты, агентов и решения. Обратите внимание на слово «приблизительно». Эта лекция почти не сообщает опытному пользователю фактов вида «существует такая вещь, как токен» — вы это знаете. Она делает другое: проводит границы.</a:t>
-            </a:r>
-          </a:p>
-          <a:p>
-            <a:r>
-              <a:t>Вы знаете, что токенизация есть, — мы покажем, где именно она ломает арифметику и почему «исправленный» strawberry ничего не доказывает. Вы знаете, что роль в промпте работает, — мы покажем механизм, из-за которого она работает, и его обратную сторону: тот же механизм делает роль подделываемой. Вы пользуетесь temperature=0 для воспроизводимости — мы покажем, почему воспроизводимости всё равно нет и сколько стоит её получить по-настоящему. Добавим к этому реальную цену невидимых токенов рассуждения и то, чем заменить веру в бенчмарки при выборе модели.</a:t>
-            </a:r>
-          </a:p>
-          <a:p>
-            <a:r>
-              <a:t>Шесть строк под вопросом — это те же шесть утверждений чек-листа, переформулированные как обещания: на каждое к концу лекции будет ответ через конкретный механизм, а не через интуицию. Если по ходу покажется, что какой-то механизм не влияет на практику, — ловите меня на слове: таких мы сегодня не разбираем.</a:t>
+              <a:t>Цель лекции: рассмотреть, как работает языковая модель, — и разобраться с важными деталями, которые меняют то, как вы строите промпты, агентов и решения. Мы пройдём конвейер инференса от текста до ответа, и на каждой стадии — вместе с механизмом — покажем его границы.</a:t>
+            </a:r>
+          </a:p>
+          <a:p>
+            <a:r>
+              <a:t>Мы покажем, где именно токенизация ломает арифметику и почему «исправленный» strawberry ничего не доказывает. Покажем механизм, из-за которого роль в промпте работает, и его обратную сторону: тот же механизм делает роль подделываемой. Разберём, почему temperature=0 не даёт воспроизводимости и сколько стоит её получить по-настоящему. Добавим к этому реальную цену невидимых токенов рассуждения и то, чем заменить веру в бенчмарки при выборе модели.</a:t>
+            </a:r>
+          </a:p>
+          <a:p>
+            <a:r>
+              <a:t>Шесть строк под целью — это те же шесть утверждений чек-листа, переформулированные как обещания: на каждое к концу лекции будет ответ через конкретный механизм, а не через интуицию. Если по ходу покажется, что какой-то механизм не влияет на практику, — ловите меня на слове: таких мы сегодня не разбираем.</a:t>
             </a:r>
           </a:p>
         </p:txBody>
@@ -3972,7 +3972,7 @@
           <a:lstStyle/>
           <a:p>
             <a:r>
-              <a:t>Это опорная схема всей лекции — конвейер inference, путь одного запроса от текста до ответа. Посмотрим на него целиком, до первого погружения; дальше мы будем возвращаться к нему на входе в каждый раздел.</a:t>
+              <a:t>Это опорная схема всей лекции — конвейер инференса, путь одного запроса от текста до ответа. Посмотрим на него целиком, до первого погружения; дальше мы будем возвращаться к нему на входе в каждый раздел.</a:t>
             </a:r>
           </a:p>
           <a:p>
@@ -3982,7 +3982,7 @@
           </a:p>
           <a:p>
             <a:r>
-              <a:t>Главное наблюдение: слова существуют только на границах конвейера — на входе и на выходе. Всё внутри — операции над векторами.</a:t>
+              <a:t>Главное наблюдение: слова существуют только на границах конвейера — на входе и на выходе. Всё внутри — операции над векторами. И обратите внимание на петлю в схеме: токены генерируются по одному, каждый выбранный токен добавляется ко входу — и конвейер прокручивается заново; ответ строится последовательными оборотами этой петли.</a:t>
             </a:r>
           </a:p>
           <a:p>
@@ -4137,7 +4137,7 @@
           <a:lstStyle/>
           <a:p>
             <a:r>
-              <a:t>Зафиксируем точное определение — большинство знает его приблизительно, и именно приблизительность потом мешает. Токен — это идентификатор, целое число из словаря модели; словарь зафиксирован при обучении и не меняется в момент использования. Токен — не буква и не слово, а статистически частая подпоследовательность символов, выученная на корпусе. Частое английское `cat` попадает в словарь целиком; `tokenization` распадается на два токена; `клубника` — на три в том же словаре o200k_base. Размер словаря у современных моделей — порядка сотен тысяч записей: около 200 тысяч у семейства GPT-4o и новее, около 100 тысяч у предыдущих поколений, 128 256 у Llama 3 и новее. Рабочий ориентир стоимости: один токен — примерно четыре символа английского и примерно два символа русского текста.</a:t>
+              <a:t>Точное определение. Токен — это идентификатор, целое число из словаря модели; словарь зафиксирован при обучении и не меняется в момент использования. Токен — не буква и не слово, а статистически частая подпоследовательность символов, выученная на корпусе. Частое английское `cat` попадает в словарь целиком; `tokenization` распадается на два токена; `клубника` — на три в том же словаре o200k_base. Размер словаря у современных моделей — порядка сотен тысяч записей: около 200 тысяч у семейства GPT-4o и новее, около 100 тысяч у предыдущих поколений, 128 256 у Llama 3 и новее. Рабочий ориентир стоимости: один токен — примерно четыре символа английского и примерно два символа русского текста.</a:t>
             </a:r>
           </a:p>
           <a:p>
@@ -7241,8 +7241,8 @@
         </p:nvSpPr>
         <p:spPr>
           <a:xfrm>
-            <a:off x="502920" y="384048"/>
-            <a:ext cx="11247120" cy="777240"/>
+            <a:off x="502920" y="256032"/>
+            <a:ext cx="11183112" cy="566928"/>
           </a:xfrm>
           <a:prstGeom prst="rect">
             <a:avLst/>
@@ -7267,23 +7267,53 @@
                 </a:solidFill>
                 <a:latin typeface="Arial"/>
               </a:rPr>
-              <a:t>Сколько из этих утверждений </a:t>
-            </a:r>
-            <a:r>
-              <a:rPr sz="3000" b="1" i="0">
+              <a:t>Шесть утверждений о LLM. Вы верите минимум в одно.</a:t>
+            </a:r>
+          </a:p>
+        </p:txBody>
+      </p:sp>
+      <p:sp>
+        <p:nvSpPr>
+          <p:cNvPr id="3" name="TextBox 2"/>
+          <p:cNvSpPr txBox="1"/>
+          <p:nvPr/>
+        </p:nvSpPr>
+        <p:spPr>
+          <a:xfrm>
+            <a:off x="502920" y="859536"/>
+            <a:ext cx="11183112" cy="841248"/>
+          </a:xfrm>
+          <a:prstGeom prst="rect">
+            <a:avLst/>
+          </a:prstGeom>
+          <a:noFill/>
+        </p:spPr>
+        <p:txBody>
+          <a:bodyPr wrap="square" lIns="0" rIns="0" tIns="0" bIns="0" anchor="ctr">
+            <a:spAutoFit/>
+          </a:bodyPr>
+          <a:lstStyle/>
+          <a:p>
+            <a:pPr algn="ctr">
+              <a:lnSpc>
+                <a:spcPct val="115000"/>
+              </a:lnSpc>
+            </a:pPr>
+            <a:r>
+              <a:rPr sz="4600" b="1" i="0">
                 <a:solidFill>
                   <a:srgbClr val="F0AB00"/>
                 </a:solidFill>
                 <a:latin typeface="Arial"/>
               </a:rPr>
-              <a:t>верны?</a:t>
+              <a:t>Все шесть — ложь.</a:t>
             </a:r>
           </a:p>
         </p:txBody>
       </p:sp>
       <p:pic>
         <p:nvPicPr>
-          <p:cNvPr id="3" name="Picture 2" descr="s01-blackbox-cracks.png"/>
+          <p:cNvPr id="4" name="Picture 3" descr="s01-blackbox-cracks.png"/>
           <p:cNvPicPr>
             <a:picLocks noChangeAspect="1"/>
           </p:cNvPicPr>
@@ -7297,8 +7327,8 @@
         </p:blipFill>
         <p:spPr>
           <a:xfrm>
-            <a:off x="1569567" y="1298448"/>
-            <a:ext cx="9052560" cy="4672289"/>
+            <a:off x="1432407" y="1847088"/>
+            <a:ext cx="9326880" cy="4813874"/>
           </a:xfrm>
           <a:prstGeom prst="rect">
             <a:avLst/>
@@ -7307,24 +7337,26 @@
       </p:pic>
       <p:sp>
         <p:nvSpPr>
-          <p:cNvPr id="4" name="Rounded Rectangle 3"/>
+          <p:cNvPr id="5" name="Rounded Rectangle 4"/>
           <p:cNvSpPr/>
           <p:nvPr/>
         </p:nvSpPr>
         <p:spPr>
           <a:xfrm>
-            <a:off x="769467" y="1481328"/>
-            <a:ext cx="4892040" cy="1389888"/>
+            <a:off x="746607" y="1938528"/>
+            <a:ext cx="10698480" cy="640080"/>
           </a:xfrm>
           <a:prstGeom prst="roundRect">
             <a:avLst>
-              <a:gd name="adj" fmla="val 21929"/>
+              <a:gd name="adj" fmla="val 25000"/>
             </a:avLst>
           </a:prstGeom>
           <a:solidFill>
-            <a:srgbClr val="FFFFFF"/>
+            <a:srgbClr val="FFFFFF">
+              <a:alpha val="86000"/>
+            </a:srgbClr>
           </a:solidFill>
-          <a:ln w="17780">
+          <a:ln w="13970">
             <a:solidFill>
               <a:srgbClr val="1C7293"/>
             </a:solidFill>
@@ -7355,14 +7387,14 @@
       </p:sp>
       <p:sp>
         <p:nvSpPr>
-          <p:cNvPr id="5" name="Oval 4"/>
+          <p:cNvPr id="6" name="Oval 5"/>
           <p:cNvSpPr/>
           <p:nvPr/>
         </p:nvSpPr>
         <p:spPr>
           <a:xfrm>
-            <a:off x="897483" y="1984248"/>
-            <a:ext cx="384048" cy="384048"/>
+            <a:off x="892911" y="2089404"/>
+            <a:ext cx="338328" cy="338328"/>
           </a:xfrm>
           <a:prstGeom prst="ellipse">
             <a:avLst/>
@@ -7395,7 +7427,7 @@
           <a:p>
             <a:pPr algn="ctr"/>
             <a:r>
-              <a:rPr sz="1600" b="1">
+              <a:rPr sz="1500" b="1">
                 <a:solidFill>
                   <a:srgbClr val="FFFFFF"/>
                 </a:solidFill>
@@ -7408,14 +7440,14 @@
       </p:sp>
       <p:sp>
         <p:nvSpPr>
-          <p:cNvPr id="6" name="TextBox 5"/>
-          <p:cNvSpPr txBox="1"/>
-          <p:nvPr/>
-        </p:nvSpPr>
-        <p:spPr>
-          <a:xfrm>
-            <a:off x="1409547" y="1572768"/>
-            <a:ext cx="4087368" cy="1207008"/>
+          <p:cNvPr id="7" name="TextBox 6"/>
+          <p:cNvSpPr txBox="1"/>
+          <p:nvPr/>
+        </p:nvSpPr>
+        <p:spPr>
+          <a:xfrm>
+            <a:off x="1386687" y="1993392"/>
+            <a:ext cx="9857232" cy="530352"/>
           </a:xfrm>
           <a:prstGeom prst="rect">
             <a:avLst/>
@@ -7430,11 +7462,11 @@
           <a:p>
             <a:pPr algn="l">
               <a:lnSpc>
-                <a:spcPct val="114000"/>
+                <a:spcPct val="105000"/>
               </a:lnSpc>
             </a:pPr>
             <a:r>
-              <a:rPr sz="1250" b="0" i="0">
+              <a:rPr sz="1600" b="0" i="0">
                 <a:solidFill>
                   <a:srgbClr val="21295C"/>
                 </a:solidFill>
@@ -7447,24 +7479,26 @@
       </p:sp>
       <p:sp>
         <p:nvSpPr>
-          <p:cNvPr id="7" name="Rounded Rectangle 6"/>
+          <p:cNvPr id="8" name="Rounded Rectangle 7"/>
           <p:cNvSpPr/>
           <p:nvPr/>
         </p:nvSpPr>
         <p:spPr>
           <a:xfrm>
-            <a:off x="6530187" y="1481328"/>
-            <a:ext cx="4892040" cy="1389888"/>
+            <a:off x="746607" y="2656332"/>
+            <a:ext cx="10698480" cy="640080"/>
           </a:xfrm>
           <a:prstGeom prst="roundRect">
             <a:avLst>
-              <a:gd name="adj" fmla="val 21929"/>
+              <a:gd name="adj" fmla="val 25000"/>
             </a:avLst>
           </a:prstGeom>
           <a:solidFill>
-            <a:srgbClr val="FFFFFF"/>
+            <a:srgbClr val="FFFFFF">
+              <a:alpha val="86000"/>
+            </a:srgbClr>
           </a:solidFill>
-          <a:ln w="17780">
+          <a:ln w="13970">
             <a:solidFill>
               <a:srgbClr val="1C7293"/>
             </a:solidFill>
@@ -7495,14 +7529,14 @@
       </p:sp>
       <p:sp>
         <p:nvSpPr>
-          <p:cNvPr id="8" name="Oval 7"/>
+          <p:cNvPr id="9" name="Oval 8"/>
           <p:cNvSpPr/>
           <p:nvPr/>
         </p:nvSpPr>
         <p:spPr>
           <a:xfrm>
-            <a:off x="6658203" y="1984248"/>
-            <a:ext cx="384048" cy="384048"/>
+            <a:off x="892911" y="2807208"/>
+            <a:ext cx="338328" cy="338328"/>
           </a:xfrm>
           <a:prstGeom prst="ellipse">
             <a:avLst/>
@@ -7535,7 +7569,7 @@
           <a:p>
             <a:pPr algn="ctr"/>
             <a:r>
-              <a:rPr sz="1600" b="1">
+              <a:rPr sz="1500" b="1">
                 <a:solidFill>
                   <a:srgbClr val="FFFFFF"/>
                 </a:solidFill>
@@ -7548,14 +7582,14 @@
       </p:sp>
       <p:sp>
         <p:nvSpPr>
-          <p:cNvPr id="9" name="TextBox 8"/>
-          <p:cNvSpPr txBox="1"/>
-          <p:nvPr/>
-        </p:nvSpPr>
-        <p:spPr>
-          <a:xfrm>
-            <a:off x="7170267" y="1572768"/>
-            <a:ext cx="4087368" cy="1207008"/>
+          <p:cNvPr id="10" name="TextBox 9"/>
+          <p:cNvSpPr txBox="1"/>
+          <p:nvPr/>
+        </p:nvSpPr>
+        <p:spPr>
+          <a:xfrm>
+            <a:off x="1386687" y="2711196"/>
+            <a:ext cx="9857232" cy="530352"/>
           </a:xfrm>
           <a:prstGeom prst="rect">
             <a:avLst/>
@@ -7570,11 +7604,11 @@
           <a:p>
             <a:pPr algn="l">
               <a:lnSpc>
-                <a:spcPct val="114000"/>
+                <a:spcPct val="105000"/>
               </a:lnSpc>
             </a:pPr>
             <a:r>
-              <a:rPr sz="1250" b="0" i="0">
+              <a:rPr sz="1600" b="0" i="0">
                 <a:solidFill>
                   <a:srgbClr val="21295C"/>
                 </a:solidFill>
@@ -7587,24 +7621,26 @@
       </p:sp>
       <p:sp>
         <p:nvSpPr>
-          <p:cNvPr id="10" name="Rounded Rectangle 9"/>
+          <p:cNvPr id="11" name="Rounded Rectangle 10"/>
           <p:cNvSpPr/>
           <p:nvPr/>
         </p:nvSpPr>
         <p:spPr>
           <a:xfrm>
-            <a:off x="769467" y="3072384"/>
-            <a:ext cx="4892040" cy="1389888"/>
+            <a:off x="746607" y="3374136"/>
+            <a:ext cx="10698480" cy="640080"/>
           </a:xfrm>
           <a:prstGeom prst="roundRect">
             <a:avLst>
-              <a:gd name="adj" fmla="val 21929"/>
+              <a:gd name="adj" fmla="val 25000"/>
             </a:avLst>
           </a:prstGeom>
           <a:solidFill>
-            <a:srgbClr val="FFFFFF"/>
+            <a:srgbClr val="FFFFFF">
+              <a:alpha val="86000"/>
+            </a:srgbClr>
           </a:solidFill>
-          <a:ln w="17780">
+          <a:ln w="13970">
             <a:solidFill>
               <a:srgbClr val="1C7293"/>
             </a:solidFill>
@@ -7635,14 +7671,14 @@
       </p:sp>
       <p:sp>
         <p:nvSpPr>
-          <p:cNvPr id="11" name="Oval 10"/>
+          <p:cNvPr id="12" name="Oval 11"/>
           <p:cNvSpPr/>
           <p:nvPr/>
         </p:nvSpPr>
         <p:spPr>
           <a:xfrm>
-            <a:off x="897483" y="3575304"/>
-            <a:ext cx="384048" cy="384048"/>
+            <a:off x="892911" y="3525012"/>
+            <a:ext cx="338328" cy="338328"/>
           </a:xfrm>
           <a:prstGeom prst="ellipse">
             <a:avLst/>
@@ -7675,7 +7711,7 @@
           <a:p>
             <a:pPr algn="ctr"/>
             <a:r>
-              <a:rPr sz="1600" b="1">
+              <a:rPr sz="1500" b="1">
                 <a:solidFill>
                   <a:srgbClr val="FFFFFF"/>
                 </a:solidFill>
@@ -7688,14 +7724,14 @@
       </p:sp>
       <p:sp>
         <p:nvSpPr>
-          <p:cNvPr id="12" name="TextBox 11"/>
-          <p:cNvSpPr txBox="1"/>
-          <p:nvPr/>
-        </p:nvSpPr>
-        <p:spPr>
-          <a:xfrm>
-            <a:off x="1409547" y="3163824"/>
-            <a:ext cx="4087368" cy="1207008"/>
+          <p:cNvPr id="13" name="TextBox 12"/>
+          <p:cNvSpPr txBox="1"/>
+          <p:nvPr/>
+        </p:nvSpPr>
+        <p:spPr>
+          <a:xfrm>
+            <a:off x="1386687" y="3429000"/>
+            <a:ext cx="9857232" cy="530352"/>
           </a:xfrm>
           <a:prstGeom prst="rect">
             <a:avLst/>
@@ -7710,11 +7746,11 @@
           <a:p>
             <a:pPr algn="l">
               <a:lnSpc>
-                <a:spcPct val="114000"/>
+                <a:spcPct val="105000"/>
               </a:lnSpc>
             </a:pPr>
             <a:r>
-              <a:rPr sz="1250" b="0" i="0">
+              <a:rPr sz="1600" b="0" i="0">
                 <a:solidFill>
                   <a:srgbClr val="21295C"/>
                 </a:solidFill>
@@ -7727,24 +7763,26 @@
       </p:sp>
       <p:sp>
         <p:nvSpPr>
-          <p:cNvPr id="13" name="Rounded Rectangle 12"/>
+          <p:cNvPr id="14" name="Rounded Rectangle 13"/>
           <p:cNvSpPr/>
           <p:nvPr/>
         </p:nvSpPr>
         <p:spPr>
           <a:xfrm>
-            <a:off x="6530187" y="3072384"/>
-            <a:ext cx="4892040" cy="1389888"/>
+            <a:off x="746607" y="4091940"/>
+            <a:ext cx="10698480" cy="640080"/>
           </a:xfrm>
           <a:prstGeom prst="roundRect">
             <a:avLst>
-              <a:gd name="adj" fmla="val 21929"/>
+              <a:gd name="adj" fmla="val 25000"/>
             </a:avLst>
           </a:prstGeom>
           <a:solidFill>
-            <a:srgbClr val="FFFFFF"/>
+            <a:srgbClr val="FFFFFF">
+              <a:alpha val="86000"/>
+            </a:srgbClr>
           </a:solidFill>
-          <a:ln w="17780">
+          <a:ln w="13970">
             <a:solidFill>
               <a:srgbClr val="1C7293"/>
             </a:solidFill>
@@ -7775,14 +7813,14 @@
       </p:sp>
       <p:sp>
         <p:nvSpPr>
-          <p:cNvPr id="14" name="Oval 13"/>
+          <p:cNvPr id="15" name="Oval 14"/>
           <p:cNvSpPr/>
           <p:nvPr/>
         </p:nvSpPr>
         <p:spPr>
           <a:xfrm>
-            <a:off x="6658203" y="3575304"/>
-            <a:ext cx="384048" cy="384048"/>
+            <a:off x="892911" y="4242816"/>
+            <a:ext cx="338328" cy="338328"/>
           </a:xfrm>
           <a:prstGeom prst="ellipse">
             <a:avLst/>
@@ -7815,7 +7853,7 @@
           <a:p>
             <a:pPr algn="ctr"/>
             <a:r>
-              <a:rPr sz="1600" b="1">
+              <a:rPr sz="1500" b="1">
                 <a:solidFill>
                   <a:srgbClr val="FFFFFF"/>
                 </a:solidFill>
@@ -7828,14 +7866,14 @@
       </p:sp>
       <p:sp>
         <p:nvSpPr>
-          <p:cNvPr id="15" name="TextBox 14"/>
-          <p:cNvSpPr txBox="1"/>
-          <p:nvPr/>
-        </p:nvSpPr>
-        <p:spPr>
-          <a:xfrm>
-            <a:off x="7170267" y="3163824"/>
-            <a:ext cx="4087368" cy="1207008"/>
+          <p:cNvPr id="16" name="TextBox 15"/>
+          <p:cNvSpPr txBox="1"/>
+          <p:nvPr/>
+        </p:nvSpPr>
+        <p:spPr>
+          <a:xfrm>
+            <a:off x="1386687" y="4146804"/>
+            <a:ext cx="9857232" cy="530352"/>
           </a:xfrm>
           <a:prstGeom prst="rect">
             <a:avLst/>
@@ -7850,11 +7888,11 @@
           <a:p>
             <a:pPr algn="l">
               <a:lnSpc>
-                <a:spcPct val="114000"/>
+                <a:spcPct val="105000"/>
               </a:lnSpc>
             </a:pPr>
             <a:r>
-              <a:rPr sz="1250" b="0" i="0">
+              <a:rPr sz="1600" b="0" i="0">
                 <a:solidFill>
                   <a:srgbClr val="21295C"/>
                 </a:solidFill>
@@ -7867,24 +7905,26 @@
       </p:sp>
       <p:sp>
         <p:nvSpPr>
-          <p:cNvPr id="16" name="Rounded Rectangle 15"/>
+          <p:cNvPr id="17" name="Rounded Rectangle 16"/>
           <p:cNvSpPr/>
           <p:nvPr/>
         </p:nvSpPr>
         <p:spPr>
           <a:xfrm>
-            <a:off x="769467" y="4663440"/>
-            <a:ext cx="4892040" cy="1389888"/>
+            <a:off x="746607" y="4809744"/>
+            <a:ext cx="10698480" cy="640080"/>
           </a:xfrm>
           <a:prstGeom prst="roundRect">
             <a:avLst>
-              <a:gd name="adj" fmla="val 21929"/>
+              <a:gd name="adj" fmla="val 25000"/>
             </a:avLst>
           </a:prstGeom>
           <a:solidFill>
-            <a:srgbClr val="FFFFFF"/>
+            <a:srgbClr val="FFFFFF">
+              <a:alpha val="86000"/>
+            </a:srgbClr>
           </a:solidFill>
-          <a:ln w="17780">
+          <a:ln w="13970">
             <a:solidFill>
               <a:srgbClr val="1C7293"/>
             </a:solidFill>
@@ -7915,14 +7955,14 @@
       </p:sp>
       <p:sp>
         <p:nvSpPr>
-          <p:cNvPr id="17" name="Oval 16"/>
+          <p:cNvPr id="18" name="Oval 17"/>
           <p:cNvSpPr/>
           <p:nvPr/>
         </p:nvSpPr>
         <p:spPr>
           <a:xfrm>
-            <a:off x="897483" y="5166359"/>
-            <a:ext cx="384048" cy="384048"/>
+            <a:off x="892911" y="4960620"/>
+            <a:ext cx="338328" cy="338328"/>
           </a:xfrm>
           <a:prstGeom prst="ellipse">
             <a:avLst/>
@@ -7955,7 +7995,7 @@
           <a:p>
             <a:pPr algn="ctr"/>
             <a:r>
-              <a:rPr sz="1600" b="1">
+              <a:rPr sz="1500" b="1">
                 <a:solidFill>
                   <a:srgbClr val="FFFFFF"/>
                 </a:solidFill>
@@ -7968,14 +8008,14 @@
       </p:sp>
       <p:sp>
         <p:nvSpPr>
-          <p:cNvPr id="18" name="TextBox 17"/>
-          <p:cNvSpPr txBox="1"/>
-          <p:nvPr/>
-        </p:nvSpPr>
-        <p:spPr>
-          <a:xfrm>
-            <a:off x="1409547" y="4754879"/>
-            <a:ext cx="4087368" cy="1207008"/>
+          <p:cNvPr id="19" name="TextBox 18"/>
+          <p:cNvSpPr txBox="1"/>
+          <p:nvPr/>
+        </p:nvSpPr>
+        <p:spPr>
+          <a:xfrm>
+            <a:off x="1386687" y="4864608"/>
+            <a:ext cx="9857232" cy="530352"/>
           </a:xfrm>
           <a:prstGeom prst="rect">
             <a:avLst/>
@@ -7990,11 +8030,11 @@
           <a:p>
             <a:pPr algn="l">
               <a:lnSpc>
-                <a:spcPct val="114000"/>
+                <a:spcPct val="105000"/>
               </a:lnSpc>
             </a:pPr>
             <a:r>
-              <a:rPr sz="1250" b="0" i="0">
+              <a:rPr sz="1600" b="0" i="0">
                 <a:solidFill>
                   <a:srgbClr val="21295C"/>
                 </a:solidFill>
@@ -8007,24 +8047,26 @@
       </p:sp>
       <p:sp>
         <p:nvSpPr>
-          <p:cNvPr id="19" name="Rounded Rectangle 18"/>
+          <p:cNvPr id="20" name="Rounded Rectangle 19"/>
           <p:cNvSpPr/>
           <p:nvPr/>
         </p:nvSpPr>
         <p:spPr>
           <a:xfrm>
-            <a:off x="6530187" y="4663440"/>
-            <a:ext cx="4892040" cy="1389888"/>
+            <a:off x="746607" y="5527548"/>
+            <a:ext cx="10698480" cy="640080"/>
           </a:xfrm>
           <a:prstGeom prst="roundRect">
             <a:avLst>
-              <a:gd name="adj" fmla="val 21929"/>
+              <a:gd name="adj" fmla="val 25000"/>
             </a:avLst>
           </a:prstGeom>
           <a:solidFill>
-            <a:srgbClr val="FFFFFF"/>
+            <a:srgbClr val="FFFFFF">
+              <a:alpha val="86000"/>
+            </a:srgbClr>
           </a:solidFill>
-          <a:ln w="17780">
+          <a:ln w="13970">
             <a:solidFill>
               <a:srgbClr val="1C7293"/>
             </a:solidFill>
@@ -8055,14 +8097,14 @@
       </p:sp>
       <p:sp>
         <p:nvSpPr>
-          <p:cNvPr id="20" name="Oval 19"/>
+          <p:cNvPr id="21" name="Oval 20"/>
           <p:cNvSpPr/>
           <p:nvPr/>
         </p:nvSpPr>
         <p:spPr>
           <a:xfrm>
-            <a:off x="6658203" y="5166359"/>
-            <a:ext cx="384048" cy="384048"/>
+            <a:off x="892911" y="5678424"/>
+            <a:ext cx="338328" cy="338328"/>
           </a:xfrm>
           <a:prstGeom prst="ellipse">
             <a:avLst/>
@@ -8095,7 +8137,7 @@
           <a:p>
             <a:pPr algn="ctr"/>
             <a:r>
-              <a:rPr sz="1600" b="1">
+              <a:rPr sz="1500" b="1">
                 <a:solidFill>
                   <a:srgbClr val="FFFFFF"/>
                 </a:solidFill>
@@ -8108,14 +8150,14 @@
       </p:sp>
       <p:sp>
         <p:nvSpPr>
-          <p:cNvPr id="21" name="TextBox 20"/>
-          <p:cNvSpPr txBox="1"/>
-          <p:nvPr/>
-        </p:nvSpPr>
-        <p:spPr>
-          <a:xfrm>
-            <a:off x="7170267" y="4754879"/>
-            <a:ext cx="4087368" cy="1207008"/>
+          <p:cNvPr id="22" name="TextBox 21"/>
+          <p:cNvSpPr txBox="1"/>
+          <p:nvPr/>
+        </p:nvSpPr>
+        <p:spPr>
+          <a:xfrm>
+            <a:off x="1386687" y="5582412"/>
+            <a:ext cx="9857232" cy="530352"/>
           </a:xfrm>
           <a:prstGeom prst="rect">
             <a:avLst/>
@@ -8130,11 +8172,11 @@
           <a:p>
             <a:pPr algn="l">
               <a:lnSpc>
-                <a:spcPct val="114000"/>
+                <a:spcPct val="105000"/>
               </a:lnSpc>
             </a:pPr>
             <a:r>
-              <a:rPr sz="1250" b="0" i="0">
+              <a:rPr sz="1600" b="0" i="0">
                 <a:solidFill>
                   <a:srgbClr val="21295C"/>
                 </a:solidFill>
@@ -8147,7 +8189,7 @@
       </p:sp>
       <p:sp>
         <p:nvSpPr>
-          <p:cNvPr id="22" name="TextBox 21"/>
+          <p:cNvPr id="23" name="TextBox 22"/>
           <p:cNvSpPr txBox="1"/>
           <p:nvPr/>
         </p:nvSpPr>
@@ -8206,8 +8248,8 @@
         </p:nvSpPr>
         <p:spPr>
           <a:xfrm>
-            <a:off x="502920" y="457200"/>
-            <a:ext cx="11247120" cy="914400"/>
+            <a:off x="502920" y="347472"/>
+            <a:ext cx="11247120" cy="502920"/>
           </a:xfrm>
           <a:prstGeom prst="rect">
             <a:avLst/>
@@ -8239,18 +8281,57 @@
       </p:sp>
       <p:sp>
         <p:nvSpPr>
-          <p:cNvPr id="3" name="Rounded Rectangle 2"/>
+          <p:cNvPr id="3" name="TextBox 2"/>
+          <p:cNvSpPr txBox="1"/>
+          <p:nvPr/>
+        </p:nvSpPr>
+        <p:spPr>
+          <a:xfrm>
+            <a:off x="502920" y="896112"/>
+            <a:ext cx="11247120" cy="384048"/>
+          </a:xfrm>
+          <a:prstGeom prst="rect">
+            <a:avLst/>
+          </a:prstGeom>
+          <a:noFill/>
+        </p:spPr>
+        <p:txBody>
+          <a:bodyPr wrap="square" lIns="0" rIns="0" tIns="0" bIns="0" anchor="t">
+            <a:spAutoFit/>
+          </a:bodyPr>
+          <a:lstStyle/>
+          <a:p>
+            <a:pPr algn="l">
+              <a:lnSpc>
+                <a:spcPct val="115000"/>
+              </a:lnSpc>
+            </a:pPr>
+            <a:r>
+              <a:rPr sz="1450" b="0" i="1">
+                <a:solidFill>
+                  <a:srgbClr val="065A82"/>
+                </a:solidFill>
+                <a:latin typeface="Arial"/>
+              </a:rPr>
+              <a:t>Модель принимает один плоский поток токенов. Chat-формат — соглашение поверх него, а не часть архитектуры.</a:t>
+            </a:r>
+          </a:p>
+        </p:txBody>
+      </p:sp>
+      <p:sp>
+        <p:nvSpPr>
+          <p:cNvPr id="4" name="Rounded Rectangle 3"/>
           <p:cNvSpPr/>
           <p:nvPr/>
         </p:nvSpPr>
         <p:spPr>
           <a:xfrm>
-            <a:off x="502920" y="1508760"/>
-            <a:ext cx="5989320" cy="1325880"/>
+            <a:off x="502920" y="1417320"/>
+            <a:ext cx="5989320" cy="1234440"/>
           </a:xfrm>
           <a:prstGeom prst="roundRect">
             <a:avLst>
-              <a:gd name="adj" fmla="val 22988"/>
+              <a:gd name="adj" fmla="val 24691"/>
             </a:avLst>
           </a:prstGeom>
           <a:solidFill>
@@ -8287,13 +8368,13 @@
       </p:sp>
       <p:sp>
         <p:nvSpPr>
-          <p:cNvPr id="4" name="TextBox 3"/>
-          <p:cNvSpPr txBox="1"/>
-          <p:nvPr/>
-        </p:nvSpPr>
-        <p:spPr>
-          <a:xfrm>
-            <a:off x="731520" y="1627632"/>
+          <p:cNvPr id="5" name="TextBox 4"/>
+          <p:cNvSpPr txBox="1"/>
+          <p:nvPr/>
+        </p:nvSpPr>
+        <p:spPr>
+          <a:xfrm>
+            <a:off x="731520" y="1517904"/>
             <a:ext cx="5577840" cy="365760"/>
           </a:xfrm>
           <a:prstGeom prst="rect">
@@ -8326,14 +8407,14 @@
       </p:sp>
       <p:sp>
         <p:nvSpPr>
-          <p:cNvPr id="5" name="TextBox 4"/>
-          <p:cNvSpPr txBox="1"/>
-          <p:nvPr/>
-        </p:nvSpPr>
-        <p:spPr>
-          <a:xfrm>
-            <a:off x="731520" y="1993392"/>
-            <a:ext cx="5577840" cy="777240"/>
+          <p:cNvPr id="6" name="TextBox 5"/>
+          <p:cNvSpPr txBox="1"/>
+          <p:nvPr/>
+        </p:nvSpPr>
+        <p:spPr>
+          <a:xfrm>
+            <a:off x="731520" y="1874519"/>
+            <a:ext cx="5577840" cy="731520"/>
           </a:xfrm>
           <a:prstGeom prst="rect">
             <a:avLst/>
@@ -8384,14 +8465,14 @@
       </p:sp>
       <p:sp>
         <p:nvSpPr>
-          <p:cNvPr id="6" name="Down Arrow 5"/>
+          <p:cNvPr id="7" name="Down Arrow 6"/>
           <p:cNvSpPr/>
           <p:nvPr/>
         </p:nvSpPr>
         <p:spPr>
           <a:xfrm>
-            <a:off x="3246120" y="2944368"/>
-            <a:ext cx="411480" cy="502920"/>
+            <a:off x="3246120" y="2724912"/>
+            <a:ext cx="384048" cy="457200"/>
           </a:xfrm>
           <a:prstGeom prst="downArrow">
             <a:avLst/>
@@ -8428,13 +8509,13 @@
       </p:sp>
       <p:sp>
         <p:nvSpPr>
-          <p:cNvPr id="7" name="TextBox 6"/>
-          <p:cNvSpPr txBox="1"/>
-          <p:nvPr/>
-        </p:nvSpPr>
-        <p:spPr>
-          <a:xfrm>
-            <a:off x="3794760" y="3017520"/>
+          <p:cNvPr id="8" name="TextBox 7"/>
+          <p:cNvSpPr txBox="1"/>
+          <p:nvPr/>
+        </p:nvSpPr>
+        <p:spPr>
+          <a:xfrm>
+            <a:off x="3767328" y="2788920"/>
             <a:ext cx="2377440" cy="365760"/>
           </a:xfrm>
           <a:prstGeom prst="rect">
@@ -8467,18 +8548,18 @@
       </p:sp>
       <p:sp>
         <p:nvSpPr>
-          <p:cNvPr id="8" name="Rounded Rectangle 7"/>
+          <p:cNvPr id="9" name="Rounded Rectangle 8"/>
           <p:cNvSpPr/>
           <p:nvPr/>
         </p:nvSpPr>
         <p:spPr>
           <a:xfrm>
-            <a:off x="502920" y="3611880"/>
-            <a:ext cx="5989320" cy="1417320"/>
+            <a:off x="502920" y="3291840"/>
+            <a:ext cx="5989320" cy="1371600"/>
           </a:xfrm>
           <a:prstGeom prst="roundRect">
             <a:avLst>
-              <a:gd name="adj" fmla="val 21505"/>
+              <a:gd name="adj" fmla="val 22222"/>
             </a:avLst>
           </a:prstGeom>
           <a:solidFill>
@@ -8515,13 +8596,13 @@
       </p:sp>
       <p:sp>
         <p:nvSpPr>
-          <p:cNvPr id="9" name="TextBox 8"/>
-          <p:cNvSpPr txBox="1"/>
-          <p:nvPr/>
-        </p:nvSpPr>
-        <p:spPr>
-          <a:xfrm>
-            <a:off x="731520" y="3730752"/>
+          <p:cNvPr id="10" name="TextBox 9"/>
+          <p:cNvSpPr txBox="1"/>
+          <p:nvPr/>
+        </p:nvSpPr>
+        <p:spPr>
+          <a:xfrm>
+            <a:off x="731520" y="3401568"/>
             <a:ext cx="5577840" cy="365760"/>
           </a:xfrm>
           <a:prstGeom prst="rect">
@@ -8554,14 +8635,14 @@
       </p:sp>
       <p:sp>
         <p:nvSpPr>
-          <p:cNvPr id="10" name="TextBox 9"/>
-          <p:cNvSpPr txBox="1"/>
-          <p:nvPr/>
-        </p:nvSpPr>
-        <p:spPr>
-          <a:xfrm>
-            <a:off x="731520" y="4114800"/>
-            <a:ext cx="5577840" cy="1097280"/>
+          <p:cNvPr id="11" name="TextBox 10"/>
+          <p:cNvSpPr txBox="1"/>
+          <p:nvPr/>
+        </p:nvSpPr>
+        <p:spPr>
+          <a:xfrm>
+            <a:off x="731520" y="3767328"/>
+            <a:ext cx="5577840" cy="914400"/>
           </a:xfrm>
           <a:prstGeom prst="rect">
             <a:avLst/>
@@ -8648,14 +8729,140 @@
       </p:sp>
       <p:sp>
         <p:nvSpPr>
-          <p:cNvPr id="11" name="Rounded Rectangle 10"/>
+          <p:cNvPr id="12" name="Rounded Rectangle 11"/>
           <p:cNvSpPr/>
           <p:nvPr/>
         </p:nvSpPr>
         <p:spPr>
           <a:xfrm>
-            <a:off x="6812280" y="1920240"/>
-            <a:ext cx="4892040" cy="2697480"/>
+            <a:off x="6812280" y="1417320"/>
+            <a:ext cx="4892040" cy="1627632"/>
+          </a:xfrm>
+          <a:prstGeom prst="roundRect">
+            <a:avLst>
+              <a:gd name="adj" fmla="val 18726"/>
+            </a:avLst>
+          </a:prstGeom>
+          <a:solidFill>
+            <a:srgbClr val="FFFFFF"/>
+          </a:solidFill>
+          <a:ln w="17780">
+            <a:solidFill>
+              <a:srgbClr val="028090"/>
+            </a:solidFill>
+          </a:ln>
+          <a:effectLst/>
+        </p:spPr>
+        <p:style>
+          <a:lnRef idx="1">
+            <a:schemeClr val="accent1"/>
+          </a:lnRef>
+          <a:fillRef idx="3">
+            <a:schemeClr val="accent1"/>
+          </a:fillRef>
+          <a:effectRef idx="2">
+            <a:schemeClr val="accent1"/>
+          </a:effectRef>
+          <a:fontRef idx="minor">
+            <a:schemeClr val="lt1"/>
+          </a:fontRef>
+        </p:style>
+        <p:txBody>
+          <a:bodyPr rtlCol="0" anchor="ctr"/>
+          <a:lstStyle/>
+          <a:p>
+            <a:pPr algn="ctr"/>
+          </a:p>
+        </p:txBody>
+      </p:sp>
+      <p:sp>
+        <p:nvSpPr>
+          <p:cNvPr id="13" name="TextBox 12"/>
+          <p:cNvSpPr txBox="1"/>
+          <p:nvPr/>
+        </p:nvSpPr>
+        <p:spPr>
+          <a:xfrm>
+            <a:off x="7059168" y="1536192"/>
+            <a:ext cx="4434840" cy="365760"/>
+          </a:xfrm>
+          <a:prstGeom prst="rect">
+            <a:avLst/>
+          </a:prstGeom>
+          <a:noFill/>
+        </p:spPr>
+        <p:txBody>
+          <a:bodyPr wrap="square" lIns="0" rIns="0" tIns="0" bIns="0" anchor="t">
+            <a:spAutoFit/>
+          </a:bodyPr>
+          <a:lstStyle/>
+          <a:p>
+            <a:pPr algn="l">
+              <a:lnSpc>
+                <a:spcPct val="115000"/>
+              </a:lnSpc>
+            </a:pPr>
+            <a:r>
+              <a:rPr sz="1450" b="1" i="0">
+                <a:solidFill>
+                  <a:srgbClr val="028090"/>
+                </a:solidFill>
+                <a:latin typeface="Arial"/>
+              </a:rPr>
+              <a:t>Протокольные роли ≠ «роли» из текста</a:t>
+            </a:r>
+          </a:p>
+        </p:txBody>
+      </p:sp>
+      <p:sp>
+        <p:nvSpPr>
+          <p:cNvPr id="14" name="TextBox 13"/>
+          <p:cNvSpPr txBox="1"/>
+          <p:nvPr/>
+        </p:nvSpPr>
+        <p:spPr>
+          <a:xfrm>
+            <a:off x="7059168" y="1920240"/>
+            <a:ext cx="4434840" cy="1051560"/>
+          </a:xfrm>
+          <a:prstGeom prst="rect">
+            <a:avLst/>
+          </a:prstGeom>
+          <a:noFill/>
+        </p:spPr>
+        <p:txBody>
+          <a:bodyPr wrap="square" lIns="0" rIns="0" tIns="0" bIns="0" anchor="t">
+            <a:spAutoFit/>
+          </a:bodyPr>
+          <a:lstStyle/>
+          <a:p>
+            <a:pPr algn="l">
+              <a:lnSpc>
+                <a:spcPct val="118000"/>
+              </a:lnSpc>
+            </a:pPr>
+            <a:r>
+              <a:rPr sz="1250" b="0" i="0">
+                <a:solidFill>
+                  <a:srgbClr val="21295C"/>
+                </a:solidFill>
+                <a:latin typeface="Arial"/>
+              </a:rPr>
+              <a:t>system/user/assistant — структура диалога, собранная спецтокенами. «Ты — лучший разработчик» в тексте промпта — просто содержимое сообщения, не протокольная роль.</a:t>
+            </a:r>
+          </a:p>
+        </p:txBody>
+      </p:sp>
+      <p:sp>
+        <p:nvSpPr>
+          <p:cNvPr id="15" name="Rounded Rectangle 14"/>
+          <p:cNvSpPr/>
+          <p:nvPr/>
+        </p:nvSpPr>
+        <p:spPr>
+          <a:xfrm>
+            <a:off x="6812280" y="3182112"/>
+            <a:ext cx="4892040" cy="1481328"/>
           </a:xfrm>
           <a:prstGeom prst="roundRect">
             <a:avLst>
@@ -8696,14 +8903,14 @@
       </p:sp>
       <p:sp>
         <p:nvSpPr>
-          <p:cNvPr id="12" name="TextBox 11"/>
-          <p:cNvSpPr txBox="1"/>
-          <p:nvPr/>
-        </p:nvSpPr>
-        <p:spPr>
-          <a:xfrm>
-            <a:off x="7086600" y="2148840"/>
-            <a:ext cx="4389120" cy="411480"/>
+          <p:cNvPr id="16" name="TextBox 15"/>
+          <p:cNvSpPr txBox="1"/>
+          <p:nvPr/>
+        </p:nvSpPr>
+        <p:spPr>
+          <a:xfrm>
+            <a:off x="7059168" y="3273552"/>
+            <a:ext cx="4434840" cy="347472"/>
           </a:xfrm>
           <a:prstGeom prst="rect">
             <a:avLst/>
@@ -8722,7 +8929,7 @@
               </a:lnSpc>
             </a:pPr>
             <a:r>
-              <a:rPr sz="1800" b="1" i="0">
+              <a:rPr sz="1500" b="1" i="0">
                 <a:solidFill>
                   <a:srgbClr val="21295C"/>
                 </a:solidFill>
@@ -8735,14 +8942,14 @@
       </p:sp>
       <p:sp>
         <p:nvSpPr>
-          <p:cNvPr id="13" name="TextBox 12"/>
-          <p:cNvSpPr txBox="1"/>
-          <p:nvPr/>
-        </p:nvSpPr>
-        <p:spPr>
-          <a:xfrm>
-            <a:off x="7086600" y="2651760"/>
-            <a:ext cx="4389120" cy="1234440"/>
+          <p:cNvPr id="17" name="TextBox 16"/>
+          <p:cNvSpPr txBox="1"/>
+          <p:nvPr/>
+        </p:nvSpPr>
+        <p:spPr>
+          <a:xfrm>
+            <a:off x="7059168" y="3621024"/>
+            <a:ext cx="4434840" cy="749808"/>
           </a:xfrm>
           <a:prstGeom prst="rect">
             <a:avLst/>
@@ -8757,31 +8964,31 @@
           <a:p>
             <a:pPr algn="l">
               <a:lnSpc>
-                <a:spcPct val="125000"/>
+                <a:spcPct val="114000"/>
               </a:lnSpc>
             </a:pPr>
             <a:r>
-              <a:rPr sz="1500" b="0" i="0">
+              <a:rPr sz="1200" b="0" i="0">
                 <a:solidFill>
                   <a:srgbClr val="21295C"/>
                 </a:solidFill>
                 <a:latin typeface="Arial"/>
               </a:rPr>
-              <a:t>Внешний контент (веб-страница, файл, письмо) со строкой, похожей на разметку роли, вливается в тот же поток токенов — отдельного «защищённого канала» для ролей нет.</a:t>
-            </a:r>
-          </a:p>
-        </p:txBody>
-      </p:sp>
-      <p:sp>
-        <p:nvSpPr>
-          <p:cNvPr id="14" name="TextBox 13"/>
-          <p:cNvSpPr txBox="1"/>
-          <p:nvPr/>
-        </p:nvSpPr>
-        <p:spPr>
-          <a:xfrm>
-            <a:off x="7086600" y="3977639"/>
-            <a:ext cx="4389120" cy="548640"/>
+              <a:t>Внешний контент (веб-страница, файл, письмо) со строкой, похожей на разметку роли, вливается в тот же поток — отдельного «защищённого канала» нет.</a:t>
+            </a:r>
+          </a:p>
+        </p:txBody>
+      </p:sp>
+      <p:sp>
+        <p:nvSpPr>
+          <p:cNvPr id="18" name="TextBox 17"/>
+          <p:cNvSpPr txBox="1"/>
+          <p:nvPr/>
+        </p:nvSpPr>
+        <p:spPr>
+          <a:xfrm>
+            <a:off x="7059168" y="4370832"/>
+            <a:ext cx="4434840" cy="274320"/>
           </a:xfrm>
           <a:prstGeom prst="rect">
             <a:avLst/>
@@ -8800,7 +9007,7 @@
               </a:lnSpc>
             </a:pPr>
             <a:r>
-              <a:rPr sz="1200" b="1" i="0">
+              <a:rPr sz="1150" b="1" i="0">
                 <a:solidFill>
                   <a:srgbClr val="028090"/>
                 </a:solidFill>
@@ -8809,7 +9016,7 @@
               <a:t>&lt;|im_start|&gt;assistant</a:t>
             </a:r>
             <a:r>
-              <a:rPr sz="1250" b="0" i="1">
+              <a:rPr sz="1200" b="0" i="1">
                 <a:solidFill>
                   <a:srgbClr val="6B7685"/>
                 </a:solidFill>
@@ -8822,14 +9029,110 @@
       </p:sp>
       <p:sp>
         <p:nvSpPr>
-          <p:cNvPr id="15" name="TextBox 14"/>
-          <p:cNvSpPr txBox="1"/>
-          <p:nvPr/>
-        </p:nvSpPr>
-        <p:spPr>
-          <a:xfrm>
-            <a:off x="502920" y="5806440"/>
-            <a:ext cx="11247120" cy="457200"/>
+          <p:cNvPr id="19" name="Rounded Rectangle 18"/>
+          <p:cNvSpPr/>
+          <p:nvPr/>
+        </p:nvSpPr>
+        <p:spPr>
+          <a:xfrm>
+            <a:off x="502920" y="4846320"/>
+            <a:ext cx="11201400" cy="804672"/>
+          </a:xfrm>
+          <a:prstGeom prst="roundRect">
+            <a:avLst>
+              <a:gd name="adj" fmla="val 25000"/>
+            </a:avLst>
+          </a:prstGeom>
+          <a:solidFill>
+            <a:srgbClr val="F4F7FA"/>
+          </a:solidFill>
+          <a:ln w="17780">
+            <a:solidFill>
+              <a:srgbClr val="065A82"/>
+            </a:solidFill>
+          </a:ln>
+          <a:effectLst/>
+        </p:spPr>
+        <p:style>
+          <a:lnRef idx="1">
+            <a:schemeClr val="accent1"/>
+          </a:lnRef>
+          <a:fillRef idx="3">
+            <a:schemeClr val="accent1"/>
+          </a:fillRef>
+          <a:effectRef idx="2">
+            <a:schemeClr val="accent1"/>
+          </a:effectRef>
+          <a:fontRef idx="minor">
+            <a:schemeClr val="lt1"/>
+          </a:fontRef>
+        </p:style>
+        <p:txBody>
+          <a:bodyPr rtlCol="0" anchor="ctr"/>
+          <a:lstStyle/>
+          <a:p>
+            <a:pPr algn="ctr"/>
+          </a:p>
+        </p:txBody>
+      </p:sp>
+      <p:sp>
+        <p:nvSpPr>
+          <p:cNvPr id="20" name="TextBox 19"/>
+          <p:cNvSpPr txBox="1"/>
+          <p:nvPr/>
+        </p:nvSpPr>
+        <p:spPr>
+          <a:xfrm>
+            <a:off x="777240" y="4937760"/>
+            <a:ext cx="10698480" cy="640080"/>
+          </a:xfrm>
+          <a:prstGeom prst="rect">
+            <a:avLst/>
+          </a:prstGeom>
+          <a:noFill/>
+        </p:spPr>
+        <p:txBody>
+          <a:bodyPr wrap="square" lIns="0" rIns="0" tIns="0" bIns="0" anchor="t">
+            <a:spAutoFit/>
+          </a:bodyPr>
+          <a:lstStyle/>
+          <a:p>
+            <a:pPr algn="l">
+              <a:lnSpc>
+                <a:spcPct val="120000"/>
+              </a:lnSpc>
+            </a:pPr>
+            <a:r>
+              <a:rPr sz="1350" b="1" i="0">
+                <a:solidFill>
+                  <a:srgbClr val="065A82"/>
+                </a:solidFill>
+                <a:latin typeface="Arial"/>
+              </a:rPr>
+              <a:t>Что с этого: </a:t>
+            </a:r>
+            <a:r>
+              <a:rPr sz="1350" b="0" i="0">
+                <a:solidFill>
+                  <a:srgbClr val="21295C"/>
+                </a:solidFill>
+                <a:latin typeface="Arial"/>
+              </a:rPr>
+              <a:t>фильтруйте внешний контент до попадания в контекст (экранирование, детекция спецтокенов)  ·  при локальном запуске проверяйте chat-шаблон — модель с чужим шаблоном молча глупеет.</a:t>
+            </a:r>
+          </a:p>
+        </p:txBody>
+      </p:sp>
+      <p:sp>
+        <p:nvSpPr>
+          <p:cNvPr id="21" name="TextBox 20"/>
+          <p:cNvSpPr txBox="1"/>
+          <p:nvPr/>
+        </p:nvSpPr>
+        <p:spPr>
+          <a:xfrm>
+            <a:off x="502920" y="5852160"/>
+            <a:ext cx="11247120" cy="411480"/>
           </a:xfrm>
           <a:prstGeom prst="rect">
             <a:avLst/>
@@ -8854,14 +9157,14 @@
                 </a:solidFill>
                 <a:latin typeface="Arial"/>
               </a:rPr>
-              <a:t>Почему роль при этом работает — и почему подделанная работает так же — вторая половина ответа в разделе про внимание.</a:t>
-            </a:r>
-          </a:p>
-        </p:txBody>
-      </p:sp>
-      <p:sp>
-        <p:nvSpPr>
-          <p:cNvPr id="16" name="TextBox 15"/>
+              <a:t>Почему роль при этом работает — и почему подделанная работает так же — в разделе про внимание.</a:t>
+            </a:r>
+          </a:p>
+        </p:txBody>
+      </p:sp>
+      <p:sp>
+        <p:nvSpPr>
+          <p:cNvPr id="22" name="TextBox 21"/>
           <p:cNvSpPr txBox="1"/>
           <p:nvPr/>
         </p:nvSpPr>
@@ -9566,7 +9869,7 @@
         </p:nvSpPr>
         <p:spPr>
           <a:xfrm>
-            <a:off x="502920" y="5257800"/>
+            <a:off x="502920" y="5138928"/>
             <a:ext cx="11201400" cy="777240"/>
           </a:xfrm>
           <a:prstGeom prst="roundRect">
@@ -9614,7 +9917,7 @@
         </p:nvSpPr>
         <p:spPr>
           <a:xfrm>
-            <a:off x="685800" y="5312664"/>
+            <a:off x="685800" y="5193792"/>
             <a:ext cx="10835640" cy="667512"/>
           </a:xfrm>
           <a:prstGeom prst="rect">
@@ -9634,13 +9937,13 @@
               </a:lnSpc>
             </a:pPr>
             <a:r>
-              <a:rPr sz="1600" b="1" i="0">
+              <a:rPr sz="1450" b="1" i="0">
                 <a:solidFill>
                   <a:srgbClr val="21295C"/>
                 </a:solidFill>
                 <a:latin typeface="Arial"/>
               </a:rPr>
-              <a:t>«Рваный интеллект» (jagged intelligence): успех на впечатляющей задаче ≠ надёжность на простой.</a:t>
+              <a:t>«Рваный интеллект» (jagged intelligence): уровень навыка задаётся данными обучения, а не «общим умом» — модель берёт олимпиадное золото и проваливает подсчёт букв.</a:t>
             </a:r>
           </a:p>
         </p:txBody>
@@ -9648,6 +9951,54 @@
       <p:sp>
         <p:nvSpPr>
           <p:cNvPr id="18" name="TextBox 17"/>
+          <p:cNvSpPr txBox="1"/>
+          <p:nvPr/>
+        </p:nvSpPr>
+        <p:spPr>
+          <a:xfrm>
+            <a:off x="502920" y="6035040"/>
+            <a:ext cx="11201400" cy="365760"/>
+          </a:xfrm>
+          <a:prstGeom prst="rect">
+            <a:avLst/>
+          </a:prstGeom>
+          <a:noFill/>
+        </p:spPr>
+        <p:txBody>
+          <a:bodyPr wrap="square" lIns="0" rIns="0" tIns="0" bIns="0" anchor="t">
+            <a:spAutoFit/>
+          </a:bodyPr>
+          <a:lstStyle/>
+          <a:p>
+            <a:pPr algn="ctr">
+              <a:lnSpc>
+                <a:spcPct val="115000"/>
+              </a:lnSpc>
+            </a:pPr>
+            <a:r>
+              <a:rPr sz="1350" b="1" i="0">
+                <a:solidFill>
+                  <a:srgbClr val="065A82"/>
+                </a:solidFill>
+                <a:latin typeface="Arial"/>
+              </a:rPr>
+              <a:t>Что делать: </a:t>
+            </a:r>
+            <a:r>
+              <a:rPr sz="1350" b="0" i="0">
+                <a:solidFill>
+                  <a:srgbClr val="21295C"/>
+                </a:solidFill>
+                <a:latin typeface="Arial"/>
+              </a:rPr>
+              <a:t>тестируйте «cranberry своей предметки» — редкие случаи, на которых никто не хайпил; вирусное прохождение ≠ навык.</a:t>
+            </a:r>
+          </a:p>
+        </p:txBody>
+      </p:sp>
+      <p:sp>
+        <p:nvSpPr>
+          <p:cNvPr id="19" name="TextBox 18"/>
           <p:cNvSpPr txBox="1"/>
           <p:nvPr/>
         </p:nvSpPr>
@@ -9706,8 +10057,8 @@
         </p:nvSpPr>
         <p:spPr>
           <a:xfrm>
-            <a:off x="502920" y="457200"/>
-            <a:ext cx="11247120" cy="914400"/>
+            <a:off x="502920" y="384048"/>
+            <a:ext cx="11247120" cy="548640"/>
           </a:xfrm>
           <a:prstGeom prst="rect">
             <a:avLst/>
@@ -9739,18 +10090,57 @@
       </p:sp>
       <p:sp>
         <p:nvSpPr>
-          <p:cNvPr id="3" name="Rounded Rectangle 2"/>
+          <p:cNvPr id="3" name="TextBox 2"/>
+          <p:cNvSpPr txBox="1"/>
+          <p:nvPr/>
+        </p:nvSpPr>
+        <p:spPr>
+          <a:xfrm>
+            <a:off x="502920" y="987552"/>
+            <a:ext cx="11247120" cy="384048"/>
+          </a:xfrm>
+          <a:prstGeom prst="rect">
+            <a:avLst/>
+          </a:prstGeom>
+          <a:noFill/>
+        </p:spPr>
+        <p:txBody>
+          <a:bodyPr wrap="square" lIns="0" rIns="0" tIns="0" bIns="0" anchor="t">
+            <a:spAutoFit/>
+          </a:bodyPr>
+          <a:lstStyle/>
+          <a:p>
+            <a:pPr algn="l">
+              <a:lnSpc>
+                <a:spcPct val="115000"/>
+              </a:lnSpc>
+            </a:pPr>
+            <a:r>
+              <a:rPr sz="1450" b="0" i="1">
+                <a:solidFill>
+                  <a:srgbClr val="065A82"/>
+                </a:solidFill>
+                <a:latin typeface="Arial"/>
+              </a:rPr>
+              <a:t>Числа и код — самые частые «нетекстовые» входы: от их нарезки зависят арифметика модели и ваш бюджет токенов.</a:t>
+            </a:r>
+          </a:p>
+        </p:txBody>
+      </p:sp>
+      <p:sp>
+        <p:nvSpPr>
+          <p:cNvPr id="4" name="Rounded Rectangle 3"/>
           <p:cNvSpPr/>
           <p:nvPr/>
         </p:nvSpPr>
         <p:spPr>
           <a:xfrm>
-            <a:off x="502920" y="1554480"/>
-            <a:ext cx="5486400" cy="3063240"/>
+            <a:off x="502920" y="1481328"/>
+            <a:ext cx="5486400" cy="3017520"/>
           </a:xfrm>
           <a:prstGeom prst="roundRect">
             <a:avLst>
-              <a:gd name="adj" fmla="val 9950"/>
+              <a:gd name="adj" fmla="val 10101"/>
             </a:avLst>
           </a:prstGeom>
           <a:solidFill>
@@ -9787,13 +10177,13 @@
       </p:sp>
       <p:sp>
         <p:nvSpPr>
-          <p:cNvPr id="4" name="TextBox 3"/>
-          <p:cNvSpPr txBox="1"/>
-          <p:nvPr/>
-        </p:nvSpPr>
-        <p:spPr>
-          <a:xfrm>
-            <a:off x="777240" y="1719072"/>
+          <p:cNvPr id="5" name="TextBox 4"/>
+          <p:cNvSpPr txBox="1"/>
+          <p:nvPr/>
+        </p:nvSpPr>
+        <p:spPr>
+          <a:xfrm>
+            <a:off x="777240" y="1645920"/>
             <a:ext cx="4937760" cy="411480"/>
           </a:xfrm>
           <a:prstGeom prst="rect">
@@ -9826,13 +10216,13 @@
       </p:sp>
       <p:sp>
         <p:nvSpPr>
-          <p:cNvPr id="5" name="TextBox 4"/>
-          <p:cNvSpPr txBox="1"/>
-          <p:nvPr/>
-        </p:nvSpPr>
-        <p:spPr>
-          <a:xfrm>
-            <a:off x="777240" y="2286000"/>
+          <p:cNvPr id="6" name="TextBox 5"/>
+          <p:cNvSpPr txBox="1"/>
+          <p:nvPr/>
+        </p:nvSpPr>
+        <p:spPr>
+          <a:xfrm>
+            <a:off x="777240" y="2212848"/>
             <a:ext cx="4983480" cy="2194560"/>
           </a:xfrm>
           <a:prstGeom prst="rect">
@@ -9957,18 +10347,18 @@
       </p:sp>
       <p:sp>
         <p:nvSpPr>
-          <p:cNvPr id="6" name="Rounded Rectangle 5"/>
+          <p:cNvPr id="7" name="Rounded Rectangle 6"/>
           <p:cNvSpPr/>
           <p:nvPr/>
         </p:nvSpPr>
         <p:spPr>
           <a:xfrm>
-            <a:off x="6217920" y="1554480"/>
-            <a:ext cx="5486400" cy="3063240"/>
+            <a:off x="6217920" y="1481328"/>
+            <a:ext cx="5486400" cy="3017520"/>
           </a:xfrm>
           <a:prstGeom prst="roundRect">
             <a:avLst>
-              <a:gd name="adj" fmla="val 9950"/>
+              <a:gd name="adj" fmla="val 10101"/>
             </a:avLst>
           </a:prstGeom>
           <a:solidFill>
@@ -10005,13 +10395,13 @@
       </p:sp>
       <p:sp>
         <p:nvSpPr>
-          <p:cNvPr id="7" name="TextBox 6"/>
-          <p:cNvSpPr txBox="1"/>
-          <p:nvPr/>
-        </p:nvSpPr>
-        <p:spPr>
-          <a:xfrm>
-            <a:off x="6492240" y="1719072"/>
+          <p:cNvPr id="8" name="TextBox 7"/>
+          <p:cNvSpPr txBox="1"/>
+          <p:nvPr/>
+        </p:nvSpPr>
+        <p:spPr>
+          <a:xfrm>
+            <a:off x="6492240" y="1645920"/>
             <a:ext cx="4937760" cy="411480"/>
           </a:xfrm>
           <a:prstGeom prst="rect">
@@ -10044,13 +10434,13 @@
       </p:sp>
       <p:sp>
         <p:nvSpPr>
-          <p:cNvPr id="8" name="TextBox 7"/>
-          <p:cNvSpPr txBox="1"/>
-          <p:nvPr/>
-        </p:nvSpPr>
-        <p:spPr>
-          <a:xfrm>
-            <a:off x="6492240" y="2286000"/>
+          <p:cNvPr id="9" name="TextBox 8"/>
+          <p:cNvSpPr txBox="1"/>
+          <p:nvPr/>
+        </p:nvSpPr>
+        <p:spPr>
+          <a:xfrm>
+            <a:off x="6492240" y="2212848"/>
             <a:ext cx="4983480" cy="2194560"/>
           </a:xfrm>
           <a:prstGeom prst="rect">
@@ -10129,7 +10519,7 @@
       </p:sp>
       <p:sp>
         <p:nvSpPr>
-          <p:cNvPr id="9" name="TextBox 8"/>
+          <p:cNvPr id="10" name="TextBox 9"/>
           <p:cNvSpPr txBox="1"/>
           <p:nvPr/>
         </p:nvSpPr>
@@ -10168,7 +10558,7 @@
       </p:sp>
       <p:sp>
         <p:nvSpPr>
-          <p:cNvPr id="10" name="Rounded Rectangle 9"/>
+          <p:cNvPr id="11" name="Rounded Rectangle 10"/>
           <p:cNvSpPr/>
           <p:nvPr/>
         </p:nvSpPr>
@@ -10216,7 +10606,7 @@
       </p:sp>
       <p:sp>
         <p:nvSpPr>
-          <p:cNvPr id="11" name="TextBox 10"/>
+          <p:cNvPr id="12" name="TextBox 11"/>
           <p:cNvSpPr txBox="1"/>
           <p:nvPr/>
         </p:nvSpPr>
@@ -10255,7 +10645,7 @@
       </p:sp>
       <p:sp>
         <p:nvSpPr>
-          <p:cNvPr id="12" name="Rounded Rectangle 11"/>
+          <p:cNvPr id="13" name="Rounded Rectangle 12"/>
           <p:cNvSpPr/>
           <p:nvPr/>
         </p:nvSpPr>
@@ -10303,7 +10693,7 @@
       </p:sp>
       <p:sp>
         <p:nvSpPr>
-          <p:cNvPr id="13" name="TextBox 12"/>
+          <p:cNvPr id="14" name="TextBox 13"/>
           <p:cNvSpPr txBox="1"/>
           <p:nvPr/>
         </p:nvSpPr>
@@ -10342,7 +10732,7 @@
       </p:sp>
       <p:sp>
         <p:nvSpPr>
-          <p:cNvPr id="14" name="Rounded Rectangle 13"/>
+          <p:cNvPr id="15" name="Rounded Rectangle 14"/>
           <p:cNvSpPr/>
           <p:nvPr/>
         </p:nvSpPr>
@@ -10390,7 +10780,7 @@
       </p:sp>
       <p:sp>
         <p:nvSpPr>
-          <p:cNvPr id="15" name="TextBox 14"/>
+          <p:cNvPr id="16" name="TextBox 15"/>
           <p:cNvSpPr txBox="1"/>
           <p:nvPr/>
         </p:nvSpPr>
@@ -10429,7 +10819,7 @@
       </p:sp>
       <p:sp>
         <p:nvSpPr>
-          <p:cNvPr id="16" name="TextBox 15"/>
+          <p:cNvPr id="17" name="TextBox 16"/>
           <p:cNvSpPr txBox="1"/>
           <p:nvPr/>
         </p:nvSpPr>
@@ -10488,8 +10878,8 @@
         </p:nvSpPr>
         <p:spPr>
           <a:xfrm>
-            <a:off x="502920" y="457200"/>
-            <a:ext cx="11247120" cy="914400"/>
+            <a:off x="502920" y="384048"/>
+            <a:ext cx="11247120" cy="548640"/>
           </a:xfrm>
           <a:prstGeom prst="rect">
             <a:avLst/>
@@ -10527,12 +10917,12 @@
         </p:nvSpPr>
         <p:spPr>
           <a:xfrm>
-            <a:off x="502920" y="1600200"/>
-            <a:ext cx="3611880" cy="3383280"/>
+            <a:off x="502920" y="1078992"/>
+            <a:ext cx="3611880" cy="3127248"/>
           </a:xfrm>
           <a:prstGeom prst="roundRect">
             <a:avLst>
-              <a:gd name="adj" fmla="val 9009"/>
+              <a:gd name="adj" fmla="val 9746"/>
             </a:avLst>
           </a:prstGeom>
           <a:solidFill>
@@ -10575,7 +10965,7 @@
         </p:nvSpPr>
         <p:spPr>
           <a:xfrm>
-            <a:off x="731520" y="1764792"/>
+            <a:off x="731520" y="1225295"/>
             <a:ext cx="3154680" cy="685800"/>
           </a:xfrm>
           <a:prstGeom prst="rect">
@@ -10595,7 +10985,7 @@
               </a:lnSpc>
             </a:pPr>
             <a:r>
-              <a:rPr sz="1500" b="1" i="0">
+              <a:rPr sz="1450" b="1" i="0">
                 <a:solidFill>
                   <a:srgbClr val="065A82"/>
                 </a:solidFill>
@@ -10614,8 +11004,8 @@
         </p:nvSpPr>
         <p:spPr>
           <a:xfrm>
-            <a:off x="731520" y="2468880"/>
-            <a:ext cx="3154680" cy="2286000"/>
+            <a:off x="731520" y="1901952"/>
+            <a:ext cx="3154680" cy="2194560"/>
           </a:xfrm>
           <a:prstGeom prst="rect">
             <a:avLst/>
@@ -10630,17 +11020,17 @@
           <a:p>
             <a:pPr algn="l">
               <a:lnSpc>
-                <a:spcPct val="125000"/>
+                <a:spcPct val="122000"/>
               </a:lnSpc>
             </a:pPr>
             <a:r>
-              <a:rPr sz="1400" b="0" i="0">
+              <a:rPr sz="1350" b="0" i="0">
                 <a:solidFill>
                   <a:srgbClr val="21295C"/>
                 </a:solidFill>
                 <a:latin typeface="Arial"/>
               </a:rPr>
-              <a:t>Юзернейм с Reddit, попавший в словарь GPT: модель не могла его повторить, отвечала невпопад.</a:t>
+              <a:t>Юзернейм с Reddit, попавший в словарь GPT: модель не могла его повторить и отвечала невпопад — будто слова не существует.</a:t>
             </a:r>
           </a:p>
         </p:txBody>
@@ -10653,12 +11043,12 @@
         </p:nvSpPr>
         <p:spPr>
           <a:xfrm>
-            <a:off x="4297680" y="1600200"/>
-            <a:ext cx="3611880" cy="3383280"/>
+            <a:off x="4297680" y="1078992"/>
+            <a:ext cx="3611880" cy="3127248"/>
           </a:xfrm>
           <a:prstGeom prst="roundRect">
             <a:avLst>
-              <a:gd name="adj" fmla="val 9009"/>
+              <a:gd name="adj" fmla="val 9746"/>
             </a:avLst>
           </a:prstGeom>
           <a:solidFill>
@@ -10701,7 +11091,7 @@
         </p:nvSpPr>
         <p:spPr>
           <a:xfrm>
-            <a:off x="4526280" y="1764792"/>
+            <a:off x="4526280" y="1225295"/>
             <a:ext cx="3154680" cy="411480"/>
           </a:xfrm>
           <a:prstGeom prst="rect">
@@ -10721,7 +11111,7 @@
               </a:lnSpc>
             </a:pPr>
             <a:r>
-              <a:rPr sz="1500" b="1" i="0">
+              <a:rPr sz="1450" b="1" i="0">
                 <a:solidFill>
                   <a:srgbClr val="028090"/>
                 </a:solidFill>
@@ -10740,8 +11130,8 @@
         </p:nvSpPr>
         <p:spPr>
           <a:xfrm>
-            <a:off x="4526280" y="2240280"/>
-            <a:ext cx="3154680" cy="2560320"/>
+            <a:off x="4526280" y="1645919"/>
+            <a:ext cx="3154680" cy="2468880"/>
           </a:xfrm>
           <a:prstGeom prst="rect">
             <a:avLst/>
@@ -10756,11 +11146,11 @@
           <a:p>
             <a:pPr algn="l">
               <a:lnSpc>
-                <a:spcPct val="115000"/>
+                <a:spcPct val="112000"/>
               </a:lnSpc>
             </a:pPr>
             <a:r>
-              <a:rPr sz="1400" b="1" i="0">
+              <a:rPr sz="1300" b="1" i="0">
                 <a:solidFill>
                   <a:srgbClr val="21295C"/>
                 </a:solidFill>
@@ -10772,14 +11162,14 @@
           <a:p>
             <a:pPr algn="ctr">
               <a:lnSpc>
-                <a:spcPct val="115000"/>
+                <a:spcPct val="112000"/>
               </a:lnSpc>
               <a:spcBef>
-                <a:spcPts val="400"/>
+                <a:spcPts val="300"/>
               </a:spcBef>
             </a:pPr>
             <a:r>
-              <a:rPr sz="1600" b="1" i="0">
+              <a:rPr sz="1400" b="1" i="0">
                 <a:solidFill>
                   <a:srgbClr val="028090"/>
                 </a:solidFill>
@@ -10791,11 +11181,11 @@
           <a:p>
             <a:pPr algn="l">
               <a:lnSpc>
-                <a:spcPct val="115000"/>
+                <a:spcPct val="112000"/>
               </a:lnSpc>
             </a:pPr>
             <a:r>
-              <a:rPr sz="1400" b="0" i="0">
+              <a:rPr sz="1300" b="0" i="0">
                 <a:solidFill>
                   <a:srgbClr val="21295C"/>
                 </a:solidFill>
@@ -10807,14 +11197,14 @@
           <a:p>
             <a:pPr algn="ctr">
               <a:lnSpc>
-                <a:spcPct val="115000"/>
+                <a:spcPct val="112000"/>
               </a:lnSpc>
               <a:spcBef>
-                <a:spcPts val="400"/>
+                <a:spcPts val="300"/>
               </a:spcBef>
             </a:pPr>
             <a:r>
-              <a:rPr sz="1600" b="1" i="0">
+              <a:rPr sz="1400" b="1" i="0">
                 <a:solidFill>
                   <a:srgbClr val="028090"/>
                 </a:solidFill>
@@ -10826,11 +11216,11 @@
           <a:p>
             <a:pPr algn="l">
               <a:lnSpc>
-                <a:spcPct val="115000"/>
+                <a:spcPct val="112000"/>
               </a:lnSpc>
             </a:pPr>
             <a:r>
-              <a:rPr sz="1400" b="0" i="0">
+              <a:rPr sz="1300" b="0" i="0">
                 <a:solidFill>
                   <a:srgbClr val="21295C"/>
                 </a:solidFill>
@@ -10842,14 +11232,14 @@
           <a:p>
             <a:pPr algn="l">
               <a:lnSpc>
-                <a:spcPct val="115000"/>
+                <a:spcPct val="112000"/>
               </a:lnSpc>
               <a:spcBef>
-                <a:spcPts val="800"/>
+                <a:spcPts val="600"/>
               </a:spcBef>
             </a:pPr>
             <a:r>
-              <a:rPr sz="1050" b="0" i="1">
+              <a:rPr sz="1000" b="0" i="1">
                 <a:solidFill>
                   <a:srgbClr val="6B7685"/>
                 </a:solidFill>
@@ -10868,12 +11258,12 @@
         </p:nvSpPr>
         <p:spPr>
           <a:xfrm>
-            <a:off x="8092440" y="1600200"/>
-            <a:ext cx="3611880" cy="3383280"/>
+            <a:off x="8092440" y="1078992"/>
+            <a:ext cx="3611880" cy="3127248"/>
           </a:xfrm>
           <a:prstGeom prst="roundRect">
             <a:avLst>
-              <a:gd name="adj" fmla="val 9009"/>
+              <a:gd name="adj" fmla="val 9746"/>
             </a:avLst>
           </a:prstGeom>
           <a:solidFill>
@@ -10916,7 +11306,7 @@
         </p:nvSpPr>
         <p:spPr>
           <a:xfrm>
-            <a:off x="8321040" y="1764792"/>
+            <a:off x="8321040" y="1225295"/>
             <a:ext cx="3154680" cy="411480"/>
           </a:xfrm>
           <a:prstGeom prst="rect">
@@ -10936,7 +11326,7 @@
               </a:lnSpc>
             </a:pPr>
             <a:r>
-              <a:rPr sz="1500" b="1" i="0">
+              <a:rPr sz="1450" b="1" i="0">
                 <a:solidFill>
                   <a:srgbClr val="065A82"/>
                 </a:solidFill>
@@ -10955,8 +11345,8 @@
         </p:nvSpPr>
         <p:spPr>
           <a:xfrm>
-            <a:off x="8321040" y="2240280"/>
-            <a:ext cx="3154680" cy="2560320"/>
+            <a:off x="8321040" y="1645919"/>
+            <a:ext cx="3154680" cy="2468880"/>
           </a:xfrm>
           <a:prstGeom prst="rect">
             <a:avLst/>
@@ -10971,11 +11361,11 @@
           <a:p>
             <a:pPr algn="l">
               <a:lnSpc>
-                <a:spcPct val="125000"/>
+                <a:spcPct val="122000"/>
               </a:lnSpc>
             </a:pPr>
             <a:r>
-              <a:rPr sz="1700" b="1" i="0">
+              <a:rPr sz="1600" b="1" i="0">
                 <a:solidFill>
                   <a:srgbClr val="F0AB00"/>
                 </a:solidFill>
@@ -10984,7 +11374,7 @@
               <a:t>порядка 4% словаря</a:t>
             </a:r>
             <a:r>
-              <a:rPr sz="1400" b="0" i="0">
+              <a:rPr sz="1350" b="0" i="0">
                 <a:solidFill>
                   <a:srgbClr val="21295C"/>
                 </a:solidFill>
@@ -10996,14 +11386,14 @@
           <a:p>
             <a:pPr algn="l">
               <a:lnSpc>
-                <a:spcPct val="125000"/>
+                <a:spcPct val="122000"/>
               </a:lnSpc>
               <a:spcBef>
                 <a:spcPts val="800"/>
               </a:spcBef>
             </a:pPr>
             <a:r>
-              <a:rPr sz="1400" b="0" i="0">
+              <a:rPr sz="1350" b="0" i="0">
                 <a:solidFill>
                   <a:srgbClr val="21295C"/>
                 </a:solidFill>
@@ -11016,26 +11406,65 @@
       </p:sp>
       <p:sp>
         <p:nvSpPr>
-          <p:cNvPr id="12" name="Rounded Rectangle 11"/>
+          <p:cNvPr id="12" name="TextBox 11"/>
+          <p:cNvSpPr txBox="1"/>
+          <p:nvPr/>
+        </p:nvSpPr>
+        <p:spPr>
+          <a:xfrm>
+            <a:off x="502920" y="4352544"/>
+            <a:ext cx="4572000" cy="320040"/>
+          </a:xfrm>
+          <a:prstGeom prst="rect">
+            <a:avLst/>
+          </a:prstGeom>
+          <a:noFill/>
+        </p:spPr>
+        <p:txBody>
+          <a:bodyPr wrap="square" lIns="0" rIns="0" tIns="0" bIns="0" anchor="t">
+            <a:spAutoFit/>
+          </a:bodyPr>
+          <a:lstStyle/>
+          <a:p>
+            <a:pPr algn="l">
+              <a:lnSpc>
+                <a:spcPct val="115000"/>
+              </a:lnSpc>
+            </a:pPr>
+            <a:r>
+              <a:rPr sz="1400" b="1" i="0">
+                <a:solidFill>
+                  <a:srgbClr val="065A82"/>
+                </a:solidFill>
+                <a:latin typeface="Arial"/>
+              </a:rPr>
+              <a:t>Что на практике:</a:t>
+            </a:r>
+          </a:p>
+        </p:txBody>
+      </p:sp>
+      <p:sp>
+        <p:nvSpPr>
+          <p:cNvPr id="13" name="Rounded Rectangle 12"/>
           <p:cNvSpPr/>
           <p:nvPr/>
         </p:nvSpPr>
         <p:spPr>
           <a:xfrm>
-            <a:off x="502920" y="5349240"/>
-            <a:ext cx="11201400" cy="685800"/>
+            <a:off x="502920" y="4700016"/>
+            <a:ext cx="5486400" cy="1051560"/>
           </a:xfrm>
           <a:prstGeom prst="roundRect">
             <a:avLst>
-              <a:gd name="adj" fmla="val 12000"/>
+              <a:gd name="adj" fmla="val 25000"/>
             </a:avLst>
           </a:prstGeom>
           <a:solidFill>
-            <a:srgbClr val="FEF5E0"/>
+            <a:srgbClr val="FFFFFF"/>
           </a:solidFill>
-          <a:ln w="15240">
+          <a:ln w="16510">
             <a:solidFill>
-              <a:srgbClr val="F0AB00"/>
+              <a:srgbClr val="028090"/>
             </a:solidFill>
           </a:ln>
           <a:effectLst/>
@@ -11064,14 +11493,101 @@
       </p:sp>
       <p:sp>
         <p:nvSpPr>
-          <p:cNvPr id="13" name="TextBox 12"/>
-          <p:cNvSpPr txBox="1"/>
-          <p:nvPr/>
-        </p:nvSpPr>
-        <p:spPr>
-          <a:xfrm>
-            <a:off x="685800" y="5404103"/>
-            <a:ext cx="10835640" cy="576072"/>
+          <p:cNvPr id="14" name="TextBox 13"/>
+          <p:cNvSpPr txBox="1"/>
+          <p:nvPr/>
+        </p:nvSpPr>
+        <p:spPr>
+          <a:xfrm>
+            <a:off x="731520" y="4791456"/>
+            <a:ext cx="5074920" cy="868680"/>
+          </a:xfrm>
+          <a:prstGeom prst="rect">
+            <a:avLst/>
+          </a:prstGeom>
+          <a:noFill/>
+        </p:spPr>
+        <p:txBody>
+          <a:bodyPr wrap="square" lIns="0" rIns="0" tIns="0" bIns="0" anchor="t">
+            <a:spAutoFit/>
+          </a:bodyPr>
+          <a:lstStyle/>
+          <a:p>
+            <a:pPr algn="l">
+              <a:lnSpc>
+                <a:spcPct val="114000"/>
+              </a:lnSpc>
+            </a:pPr>
+            <a:r>
+              <a:rPr sz="1250" b="0" i="0">
+                <a:solidFill>
+                  <a:srgbClr val="21295C"/>
+                </a:solidFill>
+                <a:latin typeface="Arial"/>
+              </a:rPr>
+              <a:t>Необъяснимое поведение на экзотических строках (редкие идентификаторы, обфусцированный текст, необычный Unicode)? Гипотеза: glitch-токен. Проверка: замените строку плейсхолдером.</a:t>
+            </a:r>
+          </a:p>
+        </p:txBody>
+      </p:sp>
+      <p:sp>
+        <p:nvSpPr>
+          <p:cNvPr id="15" name="Rounded Rectangle 14"/>
+          <p:cNvSpPr/>
+          <p:nvPr/>
+        </p:nvSpPr>
+        <p:spPr>
+          <a:xfrm>
+            <a:off x="6217920" y="4700016"/>
+            <a:ext cx="5486400" cy="1051560"/>
+          </a:xfrm>
+          <a:prstGeom prst="roundRect">
+            <a:avLst>
+              <a:gd name="adj" fmla="val 25000"/>
+            </a:avLst>
+          </a:prstGeom>
+          <a:solidFill>
+            <a:srgbClr val="FFFFFF"/>
+          </a:solidFill>
+          <a:ln w="16510">
+            <a:solidFill>
+              <a:srgbClr val="028090"/>
+            </a:solidFill>
+          </a:ln>
+          <a:effectLst/>
+        </p:spPr>
+        <p:style>
+          <a:lnRef idx="1">
+            <a:schemeClr val="accent1"/>
+          </a:lnRef>
+          <a:fillRef idx="3">
+            <a:schemeClr val="accent1"/>
+          </a:fillRef>
+          <a:effectRef idx="2">
+            <a:schemeClr val="accent1"/>
+          </a:effectRef>
+          <a:fontRef idx="minor">
+            <a:schemeClr val="lt1"/>
+          </a:fontRef>
+        </p:style>
+        <p:txBody>
+          <a:bodyPr rtlCol="0" anchor="ctr"/>
+          <a:lstStyle/>
+          <a:p>
+            <a:pPr algn="ctr"/>
+          </a:p>
+        </p:txBody>
+      </p:sp>
+      <p:sp>
+        <p:nvSpPr>
+          <p:cNvPr id="16" name="TextBox 15"/>
+          <p:cNvSpPr txBox="1"/>
+          <p:nvPr/>
+        </p:nvSpPr>
+        <p:spPr>
+          <a:xfrm>
+            <a:off x="6446520" y="4791456"/>
+            <a:ext cx="5074920" cy="868680"/>
           </a:xfrm>
           <a:prstGeom prst="rect">
             <a:avLst/>
@@ -11080,30 +11596,69 @@
         </p:spPr>
         <p:txBody>
           <a:bodyPr wrap="square" lIns="0" rIns="0" tIns="0" bIns="0" anchor="ctr">
+            <a:spAutoFit/>
+          </a:bodyPr>
+          <a:lstStyle/>
+          <a:p>
+            <a:pPr algn="l">
+              <a:lnSpc>
+                <a:spcPct val="114000"/>
+              </a:lnSpc>
+            </a:pPr>
+            <a:r>
+              <a:rPr sz="1250" b="0" i="0">
+                <a:solidFill>
+                  <a:srgbClr val="21295C"/>
+                </a:solidFill>
+                <a:latin typeface="Arial"/>
+              </a:rPr>
+              <a:t>В продуктах, принимающих произвольный ввод, — нормализация и санитизация входа до модели.</a:t>
+            </a:r>
+          </a:p>
+        </p:txBody>
+      </p:sp>
+      <p:sp>
+        <p:nvSpPr>
+          <p:cNvPr id="17" name="TextBox 16"/>
+          <p:cNvSpPr txBox="1"/>
+          <p:nvPr/>
+        </p:nvSpPr>
+        <p:spPr>
+          <a:xfrm>
+            <a:off x="502920" y="5925312"/>
+            <a:ext cx="11201400" cy="365760"/>
+          </a:xfrm>
+          <a:prstGeom prst="rect">
+            <a:avLst/>
+          </a:prstGeom>
+          <a:noFill/>
+        </p:spPr>
+        <p:txBody>
+          <a:bodyPr wrap="square" lIns="0" rIns="0" tIns="0" bIns="0" anchor="t">
             <a:spAutoFit/>
           </a:bodyPr>
           <a:lstStyle/>
           <a:p>
             <a:pPr algn="ctr">
               <a:lnSpc>
-                <a:spcPct val="122000"/>
+                <a:spcPct val="115000"/>
               </a:lnSpc>
             </a:pPr>
             <a:r>
-              <a:rPr sz="1700" b="1" i="0">
-                <a:solidFill>
-                  <a:srgbClr val="21295C"/>
-                </a:solidFill>
-                <a:latin typeface="Arial"/>
-              </a:rPr>
-              <a:t>Системная особенность конвейера, не баг версии.</a:t>
-            </a:r>
-          </a:p>
-        </p:txBody>
-      </p:sp>
-      <p:sp>
-        <p:nvSpPr>
-          <p:cNvPr id="14" name="TextBox 13"/>
+              <a:rPr sz="1250" b="0" i="1">
+                <a:solidFill>
+                  <a:srgbClr val="1C7293"/>
+                </a:solidFill>
+                <a:latin typeface="Arial"/>
+              </a:rPr>
+              <a:t>Системная особенность конвейера, не баг версии — масштабом не чинится.</a:t>
+            </a:r>
+          </a:p>
+        </p:txBody>
+      </p:sp>
+      <p:sp>
+        <p:nvSpPr>
+          <p:cNvPr id="18" name="TextBox 17"/>
           <p:cNvSpPr txBox="1"/>
           <p:nvPr/>
         </p:nvSpPr>
@@ -11437,11 +11992,11 @@
         <p:spPr>
           <a:xfrm>
             <a:off x="7452360" y="3794760"/>
-            <a:ext cx="4251960" cy="1920240"/>
+            <a:ext cx="4251960" cy="2148840"/>
           </a:xfrm>
           <a:prstGeom prst="roundRect">
             <a:avLst>
-              <a:gd name="adj" fmla="val 12000"/>
+              <a:gd name="adj" fmla="val 8000"/>
             </a:avLst>
           </a:prstGeom>
           <a:solidFill>
@@ -11484,33 +12039,71 @@
         </p:nvSpPr>
         <p:spPr>
           <a:xfrm>
-            <a:off x="7635240" y="3849624"/>
-            <a:ext cx="3886200" cy="1810512"/>
-          </a:xfrm>
-          <a:prstGeom prst="rect">
-            <a:avLst/>
-          </a:prstGeom>
-          <a:noFill/>
-        </p:spPr>
-        <p:txBody>
-          <a:bodyPr wrap="square" lIns="0" rIns="0" tIns="0" bIns="0" anchor="ctr">
+            <a:off x="7662672" y="3950208"/>
+            <a:ext cx="3840480" cy="1874519"/>
+          </a:xfrm>
+          <a:prstGeom prst="rect">
+            <a:avLst/>
+          </a:prstGeom>
+          <a:noFill/>
+        </p:spPr>
+        <p:txBody>
+          <a:bodyPr wrap="square" lIns="0" rIns="0" tIns="0" bIns="0" anchor="t">
             <a:spAutoFit/>
           </a:bodyPr>
           <a:lstStyle/>
           <a:p>
             <a:pPr algn="l">
               <a:lnSpc>
-                <a:spcPct val="122000"/>
+                <a:spcPct val="118000"/>
               </a:lnSpc>
             </a:pPr>
             <a:r>
-              <a:rPr sz="1500" b="1" i="0">
+              <a:rPr sz="1400" b="1" i="0">
+                <a:solidFill>
+                  <a:srgbClr val="065A82"/>
+                </a:solidFill>
+                <a:latin typeface="Arial"/>
+              </a:rPr>
+              <a:t>Что делать:</a:t>
+            </a:r>
+          </a:p>
+          <a:p>
+            <a:pPr algn="l">
+              <a:lnSpc>
+                <a:spcPct val="118000"/>
+              </a:lnSpc>
+              <a:spcBef>
+                <a:spcPts val="600"/>
+              </a:spcBef>
+            </a:pPr>
+            <a:r>
+              <a:rPr sz="1250" b="0" i="0">
                 <a:solidFill>
                   <a:srgbClr val="21295C"/>
                 </a:solidFill>
                 <a:latin typeface="Arial"/>
               </a:rPr>
-              <a:t>Любой лимит в токенах калибруйте на своём языке: разбиение на фрагменты, max_tokens, окно.</a:t>
+              <a:t>•  Калибруйте лимиты в токенах на своём языке: фрагменты для поиска, max_tokens, бюджет окна.</a:t>
+            </a:r>
+          </a:p>
+          <a:p>
+            <a:pPr algn="l">
+              <a:lnSpc>
+                <a:spcPct val="118000"/>
+              </a:lnSpc>
+              <a:spcBef>
+                <a:spcPts val="600"/>
+              </a:spcBef>
+            </a:pPr>
+            <a:r>
+              <a:rPr sz="1250" b="0" i="0">
+                <a:solidFill>
+                  <a:srgbClr val="21295C"/>
+                </a:solidFill>
+                <a:latin typeface="Arial"/>
+              </a:rPr>
+              <a:t>•  Пакетная обработка больших объёмов — оцените перевод на английский (≈2× дешевле); в интерактиве разница того не стоит.</a:t>
             </a:r>
           </a:p>
         </p:txBody>
@@ -13658,8 +14251,8 @@
         </p:nvSpPr>
         <p:spPr>
           <a:xfrm>
-            <a:off x="502920" y="457200"/>
-            <a:ext cx="11247120" cy="914400"/>
+            <a:off x="502920" y="411480"/>
+            <a:ext cx="11247120" cy="502920"/>
           </a:xfrm>
           <a:prstGeom prst="rect">
             <a:avLst/>
@@ -13678,31 +14271,70 @@
               </a:lnSpc>
             </a:pPr>
             <a:r>
-              <a:rPr sz="2600" b="1" i="0">
+              <a:rPr sz="2150" b="1" i="0">
                 <a:solidFill>
                   <a:srgbClr val="21295C"/>
                 </a:solidFill>
                 <a:latin typeface="Arial"/>
               </a:rPr>
-              <a:t>«Эмбеддинг» — это три разные сущности</a:t>
-            </a:r>
-          </a:p>
-        </p:txBody>
-      </p:sp>
-      <p:sp>
-        <p:nvSpPr>
-          <p:cNvPr id="3" name="Rounded Rectangle 2"/>
+              <a:t>Эмбеддинги — не только внутренность инференса, но и инструмент поиска</a:t>
+            </a:r>
+          </a:p>
+        </p:txBody>
+      </p:sp>
+      <p:sp>
+        <p:nvSpPr>
+          <p:cNvPr id="3" name="TextBox 2"/>
+          <p:cNvSpPr txBox="1"/>
+          <p:nvPr/>
+        </p:nvSpPr>
+        <p:spPr>
+          <a:xfrm>
+            <a:off x="502920" y="987552"/>
+            <a:ext cx="11247120" cy="384048"/>
+          </a:xfrm>
+          <a:prstGeom prst="rect">
+            <a:avLst/>
+          </a:prstGeom>
+          <a:noFill/>
+        </p:spPr>
+        <p:txBody>
+          <a:bodyPr wrap="square" lIns="0" rIns="0" tIns="0" bIns="0" anchor="t">
+            <a:spAutoFit/>
+          </a:bodyPr>
+          <a:lstStyle/>
+          <a:p>
+            <a:pPr algn="l">
+              <a:lnSpc>
+                <a:spcPct val="115000"/>
+              </a:lnSpc>
+            </a:pPr>
+            <a:r>
+              <a:rPr sz="1450" b="0" i="1">
+                <a:solidFill>
+                  <a:srgbClr val="065A82"/>
+                </a:solidFill>
+                <a:latin typeface="Arial"/>
+              </a:rPr>
+              <a:t>Когда вы строите поиск или RAG, вы пользуетесь третьей жизнью термина «эмбеддинг» — отдельной embedding-моделью.</a:t>
+            </a:r>
+          </a:p>
+        </p:txBody>
+      </p:sp>
+      <p:sp>
+        <p:nvSpPr>
+          <p:cNvPr id="4" name="Rounded Rectangle 3"/>
           <p:cNvSpPr/>
           <p:nvPr/>
         </p:nvSpPr>
         <p:spPr>
           <a:xfrm>
-            <a:off x="495147" y="1554480"/>
-            <a:ext cx="3611880" cy="3246120"/>
+            <a:off x="495147" y="1536192"/>
+            <a:ext cx="3611880" cy="3310128"/>
           </a:xfrm>
           <a:prstGeom prst="roundRect">
             <a:avLst>
-              <a:gd name="adj" fmla="val 9389"/>
+              <a:gd name="adj" fmla="val 9208"/>
             </a:avLst>
           </a:prstGeom>
           <a:solidFill>
@@ -13739,14 +14371,14 @@
       </p:sp>
       <p:sp>
         <p:nvSpPr>
-          <p:cNvPr id="4" name="TextBox 3"/>
-          <p:cNvSpPr txBox="1"/>
-          <p:nvPr/>
-        </p:nvSpPr>
-        <p:spPr>
-          <a:xfrm>
-            <a:off x="723747" y="1719072"/>
-            <a:ext cx="731520" cy="640080"/>
+          <p:cNvPr id="5" name="TextBox 4"/>
+          <p:cNvSpPr txBox="1"/>
+          <p:nvPr/>
+        </p:nvSpPr>
+        <p:spPr>
+          <a:xfrm>
+            <a:off x="723747" y="1664207"/>
+            <a:ext cx="731520" cy="594360"/>
           </a:xfrm>
           <a:prstGeom prst="rect">
             <a:avLst/>
@@ -13765,7 +14397,7 @@
               </a:lnSpc>
             </a:pPr>
             <a:r>
-              <a:rPr sz="3400" b="1" i="0">
+              <a:rPr sz="3200" b="1" i="0">
                 <a:solidFill>
                   <a:srgbClr val="1C7293"/>
                 </a:solidFill>
@@ -13778,14 +14410,14 @@
       </p:sp>
       <p:sp>
         <p:nvSpPr>
-          <p:cNvPr id="5" name="TextBox 4"/>
-          <p:cNvSpPr txBox="1"/>
-          <p:nvPr/>
-        </p:nvSpPr>
-        <p:spPr>
-          <a:xfrm>
-            <a:off x="723747" y="2423160"/>
-            <a:ext cx="3154680" cy="777240"/>
+          <p:cNvPr id="6" name="TextBox 5"/>
+          <p:cNvSpPr txBox="1"/>
+          <p:nvPr/>
+        </p:nvSpPr>
+        <p:spPr>
+          <a:xfrm>
+            <a:off x="723747" y="2286000"/>
+            <a:ext cx="3154680" cy="731520"/>
           </a:xfrm>
           <a:prstGeom prst="rect">
             <a:avLst/>
@@ -13800,11 +14432,11 @@
           <a:p>
             <a:pPr algn="l">
               <a:lnSpc>
-                <a:spcPct val="112000"/>
+                <a:spcPct val="110000"/>
               </a:lnSpc>
             </a:pPr>
             <a:r>
-              <a:rPr sz="1650" b="1" i="0">
+              <a:rPr sz="1600" b="1" i="0">
                 <a:solidFill>
                   <a:srgbClr val="21295C"/>
                 </a:solidFill>
@@ -13817,14 +14449,14 @@
       </p:sp>
       <p:sp>
         <p:nvSpPr>
-          <p:cNvPr id="6" name="TextBox 5"/>
-          <p:cNvSpPr txBox="1"/>
-          <p:nvPr/>
-        </p:nvSpPr>
-        <p:spPr>
-          <a:xfrm>
-            <a:off x="723747" y="3246120"/>
-            <a:ext cx="3154680" cy="1463040"/>
+          <p:cNvPr id="7" name="TextBox 6"/>
+          <p:cNvSpPr txBox="1"/>
+          <p:nvPr/>
+        </p:nvSpPr>
+        <p:spPr>
+          <a:xfrm>
+            <a:off x="723747" y="3017520"/>
+            <a:ext cx="3154680" cy="320040"/>
           </a:xfrm>
           <a:prstGeom prst="rect">
             <a:avLst/>
@@ -13839,10 +14471,49 @@
           <a:p>
             <a:pPr algn="l">
               <a:lnSpc>
-                <a:spcPct val="122000"/>
+                <a:spcPct val="115000"/>
               </a:lnSpc>
             </a:pPr>
             <a:r>
+              <a:rPr sz="1150" b="0" i="1">
+                <a:solidFill>
+                  <a:srgbClr val="6B7685"/>
+                </a:solidFill>
+                <a:latin typeface="Arial"/>
+              </a:rPr>
+              <a:t>внутри инференса</a:t>
+            </a:r>
+          </a:p>
+        </p:txBody>
+      </p:sp>
+      <p:sp>
+        <p:nvSpPr>
+          <p:cNvPr id="8" name="TextBox 7"/>
+          <p:cNvSpPr txBox="1"/>
+          <p:nvPr/>
+        </p:nvSpPr>
+        <p:spPr>
+          <a:xfrm>
+            <a:off x="723747" y="3383280"/>
+            <a:ext cx="3154680" cy="1371600"/>
+          </a:xfrm>
+          <a:prstGeom prst="rect">
+            <a:avLst/>
+          </a:prstGeom>
+          <a:noFill/>
+        </p:spPr>
+        <p:txBody>
+          <a:bodyPr wrap="square" lIns="0" rIns="0" tIns="0" bIns="0" anchor="t">
+            <a:spAutoFit/>
+          </a:bodyPr>
+          <a:lstStyle/>
+          <a:p>
+            <a:pPr algn="l">
+              <a:lnSpc>
+                <a:spcPct val="120000"/>
+              </a:lnSpc>
+            </a:pPr>
+            <a:r>
               <a:rPr sz="1300" b="0" i="0">
                 <a:solidFill>
                   <a:srgbClr val="21295C"/>
@@ -13856,18 +14527,18 @@
       </p:sp>
       <p:sp>
         <p:nvSpPr>
-          <p:cNvPr id="7" name="Rounded Rectangle 6"/>
+          <p:cNvPr id="9" name="Rounded Rectangle 8"/>
           <p:cNvSpPr/>
           <p:nvPr/>
         </p:nvSpPr>
         <p:spPr>
           <a:xfrm>
-            <a:off x="4289907" y="1554480"/>
-            <a:ext cx="3611880" cy="3246120"/>
+            <a:off x="4289907" y="1536192"/>
+            <a:ext cx="3611880" cy="3310128"/>
           </a:xfrm>
           <a:prstGeom prst="roundRect">
             <a:avLst>
-              <a:gd name="adj" fmla="val 9389"/>
+              <a:gd name="adj" fmla="val 9208"/>
             </a:avLst>
           </a:prstGeom>
           <a:solidFill>
@@ -13904,14 +14575,14 @@
       </p:sp>
       <p:sp>
         <p:nvSpPr>
-          <p:cNvPr id="8" name="TextBox 7"/>
-          <p:cNvSpPr txBox="1"/>
-          <p:nvPr/>
-        </p:nvSpPr>
-        <p:spPr>
-          <a:xfrm>
-            <a:off x="4518507" y="1719072"/>
-            <a:ext cx="731520" cy="640080"/>
+          <p:cNvPr id="10" name="TextBox 9"/>
+          <p:cNvSpPr txBox="1"/>
+          <p:nvPr/>
+        </p:nvSpPr>
+        <p:spPr>
+          <a:xfrm>
+            <a:off x="4518507" y="1664207"/>
+            <a:ext cx="731520" cy="594360"/>
           </a:xfrm>
           <a:prstGeom prst="rect">
             <a:avLst/>
@@ -13930,7 +14601,7 @@
               </a:lnSpc>
             </a:pPr>
             <a:r>
-              <a:rPr sz="3400" b="1" i="0">
+              <a:rPr sz="3200" b="1" i="0">
                 <a:solidFill>
                   <a:srgbClr val="1C7293"/>
                 </a:solidFill>
@@ -13943,14 +14614,14 @@
       </p:sp>
       <p:sp>
         <p:nvSpPr>
-          <p:cNvPr id="9" name="TextBox 8"/>
-          <p:cNvSpPr txBox="1"/>
-          <p:nvPr/>
-        </p:nvSpPr>
-        <p:spPr>
-          <a:xfrm>
-            <a:off x="4518507" y="2423160"/>
-            <a:ext cx="3154680" cy="777240"/>
+          <p:cNvPr id="11" name="TextBox 10"/>
+          <p:cNvSpPr txBox="1"/>
+          <p:nvPr/>
+        </p:nvSpPr>
+        <p:spPr>
+          <a:xfrm>
+            <a:off x="4518507" y="2286000"/>
+            <a:ext cx="3154680" cy="731520"/>
           </a:xfrm>
           <a:prstGeom prst="rect">
             <a:avLst/>
@@ -13965,11 +14636,11 @@
           <a:p>
             <a:pPr algn="l">
               <a:lnSpc>
-                <a:spcPct val="112000"/>
+                <a:spcPct val="110000"/>
               </a:lnSpc>
             </a:pPr>
             <a:r>
-              <a:rPr sz="1650" b="1" i="0">
+              <a:rPr sz="1600" b="1" i="0">
                 <a:solidFill>
                   <a:srgbClr val="21295C"/>
                 </a:solidFill>
@@ -13982,14 +14653,14 @@
       </p:sp>
       <p:sp>
         <p:nvSpPr>
-          <p:cNvPr id="10" name="TextBox 9"/>
-          <p:cNvSpPr txBox="1"/>
-          <p:nvPr/>
-        </p:nvSpPr>
-        <p:spPr>
-          <a:xfrm>
-            <a:off x="4518507" y="3246120"/>
-            <a:ext cx="3154680" cy="1463040"/>
+          <p:cNvPr id="12" name="TextBox 11"/>
+          <p:cNvSpPr txBox="1"/>
+          <p:nvPr/>
+        </p:nvSpPr>
+        <p:spPr>
+          <a:xfrm>
+            <a:off x="4518507" y="3017520"/>
+            <a:ext cx="3154680" cy="320040"/>
           </a:xfrm>
           <a:prstGeom prst="rect">
             <a:avLst/>
@@ -14004,10 +14675,49 @@
           <a:p>
             <a:pPr algn="l">
               <a:lnSpc>
-                <a:spcPct val="122000"/>
+                <a:spcPct val="115000"/>
               </a:lnSpc>
             </a:pPr>
             <a:r>
+              <a:rPr sz="1150" b="0" i="1">
+                <a:solidFill>
+                  <a:srgbClr val="6B7685"/>
+                </a:solidFill>
+                <a:latin typeface="Arial"/>
+              </a:rPr>
+              <a:t>внутри инференса</a:t>
+            </a:r>
+          </a:p>
+        </p:txBody>
+      </p:sp>
+      <p:sp>
+        <p:nvSpPr>
+          <p:cNvPr id="13" name="TextBox 12"/>
+          <p:cNvSpPr txBox="1"/>
+          <p:nvPr/>
+        </p:nvSpPr>
+        <p:spPr>
+          <a:xfrm>
+            <a:off x="4518507" y="3383280"/>
+            <a:ext cx="3154680" cy="1371600"/>
+          </a:xfrm>
+          <a:prstGeom prst="rect">
+            <a:avLst/>
+          </a:prstGeom>
+          <a:noFill/>
+        </p:spPr>
+        <p:txBody>
+          <a:bodyPr wrap="square" lIns="0" rIns="0" tIns="0" bIns="0" anchor="t">
+            <a:spAutoFit/>
+          </a:bodyPr>
+          <a:lstStyle/>
+          <a:p>
+            <a:pPr algn="l">
+              <a:lnSpc>
+                <a:spcPct val="120000"/>
+              </a:lnSpc>
+            </a:pPr>
+            <a:r>
               <a:rPr sz="1300" b="0" i="0">
                 <a:solidFill>
                   <a:srgbClr val="21295C"/>
@@ -14021,14 +14731,14 @@
       </p:sp>
       <p:sp>
         <p:nvSpPr>
-          <p:cNvPr id="11" name="Rounded Rectangle 10"/>
+          <p:cNvPr id="14" name="Rounded Rectangle 13"/>
           <p:cNvSpPr/>
           <p:nvPr/>
         </p:nvSpPr>
         <p:spPr>
           <a:xfrm>
-            <a:off x="8084667" y="1554480"/>
-            <a:ext cx="3611880" cy="3246120"/>
+            <a:off x="8084667" y="1536192"/>
+            <a:ext cx="3611880" cy="3310128"/>
           </a:xfrm>
           <a:prstGeom prst="roundRect">
             <a:avLst>
@@ -14069,14 +14779,14 @@
       </p:sp>
       <p:sp>
         <p:nvSpPr>
-          <p:cNvPr id="12" name="TextBox 11"/>
-          <p:cNvSpPr txBox="1"/>
-          <p:nvPr/>
-        </p:nvSpPr>
-        <p:spPr>
-          <a:xfrm>
-            <a:off x="8313267" y="1719072"/>
-            <a:ext cx="731520" cy="640080"/>
+          <p:cNvPr id="15" name="TextBox 14"/>
+          <p:cNvSpPr txBox="1"/>
+          <p:nvPr/>
+        </p:nvSpPr>
+        <p:spPr>
+          <a:xfrm>
+            <a:off x="8313267" y="1664207"/>
+            <a:ext cx="731520" cy="594360"/>
           </a:xfrm>
           <a:prstGeom prst="rect">
             <a:avLst/>
@@ -14095,7 +14805,7 @@
               </a:lnSpc>
             </a:pPr>
             <a:r>
-              <a:rPr sz="3400" b="1" i="0">
+              <a:rPr sz="3200" b="1" i="0">
                 <a:solidFill>
                   <a:srgbClr val="F0AB00"/>
                 </a:solidFill>
@@ -14108,14 +14818,14 @@
       </p:sp>
       <p:sp>
         <p:nvSpPr>
-          <p:cNvPr id="13" name="TextBox 12"/>
-          <p:cNvSpPr txBox="1"/>
-          <p:nvPr/>
-        </p:nvSpPr>
-        <p:spPr>
-          <a:xfrm>
-            <a:off x="8313267" y="2423160"/>
-            <a:ext cx="3154680" cy="777240"/>
+          <p:cNvPr id="16" name="TextBox 15"/>
+          <p:cNvSpPr txBox="1"/>
+          <p:nvPr/>
+        </p:nvSpPr>
+        <p:spPr>
+          <a:xfrm>
+            <a:off x="8313267" y="2286000"/>
+            <a:ext cx="3154680" cy="731520"/>
           </a:xfrm>
           <a:prstGeom prst="rect">
             <a:avLst/>
@@ -14130,11 +14840,11 @@
           <a:p>
             <a:pPr algn="l">
               <a:lnSpc>
-                <a:spcPct val="112000"/>
+                <a:spcPct val="110000"/>
               </a:lnSpc>
             </a:pPr>
             <a:r>
-              <a:rPr sz="1650" b="1" i="0">
+              <a:rPr sz="1600" b="1" i="0">
                 <a:solidFill>
                   <a:srgbClr val="21295C"/>
                 </a:solidFill>
@@ -14147,53 +14857,14 @@
       </p:sp>
       <p:sp>
         <p:nvSpPr>
-          <p:cNvPr id="14" name="TextBox 13"/>
-          <p:cNvSpPr txBox="1"/>
-          <p:nvPr/>
-        </p:nvSpPr>
-        <p:spPr>
-          <a:xfrm>
-            <a:off x="8313267" y="3246120"/>
-            <a:ext cx="3154680" cy="1463040"/>
-          </a:xfrm>
-          <a:prstGeom prst="rect">
-            <a:avLst/>
-          </a:prstGeom>
-          <a:noFill/>
-        </p:spPr>
-        <p:txBody>
-          <a:bodyPr wrap="square" lIns="0" rIns="0" tIns="0" bIns="0" anchor="t">
-            <a:spAutoFit/>
-          </a:bodyPr>
-          <a:lstStyle/>
-          <a:p>
-            <a:pPr algn="l">
-              <a:lnSpc>
-                <a:spcPct val="122000"/>
-              </a:lnSpc>
-            </a:pPr>
-            <a:r>
-              <a:rPr sz="1300" b="0" i="0">
-                <a:solidFill>
-                  <a:srgbClr val="21295C"/>
-                </a:solidFill>
-                <a:latin typeface="Arial"/>
-              </a:rPr>
-              <a:t>Вектор целого текста от отдельной embedding-модели — не внутренности вашего чат-LLM. Свой продукт, своё обучение, свои лидерборды.</a:t>
-            </a:r>
-          </a:p>
-        </p:txBody>
-      </p:sp>
-      <p:sp>
-        <p:nvSpPr>
-          <p:cNvPr id="15" name="TextBox 14"/>
-          <p:cNvSpPr txBox="1"/>
-          <p:nvPr/>
-        </p:nvSpPr>
-        <p:spPr>
-          <a:xfrm>
-            <a:off x="8313267" y="4361688"/>
-            <a:ext cx="3154680" cy="365760"/>
+          <p:cNvPr id="17" name="TextBox 16"/>
+          <p:cNvSpPr txBox="1"/>
+          <p:nvPr/>
+        </p:nvSpPr>
+        <p:spPr>
+          <a:xfrm>
+            <a:off x="8313267" y="3017520"/>
+            <a:ext cx="3154680" cy="320040"/>
           </a:xfrm>
           <a:prstGeom prst="rect">
             <a:avLst/>
@@ -14212,26 +14883,104 @@
               </a:lnSpc>
             </a:pPr>
             <a:r>
+              <a:rPr sz="1150" b="0" i="1">
+                <a:solidFill>
+                  <a:srgbClr val="065A82"/>
+                </a:solidFill>
+                <a:latin typeface="Arial"/>
+              </a:rPr>
+              <a:t>самостоятельный инструмент</a:t>
+            </a:r>
+          </a:p>
+        </p:txBody>
+      </p:sp>
+      <p:sp>
+        <p:nvSpPr>
+          <p:cNvPr id="18" name="TextBox 17"/>
+          <p:cNvSpPr txBox="1"/>
+          <p:nvPr/>
+        </p:nvSpPr>
+        <p:spPr>
+          <a:xfrm>
+            <a:off x="8313267" y="3383280"/>
+            <a:ext cx="3154680" cy="1371600"/>
+          </a:xfrm>
+          <a:prstGeom prst="rect">
+            <a:avLst/>
+          </a:prstGeom>
+          <a:noFill/>
+        </p:spPr>
+        <p:txBody>
+          <a:bodyPr wrap="square" lIns="0" rIns="0" tIns="0" bIns="0" anchor="t">
+            <a:spAutoFit/>
+          </a:bodyPr>
+          <a:lstStyle/>
+          <a:p>
+            <a:pPr algn="l">
+              <a:lnSpc>
+                <a:spcPct val="120000"/>
+              </a:lnSpc>
+            </a:pPr>
+            <a:r>
+              <a:rPr sz="1300" b="0" i="0">
+                <a:solidFill>
+                  <a:srgbClr val="21295C"/>
+                </a:solidFill>
+                <a:latin typeface="Arial"/>
+              </a:rPr>
+              <a:t>Вектор целого текста от отдельной embedding-модели — не внутренности вашего чат-LLM. Свой продукт, своё обучение, свои лидерборды.</a:t>
+            </a:r>
+          </a:p>
+        </p:txBody>
+      </p:sp>
+      <p:sp>
+        <p:nvSpPr>
+          <p:cNvPr id="19" name="TextBox 18"/>
+          <p:cNvSpPr txBox="1"/>
+          <p:nvPr/>
+        </p:nvSpPr>
+        <p:spPr>
+          <a:xfrm>
+            <a:off x="8313267" y="4443983"/>
+            <a:ext cx="3154680" cy="347472"/>
+          </a:xfrm>
+          <a:prstGeom prst="rect">
+            <a:avLst/>
+          </a:prstGeom>
+          <a:noFill/>
+        </p:spPr>
+        <p:txBody>
+          <a:bodyPr wrap="square" lIns="0" rIns="0" tIns="0" bIns="0" anchor="t">
+            <a:spAutoFit/>
+          </a:bodyPr>
+          <a:lstStyle/>
+          <a:p>
+            <a:pPr algn="l">
+              <a:lnSpc>
+                <a:spcPct val="115000"/>
+              </a:lnSpc>
+            </a:pPr>
+            <a:r>
               <a:rPr sz="1150" b="1" i="1">
                 <a:solidFill>
                   <a:srgbClr val="065A82"/>
                 </a:solidFill>
                 <a:latin typeface="Arial"/>
               </a:rPr>
-              <a:t>самая частая путаница</a:t>
-            </a:r>
-          </a:p>
-        </p:txBody>
-      </p:sp>
-      <p:sp>
-        <p:nvSpPr>
-          <p:cNvPr id="16" name="Rounded Rectangle 15"/>
+              <a:t>это и есть ваш поиск/RAG</a:t>
+            </a:r>
+          </a:p>
+        </p:txBody>
+      </p:sp>
+      <p:sp>
+        <p:nvSpPr>
+          <p:cNvPr id="20" name="Rounded Rectangle 19"/>
           <p:cNvSpPr/>
           <p:nvPr/>
         </p:nvSpPr>
         <p:spPr>
           <a:xfrm>
-            <a:off x="502920" y="5166360"/>
+            <a:off x="502920" y="5230368"/>
             <a:ext cx="11201400" cy="777240"/>
           </a:xfrm>
           <a:prstGeom prst="roundRect">
@@ -14273,13 +15022,13 @@
       </p:sp>
       <p:sp>
         <p:nvSpPr>
-          <p:cNvPr id="17" name="TextBox 16"/>
-          <p:cNvSpPr txBox="1"/>
-          <p:nvPr/>
-        </p:nvSpPr>
-        <p:spPr>
-          <a:xfrm>
-            <a:off x="685800" y="5221224"/>
+          <p:cNvPr id="21" name="TextBox 20"/>
+          <p:cNvSpPr txBox="1"/>
+          <p:nvPr/>
+        </p:nvSpPr>
+        <p:spPr>
+          <a:xfrm>
+            <a:off x="685800" y="5285231"/>
             <a:ext cx="10835640" cy="667512"/>
           </a:xfrm>
           <a:prstGeom prst="rect">
@@ -14305,14 +15054,14 @@
                 </a:solidFill>
                 <a:latin typeface="Arial"/>
               </a:rPr>
-              <a:t>Обновили LLM → переиндексировать базу НЕ надо: индекс живёт в координатах embedding-модели.</a:t>
-            </a:r>
-          </a:p>
-        </p:txBody>
-      </p:sp>
-      <p:sp>
-        <p:nvSpPr>
-          <p:cNvPr id="18" name="TextBox 17"/>
+              <a:t>Обновили чат-LLM → переиндексировать базу НЕ надо: индекс живёт в координатах embedding-модели.</a:t>
+            </a:r>
+          </a:p>
+        </p:txBody>
+      </p:sp>
+      <p:sp>
+        <p:nvSpPr>
+          <p:cNvPr id="22" name="TextBox 21"/>
           <p:cNvSpPr txBox="1"/>
           <p:nvPr/>
         </p:nvSpPr>
@@ -14459,7 +15208,7 @@
         <p:spPr>
           <a:xfrm>
             <a:off x="685800" y="1618488"/>
-            <a:ext cx="5760720" cy="320040"/>
+            <a:ext cx="2377440" cy="320040"/>
           </a:xfrm>
           <a:prstGeom prst="rect">
             <a:avLst/>
@@ -14491,14 +15240,205 @@
       </p:sp>
       <p:sp>
         <p:nvSpPr>
-          <p:cNvPr id="5" name="Oval 4"/>
+          <p:cNvPr id="5" name="TextBox 4"/>
+          <p:cNvSpPr txBox="1"/>
+          <p:nvPr/>
+        </p:nvSpPr>
+        <p:spPr>
+          <a:xfrm>
+            <a:off x="2788920" y="1618488"/>
+            <a:ext cx="3657600" cy="502920"/>
+          </a:xfrm>
+          <a:prstGeom prst="rect">
+            <a:avLst/>
+          </a:prstGeom>
+          <a:noFill/>
+        </p:spPr>
+        <p:txBody>
+          <a:bodyPr wrap="square" lIns="0" rIns="0" tIns="0" bIns="0" anchor="t">
+            <a:spAutoFit/>
+          </a:bodyPr>
+          <a:lstStyle/>
+          <a:p>
+            <a:pPr algn="r">
+              <a:lnSpc>
+                <a:spcPct val="105000"/>
+              </a:lnSpc>
+            </a:pPr>
+            <a:r>
+              <a:rPr sz="1000" b="0" i="1">
+                <a:solidFill>
+                  <a:srgbClr val="6B7685"/>
+                </a:solidFill>
+                <a:latin typeface="Arial"/>
+              </a:rPr>
+              <a:t>каждая из 1536+ осей — выученный признак; здесь показаны две</a:t>
+            </a:r>
+          </a:p>
+        </p:txBody>
+      </p:sp>
+      <p:cxnSp>
+        <p:nvCxnSpPr>
+          <p:cNvPr id="6" name="Connector 5"/>
+          <p:cNvCxnSpPr/>
+          <p:nvPr/>
+        </p:nvCxnSpPr>
+        <p:spPr>
+          <a:xfrm>
+            <a:off x="932688" y="5504688"/>
+            <a:ext cx="5468112" cy="0"/>
+          </a:xfrm>
+          <a:prstGeom prst="line">
+            <a:avLst/>
+          </a:prstGeom>
+          <a:ln w="22860">
+            <a:solidFill>
+              <a:srgbClr val="1C7293"/>
+            </a:solidFill>
+            <a:tailEnd type="triangle" w="med" len="med"/>
+          </a:ln>
+          <a:effectLst/>
+        </p:spPr>
+        <p:style>
+          <a:lnRef idx="2">
+            <a:schemeClr val="accent1"/>
+          </a:lnRef>
+          <a:fillRef idx="0">
+            <a:schemeClr val="accent1"/>
+          </a:fillRef>
+          <a:effectRef idx="1">
+            <a:schemeClr val="accent1"/>
+          </a:effectRef>
+          <a:fontRef idx="minor">
+            <a:schemeClr val="tx1"/>
+          </a:fontRef>
+        </p:style>
+      </p:cxnSp>
+      <p:cxnSp>
+        <p:nvCxnSpPr>
+          <p:cNvPr id="7" name="Connector 6"/>
+          <p:cNvCxnSpPr/>
+          <p:nvPr/>
+        </p:nvCxnSpPr>
+        <p:spPr>
+          <a:xfrm flipV="1">
+            <a:off x="932688" y="2075688"/>
+            <a:ext cx="0" cy="3429000"/>
+          </a:xfrm>
+          <a:prstGeom prst="line">
+            <a:avLst/>
+          </a:prstGeom>
+          <a:ln w="22860">
+            <a:solidFill>
+              <a:srgbClr val="1C7293"/>
+            </a:solidFill>
+            <a:tailEnd type="triangle" w="med" len="med"/>
+          </a:ln>
+          <a:effectLst/>
+        </p:spPr>
+        <p:style>
+          <a:lnRef idx="2">
+            <a:schemeClr val="accent1"/>
+          </a:lnRef>
+          <a:fillRef idx="0">
+            <a:schemeClr val="accent1"/>
+          </a:fillRef>
+          <a:effectRef idx="1">
+            <a:schemeClr val="accent1"/>
+          </a:effectRef>
+          <a:fontRef idx="minor">
+            <a:schemeClr val="tx1"/>
+          </a:fontRef>
+        </p:style>
+      </p:cxnSp>
+      <p:sp>
+        <p:nvSpPr>
+          <p:cNvPr id="8" name="TextBox 7"/>
+          <p:cNvSpPr txBox="1"/>
+          <p:nvPr/>
+        </p:nvSpPr>
+        <p:spPr>
+          <a:xfrm>
+            <a:off x="1024128" y="5596127"/>
+            <a:ext cx="5303520" cy="292608"/>
+          </a:xfrm>
+          <a:prstGeom prst="rect">
+            <a:avLst/>
+          </a:prstGeom>
+          <a:noFill/>
+        </p:spPr>
+        <p:txBody>
+          <a:bodyPr wrap="square" lIns="0" rIns="0" tIns="0" bIns="0" anchor="t">
+            <a:spAutoFit/>
+          </a:bodyPr>
+          <a:lstStyle/>
+          <a:p>
+            <a:pPr algn="ctr">
+              <a:lnSpc>
+                <a:spcPct val="115000"/>
+              </a:lnSpc>
+            </a:pPr>
+            <a:r>
+              <a:rPr sz="1050" b="0" i="1">
+                <a:solidFill>
+                  <a:srgbClr val="1C7293"/>
+                </a:solidFill>
+                <a:latin typeface="Arial"/>
+              </a:rPr>
+              <a:t>ось ≈ признак: тематика (веб-разработка ↔ кулинария)</a:t>
+            </a:r>
+          </a:p>
+        </p:txBody>
+      </p:sp>
+      <p:sp>
+        <p:nvSpPr>
+          <p:cNvPr id="9" name="TextBox 8"/>
+          <p:cNvSpPr txBox="1"/>
+          <p:nvPr/>
+        </p:nvSpPr>
+        <p:spPr>
+          <a:xfrm>
+            <a:off x="1042416" y="2075688"/>
+            <a:ext cx="3291840" cy="292608"/>
+          </a:xfrm>
+          <a:prstGeom prst="rect">
+            <a:avLst/>
+          </a:prstGeom>
+          <a:noFill/>
+        </p:spPr>
+        <p:txBody>
+          <a:bodyPr wrap="square" lIns="0" rIns="0" tIns="0" bIns="0" anchor="t">
+            <a:spAutoFit/>
+          </a:bodyPr>
+          <a:lstStyle/>
+          <a:p>
+            <a:pPr algn="l">
+              <a:lnSpc>
+                <a:spcPct val="115000"/>
+              </a:lnSpc>
+            </a:pPr>
+            <a:r>
+              <a:rPr sz="1050" b="0" i="1">
+                <a:solidFill>
+                  <a:srgbClr val="1C7293"/>
+                </a:solidFill>
+                <a:latin typeface="Arial"/>
+              </a:rPr>
+              <a:t>ось ≈ признак: инфраструктура ↔ фронтенд</a:t>
+            </a:r>
+          </a:p>
+        </p:txBody>
+      </p:sp>
+      <p:sp>
+        <p:nvSpPr>
+          <p:cNvPr id="10" name="Oval 9"/>
           <p:cNvSpPr/>
           <p:nvPr/>
         </p:nvSpPr>
         <p:spPr>
           <a:xfrm>
-            <a:off x="960120" y="2148840"/>
-            <a:ext cx="2651760" cy="1417320"/>
+            <a:off x="1234440" y="2331720"/>
+            <a:ext cx="2697480" cy="1371600"/>
           </a:xfrm>
           <a:prstGeom prst="ellipse">
             <a:avLst/>
@@ -14536,14 +15476,14 @@
       </p:sp>
       <p:sp>
         <p:nvSpPr>
-          <p:cNvPr id="6" name="Oval 5"/>
+          <p:cNvPr id="11" name="Oval 10"/>
           <p:cNvSpPr/>
           <p:nvPr/>
         </p:nvSpPr>
         <p:spPr>
           <a:xfrm>
-            <a:off x="3703320" y="3703320"/>
-            <a:ext cx="2743200" cy="1417320"/>
+            <a:off x="1417320" y="3886200"/>
+            <a:ext cx="2788920" cy="1371600"/>
           </a:xfrm>
           <a:prstGeom prst="ellipse">
             <a:avLst/>
@@ -14581,13 +15521,13 @@
       </p:sp>
       <p:sp>
         <p:nvSpPr>
-          <p:cNvPr id="7" name="Oval 6"/>
+          <p:cNvPr id="12" name="Oval 11"/>
           <p:cNvSpPr/>
           <p:nvPr/>
         </p:nvSpPr>
         <p:spPr>
           <a:xfrm>
-            <a:off x="1417320" y="2514600"/>
+            <a:off x="1645920" y="2606040"/>
             <a:ext cx="310896" cy="310896"/>
           </a:xfrm>
           <a:prstGeom prst="ellipse">
@@ -14627,13 +15567,13 @@
       </p:sp>
       <p:sp>
         <p:nvSpPr>
-          <p:cNvPr id="8" name="TextBox 7"/>
-          <p:cNvSpPr txBox="1"/>
-          <p:nvPr/>
-        </p:nvSpPr>
-        <p:spPr>
-          <a:xfrm>
-            <a:off x="1737360" y="2395728"/>
+          <p:cNvPr id="13" name="TextBox 12"/>
+          <p:cNvSpPr txBox="1"/>
+          <p:nvPr/>
+        </p:nvSpPr>
+        <p:spPr>
+          <a:xfrm>
+            <a:off x="1965960" y="2487168"/>
             <a:ext cx="2011680" cy="502920"/>
           </a:xfrm>
           <a:prstGeom prst="rect">
@@ -14666,13 +15606,13 @@
       </p:sp>
       <p:sp>
         <p:nvSpPr>
-          <p:cNvPr id="9" name="Oval 8"/>
+          <p:cNvPr id="14" name="Oval 13"/>
           <p:cNvSpPr/>
           <p:nvPr/>
         </p:nvSpPr>
         <p:spPr>
           <a:xfrm>
-            <a:off x="2103120" y="3017520"/>
+            <a:off x="2240280" y="3127248"/>
             <a:ext cx="310896" cy="310896"/>
           </a:xfrm>
           <a:prstGeom prst="ellipse">
@@ -14712,13 +15652,13 @@
       </p:sp>
       <p:sp>
         <p:nvSpPr>
-          <p:cNvPr id="10" name="TextBox 9"/>
-          <p:cNvSpPr txBox="1"/>
-          <p:nvPr/>
-        </p:nvSpPr>
-        <p:spPr>
-          <a:xfrm>
-            <a:off x="2395728" y="2907792"/>
+          <p:cNvPr id="15" name="TextBox 14"/>
+          <p:cNvSpPr txBox="1"/>
+          <p:nvPr/>
+        </p:nvSpPr>
+        <p:spPr>
+          <a:xfrm>
+            <a:off x="2542032" y="3017520"/>
             <a:ext cx="2103120" cy="640080"/>
           </a:xfrm>
           <a:prstGeom prst="rect">
@@ -14752,13 +15692,13 @@
       </p:sp>
       <p:sp>
         <p:nvSpPr>
-          <p:cNvPr id="11" name="Oval 10"/>
+          <p:cNvPr id="16" name="Oval 15"/>
           <p:cNvSpPr/>
           <p:nvPr/>
         </p:nvSpPr>
         <p:spPr>
           <a:xfrm>
-            <a:off x="4160520" y="4069080"/>
+            <a:off x="1828800" y="4160520"/>
             <a:ext cx="310896" cy="310896"/>
           </a:xfrm>
           <a:prstGeom prst="ellipse">
@@ -14798,13 +15738,13 @@
       </p:sp>
       <p:sp>
         <p:nvSpPr>
-          <p:cNvPr id="12" name="TextBox 11"/>
-          <p:cNvSpPr txBox="1"/>
-          <p:nvPr/>
-        </p:nvSpPr>
-        <p:spPr>
-          <a:xfrm>
-            <a:off x="4462272" y="3950208"/>
+          <p:cNvPr id="17" name="TextBox 16"/>
+          <p:cNvSpPr txBox="1"/>
+          <p:nvPr/>
+        </p:nvSpPr>
+        <p:spPr>
+          <a:xfrm>
+            <a:off x="2148840" y="4041648"/>
             <a:ext cx="2103120" cy="502920"/>
           </a:xfrm>
           <a:prstGeom prst="rect">
@@ -14837,13 +15777,13 @@
       </p:sp>
       <p:sp>
         <p:nvSpPr>
-          <p:cNvPr id="13" name="Oval 12"/>
+          <p:cNvPr id="18" name="Oval 17"/>
           <p:cNvSpPr/>
           <p:nvPr/>
         </p:nvSpPr>
         <p:spPr>
           <a:xfrm>
-            <a:off x="4846320" y="4572000"/>
+            <a:off x="2468880" y="4681728"/>
             <a:ext cx="310896" cy="310896"/>
           </a:xfrm>
           <a:prstGeom prst="ellipse">
@@ -14883,13 +15823,13 @@
       </p:sp>
       <p:sp>
         <p:nvSpPr>
-          <p:cNvPr id="14" name="TextBox 13"/>
-          <p:cNvSpPr txBox="1"/>
-          <p:nvPr/>
-        </p:nvSpPr>
-        <p:spPr>
-          <a:xfrm>
-            <a:off x="5120640" y="4462272"/>
+          <p:cNvPr id="19" name="TextBox 18"/>
+          <p:cNvSpPr txBox="1"/>
+          <p:nvPr/>
+        </p:nvSpPr>
+        <p:spPr>
+          <a:xfrm>
+            <a:off x="2761488" y="4572000"/>
             <a:ext cx="2011680" cy="640080"/>
           </a:xfrm>
           <a:prstGeom prst="rect">
@@ -14923,13 +15863,13 @@
       </p:sp>
       <p:sp>
         <p:nvSpPr>
-          <p:cNvPr id="15" name="Oval 14"/>
+          <p:cNvPr id="20" name="Oval 19"/>
           <p:cNvSpPr/>
           <p:nvPr/>
         </p:nvSpPr>
         <p:spPr>
           <a:xfrm>
-            <a:off x="1417320" y="5257800"/>
+            <a:off x="5166360" y="3611880"/>
             <a:ext cx="310896" cy="310896"/>
           </a:xfrm>
           <a:prstGeom prst="ellipse">
@@ -14969,14 +15909,14 @@
       </p:sp>
       <p:sp>
         <p:nvSpPr>
-          <p:cNvPr id="16" name="TextBox 15"/>
-          <p:cNvSpPr txBox="1"/>
-          <p:nvPr/>
-        </p:nvSpPr>
-        <p:spPr>
-          <a:xfrm>
-            <a:off x="1737360" y="5138928"/>
-            <a:ext cx="1828800" cy="457200"/>
+          <p:cNvPr id="21" name="TextBox 20"/>
+          <p:cNvSpPr txBox="1"/>
+          <p:nvPr/>
+        </p:nvSpPr>
+        <p:spPr>
+          <a:xfrm>
+            <a:off x="4846320" y="3977639"/>
+            <a:ext cx="1645920" cy="365760"/>
           </a:xfrm>
           <a:prstGeom prst="rect">
             <a:avLst/>
@@ -14989,7 +15929,7 @@
           </a:bodyPr>
           <a:lstStyle/>
           <a:p>
-            <a:pPr algn="l">
+            <a:pPr algn="ctr">
               <a:lnSpc>
                 <a:spcPct val="115000"/>
               </a:lnSpc>
@@ -15008,14 +15948,14 @@
       </p:sp>
       <p:sp>
         <p:nvSpPr>
-          <p:cNvPr id="17" name="TextBox 16"/>
-          <p:cNvSpPr txBox="1"/>
-          <p:nvPr/>
-        </p:nvSpPr>
-        <p:spPr>
-          <a:xfrm>
-            <a:off x="1737360" y="5440680"/>
-            <a:ext cx="2194560" cy="365760"/>
+          <p:cNvPr id="22" name="TextBox 21"/>
+          <p:cNvSpPr txBox="1"/>
+          <p:nvPr/>
+        </p:nvSpPr>
+        <p:spPr>
+          <a:xfrm>
+            <a:off x="4617720" y="4224528"/>
+            <a:ext cx="2103120" cy="365760"/>
           </a:xfrm>
           <a:prstGeom prst="rect">
             <a:avLst/>
@@ -15028,7 +15968,7 @@
           </a:bodyPr>
           <a:lstStyle/>
           <a:p>
-            <a:pPr algn="l">
+            <a:pPr algn="ctr">
               <a:lnSpc>
                 <a:spcPct val="115000"/>
               </a:lnSpc>
@@ -15047,7 +15987,7 @@
       </p:sp>
       <p:sp>
         <p:nvSpPr>
-          <p:cNvPr id="18" name="Rounded Rectangle 17"/>
+          <p:cNvPr id="23" name="Rounded Rectangle 22"/>
           <p:cNvSpPr/>
           <p:nvPr/>
         </p:nvSpPr>
@@ -15095,7 +16035,7 @@
       </p:sp>
       <p:sp>
         <p:nvSpPr>
-          <p:cNvPr id="19" name="TextBox 18"/>
+          <p:cNvPr id="24" name="TextBox 23"/>
           <p:cNvSpPr txBox="1"/>
           <p:nvPr/>
         </p:nvSpPr>
@@ -15134,7 +16074,7 @@
       </p:sp>
       <p:sp>
         <p:nvSpPr>
-          <p:cNvPr id="20" name="TextBox 19"/>
+          <p:cNvPr id="25" name="TextBox 24"/>
           <p:cNvSpPr txBox="1"/>
           <p:nvPr/>
         </p:nvSpPr>
@@ -15191,7 +16131,7 @@
       </p:sp>
       <p:sp>
         <p:nvSpPr>
-          <p:cNvPr id="21" name="Rounded Rectangle 20"/>
+          <p:cNvPr id="26" name="Rounded Rectangle 25"/>
           <p:cNvSpPr/>
           <p:nvPr/>
         </p:nvSpPr>
@@ -15239,7 +16179,7 @@
       </p:sp>
       <p:sp>
         <p:nvSpPr>
-          <p:cNvPr id="22" name="TextBox 21"/>
+          <p:cNvPr id="27" name="TextBox 26"/>
           <p:cNvSpPr txBox="1"/>
           <p:nvPr/>
         </p:nvSpPr>
@@ -15278,7 +16218,7 @@
       </p:sp>
       <p:sp>
         <p:nvSpPr>
-          <p:cNvPr id="23" name="TextBox 22"/>
+          <p:cNvPr id="28" name="TextBox 27"/>
           <p:cNvSpPr txBox="1"/>
           <p:nvPr/>
         </p:nvSpPr>
@@ -15317,7 +16257,7 @@
       </p:sp>
       <p:sp>
         <p:nvSpPr>
-          <p:cNvPr id="24" name="Rounded Rectangle 23"/>
+          <p:cNvPr id="29" name="Rounded Rectangle 28"/>
           <p:cNvSpPr/>
           <p:nvPr/>
         </p:nvSpPr>
@@ -15365,7 +16305,7 @@
       </p:sp>
       <p:sp>
         <p:nvSpPr>
-          <p:cNvPr id="25" name="TextBox 24"/>
+          <p:cNvPr id="30" name="TextBox 29"/>
           <p:cNvSpPr txBox="1"/>
           <p:nvPr/>
         </p:nvSpPr>
@@ -15404,7 +16344,7 @@
       </p:sp>
       <p:sp>
         <p:nvSpPr>
-          <p:cNvPr id="26" name="TextBox 25"/>
+          <p:cNvPr id="31" name="TextBox 30"/>
           <p:cNvSpPr txBox="1"/>
           <p:nvPr/>
         </p:nvSpPr>
@@ -15443,7 +16383,7 @@
       </p:sp>
       <p:sp>
         <p:nvSpPr>
-          <p:cNvPr id="27" name="TextBox 26"/>
+          <p:cNvPr id="32" name="TextBox 31"/>
           <p:cNvSpPr txBox="1"/>
           <p:nvPr/>
         </p:nvSpPr>
@@ -16969,7 +17909,7 @@
                 </a:solidFill>
                 <a:latin typeface="Arial"/>
               </a:rPr>
-              <a:t>Проверяем ментальную модель: конвейер инференса и шесть границ</a:t>
+              <a:t>Конвейер инференса — и шесть границ, которые меняют инженерные решения</a:t>
             </a:r>
           </a:p>
         </p:txBody>
@@ -43353,7 +44293,7 @@
                 </a:solidFill>
                 <a:latin typeface="Arial"/>
               </a:rPr>
-              <a:t>Фиксируем рамку: всё сегодняшнее — внутри слоя «модель»</a:t>
+              <a:t>Объект сегодня — слой «модель» из четырёх слоёв Лекции 1</a:t>
             </a:r>
           </a:p>
         </p:txBody>
@@ -43788,7 +44728,7 @@
                 </a:solidFill>
                 <a:latin typeface="Arial"/>
               </a:rPr>
-              <a:t>Известное: </a:t>
+              <a:t>Слой «модель»: </a:t>
             </a:r>
             <a:r>
               <a:rPr sz="1550" b="0" i="0">
@@ -43797,7 +44737,7 @@
                 </a:solidFill>
                 <a:latin typeface="Arial"/>
               </a:rPr>
-              <a:t>модель — stateless-инференс: на вход данные, на выход предсказание, без памяти между вызовами.</a:t>
+              <a:t>stateless-инференс — на вход данные, на выход предсказание, без памяти между вызовами.</a:t>
             </a:r>
           </a:p>
         </p:txBody>
@@ -43893,7 +44833,7 @@
                 </a:solidFill>
                 <a:latin typeface="Arial"/>
               </a:rPr>
-              <a:t>границы точного понимания того, что внутри этого инференса.</a:t>
+              <a:t>разбираем, что происходит внутри этого инференса — и где его устройство меняет инженерные решения.</a:t>
             </a:r>
           </a:p>
         </p:txBody>
@@ -46351,7 +47291,7 @@
                 </a:solidFill>
                 <a:latin typeface="Arial"/>
               </a:rPr>
-              <a:t>Точная ментальная модель — это знание границ. Каждое утверждение — правда соседней области, растянутая за свою границу.</a:t>
+              <a:t>Знать инструмент — значит знать его границы. Каждое утверждение — правда соседней области, растянутая за свою границу.</a:t>
             </a:r>
           </a:p>
         </p:txBody>
@@ -49472,7 +50412,7 @@
                 </a:solidFill>
                 <a:latin typeface="Arial"/>
               </a:rPr>
-              <a:t>Центральный вопрос лекции</a:t>
+              <a:t>Цель лекции</a:t>
             </a:r>
           </a:p>
         </p:txBody>
@@ -49553,13 +50493,31 @@
               </a:lnSpc>
             </a:pPr>
             <a:r>
-              <a:rPr sz="2100" b="1" i="0">
+              <a:rPr sz="2200" b="1" i="0">
                 <a:solidFill>
                   <a:srgbClr val="21295C"/>
                 </a:solidFill>
                 <a:latin typeface="Arial"/>
               </a:rPr>
-              <a:t>«Насколько точна ваша ментальная модель LLM — и какие из внутренних механизмов, которые вы знаете приблизительно, при точном понимании меняют то, как вы строите промпты, агентов и решения?»</a:t>
+              <a:t>«Рассмотреть, как работает языковая модель, — и разобраться с </a:t>
+            </a:r>
+            <a:r>
+              <a:rPr sz="2200" b="1" i="0">
+                <a:solidFill>
+                  <a:srgbClr val="F0AB00"/>
+                </a:solidFill>
+                <a:latin typeface="Arial"/>
+              </a:rPr>
+              <a:t>важными деталями</a:t>
+            </a:r>
+            <a:r>
+              <a:rPr sz="2200" b="1" i="0">
+                <a:solidFill>
+                  <a:srgbClr val="21295C"/>
+                </a:solidFill>
+                <a:latin typeface="Arial"/>
+              </a:rPr>
+              <a:t>, которые меняют то, как вы строите промпты, агентов и решения.»</a:t>
             </a:r>
           </a:p>
         </p:txBody>
@@ -50442,15 +51400,163 @@
           </a:p>
         </p:txBody>
       </p:sp>
-      <p:sp>
-        <p:nvSpPr>
-          <p:cNvPr id="3" name="Rounded Rectangle 2"/>
+      <p:cxnSp>
+        <p:nvCxnSpPr>
+          <p:cNvPr id="3" name="Connector 2"/>
+          <p:cNvCxnSpPr/>
+          <p:nvPr/>
+        </p:nvCxnSpPr>
+        <p:spPr>
+          <a:xfrm flipV="1">
+            <a:off x="9439939" y="1591056"/>
+            <a:ext cx="0" cy="256032"/>
+          </a:xfrm>
+          <a:prstGeom prst="line">
+            <a:avLst/>
+          </a:prstGeom>
+          <a:ln w="27940">
+            <a:solidFill>
+              <a:srgbClr val="028090"/>
+            </a:solidFill>
+          </a:ln>
+          <a:effectLst/>
+        </p:spPr>
+        <p:style>
+          <a:lnRef idx="2">
+            <a:schemeClr val="accent1"/>
+          </a:lnRef>
+          <a:fillRef idx="0">
+            <a:schemeClr val="accent1"/>
+          </a:fillRef>
+          <a:effectRef idx="1">
+            <a:schemeClr val="accent1"/>
+          </a:effectRef>
+          <a:fontRef idx="minor">
+            <a:schemeClr val="tx1"/>
+          </a:fontRef>
+        </p:style>
+      </p:cxnSp>
+      <p:cxnSp>
+        <p:nvCxnSpPr>
+          <p:cNvPr id="4" name="Connector 3"/>
+          <p:cNvCxnSpPr/>
+          <p:nvPr/>
+        </p:nvCxnSpPr>
+        <p:spPr>
+          <a:xfrm flipH="1">
+            <a:off x="2751756" y="1591056"/>
+            <a:ext cx="6688183" cy="0"/>
+          </a:xfrm>
+          <a:prstGeom prst="line">
+            <a:avLst/>
+          </a:prstGeom>
+          <a:ln w="27940">
+            <a:solidFill>
+              <a:srgbClr val="028090"/>
+            </a:solidFill>
+          </a:ln>
+          <a:effectLst/>
+        </p:spPr>
+        <p:style>
+          <a:lnRef idx="2">
+            <a:schemeClr val="accent1"/>
+          </a:lnRef>
+          <a:fillRef idx="0">
+            <a:schemeClr val="accent1"/>
+          </a:fillRef>
+          <a:effectRef idx="1">
+            <a:schemeClr val="accent1"/>
+          </a:effectRef>
+          <a:fontRef idx="minor">
+            <a:schemeClr val="tx1"/>
+          </a:fontRef>
+        </p:style>
+      </p:cxnSp>
+      <p:cxnSp>
+        <p:nvCxnSpPr>
+          <p:cNvPr id="5" name="Connector 4"/>
+          <p:cNvCxnSpPr/>
+          <p:nvPr/>
+        </p:nvCxnSpPr>
+        <p:spPr>
+          <a:xfrm>
+            <a:off x="2751756" y="1591056"/>
+            <a:ext cx="0" cy="237744"/>
+          </a:xfrm>
+          <a:prstGeom prst="line">
+            <a:avLst/>
+          </a:prstGeom>
+          <a:ln w="27940">
+            <a:solidFill>
+              <a:srgbClr val="028090"/>
+            </a:solidFill>
+            <a:tailEnd type="triangle" w="med" len="med"/>
+          </a:ln>
+          <a:effectLst/>
+        </p:spPr>
+        <p:style>
+          <a:lnRef idx="2">
+            <a:schemeClr val="accent1"/>
+          </a:lnRef>
+          <a:fillRef idx="0">
+            <a:schemeClr val="accent1"/>
+          </a:fillRef>
+          <a:effectRef idx="1">
+            <a:schemeClr val="accent1"/>
+          </a:effectRef>
+          <a:fontRef idx="minor">
+            <a:schemeClr val="tx1"/>
+          </a:fontRef>
+        </p:style>
+      </p:cxnSp>
+      <p:sp>
+        <p:nvSpPr>
+          <p:cNvPr id="6" name="TextBox 5"/>
+          <p:cNvSpPr txBox="1"/>
+          <p:nvPr/>
+        </p:nvSpPr>
+        <p:spPr>
+          <a:xfrm>
+            <a:off x="2980356" y="1261872"/>
+            <a:ext cx="6230982" cy="292608"/>
+          </a:xfrm>
+          <a:prstGeom prst="rect">
+            <a:avLst/>
+          </a:prstGeom>
+          <a:noFill/>
+        </p:spPr>
+        <p:txBody>
+          <a:bodyPr wrap="square" lIns="0" rIns="0" tIns="0" bIns="0" anchor="t">
+            <a:spAutoFit/>
+          </a:bodyPr>
+          <a:lstStyle/>
+          <a:p>
+            <a:pPr algn="ctr">
+              <a:lnSpc>
+                <a:spcPct val="115000"/>
+              </a:lnSpc>
+            </a:pPr>
+            <a:r>
+              <a:rPr sz="1200" b="1" i="1">
+                <a:solidFill>
+                  <a:srgbClr val="028090"/>
+                </a:solidFill>
+                <a:latin typeface="Arial"/>
+              </a:rPr>
+              <a:t>⟲ токены генерируются по одному; каждый добавляется ко входу</a:t>
+            </a:r>
+          </a:p>
+        </p:txBody>
+      </p:sp>
+      <p:sp>
+        <p:nvSpPr>
+          <p:cNvPr id="7" name="Rounded Rectangle 6"/>
           <p:cNvSpPr/>
           <p:nvPr/>
         </p:nvSpPr>
         <p:spPr>
           <a:xfrm>
-            <a:off x="380847" y="1600200"/>
+            <a:off x="380847" y="1847088"/>
             <a:ext cx="1397725" cy="1234440"/>
           </a:xfrm>
           <a:prstGeom prst="roundRect">
@@ -50492,13 +51598,13 @@
       </p:sp>
       <p:sp>
         <p:nvSpPr>
-          <p:cNvPr id="4" name="TextBox 3"/>
-          <p:cNvSpPr txBox="1"/>
-          <p:nvPr/>
-        </p:nvSpPr>
-        <p:spPr>
-          <a:xfrm>
-            <a:off x="325983" y="1709928"/>
+          <p:cNvPr id="8" name="TextBox 7"/>
+          <p:cNvSpPr txBox="1"/>
+          <p:nvPr/>
+        </p:nvSpPr>
+        <p:spPr>
+          <a:xfrm>
+            <a:off x="325983" y="1956816"/>
             <a:ext cx="1507453" cy="365760"/>
           </a:xfrm>
           <a:prstGeom prst="rect">
@@ -50531,13 +51637,13 @@
       </p:sp>
       <p:sp>
         <p:nvSpPr>
-          <p:cNvPr id="5" name="TextBox 4"/>
-          <p:cNvSpPr txBox="1"/>
-          <p:nvPr/>
-        </p:nvSpPr>
-        <p:spPr>
-          <a:xfrm>
-            <a:off x="289407" y="2167128"/>
+          <p:cNvPr id="9" name="TextBox 8"/>
+          <p:cNvSpPr txBox="1"/>
+          <p:nvPr/>
+        </p:nvSpPr>
+        <p:spPr>
+          <a:xfrm>
+            <a:off x="289407" y="2414016"/>
             <a:ext cx="1580605" cy="548640"/>
           </a:xfrm>
           <a:prstGeom prst="rect">
@@ -50570,13 +51676,13 @@
       </p:sp>
       <p:sp>
         <p:nvSpPr>
-          <p:cNvPr id="6" name="TextBox 5"/>
-          <p:cNvSpPr txBox="1"/>
-          <p:nvPr/>
-        </p:nvSpPr>
-        <p:spPr>
-          <a:xfrm>
-            <a:off x="243687" y="2907792"/>
+          <p:cNvPr id="10" name="TextBox 9"/>
+          <p:cNvSpPr txBox="1"/>
+          <p:nvPr/>
+        </p:nvSpPr>
+        <p:spPr>
+          <a:xfrm>
+            <a:off x="243687" y="3154680"/>
             <a:ext cx="1672045" cy="457200"/>
           </a:xfrm>
           <a:prstGeom prst="rect">
@@ -50609,13 +51715,13 @@
       </p:sp>
       <p:sp>
         <p:nvSpPr>
-          <p:cNvPr id="7" name="Right Arrow 6"/>
+          <p:cNvPr id="11" name="Right Arrow 10"/>
           <p:cNvSpPr/>
           <p:nvPr/>
         </p:nvSpPr>
         <p:spPr>
           <a:xfrm>
-            <a:off x="1806005" y="2144268"/>
+            <a:off x="1806005" y="2391156"/>
             <a:ext cx="219456" cy="146304"/>
           </a:xfrm>
           <a:prstGeom prst="rightArrow">
@@ -50653,13 +51759,13 @@
       </p:sp>
       <p:sp>
         <p:nvSpPr>
-          <p:cNvPr id="8" name="Rounded Rectangle 7"/>
+          <p:cNvPr id="12" name="Rounded Rectangle 11"/>
           <p:cNvSpPr/>
           <p:nvPr/>
         </p:nvSpPr>
         <p:spPr>
           <a:xfrm>
-            <a:off x="2052893" y="1600200"/>
+            <a:off x="2052893" y="1847088"/>
             <a:ext cx="1397725" cy="1234440"/>
           </a:xfrm>
           <a:prstGeom prst="roundRect">
@@ -50701,13 +51807,13 @@
       </p:sp>
       <p:sp>
         <p:nvSpPr>
-          <p:cNvPr id="9" name="TextBox 8"/>
-          <p:cNvSpPr txBox="1"/>
-          <p:nvPr/>
-        </p:nvSpPr>
-        <p:spPr>
-          <a:xfrm>
-            <a:off x="1998029" y="1709928"/>
+          <p:cNvPr id="13" name="TextBox 12"/>
+          <p:cNvSpPr txBox="1"/>
+          <p:nvPr/>
+        </p:nvSpPr>
+        <p:spPr>
+          <a:xfrm>
+            <a:off x="1998029" y="1956816"/>
             <a:ext cx="1507453" cy="365760"/>
           </a:xfrm>
           <a:prstGeom prst="rect">
@@ -50740,13 +51846,13 @@
       </p:sp>
       <p:sp>
         <p:nvSpPr>
-          <p:cNvPr id="10" name="TextBox 9"/>
-          <p:cNvSpPr txBox="1"/>
-          <p:nvPr/>
-        </p:nvSpPr>
-        <p:spPr>
-          <a:xfrm>
-            <a:off x="1961453" y="2167128"/>
+          <p:cNvPr id="14" name="TextBox 13"/>
+          <p:cNvSpPr txBox="1"/>
+          <p:nvPr/>
+        </p:nvSpPr>
+        <p:spPr>
+          <a:xfrm>
+            <a:off x="1961453" y="2414016"/>
             <a:ext cx="1580605" cy="548640"/>
           </a:xfrm>
           <a:prstGeom prst="rect">
@@ -50779,13 +51885,13 @@
       </p:sp>
       <p:sp>
         <p:nvSpPr>
-          <p:cNvPr id="11" name="TextBox 10"/>
-          <p:cNvSpPr txBox="1"/>
-          <p:nvPr/>
-        </p:nvSpPr>
-        <p:spPr>
-          <a:xfrm>
-            <a:off x="1915733" y="2907792"/>
+          <p:cNvPr id="15" name="TextBox 14"/>
+          <p:cNvSpPr txBox="1"/>
+          <p:nvPr/>
+        </p:nvSpPr>
+        <p:spPr>
+          <a:xfrm>
+            <a:off x="1915733" y="3154680"/>
             <a:ext cx="1672045" cy="457200"/>
           </a:xfrm>
           <a:prstGeom prst="rect">
@@ -50818,13 +51924,13 @@
       </p:sp>
       <p:sp>
         <p:nvSpPr>
-          <p:cNvPr id="12" name="Right Arrow 11"/>
+          <p:cNvPr id="16" name="Right Arrow 15"/>
           <p:cNvSpPr/>
           <p:nvPr/>
         </p:nvSpPr>
         <p:spPr>
           <a:xfrm>
-            <a:off x="3478051" y="2144268"/>
+            <a:off x="3478051" y="2391156"/>
             <a:ext cx="219456" cy="146304"/>
           </a:xfrm>
           <a:prstGeom prst="rightArrow">
@@ -50862,13 +51968,13 @@
       </p:sp>
       <p:sp>
         <p:nvSpPr>
-          <p:cNvPr id="13" name="Rounded Rectangle 12"/>
+          <p:cNvPr id="17" name="Rounded Rectangle 16"/>
           <p:cNvSpPr/>
           <p:nvPr/>
         </p:nvSpPr>
         <p:spPr>
           <a:xfrm>
-            <a:off x="3724939" y="1600200"/>
+            <a:off x="3724939" y="1847088"/>
             <a:ext cx="1397725" cy="1234440"/>
           </a:xfrm>
           <a:prstGeom prst="roundRect">
@@ -50910,13 +52016,13 @@
       </p:sp>
       <p:sp>
         <p:nvSpPr>
-          <p:cNvPr id="14" name="TextBox 13"/>
-          <p:cNvSpPr txBox="1"/>
-          <p:nvPr/>
-        </p:nvSpPr>
-        <p:spPr>
-          <a:xfrm>
-            <a:off x="3670075" y="1709928"/>
+          <p:cNvPr id="18" name="TextBox 17"/>
+          <p:cNvSpPr txBox="1"/>
+          <p:nvPr/>
+        </p:nvSpPr>
+        <p:spPr>
+          <a:xfrm>
+            <a:off x="3670075" y="1956816"/>
             <a:ext cx="1507453" cy="365760"/>
           </a:xfrm>
           <a:prstGeom prst="rect">
@@ -50949,13 +52055,13 @@
       </p:sp>
       <p:sp>
         <p:nvSpPr>
-          <p:cNvPr id="15" name="TextBox 14"/>
-          <p:cNvSpPr txBox="1"/>
-          <p:nvPr/>
-        </p:nvSpPr>
-        <p:spPr>
-          <a:xfrm>
-            <a:off x="3633499" y="2167128"/>
+          <p:cNvPr id="19" name="TextBox 18"/>
+          <p:cNvSpPr txBox="1"/>
+          <p:nvPr/>
+        </p:nvSpPr>
+        <p:spPr>
+          <a:xfrm>
+            <a:off x="3633499" y="2414016"/>
             <a:ext cx="1580605" cy="548640"/>
           </a:xfrm>
           <a:prstGeom prst="rect">
@@ -50988,13 +52094,13 @@
       </p:sp>
       <p:sp>
         <p:nvSpPr>
-          <p:cNvPr id="16" name="TextBox 15"/>
-          <p:cNvSpPr txBox="1"/>
-          <p:nvPr/>
-        </p:nvSpPr>
-        <p:spPr>
-          <a:xfrm>
-            <a:off x="3587779" y="2907792"/>
+          <p:cNvPr id="20" name="TextBox 19"/>
+          <p:cNvSpPr txBox="1"/>
+          <p:nvPr/>
+        </p:nvSpPr>
+        <p:spPr>
+          <a:xfrm>
+            <a:off x="3587779" y="3154680"/>
             <a:ext cx="1672045" cy="457200"/>
           </a:xfrm>
           <a:prstGeom prst="rect">
@@ -51027,13 +52133,13 @@
       </p:sp>
       <p:sp>
         <p:nvSpPr>
-          <p:cNvPr id="17" name="Right Arrow 16"/>
+          <p:cNvPr id="21" name="Right Arrow 20"/>
           <p:cNvSpPr/>
           <p:nvPr/>
         </p:nvSpPr>
         <p:spPr>
           <a:xfrm>
-            <a:off x="5150096" y="2144268"/>
+            <a:off x="5150096" y="2391156"/>
             <a:ext cx="219456" cy="146304"/>
           </a:xfrm>
           <a:prstGeom prst="rightArrow">
@@ -51071,13 +52177,13 @@
       </p:sp>
       <p:sp>
         <p:nvSpPr>
-          <p:cNvPr id="18" name="Rounded Rectangle 17"/>
+          <p:cNvPr id="22" name="Rounded Rectangle 21"/>
           <p:cNvSpPr/>
           <p:nvPr/>
         </p:nvSpPr>
         <p:spPr>
           <a:xfrm>
-            <a:off x="5396984" y="1600200"/>
+            <a:off x="5396984" y="1847088"/>
             <a:ext cx="1397725" cy="1234440"/>
           </a:xfrm>
           <a:prstGeom prst="roundRect">
@@ -51119,13 +52225,13 @@
       </p:sp>
       <p:sp>
         <p:nvSpPr>
-          <p:cNvPr id="19" name="TextBox 18"/>
-          <p:cNvSpPr txBox="1"/>
-          <p:nvPr/>
-        </p:nvSpPr>
-        <p:spPr>
-          <a:xfrm>
-            <a:off x="5342120" y="1709928"/>
+          <p:cNvPr id="23" name="TextBox 22"/>
+          <p:cNvSpPr txBox="1"/>
+          <p:nvPr/>
+        </p:nvSpPr>
+        <p:spPr>
+          <a:xfrm>
+            <a:off x="5342120" y="1956816"/>
             <a:ext cx="1507453" cy="365760"/>
           </a:xfrm>
           <a:prstGeom prst="rect">
@@ -51158,13 +52264,13 @@
       </p:sp>
       <p:sp>
         <p:nvSpPr>
-          <p:cNvPr id="20" name="TextBox 19"/>
-          <p:cNvSpPr txBox="1"/>
-          <p:nvPr/>
-        </p:nvSpPr>
-        <p:spPr>
-          <a:xfrm>
-            <a:off x="5305544" y="2167128"/>
+          <p:cNvPr id="24" name="TextBox 23"/>
+          <p:cNvSpPr txBox="1"/>
+          <p:nvPr/>
+        </p:nvSpPr>
+        <p:spPr>
+          <a:xfrm>
+            <a:off x="5305544" y="2414016"/>
             <a:ext cx="1580605" cy="548640"/>
           </a:xfrm>
           <a:prstGeom prst="rect">
@@ -51197,13 +52303,13 @@
       </p:sp>
       <p:sp>
         <p:nvSpPr>
-          <p:cNvPr id="21" name="TextBox 20"/>
-          <p:cNvSpPr txBox="1"/>
-          <p:nvPr/>
-        </p:nvSpPr>
-        <p:spPr>
-          <a:xfrm>
-            <a:off x="5259824" y="2907792"/>
+          <p:cNvPr id="25" name="TextBox 24"/>
+          <p:cNvSpPr txBox="1"/>
+          <p:nvPr/>
+        </p:nvSpPr>
+        <p:spPr>
+          <a:xfrm>
+            <a:off x="5259824" y="3154680"/>
             <a:ext cx="1672045" cy="457200"/>
           </a:xfrm>
           <a:prstGeom prst="rect">
@@ -51236,13 +52342,13 @@
       </p:sp>
       <p:sp>
         <p:nvSpPr>
-          <p:cNvPr id="22" name="Right Arrow 21"/>
+          <p:cNvPr id="26" name="Right Arrow 25"/>
           <p:cNvSpPr/>
           <p:nvPr/>
         </p:nvSpPr>
         <p:spPr>
           <a:xfrm>
-            <a:off x="6822142" y="2144268"/>
+            <a:off x="6822142" y="2391156"/>
             <a:ext cx="219456" cy="146304"/>
           </a:xfrm>
           <a:prstGeom prst="rightArrow">
@@ -51280,13 +52386,13 @@
       </p:sp>
       <p:sp>
         <p:nvSpPr>
-          <p:cNvPr id="23" name="Rounded Rectangle 22"/>
+          <p:cNvPr id="27" name="Rounded Rectangle 26"/>
           <p:cNvSpPr/>
           <p:nvPr/>
         </p:nvSpPr>
         <p:spPr>
           <a:xfrm>
-            <a:off x="7069030" y="1600200"/>
+            <a:off x="7069030" y="1847088"/>
             <a:ext cx="1397725" cy="1234440"/>
           </a:xfrm>
           <a:prstGeom prst="roundRect">
@@ -51328,13 +52434,13 @@
       </p:sp>
       <p:sp>
         <p:nvSpPr>
-          <p:cNvPr id="24" name="TextBox 23"/>
-          <p:cNvSpPr txBox="1"/>
-          <p:nvPr/>
-        </p:nvSpPr>
-        <p:spPr>
-          <a:xfrm>
-            <a:off x="7014166" y="1709928"/>
+          <p:cNvPr id="28" name="TextBox 27"/>
+          <p:cNvSpPr txBox="1"/>
+          <p:nvPr/>
+        </p:nvSpPr>
+        <p:spPr>
+          <a:xfrm>
+            <a:off x="7014166" y="1956816"/>
             <a:ext cx="1507453" cy="365760"/>
           </a:xfrm>
           <a:prstGeom prst="rect">
@@ -51367,13 +52473,13 @@
       </p:sp>
       <p:sp>
         <p:nvSpPr>
-          <p:cNvPr id="25" name="TextBox 24"/>
-          <p:cNvSpPr txBox="1"/>
-          <p:nvPr/>
-        </p:nvSpPr>
-        <p:spPr>
-          <a:xfrm>
-            <a:off x="6977590" y="2167128"/>
+          <p:cNvPr id="29" name="TextBox 28"/>
+          <p:cNvSpPr txBox="1"/>
+          <p:nvPr/>
+        </p:nvSpPr>
+        <p:spPr>
+          <a:xfrm>
+            <a:off x="6977590" y="2414016"/>
             <a:ext cx="1580605" cy="548640"/>
           </a:xfrm>
           <a:prstGeom prst="rect">
@@ -51406,13 +52512,13 @@
       </p:sp>
       <p:sp>
         <p:nvSpPr>
-          <p:cNvPr id="26" name="TextBox 25"/>
-          <p:cNvSpPr txBox="1"/>
-          <p:nvPr/>
-        </p:nvSpPr>
-        <p:spPr>
-          <a:xfrm>
-            <a:off x="6931870" y="2907792"/>
+          <p:cNvPr id="30" name="TextBox 29"/>
+          <p:cNvSpPr txBox="1"/>
+          <p:nvPr/>
+        </p:nvSpPr>
+        <p:spPr>
+          <a:xfrm>
+            <a:off x="6931870" y="3154680"/>
             <a:ext cx="1672045" cy="457200"/>
           </a:xfrm>
           <a:prstGeom prst="rect">
@@ -51445,13 +52551,13 @@
       </p:sp>
       <p:sp>
         <p:nvSpPr>
-          <p:cNvPr id="27" name="Right Arrow 26"/>
+          <p:cNvPr id="31" name="Right Arrow 30"/>
           <p:cNvSpPr/>
           <p:nvPr/>
         </p:nvSpPr>
         <p:spPr>
           <a:xfrm>
-            <a:off x="8494188" y="2144268"/>
+            <a:off x="8494188" y="2391156"/>
             <a:ext cx="219456" cy="146304"/>
           </a:xfrm>
           <a:prstGeom prst="rightArrow">
@@ -51489,13 +52595,13 @@
       </p:sp>
       <p:sp>
         <p:nvSpPr>
-          <p:cNvPr id="28" name="Rounded Rectangle 27"/>
+          <p:cNvPr id="32" name="Rounded Rectangle 31"/>
           <p:cNvSpPr/>
           <p:nvPr/>
         </p:nvSpPr>
         <p:spPr>
           <a:xfrm>
-            <a:off x="8741076" y="1600200"/>
+            <a:off x="8741076" y="1847088"/>
             <a:ext cx="1397725" cy="1234440"/>
           </a:xfrm>
           <a:prstGeom prst="roundRect">
@@ -51537,13 +52643,13 @@
       </p:sp>
       <p:sp>
         <p:nvSpPr>
-          <p:cNvPr id="29" name="TextBox 28"/>
-          <p:cNvSpPr txBox="1"/>
-          <p:nvPr/>
-        </p:nvSpPr>
-        <p:spPr>
-          <a:xfrm>
-            <a:off x="8686212" y="1709928"/>
+          <p:cNvPr id="33" name="TextBox 32"/>
+          <p:cNvSpPr txBox="1"/>
+          <p:nvPr/>
+        </p:nvSpPr>
+        <p:spPr>
+          <a:xfrm>
+            <a:off x="8686212" y="1956816"/>
             <a:ext cx="1507453" cy="365760"/>
           </a:xfrm>
           <a:prstGeom prst="rect">
@@ -51576,13 +52682,13 @@
       </p:sp>
       <p:sp>
         <p:nvSpPr>
-          <p:cNvPr id="30" name="TextBox 29"/>
-          <p:cNvSpPr txBox="1"/>
-          <p:nvPr/>
-        </p:nvSpPr>
-        <p:spPr>
-          <a:xfrm>
-            <a:off x="8649636" y="2167128"/>
+          <p:cNvPr id="34" name="TextBox 33"/>
+          <p:cNvSpPr txBox="1"/>
+          <p:nvPr/>
+        </p:nvSpPr>
+        <p:spPr>
+          <a:xfrm>
+            <a:off x="8649636" y="2414016"/>
             <a:ext cx="1580605" cy="548640"/>
           </a:xfrm>
           <a:prstGeom prst="rect">
@@ -51615,13 +52721,13 @@
       </p:sp>
       <p:sp>
         <p:nvSpPr>
-          <p:cNvPr id="31" name="TextBox 30"/>
-          <p:cNvSpPr txBox="1"/>
-          <p:nvPr/>
-        </p:nvSpPr>
-        <p:spPr>
-          <a:xfrm>
-            <a:off x="8603916" y="2907792"/>
+          <p:cNvPr id="35" name="TextBox 34"/>
+          <p:cNvSpPr txBox="1"/>
+          <p:nvPr/>
+        </p:nvSpPr>
+        <p:spPr>
+          <a:xfrm>
+            <a:off x="8603916" y="3154680"/>
             <a:ext cx="1672045" cy="457200"/>
           </a:xfrm>
           <a:prstGeom prst="rect">
@@ -51654,13 +52760,13 @@
       </p:sp>
       <p:sp>
         <p:nvSpPr>
-          <p:cNvPr id="32" name="Right Arrow 31"/>
+          <p:cNvPr id="36" name="Right Arrow 35"/>
           <p:cNvSpPr/>
           <p:nvPr/>
         </p:nvSpPr>
         <p:spPr>
           <a:xfrm>
-            <a:off x="10166233" y="2144268"/>
+            <a:off x="10166233" y="2391156"/>
             <a:ext cx="219456" cy="146304"/>
           </a:xfrm>
           <a:prstGeom prst="rightArrow">
@@ -51698,13 +52804,13 @@
       </p:sp>
       <p:sp>
         <p:nvSpPr>
-          <p:cNvPr id="33" name="Rounded Rectangle 32"/>
+          <p:cNvPr id="37" name="Rounded Rectangle 36"/>
           <p:cNvSpPr/>
           <p:nvPr/>
         </p:nvSpPr>
         <p:spPr>
           <a:xfrm>
-            <a:off x="10413121" y="1600200"/>
+            <a:off x="10413121" y="1847088"/>
             <a:ext cx="1397725" cy="1234440"/>
           </a:xfrm>
           <a:prstGeom prst="roundRect">
@@ -51746,13 +52852,13 @@
       </p:sp>
       <p:sp>
         <p:nvSpPr>
-          <p:cNvPr id="34" name="TextBox 33"/>
-          <p:cNvSpPr txBox="1"/>
-          <p:nvPr/>
-        </p:nvSpPr>
-        <p:spPr>
-          <a:xfrm>
-            <a:off x="10358257" y="1709928"/>
+          <p:cNvPr id="38" name="TextBox 37"/>
+          <p:cNvSpPr txBox="1"/>
+          <p:nvPr/>
+        </p:nvSpPr>
+        <p:spPr>
+          <a:xfrm>
+            <a:off x="10358257" y="1956816"/>
             <a:ext cx="1507453" cy="365760"/>
           </a:xfrm>
           <a:prstGeom prst="rect">
@@ -51785,13 +52891,13 @@
       </p:sp>
       <p:sp>
         <p:nvSpPr>
-          <p:cNvPr id="35" name="TextBox 34"/>
-          <p:cNvSpPr txBox="1"/>
-          <p:nvPr/>
-        </p:nvSpPr>
-        <p:spPr>
-          <a:xfrm>
-            <a:off x="10321681" y="2167128"/>
+          <p:cNvPr id="39" name="TextBox 38"/>
+          <p:cNvSpPr txBox="1"/>
+          <p:nvPr/>
+        </p:nvSpPr>
+        <p:spPr>
+          <a:xfrm>
+            <a:off x="10321681" y="2414016"/>
             <a:ext cx="1580605" cy="548640"/>
           </a:xfrm>
           <a:prstGeom prst="rect">
@@ -51824,13 +52930,13 @@
       </p:sp>
       <p:sp>
         <p:nvSpPr>
-          <p:cNvPr id="36" name="TextBox 35"/>
-          <p:cNvSpPr txBox="1"/>
-          <p:nvPr/>
-        </p:nvSpPr>
-        <p:spPr>
-          <a:xfrm>
-            <a:off x="10275961" y="2907792"/>
+          <p:cNvPr id="40" name="TextBox 39"/>
+          <p:cNvSpPr txBox="1"/>
+          <p:nvPr/>
+        </p:nvSpPr>
+        <p:spPr>
+          <a:xfrm>
+            <a:off x="10275961" y="3154680"/>
             <a:ext cx="1672045" cy="457200"/>
           </a:xfrm>
           <a:prstGeom prst="rect">
@@ -51863,13 +52969,13 @@
       </p:sp>
       <p:sp>
         <p:nvSpPr>
-          <p:cNvPr id="37" name="Rounded Rectangle 36"/>
+          <p:cNvPr id="41" name="Rounded Rectangle 40"/>
           <p:cNvSpPr/>
           <p:nvPr/>
         </p:nvSpPr>
         <p:spPr>
           <a:xfrm>
-            <a:off x="399135" y="3794760"/>
+            <a:off x="399135" y="4005072"/>
             <a:ext cx="2697480" cy="868680"/>
           </a:xfrm>
           <a:prstGeom prst="roundRect">
@@ -51911,13 +53017,13 @@
       </p:sp>
       <p:sp>
         <p:nvSpPr>
-          <p:cNvPr id="38" name="TextBox 37"/>
-          <p:cNvSpPr txBox="1"/>
-          <p:nvPr/>
-        </p:nvSpPr>
-        <p:spPr>
-          <a:xfrm>
-            <a:off x="399135" y="3904488"/>
+          <p:cNvPr id="42" name="TextBox 41"/>
+          <p:cNvSpPr txBox="1"/>
+          <p:nvPr/>
+        </p:nvSpPr>
+        <p:spPr>
+          <a:xfrm>
+            <a:off x="399135" y="4114800"/>
             <a:ext cx="2697480" cy="320040"/>
           </a:xfrm>
           <a:prstGeom prst="rect">
@@ -51950,13 +53056,13 @@
       </p:sp>
       <p:sp>
         <p:nvSpPr>
-          <p:cNvPr id="39" name="TextBox 38"/>
-          <p:cNvSpPr txBox="1"/>
-          <p:nvPr/>
-        </p:nvSpPr>
-        <p:spPr>
-          <a:xfrm>
-            <a:off x="399135" y="4251960"/>
+          <p:cNvPr id="43" name="TextBox 42"/>
+          <p:cNvSpPr txBox="1"/>
+          <p:nvPr/>
+        </p:nvSpPr>
+        <p:spPr>
+          <a:xfrm>
+            <a:off x="399135" y="4462272"/>
             <a:ext cx="2697480" cy="320040"/>
           </a:xfrm>
           <a:prstGeom prst="rect">
@@ -51989,13 +53095,13 @@
       </p:sp>
       <p:sp>
         <p:nvSpPr>
-          <p:cNvPr id="40" name="Rounded Rectangle 39"/>
+          <p:cNvPr id="44" name="Rounded Rectangle 43"/>
           <p:cNvSpPr/>
           <p:nvPr/>
         </p:nvSpPr>
         <p:spPr>
           <a:xfrm>
-            <a:off x="3297783" y="3794760"/>
+            <a:off x="3297783" y="4005072"/>
             <a:ext cx="2697480" cy="868680"/>
           </a:xfrm>
           <a:prstGeom prst="roundRect">
@@ -52037,13 +53143,13 @@
       </p:sp>
       <p:sp>
         <p:nvSpPr>
-          <p:cNvPr id="41" name="TextBox 40"/>
-          <p:cNvSpPr txBox="1"/>
-          <p:nvPr/>
-        </p:nvSpPr>
-        <p:spPr>
-          <a:xfrm>
-            <a:off x="3297783" y="3904488"/>
+          <p:cNvPr id="45" name="TextBox 44"/>
+          <p:cNvSpPr txBox="1"/>
+          <p:nvPr/>
+        </p:nvSpPr>
+        <p:spPr>
+          <a:xfrm>
+            <a:off x="3297783" y="4114800"/>
             <a:ext cx="2697480" cy="320040"/>
           </a:xfrm>
           <a:prstGeom prst="rect">
@@ -52076,13 +53182,13 @@
       </p:sp>
       <p:sp>
         <p:nvSpPr>
-          <p:cNvPr id="42" name="TextBox 41"/>
-          <p:cNvSpPr txBox="1"/>
-          <p:nvPr/>
-        </p:nvSpPr>
-        <p:spPr>
-          <a:xfrm>
-            <a:off x="3297783" y="4251960"/>
+          <p:cNvPr id="46" name="TextBox 45"/>
+          <p:cNvSpPr txBox="1"/>
+          <p:nvPr/>
+        </p:nvSpPr>
+        <p:spPr>
+          <a:xfrm>
+            <a:off x="3297783" y="4462272"/>
             <a:ext cx="2697480" cy="320040"/>
           </a:xfrm>
           <a:prstGeom prst="rect">
@@ -52115,13 +53221,13 @@
       </p:sp>
       <p:sp>
         <p:nvSpPr>
-          <p:cNvPr id="43" name="Rounded Rectangle 42"/>
+          <p:cNvPr id="47" name="Rounded Rectangle 46"/>
           <p:cNvSpPr/>
           <p:nvPr/>
         </p:nvSpPr>
         <p:spPr>
           <a:xfrm>
-            <a:off x="6196431" y="3794760"/>
+            <a:off x="6196431" y="4005072"/>
             <a:ext cx="2697480" cy="868680"/>
           </a:xfrm>
           <a:prstGeom prst="roundRect">
@@ -52163,13 +53269,13 @@
       </p:sp>
       <p:sp>
         <p:nvSpPr>
-          <p:cNvPr id="44" name="TextBox 43"/>
-          <p:cNvSpPr txBox="1"/>
-          <p:nvPr/>
-        </p:nvSpPr>
-        <p:spPr>
-          <a:xfrm>
-            <a:off x="6196431" y="3904488"/>
+          <p:cNvPr id="48" name="TextBox 47"/>
+          <p:cNvSpPr txBox="1"/>
+          <p:nvPr/>
+        </p:nvSpPr>
+        <p:spPr>
+          <a:xfrm>
+            <a:off x="6196431" y="4114800"/>
             <a:ext cx="2697480" cy="320040"/>
           </a:xfrm>
           <a:prstGeom prst="rect">
@@ -52202,13 +53308,13 @@
       </p:sp>
       <p:sp>
         <p:nvSpPr>
-          <p:cNvPr id="45" name="TextBox 44"/>
-          <p:cNvSpPr txBox="1"/>
-          <p:nvPr/>
-        </p:nvSpPr>
-        <p:spPr>
-          <a:xfrm>
-            <a:off x="6196431" y="4251960"/>
+          <p:cNvPr id="49" name="TextBox 48"/>
+          <p:cNvSpPr txBox="1"/>
+          <p:nvPr/>
+        </p:nvSpPr>
+        <p:spPr>
+          <a:xfrm>
+            <a:off x="6196431" y="4462272"/>
             <a:ext cx="2697480" cy="320040"/>
           </a:xfrm>
           <a:prstGeom prst="rect">
@@ -52241,13 +53347,13 @@
       </p:sp>
       <p:sp>
         <p:nvSpPr>
-          <p:cNvPr id="46" name="Rounded Rectangle 45"/>
+          <p:cNvPr id="50" name="Rounded Rectangle 49"/>
           <p:cNvSpPr/>
           <p:nvPr/>
         </p:nvSpPr>
         <p:spPr>
           <a:xfrm>
-            <a:off x="9095079" y="3794760"/>
+            <a:off x="9095079" y="4005072"/>
             <a:ext cx="2697480" cy="868680"/>
           </a:xfrm>
           <a:prstGeom prst="roundRect">
@@ -52289,13 +53395,13 @@
       </p:sp>
       <p:sp>
         <p:nvSpPr>
-          <p:cNvPr id="47" name="TextBox 46"/>
-          <p:cNvSpPr txBox="1"/>
-          <p:nvPr/>
-        </p:nvSpPr>
-        <p:spPr>
-          <a:xfrm>
-            <a:off x="9095079" y="3904488"/>
+          <p:cNvPr id="51" name="TextBox 50"/>
+          <p:cNvSpPr txBox="1"/>
+          <p:nvPr/>
+        </p:nvSpPr>
+        <p:spPr>
+          <a:xfrm>
+            <a:off x="9095079" y="4114800"/>
             <a:ext cx="2697480" cy="320040"/>
           </a:xfrm>
           <a:prstGeom prst="rect">
@@ -52328,13 +53434,13 @@
       </p:sp>
       <p:sp>
         <p:nvSpPr>
-          <p:cNvPr id="48" name="TextBox 47"/>
-          <p:cNvSpPr txBox="1"/>
-          <p:nvPr/>
-        </p:nvSpPr>
-        <p:spPr>
-          <a:xfrm>
-            <a:off x="9095079" y="4251960"/>
+          <p:cNvPr id="52" name="TextBox 51"/>
+          <p:cNvSpPr txBox="1"/>
+          <p:nvPr/>
+        </p:nvSpPr>
+        <p:spPr>
+          <a:xfrm>
+            <a:off x="9095079" y="4462272"/>
             <a:ext cx="2697480" cy="320040"/>
           </a:xfrm>
           <a:prstGeom prst="rect">
@@ -52367,13 +53473,13 @@
       </p:sp>
       <p:sp>
         <p:nvSpPr>
-          <p:cNvPr id="49" name="Rounded Rectangle 48"/>
+          <p:cNvPr id="53" name="Rounded Rectangle 52"/>
           <p:cNvSpPr/>
           <p:nvPr/>
         </p:nvSpPr>
         <p:spPr>
           <a:xfrm>
-            <a:off x="2468880" y="5166360"/>
+            <a:off x="2468880" y="5285232"/>
             <a:ext cx="7251192" cy="685800"/>
           </a:xfrm>
           <a:prstGeom prst="roundRect">
@@ -52415,13 +53521,13 @@
       </p:sp>
       <p:sp>
         <p:nvSpPr>
-          <p:cNvPr id="50" name="TextBox 49"/>
-          <p:cNvSpPr txBox="1"/>
-          <p:nvPr/>
-        </p:nvSpPr>
-        <p:spPr>
-          <a:xfrm>
-            <a:off x="2651760" y="5221224"/>
+          <p:cNvPr id="54" name="TextBox 53"/>
+          <p:cNvSpPr txBox="1"/>
+          <p:nvPr/>
+        </p:nvSpPr>
+        <p:spPr>
+          <a:xfrm>
+            <a:off x="2651760" y="5340096"/>
             <a:ext cx="6885431" cy="576072"/>
           </a:xfrm>
           <a:prstGeom prst="rect">
@@ -52454,7 +53560,7 @@
       </p:sp>
       <p:sp>
         <p:nvSpPr>
-          <p:cNvPr id="51" name="TextBox 50"/>
+          <p:cNvPr id="55" name="TextBox 54"/>
           <p:cNvSpPr txBox="1"/>
           <p:nvPr/>
         </p:nvSpPr>

--- a/library/lectures/lec-02/rendered/lec-02.pptx
+++ b/library/lectures/lec-02/rendered/lec-02.pptx
@@ -14112,7 +14112,7 @@
         <p:spPr>
           <a:xfrm>
             <a:off x="502920" y="5074920"/>
-            <a:ext cx="11201400" cy="822960"/>
+            <a:ext cx="11201400" cy="566928"/>
           </a:xfrm>
           <a:prstGeom prst="roundRect">
             <a:avLst>
@@ -14160,7 +14160,7 @@
         <p:spPr>
           <a:xfrm>
             <a:off x="685800" y="5129783"/>
-            <a:ext cx="10835640" cy="713232"/>
+            <a:ext cx="10835640" cy="457200"/>
           </a:xfrm>
           <a:prstGeom prst="rect">
             <a:avLst/>
@@ -14179,7 +14179,7 @@
               </a:lnSpc>
             </a:pPr>
             <a:r>
-              <a:rPr sz="1800" b="1" i="0">
+              <a:rPr sz="1700" b="1" i="0">
                 <a:solidFill>
                   <a:srgbClr val="21295C"/>
                 </a:solidFill>
@@ -14193,6 +14193,54 @@
       <p:sp>
         <p:nvSpPr>
           <p:cNvPr id="23" name="TextBox 22"/>
+          <p:cNvSpPr txBox="1"/>
+          <p:nvPr/>
+        </p:nvSpPr>
+        <p:spPr>
+          <a:xfrm>
+            <a:off x="502920" y="5742432"/>
+            <a:ext cx="11201400" cy="457200"/>
+          </a:xfrm>
+          <a:prstGeom prst="rect">
+            <a:avLst/>
+          </a:prstGeom>
+          <a:noFill/>
+        </p:spPr>
+        <p:txBody>
+          <a:bodyPr wrap="square" lIns="0" rIns="0" tIns="0" bIns="0" anchor="t">
+            <a:spAutoFit/>
+          </a:bodyPr>
+          <a:lstStyle/>
+          <a:p>
+            <a:pPr algn="ctr">
+              <a:lnSpc>
+                <a:spcPct val="115000"/>
+              </a:lnSpc>
+            </a:pPr>
+            <a:r>
+              <a:rPr sz="1300" b="1" i="0">
+                <a:solidFill>
+                  <a:srgbClr val="028090"/>
+                </a:solidFill>
+                <a:latin typeface="Arial"/>
+              </a:rPr>
+              <a:t>Что делать: </a:t>
+            </a:r>
+            <a:r>
+              <a:rPr sz="1300" b="0" i="0">
+                <a:solidFill>
+                  <a:srgbClr val="21295C"/>
+                </a:solidFill>
+                <a:latin typeface="Arial"/>
+              </a:rPr>
+              <a:t>опечатка или другой регистр — уже другой токен и другой вектор; нормализуйте вход до эмбеддинга.</a:t>
+            </a:r>
+          </a:p>
+        </p:txBody>
+      </p:sp>
+      <p:sp>
+        <p:nvSpPr>
+          <p:cNvPr id="24" name="TextBox 23"/>
           <p:cNvSpPr txBox="1"/>
           <p:nvPr/>
         </p:nvSpPr>
@@ -15994,11 +16042,11 @@
         <p:spPr>
           <a:xfrm>
             <a:off x="6858000" y="1508760"/>
-            <a:ext cx="4846320" cy="1417320"/>
+            <a:ext cx="4846320" cy="1298448"/>
           </a:xfrm>
           <a:prstGeom prst="roundRect">
             <a:avLst>
-              <a:gd name="adj" fmla="val 21505"/>
+              <a:gd name="adj" fmla="val 23474"/>
             </a:avLst>
           </a:prstGeom>
           <a:solidFill>
@@ -16080,8 +16128,8 @@
         </p:nvSpPr>
         <p:spPr>
           <a:xfrm>
-            <a:off x="7086600" y="2011680"/>
-            <a:ext cx="4389120" cy="822960"/>
+            <a:off x="7086600" y="1984248"/>
+            <a:ext cx="4389120" cy="777240"/>
           </a:xfrm>
           <a:prstGeom prst="rect">
             <a:avLst/>
@@ -16096,7 +16144,7 @@
           <a:p>
             <a:pPr algn="l">
               <a:lnSpc>
-                <a:spcPct val="120000"/>
+                <a:spcPct val="118000"/>
               </a:lnSpc>
             </a:pPr>
             <a:r>
@@ -16137,12 +16185,12 @@
         </p:nvSpPr>
         <p:spPr>
           <a:xfrm>
-            <a:off x="6858000" y="3090672"/>
-            <a:ext cx="4846320" cy="1417320"/>
+            <a:off x="6858000" y="2935224"/>
+            <a:ext cx="4846320" cy="1298448"/>
           </a:xfrm>
           <a:prstGeom prst="roundRect">
             <a:avLst>
-              <a:gd name="adj" fmla="val 21505"/>
+              <a:gd name="adj" fmla="val 23474"/>
             </a:avLst>
           </a:prstGeom>
           <a:solidFill>
@@ -16185,7 +16233,7 @@
         </p:nvSpPr>
         <p:spPr>
           <a:xfrm>
-            <a:off x="7086600" y="3200400"/>
+            <a:off x="7086600" y="3044952"/>
             <a:ext cx="4389120" cy="365760"/>
           </a:xfrm>
           <a:prstGeom prst="rect">
@@ -16224,8 +16272,8 @@
         </p:nvSpPr>
         <p:spPr>
           <a:xfrm>
-            <a:off x="7086600" y="3593591"/>
-            <a:ext cx="4389120" cy="822960"/>
+            <a:off x="7086600" y="3410712"/>
+            <a:ext cx="4389120" cy="777240"/>
           </a:xfrm>
           <a:prstGeom prst="rect">
             <a:avLst/>
@@ -16240,7 +16288,7 @@
           <a:p>
             <a:pPr algn="l">
               <a:lnSpc>
-                <a:spcPct val="120000"/>
+                <a:spcPct val="118000"/>
               </a:lnSpc>
             </a:pPr>
             <a:r>
@@ -16263,12 +16311,12 @@
         </p:nvSpPr>
         <p:spPr>
           <a:xfrm>
-            <a:off x="6858000" y="4672583"/>
-            <a:ext cx="4846320" cy="1417320"/>
+            <a:off x="6858000" y="4361688"/>
+            <a:ext cx="4846320" cy="1298448"/>
           </a:xfrm>
           <a:prstGeom prst="roundRect">
             <a:avLst>
-              <a:gd name="adj" fmla="val 21505"/>
+              <a:gd name="adj" fmla="val 23474"/>
             </a:avLst>
           </a:prstGeom>
           <a:solidFill>
@@ -16311,7 +16359,7 @@
         </p:nvSpPr>
         <p:spPr>
           <a:xfrm>
-            <a:off x="7086600" y="4782312"/>
+            <a:off x="7086600" y="4471416"/>
             <a:ext cx="4389120" cy="365760"/>
           </a:xfrm>
           <a:prstGeom prst="rect">
@@ -16350,8 +16398,8 @@
         </p:nvSpPr>
         <p:spPr>
           <a:xfrm>
-            <a:off x="7086600" y="5175503"/>
-            <a:ext cx="4389120" cy="822960"/>
+            <a:off x="7086600" y="4837175"/>
+            <a:ext cx="4389120" cy="777240"/>
           </a:xfrm>
           <a:prstGeom prst="rect">
             <a:avLst/>
@@ -16366,7 +16414,7 @@
           <a:p>
             <a:pPr algn="l">
               <a:lnSpc>
-                <a:spcPct val="120000"/>
+                <a:spcPct val="118000"/>
               </a:lnSpc>
             </a:pPr>
             <a:r>
@@ -16383,7 +16431,94 @@
       </p:sp>
       <p:sp>
         <p:nvSpPr>
-          <p:cNvPr id="32" name="TextBox 31"/>
+          <p:cNvPr id="32" name="Rounded Rectangle 31"/>
+          <p:cNvSpPr/>
+          <p:nvPr/>
+        </p:nvSpPr>
+        <p:spPr>
+          <a:xfrm>
+            <a:off x="6858000" y="5861304"/>
+            <a:ext cx="4846320" cy="914400"/>
+          </a:xfrm>
+          <a:prstGeom prst="roundRect">
+            <a:avLst>
+              <a:gd name="adj" fmla="val 12000"/>
+            </a:avLst>
+          </a:prstGeom>
+          <a:solidFill>
+            <a:srgbClr val="FEF5E0"/>
+          </a:solidFill>
+          <a:ln w="15240">
+            <a:solidFill>
+              <a:srgbClr val="F0AB00"/>
+            </a:solidFill>
+          </a:ln>
+          <a:effectLst/>
+        </p:spPr>
+        <p:style>
+          <a:lnRef idx="1">
+            <a:schemeClr val="accent1"/>
+          </a:lnRef>
+          <a:fillRef idx="3">
+            <a:schemeClr val="accent1"/>
+          </a:fillRef>
+          <a:effectRef idx="2">
+            <a:schemeClr val="accent1"/>
+          </a:effectRef>
+          <a:fontRef idx="minor">
+            <a:schemeClr val="lt1"/>
+          </a:fontRef>
+        </p:style>
+        <p:txBody>
+          <a:bodyPr rtlCol="0" anchor="ctr"/>
+          <a:lstStyle/>
+          <a:p>
+            <a:pPr algn="ctr"/>
+          </a:p>
+        </p:txBody>
+      </p:sp>
+      <p:sp>
+        <p:nvSpPr>
+          <p:cNvPr id="33" name="TextBox 32"/>
+          <p:cNvSpPr txBox="1"/>
+          <p:nvPr/>
+        </p:nvSpPr>
+        <p:spPr>
+          <a:xfrm>
+            <a:off x="7040880" y="5916168"/>
+            <a:ext cx="4480559" cy="804672"/>
+          </a:xfrm>
+          <a:prstGeom prst="rect">
+            <a:avLst/>
+          </a:prstGeom>
+          <a:noFill/>
+        </p:spPr>
+        <p:txBody>
+          <a:bodyPr wrap="square" lIns="0" rIns="0" tIns="0" bIns="0" anchor="ctr">
+            <a:spAutoFit/>
+          </a:bodyPr>
+          <a:lstStyle/>
+          <a:p>
+            <a:pPr algn="l">
+              <a:lnSpc>
+                <a:spcPct val="122000"/>
+              </a:lnSpc>
+            </a:pPr>
+            <a:r>
+              <a:rPr sz="1250" b="1" i="0">
+                <a:solidFill>
+                  <a:srgbClr val="21295C"/>
+                </a:solidFill>
+                <a:latin typeface="Arial"/>
+              </a:rPr>
+              <a:t>Что делать: близость измерима расстоянием — фильтрация и кластеризация без разметки и без LLM возможны прямо на векторах, дёшево.</a:t>
+            </a:r>
+          </a:p>
+        </p:txBody>
+      </p:sp>
+      <p:sp>
+        <p:nvSpPr>
+          <p:cNvPr id="34" name="TextBox 33"/>
           <p:cNvSpPr txBox="1"/>
           <p:nvPr/>
         </p:nvSpPr>
@@ -19688,7 +19823,7 @@
         <p:spPr>
           <a:xfrm>
             <a:off x="4023360" y="4709160"/>
-            <a:ext cx="7680960" cy="868680"/>
+            <a:ext cx="7680960" cy="658368"/>
           </a:xfrm>
           <a:prstGeom prst="roundRect">
             <a:avLst>
@@ -19736,7 +19871,7 @@
         <p:spPr>
           <a:xfrm>
             <a:off x="4206240" y="4764024"/>
-            <a:ext cx="7315200" cy="758952"/>
+            <a:ext cx="7315200" cy="548640"/>
           </a:xfrm>
           <a:prstGeom prst="rect">
             <a:avLst/>
@@ -19755,7 +19890,7 @@
               </a:lnSpc>
             </a:pPr>
             <a:r>
-              <a:rPr sz="1550" b="1" i="0">
+              <a:rPr sz="1450" b="1" i="0">
                 <a:solidFill>
                   <a:srgbClr val="21295C"/>
                 </a:solidFill>
@@ -19774,8 +19909,8 @@
         </p:nvSpPr>
         <p:spPr>
           <a:xfrm>
-            <a:off x="4023360" y="5806440"/>
-            <a:ext cx="7680960" cy="502920"/>
+            <a:off x="4023360" y="5458968"/>
+            <a:ext cx="7680960" cy="685800"/>
           </a:xfrm>
           <a:prstGeom prst="rect">
             <a:avLst/>
@@ -19794,7 +19929,55 @@
               </a:lnSpc>
             </a:pPr>
             <a:r>
-              <a:rPr sz="1200" b="0" i="1">
+              <a:rPr sz="1250" b="1" i="0">
+                <a:solidFill>
+                  <a:srgbClr val="028090"/>
+                </a:solidFill>
+                <a:latin typeface="Arial"/>
+              </a:rPr>
+              <a:t>Что делать: </a:t>
+            </a:r>
+            <a:r>
+              <a:rPr sz="1250" b="0" i="0">
+                <a:solidFill>
+                  <a:srgbClr val="21295C"/>
+                </a:solidFill>
+                <a:latin typeface="Arial"/>
+              </a:rPr>
+              <a:t>одна embedding-модель и индекс обслуживают поиск, кластеризацию и RAG сразу — смена модели означает переиндексацию всего хранилища; выбирайте как инфраструктурное решение.</a:t>
+            </a:r>
+          </a:p>
+        </p:txBody>
+      </p:sp>
+      <p:sp>
+        <p:nvSpPr>
+          <p:cNvPr id="33" name="TextBox 32"/>
+          <p:cNvSpPr txBox="1"/>
+          <p:nvPr/>
+        </p:nvSpPr>
+        <p:spPr>
+          <a:xfrm>
+            <a:off x="4023360" y="6263640"/>
+            <a:ext cx="7680960" cy="411480"/>
+          </a:xfrm>
+          <a:prstGeom prst="rect">
+            <a:avLst/>
+          </a:prstGeom>
+          <a:noFill/>
+        </p:spPr>
+        <p:txBody>
+          <a:bodyPr wrap="square" lIns="0" rIns="0" tIns="0" bIns="0" anchor="t">
+            <a:spAutoFit/>
+          </a:bodyPr>
+          <a:lstStyle/>
+          <a:p>
+            <a:pPr algn="l">
+              <a:lnSpc>
+                <a:spcPct val="115000"/>
+              </a:lnSpc>
+            </a:pPr>
+            <a:r>
+              <a:rPr sz="1150" b="0" i="1">
                 <a:solidFill>
                   <a:srgbClr val="1C7293"/>
                 </a:solidFill>
@@ -19807,7 +19990,7 @@
       </p:sp>
       <p:sp>
         <p:nvSpPr>
-          <p:cNvPr id="33" name="TextBox 32"/>
+          <p:cNvPr id="34" name="TextBox 33"/>
           <p:cNvSpPr txBox="1"/>
           <p:nvPr/>
         </p:nvSpPr>
@@ -29494,7 +29677,7 @@
         <p:spPr>
           <a:xfrm>
             <a:off x="502920" y="5394960"/>
-            <a:ext cx="11201400" cy="777240"/>
+            <a:ext cx="11201400" cy="621792"/>
           </a:xfrm>
           <a:prstGeom prst="roundRect">
             <a:avLst>
@@ -29542,7 +29725,7 @@
         <p:spPr>
           <a:xfrm>
             <a:off x="685800" y="5449824"/>
-            <a:ext cx="10835640" cy="667512"/>
+            <a:ext cx="10835640" cy="512064"/>
           </a:xfrm>
           <a:prstGeom prst="rect">
             <a:avLst/>
@@ -29561,7 +29744,7 @@
               </a:lnSpc>
             </a:pPr>
             <a:r>
-              <a:rPr sz="1500" b="1" i="0">
+              <a:rPr sz="1350" b="1" i="0">
                 <a:solidFill>
                   <a:srgbClr val="21295C"/>
                 </a:solidFill>
@@ -29575,6 +29758,54 @@
       <p:sp>
         <p:nvSpPr>
           <p:cNvPr id="22" name="TextBox 21"/>
+          <p:cNvSpPr txBox="1"/>
+          <p:nvPr/>
+        </p:nvSpPr>
+        <p:spPr>
+          <a:xfrm>
+            <a:off x="502920" y="6062472"/>
+            <a:ext cx="11201400" cy="502920"/>
+          </a:xfrm>
+          <a:prstGeom prst="rect">
+            <a:avLst/>
+          </a:prstGeom>
+          <a:noFill/>
+        </p:spPr>
+        <p:txBody>
+          <a:bodyPr wrap="square" lIns="0" rIns="0" tIns="0" bIns="0" anchor="t">
+            <a:spAutoFit/>
+          </a:bodyPr>
+          <a:lstStyle/>
+          <a:p>
+            <a:pPr algn="ctr">
+              <a:lnSpc>
+                <a:spcPct val="112000"/>
+              </a:lnSpc>
+            </a:pPr>
+            <a:r>
+              <a:rPr sz="1250" b="1" i="0">
+                <a:solidFill>
+                  <a:srgbClr val="028090"/>
+                </a:solidFill>
+                <a:latin typeface="Arial"/>
+              </a:rPr>
+              <a:t>Что делать: </a:t>
+            </a:r>
+            <a:r>
+              <a:rPr sz="1250" b="0" i="0">
+                <a:solidFill>
+                  <a:srgbClr val="21295C"/>
+                </a:solidFill>
+                <a:latin typeface="Arial"/>
+              </a:rPr>
+              <a:t>выбирайте модель по эффективному окну задачи (бенчмарки без лексических подсказок), не по маркетинговому максимуму.</a:t>
+            </a:r>
+          </a:p>
+        </p:txBody>
+      </p:sp>
+      <p:sp>
+        <p:nvSpPr>
+          <p:cNvPr id="23" name="TextBox 22"/>
           <p:cNvSpPr txBox="1"/>
           <p:nvPr/>
         </p:nvSpPr>
@@ -35223,8 +35454,8 @@
         </p:nvSpPr>
         <p:spPr>
           <a:xfrm>
-            <a:off x="1965960" y="5394960"/>
-            <a:ext cx="8229600" cy="640080"/>
+            <a:off x="1965960" y="5349240"/>
+            <a:ext cx="8229600" cy="566928"/>
           </a:xfrm>
           <a:prstGeom prst="roundRect">
             <a:avLst>
@@ -35271,8 +35502,8 @@
         </p:nvSpPr>
         <p:spPr>
           <a:xfrm>
-            <a:off x="2148840" y="5394960"/>
-            <a:ext cx="7863840" cy="640080"/>
+            <a:off x="2148840" y="5349240"/>
+            <a:ext cx="7863840" cy="566928"/>
           </a:xfrm>
           <a:prstGeom prst="rect">
             <a:avLst/>
@@ -35291,7 +35522,7 @@
               </a:lnSpc>
             </a:pPr>
             <a:r>
-              <a:rPr sz="1400" b="1" i="0">
+              <a:rPr sz="1300" b="1" i="0">
                 <a:solidFill>
                   <a:srgbClr val="028090"/>
                 </a:solidFill>
@@ -35300,7 +35531,7 @@
               <a:t>Живой прогон: </a:t>
             </a:r>
             <a:r>
-              <a:rPr sz="1400" b="0" i="0">
+              <a:rPr sz="1300" b="0" i="0">
                 <a:solidFill>
                   <a:srgbClr val="21295C"/>
                 </a:solidFill>
@@ -35314,6 +35545,54 @@
       <p:sp>
         <p:nvSpPr>
           <p:cNvPr id="33" name="TextBox 32"/>
+          <p:cNvSpPr txBox="1"/>
+          <p:nvPr/>
+        </p:nvSpPr>
+        <p:spPr>
+          <a:xfrm>
+            <a:off x="502920" y="6016752"/>
+            <a:ext cx="11247120" cy="457200"/>
+          </a:xfrm>
+          <a:prstGeom prst="rect">
+            <a:avLst/>
+          </a:prstGeom>
+          <a:noFill/>
+        </p:spPr>
+        <p:txBody>
+          <a:bodyPr wrap="square" lIns="0" rIns="0" tIns="0" bIns="0" anchor="t">
+            <a:spAutoFit/>
+          </a:bodyPr>
+          <a:lstStyle/>
+          <a:p>
+            <a:pPr algn="ctr">
+              <a:lnSpc>
+                <a:spcPct val="110000"/>
+              </a:lnSpc>
+            </a:pPr>
+            <a:r>
+              <a:rPr sz="1250" b="1" i="0">
+                <a:solidFill>
+                  <a:srgbClr val="028090"/>
+                </a:solidFill>
+                <a:latin typeface="Arial"/>
+              </a:rPr>
+              <a:t>Что делать: </a:t>
+            </a:r>
+            <a:r>
+              <a:rPr sz="1250" b="0" i="0">
+                <a:solidFill>
+                  <a:srgbClr val="21295C"/>
+                </a:solidFill>
+                <a:latin typeface="Arial"/>
+              </a:rPr>
+              <a:t>T под задачу — 0–0.3 для кода и классификации, 0.7+ для генерации текста.</a:t>
+            </a:r>
+          </a:p>
+        </p:txBody>
+      </p:sp>
+      <p:sp>
+        <p:nvSpPr>
+          <p:cNvPr id="34" name="TextBox 33"/>
           <p:cNvSpPr txBox="1"/>
           <p:nvPr/>
         </p:nvSpPr>
@@ -37204,7 +37483,7 @@
         <p:spPr>
           <a:xfrm>
             <a:off x="502920" y="5257800"/>
-            <a:ext cx="11201400" cy="731520"/>
+            <a:ext cx="11201400" cy="594360"/>
           </a:xfrm>
           <a:prstGeom prst="roundRect">
             <a:avLst>
@@ -37252,7 +37531,7 @@
         <p:spPr>
           <a:xfrm>
             <a:off x="685800" y="5312664"/>
-            <a:ext cx="10835640" cy="621792"/>
+            <a:ext cx="10835640" cy="484632"/>
           </a:xfrm>
           <a:prstGeom prst="rect">
             <a:avLst/>
@@ -37271,7 +37550,7 @@
               </a:lnSpc>
             </a:pPr>
             <a:r>
-              <a:rPr sz="1500" b="1" i="0">
+              <a:rPr sz="1350" b="1" i="0">
                 <a:solidFill>
                   <a:srgbClr val="21295C"/>
                 </a:solidFill>
@@ -37285,6 +37564,54 @@
       <p:sp>
         <p:nvSpPr>
           <p:cNvPr id="14" name="TextBox 13"/>
+          <p:cNvSpPr txBox="1"/>
+          <p:nvPr/>
+        </p:nvSpPr>
+        <p:spPr>
+          <a:xfrm>
+            <a:off x="502920" y="5916168"/>
+            <a:ext cx="11201400" cy="457200"/>
+          </a:xfrm>
+          <a:prstGeom prst="rect">
+            <a:avLst/>
+          </a:prstGeom>
+          <a:noFill/>
+        </p:spPr>
+        <p:txBody>
+          <a:bodyPr wrap="square" lIns="0" rIns="0" tIns="0" bIns="0" anchor="t">
+            <a:spAutoFit/>
+          </a:bodyPr>
+          <a:lstStyle/>
+          <a:p>
+            <a:pPr algn="ctr">
+              <a:lnSpc>
+                <a:spcPct val="110000"/>
+              </a:lnSpc>
+            </a:pPr>
+            <a:r>
+              <a:rPr sz="1250" b="1" i="0">
+                <a:solidFill>
+                  <a:srgbClr val="028090"/>
+                </a:solidFill>
+                <a:latin typeface="Arial"/>
+              </a:rPr>
+              <a:t>Что делать: </a:t>
+            </a:r>
+            <a:r>
+              <a:rPr sz="1250" b="0" i="0">
+                <a:solidFill>
+                  <a:srgbClr val="21295C"/>
+                </a:solidFill>
+                <a:latin typeface="Arial"/>
+              </a:rPr>
+              <a:t>начинайте с temperature и effort — остальное (top_p/top_k/verbosity) — тонкая настройка поверх.</a:t>
+            </a:r>
+          </a:p>
+        </p:txBody>
+      </p:sp>
+      <p:sp>
+        <p:nvSpPr>
+          <p:cNvPr id="15" name="TextBox 14"/>
           <p:cNvSpPr txBox="1"/>
           <p:nvPr/>
         </p:nvSpPr>
@@ -41597,7 +41924,7 @@
         <p:spPr>
           <a:xfrm>
             <a:off x="502920" y="5349240"/>
-            <a:ext cx="11201400" cy="640080"/>
+            <a:ext cx="11201400" cy="502920"/>
           </a:xfrm>
           <a:prstGeom prst="rect">
             <a:avLst/>
@@ -41612,24 +41939,111 @@
           <a:p>
             <a:pPr algn="ctr">
               <a:lnSpc>
-                <a:spcPct val="120000"/>
-              </a:lnSpc>
-            </a:pPr>
-            <a:r>
-              <a:rPr sz="1350" b="0" i="1">
+                <a:spcPct val="115000"/>
+              </a:lnSpc>
+            </a:pPr>
+            <a:r>
+              <a:rPr sz="1250" b="0" i="1">
                 <a:solidFill>
                   <a:srgbClr val="065A82"/>
                 </a:solidFill>
                 <a:latin typeface="Arial"/>
               </a:rPr>
-              <a:t>Причины локального выбора прежние: приватность данных · отсутствие платы за токен на объёмах · независимость от сети. Решение — по данным и объёмам, не по идеологии.</a:t>
-            </a:r>
-          </a:p>
-        </p:txBody>
-      </p:sp>
-      <p:sp>
-        <p:nvSpPr>
-          <p:cNvPr id="14" name="TextBox 13"/>
+              <a:t>Причины локального выбора прежние: приватность данных · отсутствие платы за токен на объёмах · независимость от сети.</a:t>
+            </a:r>
+          </a:p>
+        </p:txBody>
+      </p:sp>
+      <p:sp>
+        <p:nvSpPr>
+          <p:cNvPr id="14" name="Rounded Rectangle 13"/>
+          <p:cNvSpPr/>
+          <p:nvPr/>
+        </p:nvSpPr>
+        <p:spPr>
+          <a:xfrm>
+            <a:off x="1280160" y="5897880"/>
+            <a:ext cx="9646920" cy="658368"/>
+          </a:xfrm>
+          <a:prstGeom prst="roundRect">
+            <a:avLst>
+              <a:gd name="adj" fmla="val 12000"/>
+            </a:avLst>
+          </a:prstGeom>
+          <a:solidFill>
+            <a:srgbClr val="FEF5E0"/>
+          </a:solidFill>
+          <a:ln w="15240">
+            <a:solidFill>
+              <a:srgbClr val="F0AB00"/>
+            </a:solidFill>
+          </a:ln>
+          <a:effectLst/>
+        </p:spPr>
+        <p:style>
+          <a:lnRef idx="1">
+            <a:schemeClr val="accent1"/>
+          </a:lnRef>
+          <a:fillRef idx="3">
+            <a:schemeClr val="accent1"/>
+          </a:fillRef>
+          <a:effectRef idx="2">
+            <a:schemeClr val="accent1"/>
+          </a:effectRef>
+          <a:fontRef idx="minor">
+            <a:schemeClr val="lt1"/>
+          </a:fontRef>
+        </p:style>
+        <p:txBody>
+          <a:bodyPr rtlCol="0" anchor="ctr"/>
+          <a:lstStyle/>
+          <a:p>
+            <a:pPr algn="ctr"/>
+          </a:p>
+        </p:txBody>
+      </p:sp>
+      <p:sp>
+        <p:nvSpPr>
+          <p:cNvPr id="15" name="TextBox 14"/>
+          <p:cNvSpPr txBox="1"/>
+          <p:nvPr/>
+        </p:nvSpPr>
+        <p:spPr>
+          <a:xfrm>
+            <a:off x="1463039" y="5952744"/>
+            <a:ext cx="9281160" cy="548640"/>
+          </a:xfrm>
+          <a:prstGeom prst="rect">
+            <a:avLst/>
+          </a:prstGeom>
+          <a:noFill/>
+        </p:spPr>
+        <p:txBody>
+          <a:bodyPr wrap="square" lIns="0" rIns="0" tIns="0" bIns="0" anchor="ctr">
+            <a:spAutoFit/>
+          </a:bodyPr>
+          <a:lstStyle/>
+          <a:p>
+            <a:pPr algn="ctr">
+              <a:lnSpc>
+                <a:spcPct val="122000"/>
+              </a:lnSpc>
+            </a:pPr>
+            <a:r>
+              <a:rPr sz="1300" b="1" i="0">
+                <a:solidFill>
+                  <a:srgbClr val="21295C"/>
+                </a:solidFill>
+                <a:latin typeface="Arial"/>
+              </a:rPr>
+              <a:t>Что делать: задача умещается в ~30B и данные нельзя выпускать за периметр — берите локальную модель; нужно флагманское качество — берите закрытый API.</a:t>
+            </a:r>
+          </a:p>
+        </p:txBody>
+      </p:sp>
+      <p:sp>
+        <p:nvSpPr>
+          <p:cNvPr id="16" name="TextBox 15"/>
           <p:cNvSpPr txBox="1"/>
           <p:nvPr/>
         </p:nvSpPr>
@@ -45285,8 +45699,8 @@
         </p:nvSpPr>
         <p:spPr>
           <a:xfrm>
-            <a:off x="502920" y="3749039"/>
-            <a:ext cx="11201400" cy="960120"/>
+            <a:off x="502920" y="3703320"/>
+            <a:ext cx="11201400" cy="841248"/>
           </a:xfrm>
           <a:prstGeom prst="roundRect">
             <a:avLst>
@@ -45333,8 +45747,8 @@
         </p:nvSpPr>
         <p:spPr>
           <a:xfrm>
-            <a:off x="777240" y="3840480"/>
-            <a:ext cx="10698480" cy="411480"/>
+            <a:off x="777240" y="3776472"/>
+            <a:ext cx="10698480" cy="365760"/>
           </a:xfrm>
           <a:prstGeom prst="rect">
             <a:avLst/>
@@ -45353,7 +45767,7 @@
               </a:lnSpc>
             </a:pPr>
             <a:r>
-              <a:rPr sz="1550" b="1" i="0">
+              <a:rPr sz="1450" b="1" i="0">
                 <a:solidFill>
                   <a:srgbClr val="21295C"/>
                 </a:solidFill>
@@ -45372,8 +45786,8 @@
         </p:nvSpPr>
         <p:spPr>
           <a:xfrm>
-            <a:off x="777240" y="4270248"/>
-            <a:ext cx="10698480" cy="365760"/>
+            <a:off x="777240" y="4160520"/>
+            <a:ext cx="10698480" cy="347472"/>
           </a:xfrm>
           <a:prstGeom prst="rect">
             <a:avLst/>
@@ -45392,7 +45806,7 @@
               </a:lnSpc>
             </a:pPr>
             <a:r>
-              <a:rPr sz="1200" b="0" i="1">
+              <a:rPr sz="1100" b="0" i="1">
                 <a:solidFill>
                   <a:srgbClr val="065A82"/>
                 </a:solidFill>
@@ -45411,7 +45825,7 @@
         </p:nvSpPr>
         <p:spPr>
           <a:xfrm>
-            <a:off x="914400" y="5321808"/>
+            <a:off x="914400" y="5074920"/>
             <a:ext cx="10332720" cy="182880"/>
           </a:xfrm>
           <a:prstGeom prst="roundRect">
@@ -45457,7 +45871,7 @@
         </p:nvSpPr>
         <p:spPr>
           <a:xfrm>
-            <a:off x="914400" y="5321808"/>
+            <a:off x="914400" y="5074920"/>
             <a:ext cx="2103120" cy="182880"/>
           </a:xfrm>
           <a:prstGeom prst="roundRect">
@@ -45503,7 +45917,7 @@
         </p:nvSpPr>
         <p:spPr>
           <a:xfrm>
-            <a:off x="9144000" y="5321808"/>
+            <a:off x="9144000" y="5074920"/>
             <a:ext cx="2103120" cy="182880"/>
           </a:xfrm>
           <a:prstGeom prst="roundRect">
@@ -45549,8 +45963,8 @@
         </p:nvSpPr>
         <p:spPr>
           <a:xfrm>
-            <a:off x="914400" y="4983480"/>
-            <a:ext cx="4114800" cy="320040"/>
+            <a:off x="914400" y="4754880"/>
+            <a:ext cx="4114800" cy="292608"/>
           </a:xfrm>
           <a:prstGeom prst="rect">
             <a:avLst/>
@@ -45569,7 +45983,7 @@
               </a:lnSpc>
             </a:pPr>
             <a:r>
-              <a:rPr sz="1250" b="1" i="0">
+              <a:rPr sz="1200" b="1" i="0">
                 <a:solidFill>
                   <a:srgbClr val="065A82"/>
                 </a:solidFill>
@@ -45588,8 +46002,8 @@
         </p:nvSpPr>
         <p:spPr>
           <a:xfrm>
-            <a:off x="7589520" y="4983480"/>
-            <a:ext cx="3657600" cy="320040"/>
+            <a:off x="7589520" y="4754880"/>
+            <a:ext cx="3657600" cy="292608"/>
           </a:xfrm>
           <a:prstGeom prst="rect">
             <a:avLst/>
@@ -45608,7 +46022,7 @@
               </a:lnSpc>
             </a:pPr>
             <a:r>
-              <a:rPr sz="1250" b="1" i="0">
+              <a:rPr sz="1200" b="1" i="0">
                 <a:solidFill>
                   <a:srgbClr val="21295C"/>
                 </a:solidFill>
@@ -45627,8 +46041,8 @@
         </p:nvSpPr>
         <p:spPr>
           <a:xfrm>
-            <a:off x="502920" y="5760720"/>
-            <a:ext cx="11247120" cy="411480"/>
+            <a:off x="502920" y="5468112"/>
+            <a:ext cx="11247120" cy="365760"/>
           </a:xfrm>
           <a:prstGeom prst="rect">
             <a:avLst/>
@@ -45647,7 +46061,7 @@
               </a:lnSpc>
             </a:pPr>
             <a:r>
-              <a:rPr sz="1400" b="1" i="0">
+              <a:rPr sz="1300" b="1" i="0">
                 <a:solidFill>
                   <a:srgbClr val="21295C"/>
                 </a:solidFill>
@@ -45656,7 +46070,7 @@
               <a:t>Kimi K2.6 ≈ GPT-5.5 на защищённом SWE-bench Pro — </a:t>
             </a:r>
             <a:r>
-              <a:rPr sz="1400" b="1" i="0">
+              <a:rPr sz="1300" b="1" i="0">
                 <a:solidFill>
                   <a:srgbClr val="F0AB00"/>
                 </a:solidFill>
@@ -45669,7 +46083,94 @@
       </p:sp>
       <p:sp>
         <p:nvSpPr>
-          <p:cNvPr id="18" name="TextBox 17"/>
+          <p:cNvPr id="18" name="Rounded Rectangle 17"/>
+          <p:cNvSpPr/>
+          <p:nvPr/>
+        </p:nvSpPr>
+        <p:spPr>
+          <a:xfrm>
+            <a:off x="502920" y="5989320"/>
+            <a:ext cx="11201400" cy="621792"/>
+          </a:xfrm>
+          <a:prstGeom prst="roundRect">
+            <a:avLst>
+              <a:gd name="adj" fmla="val 12000"/>
+            </a:avLst>
+          </a:prstGeom>
+          <a:solidFill>
+            <a:srgbClr val="FEF5E0"/>
+          </a:solidFill>
+          <a:ln w="15240">
+            <a:solidFill>
+              <a:srgbClr val="F0AB00"/>
+            </a:solidFill>
+          </a:ln>
+          <a:effectLst/>
+        </p:spPr>
+        <p:style>
+          <a:lnRef idx="1">
+            <a:schemeClr val="accent1"/>
+          </a:lnRef>
+          <a:fillRef idx="3">
+            <a:schemeClr val="accent1"/>
+          </a:fillRef>
+          <a:effectRef idx="2">
+            <a:schemeClr val="accent1"/>
+          </a:effectRef>
+          <a:fontRef idx="minor">
+            <a:schemeClr val="lt1"/>
+          </a:fontRef>
+        </p:style>
+        <p:txBody>
+          <a:bodyPr rtlCol="0" anchor="ctr"/>
+          <a:lstStyle/>
+          <a:p>
+            <a:pPr algn="ctr"/>
+          </a:p>
+        </p:txBody>
+      </p:sp>
+      <p:sp>
+        <p:nvSpPr>
+          <p:cNvPr id="19" name="TextBox 18"/>
+          <p:cNvSpPr txBox="1"/>
+          <p:nvPr/>
+        </p:nvSpPr>
+        <p:spPr>
+          <a:xfrm>
+            <a:off x="685800" y="6044183"/>
+            <a:ext cx="10835640" cy="512064"/>
+          </a:xfrm>
+          <a:prstGeom prst="rect">
+            <a:avLst/>
+          </a:prstGeom>
+          <a:noFill/>
+        </p:spPr>
+        <p:txBody>
+          <a:bodyPr wrap="square" lIns="0" rIns="0" tIns="0" bIns="0" anchor="ctr">
+            <a:spAutoFit/>
+          </a:bodyPr>
+          <a:lstStyle/>
+          <a:p>
+            <a:pPr algn="ctr">
+              <a:lnSpc>
+                <a:spcPct val="122000"/>
+              </a:lnSpc>
+            </a:pPr>
+            <a:r>
+              <a:rPr sz="1300" b="1" i="0">
+                <a:solidFill>
+                  <a:srgbClr val="21295C"/>
+                </a:solidFill>
+                <a:latin typeface="Arial"/>
+              </a:rPr>
+              <a:t>Что делать: пересматривайте выбор модели регулярно — ландшафт живёт месяцами, а не годами.</a:t>
+            </a:r>
+          </a:p>
+        </p:txBody>
+      </p:sp>
+      <p:sp>
+        <p:nvSpPr>
+          <p:cNvPr id="20" name="TextBox 19"/>
           <p:cNvSpPr txBox="1"/>
           <p:nvPr/>
         </p:nvSpPr>

--- a/library/lectures/lec-02/rendered/lec-02.pptx
+++ b/library/lectures/lec-02/rendered/lec-02.pptx
@@ -1938,7 +1938,7 @@
           </a:p>
           <a:p>
             <a:r>
-              <a:t>И граница эффекта, которую важно знать до того, как вы начнёте злоупотреблять ролями в промптах: систематические проверки показывают, что роль в промпте меняет тон, стиль и отбор содержания ответа — но не повышает его фактическое качество. Роль смещает распределение, не добавляет знаний. Если модель не знает ответа, роль «эксперт» не заставит её узнать — она заставит её увереннее звучать, не будучи более правой. Практический вывод: роль — рабочий инструмент управления стилем и фокусом ответа, полезный и легитимный, но не путайте его с повышением точности. Нужен точный ответ по вашим данным — дайте модели данные, а не третье прилагательное к слову «эксперт».</a:t>
+              <a:t>И граница эффекта, которую важно знать до того, как вы начнёте злоупотреблять ролями в промптах: Zheng et al. (2024, EMNLP Findings) проверили 2410 вопросов и 162 роли — персона/роль в промпте не повышает точность факта, эффект конкретной роли непредсказуем. Отдельно от этого исследования: по наблюдениям курса роль ощутимо меняет тон, стиль и отбор содержания ответа — это отдельный, не тождественный факту эффект. Роль смещает распределение, не добавляет знаний. Если модель не знает ответа, роль «эксперт» не заставит её узнать — она заставит её увереннее звучать, не будучи более правой. Практический вывод: роль — рабочий инструмент управления стилем и фокусом ответа, полезный и легитимный, но не путайте его с повышением точности. Нужен точный ответ по вашим данным — дайте модели данные, а не третье прилагательное к слову «эксперт».</a:t>
             </a:r>
           </a:p>
         </p:txBody>
@@ -7339,48 +7339,9 @@
         <p:nvPr/>
       </p:nvGrpSpPr>
       <p:grpSpPr/>
-      <p:sp>
-        <p:nvSpPr>
-          <p:cNvPr id="2" name="TextBox 1"/>
-          <p:cNvSpPr txBox="1"/>
-          <p:nvPr/>
-        </p:nvSpPr>
-        <p:spPr>
-          <a:xfrm>
-            <a:off x="502920" y="384048"/>
-            <a:ext cx="11183112" cy="868680"/>
-          </a:xfrm>
-          <a:prstGeom prst="rect">
-            <a:avLst/>
-          </a:prstGeom>
-          <a:noFill/>
-        </p:spPr>
-        <p:txBody>
-          <a:bodyPr wrap="square" lIns="0" rIns="0" tIns="0" bIns="0" anchor="ctr">
-            <a:spAutoFit/>
-          </a:bodyPr>
-          <a:lstStyle/>
-          <a:p>
-            <a:pPr algn="ctr">
-              <a:lnSpc>
-                <a:spcPct val="115000"/>
-              </a:lnSpc>
-            </a:pPr>
-            <a:r>
-              <a:rPr sz="3200" b="1" i="0">
-                <a:solidFill>
-                  <a:srgbClr val="21295C"/>
-                </a:solidFill>
-                <a:latin typeface="Arial"/>
-              </a:rPr>
-              <a:t>temperature=0 — значит, ответ всегда одинаковый?</a:t>
-            </a:r>
-          </a:p>
-        </p:txBody>
-      </p:sp>
       <p:pic>
         <p:nvPicPr>
-          <p:cNvPr id="3" name="Picture 2" descr="s01-t0-meme.png"/>
+          <p:cNvPr id="2" name="Picture 1" descr="well-yes-actually-no-template.jpg"/>
           <p:cNvPicPr>
             <a:picLocks noChangeAspect="1"/>
           </p:cNvPicPr>
@@ -7394,8 +7355,8 @@
         </p:blipFill>
         <p:spPr>
           <a:xfrm>
-            <a:off x="1478127" y="1481328"/>
-            <a:ext cx="9235440" cy="4221915"/>
+            <a:off x="2621127" y="502920"/>
+            <a:ext cx="6949440" cy="5290261"/>
           </a:xfrm>
           <a:prstGeom prst="rect">
             <a:avLst/>
@@ -7404,14 +7365,53 @@
       </p:pic>
       <p:sp>
         <p:nvSpPr>
+          <p:cNvPr id="3" name="TextBox 2"/>
+          <p:cNvSpPr txBox="1"/>
+          <p:nvPr/>
+        </p:nvSpPr>
+        <p:spPr>
+          <a:xfrm>
+            <a:off x="2941167" y="594360"/>
+            <a:ext cx="6309359" cy="947343"/>
+          </a:xfrm>
+          <a:prstGeom prst="rect">
+            <a:avLst/>
+          </a:prstGeom>
+          <a:noFill/>
+        </p:spPr>
+        <p:txBody>
+          <a:bodyPr wrap="square" lIns="0" rIns="0" tIns="0" bIns="0" anchor="ctr">
+            <a:spAutoFit/>
+          </a:bodyPr>
+          <a:lstStyle/>
+          <a:p>
+            <a:pPr algn="ctr">
+              <a:lnSpc>
+                <a:spcPct val="110000"/>
+              </a:lnSpc>
+            </a:pPr>
+            <a:r>
+              <a:rPr sz="2700" b="1" i="0">
+                <a:solidFill>
+                  <a:srgbClr val="21295C"/>
+                </a:solidFill>
+                <a:latin typeface="Arial"/>
+              </a:rPr>
+              <a:t>temperature=0 — значит, ответ всегда одинаковый?</a:t>
+            </a:r>
+          </a:p>
+        </p:txBody>
+      </p:sp>
+      <p:sp>
+        <p:nvSpPr>
           <p:cNvPr id="4" name="TextBox 3"/>
           <p:cNvSpPr txBox="1"/>
           <p:nvPr/>
         </p:nvSpPr>
         <p:spPr>
           <a:xfrm>
-            <a:off x="1981047" y="4743123"/>
-            <a:ext cx="2651760" cy="822960"/>
+            <a:off x="502920" y="5884621"/>
+            <a:ext cx="11183112" cy="457200"/>
           </a:xfrm>
           <a:prstGeom prst="rect">
             <a:avLst/>
@@ -7430,13 +7430,13 @@
               </a:lnSpc>
             </a:pPr>
             <a:r>
-              <a:rPr sz="4400" b="1" i="0">
-                <a:solidFill>
-                  <a:srgbClr val="065A82"/>
-                </a:solidFill>
-                <a:latin typeface="Arial"/>
-              </a:rPr>
-              <a:t>Да.</a:t>
+              <a:rPr sz="1600" b="1" i="1">
+                <a:solidFill>
+                  <a:srgbClr val="F0AB00"/>
+                </a:solidFill>
+                <a:latin typeface="Arial"/>
+              </a:rPr>
+              <a:t>Да, формально детерминирован. Но нет — на практике нет. Почему — сегодня.</a:t>
             </a:r>
           </a:p>
         </p:txBody>
@@ -7444,84 +7444,6 @@
       <p:sp>
         <p:nvSpPr>
           <p:cNvPr id="5" name="TextBox 4"/>
-          <p:cNvSpPr txBox="1"/>
-          <p:nvPr/>
-        </p:nvSpPr>
-        <p:spPr>
-          <a:xfrm>
-            <a:off x="6598767" y="4651683"/>
-            <a:ext cx="3291840" cy="914400"/>
-          </a:xfrm>
-          <a:prstGeom prst="rect">
-            <a:avLst/>
-          </a:prstGeom>
-          <a:noFill/>
-        </p:spPr>
-        <p:txBody>
-          <a:bodyPr wrap="square" lIns="0" rIns="0" tIns="0" bIns="0" anchor="t">
-            <a:spAutoFit/>
-          </a:bodyPr>
-          <a:lstStyle/>
-          <a:p>
-            <a:pPr algn="ctr">
-              <a:lnSpc>
-                <a:spcPct val="115000"/>
-              </a:lnSpc>
-            </a:pPr>
-            <a:r>
-              <a:rPr sz="4800" b="1" i="0">
-                <a:solidFill>
-                  <a:srgbClr val="F0AB00"/>
-                </a:solidFill>
-                <a:latin typeface="Arial"/>
-              </a:rPr>
-              <a:t>→ Но нет.</a:t>
-            </a:r>
-          </a:p>
-        </p:txBody>
-      </p:sp>
-      <p:sp>
-        <p:nvSpPr>
-          <p:cNvPr id="6" name="TextBox 5"/>
-          <p:cNvSpPr txBox="1"/>
-          <p:nvPr/>
-        </p:nvSpPr>
-        <p:spPr>
-          <a:xfrm>
-            <a:off x="502920" y="6144768"/>
-            <a:ext cx="11183112" cy="365760"/>
-          </a:xfrm>
-          <a:prstGeom prst="rect">
-            <a:avLst/>
-          </a:prstGeom>
-          <a:noFill/>
-        </p:spPr>
-        <p:txBody>
-          <a:bodyPr wrap="square" lIns="0" rIns="0" tIns="0" bIns="0" anchor="t">
-            <a:spAutoFit/>
-          </a:bodyPr>
-          <a:lstStyle/>
-          <a:p>
-            <a:pPr algn="ctr">
-              <a:lnSpc>
-                <a:spcPct val="115000"/>
-              </a:lnSpc>
-            </a:pPr>
-            <a:r>
-              <a:rPr sz="1500" b="0" i="1">
-                <a:solidFill>
-                  <a:srgbClr val="1C7293"/>
-                </a:solidFill>
-                <a:latin typeface="Arial"/>
-              </a:rPr>
-              <a:t>почему — сегодня</a:t>
-            </a:r>
-          </a:p>
-        </p:txBody>
-      </p:sp>
-      <p:sp>
-        <p:nvSpPr>
-          <p:cNvPr id="7" name="TextBox 6"/>
           <p:cNvSpPr txBox="1"/>
           <p:nvPr/>
         </p:nvSpPr>
@@ -7549,7 +7471,7 @@
                 </a:solidFill>
                 <a:latin typeface="Arial"/>
               </a:rPr>
-              <a:t>1/46</a:t>
+              <a:t>1/47</a:t>
             </a:r>
           </a:p>
         </p:txBody>
@@ -7667,8 +7589,8 @@
         </p:nvSpPr>
         <p:spPr>
           <a:xfrm>
-            <a:off x="777240" y="1682496"/>
-            <a:ext cx="4023360" cy="411480"/>
+            <a:off x="777240" y="1645920"/>
+            <a:ext cx="4023360" cy="365760"/>
           </a:xfrm>
           <a:prstGeom prst="rect">
             <a:avLst/>
@@ -7706,8 +7628,8 @@
         </p:nvSpPr>
         <p:spPr>
           <a:xfrm>
-            <a:off x="777240" y="2212848"/>
-            <a:ext cx="4023360" cy="914400"/>
+            <a:off x="777240" y="2084831"/>
+            <a:ext cx="4023360" cy="868680"/>
           </a:xfrm>
           <a:prstGeom prst="rect">
             <a:avLst/>
@@ -7726,7 +7648,7 @@
               </a:lnSpc>
             </a:pPr>
             <a:r>
-              <a:rPr sz="1600" b="0" i="0">
+              <a:rPr sz="1500" b="0" i="0">
                 <a:solidFill>
                   <a:srgbClr val="21295C"/>
                 </a:solidFill>
@@ -7735,7 +7657,7 @@
               <a:t>strawberry</a:t>
             </a:r>
             <a:r>
-              <a:rPr sz="1600" b="0" i="0">
+              <a:rPr sz="1500" b="0" i="0">
                 <a:solidFill>
                   <a:srgbClr val="6B7685"/>
                 </a:solidFill>
@@ -7750,11 +7672,11 @@
                 <a:spcPct val="115000"/>
               </a:lnSpc>
               <a:spcBef>
-                <a:spcPts val="800"/>
+                <a:spcPts val="600"/>
               </a:spcBef>
             </a:pPr>
             <a:r>
-              <a:rPr sz="1600" b="1" i="0">
+              <a:rPr sz="1500" b="1" i="0">
                 <a:solidFill>
                   <a:srgbClr val="065A82"/>
                 </a:solidFill>
@@ -7763,7 +7685,7 @@
               <a:t>[st]</a:t>
             </a:r>
             <a:r>
-              <a:rPr sz="1600" b="1" i="0">
+              <a:rPr sz="1500" b="1" i="0">
                 <a:solidFill>
                   <a:srgbClr val="028090"/>
                 </a:solidFill>
@@ -7772,7 +7694,7 @@
               <a:t>[raw]</a:t>
             </a:r>
             <a:r>
-              <a:rPr sz="1600" b="1" i="0">
+              <a:rPr sz="1500" b="1" i="0">
                 <a:solidFill>
                   <a:srgbClr val="1C7293"/>
                 </a:solidFill>
@@ -7791,8 +7713,8 @@
         </p:nvSpPr>
         <p:spPr>
           <a:xfrm>
-            <a:off x="777240" y="3310128"/>
-            <a:ext cx="4023360" cy="822960"/>
+            <a:off x="777240" y="3035808"/>
+            <a:ext cx="4023360" cy="365760"/>
           </a:xfrm>
           <a:prstGeom prst="rect">
             <a:avLst/>
@@ -7811,7 +7733,7 @@
               </a:lnSpc>
             </a:pPr>
             <a:r>
-              <a:rPr sz="1600" b="0" i="0">
+              <a:rPr sz="1500" b="0" i="0">
                 <a:solidFill>
                   <a:srgbClr val="21295C"/>
                 </a:solidFill>
@@ -7820,7 +7742,7 @@
               <a:t>Модель видит </a:t>
             </a:r>
             <a:r>
-              <a:rPr sz="1600" b="1" i="0">
+              <a:rPr sz="1500" b="1" i="0">
                 <a:solidFill>
                   <a:srgbClr val="21295C"/>
                 </a:solidFill>
@@ -7829,7 +7751,7 @@
               <a:t>3 токена</a:t>
             </a:r>
             <a:r>
-              <a:rPr sz="1600" b="0" i="0">
+              <a:rPr sz="1500" b="0" i="0">
                 <a:solidFill>
                   <a:srgbClr val="21295C"/>
                 </a:solidFill>
@@ -7842,14 +7764,86 @@
       </p:sp>
       <p:sp>
         <p:nvSpPr>
-          <p:cNvPr id="7" name="TextBox 6"/>
-          <p:cNvSpPr txBox="1"/>
-          <p:nvPr/>
-        </p:nvSpPr>
-        <p:spPr>
-          <a:xfrm>
-            <a:off x="777240" y="4160520"/>
-            <a:ext cx="4023360" cy="731520"/>
+          <p:cNvPr id="7" name="Rounded Rectangle 6"/>
+          <p:cNvSpPr/>
+          <p:nvPr/>
+        </p:nvSpPr>
+        <p:spPr>
+          <a:xfrm>
+            <a:off x="1636776" y="3374136"/>
+            <a:ext cx="2304288" cy="1226552"/>
+          </a:xfrm>
+          <a:prstGeom prst="roundRect">
+            <a:avLst>
+              <a:gd name="adj" fmla="val 24850"/>
+            </a:avLst>
+          </a:prstGeom>
+          <a:solidFill>
+            <a:srgbClr val="111418"/>
+          </a:solidFill>
+          <a:ln w="15240">
+            <a:solidFill>
+              <a:srgbClr val="028090"/>
+            </a:solidFill>
+          </a:ln>
+          <a:effectLst/>
+        </p:spPr>
+        <p:style>
+          <a:lnRef idx="1">
+            <a:schemeClr val="accent1"/>
+          </a:lnRef>
+          <a:fillRef idx="3">
+            <a:schemeClr val="accent1"/>
+          </a:fillRef>
+          <a:effectRef idx="2">
+            <a:schemeClr val="accent1"/>
+          </a:effectRef>
+          <a:fontRef idx="minor">
+            <a:schemeClr val="lt1"/>
+          </a:fontRef>
+        </p:style>
+        <p:txBody>
+          <a:bodyPr rtlCol="0" anchor="ctr"/>
+          <a:lstStyle/>
+          <a:p>
+            <a:pPr algn="ctr"/>
+          </a:p>
+        </p:txBody>
+      </p:sp>
+      <p:pic>
+        <p:nvPicPr>
+          <p:cNvPr id="8" name="Picture 7" descr="strawberry-openai-crop.jpg"/>
+          <p:cNvPicPr>
+            <a:picLocks noChangeAspect="1"/>
+          </p:cNvPicPr>
+          <p:nvPr/>
+        </p:nvPicPr>
+        <p:blipFill>
+          <a:blip r:embed="rId2"/>
+          <a:stretch>
+            <a:fillRect/>
+          </a:stretch>
+        </p:blipFill>
+        <p:spPr>
+          <a:xfrm>
+            <a:off x="1691640" y="3429000"/>
+            <a:ext cx="2194560" cy="1005142"/>
+          </a:xfrm>
+          <a:prstGeom prst="rect">
+            <a:avLst/>
+          </a:prstGeom>
+        </p:spPr>
+      </p:pic>
+      <p:sp>
+        <p:nvSpPr>
+          <p:cNvPr id="9" name="TextBox 8"/>
+          <p:cNvSpPr txBox="1"/>
+          <p:nvPr/>
+        </p:nvSpPr>
+        <p:spPr>
+          <a:xfrm>
+            <a:off x="777240" y="4673840"/>
+            <a:ext cx="4023360" cy="237744"/>
           </a:xfrm>
           <a:prstGeom prst="rect">
             <a:avLst/>
@@ -7862,26 +7856,26 @@
           </a:bodyPr>
           <a:lstStyle/>
           <a:p>
-            <a:pPr algn="l">
+            <a:pPr algn="ctr">
               <a:lnSpc>
                 <a:spcPct val="115000"/>
               </a:lnSpc>
             </a:pPr>
             <a:r>
-              <a:rPr sz="1200" b="0" i="1">
-                <a:solidFill>
-                  <a:srgbClr val="6B7685"/>
-                </a:solidFill>
-                <a:latin typeface="Arial"/>
-              </a:rPr>
-              <a:t>Каждый вирусный кейс патчится точечно; класс задач остаётся проблемным.</a:t>
+              <a:rPr sz="900" b="0" i="1">
+                <a:solidFill>
+                  <a:srgbClr val="1C7293"/>
+                </a:solidFill>
+                <a:latin typeface="Arial"/>
+              </a:rPr>
+              <a:t>скриншот: ChatGPT, форум OpenAI, 2024</a:t>
             </a:r>
           </a:p>
         </p:txBody>
       </p:sp>
       <p:cxnSp>
         <p:nvCxnSpPr>
-          <p:cNvPr id="8" name="Connector 7"/>
+          <p:cNvPr id="10" name="Connector 9"/>
           <p:cNvCxnSpPr/>
           <p:nvPr/>
         </p:nvCxnSpPr>
@@ -7917,7 +7911,7 @@
       </p:cxnSp>
       <p:sp>
         <p:nvSpPr>
-          <p:cNvPr id="9" name="Oval 8"/>
+          <p:cNvPr id="11" name="Oval 10"/>
           <p:cNvSpPr/>
           <p:nvPr/>
         </p:nvSpPr>
@@ -7961,7 +7955,7 @@
       </p:sp>
       <p:sp>
         <p:nvSpPr>
-          <p:cNvPr id="10" name="Rounded Rectangle 9"/>
+          <p:cNvPr id="12" name="Rounded Rectangle 11"/>
           <p:cNvSpPr/>
           <p:nvPr/>
         </p:nvSpPr>
@@ -8009,7 +8003,7 @@
       </p:sp>
       <p:sp>
         <p:nvSpPr>
-          <p:cNvPr id="11" name="TextBox 10"/>
+          <p:cNvPr id="13" name="TextBox 12"/>
           <p:cNvSpPr txBox="1"/>
           <p:nvPr/>
         </p:nvSpPr>
@@ -8048,7 +8042,7 @@
       </p:sp>
       <p:sp>
         <p:nvSpPr>
-          <p:cNvPr id="12" name="TextBox 11"/>
+          <p:cNvPr id="14" name="TextBox 13"/>
           <p:cNvSpPr txBox="1"/>
           <p:nvPr/>
         </p:nvSpPr>
@@ -8087,7 +8081,7 @@
       </p:sp>
       <p:sp>
         <p:nvSpPr>
-          <p:cNvPr id="13" name="Oval 12"/>
+          <p:cNvPr id="15" name="Oval 14"/>
           <p:cNvSpPr/>
           <p:nvPr/>
         </p:nvSpPr>
@@ -8131,7 +8125,7 @@
       </p:sp>
       <p:sp>
         <p:nvSpPr>
-          <p:cNvPr id="14" name="Rounded Rectangle 13"/>
+          <p:cNvPr id="16" name="Rounded Rectangle 15"/>
           <p:cNvSpPr/>
           <p:nvPr/>
         </p:nvSpPr>
@@ -8179,7 +8173,7 @@
       </p:sp>
       <p:sp>
         <p:nvSpPr>
-          <p:cNvPr id="15" name="TextBox 14"/>
+          <p:cNvPr id="17" name="TextBox 16"/>
           <p:cNvSpPr txBox="1"/>
           <p:nvPr/>
         </p:nvSpPr>
@@ -8218,7 +8212,7 @@
       </p:sp>
       <p:sp>
         <p:nvSpPr>
-          <p:cNvPr id="16" name="TextBox 15"/>
+          <p:cNvPr id="18" name="TextBox 17"/>
           <p:cNvSpPr txBox="1"/>
           <p:nvPr/>
         </p:nvSpPr>
@@ -8257,7 +8251,7 @@
       </p:sp>
       <p:sp>
         <p:nvSpPr>
-          <p:cNvPr id="17" name="Oval 16"/>
+          <p:cNvPr id="19" name="Oval 18"/>
           <p:cNvSpPr/>
           <p:nvPr/>
         </p:nvSpPr>
@@ -8301,7 +8295,7 @@
       </p:sp>
       <p:sp>
         <p:nvSpPr>
-          <p:cNvPr id="18" name="Rounded Rectangle 17"/>
+          <p:cNvPr id="20" name="Rounded Rectangle 19"/>
           <p:cNvSpPr/>
           <p:nvPr/>
         </p:nvSpPr>
@@ -8349,7 +8343,7 @@
       </p:sp>
       <p:sp>
         <p:nvSpPr>
-          <p:cNvPr id="19" name="TextBox 18"/>
+          <p:cNvPr id="21" name="TextBox 20"/>
           <p:cNvSpPr txBox="1"/>
           <p:nvPr/>
         </p:nvSpPr>
@@ -8388,7 +8382,7 @@
       </p:sp>
       <p:sp>
         <p:nvSpPr>
-          <p:cNvPr id="20" name="TextBox 19"/>
+          <p:cNvPr id="22" name="TextBox 21"/>
           <p:cNvSpPr txBox="1"/>
           <p:nvPr/>
         </p:nvSpPr>
@@ -8427,7 +8421,7 @@
       </p:sp>
       <p:sp>
         <p:nvSpPr>
-          <p:cNvPr id="21" name="Oval 20"/>
+          <p:cNvPr id="23" name="Oval 22"/>
           <p:cNvSpPr/>
           <p:nvPr/>
         </p:nvSpPr>
@@ -8471,7 +8465,7 @@
       </p:sp>
       <p:sp>
         <p:nvSpPr>
-          <p:cNvPr id="22" name="Rounded Rectangle 21"/>
+          <p:cNvPr id="24" name="Rounded Rectangle 23"/>
           <p:cNvSpPr/>
           <p:nvPr/>
         </p:nvSpPr>
@@ -8519,7 +8513,7 @@
       </p:sp>
       <p:sp>
         <p:nvSpPr>
-          <p:cNvPr id="23" name="TextBox 22"/>
+          <p:cNvPr id="25" name="TextBox 24"/>
           <p:cNvSpPr txBox="1"/>
           <p:nvPr/>
         </p:nvSpPr>
@@ -8558,7 +8552,7 @@
       </p:sp>
       <p:sp>
         <p:nvSpPr>
-          <p:cNvPr id="24" name="TextBox 23"/>
+          <p:cNvPr id="26" name="TextBox 25"/>
           <p:cNvSpPr txBox="1"/>
           <p:nvPr/>
         </p:nvSpPr>
@@ -8597,7 +8591,7 @@
       </p:sp>
       <p:sp>
         <p:nvSpPr>
-          <p:cNvPr id="25" name="Rounded Rectangle 24"/>
+          <p:cNvPr id="27" name="Rounded Rectangle 26"/>
           <p:cNvSpPr/>
           <p:nvPr/>
         </p:nvSpPr>
@@ -8645,7 +8639,7 @@
       </p:sp>
       <p:sp>
         <p:nvSpPr>
-          <p:cNvPr id="26" name="TextBox 25"/>
+          <p:cNvPr id="28" name="TextBox 27"/>
           <p:cNvSpPr txBox="1"/>
           <p:nvPr/>
         </p:nvSpPr>
@@ -8684,7 +8678,7 @@
       </p:sp>
       <p:sp>
         <p:nvSpPr>
-          <p:cNvPr id="27" name="TextBox 26"/>
+          <p:cNvPr id="29" name="TextBox 28"/>
           <p:cNvSpPr txBox="1"/>
           <p:nvPr/>
         </p:nvSpPr>
@@ -8732,7 +8726,7 @@
       </p:sp>
       <p:sp>
         <p:nvSpPr>
-          <p:cNvPr id="28" name="TextBox 27"/>
+          <p:cNvPr id="30" name="TextBox 29"/>
           <p:cNvSpPr txBox="1"/>
           <p:nvPr/>
         </p:nvSpPr>
@@ -8760,7 +8754,7 @@
                 </a:solidFill>
                 <a:latin typeface="Arial"/>
               </a:rPr>
-              <a:t>10/46</a:t>
+              <a:t>10/47</a:t>
             </a:r>
           </a:p>
         </p:txBody>
@@ -9620,7 +9614,7 @@
                 </a:solidFill>
                 <a:latin typeface="Arial"/>
               </a:rPr>
-              <a:t>11/46</a:t>
+              <a:t>11/47</a:t>
             </a:r>
           </a:p>
         </p:txBody>
@@ -9738,8 +9732,8 @@
         </p:nvSpPr>
         <p:spPr>
           <a:xfrm>
-            <a:off x="731520" y="1225295"/>
-            <a:ext cx="3154680" cy="685800"/>
+            <a:off x="731520" y="1207007"/>
+            <a:ext cx="3154680" cy="365760"/>
           </a:xfrm>
           <a:prstGeom prst="rect">
             <a:avLst/>
@@ -9758,7 +9752,7 @@
               </a:lnSpc>
             </a:pPr>
             <a:r>
-              <a:rPr sz="1400" b="1" i="0">
+              <a:rPr sz="1300" b="1" i="0">
                 <a:solidFill>
                   <a:srgbClr val="065A82"/>
                 </a:solidFill>
@@ -9777,8 +9771,8 @@
         </p:nvSpPr>
         <p:spPr>
           <a:xfrm>
-            <a:off x="731520" y="1883664"/>
-            <a:ext cx="3154680" cy="914400"/>
+            <a:off x="731520" y="1591056"/>
+            <a:ext cx="3154680" cy="594360"/>
           </a:xfrm>
           <a:prstGeom prst="rect">
             <a:avLst/>
@@ -9793,11 +9787,11 @@
           <a:p>
             <a:pPr algn="l">
               <a:lnSpc>
-                <a:spcPct val="118000"/>
-              </a:lnSpc>
-            </a:pPr>
-            <a:r>
-              <a:rPr sz="1250" b="0" i="0">
+                <a:spcPct val="112000"/>
+              </a:lnSpc>
+            </a:pPr>
+            <a:r>
+              <a:rPr sz="1150" b="0" i="0">
                 <a:solidFill>
                   <a:srgbClr val="21295C"/>
                 </a:solidFill>
@@ -9810,14 +9804,86 @@
       </p:sp>
       <p:sp>
         <p:nvSpPr>
-          <p:cNvPr id="6" name="TextBox 5"/>
-          <p:cNvSpPr txBox="1"/>
-          <p:nvPr/>
-        </p:nvSpPr>
-        <p:spPr>
-          <a:xfrm>
-            <a:off x="731520" y="2862072"/>
-            <a:ext cx="3154680" cy="1280160"/>
+          <p:cNvPr id="6" name="Rounded Rectangle 5"/>
+          <p:cNvSpPr/>
+          <p:nvPr/>
+        </p:nvSpPr>
+        <p:spPr>
+          <a:xfrm>
+            <a:off x="1110996" y="2157984"/>
+            <a:ext cx="2395728" cy="819040"/>
+          </a:xfrm>
+          <a:prstGeom prst="roundRect">
+            <a:avLst>
+              <a:gd name="adj" fmla="val 25000"/>
+            </a:avLst>
+          </a:prstGeom>
+          <a:solidFill>
+            <a:srgbClr val="FFFFFF"/>
+          </a:solidFill>
+          <a:ln w="13970">
+            <a:solidFill>
+              <a:srgbClr val="028090"/>
+            </a:solidFill>
+          </a:ln>
+          <a:effectLst/>
+        </p:spPr>
+        <p:style>
+          <a:lnRef idx="1">
+            <a:schemeClr val="accent1"/>
+          </a:lnRef>
+          <a:fillRef idx="3">
+            <a:schemeClr val="accent1"/>
+          </a:fillRef>
+          <a:effectRef idx="2">
+            <a:schemeClr val="accent1"/>
+          </a:effectRef>
+          <a:fontRef idx="minor">
+            <a:schemeClr val="lt1"/>
+          </a:fontRef>
+        </p:style>
+        <p:txBody>
+          <a:bodyPr rtlCol="0" anchor="ctr"/>
+          <a:lstStyle/>
+          <a:p>
+            <a:pPr algn="ctr"/>
+          </a:p>
+        </p:txBody>
+      </p:sp>
+      <p:pic>
+        <p:nvPicPr>
+          <p:cNvPr id="7" name="Picture 6" descr="solidgoldmagikarp-1.png"/>
+          <p:cNvPicPr>
+            <a:picLocks noChangeAspect="1"/>
+          </p:cNvPicPr>
+          <p:nvPr/>
+        </p:nvPicPr>
+        <p:blipFill>
+          <a:blip r:embed="rId2"/>
+          <a:stretch>
+            <a:fillRect/>
+          </a:stretch>
+        </p:blipFill>
+        <p:spPr>
+          <a:xfrm>
+            <a:off x="1165860" y="2212848"/>
+            <a:ext cx="2286000" cy="709312"/>
+          </a:xfrm>
+          <a:prstGeom prst="rect">
+            <a:avLst/>
+          </a:prstGeom>
+        </p:spPr>
+      </p:pic>
+      <p:sp>
+        <p:nvSpPr>
+          <p:cNvPr id="8" name="TextBox 7"/>
+          <p:cNvSpPr txBox="1"/>
+          <p:nvPr/>
+        </p:nvSpPr>
+        <p:spPr>
+          <a:xfrm>
+            <a:off x="731520" y="3105040"/>
+            <a:ext cx="3154680" cy="822960"/>
           </a:xfrm>
           <a:prstGeom prst="rect">
             <a:avLst/>
@@ -9832,11 +9898,11 @@
           <a:p>
             <a:pPr algn="l">
               <a:lnSpc>
-                <a:spcPct val="118000"/>
-              </a:lnSpc>
-            </a:pPr>
-            <a:r>
-              <a:rPr sz="1250" b="1" i="0">
+                <a:spcPct val="112000"/>
+              </a:lnSpc>
+            </a:pPr>
+            <a:r>
+              <a:rPr sz="1100" b="1" i="0">
                 <a:solidFill>
                   <a:srgbClr val="028090"/>
                 </a:solidFill>
@@ -9845,20 +9911,20 @@
               <a:t>Механизм: </a:t>
             </a:r>
             <a:r>
-              <a:rPr sz="1250" b="0" i="0">
+              <a:rPr sz="1100" b="0" i="0">
                 <a:solidFill>
                   <a:srgbClr val="21295C"/>
                 </a:solidFill>
                 <a:latin typeface="Arial"/>
               </a:rPr>
-              <a:t>корпус словаря ≠ корпус модели → эмбеддинг токена остаётся у случайной инициализации — вектор «ничего не значит».</a:t>
-            </a:r>
-          </a:p>
-        </p:txBody>
-      </p:sp>
-      <p:sp>
-        <p:nvSpPr>
-          <p:cNvPr id="7" name="Rounded Rectangle 6"/>
+              <a:t>корпус словаря ≠ корпус модели → эмбеддинг токена остаётся у случайной инициализации.</a:t>
+            </a:r>
+          </a:p>
+        </p:txBody>
+      </p:sp>
+      <p:sp>
+        <p:nvSpPr>
+          <p:cNvPr id="9" name="Rounded Rectangle 8"/>
           <p:cNvSpPr/>
           <p:nvPr/>
         </p:nvSpPr>
@@ -9906,7 +9972,7 @@
       </p:sp>
       <p:sp>
         <p:nvSpPr>
-          <p:cNvPr id="8" name="TextBox 7"/>
+          <p:cNvPr id="10" name="TextBox 9"/>
           <p:cNvSpPr txBox="1"/>
           <p:nvPr/>
         </p:nvSpPr>
@@ -9945,7 +10011,7 @@
       </p:sp>
       <p:sp>
         <p:nvSpPr>
-          <p:cNvPr id="9" name="TextBox 8"/>
+          <p:cNvPr id="11" name="TextBox 10"/>
           <p:cNvSpPr txBox="1"/>
           <p:nvPr/>
         </p:nvSpPr>
@@ -10022,7 +10088,7 @@
       </p:sp>
       <p:sp>
         <p:nvSpPr>
-          <p:cNvPr id="10" name="Rounded Rectangle 9"/>
+          <p:cNvPr id="12" name="Rounded Rectangle 11"/>
           <p:cNvSpPr/>
           <p:nvPr/>
         </p:nvSpPr>
@@ -10070,7 +10136,7 @@
       </p:sp>
       <p:sp>
         <p:nvSpPr>
-          <p:cNvPr id="11" name="TextBox 10"/>
+          <p:cNvPr id="13" name="TextBox 12"/>
           <p:cNvSpPr txBox="1"/>
           <p:nvPr/>
         </p:nvSpPr>
@@ -10109,7 +10175,7 @@
       </p:sp>
       <p:sp>
         <p:nvSpPr>
-          <p:cNvPr id="12" name="TextBox 11"/>
+          <p:cNvPr id="14" name="TextBox 13"/>
           <p:cNvSpPr txBox="1"/>
           <p:nvPr/>
         </p:nvSpPr>
@@ -10176,7 +10242,7 @@
       </p:sp>
       <p:sp>
         <p:nvSpPr>
-          <p:cNvPr id="13" name="TextBox 12"/>
+          <p:cNvPr id="15" name="TextBox 14"/>
           <p:cNvSpPr txBox="1"/>
           <p:nvPr/>
         </p:nvSpPr>
@@ -10215,7 +10281,7 @@
       </p:sp>
       <p:sp>
         <p:nvSpPr>
-          <p:cNvPr id="14" name="Rounded Rectangle 13"/>
+          <p:cNvPr id="16" name="Rounded Rectangle 15"/>
           <p:cNvSpPr/>
           <p:nvPr/>
         </p:nvSpPr>
@@ -10263,7 +10329,7 @@
       </p:sp>
       <p:sp>
         <p:nvSpPr>
-          <p:cNvPr id="15" name="TextBox 14"/>
+          <p:cNvPr id="17" name="TextBox 16"/>
           <p:cNvSpPr txBox="1"/>
           <p:nvPr/>
         </p:nvSpPr>
@@ -10302,7 +10368,7 @@
       </p:sp>
       <p:sp>
         <p:nvSpPr>
-          <p:cNvPr id="16" name="Rounded Rectangle 15"/>
+          <p:cNvPr id="18" name="Rounded Rectangle 17"/>
           <p:cNvSpPr/>
           <p:nvPr/>
         </p:nvSpPr>
@@ -10350,7 +10416,7 @@
       </p:sp>
       <p:sp>
         <p:nvSpPr>
-          <p:cNvPr id="17" name="TextBox 16"/>
+          <p:cNvPr id="19" name="TextBox 18"/>
           <p:cNvSpPr txBox="1"/>
           <p:nvPr/>
         </p:nvSpPr>
@@ -10389,7 +10455,7 @@
       </p:sp>
       <p:sp>
         <p:nvSpPr>
-          <p:cNvPr id="18" name="TextBox 17"/>
+          <p:cNvPr id="20" name="TextBox 19"/>
           <p:cNvSpPr txBox="1"/>
           <p:nvPr/>
         </p:nvSpPr>
@@ -10428,7 +10494,7 @@
       </p:sp>
       <p:sp>
         <p:nvSpPr>
-          <p:cNvPr id="19" name="TextBox 18"/>
+          <p:cNvPr id="21" name="TextBox 20"/>
           <p:cNvSpPr txBox="1"/>
           <p:nvPr/>
         </p:nvSpPr>
@@ -10456,7 +10522,7 @@
                 </a:solidFill>
                 <a:latin typeface="Arial"/>
               </a:rPr>
-              <a:t>12/46</a:t>
+              <a:t>12/47</a:t>
             </a:r>
           </a:p>
         </p:txBody>
@@ -10908,7 +10974,7 @@
                 </a:solidFill>
                 <a:latin typeface="Arial"/>
               </a:rPr>
-              <a:t>13/46</a:t>
+              <a:t>13/47</a:t>
             </a:r>
           </a:p>
         </p:txBody>
@@ -10939,9 +11005,213 @@
         <p:nvPr/>
       </p:nvGrpSpPr>
       <p:grpSpPr/>
+      <p:sp>
+        <p:nvSpPr>
+          <p:cNvPr id="2" name="TextBox 1"/>
+          <p:cNvSpPr txBox="1"/>
+          <p:nvPr/>
+        </p:nvSpPr>
+        <p:spPr>
+          <a:xfrm>
+            <a:off x="502920" y="685800"/>
+            <a:ext cx="5806440" cy="1737360"/>
+          </a:xfrm>
+          <a:prstGeom prst="rect">
+            <a:avLst/>
+          </a:prstGeom>
+          <a:noFill/>
+        </p:spPr>
+        <p:txBody>
+          <a:bodyPr wrap="square" lIns="0" rIns="0" tIns="0" bIns="0" anchor="ctr">
+            <a:spAutoFit/>
+          </a:bodyPr>
+          <a:lstStyle/>
+          <a:p>
+            <a:pPr algn="l">
+              <a:lnSpc>
+                <a:spcPct val="100000"/>
+              </a:lnSpc>
+            </a:pPr>
+            <a:r>
+              <a:rPr sz="9200" b="1" i="0">
+                <a:solidFill>
+                  <a:srgbClr val="F0AB00"/>
+                </a:solidFill>
+                <a:latin typeface="Arial"/>
+              </a:rPr>
+              <a:t>Раздел 2</a:t>
+            </a:r>
+          </a:p>
+        </p:txBody>
+      </p:sp>
+      <p:sp>
+        <p:nvSpPr>
+          <p:cNvPr id="3" name="TextBox 2"/>
+          <p:cNvSpPr txBox="1"/>
+          <p:nvPr/>
+        </p:nvSpPr>
+        <p:spPr>
+          <a:xfrm>
+            <a:off x="502920" y="2395728"/>
+            <a:ext cx="5806440" cy="960120"/>
+          </a:xfrm>
+          <a:prstGeom prst="rect">
+            <a:avLst/>
+          </a:prstGeom>
+          <a:noFill/>
+        </p:spPr>
+        <p:txBody>
+          <a:bodyPr wrap="square" lIns="0" rIns="0" tIns="0" bIns="0" anchor="t">
+            <a:spAutoFit/>
+          </a:bodyPr>
+          <a:lstStyle/>
+          <a:p>
+            <a:pPr algn="l">
+              <a:lnSpc>
+                <a:spcPct val="108000"/>
+              </a:lnSpc>
+            </a:pPr>
+            <a:r>
+              <a:rPr sz="3300" b="1" i="0">
+                <a:solidFill>
+                  <a:srgbClr val="21295C"/>
+                </a:solidFill>
+                <a:latin typeface="Arial"/>
+              </a:rPr>
+              <a:t>Эмбеддинги</a:t>
+            </a:r>
+          </a:p>
+        </p:txBody>
+      </p:sp>
+      <p:sp>
+        <p:nvSpPr>
+          <p:cNvPr id="4" name="TextBox 3"/>
+          <p:cNvSpPr txBox="1"/>
+          <p:nvPr/>
+        </p:nvSpPr>
+        <p:spPr>
+          <a:xfrm>
+            <a:off x="502920" y="3474720"/>
+            <a:ext cx="5806440" cy="1234440"/>
+          </a:xfrm>
+          <a:prstGeom prst="rect">
+            <a:avLst/>
+          </a:prstGeom>
+          <a:noFill/>
+        </p:spPr>
+        <p:txBody>
+          <a:bodyPr wrap="square" lIns="0" rIns="0" tIns="0" bIns="0" anchor="t">
+            <a:spAutoFit/>
+          </a:bodyPr>
+          <a:lstStyle/>
+          <a:p>
+            <a:pPr algn="l">
+              <a:lnSpc>
+                <a:spcPct val="120000"/>
+              </a:lnSpc>
+            </a:pPr>
+            <a:r>
+              <a:rPr sz="2000" b="0" i="1">
+                <a:solidFill>
+                  <a:srgbClr val="065A82"/>
+                </a:solidFill>
+                <a:latin typeface="Arial"/>
+              </a:rPr>
+              <a:t>«Пространство смыслов — и граница похожести»</a:t>
+            </a:r>
+          </a:p>
+        </p:txBody>
+      </p:sp>
+      <p:sp>
+        <p:nvSpPr>
+          <p:cNvPr id="5" name="TextBox 4"/>
+          <p:cNvSpPr txBox="1"/>
+          <p:nvPr/>
+        </p:nvSpPr>
+        <p:spPr>
+          <a:xfrm>
+            <a:off x="502920" y="4846320"/>
+            <a:ext cx="5806440" cy="411480"/>
+          </a:xfrm>
+          <a:prstGeom prst="rect">
+            <a:avLst/>
+          </a:prstGeom>
+          <a:noFill/>
+        </p:spPr>
+        <p:txBody>
+          <a:bodyPr wrap="square" lIns="0" rIns="0" tIns="0" bIns="0" anchor="t">
+            <a:spAutoFit/>
+          </a:bodyPr>
+          <a:lstStyle/>
+          <a:p>
+            <a:pPr algn="l">
+              <a:lnSpc>
+                <a:spcPct val="115000"/>
+              </a:lnSpc>
+            </a:pPr>
+            <a:r>
+              <a:rPr sz="1600" b="1" i="0">
+                <a:solidFill>
+                  <a:srgbClr val="028090"/>
+                </a:solidFill>
+                <a:latin typeface="Arial"/>
+              </a:rPr>
+              <a:t>4 разбора · 1 провал</a:t>
+            </a:r>
+          </a:p>
+        </p:txBody>
+      </p:sp>
+      <p:sp>
+        <p:nvSpPr>
+          <p:cNvPr id="6" name="Rounded Rectangle 5"/>
+          <p:cNvSpPr/>
+          <p:nvPr/>
+        </p:nvSpPr>
+        <p:spPr>
+          <a:xfrm>
+            <a:off x="6629400" y="777240"/>
+            <a:ext cx="5074920" cy="4160520"/>
+          </a:xfrm>
+          <a:prstGeom prst="roundRect">
+            <a:avLst>
+              <a:gd name="adj" fmla="val 7326"/>
+            </a:avLst>
+          </a:prstGeom>
+          <a:solidFill>
+            <a:srgbClr val="FFFFFF"/>
+          </a:solidFill>
+          <a:ln w="19050">
+            <a:solidFill>
+              <a:srgbClr val="1C7293"/>
+            </a:solidFill>
+          </a:ln>
+          <a:effectLst/>
+        </p:spPr>
+        <p:style>
+          <a:lnRef idx="1">
+            <a:schemeClr val="accent1"/>
+          </a:lnRef>
+          <a:fillRef idx="3">
+            <a:schemeClr val="accent1"/>
+          </a:fillRef>
+          <a:effectRef idx="2">
+            <a:schemeClr val="accent1"/>
+          </a:effectRef>
+          <a:fontRef idx="minor">
+            <a:schemeClr val="lt1"/>
+          </a:fontRef>
+        </p:style>
+        <p:txBody>
+          <a:bodyPr rtlCol="0" anchor="ctr"/>
+          <a:lstStyle/>
+          <a:p>
+            <a:pPr algn="ctr"/>
+          </a:p>
+        </p:txBody>
+      </p:sp>
       <p:pic>
         <p:nvPicPr>
-          <p:cNvPr id="2" name="Picture 1" descr="s12a-meaning-map.png"/>
+          <p:cNvPr id="7" name="Picture 6" descr="word2vec-king-analogy-arrows.png"/>
           <p:cNvPicPr>
             <a:picLocks noChangeAspect="1"/>
           </p:cNvPicPr>
@@ -10955,8 +11225,8 @@
         </p:blipFill>
         <p:spPr>
           <a:xfrm>
-            <a:off x="10317175" y="411480"/>
-            <a:ext cx="1371600" cy="1371600"/>
+            <a:off x="6775704" y="1424178"/>
+            <a:ext cx="4782312" cy="2391156"/>
           </a:xfrm>
           <a:prstGeom prst="rect">
             <a:avLst/>
@@ -10965,163 +11235,46 @@
       </p:pic>
       <p:sp>
         <p:nvSpPr>
-          <p:cNvPr id="3" name="TextBox 2"/>
-          <p:cNvSpPr txBox="1"/>
-          <p:nvPr/>
-        </p:nvSpPr>
-        <p:spPr>
-          <a:xfrm>
-            <a:off x="502920" y="868680"/>
-            <a:ext cx="11247120" cy="2194560"/>
-          </a:xfrm>
-          <a:prstGeom prst="rect">
-            <a:avLst/>
-          </a:prstGeom>
-          <a:noFill/>
-        </p:spPr>
-        <p:txBody>
-          <a:bodyPr wrap="square" lIns="0" rIns="0" tIns="0" bIns="0" anchor="ctr">
+          <p:cNvPr id="8" name="TextBox 7"/>
+          <p:cNvSpPr txBox="1"/>
+          <p:nvPr/>
+        </p:nvSpPr>
+        <p:spPr>
+          <a:xfrm>
+            <a:off x="6775704" y="4425695"/>
+            <a:ext cx="4782312" cy="475488"/>
+          </a:xfrm>
+          <a:prstGeom prst="rect">
+            <a:avLst/>
+          </a:prstGeom>
+          <a:noFill/>
+        </p:spPr>
+        <p:txBody>
+          <a:bodyPr wrap="square" lIns="0" rIns="0" tIns="0" bIns="0" anchor="t">
             <a:spAutoFit/>
           </a:bodyPr>
           <a:lstStyle/>
           <a:p>
             <a:pPr algn="ctr">
               <a:lnSpc>
-                <a:spcPct val="100000"/>
-              </a:lnSpc>
-            </a:pPr>
-            <a:r>
-              <a:rPr sz="14000" b="1" i="0">
-                <a:solidFill>
-                  <a:srgbClr val="F0AB00"/>
-                </a:solidFill>
-                <a:latin typeface="Arial"/>
-              </a:rPr>
-              <a:t>Раздел 2</a:t>
-            </a:r>
-          </a:p>
-        </p:txBody>
-      </p:sp>
-      <p:sp>
-        <p:nvSpPr>
-          <p:cNvPr id="4" name="TextBox 3"/>
-          <p:cNvSpPr txBox="1"/>
-          <p:nvPr/>
-        </p:nvSpPr>
-        <p:spPr>
-          <a:xfrm>
-            <a:off x="502920" y="3246120"/>
-            <a:ext cx="11247120" cy="685800"/>
-          </a:xfrm>
-          <a:prstGeom prst="rect">
-            <a:avLst/>
-          </a:prstGeom>
-          <a:noFill/>
-        </p:spPr>
-        <p:txBody>
-          <a:bodyPr wrap="square" lIns="0" rIns="0" tIns="0" bIns="0" anchor="ctr">
-            <a:spAutoFit/>
-          </a:bodyPr>
-          <a:lstStyle/>
-          <a:p>
-            <a:pPr algn="ctr">
-              <a:lnSpc>
-                <a:spcPct val="115000"/>
-              </a:lnSpc>
-            </a:pPr>
-            <a:r>
-              <a:rPr sz="4400" b="1" i="0">
-                <a:solidFill>
-                  <a:srgbClr val="21295C"/>
-                </a:solidFill>
-                <a:latin typeface="Arial"/>
-              </a:rPr>
-              <a:t>Эмбеддинги</a:t>
-            </a:r>
-          </a:p>
-        </p:txBody>
-      </p:sp>
-      <p:sp>
-        <p:nvSpPr>
-          <p:cNvPr id="5" name="TextBox 4"/>
-          <p:cNvSpPr txBox="1"/>
-          <p:nvPr/>
-        </p:nvSpPr>
-        <p:spPr>
-          <a:xfrm>
-            <a:off x="502920" y="4023360"/>
-            <a:ext cx="11247120" cy="685800"/>
-          </a:xfrm>
-          <a:prstGeom prst="rect">
-            <a:avLst/>
-          </a:prstGeom>
-          <a:noFill/>
-        </p:spPr>
-        <p:txBody>
-          <a:bodyPr wrap="square" lIns="0" rIns="0" tIns="0" bIns="0" anchor="t">
-            <a:spAutoFit/>
-          </a:bodyPr>
-          <a:lstStyle/>
-          <a:p>
-            <a:pPr algn="ctr">
-              <a:lnSpc>
-                <a:spcPct val="115000"/>
-              </a:lnSpc>
-            </a:pPr>
-            <a:r>
-              <a:rPr sz="2000" b="0" i="1">
-                <a:solidFill>
-                  <a:srgbClr val="065A82"/>
-                </a:solidFill>
-                <a:latin typeface="Arial"/>
-              </a:rPr>
-              <a:t>«Пространство смыслов — и граница похожести»</a:t>
-            </a:r>
-          </a:p>
-        </p:txBody>
-      </p:sp>
-      <p:sp>
-        <p:nvSpPr>
-          <p:cNvPr id="6" name="TextBox 5"/>
-          <p:cNvSpPr txBox="1"/>
-          <p:nvPr/>
-        </p:nvSpPr>
-        <p:spPr>
-          <a:xfrm>
-            <a:off x="502920" y="4800600"/>
-            <a:ext cx="11247120" cy="411480"/>
-          </a:xfrm>
-          <a:prstGeom prst="rect">
-            <a:avLst/>
-          </a:prstGeom>
-          <a:noFill/>
-        </p:spPr>
-        <p:txBody>
-          <a:bodyPr wrap="square" lIns="0" rIns="0" tIns="0" bIns="0" anchor="t">
-            <a:spAutoFit/>
-          </a:bodyPr>
-          <a:lstStyle/>
-          <a:p>
-            <a:pPr algn="ctr">
-              <a:lnSpc>
-                <a:spcPct val="115000"/>
-              </a:lnSpc>
-            </a:pPr>
-            <a:r>
-              <a:rPr sz="1600" b="1" i="0">
-                <a:solidFill>
-                  <a:srgbClr val="028090"/>
-                </a:solidFill>
-                <a:latin typeface="Arial"/>
-              </a:rPr>
-              <a:t>4 разбора · 1 провал</a:t>
-            </a:r>
-          </a:p>
-        </p:txBody>
-      </p:sp>
-      <p:sp>
-        <p:nvSpPr>
-          <p:cNvPr id="7" name="Rounded Rectangle 6"/>
+                <a:spcPct val="105000"/>
+              </a:lnSpc>
+            </a:pPr>
+            <a:r>
+              <a:rPr sz="950" b="0" i="1">
+                <a:solidFill>
+                  <a:srgbClr val="1C7293"/>
+                </a:solidFill>
+                <a:latin typeface="Arial"/>
+              </a:rPr>
+              <a:t>Классика word2vec: king − man + woman ≈ queen (Jay Alammar, illustrated word2vec)</a:t>
+            </a:r>
+          </a:p>
+        </p:txBody>
+      </p:sp>
+      <p:sp>
+        <p:nvSpPr>
+          <p:cNvPr id="9" name="Rounded Rectangle 8"/>
           <p:cNvSpPr/>
           <p:nvPr/>
         </p:nvSpPr>
@@ -11167,7 +11320,7 @@
       </p:sp>
       <p:sp>
         <p:nvSpPr>
-          <p:cNvPr id="8" name="TextBox 7"/>
+          <p:cNvPr id="10" name="TextBox 9"/>
           <p:cNvSpPr txBox="1"/>
           <p:nvPr/>
         </p:nvSpPr>
@@ -11206,7 +11359,7 @@
       </p:sp>
       <p:sp>
         <p:nvSpPr>
-          <p:cNvPr id="9" name="Right Arrow 8"/>
+          <p:cNvPr id="11" name="Right Arrow 10"/>
           <p:cNvSpPr/>
           <p:nvPr/>
         </p:nvSpPr>
@@ -11250,7 +11403,7 @@
       </p:sp>
       <p:sp>
         <p:nvSpPr>
-          <p:cNvPr id="10" name="Rounded Rectangle 9"/>
+          <p:cNvPr id="12" name="Rounded Rectangle 11"/>
           <p:cNvSpPr/>
           <p:nvPr/>
         </p:nvSpPr>
@@ -11296,7 +11449,7 @@
       </p:sp>
       <p:sp>
         <p:nvSpPr>
-          <p:cNvPr id="11" name="TextBox 10"/>
+          <p:cNvPr id="13" name="TextBox 12"/>
           <p:cNvSpPr txBox="1"/>
           <p:nvPr/>
         </p:nvSpPr>
@@ -11335,7 +11488,7 @@
       </p:sp>
       <p:sp>
         <p:nvSpPr>
-          <p:cNvPr id="12" name="Right Arrow 11"/>
+          <p:cNvPr id="14" name="Right Arrow 13"/>
           <p:cNvSpPr/>
           <p:nvPr/>
         </p:nvSpPr>
@@ -11379,7 +11532,7 @@
       </p:sp>
       <p:sp>
         <p:nvSpPr>
-          <p:cNvPr id="13" name="Rounded Rectangle 12"/>
+          <p:cNvPr id="15" name="Rounded Rectangle 14"/>
           <p:cNvSpPr/>
           <p:nvPr/>
         </p:nvSpPr>
@@ -11425,7 +11578,7 @@
       </p:sp>
       <p:sp>
         <p:nvSpPr>
-          <p:cNvPr id="14" name="TextBox 13"/>
+          <p:cNvPr id="16" name="TextBox 15"/>
           <p:cNvSpPr txBox="1"/>
           <p:nvPr/>
         </p:nvSpPr>
@@ -11464,7 +11617,7 @@
       </p:sp>
       <p:sp>
         <p:nvSpPr>
-          <p:cNvPr id="15" name="Right Arrow 14"/>
+          <p:cNvPr id="17" name="Right Arrow 16"/>
           <p:cNvSpPr/>
           <p:nvPr/>
         </p:nvSpPr>
@@ -11508,7 +11661,7 @@
       </p:sp>
       <p:sp>
         <p:nvSpPr>
-          <p:cNvPr id="16" name="Rounded Rectangle 15"/>
+          <p:cNvPr id="18" name="Rounded Rectangle 17"/>
           <p:cNvSpPr/>
           <p:nvPr/>
         </p:nvSpPr>
@@ -11554,7 +11707,7 @@
       </p:sp>
       <p:sp>
         <p:nvSpPr>
-          <p:cNvPr id="17" name="TextBox 16"/>
+          <p:cNvPr id="19" name="TextBox 18"/>
           <p:cNvSpPr txBox="1"/>
           <p:nvPr/>
         </p:nvSpPr>
@@ -11593,7 +11746,7 @@
       </p:sp>
       <p:sp>
         <p:nvSpPr>
-          <p:cNvPr id="18" name="Right Arrow 17"/>
+          <p:cNvPr id="20" name="Right Arrow 19"/>
           <p:cNvSpPr/>
           <p:nvPr/>
         </p:nvSpPr>
@@ -11637,7 +11790,7 @@
       </p:sp>
       <p:sp>
         <p:nvSpPr>
-          <p:cNvPr id="19" name="Rounded Rectangle 18"/>
+          <p:cNvPr id="21" name="Rounded Rectangle 20"/>
           <p:cNvSpPr/>
           <p:nvPr/>
         </p:nvSpPr>
@@ -11683,7 +11836,7 @@
       </p:sp>
       <p:sp>
         <p:nvSpPr>
-          <p:cNvPr id="20" name="TextBox 19"/>
+          <p:cNvPr id="22" name="TextBox 21"/>
           <p:cNvSpPr txBox="1"/>
           <p:nvPr/>
         </p:nvSpPr>
@@ -11722,7 +11875,7 @@
       </p:sp>
       <p:sp>
         <p:nvSpPr>
-          <p:cNvPr id="21" name="Right Arrow 20"/>
+          <p:cNvPr id="23" name="Right Arrow 22"/>
           <p:cNvSpPr/>
           <p:nvPr/>
         </p:nvSpPr>
@@ -11766,7 +11919,7 @@
       </p:sp>
       <p:sp>
         <p:nvSpPr>
-          <p:cNvPr id="22" name="Rounded Rectangle 21"/>
+          <p:cNvPr id="24" name="Rounded Rectangle 23"/>
           <p:cNvSpPr/>
           <p:nvPr/>
         </p:nvSpPr>
@@ -11812,7 +11965,7 @@
       </p:sp>
       <p:sp>
         <p:nvSpPr>
-          <p:cNvPr id="23" name="TextBox 22"/>
+          <p:cNvPr id="25" name="TextBox 24"/>
           <p:cNvSpPr txBox="1"/>
           <p:nvPr/>
         </p:nvSpPr>
@@ -11851,7 +12004,7 @@
       </p:sp>
       <p:sp>
         <p:nvSpPr>
-          <p:cNvPr id="24" name="Right Arrow 23"/>
+          <p:cNvPr id="26" name="Right Arrow 25"/>
           <p:cNvSpPr/>
           <p:nvPr/>
         </p:nvSpPr>
@@ -11895,7 +12048,7 @@
       </p:sp>
       <p:sp>
         <p:nvSpPr>
-          <p:cNvPr id="25" name="Rounded Rectangle 24"/>
+          <p:cNvPr id="27" name="Rounded Rectangle 26"/>
           <p:cNvSpPr/>
           <p:nvPr/>
         </p:nvSpPr>
@@ -11941,7 +12094,7 @@
       </p:sp>
       <p:sp>
         <p:nvSpPr>
-          <p:cNvPr id="26" name="TextBox 25"/>
+          <p:cNvPr id="28" name="TextBox 27"/>
           <p:cNvSpPr txBox="1"/>
           <p:nvPr/>
         </p:nvSpPr>
@@ -11980,7 +12133,7 @@
       </p:sp>
       <p:sp>
         <p:nvSpPr>
-          <p:cNvPr id="27" name="TextBox 26"/>
+          <p:cNvPr id="29" name="TextBox 28"/>
           <p:cNvSpPr txBox="1"/>
           <p:nvPr/>
         </p:nvSpPr>
@@ -12008,7 +12161,7 @@
                 </a:solidFill>
                 <a:latin typeface="Arial"/>
               </a:rPr>
-              <a:t>14/46</a:t>
+              <a:t>14/47</a:t>
             </a:r>
           </a:p>
         </p:txBody>
@@ -13062,7 +13215,7 @@
                 </a:solidFill>
                 <a:latin typeface="Arial"/>
               </a:rPr>
-              <a:t>15/46</a:t>
+              <a:t>15/47</a:t>
             </a:r>
           </a:p>
         </p:txBody>
@@ -13931,7 +14084,7 @@
                 </a:solidFill>
                 <a:latin typeface="Arial"/>
               </a:rPr>
-              <a:t>16/46</a:t>
+              <a:t>16/47</a:t>
             </a:r>
           </a:p>
         </p:txBody>
@@ -15364,7 +15517,7 @@
                 </a:solidFill>
                 <a:latin typeface="Arial"/>
               </a:rPr>
-              <a:t>17/46</a:t>
+              <a:t>17/47</a:t>
             </a:r>
           </a:p>
         </p:txBody>
@@ -16586,7 +16739,7 @@
                 </a:solidFill>
                 <a:latin typeface="Arial"/>
               </a:rPr>
-              <a:t>18/46</a:t>
+              <a:t>18/47</a:t>
             </a:r>
           </a:p>
         </p:txBody>
@@ -18025,7 +18178,7 @@
                 </a:solidFill>
                 <a:latin typeface="Arial"/>
               </a:rPr>
-              <a:t>19/46</a:t>
+              <a:t>19/47</a:t>
             </a:r>
           </a:p>
         </p:txBody>
@@ -18836,7 +18989,7 @@
                 </a:solidFill>
                 <a:latin typeface="Arial"/>
               </a:rPr>
-              <a:t>2/46</a:t>
+              <a:t>2/47</a:t>
             </a:r>
           </a:p>
         </p:txBody>
@@ -18867,9 +19020,213 @@
         <p:nvPr/>
       </p:nvGrpSpPr>
       <p:grpSpPr/>
+      <p:sp>
+        <p:nvSpPr>
+          <p:cNvPr id="2" name="TextBox 1"/>
+          <p:cNvSpPr txBox="1"/>
+          <p:nvPr/>
+        </p:nvSpPr>
+        <p:spPr>
+          <a:xfrm>
+            <a:off x="502920" y="685800"/>
+            <a:ext cx="5806440" cy="1737360"/>
+          </a:xfrm>
+          <a:prstGeom prst="rect">
+            <a:avLst/>
+          </a:prstGeom>
+          <a:noFill/>
+        </p:spPr>
+        <p:txBody>
+          <a:bodyPr wrap="square" lIns="0" rIns="0" tIns="0" bIns="0" anchor="ctr">
+            <a:spAutoFit/>
+          </a:bodyPr>
+          <a:lstStyle/>
+          <a:p>
+            <a:pPr algn="l">
+              <a:lnSpc>
+                <a:spcPct val="100000"/>
+              </a:lnSpc>
+            </a:pPr>
+            <a:r>
+              <a:rPr sz="9200" b="1" i="0">
+                <a:solidFill>
+                  <a:srgbClr val="F0AB00"/>
+                </a:solidFill>
+                <a:latin typeface="Arial"/>
+              </a:rPr>
+              <a:t>Раздел 3</a:t>
+            </a:r>
+          </a:p>
+        </p:txBody>
+      </p:sp>
+      <p:sp>
+        <p:nvSpPr>
+          <p:cNvPr id="3" name="TextBox 2"/>
+          <p:cNvSpPr txBox="1"/>
+          <p:nvPr/>
+        </p:nvSpPr>
+        <p:spPr>
+          <a:xfrm>
+            <a:off x="502920" y="2395728"/>
+            <a:ext cx="5806440" cy="960120"/>
+          </a:xfrm>
+          <a:prstGeom prst="rect">
+            <a:avLst/>
+          </a:prstGeom>
+          <a:noFill/>
+        </p:spPr>
+        <p:txBody>
+          <a:bodyPr wrap="square" lIns="0" rIns="0" tIns="0" bIns="0" anchor="t">
+            <a:spAutoFit/>
+          </a:bodyPr>
+          <a:lstStyle/>
+          <a:p>
+            <a:pPr algn="l">
+              <a:lnSpc>
+                <a:spcPct val="108000"/>
+              </a:lnSpc>
+            </a:pPr>
+            <a:r>
+              <a:rPr sz="3300" b="1" i="0">
+                <a:solidFill>
+                  <a:srgbClr val="21295C"/>
+                </a:solidFill>
+                <a:latin typeface="Arial"/>
+              </a:rPr>
+              <a:t>Механизм внимания</a:t>
+            </a:r>
+          </a:p>
+        </p:txBody>
+      </p:sp>
+      <p:sp>
+        <p:nvSpPr>
+          <p:cNvPr id="4" name="TextBox 3"/>
+          <p:cNvSpPr txBox="1"/>
+          <p:nvPr/>
+        </p:nvSpPr>
+        <p:spPr>
+          <a:xfrm>
+            <a:off x="502920" y="3474720"/>
+            <a:ext cx="5806440" cy="1234440"/>
+          </a:xfrm>
+          <a:prstGeom prst="rect">
+            <a:avLst/>
+          </a:prstGeom>
+          <a:noFill/>
+        </p:spPr>
+        <p:txBody>
+          <a:bodyPr wrap="square" lIns="0" rIns="0" tIns="0" bIns="0" anchor="t">
+            <a:spAutoFit/>
+          </a:bodyPr>
+          <a:lstStyle/>
+          <a:p>
+            <a:pPr algn="l">
+              <a:lnSpc>
+                <a:spcPct val="120000"/>
+              </a:lnSpc>
+            </a:pPr>
+            <a:r>
+              <a:rPr sz="1800" b="0" i="1">
+                <a:solidFill>
+                  <a:srgbClr val="065A82"/>
+                </a:solidFill>
+                <a:latin typeface="Arial"/>
+              </a:rPr>
+              <a:t>«Как модель решает, на что опереться в контексте — и что из этого следует для ролей, кэша и длинных окон»</a:t>
+            </a:r>
+          </a:p>
+        </p:txBody>
+      </p:sp>
+      <p:sp>
+        <p:nvSpPr>
+          <p:cNvPr id="5" name="TextBox 4"/>
+          <p:cNvSpPr txBox="1"/>
+          <p:nvPr/>
+        </p:nvSpPr>
+        <p:spPr>
+          <a:xfrm>
+            <a:off x="502920" y="4846320"/>
+            <a:ext cx="5806440" cy="411480"/>
+          </a:xfrm>
+          <a:prstGeom prst="rect">
+            <a:avLst/>
+          </a:prstGeom>
+          <a:noFill/>
+        </p:spPr>
+        <p:txBody>
+          <a:bodyPr wrap="square" lIns="0" rIns="0" tIns="0" bIns="0" anchor="t">
+            <a:spAutoFit/>
+          </a:bodyPr>
+          <a:lstStyle/>
+          <a:p>
+            <a:pPr algn="l">
+              <a:lnSpc>
+                <a:spcPct val="115000"/>
+              </a:lnSpc>
+            </a:pPr>
+            <a:r>
+              <a:rPr sz="1600" b="1" i="0">
+                <a:solidFill>
+                  <a:srgbClr val="028090"/>
+                </a:solidFill>
+                <a:latin typeface="Arial"/>
+              </a:rPr>
+              <a:t>4 разбора · 2 провала</a:t>
+            </a:r>
+          </a:p>
+        </p:txBody>
+      </p:sp>
+      <p:sp>
+        <p:nvSpPr>
+          <p:cNvPr id="6" name="Rounded Rectangle 5"/>
+          <p:cNvSpPr/>
+          <p:nvPr/>
+        </p:nvSpPr>
+        <p:spPr>
+          <a:xfrm>
+            <a:off x="6629400" y="777240"/>
+            <a:ext cx="5074920" cy="4160520"/>
+          </a:xfrm>
+          <a:prstGeom prst="roundRect">
+            <a:avLst>
+              <a:gd name="adj" fmla="val 7326"/>
+            </a:avLst>
+          </a:prstGeom>
+          <a:solidFill>
+            <a:srgbClr val="FFFFFF"/>
+          </a:solidFill>
+          <a:ln w="19050">
+            <a:solidFill>
+              <a:srgbClr val="1C7293"/>
+            </a:solidFill>
+          </a:ln>
+          <a:effectLst/>
+        </p:spPr>
+        <p:style>
+          <a:lnRef idx="1">
+            <a:schemeClr val="accent1"/>
+          </a:lnRef>
+          <a:fillRef idx="3">
+            <a:schemeClr val="accent1"/>
+          </a:fillRef>
+          <a:effectRef idx="2">
+            <a:schemeClr val="accent1"/>
+          </a:effectRef>
+          <a:fontRef idx="minor">
+            <a:schemeClr val="lt1"/>
+          </a:fontRef>
+        </p:style>
+        <p:txBody>
+          <a:bodyPr rtlCol="0" anchor="ctr"/>
+          <a:lstStyle/>
+          <a:p>
+            <a:pPr algn="ctr"/>
+          </a:p>
+        </p:txBody>
+      </p:sp>
       <p:pic>
         <p:nvPicPr>
-          <p:cNvPr id="2" name="Picture 1" descr="s18a-flashlight.png"/>
+          <p:cNvPr id="7" name="Picture 6" descr="attention-paper-title.png"/>
           <p:cNvPicPr>
             <a:picLocks noChangeAspect="1"/>
           </p:cNvPicPr>
@@ -18883,8 +19240,8 @@
         </p:blipFill>
         <p:spPr>
           <a:xfrm>
-            <a:off x="10317175" y="411480"/>
-            <a:ext cx="1371600" cy="1371600"/>
+            <a:off x="7856150" y="923544"/>
+            <a:ext cx="2621418" cy="3392423"/>
           </a:xfrm>
           <a:prstGeom prst="rect">
             <a:avLst/>
@@ -18893,163 +19250,46 @@
       </p:pic>
       <p:sp>
         <p:nvSpPr>
-          <p:cNvPr id="3" name="TextBox 2"/>
-          <p:cNvSpPr txBox="1"/>
-          <p:nvPr/>
-        </p:nvSpPr>
-        <p:spPr>
-          <a:xfrm>
-            <a:off x="502920" y="868680"/>
-            <a:ext cx="11247120" cy="2194560"/>
-          </a:xfrm>
-          <a:prstGeom prst="rect">
-            <a:avLst/>
-          </a:prstGeom>
-          <a:noFill/>
-        </p:spPr>
-        <p:txBody>
-          <a:bodyPr wrap="square" lIns="0" rIns="0" tIns="0" bIns="0" anchor="ctr">
+          <p:cNvPr id="8" name="TextBox 7"/>
+          <p:cNvSpPr txBox="1"/>
+          <p:nvPr/>
+        </p:nvSpPr>
+        <p:spPr>
+          <a:xfrm>
+            <a:off x="6775704" y="4425695"/>
+            <a:ext cx="4782312" cy="475488"/>
+          </a:xfrm>
+          <a:prstGeom prst="rect">
+            <a:avLst/>
+          </a:prstGeom>
+          <a:noFill/>
+        </p:spPr>
+        <p:txBody>
+          <a:bodyPr wrap="square" lIns="0" rIns="0" tIns="0" bIns="0" anchor="t">
             <a:spAutoFit/>
           </a:bodyPr>
           <a:lstStyle/>
           <a:p>
             <a:pPr algn="ctr">
               <a:lnSpc>
-                <a:spcPct val="100000"/>
-              </a:lnSpc>
-            </a:pPr>
-            <a:r>
-              <a:rPr sz="14000" b="1" i="0">
-                <a:solidFill>
-                  <a:srgbClr val="F0AB00"/>
-                </a:solidFill>
-                <a:latin typeface="Arial"/>
-              </a:rPr>
-              <a:t>Раздел 3</a:t>
-            </a:r>
-          </a:p>
-        </p:txBody>
-      </p:sp>
-      <p:sp>
-        <p:nvSpPr>
-          <p:cNvPr id="4" name="TextBox 3"/>
-          <p:cNvSpPr txBox="1"/>
-          <p:nvPr/>
-        </p:nvSpPr>
-        <p:spPr>
-          <a:xfrm>
-            <a:off x="502920" y="3246120"/>
-            <a:ext cx="11247120" cy="685800"/>
-          </a:xfrm>
-          <a:prstGeom prst="rect">
-            <a:avLst/>
-          </a:prstGeom>
-          <a:noFill/>
-        </p:spPr>
-        <p:txBody>
-          <a:bodyPr wrap="square" lIns="0" rIns="0" tIns="0" bIns="0" anchor="ctr">
-            <a:spAutoFit/>
-          </a:bodyPr>
-          <a:lstStyle/>
-          <a:p>
-            <a:pPr algn="ctr">
-              <a:lnSpc>
-                <a:spcPct val="115000"/>
-              </a:lnSpc>
-            </a:pPr>
-            <a:r>
-              <a:rPr sz="4400" b="1" i="0">
-                <a:solidFill>
-                  <a:srgbClr val="21295C"/>
-                </a:solidFill>
-                <a:latin typeface="Arial"/>
-              </a:rPr>
-              <a:t>Механизм внимания</a:t>
-            </a:r>
-          </a:p>
-        </p:txBody>
-      </p:sp>
-      <p:sp>
-        <p:nvSpPr>
-          <p:cNvPr id="5" name="TextBox 4"/>
-          <p:cNvSpPr txBox="1"/>
-          <p:nvPr/>
-        </p:nvSpPr>
-        <p:spPr>
-          <a:xfrm>
-            <a:off x="502920" y="4023360"/>
-            <a:ext cx="11247120" cy="685800"/>
-          </a:xfrm>
-          <a:prstGeom prst="rect">
-            <a:avLst/>
-          </a:prstGeom>
-          <a:noFill/>
-        </p:spPr>
-        <p:txBody>
-          <a:bodyPr wrap="square" lIns="0" rIns="0" tIns="0" bIns="0" anchor="t">
-            <a:spAutoFit/>
-          </a:bodyPr>
-          <a:lstStyle/>
-          <a:p>
-            <a:pPr algn="ctr">
-              <a:lnSpc>
-                <a:spcPct val="115000"/>
-              </a:lnSpc>
-            </a:pPr>
-            <a:r>
-              <a:rPr sz="1800" b="0" i="1">
-                <a:solidFill>
-                  <a:srgbClr val="065A82"/>
-                </a:solidFill>
-                <a:latin typeface="Arial"/>
-              </a:rPr>
-              <a:t>«Как модель решает, на что опереться в контексте — и что из этого следует для ролей, кэша и длинных окон»</a:t>
-            </a:r>
-          </a:p>
-        </p:txBody>
-      </p:sp>
-      <p:sp>
-        <p:nvSpPr>
-          <p:cNvPr id="6" name="TextBox 5"/>
-          <p:cNvSpPr txBox="1"/>
-          <p:nvPr/>
-        </p:nvSpPr>
-        <p:spPr>
-          <a:xfrm>
-            <a:off x="502920" y="4800600"/>
-            <a:ext cx="11247120" cy="411480"/>
-          </a:xfrm>
-          <a:prstGeom prst="rect">
-            <a:avLst/>
-          </a:prstGeom>
-          <a:noFill/>
-        </p:spPr>
-        <p:txBody>
-          <a:bodyPr wrap="square" lIns="0" rIns="0" tIns="0" bIns="0" anchor="t">
-            <a:spAutoFit/>
-          </a:bodyPr>
-          <a:lstStyle/>
-          <a:p>
-            <a:pPr algn="ctr">
-              <a:lnSpc>
-                <a:spcPct val="115000"/>
-              </a:lnSpc>
-            </a:pPr>
-            <a:r>
-              <a:rPr sz="1600" b="1" i="0">
-                <a:solidFill>
-                  <a:srgbClr val="028090"/>
-                </a:solidFill>
-                <a:latin typeface="Arial"/>
-              </a:rPr>
-              <a:t>4 разбора · 2 провала</a:t>
-            </a:r>
-          </a:p>
-        </p:txBody>
-      </p:sp>
-      <p:sp>
-        <p:nvSpPr>
-          <p:cNvPr id="7" name="Rounded Rectangle 6"/>
+                <a:spcPct val="105000"/>
+              </a:lnSpc>
+            </a:pPr>
+            <a:r>
+              <a:rPr sz="950" b="0" i="1">
+                <a:solidFill>
+                  <a:srgbClr val="1C7293"/>
+                </a:solidFill>
+                <a:latin typeface="Arial"/>
+              </a:rPr>
+              <a:t>Статья, давшая механизму имя: Vaswani et al., «Attention Is All You Need», 2017 (arXiv:1706.03762)</a:t>
+            </a:r>
+          </a:p>
+        </p:txBody>
+      </p:sp>
+      <p:sp>
+        <p:nvSpPr>
+          <p:cNvPr id="9" name="Rounded Rectangle 8"/>
           <p:cNvSpPr/>
           <p:nvPr/>
         </p:nvSpPr>
@@ -19095,7 +19335,7 @@
       </p:sp>
       <p:sp>
         <p:nvSpPr>
-          <p:cNvPr id="8" name="TextBox 7"/>
+          <p:cNvPr id="10" name="TextBox 9"/>
           <p:cNvSpPr txBox="1"/>
           <p:nvPr/>
         </p:nvSpPr>
@@ -19134,7 +19374,7 @@
       </p:sp>
       <p:sp>
         <p:nvSpPr>
-          <p:cNvPr id="9" name="Right Arrow 8"/>
+          <p:cNvPr id="11" name="Right Arrow 10"/>
           <p:cNvSpPr/>
           <p:nvPr/>
         </p:nvSpPr>
@@ -19178,7 +19418,7 @@
       </p:sp>
       <p:sp>
         <p:nvSpPr>
-          <p:cNvPr id="10" name="Rounded Rectangle 9"/>
+          <p:cNvPr id="12" name="Rounded Rectangle 11"/>
           <p:cNvSpPr/>
           <p:nvPr/>
         </p:nvSpPr>
@@ -19224,7 +19464,7 @@
       </p:sp>
       <p:sp>
         <p:nvSpPr>
-          <p:cNvPr id="11" name="TextBox 10"/>
+          <p:cNvPr id="13" name="TextBox 12"/>
           <p:cNvSpPr txBox="1"/>
           <p:nvPr/>
         </p:nvSpPr>
@@ -19263,7 +19503,7 @@
       </p:sp>
       <p:sp>
         <p:nvSpPr>
-          <p:cNvPr id="12" name="Right Arrow 11"/>
+          <p:cNvPr id="14" name="Right Arrow 13"/>
           <p:cNvSpPr/>
           <p:nvPr/>
         </p:nvSpPr>
@@ -19307,7 +19547,7 @@
       </p:sp>
       <p:sp>
         <p:nvSpPr>
-          <p:cNvPr id="13" name="Rounded Rectangle 12"/>
+          <p:cNvPr id="15" name="Rounded Rectangle 14"/>
           <p:cNvSpPr/>
           <p:nvPr/>
         </p:nvSpPr>
@@ -19353,7 +19593,7 @@
       </p:sp>
       <p:sp>
         <p:nvSpPr>
-          <p:cNvPr id="14" name="TextBox 13"/>
+          <p:cNvPr id="16" name="TextBox 15"/>
           <p:cNvSpPr txBox="1"/>
           <p:nvPr/>
         </p:nvSpPr>
@@ -19392,7 +19632,7 @@
       </p:sp>
       <p:sp>
         <p:nvSpPr>
-          <p:cNvPr id="15" name="Right Arrow 14"/>
+          <p:cNvPr id="17" name="Right Arrow 16"/>
           <p:cNvSpPr/>
           <p:nvPr/>
         </p:nvSpPr>
@@ -19436,7 +19676,7 @@
       </p:sp>
       <p:sp>
         <p:nvSpPr>
-          <p:cNvPr id="16" name="Rounded Rectangle 15"/>
+          <p:cNvPr id="18" name="Rounded Rectangle 17"/>
           <p:cNvSpPr/>
           <p:nvPr/>
         </p:nvSpPr>
@@ -19482,7 +19722,7 @@
       </p:sp>
       <p:sp>
         <p:nvSpPr>
-          <p:cNvPr id="17" name="TextBox 16"/>
+          <p:cNvPr id="19" name="TextBox 18"/>
           <p:cNvSpPr txBox="1"/>
           <p:nvPr/>
         </p:nvSpPr>
@@ -19521,7 +19761,7 @@
       </p:sp>
       <p:sp>
         <p:nvSpPr>
-          <p:cNvPr id="18" name="Right Arrow 17"/>
+          <p:cNvPr id="20" name="Right Arrow 19"/>
           <p:cNvSpPr/>
           <p:nvPr/>
         </p:nvSpPr>
@@ -19565,7 +19805,7 @@
       </p:sp>
       <p:sp>
         <p:nvSpPr>
-          <p:cNvPr id="19" name="Rounded Rectangle 18"/>
+          <p:cNvPr id="21" name="Rounded Rectangle 20"/>
           <p:cNvSpPr/>
           <p:nvPr/>
         </p:nvSpPr>
@@ -19611,7 +19851,7 @@
       </p:sp>
       <p:sp>
         <p:nvSpPr>
-          <p:cNvPr id="20" name="TextBox 19"/>
+          <p:cNvPr id="22" name="TextBox 21"/>
           <p:cNvSpPr txBox="1"/>
           <p:nvPr/>
         </p:nvSpPr>
@@ -19650,7 +19890,7 @@
       </p:sp>
       <p:sp>
         <p:nvSpPr>
-          <p:cNvPr id="21" name="Right Arrow 20"/>
+          <p:cNvPr id="23" name="Right Arrow 22"/>
           <p:cNvSpPr/>
           <p:nvPr/>
         </p:nvSpPr>
@@ -19694,7 +19934,7 @@
       </p:sp>
       <p:sp>
         <p:nvSpPr>
-          <p:cNvPr id="22" name="Rounded Rectangle 21"/>
+          <p:cNvPr id="24" name="Rounded Rectangle 23"/>
           <p:cNvSpPr/>
           <p:nvPr/>
         </p:nvSpPr>
@@ -19740,7 +19980,7 @@
       </p:sp>
       <p:sp>
         <p:nvSpPr>
-          <p:cNvPr id="23" name="TextBox 22"/>
+          <p:cNvPr id="25" name="TextBox 24"/>
           <p:cNvSpPr txBox="1"/>
           <p:nvPr/>
         </p:nvSpPr>
@@ -19779,7 +20019,7 @@
       </p:sp>
       <p:sp>
         <p:nvSpPr>
-          <p:cNvPr id="24" name="Right Arrow 23"/>
+          <p:cNvPr id="26" name="Right Arrow 25"/>
           <p:cNvSpPr/>
           <p:nvPr/>
         </p:nvSpPr>
@@ -19823,7 +20063,7 @@
       </p:sp>
       <p:sp>
         <p:nvSpPr>
-          <p:cNvPr id="25" name="Rounded Rectangle 24"/>
+          <p:cNvPr id="27" name="Rounded Rectangle 26"/>
           <p:cNvSpPr/>
           <p:nvPr/>
         </p:nvSpPr>
@@ -19869,7 +20109,7 @@
       </p:sp>
       <p:sp>
         <p:nvSpPr>
-          <p:cNvPr id="26" name="TextBox 25"/>
+          <p:cNvPr id="28" name="TextBox 27"/>
           <p:cNvSpPr txBox="1"/>
           <p:nvPr/>
         </p:nvSpPr>
@@ -19908,7 +20148,7 @@
       </p:sp>
       <p:sp>
         <p:nvSpPr>
-          <p:cNvPr id="27" name="TextBox 26"/>
+          <p:cNvPr id="29" name="TextBox 28"/>
           <p:cNvSpPr txBox="1"/>
           <p:nvPr/>
         </p:nvSpPr>
@@ -19936,7 +20176,7 @@
                 </a:solidFill>
                 <a:latin typeface="Arial"/>
               </a:rPr>
-              <a:t>20/46</a:t>
+              <a:t>20/47</a:t>
             </a:r>
           </a:p>
         </p:txBody>
@@ -22137,7 +22377,7 @@
                 </a:solidFill>
                 <a:latin typeface="Arial"/>
               </a:rPr>
-              <a:t>21/46</a:t>
+              <a:t>21/47</a:t>
             </a:r>
           </a:p>
         </p:txBody>
@@ -23290,7 +23530,7 @@
                 </a:solidFill>
                 <a:latin typeface="Arial"/>
               </a:rPr>
-              <a:t>22/46</a:t>
+              <a:t>22/47</a:t>
             </a:r>
           </a:p>
         </p:txBody>
@@ -25329,7 +25569,7 @@
                 </a:solidFill>
                 <a:latin typeface="Arial"/>
               </a:rPr>
-              <a:t>23/46</a:t>
+              <a:t>23/47</a:t>
             </a:r>
           </a:p>
         </p:txBody>
@@ -26901,7 +27141,7 @@
                 </a:solidFill>
                 <a:latin typeface="Arial"/>
               </a:rPr>
-              <a:t>24/46</a:t>
+              <a:t>24/47</a:t>
             </a:r>
           </a:p>
         </p:txBody>
@@ -27843,8 +28083,8 @@
         </p:nvSpPr>
         <p:spPr>
           <a:xfrm>
-            <a:off x="502920" y="4681728"/>
-            <a:ext cx="11201400" cy="658368"/>
+            <a:off x="502920" y="4617720"/>
+            <a:ext cx="11201400" cy="749808"/>
           </a:xfrm>
           <a:prstGeom prst="roundRect">
             <a:avLst>
@@ -27891,40 +28131,79 @@
         </p:nvSpPr>
         <p:spPr>
           <a:xfrm>
-            <a:off x="777240" y="4736592"/>
-            <a:ext cx="10698480" cy="548640"/>
-          </a:xfrm>
-          <a:prstGeom prst="rect">
-            <a:avLst/>
-          </a:prstGeom>
-          <a:noFill/>
-        </p:spPr>
-        <p:txBody>
-          <a:bodyPr wrap="square" lIns="0" rIns="0" tIns="0" bIns="0" anchor="ctr">
-            <a:spAutoFit/>
-          </a:bodyPr>
-          <a:lstStyle/>
-          <a:p>
-            <a:pPr algn="ctr">
-              <a:lnSpc>
-                <a:spcPct val="115000"/>
-              </a:lnSpc>
-            </a:pPr>
-            <a:r>
-              <a:rPr sz="1350" b="1" i="0">
+            <a:off x="777240" y="4672584"/>
+            <a:ext cx="10698480" cy="329184"/>
+          </a:xfrm>
+          <a:prstGeom prst="rect">
+            <a:avLst/>
+          </a:prstGeom>
+          <a:noFill/>
+        </p:spPr>
+        <p:txBody>
+          <a:bodyPr wrap="square" lIns="0" rIns="0" tIns="0" bIns="0" anchor="t">
+            <a:spAutoFit/>
+          </a:bodyPr>
+          <a:lstStyle/>
+          <a:p>
+            <a:pPr algn="l">
+              <a:lnSpc>
+                <a:spcPct val="110000"/>
+              </a:lnSpc>
+            </a:pPr>
+            <a:r>
+              <a:rPr sz="1250" b="1" i="0">
                 <a:solidFill>
                   <a:srgbClr val="21295C"/>
                 </a:solidFill>
                 <a:latin typeface="Arial"/>
               </a:rPr>
-              <a:t>Систематические проверки показывают: роль меняет тон, стиль и отбор содержания — но не повышает фактическое качество ответов.</a:t>
-            </a:r>
-          </a:p>
-        </p:txBody>
-      </p:sp>
-      <p:sp>
-        <p:nvSpPr>
-          <p:cNvPr id="26" name="Rounded Rectangle 25"/>
+              <a:t>Zheng et al. (2024, EMNLP Findings; 2410 вопросов, 162 роли): персона/роль в промпте не повышает точность факта — эффект конкретной роли непредсказуем.</a:t>
+            </a:r>
+          </a:p>
+        </p:txBody>
+      </p:sp>
+      <p:sp>
+        <p:nvSpPr>
+          <p:cNvPr id="26" name="TextBox 25"/>
+          <p:cNvSpPr txBox="1"/>
+          <p:nvPr/>
+        </p:nvSpPr>
+        <p:spPr>
+          <a:xfrm>
+            <a:off x="777240" y="5029200"/>
+            <a:ext cx="10698480" cy="292608"/>
+          </a:xfrm>
+          <a:prstGeom prst="rect">
+            <a:avLst/>
+          </a:prstGeom>
+          <a:noFill/>
+        </p:spPr>
+        <p:txBody>
+          <a:bodyPr wrap="square" lIns="0" rIns="0" tIns="0" bIns="0" anchor="t">
+            <a:spAutoFit/>
+          </a:bodyPr>
+          <a:lstStyle/>
+          <a:p>
+            <a:pPr algn="l">
+              <a:lnSpc>
+                <a:spcPct val="105000"/>
+              </a:lnSpc>
+            </a:pPr>
+            <a:r>
+              <a:rPr sz="1150" b="0" i="1">
+                <a:solidFill>
+                  <a:srgbClr val="028090"/>
+                </a:solidFill>
+                <a:latin typeface="Arial"/>
+              </a:rPr>
+              <a:t>Отдельно от этого исследования — по наблюдениям курса: роль ощутимо меняет тон, стиль и отбор содержания ответа.</a:t>
+            </a:r>
+          </a:p>
+        </p:txBody>
+      </p:sp>
+      <p:sp>
+        <p:nvSpPr>
+          <p:cNvPr id="27" name="Rounded Rectangle 26"/>
           <p:cNvSpPr/>
           <p:nvPr/>
         </p:nvSpPr>
@@ -27972,7 +28251,7 @@
       </p:sp>
       <p:sp>
         <p:nvSpPr>
-          <p:cNvPr id="27" name="TextBox 26"/>
+          <p:cNvPr id="28" name="TextBox 27"/>
           <p:cNvSpPr txBox="1"/>
           <p:nvPr/>
         </p:nvSpPr>
@@ -28011,7 +28290,7 @@
       </p:sp>
       <p:sp>
         <p:nvSpPr>
-          <p:cNvPr id="28" name="TextBox 27"/>
+          <p:cNvPr id="29" name="TextBox 28"/>
           <p:cNvSpPr txBox="1"/>
           <p:nvPr/>
         </p:nvSpPr>
@@ -28039,7 +28318,7 @@
                 </a:solidFill>
                 <a:latin typeface="Arial"/>
               </a:rPr>
-              <a:t>25/46</a:t>
+              <a:t>25/47</a:t>
             </a:r>
           </a:p>
         </p:txBody>
@@ -29057,7 +29336,7 @@
                 </a:solidFill>
                 <a:latin typeface="Arial"/>
               </a:rPr>
-              <a:t>26/46</a:t>
+              <a:t>26/47</a:t>
             </a:r>
           </a:p>
         </p:txBody>
@@ -29618,7 +29897,7 @@
                 </a:solidFill>
                 <a:latin typeface="Arial"/>
               </a:rPr>
-              <a:t>27/46</a:t>
+              <a:t>27/47</a:t>
             </a:r>
           </a:p>
         </p:txBody>
@@ -29649,9 +29928,213 @@
         <p:nvPr/>
       </p:nvGrpSpPr>
       <p:grpSpPr/>
+      <p:sp>
+        <p:nvSpPr>
+          <p:cNvPr id="2" name="TextBox 1"/>
+          <p:cNvSpPr txBox="1"/>
+          <p:nvPr/>
+        </p:nvSpPr>
+        <p:spPr>
+          <a:xfrm>
+            <a:off x="502920" y="685800"/>
+            <a:ext cx="5806440" cy="1737360"/>
+          </a:xfrm>
+          <a:prstGeom prst="rect">
+            <a:avLst/>
+          </a:prstGeom>
+          <a:noFill/>
+        </p:spPr>
+        <p:txBody>
+          <a:bodyPr wrap="square" lIns="0" rIns="0" tIns="0" bIns="0" anchor="ctr">
+            <a:spAutoFit/>
+          </a:bodyPr>
+          <a:lstStyle/>
+          <a:p>
+            <a:pPr algn="l">
+              <a:lnSpc>
+                <a:spcPct val="100000"/>
+              </a:lnSpc>
+            </a:pPr>
+            <a:r>
+              <a:rPr sz="9200" b="1" i="0">
+                <a:solidFill>
+                  <a:srgbClr val="F0AB00"/>
+                </a:solidFill>
+                <a:latin typeface="Arial"/>
+              </a:rPr>
+              <a:t>Раздел 4</a:t>
+            </a:r>
+          </a:p>
+        </p:txBody>
+      </p:sp>
+      <p:sp>
+        <p:nvSpPr>
+          <p:cNvPr id="3" name="TextBox 2"/>
+          <p:cNvSpPr txBox="1"/>
+          <p:nvPr/>
+        </p:nvSpPr>
+        <p:spPr>
+          <a:xfrm>
+            <a:off x="502920" y="2395728"/>
+            <a:ext cx="5806440" cy="960120"/>
+          </a:xfrm>
+          <a:prstGeom prst="rect">
+            <a:avLst/>
+          </a:prstGeom>
+          <a:noFill/>
+        </p:spPr>
+        <p:txBody>
+          <a:bodyPr wrap="square" lIns="0" rIns="0" tIns="0" bIns="0" anchor="t">
+            <a:spAutoFit/>
+          </a:bodyPr>
+          <a:lstStyle/>
+          <a:p>
+            <a:pPr algn="l">
+              <a:lnSpc>
+                <a:spcPct val="108000"/>
+              </a:lnSpc>
+            </a:pPr>
+            <a:r>
+              <a:rPr sz="3300" b="1" i="0">
+                <a:solidFill>
+                  <a:srgbClr val="21295C"/>
+                </a:solidFill>
+                <a:latin typeface="Arial"/>
+              </a:rPr>
+              <a:t>Сэмплинг и генерация</a:t>
+            </a:r>
+          </a:p>
+        </p:txBody>
+      </p:sp>
+      <p:sp>
+        <p:nvSpPr>
+          <p:cNvPr id="4" name="TextBox 3"/>
+          <p:cNvSpPr txBox="1"/>
+          <p:nvPr/>
+        </p:nvSpPr>
+        <p:spPr>
+          <a:xfrm>
+            <a:off x="502920" y="3474720"/>
+            <a:ext cx="5806440" cy="1234440"/>
+          </a:xfrm>
+          <a:prstGeom prst="rect">
+            <a:avLst/>
+          </a:prstGeom>
+          <a:noFill/>
+        </p:spPr>
+        <p:txBody>
+          <a:bodyPr wrap="square" lIns="0" rIns="0" tIns="0" bIns="0" anchor="t">
+            <a:spAutoFit/>
+          </a:bodyPr>
+          <a:lstStyle/>
+          <a:p>
+            <a:pPr algn="l">
+              <a:lnSpc>
+                <a:spcPct val="120000"/>
+              </a:lnSpc>
+            </a:pPr>
+            <a:r>
+              <a:rPr sz="1800" b="0" i="1">
+                <a:solidFill>
+                  <a:srgbClr val="065A82"/>
+                </a:solidFill>
+                <a:latin typeface="Arial"/>
+              </a:rPr>
+              <a:t>«Как из распределения вероятностей рождается один токен — и какими ручками этот выбор управляется»</a:t>
+            </a:r>
+          </a:p>
+        </p:txBody>
+      </p:sp>
+      <p:sp>
+        <p:nvSpPr>
+          <p:cNvPr id="5" name="TextBox 4"/>
+          <p:cNvSpPr txBox="1"/>
+          <p:nvPr/>
+        </p:nvSpPr>
+        <p:spPr>
+          <a:xfrm>
+            <a:off x="502920" y="4846320"/>
+            <a:ext cx="5806440" cy="411480"/>
+          </a:xfrm>
+          <a:prstGeom prst="rect">
+            <a:avLst/>
+          </a:prstGeom>
+          <a:noFill/>
+        </p:spPr>
+        <p:txBody>
+          <a:bodyPr wrap="square" lIns="0" rIns="0" tIns="0" bIns="0" anchor="t">
+            <a:spAutoFit/>
+          </a:bodyPr>
+          <a:lstStyle/>
+          <a:p>
+            <a:pPr algn="l">
+              <a:lnSpc>
+                <a:spcPct val="115000"/>
+              </a:lnSpc>
+            </a:pPr>
+            <a:r>
+              <a:rPr sz="1600" b="1" i="0">
+                <a:solidFill>
+                  <a:srgbClr val="028090"/>
+                </a:solidFill>
+                <a:latin typeface="Arial"/>
+              </a:rPr>
+              <a:t>4 разбора · 2 провала</a:t>
+            </a:r>
+          </a:p>
+        </p:txBody>
+      </p:sp>
+      <p:sp>
+        <p:nvSpPr>
+          <p:cNvPr id="6" name="Rounded Rectangle 5"/>
+          <p:cNvSpPr/>
+          <p:nvPr/>
+        </p:nvSpPr>
+        <p:spPr>
+          <a:xfrm>
+            <a:off x="6629400" y="777240"/>
+            <a:ext cx="5074920" cy="4160520"/>
+          </a:xfrm>
+          <a:prstGeom prst="roundRect">
+            <a:avLst>
+              <a:gd name="adj" fmla="val 7326"/>
+            </a:avLst>
+          </a:prstGeom>
+          <a:solidFill>
+            <a:srgbClr val="FFFFFF"/>
+          </a:solidFill>
+          <a:ln w="19050">
+            <a:solidFill>
+              <a:srgbClr val="1C7293"/>
+            </a:solidFill>
+          </a:ln>
+          <a:effectLst/>
+        </p:spPr>
+        <p:style>
+          <a:lnRef idx="1">
+            <a:schemeClr val="accent1"/>
+          </a:lnRef>
+          <a:fillRef idx="3">
+            <a:schemeClr val="accent1"/>
+          </a:fillRef>
+          <a:effectRef idx="2">
+            <a:schemeClr val="accent1"/>
+          </a:effectRef>
+          <a:fontRef idx="minor">
+            <a:schemeClr val="lt1"/>
+          </a:fontRef>
+        </p:style>
+        <p:txBody>
+          <a:bodyPr rtlCol="0" anchor="ctr"/>
+          <a:lstStyle/>
+          <a:p>
+            <a:pPr algn="ctr"/>
+          </a:p>
+        </p:txBody>
+      </p:sp>
       <p:pic>
         <p:nvPicPr>
-          <p:cNvPr id="2" name="Picture 1" descr="s26a-dice.png"/>
+          <p:cNvPr id="7" name="Picture 6" descr="dice-wikimedia.jpg"/>
           <p:cNvPicPr>
             <a:picLocks noChangeAspect="1"/>
           </p:cNvPicPr>
@@ -29665,8 +30148,8 @@
         </p:blipFill>
         <p:spPr>
           <a:xfrm>
-            <a:off x="10317175" y="411480"/>
-            <a:ext cx="1371600" cy="1371600"/>
+            <a:off x="6905244" y="923544"/>
+            <a:ext cx="4523231" cy="3392423"/>
           </a:xfrm>
           <a:prstGeom prst="rect">
             <a:avLst/>
@@ -29675,163 +30158,46 @@
       </p:pic>
       <p:sp>
         <p:nvSpPr>
-          <p:cNvPr id="3" name="TextBox 2"/>
-          <p:cNvSpPr txBox="1"/>
-          <p:nvPr/>
-        </p:nvSpPr>
-        <p:spPr>
-          <a:xfrm>
-            <a:off x="502920" y="868680"/>
-            <a:ext cx="11247120" cy="2194560"/>
-          </a:xfrm>
-          <a:prstGeom prst="rect">
-            <a:avLst/>
-          </a:prstGeom>
-          <a:noFill/>
-        </p:spPr>
-        <p:txBody>
-          <a:bodyPr wrap="square" lIns="0" rIns="0" tIns="0" bIns="0" anchor="ctr">
+          <p:cNvPr id="8" name="TextBox 7"/>
+          <p:cNvSpPr txBox="1"/>
+          <p:nvPr/>
+        </p:nvSpPr>
+        <p:spPr>
+          <a:xfrm>
+            <a:off x="6775704" y="4425695"/>
+            <a:ext cx="4782312" cy="475488"/>
+          </a:xfrm>
+          <a:prstGeom prst="rect">
+            <a:avLst/>
+          </a:prstGeom>
+          <a:noFill/>
+        </p:spPr>
+        <p:txBody>
+          <a:bodyPr wrap="square" lIns="0" rIns="0" tIns="0" bIns="0" anchor="t">
             <a:spAutoFit/>
           </a:bodyPr>
           <a:lstStyle/>
           <a:p>
             <a:pPr algn="ctr">
               <a:lnSpc>
-                <a:spcPct val="100000"/>
-              </a:lnSpc>
-            </a:pPr>
-            <a:r>
-              <a:rPr sz="14000" b="1" i="0">
-                <a:solidFill>
-                  <a:srgbClr val="F0AB00"/>
-                </a:solidFill>
-                <a:latin typeface="Arial"/>
-              </a:rPr>
-              <a:t>Раздел 4</a:t>
-            </a:r>
-          </a:p>
-        </p:txBody>
-      </p:sp>
-      <p:sp>
-        <p:nvSpPr>
-          <p:cNvPr id="4" name="TextBox 3"/>
-          <p:cNvSpPr txBox="1"/>
-          <p:nvPr/>
-        </p:nvSpPr>
-        <p:spPr>
-          <a:xfrm>
-            <a:off x="502920" y="3246120"/>
-            <a:ext cx="11247120" cy="685800"/>
-          </a:xfrm>
-          <a:prstGeom prst="rect">
-            <a:avLst/>
-          </a:prstGeom>
-          <a:noFill/>
-        </p:spPr>
-        <p:txBody>
-          <a:bodyPr wrap="square" lIns="0" rIns="0" tIns="0" bIns="0" anchor="ctr">
-            <a:spAutoFit/>
-          </a:bodyPr>
-          <a:lstStyle/>
-          <a:p>
-            <a:pPr algn="ctr">
-              <a:lnSpc>
-                <a:spcPct val="115000"/>
-              </a:lnSpc>
-            </a:pPr>
-            <a:r>
-              <a:rPr sz="4400" b="1" i="0">
-                <a:solidFill>
-                  <a:srgbClr val="21295C"/>
-                </a:solidFill>
-                <a:latin typeface="Arial"/>
-              </a:rPr>
-              <a:t>Сэмплинг и генерация</a:t>
-            </a:r>
-          </a:p>
-        </p:txBody>
-      </p:sp>
-      <p:sp>
-        <p:nvSpPr>
-          <p:cNvPr id="5" name="TextBox 4"/>
-          <p:cNvSpPr txBox="1"/>
-          <p:nvPr/>
-        </p:nvSpPr>
-        <p:spPr>
-          <a:xfrm>
-            <a:off x="502920" y="4023360"/>
-            <a:ext cx="11247120" cy="685800"/>
-          </a:xfrm>
-          <a:prstGeom prst="rect">
-            <a:avLst/>
-          </a:prstGeom>
-          <a:noFill/>
-        </p:spPr>
-        <p:txBody>
-          <a:bodyPr wrap="square" lIns="0" rIns="0" tIns="0" bIns="0" anchor="t">
-            <a:spAutoFit/>
-          </a:bodyPr>
-          <a:lstStyle/>
-          <a:p>
-            <a:pPr algn="ctr">
-              <a:lnSpc>
-                <a:spcPct val="115000"/>
-              </a:lnSpc>
-            </a:pPr>
-            <a:r>
-              <a:rPr sz="1800" b="0" i="1">
-                <a:solidFill>
-                  <a:srgbClr val="065A82"/>
-                </a:solidFill>
-                <a:latin typeface="Arial"/>
-              </a:rPr>
-              <a:t>«Как из распределения вероятностей рождается один токен — и какими ручками этот выбор управляется»</a:t>
-            </a:r>
-          </a:p>
-        </p:txBody>
-      </p:sp>
-      <p:sp>
-        <p:nvSpPr>
-          <p:cNvPr id="6" name="TextBox 5"/>
-          <p:cNvSpPr txBox="1"/>
-          <p:nvPr/>
-        </p:nvSpPr>
-        <p:spPr>
-          <a:xfrm>
-            <a:off x="502920" y="4800600"/>
-            <a:ext cx="11247120" cy="411480"/>
-          </a:xfrm>
-          <a:prstGeom prst="rect">
-            <a:avLst/>
-          </a:prstGeom>
-          <a:noFill/>
-        </p:spPr>
-        <p:txBody>
-          <a:bodyPr wrap="square" lIns="0" rIns="0" tIns="0" bIns="0" anchor="t">
-            <a:spAutoFit/>
-          </a:bodyPr>
-          <a:lstStyle/>
-          <a:p>
-            <a:pPr algn="ctr">
-              <a:lnSpc>
-                <a:spcPct val="115000"/>
-              </a:lnSpc>
-            </a:pPr>
-            <a:r>
-              <a:rPr sz="1600" b="1" i="0">
-                <a:solidFill>
-                  <a:srgbClr val="028090"/>
-                </a:solidFill>
-                <a:latin typeface="Arial"/>
-              </a:rPr>
-              <a:t>4 разбора · 2 провала</a:t>
-            </a:r>
-          </a:p>
-        </p:txBody>
-      </p:sp>
-      <p:sp>
-        <p:nvSpPr>
-          <p:cNvPr id="7" name="Rounded Rectangle 6"/>
+                <a:spcPct val="105000"/>
+              </a:lnSpc>
+            </a:pPr>
+            <a:r>
+              <a:rPr sz="950" b="0" i="1">
+                <a:solidFill>
+                  <a:srgbClr val="1C7293"/>
+                </a:solidFill>
+                <a:latin typeface="Arial"/>
+              </a:rPr>
+              <a:t>Казино-кости Caesars Palace — Wikimedia Commons, CC-BY-SA</a:t>
+            </a:r>
+          </a:p>
+        </p:txBody>
+      </p:sp>
+      <p:sp>
+        <p:nvSpPr>
+          <p:cNvPr id="9" name="Rounded Rectangle 8"/>
           <p:cNvSpPr/>
           <p:nvPr/>
         </p:nvSpPr>
@@ -29877,7 +30243,7 @@
       </p:sp>
       <p:sp>
         <p:nvSpPr>
-          <p:cNvPr id="8" name="TextBox 7"/>
+          <p:cNvPr id="10" name="TextBox 9"/>
           <p:cNvSpPr txBox="1"/>
           <p:nvPr/>
         </p:nvSpPr>
@@ -29916,7 +30282,7 @@
       </p:sp>
       <p:sp>
         <p:nvSpPr>
-          <p:cNvPr id="9" name="Right Arrow 8"/>
+          <p:cNvPr id="11" name="Right Arrow 10"/>
           <p:cNvSpPr/>
           <p:nvPr/>
         </p:nvSpPr>
@@ -29960,7 +30326,7 @@
       </p:sp>
       <p:sp>
         <p:nvSpPr>
-          <p:cNvPr id="10" name="Rounded Rectangle 9"/>
+          <p:cNvPr id="12" name="Rounded Rectangle 11"/>
           <p:cNvSpPr/>
           <p:nvPr/>
         </p:nvSpPr>
@@ -30006,7 +30372,7 @@
       </p:sp>
       <p:sp>
         <p:nvSpPr>
-          <p:cNvPr id="11" name="TextBox 10"/>
+          <p:cNvPr id="13" name="TextBox 12"/>
           <p:cNvSpPr txBox="1"/>
           <p:nvPr/>
         </p:nvSpPr>
@@ -30045,7 +30411,7 @@
       </p:sp>
       <p:sp>
         <p:nvSpPr>
-          <p:cNvPr id="12" name="Right Arrow 11"/>
+          <p:cNvPr id="14" name="Right Arrow 13"/>
           <p:cNvSpPr/>
           <p:nvPr/>
         </p:nvSpPr>
@@ -30089,7 +30455,7 @@
       </p:sp>
       <p:sp>
         <p:nvSpPr>
-          <p:cNvPr id="13" name="Rounded Rectangle 12"/>
+          <p:cNvPr id="15" name="Rounded Rectangle 14"/>
           <p:cNvSpPr/>
           <p:nvPr/>
         </p:nvSpPr>
@@ -30135,7 +30501,7 @@
       </p:sp>
       <p:sp>
         <p:nvSpPr>
-          <p:cNvPr id="14" name="TextBox 13"/>
+          <p:cNvPr id="16" name="TextBox 15"/>
           <p:cNvSpPr txBox="1"/>
           <p:nvPr/>
         </p:nvSpPr>
@@ -30174,7 +30540,7 @@
       </p:sp>
       <p:sp>
         <p:nvSpPr>
-          <p:cNvPr id="15" name="Right Arrow 14"/>
+          <p:cNvPr id="17" name="Right Arrow 16"/>
           <p:cNvSpPr/>
           <p:nvPr/>
         </p:nvSpPr>
@@ -30218,7 +30584,7 @@
       </p:sp>
       <p:sp>
         <p:nvSpPr>
-          <p:cNvPr id="16" name="Rounded Rectangle 15"/>
+          <p:cNvPr id="18" name="Rounded Rectangle 17"/>
           <p:cNvSpPr/>
           <p:nvPr/>
         </p:nvSpPr>
@@ -30264,7 +30630,7 @@
       </p:sp>
       <p:sp>
         <p:nvSpPr>
-          <p:cNvPr id="17" name="TextBox 16"/>
+          <p:cNvPr id="19" name="TextBox 18"/>
           <p:cNvSpPr txBox="1"/>
           <p:nvPr/>
         </p:nvSpPr>
@@ -30303,7 +30669,7 @@
       </p:sp>
       <p:sp>
         <p:nvSpPr>
-          <p:cNvPr id="18" name="Right Arrow 17"/>
+          <p:cNvPr id="20" name="Right Arrow 19"/>
           <p:cNvSpPr/>
           <p:nvPr/>
         </p:nvSpPr>
@@ -30347,7 +30713,7 @@
       </p:sp>
       <p:sp>
         <p:nvSpPr>
-          <p:cNvPr id="19" name="Rounded Rectangle 18"/>
+          <p:cNvPr id="21" name="Rounded Rectangle 20"/>
           <p:cNvSpPr/>
           <p:nvPr/>
         </p:nvSpPr>
@@ -30393,7 +30759,7 @@
       </p:sp>
       <p:sp>
         <p:nvSpPr>
-          <p:cNvPr id="20" name="TextBox 19"/>
+          <p:cNvPr id="22" name="TextBox 21"/>
           <p:cNvSpPr txBox="1"/>
           <p:nvPr/>
         </p:nvSpPr>
@@ -30432,7 +30798,7 @@
       </p:sp>
       <p:sp>
         <p:nvSpPr>
-          <p:cNvPr id="21" name="Right Arrow 20"/>
+          <p:cNvPr id="23" name="Right Arrow 22"/>
           <p:cNvSpPr/>
           <p:nvPr/>
         </p:nvSpPr>
@@ -30476,7 +30842,7 @@
       </p:sp>
       <p:sp>
         <p:nvSpPr>
-          <p:cNvPr id="22" name="Rounded Rectangle 21"/>
+          <p:cNvPr id="24" name="Rounded Rectangle 23"/>
           <p:cNvSpPr/>
           <p:nvPr/>
         </p:nvSpPr>
@@ -30522,7 +30888,7 @@
       </p:sp>
       <p:sp>
         <p:nvSpPr>
-          <p:cNvPr id="23" name="TextBox 22"/>
+          <p:cNvPr id="25" name="TextBox 24"/>
           <p:cNvSpPr txBox="1"/>
           <p:nvPr/>
         </p:nvSpPr>
@@ -30561,7 +30927,7 @@
       </p:sp>
       <p:sp>
         <p:nvSpPr>
-          <p:cNvPr id="24" name="Right Arrow 23"/>
+          <p:cNvPr id="26" name="Right Arrow 25"/>
           <p:cNvSpPr/>
           <p:nvPr/>
         </p:nvSpPr>
@@ -30605,7 +30971,7 @@
       </p:sp>
       <p:sp>
         <p:nvSpPr>
-          <p:cNvPr id="25" name="Rounded Rectangle 24"/>
+          <p:cNvPr id="27" name="Rounded Rectangle 26"/>
           <p:cNvSpPr/>
           <p:nvPr/>
         </p:nvSpPr>
@@ -30651,7 +31017,7 @@
       </p:sp>
       <p:sp>
         <p:nvSpPr>
-          <p:cNvPr id="26" name="TextBox 25"/>
+          <p:cNvPr id="28" name="TextBox 27"/>
           <p:cNvSpPr txBox="1"/>
           <p:nvPr/>
         </p:nvSpPr>
@@ -30690,7 +31056,7 @@
       </p:sp>
       <p:sp>
         <p:nvSpPr>
-          <p:cNvPr id="27" name="TextBox 26"/>
+          <p:cNvPr id="29" name="TextBox 28"/>
           <p:cNvSpPr txBox="1"/>
           <p:nvPr/>
         </p:nvSpPr>
@@ -30718,7 +31084,7 @@
                 </a:solidFill>
                 <a:latin typeface="Arial"/>
               </a:rPr>
-              <a:t>28/46</a:t>
+              <a:t>28/47</a:t>
             </a:r>
           </a:p>
         </p:txBody>
@@ -32000,7 +32366,7 @@
                 </a:solidFill>
                 <a:latin typeface="Arial"/>
               </a:rPr>
-              <a:t>29/46</a:t>
+              <a:t>29/47</a:t>
             </a:r>
           </a:p>
         </p:txBody>
@@ -33045,7 +33411,7 @@
                 </a:solidFill>
                 <a:latin typeface="Arial"/>
               </a:rPr>
-              <a:t>3/46</a:t>
+              <a:t>3/47</a:t>
             </a:r>
           </a:p>
         </p:txBody>
@@ -34674,7 +35040,7 @@
                 </a:solidFill>
                 <a:latin typeface="Arial"/>
               </a:rPr>
-              <a:t>30/46</a:t>
+              <a:t>30/47</a:t>
             </a:r>
           </a:p>
         </p:txBody>
@@ -34745,11 +35111,11 @@
         <p:spPr>
           <a:xfrm>
             <a:off x="502920" y="1234440"/>
-            <a:ext cx="4160520" cy="2834640"/>
+            <a:ext cx="4160520" cy="1965960"/>
           </a:xfrm>
           <a:prstGeom prst="roundRect">
             <a:avLst>
-              <a:gd name="adj" fmla="val 10752"/>
+              <a:gd name="adj" fmla="val 15503"/>
             </a:avLst>
           </a:prstGeom>
           <a:solidFill>
@@ -34792,8 +35158,8 @@
         </p:nvSpPr>
         <p:spPr>
           <a:xfrm>
-            <a:off x="731520" y="1463040"/>
-            <a:ext cx="3703320" cy="1188720"/>
+            <a:off x="731520" y="1353312"/>
+            <a:ext cx="3703320" cy="777240"/>
           </a:xfrm>
           <a:prstGeom prst="rect">
             <a:avLst/>
@@ -34812,7 +35178,7 @@
               </a:lnSpc>
             </a:pPr>
             <a:r>
-              <a:rPr sz="6400" b="1" i="0">
+              <a:rPr sz="4800" b="1" i="0">
                 <a:solidFill>
                   <a:srgbClr val="F0AB00"/>
                 </a:solidFill>
@@ -34831,8 +35197,8 @@
         </p:nvSpPr>
         <p:spPr>
           <a:xfrm>
-            <a:off x="777240" y="2697480"/>
-            <a:ext cx="3611880" cy="1325880"/>
+            <a:off x="777240" y="2084831"/>
+            <a:ext cx="3611880" cy="1051560"/>
           </a:xfrm>
           <a:prstGeom prst="rect">
             <a:avLst/>
@@ -34847,11 +35213,11 @@
           <a:p>
             <a:pPr algn="ctr">
               <a:lnSpc>
-                <a:spcPct val="118000"/>
-              </a:lnSpc>
-            </a:pPr>
-            <a:r>
-              <a:rPr sz="1200" b="0" i="0">
+                <a:spcPct val="112000"/>
+              </a:lnSpc>
+            </a:pPr>
+            <a:r>
+              <a:rPr sz="1100" b="0" i="0">
                 <a:solidFill>
                   <a:srgbClr val="21295C"/>
                 </a:solidFill>
@@ -34862,9 +35228,72 @@
           </a:p>
         </p:txBody>
       </p:sp>
-      <p:sp>
-        <p:nvSpPr>
-          <p:cNvPr id="6" name="TextBox 5"/>
+      <p:pic>
+        <p:nvPicPr>
+          <p:cNvPr id="6" name="Picture 5" descr="well-yes-actually-no-template.jpg"/>
+          <p:cNvPicPr>
+            <a:picLocks noChangeAspect="1"/>
+          </p:cNvPicPr>
+          <p:nvPr/>
+        </p:nvPicPr>
+        <p:blipFill>
+          <a:blip r:embed="rId2"/>
+          <a:stretch>
+            <a:fillRect/>
+          </a:stretch>
+        </p:blipFill>
+        <p:spPr>
+          <a:xfrm>
+            <a:off x="1934541" y="3291840"/>
+            <a:ext cx="1297277" cy="987552"/>
+          </a:xfrm>
+          <a:prstGeom prst="rect">
+            <a:avLst/>
+          </a:prstGeom>
+        </p:spPr>
+      </p:pic>
+      <p:sp>
+        <p:nvSpPr>
+          <p:cNvPr id="7" name="TextBox 6"/>
+          <p:cNvSpPr txBox="1"/>
+          <p:nvPr/>
+        </p:nvSpPr>
+        <p:spPr>
+          <a:xfrm>
+            <a:off x="2007693" y="3310128"/>
+            <a:ext cx="1150972" cy="175016"/>
+          </a:xfrm>
+          <a:prstGeom prst="rect">
+            <a:avLst/>
+          </a:prstGeom>
+          <a:noFill/>
+        </p:spPr>
+        <p:txBody>
+          <a:bodyPr wrap="square" lIns="0" rIns="0" tIns="0" bIns="0" anchor="ctr">
+            <a:spAutoFit/>
+          </a:bodyPr>
+          <a:lstStyle/>
+          <a:p>
+            <a:pPr algn="ctr">
+              <a:lnSpc>
+                <a:spcPct val="95000"/>
+              </a:lnSpc>
+            </a:pPr>
+            <a:r>
+              <a:rPr sz="1000" b="1" i="0">
+                <a:solidFill>
+                  <a:srgbClr val="21295C"/>
+                </a:solidFill>
+                <a:latin typeface="Arial"/>
+              </a:rPr>
+              <a:t>T=0 = детерминизм?</a:t>
+            </a:r>
+          </a:p>
+        </p:txBody>
+      </p:sp>
+      <p:sp>
+        <p:nvSpPr>
+          <p:cNvPr id="8" name="TextBox 7"/>
           <p:cNvSpPr txBox="1"/>
           <p:nvPr/>
         </p:nvSpPr>
@@ -34912,7 +35341,7 @@
       </p:sp>
       <p:sp>
         <p:nvSpPr>
-          <p:cNvPr id="7" name="Rounded Rectangle 6"/>
+          <p:cNvPr id="9" name="Rounded Rectangle 8"/>
           <p:cNvSpPr/>
           <p:nvPr/>
         </p:nvSpPr>
@@ -34960,7 +35389,7 @@
       </p:sp>
       <p:sp>
         <p:nvSpPr>
-          <p:cNvPr id="8" name="TextBox 7"/>
+          <p:cNvPr id="10" name="TextBox 9"/>
           <p:cNvSpPr txBox="1"/>
           <p:nvPr/>
         </p:nvSpPr>
@@ -35008,7 +35437,7 @@
       </p:sp>
       <p:sp>
         <p:nvSpPr>
-          <p:cNvPr id="9" name="Rounded Rectangle 8"/>
+          <p:cNvPr id="11" name="Rounded Rectangle 10"/>
           <p:cNvSpPr/>
           <p:nvPr/>
         </p:nvSpPr>
@@ -35056,7 +35485,7 @@
       </p:sp>
       <p:sp>
         <p:nvSpPr>
-          <p:cNvPr id="10" name="TextBox 9"/>
+          <p:cNvPr id="12" name="TextBox 11"/>
           <p:cNvSpPr txBox="1"/>
           <p:nvPr/>
         </p:nvSpPr>
@@ -35104,7 +35533,7 @@
       </p:sp>
       <p:sp>
         <p:nvSpPr>
-          <p:cNvPr id="11" name="Rounded Rectangle 10"/>
+          <p:cNvPr id="13" name="Rounded Rectangle 12"/>
           <p:cNvSpPr/>
           <p:nvPr/>
         </p:nvSpPr>
@@ -35152,7 +35581,7 @@
       </p:sp>
       <p:sp>
         <p:nvSpPr>
-          <p:cNvPr id="12" name="TextBox 11"/>
+          <p:cNvPr id="14" name="TextBox 13"/>
           <p:cNvSpPr txBox="1"/>
           <p:nvPr/>
         </p:nvSpPr>
@@ -35200,7 +35629,7 @@
       </p:sp>
       <p:sp>
         <p:nvSpPr>
-          <p:cNvPr id="13" name="Rounded Rectangle 12"/>
+          <p:cNvPr id="15" name="Rounded Rectangle 14"/>
           <p:cNvSpPr/>
           <p:nvPr/>
         </p:nvSpPr>
@@ -35248,7 +35677,7 @@
       </p:sp>
       <p:sp>
         <p:nvSpPr>
-          <p:cNvPr id="14" name="TextBox 13"/>
+          <p:cNvPr id="16" name="TextBox 15"/>
           <p:cNvSpPr txBox="1"/>
           <p:nvPr/>
         </p:nvSpPr>
@@ -35296,7 +35725,7 @@
       </p:sp>
       <p:sp>
         <p:nvSpPr>
-          <p:cNvPr id="15" name="Rounded Rectangle 14"/>
+          <p:cNvPr id="17" name="Rounded Rectangle 16"/>
           <p:cNvSpPr/>
           <p:nvPr/>
         </p:nvSpPr>
@@ -35344,7 +35773,7 @@
       </p:sp>
       <p:sp>
         <p:nvSpPr>
-          <p:cNvPr id="16" name="TextBox 15"/>
+          <p:cNvPr id="18" name="TextBox 17"/>
           <p:cNvSpPr txBox="1"/>
           <p:nvPr/>
         </p:nvSpPr>
@@ -35392,7 +35821,7 @@
       </p:sp>
       <p:sp>
         <p:nvSpPr>
-          <p:cNvPr id="17" name="Rounded Rectangle 16"/>
+          <p:cNvPr id="19" name="Rounded Rectangle 18"/>
           <p:cNvSpPr/>
           <p:nvPr/>
         </p:nvSpPr>
@@ -35440,7 +35869,7 @@
       </p:sp>
       <p:sp>
         <p:nvSpPr>
-          <p:cNvPr id="18" name="TextBox 17"/>
+          <p:cNvPr id="20" name="TextBox 19"/>
           <p:cNvSpPr txBox="1"/>
           <p:nvPr/>
         </p:nvSpPr>
@@ -35488,7 +35917,7 @@
       </p:sp>
       <p:sp>
         <p:nvSpPr>
-          <p:cNvPr id="19" name="Rounded Rectangle 18"/>
+          <p:cNvPr id="21" name="Rounded Rectangle 20"/>
           <p:cNvSpPr/>
           <p:nvPr/>
         </p:nvSpPr>
@@ -35536,7 +35965,7 @@
       </p:sp>
       <p:sp>
         <p:nvSpPr>
-          <p:cNvPr id="20" name="TextBox 19"/>
+          <p:cNvPr id="22" name="TextBox 21"/>
           <p:cNvSpPr txBox="1"/>
           <p:nvPr/>
         </p:nvSpPr>
@@ -35575,7 +36004,7 @@
       </p:sp>
       <p:sp>
         <p:nvSpPr>
-          <p:cNvPr id="21" name="TextBox 20"/>
+          <p:cNvPr id="23" name="TextBox 22"/>
           <p:cNvSpPr txBox="1"/>
           <p:nvPr/>
         </p:nvSpPr>
@@ -35603,7 +36032,7 @@
                 </a:solidFill>
                 <a:latin typeface="Arial"/>
               </a:rPr>
-              <a:t>31/46</a:t>
+              <a:t>31/47</a:t>
             </a:r>
           </a:p>
         </p:txBody>
@@ -36509,7 +36938,7 @@
                 </a:solidFill>
                 <a:latin typeface="Arial"/>
               </a:rPr>
-              <a:t>32/46</a:t>
+              <a:t>32/47</a:t>
             </a:r>
           </a:p>
         </p:txBody>
@@ -37696,7 +38125,7 @@
                 </a:solidFill>
                 <a:latin typeface="Arial"/>
               </a:rPr>
-              <a:t>33/46</a:t>
+              <a:t>33/47</a:t>
             </a:r>
           </a:p>
         </p:txBody>
@@ -39032,7 +39461,7 @@
         <p:spPr>
           <a:xfrm>
             <a:off x="6492240" y="4279392"/>
-            <a:ext cx="3703320" cy="1005840"/>
+            <a:ext cx="2788920" cy="1005840"/>
           </a:xfrm>
           <a:prstGeom prst="rect">
             <a:avLst/>
@@ -39047,11 +39476,11 @@
           <a:p>
             <a:pPr algn="l">
               <a:lnSpc>
-                <a:spcPct val="118000"/>
-              </a:lnSpc>
-            </a:pPr>
-            <a:r>
-              <a:rPr sz="1250" b="0" i="0">
+                <a:spcPct val="115000"/>
+              </a:lnSpc>
+            </a:pPr>
+            <a:r>
+              <a:rPr sz="1200" b="0" i="0">
                 <a:solidFill>
                   <a:srgbClr val="21295C"/>
                 </a:solidFill>
@@ -39064,7 +39493,7 @@
       </p:sp>
       <p:pic>
         <p:nvPicPr>
-          <p:cNvPr id="33" name="Picture 32" descr="s31-gorshochek.png"/>
+          <p:cNvPr id="33" name="Picture 32" descr="gorshochek-ubbelohde-1909.jpg"/>
           <p:cNvPicPr>
             <a:picLocks noChangeAspect="1"/>
           </p:cNvPicPr>
@@ -39078,8 +39507,8 @@
         </p:blipFill>
         <p:spPr>
           <a:xfrm>
-            <a:off x="10332720" y="3913632"/>
-            <a:ext cx="1234440" cy="1058091"/>
+            <a:off x="9646920" y="4076080"/>
+            <a:ext cx="1417320" cy="717518"/>
           </a:xfrm>
           <a:prstGeom prst="rect">
             <a:avLst/>
@@ -39088,7 +39517,46 @@
       </p:pic>
       <p:sp>
         <p:nvSpPr>
-          <p:cNvPr id="34" name="Rounded Rectangle 33"/>
+          <p:cNvPr id="34" name="TextBox 33"/>
+          <p:cNvSpPr txBox="1"/>
+          <p:nvPr/>
+        </p:nvSpPr>
+        <p:spPr>
+          <a:xfrm>
+            <a:off x="9537192" y="4821031"/>
+            <a:ext cx="1636776" cy="256032"/>
+          </a:xfrm>
+          <a:prstGeom prst="rect">
+            <a:avLst/>
+          </a:prstGeom>
+          <a:noFill/>
+        </p:spPr>
+        <p:txBody>
+          <a:bodyPr wrap="square" lIns="0" rIns="0" tIns="0" bIns="0" anchor="t">
+            <a:spAutoFit/>
+          </a:bodyPr>
+          <a:lstStyle/>
+          <a:p>
+            <a:pPr algn="ctr">
+              <a:lnSpc>
+                <a:spcPct val="115000"/>
+              </a:lnSpc>
+            </a:pPr>
+            <a:r>
+              <a:rPr sz="750" b="0" i="1">
+                <a:solidFill>
+                  <a:srgbClr val="1C7293"/>
+                </a:solidFill>
+                <a:latin typeface="Arial"/>
+              </a:rPr>
+              <a:t>«Горшочек каши» — Гримм, 1909</a:t>
+            </a:r>
+          </a:p>
+        </p:txBody>
+      </p:sp>
+      <p:sp>
+        <p:nvSpPr>
+          <p:cNvPr id="35" name="Rounded Rectangle 34"/>
           <p:cNvSpPr/>
           <p:nvPr/>
         </p:nvSpPr>
@@ -39136,7 +39604,7 @@
       </p:sp>
       <p:sp>
         <p:nvSpPr>
-          <p:cNvPr id="35" name="TextBox 34"/>
+          <p:cNvPr id="36" name="TextBox 35"/>
           <p:cNvSpPr txBox="1"/>
           <p:nvPr/>
         </p:nvSpPr>
@@ -39175,7 +39643,7 @@
       </p:sp>
       <p:sp>
         <p:nvSpPr>
-          <p:cNvPr id="36" name="TextBox 35"/>
+          <p:cNvPr id="37" name="TextBox 36"/>
           <p:cNvSpPr txBox="1"/>
           <p:nvPr/>
         </p:nvSpPr>
@@ -39214,7 +39682,7 @@
       </p:sp>
       <p:sp>
         <p:nvSpPr>
-          <p:cNvPr id="37" name="TextBox 36"/>
+          <p:cNvPr id="38" name="TextBox 37"/>
           <p:cNvSpPr txBox="1"/>
           <p:nvPr/>
         </p:nvSpPr>
@@ -39242,7 +39710,7 @@
                 </a:solidFill>
                 <a:latin typeface="Arial"/>
               </a:rPr>
-              <a:t>34/46</a:t>
+              <a:t>34/47</a:t>
             </a:r>
           </a:p>
         </p:txBody>
@@ -40537,7 +41005,7 @@
                 </a:solidFill>
                 <a:latin typeface="Arial"/>
               </a:rPr>
-              <a:t>35/46</a:t>
+              <a:t>35/47</a:t>
             </a:r>
           </a:p>
         </p:txBody>
@@ -40568,9 +41036,213 @@
         <p:nvPr/>
       </p:nvGrpSpPr>
       <p:grpSpPr/>
+      <p:sp>
+        <p:nvSpPr>
+          <p:cNvPr id="2" name="TextBox 1"/>
+          <p:cNvSpPr txBox="1"/>
+          <p:nvPr/>
+        </p:nvSpPr>
+        <p:spPr>
+          <a:xfrm>
+            <a:off x="502920" y="685800"/>
+            <a:ext cx="5806440" cy="1737360"/>
+          </a:xfrm>
+          <a:prstGeom prst="rect">
+            <a:avLst/>
+          </a:prstGeom>
+          <a:noFill/>
+        </p:spPr>
+        <p:txBody>
+          <a:bodyPr wrap="square" lIns="0" rIns="0" tIns="0" bIns="0" anchor="ctr">
+            <a:spAutoFit/>
+          </a:bodyPr>
+          <a:lstStyle/>
+          <a:p>
+            <a:pPr algn="l">
+              <a:lnSpc>
+                <a:spcPct val="100000"/>
+              </a:lnSpc>
+            </a:pPr>
+            <a:r>
+              <a:rPr sz="9200" b="1" i="0">
+                <a:solidFill>
+                  <a:srgbClr val="F0AB00"/>
+                </a:solidFill>
+                <a:latin typeface="Arial"/>
+              </a:rPr>
+              <a:t>Раздел 5</a:t>
+            </a:r>
+          </a:p>
+        </p:txBody>
+      </p:sp>
+      <p:sp>
+        <p:nvSpPr>
+          <p:cNvPr id="3" name="TextBox 2"/>
+          <p:cNvSpPr txBox="1"/>
+          <p:nvPr/>
+        </p:nvSpPr>
+        <p:spPr>
+          <a:xfrm>
+            <a:off x="502920" y="2395728"/>
+            <a:ext cx="5806440" cy="960120"/>
+          </a:xfrm>
+          <a:prstGeom prst="rect">
+            <a:avLst/>
+          </a:prstGeom>
+          <a:noFill/>
+        </p:spPr>
+        <p:txBody>
+          <a:bodyPr wrap="square" lIns="0" rIns="0" tIns="0" bIns="0" anchor="t">
+            <a:spAutoFit/>
+          </a:bodyPr>
+          <a:lstStyle/>
+          <a:p>
+            <a:pPr algn="l">
+              <a:lnSpc>
+                <a:spcPct val="108000"/>
+              </a:lnSpc>
+            </a:pPr>
+            <a:r>
+              <a:rPr sz="3300" b="1" i="0">
+                <a:solidFill>
+                  <a:srgbClr val="21295C"/>
+                </a:solidFill>
+                <a:latin typeface="Arial"/>
+              </a:rPr>
+              <a:t>Виды и размеры моделей</a:t>
+            </a:r>
+          </a:p>
+        </p:txBody>
+      </p:sp>
+      <p:sp>
+        <p:nvSpPr>
+          <p:cNvPr id="4" name="TextBox 3"/>
+          <p:cNvSpPr txBox="1"/>
+          <p:nvPr/>
+        </p:nvSpPr>
+        <p:spPr>
+          <a:xfrm>
+            <a:off x="502920" y="3474720"/>
+            <a:ext cx="5806440" cy="1234440"/>
+          </a:xfrm>
+          <a:prstGeom prst="rect">
+            <a:avLst/>
+          </a:prstGeom>
+          <a:noFill/>
+        </p:spPr>
+        <p:txBody>
+          <a:bodyPr wrap="square" lIns="0" rIns="0" tIns="0" bIns="0" anchor="t">
+            <a:spAutoFit/>
+          </a:bodyPr>
+          <a:lstStyle/>
+          <a:p>
+            <a:pPr algn="l">
+              <a:lnSpc>
+                <a:spcPct val="120000"/>
+              </a:lnSpc>
+            </a:pPr>
+            <a:r>
+              <a:rPr sz="1800" b="0" i="1">
+                <a:solidFill>
+                  <a:srgbClr val="065A82"/>
+                </a:solidFill>
+                <a:latin typeface="Arial"/>
+              </a:rPr>
+              <a:t>«На чём запускаются модели разных размеров — и что каждый класс умеет»</a:t>
+            </a:r>
+          </a:p>
+        </p:txBody>
+      </p:sp>
+      <p:sp>
+        <p:nvSpPr>
+          <p:cNvPr id="5" name="TextBox 4"/>
+          <p:cNvSpPr txBox="1"/>
+          <p:nvPr/>
+        </p:nvSpPr>
+        <p:spPr>
+          <a:xfrm>
+            <a:off x="502920" y="4846320"/>
+            <a:ext cx="5806440" cy="411480"/>
+          </a:xfrm>
+          <a:prstGeom prst="rect">
+            <a:avLst/>
+          </a:prstGeom>
+          <a:noFill/>
+        </p:spPr>
+        <p:txBody>
+          <a:bodyPr wrap="square" lIns="0" rIns="0" tIns="0" bIns="0" anchor="t">
+            <a:spAutoFit/>
+          </a:bodyPr>
+          <a:lstStyle/>
+          <a:p>
+            <a:pPr algn="l">
+              <a:lnSpc>
+                <a:spcPct val="115000"/>
+              </a:lnSpc>
+            </a:pPr>
+            <a:r>
+              <a:rPr sz="1600" b="1" i="0">
+                <a:solidFill>
+                  <a:srgbClr val="028090"/>
+                </a:solidFill>
+                <a:latin typeface="Arial"/>
+              </a:rPr>
+              <a:t>4 разбора</a:t>
+            </a:r>
+          </a:p>
+        </p:txBody>
+      </p:sp>
+      <p:sp>
+        <p:nvSpPr>
+          <p:cNvPr id="6" name="Rounded Rectangle 5"/>
+          <p:cNvSpPr/>
+          <p:nvPr/>
+        </p:nvSpPr>
+        <p:spPr>
+          <a:xfrm>
+            <a:off x="6629400" y="777240"/>
+            <a:ext cx="5074920" cy="4160520"/>
+          </a:xfrm>
+          <a:prstGeom prst="roundRect">
+            <a:avLst>
+              <a:gd name="adj" fmla="val 7326"/>
+            </a:avLst>
+          </a:prstGeom>
+          <a:solidFill>
+            <a:srgbClr val="FFFFFF"/>
+          </a:solidFill>
+          <a:ln w="19050">
+            <a:solidFill>
+              <a:srgbClr val="1C7293"/>
+            </a:solidFill>
+          </a:ln>
+          <a:effectLst/>
+        </p:spPr>
+        <p:style>
+          <a:lnRef idx="1">
+            <a:schemeClr val="accent1"/>
+          </a:lnRef>
+          <a:fillRef idx="3">
+            <a:schemeClr val="accent1"/>
+          </a:fillRef>
+          <a:effectRef idx="2">
+            <a:schemeClr val="accent1"/>
+          </a:effectRef>
+          <a:fontRef idx="minor">
+            <a:schemeClr val="lt1"/>
+          </a:fontRef>
+        </p:style>
+        <p:txBody>
+          <a:bodyPr rtlCol="0" anchor="ctr"/>
+          <a:lstStyle/>
+          <a:p>
+            <a:pPr algn="ctr"/>
+          </a:p>
+        </p:txBody>
+      </p:sp>
       <p:pic>
         <p:nvPicPr>
-          <p:cNvPr id="2" name="Picture 1" descr="s33a-matryoshka.png"/>
+          <p:cNvPr id="7" name="Picture 6" descr="matryoshka-wikimedia.jpg"/>
           <p:cNvPicPr>
             <a:picLocks noChangeAspect="1"/>
           </p:cNvPicPr>
@@ -40584,8 +41256,8 @@
         </p:blipFill>
         <p:spPr>
           <a:xfrm>
-            <a:off x="10317175" y="411480"/>
-            <a:ext cx="1371600" cy="1371600"/>
+            <a:off x="6905244" y="923544"/>
+            <a:ext cx="4523231" cy="3392423"/>
           </a:xfrm>
           <a:prstGeom prst="rect">
             <a:avLst/>
@@ -40594,163 +41266,46 @@
       </p:pic>
       <p:sp>
         <p:nvSpPr>
-          <p:cNvPr id="3" name="TextBox 2"/>
-          <p:cNvSpPr txBox="1"/>
-          <p:nvPr/>
-        </p:nvSpPr>
-        <p:spPr>
-          <a:xfrm>
-            <a:off x="502920" y="868680"/>
-            <a:ext cx="11247120" cy="2194560"/>
-          </a:xfrm>
-          <a:prstGeom prst="rect">
-            <a:avLst/>
-          </a:prstGeom>
-          <a:noFill/>
-        </p:spPr>
-        <p:txBody>
-          <a:bodyPr wrap="square" lIns="0" rIns="0" tIns="0" bIns="0" anchor="ctr">
+          <p:cNvPr id="8" name="TextBox 7"/>
+          <p:cNvSpPr txBox="1"/>
+          <p:nvPr/>
+        </p:nvSpPr>
+        <p:spPr>
+          <a:xfrm>
+            <a:off x="6775704" y="4425695"/>
+            <a:ext cx="4782312" cy="475488"/>
+          </a:xfrm>
+          <a:prstGeom prst="rect">
+            <a:avLst/>
+          </a:prstGeom>
+          <a:noFill/>
+        </p:spPr>
+        <p:txBody>
+          <a:bodyPr wrap="square" lIns="0" rIns="0" tIns="0" bIns="0" anchor="t">
             <a:spAutoFit/>
           </a:bodyPr>
           <a:lstStyle/>
           <a:p>
             <a:pPr algn="ctr">
               <a:lnSpc>
-                <a:spcPct val="100000"/>
-              </a:lnSpc>
-            </a:pPr>
-            <a:r>
-              <a:rPr sz="14000" b="1" i="0">
-                <a:solidFill>
-                  <a:srgbClr val="F0AB00"/>
-                </a:solidFill>
-                <a:latin typeface="Arial"/>
-              </a:rPr>
-              <a:t>Раздел 5</a:t>
-            </a:r>
-          </a:p>
-        </p:txBody>
-      </p:sp>
-      <p:sp>
-        <p:nvSpPr>
-          <p:cNvPr id="4" name="TextBox 3"/>
-          <p:cNvSpPr txBox="1"/>
-          <p:nvPr/>
-        </p:nvSpPr>
-        <p:spPr>
-          <a:xfrm>
-            <a:off x="502920" y="3246120"/>
-            <a:ext cx="11247120" cy="685800"/>
-          </a:xfrm>
-          <a:prstGeom prst="rect">
-            <a:avLst/>
-          </a:prstGeom>
-          <a:noFill/>
-        </p:spPr>
-        <p:txBody>
-          <a:bodyPr wrap="square" lIns="0" rIns="0" tIns="0" bIns="0" anchor="ctr">
-            <a:spAutoFit/>
-          </a:bodyPr>
-          <a:lstStyle/>
-          <a:p>
-            <a:pPr algn="ctr">
-              <a:lnSpc>
-                <a:spcPct val="115000"/>
-              </a:lnSpc>
-            </a:pPr>
-            <a:r>
-              <a:rPr sz="4400" b="1" i="0">
-                <a:solidFill>
-                  <a:srgbClr val="21295C"/>
-                </a:solidFill>
-                <a:latin typeface="Arial"/>
-              </a:rPr>
-              <a:t>Виды и размеры моделей</a:t>
-            </a:r>
-          </a:p>
-        </p:txBody>
-      </p:sp>
-      <p:sp>
-        <p:nvSpPr>
-          <p:cNvPr id="5" name="TextBox 4"/>
-          <p:cNvSpPr txBox="1"/>
-          <p:nvPr/>
-        </p:nvSpPr>
-        <p:spPr>
-          <a:xfrm>
-            <a:off x="502920" y="4023360"/>
-            <a:ext cx="11247120" cy="685800"/>
-          </a:xfrm>
-          <a:prstGeom prst="rect">
-            <a:avLst/>
-          </a:prstGeom>
-          <a:noFill/>
-        </p:spPr>
-        <p:txBody>
-          <a:bodyPr wrap="square" lIns="0" rIns="0" tIns="0" bIns="0" anchor="t">
-            <a:spAutoFit/>
-          </a:bodyPr>
-          <a:lstStyle/>
-          <a:p>
-            <a:pPr algn="ctr">
-              <a:lnSpc>
-                <a:spcPct val="115000"/>
-              </a:lnSpc>
-            </a:pPr>
-            <a:r>
-              <a:rPr sz="1800" b="0" i="1">
-                <a:solidFill>
-                  <a:srgbClr val="065A82"/>
-                </a:solidFill>
-                <a:latin typeface="Arial"/>
-              </a:rPr>
-              <a:t>«На чём запускаются модели разных размеров — и что каждый класс умеет»</a:t>
-            </a:r>
-          </a:p>
-        </p:txBody>
-      </p:sp>
-      <p:sp>
-        <p:nvSpPr>
-          <p:cNvPr id="6" name="TextBox 5"/>
-          <p:cNvSpPr txBox="1"/>
-          <p:nvPr/>
-        </p:nvSpPr>
-        <p:spPr>
-          <a:xfrm>
-            <a:off x="502920" y="4800600"/>
-            <a:ext cx="11247120" cy="411480"/>
-          </a:xfrm>
-          <a:prstGeom prst="rect">
-            <a:avLst/>
-          </a:prstGeom>
-          <a:noFill/>
-        </p:spPr>
-        <p:txBody>
-          <a:bodyPr wrap="square" lIns="0" rIns="0" tIns="0" bIns="0" anchor="t">
-            <a:spAutoFit/>
-          </a:bodyPr>
-          <a:lstStyle/>
-          <a:p>
-            <a:pPr algn="ctr">
-              <a:lnSpc>
-                <a:spcPct val="115000"/>
-              </a:lnSpc>
-            </a:pPr>
-            <a:r>
-              <a:rPr sz="1600" b="1" i="0">
-                <a:solidFill>
-                  <a:srgbClr val="028090"/>
-                </a:solidFill>
-                <a:latin typeface="Arial"/>
-              </a:rPr>
-              <a:t>4 разбора</a:t>
-            </a:r>
-          </a:p>
-        </p:txBody>
-      </p:sp>
-      <p:sp>
-        <p:nvSpPr>
-          <p:cNvPr id="7" name="Rounded Rectangle 6"/>
+                <a:spcPct val="105000"/>
+              </a:lnSpc>
+            </a:pPr>
+            <a:r>
+              <a:rPr sz="950" b="0" i="1">
+                <a:solidFill>
+                  <a:srgbClr val="1C7293"/>
+                </a:solidFill>
+                <a:latin typeface="Arial"/>
+              </a:rPr>
+              <a:t>Русская матрёшка — Wikimedia Commons, CC-BY-SA 3.0 / GFDL</a:t>
+            </a:r>
+          </a:p>
+        </p:txBody>
+      </p:sp>
+      <p:sp>
+        <p:nvSpPr>
+          <p:cNvPr id="9" name="Rounded Rectangle 8"/>
           <p:cNvSpPr/>
           <p:nvPr/>
         </p:nvSpPr>
@@ -40796,7 +41351,7 @@
       </p:sp>
       <p:sp>
         <p:nvSpPr>
-          <p:cNvPr id="8" name="TextBox 7"/>
+          <p:cNvPr id="10" name="TextBox 9"/>
           <p:cNvSpPr txBox="1"/>
           <p:nvPr/>
         </p:nvSpPr>
@@ -40835,7 +41390,7 @@
       </p:sp>
       <p:sp>
         <p:nvSpPr>
-          <p:cNvPr id="9" name="Right Arrow 8"/>
+          <p:cNvPr id="11" name="Right Arrow 10"/>
           <p:cNvSpPr/>
           <p:nvPr/>
         </p:nvSpPr>
@@ -40879,7 +41434,7 @@
       </p:sp>
       <p:sp>
         <p:nvSpPr>
-          <p:cNvPr id="10" name="Rounded Rectangle 9"/>
+          <p:cNvPr id="12" name="Rounded Rectangle 11"/>
           <p:cNvSpPr/>
           <p:nvPr/>
         </p:nvSpPr>
@@ -40925,7 +41480,7 @@
       </p:sp>
       <p:sp>
         <p:nvSpPr>
-          <p:cNvPr id="11" name="TextBox 10"/>
+          <p:cNvPr id="13" name="TextBox 12"/>
           <p:cNvSpPr txBox="1"/>
           <p:nvPr/>
         </p:nvSpPr>
@@ -40964,7 +41519,7 @@
       </p:sp>
       <p:sp>
         <p:nvSpPr>
-          <p:cNvPr id="12" name="Right Arrow 11"/>
+          <p:cNvPr id="14" name="Right Arrow 13"/>
           <p:cNvSpPr/>
           <p:nvPr/>
         </p:nvSpPr>
@@ -41008,7 +41563,7 @@
       </p:sp>
       <p:sp>
         <p:nvSpPr>
-          <p:cNvPr id="13" name="Rounded Rectangle 12"/>
+          <p:cNvPr id="15" name="Rounded Rectangle 14"/>
           <p:cNvSpPr/>
           <p:nvPr/>
         </p:nvSpPr>
@@ -41054,7 +41609,7 @@
       </p:sp>
       <p:sp>
         <p:nvSpPr>
-          <p:cNvPr id="14" name="TextBox 13"/>
+          <p:cNvPr id="16" name="TextBox 15"/>
           <p:cNvSpPr txBox="1"/>
           <p:nvPr/>
         </p:nvSpPr>
@@ -41093,7 +41648,7 @@
       </p:sp>
       <p:sp>
         <p:nvSpPr>
-          <p:cNvPr id="15" name="Right Arrow 14"/>
+          <p:cNvPr id="17" name="Right Arrow 16"/>
           <p:cNvSpPr/>
           <p:nvPr/>
         </p:nvSpPr>
@@ -41137,7 +41692,7 @@
       </p:sp>
       <p:sp>
         <p:nvSpPr>
-          <p:cNvPr id="16" name="Rounded Rectangle 15"/>
+          <p:cNvPr id="18" name="Rounded Rectangle 17"/>
           <p:cNvSpPr/>
           <p:nvPr/>
         </p:nvSpPr>
@@ -41183,7 +41738,7 @@
       </p:sp>
       <p:sp>
         <p:nvSpPr>
-          <p:cNvPr id="17" name="TextBox 16"/>
+          <p:cNvPr id="19" name="TextBox 18"/>
           <p:cNvSpPr txBox="1"/>
           <p:nvPr/>
         </p:nvSpPr>
@@ -41222,7 +41777,7 @@
       </p:sp>
       <p:sp>
         <p:nvSpPr>
-          <p:cNvPr id="18" name="Right Arrow 17"/>
+          <p:cNvPr id="20" name="Right Arrow 19"/>
           <p:cNvSpPr/>
           <p:nvPr/>
         </p:nvSpPr>
@@ -41266,7 +41821,7 @@
       </p:sp>
       <p:sp>
         <p:nvSpPr>
-          <p:cNvPr id="19" name="Rounded Rectangle 18"/>
+          <p:cNvPr id="21" name="Rounded Rectangle 20"/>
           <p:cNvSpPr/>
           <p:nvPr/>
         </p:nvSpPr>
@@ -41312,7 +41867,7 @@
       </p:sp>
       <p:sp>
         <p:nvSpPr>
-          <p:cNvPr id="20" name="TextBox 19"/>
+          <p:cNvPr id="22" name="TextBox 21"/>
           <p:cNvSpPr txBox="1"/>
           <p:nvPr/>
         </p:nvSpPr>
@@ -41351,7 +41906,7 @@
       </p:sp>
       <p:sp>
         <p:nvSpPr>
-          <p:cNvPr id="21" name="Right Arrow 20"/>
+          <p:cNvPr id="23" name="Right Arrow 22"/>
           <p:cNvSpPr/>
           <p:nvPr/>
         </p:nvSpPr>
@@ -41395,7 +41950,7 @@
       </p:sp>
       <p:sp>
         <p:nvSpPr>
-          <p:cNvPr id="22" name="Rounded Rectangle 21"/>
+          <p:cNvPr id="24" name="Rounded Rectangle 23"/>
           <p:cNvSpPr/>
           <p:nvPr/>
         </p:nvSpPr>
@@ -41441,7 +41996,7 @@
       </p:sp>
       <p:sp>
         <p:nvSpPr>
-          <p:cNvPr id="23" name="TextBox 22"/>
+          <p:cNvPr id="25" name="TextBox 24"/>
           <p:cNvSpPr txBox="1"/>
           <p:nvPr/>
         </p:nvSpPr>
@@ -41480,7 +42035,7 @@
       </p:sp>
       <p:sp>
         <p:nvSpPr>
-          <p:cNvPr id="24" name="Right Arrow 23"/>
+          <p:cNvPr id="26" name="Right Arrow 25"/>
           <p:cNvSpPr/>
           <p:nvPr/>
         </p:nvSpPr>
@@ -41524,7 +42079,7 @@
       </p:sp>
       <p:sp>
         <p:nvSpPr>
-          <p:cNvPr id="25" name="Rounded Rectangle 24"/>
+          <p:cNvPr id="27" name="Rounded Rectangle 26"/>
           <p:cNvSpPr/>
           <p:nvPr/>
         </p:nvSpPr>
@@ -41570,7 +42125,7 @@
       </p:sp>
       <p:sp>
         <p:nvSpPr>
-          <p:cNvPr id="26" name="TextBox 25"/>
+          <p:cNvPr id="28" name="TextBox 27"/>
           <p:cNvSpPr txBox="1"/>
           <p:nvPr/>
         </p:nvSpPr>
@@ -41609,7 +42164,7 @@
       </p:sp>
       <p:sp>
         <p:nvSpPr>
-          <p:cNvPr id="27" name="TextBox 26"/>
+          <p:cNvPr id="29" name="TextBox 28"/>
           <p:cNvSpPr txBox="1"/>
           <p:nvPr/>
         </p:nvSpPr>
@@ -41637,7 +42192,7 @@
                 </a:solidFill>
                 <a:latin typeface="Arial"/>
               </a:rPr>
-              <a:t>36/46</a:t>
+              <a:t>36/47</a:t>
             </a:r>
           </a:p>
         </p:txBody>
@@ -42274,6 +42829,34 @@
                 </a:solidFill>
                 <a:latin typeface="Arial"/>
               </a:rPr>
+              <a:t>Примеры: </a:t>
+            </a:r>
+            <a:r>
+              <a:rPr sz="1250" b="0" i="0">
+                <a:solidFill>
+                  <a:srgbClr val="21295C"/>
+                </a:solidFill>
+                <a:latin typeface="Arial"/>
+              </a:rPr>
+              <a:t>модели Llama-класса 70B, Qwen3.5-397B-A17B</a:t>
+            </a:r>
+          </a:p>
+          <a:p>
+            <a:pPr algn="l">
+              <a:lnSpc>
+                <a:spcPct val="122000"/>
+              </a:lnSpc>
+              <a:spcBef>
+                <a:spcPts val="1400"/>
+              </a:spcBef>
+            </a:pPr>
+            <a:r>
+              <a:rPr sz="1250" b="1" i="0">
+                <a:solidFill>
+                  <a:srgbClr val="028090"/>
+                </a:solidFill>
+                <a:latin typeface="Arial"/>
+              </a:rPr>
               <a:t>Железо: </a:t>
             </a:r>
             <a:r>
@@ -42648,7 +43231,7 @@
                 </a:solidFill>
                 <a:latin typeface="Arial"/>
               </a:rPr>
-              <a:t>37/46</a:t>
+              <a:t>37/47</a:t>
             </a:r>
           </a:p>
         </p:txBody>
@@ -43394,7 +43977,7 @@
                 </a:solidFill>
                 <a:latin typeface="Arial"/>
               </a:rPr>
-              <a:t>38/46</a:t>
+              <a:t>38/47</a:t>
             </a:r>
           </a:p>
         </p:txBody>
@@ -43543,31 +44126,55 @@
           </a:p>
         </p:txBody>
       </p:sp>
-      <p:sp>
-        <p:nvSpPr>
-          <p:cNvPr id="5" name="TextBox 4"/>
-          <p:cNvSpPr txBox="1"/>
-          <p:nvPr/>
-        </p:nvSpPr>
-        <p:spPr>
-          <a:xfrm>
-            <a:off x="731520" y="1938528"/>
-            <a:ext cx="5029200" cy="1554480"/>
-          </a:xfrm>
-          <a:prstGeom prst="rect">
-            <a:avLst/>
-          </a:prstGeom>
-          <a:noFill/>
-        </p:spPr>
-        <p:txBody>
-          <a:bodyPr wrap="square" lIns="0" rIns="0" tIns="0" bIns="0" anchor="t">
+      <p:pic>
+        <p:nvPicPr>
+          <p:cNvPr id="5" name="Picture 4" descr="openai.png"/>
+          <p:cNvPicPr>
+            <a:picLocks noChangeAspect="1"/>
+          </p:cNvPicPr>
+          <p:nvPr/>
+        </p:nvPicPr>
+        <p:blipFill>
+          <a:blip r:embed="rId2"/>
+          <a:stretch>
+            <a:fillRect/>
+          </a:stretch>
+        </p:blipFill>
+        <p:spPr>
+          <a:xfrm>
+            <a:off x="731520" y="2023110"/>
+            <a:ext cx="256032" cy="256032"/>
+          </a:xfrm>
+          <a:prstGeom prst="rect">
+            <a:avLst/>
+          </a:prstGeom>
+        </p:spPr>
+      </p:pic>
+      <p:sp>
+        <p:nvSpPr>
+          <p:cNvPr id="6" name="TextBox 5"/>
+          <p:cNvSpPr txBox="1"/>
+          <p:nvPr/>
+        </p:nvSpPr>
+        <p:spPr>
+          <a:xfrm>
+            <a:off x="1069848" y="1956816"/>
+            <a:ext cx="4690872" cy="388620"/>
+          </a:xfrm>
+          <a:prstGeom prst="rect">
+            <a:avLst/>
+          </a:prstGeom>
+          <a:noFill/>
+        </p:spPr>
+        <p:txBody>
+          <a:bodyPr wrap="square" lIns="0" rIns="0" tIns="0" bIns="0" anchor="ctr">
             <a:spAutoFit/>
           </a:bodyPr>
           <a:lstStyle/>
           <a:p>
             <a:pPr algn="l">
               <a:lnSpc>
-                <a:spcPct val="118000"/>
+                <a:spcPct val="110000"/>
               </a:lnSpc>
             </a:pPr>
             <a:r>
@@ -43577,17 +44184,61 @@
                 </a:solidFill>
                 <a:latin typeface="Arial"/>
               </a:rPr>
-              <a:t>• OpenAI: GPT-5.6 — Luna → Terra → Sol</a:t>
-            </a:r>
-          </a:p>
+              <a:t>OpenAI: GPT-5.6 — Luna → Terra → Sol</a:t>
+            </a:r>
+          </a:p>
+        </p:txBody>
+      </p:sp>
+      <p:pic>
+        <p:nvPicPr>
+          <p:cNvPr id="7" name="Picture 6" descr="anthropic.png"/>
+          <p:cNvPicPr>
+            <a:picLocks noChangeAspect="1"/>
+          </p:cNvPicPr>
+          <p:nvPr/>
+        </p:nvPicPr>
+        <p:blipFill>
+          <a:blip r:embed="rId3"/>
+          <a:stretch>
+            <a:fillRect/>
+          </a:stretch>
+        </p:blipFill>
+        <p:spPr>
+          <a:xfrm>
+            <a:off x="731520" y="2411729"/>
+            <a:ext cx="256032" cy="256032"/>
+          </a:xfrm>
+          <a:prstGeom prst="rect">
+            <a:avLst/>
+          </a:prstGeom>
+        </p:spPr>
+      </p:pic>
+      <p:sp>
+        <p:nvSpPr>
+          <p:cNvPr id="8" name="TextBox 7"/>
+          <p:cNvSpPr txBox="1"/>
+          <p:nvPr/>
+        </p:nvSpPr>
+        <p:spPr>
+          <a:xfrm>
+            <a:off x="1069848" y="2345436"/>
+            <a:ext cx="4690872" cy="388620"/>
+          </a:xfrm>
+          <a:prstGeom prst="rect">
+            <a:avLst/>
+          </a:prstGeom>
+          <a:noFill/>
+        </p:spPr>
+        <p:txBody>
+          <a:bodyPr wrap="square" lIns="0" rIns="0" tIns="0" bIns="0" anchor="ctr">
+            <a:spAutoFit/>
+          </a:bodyPr>
+          <a:lstStyle/>
           <a:p>
             <a:pPr algn="l">
               <a:lnSpc>
-                <a:spcPct val="118000"/>
-              </a:lnSpc>
-              <a:spcBef>
-                <a:spcPts val="600"/>
-              </a:spcBef>
+                <a:spcPct val="110000"/>
+              </a:lnSpc>
             </a:pPr>
             <a:r>
               <a:rPr sz="1250" b="0" i="0">
@@ -43596,17 +44247,61 @@
                 </a:solidFill>
                 <a:latin typeface="Arial"/>
               </a:rPr>
-              <a:t>• Anthropic: Claude Fable 5 · Opus 5</a:t>
-            </a:r>
-          </a:p>
+              <a:t>Anthropic: Claude Fable 5 · Opus 5</a:t>
+            </a:r>
+          </a:p>
+        </p:txBody>
+      </p:sp>
+      <p:pic>
+        <p:nvPicPr>
+          <p:cNvPr id="9" name="Picture 8" descr="google.png"/>
+          <p:cNvPicPr>
+            <a:picLocks noChangeAspect="1"/>
+          </p:cNvPicPr>
+          <p:nvPr/>
+        </p:nvPicPr>
+        <p:blipFill>
+          <a:blip r:embed="rId4"/>
+          <a:stretch>
+            <a:fillRect/>
+          </a:stretch>
+        </p:blipFill>
+        <p:spPr>
+          <a:xfrm>
+            <a:off x="731520" y="2800349"/>
+            <a:ext cx="256032" cy="256032"/>
+          </a:xfrm>
+          <a:prstGeom prst="rect">
+            <a:avLst/>
+          </a:prstGeom>
+        </p:spPr>
+      </p:pic>
+      <p:sp>
+        <p:nvSpPr>
+          <p:cNvPr id="10" name="TextBox 9"/>
+          <p:cNvSpPr txBox="1"/>
+          <p:nvPr/>
+        </p:nvSpPr>
+        <p:spPr>
+          <a:xfrm>
+            <a:off x="1069848" y="2734056"/>
+            <a:ext cx="4690872" cy="388620"/>
+          </a:xfrm>
+          <a:prstGeom prst="rect">
+            <a:avLst/>
+          </a:prstGeom>
+          <a:noFill/>
+        </p:spPr>
+        <p:txBody>
+          <a:bodyPr wrap="square" lIns="0" rIns="0" tIns="0" bIns="0" anchor="ctr">
+            <a:spAutoFit/>
+          </a:bodyPr>
+          <a:lstStyle/>
           <a:p>
             <a:pPr algn="l">
               <a:lnSpc>
-                <a:spcPct val="118000"/>
-              </a:lnSpc>
-              <a:spcBef>
-                <a:spcPts val="600"/>
-              </a:spcBef>
+                <a:spcPct val="110000"/>
+              </a:lnSpc>
             </a:pPr>
             <a:r>
               <a:rPr sz="1250" b="0" i="0">
@@ -43615,17 +44310,61 @@
                 </a:solidFill>
                 <a:latin typeface="Arial"/>
               </a:rPr>
-              <a:t>• Google: Gemini 3.5 Pro (окно 2 млн, Deep Think)</a:t>
-            </a:r>
-          </a:p>
+              <a:t>Google: Gemini 3.5 Pro (окно 2 млн, Deep Think)</a:t>
+            </a:r>
+          </a:p>
+        </p:txBody>
+      </p:sp>
+      <p:pic>
+        <p:nvPicPr>
+          <p:cNvPr id="11" name="Picture 10" descr="xai.png"/>
+          <p:cNvPicPr>
+            <a:picLocks noChangeAspect="1"/>
+          </p:cNvPicPr>
+          <p:nvPr/>
+        </p:nvPicPr>
+        <p:blipFill>
+          <a:blip r:embed="rId5"/>
+          <a:stretch>
+            <a:fillRect/>
+          </a:stretch>
+        </p:blipFill>
+        <p:spPr>
+          <a:xfrm>
+            <a:off x="731520" y="3188969"/>
+            <a:ext cx="256032" cy="256032"/>
+          </a:xfrm>
+          <a:prstGeom prst="rect">
+            <a:avLst/>
+          </a:prstGeom>
+        </p:spPr>
+      </p:pic>
+      <p:sp>
+        <p:nvSpPr>
+          <p:cNvPr id="12" name="TextBox 11"/>
+          <p:cNvSpPr txBox="1"/>
+          <p:nvPr/>
+        </p:nvSpPr>
+        <p:spPr>
+          <a:xfrm>
+            <a:off x="1069848" y="3122675"/>
+            <a:ext cx="4690872" cy="388620"/>
+          </a:xfrm>
+          <a:prstGeom prst="rect">
+            <a:avLst/>
+          </a:prstGeom>
+          <a:noFill/>
+        </p:spPr>
+        <p:txBody>
+          <a:bodyPr wrap="square" lIns="0" rIns="0" tIns="0" bIns="0" anchor="ctr">
+            <a:spAutoFit/>
+          </a:bodyPr>
+          <a:lstStyle/>
           <a:p>
             <a:pPr algn="l">
               <a:lnSpc>
-                <a:spcPct val="118000"/>
-              </a:lnSpc>
-              <a:spcBef>
-                <a:spcPts val="600"/>
-              </a:spcBef>
+                <a:spcPct val="110000"/>
+              </a:lnSpc>
             </a:pPr>
             <a:r>
               <a:rPr sz="1250" b="0" i="0">
@@ -43634,14 +44373,14 @@
                 </a:solidFill>
                 <a:latin typeface="Arial"/>
               </a:rPr>
-              <a:t>• xAI: Grok 4.3</a:t>
-            </a:r>
-          </a:p>
-        </p:txBody>
-      </p:sp>
-      <p:sp>
-        <p:nvSpPr>
-          <p:cNvPr id="6" name="Rounded Rectangle 5"/>
+              <a:t>xAI: Grok 4.3</a:t>
+            </a:r>
+          </a:p>
+        </p:txBody>
+      </p:sp>
+      <p:sp>
+        <p:nvSpPr>
+          <p:cNvPr id="13" name="Rounded Rectangle 12"/>
           <p:cNvSpPr/>
           <p:nvPr/>
         </p:nvSpPr>
@@ -43689,7 +44428,7 @@
       </p:sp>
       <p:sp>
         <p:nvSpPr>
-          <p:cNvPr id="7" name="TextBox 6"/>
+          <p:cNvPr id="14" name="TextBox 13"/>
           <p:cNvSpPr txBox="1"/>
           <p:nvPr/>
         </p:nvSpPr>
@@ -43726,31 +44465,55 @@
           </a:p>
         </p:txBody>
       </p:sp>
-      <p:sp>
-        <p:nvSpPr>
-          <p:cNvPr id="8" name="TextBox 7"/>
-          <p:cNvSpPr txBox="1"/>
-          <p:nvPr/>
-        </p:nvSpPr>
-        <p:spPr>
-          <a:xfrm>
-            <a:off x="6446520" y="1938528"/>
-            <a:ext cx="5029200" cy="1554480"/>
-          </a:xfrm>
-          <a:prstGeom prst="rect">
-            <a:avLst/>
-          </a:prstGeom>
-          <a:noFill/>
-        </p:spPr>
-        <p:txBody>
-          <a:bodyPr wrap="square" lIns="0" rIns="0" tIns="0" bIns="0" anchor="t">
+      <p:pic>
+        <p:nvPicPr>
+          <p:cNvPr id="15" name="Picture 14" descr="deepseek.png"/>
+          <p:cNvPicPr>
+            <a:picLocks noChangeAspect="1"/>
+          </p:cNvPicPr>
+          <p:nvPr/>
+        </p:nvPicPr>
+        <p:blipFill>
+          <a:blip r:embed="rId6"/>
+          <a:stretch>
+            <a:fillRect/>
+          </a:stretch>
+        </p:blipFill>
+        <p:spPr>
+          <a:xfrm>
+            <a:off x="6446520" y="2087880"/>
+            <a:ext cx="256032" cy="256032"/>
+          </a:xfrm>
+          <a:prstGeom prst="rect">
+            <a:avLst/>
+          </a:prstGeom>
+        </p:spPr>
+      </p:pic>
+      <p:sp>
+        <p:nvSpPr>
+          <p:cNvPr id="16" name="TextBox 15"/>
+          <p:cNvSpPr txBox="1"/>
+          <p:nvPr/>
+        </p:nvSpPr>
+        <p:spPr>
+          <a:xfrm>
+            <a:off x="6784848" y="1956816"/>
+            <a:ext cx="4690872" cy="518160"/>
+          </a:xfrm>
+          <a:prstGeom prst="rect">
+            <a:avLst/>
+          </a:prstGeom>
+          <a:noFill/>
+        </p:spPr>
+        <p:txBody>
+          <a:bodyPr wrap="square" lIns="0" rIns="0" tIns="0" bIns="0" anchor="ctr">
             <a:spAutoFit/>
           </a:bodyPr>
           <a:lstStyle/>
           <a:p>
             <a:pPr algn="l">
               <a:lnSpc>
-                <a:spcPct val="118000"/>
+                <a:spcPct val="110000"/>
               </a:lnSpc>
             </a:pPr>
             <a:r>
@@ -43760,17 +44523,61 @@
                 </a:solidFill>
                 <a:latin typeface="Arial"/>
               </a:rPr>
-              <a:t>• DeepSeek V4 (Pro 1.6 трлн / Flash 284 млрд)</a:t>
-            </a:r>
-          </a:p>
+              <a:t>DeepSeek V4 (Pro 1.6 трлн / Flash 284 млрд)</a:t>
+            </a:r>
+          </a:p>
+        </p:txBody>
+      </p:sp>
+      <p:pic>
+        <p:nvPicPr>
+          <p:cNvPr id="17" name="Picture 16" descr="qwen.png"/>
+          <p:cNvPicPr>
+            <a:picLocks noChangeAspect="1"/>
+          </p:cNvPicPr>
+          <p:nvPr/>
+        </p:nvPicPr>
+        <p:blipFill>
+          <a:blip r:embed="rId7"/>
+          <a:stretch>
+            <a:fillRect/>
+          </a:stretch>
+        </p:blipFill>
+        <p:spPr>
+          <a:xfrm>
+            <a:off x="6446520" y="2606040"/>
+            <a:ext cx="256032" cy="256032"/>
+          </a:xfrm>
+          <a:prstGeom prst="rect">
+            <a:avLst/>
+          </a:prstGeom>
+        </p:spPr>
+      </p:pic>
+      <p:sp>
+        <p:nvSpPr>
+          <p:cNvPr id="18" name="TextBox 17"/>
+          <p:cNvSpPr txBox="1"/>
+          <p:nvPr/>
+        </p:nvSpPr>
+        <p:spPr>
+          <a:xfrm>
+            <a:off x="6784848" y="2474976"/>
+            <a:ext cx="4690872" cy="518160"/>
+          </a:xfrm>
+          <a:prstGeom prst="rect">
+            <a:avLst/>
+          </a:prstGeom>
+          <a:noFill/>
+        </p:spPr>
+        <p:txBody>
+          <a:bodyPr wrap="square" lIns="0" rIns="0" tIns="0" bIns="0" anchor="ctr">
+            <a:spAutoFit/>
+          </a:bodyPr>
+          <a:lstStyle/>
           <a:p>
             <a:pPr algn="l">
               <a:lnSpc>
-                <a:spcPct val="118000"/>
-              </a:lnSpc>
-              <a:spcBef>
-                <a:spcPts val="600"/>
-              </a:spcBef>
+                <a:spcPct val="110000"/>
+              </a:lnSpc>
             </a:pPr>
             <a:r>
               <a:rPr sz="1250" b="0" i="0">
@@ -43779,17 +44586,37 @@
                 </a:solidFill>
                 <a:latin typeface="Arial"/>
               </a:rPr>
-              <a:t>• Qwen 3.8-Max — первая открытая из линейки Max</a:t>
-            </a:r>
-          </a:p>
+              <a:t>Qwen 3.8-Max — первая открытая из линейки Max</a:t>
+            </a:r>
+          </a:p>
+        </p:txBody>
+      </p:sp>
+      <p:sp>
+        <p:nvSpPr>
+          <p:cNvPr id="19" name="TextBox 18"/>
+          <p:cNvSpPr txBox="1"/>
+          <p:nvPr/>
+        </p:nvSpPr>
+        <p:spPr>
+          <a:xfrm>
+            <a:off x="6446520" y="2993136"/>
+            <a:ext cx="5029200" cy="518160"/>
+          </a:xfrm>
+          <a:prstGeom prst="rect">
+            <a:avLst/>
+          </a:prstGeom>
+          <a:noFill/>
+        </p:spPr>
+        <p:txBody>
+          <a:bodyPr wrap="square" lIns="0" rIns="0" tIns="0" bIns="0" anchor="ctr">
+            <a:spAutoFit/>
+          </a:bodyPr>
+          <a:lstStyle/>
           <a:p>
             <a:pPr algn="l">
               <a:lnSpc>
-                <a:spcPct val="118000"/>
-              </a:lnSpc>
-              <a:spcBef>
-                <a:spcPts val="600"/>
-              </a:spcBef>
+                <a:spcPct val="110000"/>
+              </a:lnSpc>
             </a:pPr>
             <a:r>
               <a:rPr sz="1250" b="1" i="0">
@@ -43798,14 +44625,14 @@
                 </a:solidFill>
                 <a:latin typeface="Arial"/>
               </a:rPr>
-              <a:t>• Kimi K2.6 (1 трлн) · Kimi K3 (2.8 трлн — крупнейшая открытая)</a:t>
-            </a:r>
-          </a:p>
-        </p:txBody>
-      </p:sp>
-      <p:sp>
-        <p:nvSpPr>
-          <p:cNvPr id="9" name="Rounded Rectangle 8"/>
+              <a:t>Kimi K2.6 (1 трлн) · Kimi K3 (2.8 трлн — крупнейшая открытая)</a:t>
+            </a:r>
+          </a:p>
+        </p:txBody>
+      </p:sp>
+      <p:sp>
+        <p:nvSpPr>
+          <p:cNvPr id="20" name="Rounded Rectangle 19"/>
           <p:cNvSpPr/>
           <p:nvPr/>
         </p:nvSpPr>
@@ -43853,7 +44680,7 @@
       </p:sp>
       <p:sp>
         <p:nvSpPr>
-          <p:cNvPr id="10" name="TextBox 9"/>
+          <p:cNvPr id="21" name="TextBox 20"/>
           <p:cNvSpPr txBox="1"/>
           <p:nvPr/>
         </p:nvSpPr>
@@ -43892,7 +44719,7 @@
       </p:sp>
       <p:sp>
         <p:nvSpPr>
-          <p:cNvPr id="11" name="TextBox 10"/>
+          <p:cNvPr id="22" name="TextBox 21"/>
           <p:cNvSpPr txBox="1"/>
           <p:nvPr/>
         </p:nvSpPr>
@@ -43931,7 +44758,7 @@
       </p:sp>
       <p:sp>
         <p:nvSpPr>
-          <p:cNvPr id="12" name="Rounded Rectangle 11"/>
+          <p:cNvPr id="23" name="Rounded Rectangle 22"/>
           <p:cNvSpPr/>
           <p:nvPr/>
         </p:nvSpPr>
@@ -43977,7 +44804,7 @@
       </p:sp>
       <p:sp>
         <p:nvSpPr>
-          <p:cNvPr id="13" name="Rounded Rectangle 12"/>
+          <p:cNvPr id="24" name="Rounded Rectangle 23"/>
           <p:cNvSpPr/>
           <p:nvPr/>
         </p:nvSpPr>
@@ -44023,7 +44850,7 @@
       </p:sp>
       <p:sp>
         <p:nvSpPr>
-          <p:cNvPr id="14" name="Rounded Rectangle 13"/>
+          <p:cNvPr id="25" name="Rounded Rectangle 24"/>
           <p:cNvSpPr/>
           <p:nvPr/>
         </p:nvSpPr>
@@ -44069,7 +44896,7 @@
       </p:sp>
       <p:sp>
         <p:nvSpPr>
-          <p:cNvPr id="15" name="TextBox 14"/>
+          <p:cNvPr id="26" name="TextBox 25"/>
           <p:cNvSpPr txBox="1"/>
           <p:nvPr/>
         </p:nvSpPr>
@@ -44108,7 +44935,7 @@
       </p:sp>
       <p:sp>
         <p:nvSpPr>
-          <p:cNvPr id="16" name="TextBox 15"/>
+          <p:cNvPr id="27" name="TextBox 26"/>
           <p:cNvSpPr txBox="1"/>
           <p:nvPr/>
         </p:nvSpPr>
@@ -44147,7 +44974,7 @@
       </p:sp>
       <p:sp>
         <p:nvSpPr>
-          <p:cNvPr id="17" name="TextBox 16"/>
+          <p:cNvPr id="28" name="TextBox 27"/>
           <p:cNvSpPr txBox="1"/>
           <p:nvPr/>
         </p:nvSpPr>
@@ -44195,7 +45022,7 @@
       </p:sp>
       <p:sp>
         <p:nvSpPr>
-          <p:cNvPr id="18" name="Rounded Rectangle 17"/>
+          <p:cNvPr id="29" name="Rounded Rectangle 28"/>
           <p:cNvSpPr/>
           <p:nvPr/>
         </p:nvSpPr>
@@ -44243,7 +45070,7 @@
       </p:sp>
       <p:sp>
         <p:nvSpPr>
-          <p:cNvPr id="19" name="TextBox 18"/>
+          <p:cNvPr id="30" name="TextBox 29"/>
           <p:cNvSpPr txBox="1"/>
           <p:nvPr/>
         </p:nvSpPr>
@@ -44282,7 +45109,7 @@
       </p:sp>
       <p:sp>
         <p:nvSpPr>
-          <p:cNvPr id="20" name="TextBox 19"/>
+          <p:cNvPr id="31" name="TextBox 30"/>
           <p:cNvSpPr txBox="1"/>
           <p:nvPr/>
         </p:nvSpPr>
@@ -44310,7 +45137,7 @@
                 </a:solidFill>
                 <a:latin typeface="Arial"/>
               </a:rPr>
-              <a:t>39/46</a:t>
+              <a:t>39/47</a:t>
             </a:r>
           </a:p>
         </p:txBody>
@@ -44942,7 +45769,7 @@
                 </a:solidFill>
                 <a:latin typeface="Arial"/>
               </a:rPr>
-              <a:t>4/46</a:t>
+              <a:t>4/47</a:t>
             </a:r>
           </a:p>
         </p:txBody>
@@ -45784,7 +46611,7 @@
                 </a:solidFill>
                 <a:latin typeface="Arial"/>
               </a:rPr>
-              <a:t>40/46</a:t>
+              <a:t>40/47</a:t>
             </a:r>
           </a:p>
         </p:txBody>
@@ -45815,9 +46642,213 @@
         <p:nvPr/>
       </p:nvGrpSpPr>
       <p:grpSpPr/>
+      <p:sp>
+        <p:nvSpPr>
+          <p:cNvPr id="2" name="TextBox 1"/>
+          <p:cNvSpPr txBox="1"/>
+          <p:nvPr/>
+        </p:nvSpPr>
+        <p:spPr>
+          <a:xfrm>
+            <a:off x="502920" y="685800"/>
+            <a:ext cx="5806440" cy="1737360"/>
+          </a:xfrm>
+          <a:prstGeom prst="rect">
+            <a:avLst/>
+          </a:prstGeom>
+          <a:noFill/>
+        </p:spPr>
+        <p:txBody>
+          <a:bodyPr wrap="square" lIns="0" rIns="0" tIns="0" bIns="0" anchor="ctr">
+            <a:spAutoFit/>
+          </a:bodyPr>
+          <a:lstStyle/>
+          <a:p>
+            <a:pPr algn="l">
+              <a:lnSpc>
+                <a:spcPct val="100000"/>
+              </a:lnSpc>
+            </a:pPr>
+            <a:r>
+              <a:rPr sz="9200" b="1" i="0">
+                <a:solidFill>
+                  <a:srgbClr val="F0AB00"/>
+                </a:solidFill>
+                <a:latin typeface="Arial"/>
+              </a:rPr>
+              <a:t>Раздел 6</a:t>
+            </a:r>
+          </a:p>
+        </p:txBody>
+      </p:sp>
+      <p:sp>
+        <p:nvSpPr>
+          <p:cNvPr id="3" name="TextBox 2"/>
+          <p:cNvSpPr txBox="1"/>
+          <p:nvPr/>
+        </p:nvSpPr>
+        <p:spPr>
+          <a:xfrm>
+            <a:off x="502920" y="2395728"/>
+            <a:ext cx="5806440" cy="960120"/>
+          </a:xfrm>
+          <a:prstGeom prst="rect">
+            <a:avLst/>
+          </a:prstGeom>
+          <a:noFill/>
+        </p:spPr>
+        <p:txBody>
+          <a:bodyPr wrap="square" lIns="0" rIns="0" tIns="0" bIns="0" anchor="t">
+            <a:spAutoFit/>
+          </a:bodyPr>
+          <a:lstStyle/>
+          <a:p>
+            <a:pPr algn="l">
+              <a:lnSpc>
+                <a:spcPct val="108000"/>
+              </a:lnSpc>
+            </a:pPr>
+            <a:r>
+              <a:rPr sz="3300" b="1" i="0">
+                <a:solidFill>
+                  <a:srgbClr val="21295C"/>
+                </a:solidFill>
+                <a:latin typeface="Arial"/>
+              </a:rPr>
+              <a:t>Финал</a:t>
+            </a:r>
+          </a:p>
+        </p:txBody>
+      </p:sp>
+      <p:sp>
+        <p:nvSpPr>
+          <p:cNvPr id="4" name="TextBox 3"/>
+          <p:cNvSpPr txBox="1"/>
+          <p:nvPr/>
+        </p:nvSpPr>
+        <p:spPr>
+          <a:xfrm>
+            <a:off x="502920" y="3474720"/>
+            <a:ext cx="5806440" cy="1234440"/>
+          </a:xfrm>
+          <a:prstGeom prst="rect">
+            <a:avLst/>
+          </a:prstGeom>
+          <a:noFill/>
+        </p:spPr>
+        <p:txBody>
+          <a:bodyPr wrap="square" lIns="0" rIns="0" tIns="0" bIns="0" anchor="t">
+            <a:spAutoFit/>
+          </a:bodyPr>
+          <a:lstStyle/>
+          <a:p>
+            <a:pPr algn="l">
+              <a:lnSpc>
+                <a:spcPct val="120000"/>
+              </a:lnSpc>
+            </a:pPr>
+            <a:r>
+              <a:rPr sz="1800" b="0" i="1">
+                <a:solidFill>
+                  <a:srgbClr val="065A82"/>
+                </a:solidFill>
+                <a:latin typeface="Arial"/>
+              </a:rPr>
+              <a:t>«Конвейер собран целиком: сводка механизмов и границ — и решение, когда LLM не тот инструмент»</a:t>
+            </a:r>
+          </a:p>
+        </p:txBody>
+      </p:sp>
+      <p:sp>
+        <p:nvSpPr>
+          <p:cNvPr id="5" name="TextBox 4"/>
+          <p:cNvSpPr txBox="1"/>
+          <p:nvPr/>
+        </p:nvSpPr>
+        <p:spPr>
+          <a:xfrm>
+            <a:off x="502920" y="4846320"/>
+            <a:ext cx="5806440" cy="411480"/>
+          </a:xfrm>
+          <a:prstGeom prst="rect">
+            <a:avLst/>
+          </a:prstGeom>
+          <a:noFill/>
+        </p:spPr>
+        <p:txBody>
+          <a:bodyPr wrap="square" lIns="0" rIns="0" tIns="0" bIns="0" anchor="t">
+            <a:spAutoFit/>
+          </a:bodyPr>
+          <a:lstStyle/>
+          <a:p>
+            <a:pPr algn="l">
+              <a:lnSpc>
+                <a:spcPct val="115000"/>
+              </a:lnSpc>
+            </a:pPr>
+            <a:r>
+              <a:rPr sz="1600" b="1" i="0">
+                <a:solidFill>
+                  <a:srgbClr val="028090"/>
+                </a:solidFill>
+                <a:latin typeface="Arial"/>
+              </a:rPr>
+              <a:t>6 разборов</a:t>
+            </a:r>
+          </a:p>
+        </p:txBody>
+      </p:sp>
+      <p:sp>
+        <p:nvSpPr>
+          <p:cNvPr id="6" name="Rounded Rectangle 5"/>
+          <p:cNvSpPr/>
+          <p:nvPr/>
+        </p:nvSpPr>
+        <p:spPr>
+          <a:xfrm>
+            <a:off x="6629400" y="777240"/>
+            <a:ext cx="5074920" cy="4160520"/>
+          </a:xfrm>
+          <a:prstGeom prst="roundRect">
+            <a:avLst>
+              <a:gd name="adj" fmla="val 7326"/>
+            </a:avLst>
+          </a:prstGeom>
+          <a:solidFill>
+            <a:srgbClr val="FFFFFF"/>
+          </a:solidFill>
+          <a:ln w="19050">
+            <a:solidFill>
+              <a:srgbClr val="1C7293"/>
+            </a:solidFill>
+          </a:ln>
+          <a:effectLst/>
+        </p:spPr>
+        <p:style>
+          <a:lnRef idx="1">
+            <a:schemeClr val="accent1"/>
+          </a:lnRef>
+          <a:fillRef idx="3">
+            <a:schemeClr val="accent1"/>
+          </a:fillRef>
+          <a:effectRef idx="2">
+            <a:schemeClr val="accent1"/>
+          </a:effectRef>
+          <a:fontRef idx="minor">
+            <a:schemeClr val="lt1"/>
+          </a:fontRef>
+        </p:style>
+        <p:txBody>
+          <a:bodyPr rtlCol="0" anchor="ctr"/>
+          <a:lstStyle/>
+          <a:p>
+            <a:pPr algn="ctr"/>
+          </a:p>
+        </p:txBody>
+      </p:sp>
       <p:pic>
         <p:nvPicPr>
-          <p:cNvPr id="2" name="Picture 1" descr="s35a-puzzle.png"/>
+          <p:cNvPr id="7" name="Picture 6" descr="this-is-fine-meme-fb.jpg"/>
           <p:cNvPicPr>
             <a:picLocks noChangeAspect="1"/>
           </p:cNvPicPr>
@@ -45831,8 +46862,8 @@
         </p:blipFill>
         <p:spPr>
           <a:xfrm>
-            <a:off x="10317175" y="411480"/>
-            <a:ext cx="1371600" cy="1371600"/>
+            <a:off x="6775704" y="1280708"/>
+            <a:ext cx="4782312" cy="2678095"/>
           </a:xfrm>
           <a:prstGeom prst="rect">
             <a:avLst/>
@@ -45841,163 +46872,46 @@
       </p:pic>
       <p:sp>
         <p:nvSpPr>
-          <p:cNvPr id="3" name="TextBox 2"/>
-          <p:cNvSpPr txBox="1"/>
-          <p:nvPr/>
-        </p:nvSpPr>
-        <p:spPr>
-          <a:xfrm>
-            <a:off x="502920" y="868680"/>
-            <a:ext cx="11247120" cy="2194560"/>
-          </a:xfrm>
-          <a:prstGeom prst="rect">
-            <a:avLst/>
-          </a:prstGeom>
-          <a:noFill/>
-        </p:spPr>
-        <p:txBody>
-          <a:bodyPr wrap="square" lIns="0" rIns="0" tIns="0" bIns="0" anchor="ctr">
+          <p:cNvPr id="8" name="TextBox 7"/>
+          <p:cNvSpPr txBox="1"/>
+          <p:nvPr/>
+        </p:nvSpPr>
+        <p:spPr>
+          <a:xfrm>
+            <a:off x="6775704" y="4425695"/>
+            <a:ext cx="4782312" cy="475488"/>
+          </a:xfrm>
+          <a:prstGeom prst="rect">
+            <a:avLst/>
+          </a:prstGeom>
+          <a:noFill/>
+        </p:spPr>
+        <p:txBody>
+          <a:bodyPr wrap="square" lIns="0" rIns="0" tIns="0" bIns="0" anchor="t">
             <a:spAutoFit/>
           </a:bodyPr>
           <a:lstStyle/>
           <a:p>
             <a:pPr algn="ctr">
               <a:lnSpc>
-                <a:spcPct val="100000"/>
-              </a:lnSpc>
-            </a:pPr>
-            <a:r>
-              <a:rPr sz="14000" b="1" i="0">
-                <a:solidFill>
-                  <a:srgbClr val="F0AB00"/>
-                </a:solidFill>
-                <a:latin typeface="Arial"/>
-              </a:rPr>
-              <a:t>Раздел 6</a:t>
-            </a:r>
-          </a:p>
-        </p:txBody>
-      </p:sp>
-      <p:sp>
-        <p:nvSpPr>
-          <p:cNvPr id="4" name="TextBox 3"/>
-          <p:cNvSpPr txBox="1"/>
-          <p:nvPr/>
-        </p:nvSpPr>
-        <p:spPr>
-          <a:xfrm>
-            <a:off x="502920" y="3246120"/>
-            <a:ext cx="11247120" cy="685800"/>
-          </a:xfrm>
-          <a:prstGeom prst="rect">
-            <a:avLst/>
-          </a:prstGeom>
-          <a:noFill/>
-        </p:spPr>
-        <p:txBody>
-          <a:bodyPr wrap="square" lIns="0" rIns="0" tIns="0" bIns="0" anchor="ctr">
-            <a:spAutoFit/>
-          </a:bodyPr>
-          <a:lstStyle/>
-          <a:p>
-            <a:pPr algn="ctr">
-              <a:lnSpc>
-                <a:spcPct val="115000"/>
-              </a:lnSpc>
-            </a:pPr>
-            <a:r>
-              <a:rPr sz="4400" b="1" i="0">
-                <a:solidFill>
-                  <a:srgbClr val="21295C"/>
-                </a:solidFill>
-                <a:latin typeface="Arial"/>
-              </a:rPr>
-              <a:t>Финал</a:t>
-            </a:r>
-          </a:p>
-        </p:txBody>
-      </p:sp>
-      <p:sp>
-        <p:nvSpPr>
-          <p:cNvPr id="5" name="TextBox 4"/>
-          <p:cNvSpPr txBox="1"/>
-          <p:nvPr/>
-        </p:nvSpPr>
-        <p:spPr>
-          <a:xfrm>
-            <a:off x="502920" y="4023360"/>
-            <a:ext cx="11247120" cy="685800"/>
-          </a:xfrm>
-          <a:prstGeom prst="rect">
-            <a:avLst/>
-          </a:prstGeom>
-          <a:noFill/>
-        </p:spPr>
-        <p:txBody>
-          <a:bodyPr wrap="square" lIns="0" rIns="0" tIns="0" bIns="0" anchor="t">
-            <a:spAutoFit/>
-          </a:bodyPr>
-          <a:lstStyle/>
-          <a:p>
-            <a:pPr algn="ctr">
-              <a:lnSpc>
-                <a:spcPct val="115000"/>
-              </a:lnSpc>
-            </a:pPr>
-            <a:r>
-              <a:rPr sz="1800" b="0" i="1">
-                <a:solidFill>
-                  <a:srgbClr val="065A82"/>
-                </a:solidFill>
-                <a:latin typeface="Arial"/>
-              </a:rPr>
-              <a:t>«Конвейер собран целиком: сводка механизмов и границ — и решение, когда LLM не тот инструмент»</a:t>
-            </a:r>
-          </a:p>
-        </p:txBody>
-      </p:sp>
-      <p:sp>
-        <p:nvSpPr>
-          <p:cNvPr id="6" name="TextBox 5"/>
-          <p:cNvSpPr txBox="1"/>
-          <p:nvPr/>
-        </p:nvSpPr>
-        <p:spPr>
-          <a:xfrm>
-            <a:off x="502920" y="4800600"/>
-            <a:ext cx="11247120" cy="411480"/>
-          </a:xfrm>
-          <a:prstGeom prst="rect">
-            <a:avLst/>
-          </a:prstGeom>
-          <a:noFill/>
-        </p:spPr>
-        <p:txBody>
-          <a:bodyPr wrap="square" lIns="0" rIns="0" tIns="0" bIns="0" anchor="t">
-            <a:spAutoFit/>
-          </a:bodyPr>
-          <a:lstStyle/>
-          <a:p>
-            <a:pPr algn="ctr">
-              <a:lnSpc>
-                <a:spcPct val="115000"/>
-              </a:lnSpc>
-            </a:pPr>
-            <a:r>
-              <a:rPr sz="1600" b="1" i="0">
-                <a:solidFill>
-                  <a:srgbClr val="028090"/>
-                </a:solidFill>
-                <a:latin typeface="Arial"/>
-              </a:rPr>
-              <a:t>6 разборов</a:t>
-            </a:r>
-          </a:p>
-        </p:txBody>
-      </p:sp>
-      <p:sp>
-        <p:nvSpPr>
-          <p:cNvPr id="7" name="Rounded Rectangle 6"/>
+                <a:spcPct val="105000"/>
+              </a:lnSpc>
+            </a:pPr>
+            <a:r>
+              <a:rPr sz="950" b="0" i="1">
+                <a:solidFill>
+                  <a:srgbClr val="1C7293"/>
+                </a:solidFill>
+                <a:latin typeface="Arial"/>
+              </a:rPr>
+              <a:t>«This is fine» — K.C. Green, комикс Gunshow #648, 2013</a:t>
+            </a:r>
+          </a:p>
+        </p:txBody>
+      </p:sp>
+      <p:sp>
+        <p:nvSpPr>
+          <p:cNvPr id="9" name="Rounded Rectangle 8"/>
           <p:cNvSpPr/>
           <p:nvPr/>
         </p:nvSpPr>
@@ -46043,7 +46957,7 @@
       </p:sp>
       <p:sp>
         <p:nvSpPr>
-          <p:cNvPr id="8" name="TextBox 7"/>
+          <p:cNvPr id="10" name="TextBox 9"/>
           <p:cNvSpPr txBox="1"/>
           <p:nvPr/>
         </p:nvSpPr>
@@ -46082,7 +46996,7 @@
       </p:sp>
       <p:sp>
         <p:nvSpPr>
-          <p:cNvPr id="9" name="Right Arrow 8"/>
+          <p:cNvPr id="11" name="Right Arrow 10"/>
           <p:cNvSpPr/>
           <p:nvPr/>
         </p:nvSpPr>
@@ -46126,7 +47040,7 @@
       </p:sp>
       <p:sp>
         <p:nvSpPr>
-          <p:cNvPr id="10" name="Rounded Rectangle 9"/>
+          <p:cNvPr id="12" name="Rounded Rectangle 11"/>
           <p:cNvSpPr/>
           <p:nvPr/>
         </p:nvSpPr>
@@ -46172,7 +47086,7 @@
       </p:sp>
       <p:sp>
         <p:nvSpPr>
-          <p:cNvPr id="11" name="TextBox 10"/>
+          <p:cNvPr id="13" name="TextBox 12"/>
           <p:cNvSpPr txBox="1"/>
           <p:nvPr/>
         </p:nvSpPr>
@@ -46211,7 +47125,7 @@
       </p:sp>
       <p:sp>
         <p:nvSpPr>
-          <p:cNvPr id="12" name="Right Arrow 11"/>
+          <p:cNvPr id="14" name="Right Arrow 13"/>
           <p:cNvSpPr/>
           <p:nvPr/>
         </p:nvSpPr>
@@ -46255,7 +47169,7 @@
       </p:sp>
       <p:sp>
         <p:nvSpPr>
-          <p:cNvPr id="13" name="Rounded Rectangle 12"/>
+          <p:cNvPr id="15" name="Rounded Rectangle 14"/>
           <p:cNvSpPr/>
           <p:nvPr/>
         </p:nvSpPr>
@@ -46301,7 +47215,7 @@
       </p:sp>
       <p:sp>
         <p:nvSpPr>
-          <p:cNvPr id="14" name="TextBox 13"/>
+          <p:cNvPr id="16" name="TextBox 15"/>
           <p:cNvSpPr txBox="1"/>
           <p:nvPr/>
         </p:nvSpPr>
@@ -46340,7 +47254,7 @@
       </p:sp>
       <p:sp>
         <p:nvSpPr>
-          <p:cNvPr id="15" name="Right Arrow 14"/>
+          <p:cNvPr id="17" name="Right Arrow 16"/>
           <p:cNvSpPr/>
           <p:nvPr/>
         </p:nvSpPr>
@@ -46384,7 +47298,7 @@
       </p:sp>
       <p:sp>
         <p:nvSpPr>
-          <p:cNvPr id="16" name="Rounded Rectangle 15"/>
+          <p:cNvPr id="18" name="Rounded Rectangle 17"/>
           <p:cNvSpPr/>
           <p:nvPr/>
         </p:nvSpPr>
@@ -46430,7 +47344,7 @@
       </p:sp>
       <p:sp>
         <p:nvSpPr>
-          <p:cNvPr id="17" name="TextBox 16"/>
+          <p:cNvPr id="19" name="TextBox 18"/>
           <p:cNvSpPr txBox="1"/>
           <p:nvPr/>
         </p:nvSpPr>
@@ -46469,7 +47383,7 @@
       </p:sp>
       <p:sp>
         <p:nvSpPr>
-          <p:cNvPr id="18" name="Right Arrow 17"/>
+          <p:cNvPr id="20" name="Right Arrow 19"/>
           <p:cNvSpPr/>
           <p:nvPr/>
         </p:nvSpPr>
@@ -46513,7 +47427,7 @@
       </p:sp>
       <p:sp>
         <p:nvSpPr>
-          <p:cNvPr id="19" name="Rounded Rectangle 18"/>
+          <p:cNvPr id="21" name="Rounded Rectangle 20"/>
           <p:cNvSpPr/>
           <p:nvPr/>
         </p:nvSpPr>
@@ -46559,7 +47473,7 @@
       </p:sp>
       <p:sp>
         <p:nvSpPr>
-          <p:cNvPr id="20" name="TextBox 19"/>
+          <p:cNvPr id="22" name="TextBox 21"/>
           <p:cNvSpPr txBox="1"/>
           <p:nvPr/>
         </p:nvSpPr>
@@ -46598,7 +47512,7 @@
       </p:sp>
       <p:sp>
         <p:nvSpPr>
-          <p:cNvPr id="21" name="Right Arrow 20"/>
+          <p:cNvPr id="23" name="Right Arrow 22"/>
           <p:cNvSpPr/>
           <p:nvPr/>
         </p:nvSpPr>
@@ -46642,7 +47556,7 @@
       </p:sp>
       <p:sp>
         <p:nvSpPr>
-          <p:cNvPr id="22" name="Rounded Rectangle 21"/>
+          <p:cNvPr id="24" name="Rounded Rectangle 23"/>
           <p:cNvSpPr/>
           <p:nvPr/>
         </p:nvSpPr>
@@ -46688,7 +47602,7 @@
       </p:sp>
       <p:sp>
         <p:nvSpPr>
-          <p:cNvPr id="23" name="TextBox 22"/>
+          <p:cNvPr id="25" name="TextBox 24"/>
           <p:cNvSpPr txBox="1"/>
           <p:nvPr/>
         </p:nvSpPr>
@@ -46727,7 +47641,7 @@
       </p:sp>
       <p:sp>
         <p:nvSpPr>
-          <p:cNvPr id="24" name="Right Arrow 23"/>
+          <p:cNvPr id="26" name="Right Arrow 25"/>
           <p:cNvSpPr/>
           <p:nvPr/>
         </p:nvSpPr>
@@ -46771,7 +47685,7 @@
       </p:sp>
       <p:sp>
         <p:nvSpPr>
-          <p:cNvPr id="25" name="Rounded Rectangle 24"/>
+          <p:cNvPr id="27" name="Rounded Rectangle 26"/>
           <p:cNvSpPr/>
           <p:nvPr/>
         </p:nvSpPr>
@@ -46817,7 +47731,7 @@
       </p:sp>
       <p:sp>
         <p:nvSpPr>
-          <p:cNvPr id="26" name="TextBox 25"/>
+          <p:cNvPr id="28" name="TextBox 27"/>
           <p:cNvSpPr txBox="1"/>
           <p:nvPr/>
         </p:nvSpPr>
@@ -46856,7 +47770,7 @@
       </p:sp>
       <p:sp>
         <p:nvSpPr>
-          <p:cNvPr id="27" name="Rounded Rectangle 26"/>
+          <p:cNvPr id="29" name="Rounded Rectangle 28"/>
           <p:cNvSpPr/>
           <p:nvPr/>
         </p:nvSpPr>
@@ -46902,7 +47816,7 @@
       </p:sp>
       <p:sp>
         <p:nvSpPr>
-          <p:cNvPr id="28" name="TextBox 27"/>
+          <p:cNvPr id="30" name="TextBox 29"/>
           <p:cNvSpPr txBox="1"/>
           <p:nvPr/>
         </p:nvSpPr>
@@ -46930,7 +47844,7 @@
                 </a:solidFill>
                 <a:latin typeface="Arial"/>
               </a:rPr>
-              <a:t>41/46</a:t>
+              <a:t>41/47</a:t>
             </a:r>
           </a:p>
         </p:txBody>
@@ -48426,7 +49340,7 @@
                 </a:solidFill>
                 <a:latin typeface="Arial"/>
               </a:rPr>
-              <a:t>42/46</a:t>
+              <a:t>42/47</a:t>
             </a:r>
           </a:p>
         </p:txBody>
@@ -49462,7 +50376,7 @@
                 </a:solidFill>
                 <a:latin typeface="Arial"/>
               </a:rPr>
-              <a:t>43/46</a:t>
+              <a:t>43/47</a:t>
             </a:r>
           </a:p>
         </p:txBody>
@@ -50481,7 +51395,7 @@
                 </a:solidFill>
                 <a:latin typeface="Arial"/>
               </a:rPr>
-              <a:t>44/46</a:t>
+              <a:t>44/47</a:t>
             </a:r>
           </a:p>
         </p:txBody>
@@ -51506,7 +52420,7 @@
                 </a:solidFill>
                 <a:latin typeface="Arial"/>
               </a:rPr>
-              <a:t>45/46</a:t>
+              <a:t>45/47</a:t>
             </a:r>
           </a:p>
         </p:txBody>
@@ -51537,8 +52451,8 @@
         </p:nvSpPr>
         <p:spPr>
           <a:xfrm>
-            <a:off x="502920" y="320040"/>
-            <a:ext cx="11247120" cy="640080"/>
+            <a:off x="502920" y="274320"/>
+            <a:ext cx="11247120" cy="502920"/>
           </a:xfrm>
           <a:prstGeom prst="rect">
             <a:avLst/>
@@ -51557,7 +52471,7 @@
               </a:lnSpc>
             </a:pPr>
             <a:r>
-              <a:rPr sz="2700" b="1" i="0">
+              <a:rPr sz="2400" b="1" i="0">
                 <a:solidFill>
                   <a:srgbClr val="F0AB00"/>
                 </a:solidFill>
@@ -51566,7 +52480,7 @@
               <a:t>Лекция 3: </a:t>
             </a:r>
             <a:r>
-              <a:rPr sz="2700" b="1" i="0">
+              <a:rPr sz="2400" b="1" i="0">
                 <a:solidFill>
                   <a:srgbClr val="21295C"/>
                 </a:solidFill>
@@ -51579,7 +52493,7 @@
       </p:sp>
       <p:pic>
         <p:nvPicPr>
-          <p:cNvPr id="3" name="Picture 2" descr="s41-bridge-lec3.png"/>
+          <p:cNvPr id="3" name="Picture 2" descr="s41-bridge-lec3-crop.png"/>
           <p:cNvPicPr>
             <a:picLocks noChangeAspect="1"/>
           </p:cNvPicPr>
@@ -51593,8 +52507,8 @@
         </p:blipFill>
         <p:spPr>
           <a:xfrm>
-            <a:off x="1569567" y="1234440"/>
-            <a:ext cx="9052560" cy="4672289"/>
+            <a:off x="2712567" y="822960"/>
+            <a:ext cx="6766560" cy="2673883"/>
           </a:xfrm>
           <a:prstGeom prst="rect">
             <a:avLst/>
@@ -51609,18 +52523,18 @@
         </p:nvSpPr>
         <p:spPr>
           <a:xfrm>
-            <a:off x="769467" y="1508760"/>
-            <a:ext cx="4617720" cy="2103120"/>
+            <a:off x="495147" y="3624858"/>
+            <a:ext cx="5257800" cy="1481328"/>
           </a:xfrm>
           <a:prstGeom prst="roundRect">
             <a:avLst>
-              <a:gd name="adj" fmla="val 14492"/>
+              <a:gd name="adj" fmla="val 20576"/>
             </a:avLst>
           </a:prstGeom>
           <a:solidFill>
             <a:srgbClr val="FFFFFF"/>
           </a:solidFill>
-          <a:ln w="19050">
+          <a:ln w="17780">
             <a:solidFill>
               <a:srgbClr val="1C7293"/>
             </a:solidFill>
@@ -51665,8 +52579,8 @@
         </p:blipFill>
         <p:spPr>
           <a:xfrm>
-            <a:off x="970635" y="1673351"/>
-            <a:ext cx="384048" cy="384048"/>
+            <a:off x="659739" y="3752874"/>
+            <a:ext cx="310896" cy="310896"/>
           </a:xfrm>
           <a:prstGeom prst="rect">
             <a:avLst/>
@@ -51681,8 +52595,8 @@
         </p:nvSpPr>
         <p:spPr>
           <a:xfrm>
-            <a:off x="1482699" y="1655063"/>
-            <a:ext cx="3749039" cy="411480"/>
+            <a:off x="1062075" y="3725442"/>
+            <a:ext cx="4544568" cy="329184"/>
           </a:xfrm>
           <a:prstGeom prst="rect">
             <a:avLst/>
@@ -51701,7 +52615,7 @@
               </a:lnSpc>
             </a:pPr>
             <a:r>
-              <a:rPr sz="1550" b="1" i="0">
+              <a:rPr sz="1350" b="1" i="0">
                 <a:solidFill>
                   <a:srgbClr val="21295C"/>
                 </a:solidFill>
@@ -51720,8 +52634,8 @@
         </p:nvSpPr>
         <p:spPr>
           <a:xfrm>
-            <a:off x="998067" y="2130552"/>
-            <a:ext cx="4160520" cy="566928"/>
+            <a:off x="696315" y="4082058"/>
+            <a:ext cx="4855464" cy="502920"/>
           </a:xfrm>
           <a:prstGeom prst="rect">
             <a:avLst/>
@@ -51736,11 +52650,11 @@
           <a:p>
             <a:pPr algn="l">
               <a:lnSpc>
-                <a:spcPct val="115000"/>
-              </a:lnSpc>
-            </a:pPr>
-            <a:r>
-              <a:rPr sz="1200" b="0" i="0">
+                <a:spcPct val="108000"/>
+              </a:lnSpc>
+            </a:pPr>
+            <a:r>
+              <a:rPr sz="1050" b="0" i="0">
                 <a:solidFill>
                   <a:srgbClr val="21295C"/>
                 </a:solidFill>
@@ -51759,8 +52673,8 @@
         </p:nvSpPr>
         <p:spPr>
           <a:xfrm>
-            <a:off x="998067" y="2715768"/>
-            <a:ext cx="4160520" cy="841248"/>
+            <a:off x="696315" y="4594122"/>
+            <a:ext cx="4855464" cy="457200"/>
           </a:xfrm>
           <a:prstGeom prst="rect">
             <a:avLst/>
@@ -51775,17 +52689,17 @@
           <a:p>
             <a:pPr algn="l">
               <a:lnSpc>
-                <a:spcPct val="115000"/>
-              </a:lnSpc>
-            </a:pPr>
-            <a:r>
-              <a:rPr sz="1050" b="0" i="1">
+                <a:spcPct val="108000"/>
+              </a:lnSpc>
+            </a:pPr>
+            <a:r>
+              <a:rPr sz="950" b="0" i="1">
                 <a:solidFill>
                   <a:srgbClr val="028090"/>
                 </a:solidFill>
                 <a:latin typeface="Arial"/>
               </a:rPr>
-              <a:t>Якорь: сходство ≠ релевантность — главная причина разочарований наивного поиска.</a:t>
+              <a:t>Якорь: сходство ≠ релевантность.</a:t>
             </a:r>
           </a:p>
         </p:txBody>
@@ -51798,18 +52712,18 @@
         </p:nvSpPr>
         <p:spPr>
           <a:xfrm>
-            <a:off x="6804507" y="1508760"/>
-            <a:ext cx="4617720" cy="2103120"/>
+            <a:off x="6438747" y="3624858"/>
+            <a:ext cx="5257800" cy="1481328"/>
           </a:xfrm>
           <a:prstGeom prst="roundRect">
             <a:avLst>
-              <a:gd name="adj" fmla="val 14492"/>
+              <a:gd name="adj" fmla="val 20576"/>
             </a:avLst>
           </a:prstGeom>
           <a:solidFill>
             <a:srgbClr val="FFFFFF"/>
           </a:solidFill>
-          <a:ln w="19050">
+          <a:ln w="17780">
             <a:solidFill>
               <a:srgbClr val="1C7293"/>
             </a:solidFill>
@@ -51854,8 +52768,8 @@
         </p:blipFill>
         <p:spPr>
           <a:xfrm>
-            <a:off x="7005675" y="1673351"/>
-            <a:ext cx="384048" cy="384048"/>
+            <a:off x="6603339" y="3752874"/>
+            <a:ext cx="310896" cy="310896"/>
           </a:xfrm>
           <a:prstGeom prst="rect">
             <a:avLst/>
@@ -51870,8 +52784,8 @@
         </p:nvSpPr>
         <p:spPr>
           <a:xfrm>
-            <a:off x="7517739" y="1655063"/>
-            <a:ext cx="3749039" cy="411480"/>
+            <a:off x="7005675" y="3725442"/>
+            <a:ext cx="4544568" cy="329184"/>
           </a:xfrm>
           <a:prstGeom prst="rect">
             <a:avLst/>
@@ -51890,7 +52804,7 @@
               </a:lnSpc>
             </a:pPr>
             <a:r>
-              <a:rPr sz="1550" b="1" i="0">
+              <a:rPr sz="1350" b="1" i="0">
                 <a:solidFill>
                   <a:srgbClr val="21295C"/>
                 </a:solidFill>
@@ -51909,8 +52823,8 @@
         </p:nvSpPr>
         <p:spPr>
           <a:xfrm>
-            <a:off x="7033107" y="2130552"/>
-            <a:ext cx="4160520" cy="566928"/>
+            <a:off x="6639915" y="4082058"/>
+            <a:ext cx="4855464" cy="502920"/>
           </a:xfrm>
           <a:prstGeom prst="rect">
             <a:avLst/>
@@ -51925,11 +52839,11 @@
           <a:p>
             <a:pPr algn="l">
               <a:lnSpc>
-                <a:spcPct val="115000"/>
-              </a:lnSpc>
-            </a:pPr>
-            <a:r>
-              <a:rPr sz="1200" b="0" i="0">
+                <a:spcPct val="108000"/>
+              </a:lnSpc>
+            </a:pPr>
+            <a:r>
+              <a:rPr sz="1050" b="0" i="0">
                 <a:solidFill>
                   <a:srgbClr val="21295C"/>
                 </a:solidFill>
@@ -51948,8 +52862,8 @@
         </p:nvSpPr>
         <p:spPr>
           <a:xfrm>
-            <a:off x="7033107" y="2715768"/>
-            <a:ext cx="4160520" cy="841248"/>
+            <a:off x="6639915" y="4594122"/>
+            <a:ext cx="4855464" cy="457200"/>
           </a:xfrm>
           <a:prstGeom prst="rect">
             <a:avLst/>
@@ -51964,17 +52878,17 @@
           <a:p>
             <a:pPr algn="l">
               <a:lnSpc>
-                <a:spcPct val="115000"/>
-              </a:lnSpc>
-            </a:pPr>
-            <a:r>
-              <a:rPr sz="1050" b="0" i="1">
+                <a:spcPct val="108000"/>
+              </a:lnSpc>
+            </a:pPr>
+            <a:r>
+              <a:rPr sz="950" b="0" i="1">
                 <a:solidFill>
                   <a:srgbClr val="028090"/>
                 </a:solidFill>
                 <a:latin typeface="Arial"/>
               </a:rPr>
-              <a:t>Якорь: надёжность формата вызова обеспечивают structured outputs.</a:t>
+              <a:t>Якорь: надёжность формата даёт structured outputs.</a:t>
             </a:r>
           </a:p>
         </p:txBody>
@@ -51987,18 +52901,18 @@
         </p:nvSpPr>
         <p:spPr>
           <a:xfrm>
-            <a:off x="769467" y="4114800"/>
-            <a:ext cx="4617720" cy="2103120"/>
+            <a:off x="495147" y="5234202"/>
+            <a:ext cx="5257800" cy="1481328"/>
           </a:xfrm>
           <a:prstGeom prst="roundRect">
             <a:avLst>
-              <a:gd name="adj" fmla="val 14492"/>
+              <a:gd name="adj" fmla="val 20576"/>
             </a:avLst>
           </a:prstGeom>
           <a:solidFill>
             <a:srgbClr val="FFFFFF"/>
           </a:solidFill>
-          <a:ln w="19050">
+          <a:ln w="17780">
             <a:solidFill>
               <a:srgbClr val="1C7293"/>
             </a:solidFill>
@@ -52043,8 +52957,8 @@
         </p:blipFill>
         <p:spPr>
           <a:xfrm>
-            <a:off x="970635" y="4279392"/>
-            <a:ext cx="384048" cy="384048"/>
+            <a:off x="659739" y="5362218"/>
+            <a:ext cx="310896" cy="310896"/>
           </a:xfrm>
           <a:prstGeom prst="rect">
             <a:avLst/>
@@ -52059,8 +52973,8 @@
         </p:nvSpPr>
         <p:spPr>
           <a:xfrm>
-            <a:off x="1482699" y="4261104"/>
-            <a:ext cx="3749039" cy="411480"/>
+            <a:off x="1062075" y="5334786"/>
+            <a:ext cx="4544568" cy="329184"/>
           </a:xfrm>
           <a:prstGeom prst="rect">
             <a:avLst/>
@@ -52079,7 +52993,7 @@
               </a:lnSpc>
             </a:pPr>
             <a:r>
-              <a:rPr sz="1550" b="1" i="0">
+              <a:rPr sz="1350" b="1" i="0">
                 <a:solidFill>
                   <a:srgbClr val="21295C"/>
                 </a:solidFill>
@@ -52098,8 +53012,8 @@
         </p:nvSpPr>
         <p:spPr>
           <a:xfrm>
-            <a:off x="998067" y="4736592"/>
-            <a:ext cx="4160520" cy="566928"/>
+            <a:off x="696315" y="5691402"/>
+            <a:ext cx="4855464" cy="502920"/>
           </a:xfrm>
           <a:prstGeom prst="rect">
             <a:avLst/>
@@ -52114,11 +53028,11 @@
           <a:p>
             <a:pPr algn="l">
               <a:lnSpc>
-                <a:spcPct val="115000"/>
-              </a:lnSpc>
-            </a:pPr>
-            <a:r>
-              <a:rPr sz="1200" b="0" i="0">
+                <a:spcPct val="108000"/>
+              </a:lnSpc>
+            </a:pPr>
+            <a:r>
+              <a:rPr sz="1050" b="0" i="0">
                 <a:solidFill>
                   <a:srgbClr val="21295C"/>
                 </a:solidFill>
@@ -52137,8 +53051,8 @@
         </p:nvSpPr>
         <p:spPr>
           <a:xfrm>
-            <a:off x="998067" y="5321808"/>
-            <a:ext cx="4160520" cy="841248"/>
+            <a:off x="696315" y="6203466"/>
+            <a:ext cx="4855464" cy="457200"/>
           </a:xfrm>
           <a:prstGeom prst="rect">
             <a:avLst/>
@@ -52153,17 +53067,17 @@
           <a:p>
             <a:pPr algn="l">
               <a:lnSpc>
-                <a:spcPct val="115000"/>
-              </a:lnSpc>
-            </a:pPr>
-            <a:r>
-              <a:rPr sz="1050" b="0" i="1">
+                <a:spcPct val="108000"/>
+              </a:lnSpc>
+            </a:pPr>
+            <a:r>
+              <a:rPr sz="950" b="0" i="1">
                 <a:solidFill>
                   <a:srgbClr val="F0AB00"/>
                 </a:solidFill>
                 <a:latin typeface="Arial"/>
               </a:rPr>
-              <a:t>Якорь: стабильный префикс с описаниями инструментов → кэш промптов, экономика агента.</a:t>
+              <a:t>Якорь: стабильный префикс → кэш промптов, экономика агента.</a:t>
             </a:r>
           </a:p>
         </p:txBody>
@@ -52176,18 +53090,18 @@
         </p:nvSpPr>
         <p:spPr>
           <a:xfrm>
-            <a:off x="6804507" y="4114800"/>
-            <a:ext cx="4617720" cy="2103120"/>
+            <a:off x="6438747" y="5234202"/>
+            <a:ext cx="5257800" cy="1481328"/>
           </a:xfrm>
           <a:prstGeom prst="roundRect">
             <a:avLst>
-              <a:gd name="adj" fmla="val 14492"/>
+              <a:gd name="adj" fmla="val 20576"/>
             </a:avLst>
           </a:prstGeom>
           <a:solidFill>
             <a:srgbClr val="FFFFFF"/>
           </a:solidFill>
-          <a:ln w="19050">
+          <a:ln w="17780">
             <a:solidFill>
               <a:srgbClr val="1C7293"/>
             </a:solidFill>
@@ -52232,8 +53146,8 @@
         </p:blipFill>
         <p:spPr>
           <a:xfrm>
-            <a:off x="7005675" y="4279392"/>
-            <a:ext cx="384048" cy="384048"/>
+            <a:off x="6603339" y="5362218"/>
+            <a:ext cx="310896" cy="310896"/>
           </a:xfrm>
           <a:prstGeom prst="rect">
             <a:avLst/>
@@ -52248,8 +53162,8 @@
         </p:nvSpPr>
         <p:spPr>
           <a:xfrm>
-            <a:off x="7517739" y="4261104"/>
-            <a:ext cx="3749039" cy="411480"/>
+            <a:off x="7005675" y="5334786"/>
+            <a:ext cx="4544568" cy="329184"/>
           </a:xfrm>
           <a:prstGeom prst="rect">
             <a:avLst/>
@@ -52268,7 +53182,7 @@
               </a:lnSpc>
             </a:pPr>
             <a:r>
-              <a:rPr sz="1550" b="1" i="0">
+              <a:rPr sz="1350" b="1" i="0">
                 <a:solidFill>
                   <a:srgbClr val="21295C"/>
                 </a:solidFill>
@@ -52287,8 +53201,8 @@
         </p:nvSpPr>
         <p:spPr>
           <a:xfrm>
-            <a:off x="7033107" y="4736592"/>
-            <a:ext cx="4160520" cy="566928"/>
+            <a:off x="6639915" y="5691402"/>
+            <a:ext cx="4855464" cy="502920"/>
           </a:xfrm>
           <a:prstGeom prst="rect">
             <a:avLst/>
@@ -52303,11 +53217,11 @@
           <a:p>
             <a:pPr algn="l">
               <a:lnSpc>
-                <a:spcPct val="115000"/>
-              </a:lnSpc>
-            </a:pPr>
-            <a:r>
-              <a:rPr sz="1200" b="0" i="0">
+                <a:spcPct val="108000"/>
+              </a:lnSpc>
+            </a:pPr>
+            <a:r>
+              <a:rPr sz="1050" b="0" i="0">
                 <a:solidFill>
                   <a:srgbClr val="21295C"/>
                 </a:solidFill>
@@ -52326,8 +53240,8 @@
         </p:nvSpPr>
         <p:spPr>
           <a:xfrm>
-            <a:off x="7033107" y="5321808"/>
-            <a:ext cx="4160520" cy="841248"/>
+            <a:off x="6639915" y="6203466"/>
+            <a:ext cx="4855464" cy="457200"/>
           </a:xfrm>
           <a:prstGeom prst="rect">
             <a:avLst/>
@@ -52342,17 +53256,17 @@
           <a:p>
             <a:pPr algn="l">
               <a:lnSpc>
-                <a:spcPct val="115000"/>
-              </a:lnSpc>
-            </a:pPr>
-            <a:r>
-              <a:rPr sz="1050" b="0" i="1">
+                <a:spcPct val="108000"/>
+              </a:lnSpc>
+            </a:pPr>
+            <a:r>
+              <a:rPr sz="950" b="0" i="1">
                 <a:solidFill>
                   <a:srgbClr val="028090"/>
                 </a:solidFill>
                 <a:latin typeface="Arial"/>
               </a:rPr>
-              <a:t>Якорь: инструкции для модели — те же токены с весом внимания; агент читает внешний контент → prompt injection; невидимые токены рассуждения умножаются на число шагов.</a:t>
+              <a:t>Якорь: агент читает внешний контент → prompt injection.</a:t>
             </a:r>
           </a:p>
         </p:txBody>
@@ -52387,7 +53301,7 @@
                 </a:solidFill>
                 <a:latin typeface="Arial"/>
               </a:rPr>
-              <a:t>46/46</a:t>
+              <a:t>46/47</a:t>
             </a:r>
           </a:p>
         </p:txBody>
@@ -53605,7 +54519,7 @@
                 </a:solidFill>
                 <a:latin typeface="Arial"/>
               </a:rPr>
-              <a:t>5/46</a:t>
+              <a:t>5/47</a:t>
             </a:r>
           </a:p>
         </p:txBody>
@@ -55855,7 +56769,7 @@
                 </a:solidFill>
                 <a:latin typeface="Arial"/>
               </a:rPr>
-              <a:t>6/46</a:t>
+              <a:t>6/47</a:t>
             </a:r>
           </a:p>
         </p:txBody>
@@ -55886,9 +56800,213 @@
         <p:nvPr/>
       </p:nvGrpSpPr>
       <p:grpSpPr/>
+      <p:sp>
+        <p:nvSpPr>
+          <p:cNvPr id="2" name="TextBox 1"/>
+          <p:cNvSpPr txBox="1"/>
+          <p:nvPr/>
+        </p:nvSpPr>
+        <p:spPr>
+          <a:xfrm>
+            <a:off x="502920" y="685800"/>
+            <a:ext cx="5806440" cy="1737360"/>
+          </a:xfrm>
+          <a:prstGeom prst="rect">
+            <a:avLst/>
+          </a:prstGeom>
+          <a:noFill/>
+        </p:spPr>
+        <p:txBody>
+          <a:bodyPr wrap="square" lIns="0" rIns="0" tIns="0" bIns="0" anchor="ctr">
+            <a:spAutoFit/>
+          </a:bodyPr>
+          <a:lstStyle/>
+          <a:p>
+            <a:pPr algn="l">
+              <a:lnSpc>
+                <a:spcPct val="100000"/>
+              </a:lnSpc>
+            </a:pPr>
+            <a:r>
+              <a:rPr sz="9200" b="1" i="0">
+                <a:solidFill>
+                  <a:srgbClr val="F0AB00"/>
+                </a:solidFill>
+                <a:latin typeface="Arial"/>
+              </a:rPr>
+              <a:t>Раздел 1</a:t>
+            </a:r>
+          </a:p>
+        </p:txBody>
+      </p:sp>
+      <p:sp>
+        <p:nvSpPr>
+          <p:cNvPr id="3" name="TextBox 2"/>
+          <p:cNvSpPr txBox="1"/>
+          <p:nvPr/>
+        </p:nvSpPr>
+        <p:spPr>
+          <a:xfrm>
+            <a:off x="502920" y="2395728"/>
+            <a:ext cx="5806440" cy="960120"/>
+          </a:xfrm>
+          <a:prstGeom prst="rect">
+            <a:avLst/>
+          </a:prstGeom>
+          <a:noFill/>
+        </p:spPr>
+        <p:txBody>
+          <a:bodyPr wrap="square" lIns="0" rIns="0" tIns="0" bIns="0" anchor="t">
+            <a:spAutoFit/>
+          </a:bodyPr>
+          <a:lstStyle/>
+          <a:p>
+            <a:pPr algn="l">
+              <a:lnSpc>
+                <a:spcPct val="108000"/>
+              </a:lnSpc>
+            </a:pPr>
+            <a:r>
+              <a:rPr sz="3300" b="1" i="0">
+                <a:solidFill>
+                  <a:srgbClr val="21295C"/>
+                </a:solidFill>
+                <a:latin typeface="Arial"/>
+              </a:rPr>
+              <a:t>Токенизация</a:t>
+            </a:r>
+          </a:p>
+        </p:txBody>
+      </p:sp>
+      <p:sp>
+        <p:nvSpPr>
+          <p:cNvPr id="4" name="TextBox 3"/>
+          <p:cNvSpPr txBox="1"/>
+          <p:nvPr/>
+        </p:nvSpPr>
+        <p:spPr>
+          <a:xfrm>
+            <a:off x="502920" y="3474720"/>
+            <a:ext cx="5806440" cy="1234440"/>
+          </a:xfrm>
+          <a:prstGeom prst="rect">
+            <a:avLst/>
+          </a:prstGeom>
+          <a:noFill/>
+        </p:spPr>
+        <p:txBody>
+          <a:bodyPr wrap="square" lIns="0" rIns="0" tIns="0" bIns="0" anchor="t">
+            <a:spAutoFit/>
+          </a:bodyPr>
+          <a:lstStyle/>
+          <a:p>
+            <a:pPr algn="l">
+              <a:lnSpc>
+                <a:spcPct val="120000"/>
+              </a:lnSpc>
+            </a:pPr>
+            <a:r>
+              <a:rPr sz="2000" b="0" i="1">
+                <a:solidFill>
+                  <a:srgbClr val="065A82"/>
+                </a:solidFill>
+                <a:latin typeface="Arial"/>
+              </a:rPr>
+              <a:t>«Как модель видит ваш текст»</a:t>
+            </a:r>
+          </a:p>
+        </p:txBody>
+      </p:sp>
+      <p:sp>
+        <p:nvSpPr>
+          <p:cNvPr id="5" name="TextBox 4"/>
+          <p:cNvSpPr txBox="1"/>
+          <p:nvPr/>
+        </p:nvSpPr>
+        <p:spPr>
+          <a:xfrm>
+            <a:off x="502920" y="4846320"/>
+            <a:ext cx="5806440" cy="411480"/>
+          </a:xfrm>
+          <a:prstGeom prst="rect">
+            <a:avLst/>
+          </a:prstGeom>
+          <a:noFill/>
+        </p:spPr>
+        <p:txBody>
+          <a:bodyPr wrap="square" lIns="0" rIns="0" tIns="0" bIns="0" anchor="t">
+            <a:spAutoFit/>
+          </a:bodyPr>
+          <a:lstStyle/>
+          <a:p>
+            <a:pPr algn="l">
+              <a:lnSpc>
+                <a:spcPct val="115000"/>
+              </a:lnSpc>
+            </a:pPr>
+            <a:r>
+              <a:rPr sz="1600" b="1" i="0">
+                <a:solidFill>
+                  <a:srgbClr val="028090"/>
+                </a:solidFill>
+                <a:latin typeface="Arial"/>
+              </a:rPr>
+              <a:t>3 разбора · 3 провала</a:t>
+            </a:r>
+          </a:p>
+        </p:txBody>
+      </p:sp>
+      <p:sp>
+        <p:nvSpPr>
+          <p:cNvPr id="6" name="Rounded Rectangle 5"/>
+          <p:cNvSpPr/>
+          <p:nvPr/>
+        </p:nvSpPr>
+        <p:spPr>
+          <a:xfrm>
+            <a:off x="6629400" y="777240"/>
+            <a:ext cx="5074920" cy="4160520"/>
+          </a:xfrm>
+          <a:prstGeom prst="roundRect">
+            <a:avLst>
+              <a:gd name="adj" fmla="val 7326"/>
+            </a:avLst>
+          </a:prstGeom>
+          <a:solidFill>
+            <a:srgbClr val="FFFFFF"/>
+          </a:solidFill>
+          <a:ln w="19050">
+            <a:solidFill>
+              <a:srgbClr val="1C7293"/>
+            </a:solidFill>
+          </a:ln>
+          <a:effectLst/>
+        </p:spPr>
+        <p:style>
+          <a:lnRef idx="1">
+            <a:schemeClr val="accent1"/>
+          </a:lnRef>
+          <a:fillRef idx="3">
+            <a:schemeClr val="accent1"/>
+          </a:fillRef>
+          <a:effectRef idx="2">
+            <a:schemeClr val="accent1"/>
+          </a:effectRef>
+          <a:fontRef idx="minor">
+            <a:schemeClr val="lt1"/>
+          </a:fontRef>
+        </p:style>
+        <p:txBody>
+          <a:bodyPr rtlCol="0" anchor="ctr"/>
+          <a:lstStyle/>
+          <a:p>
+            <a:pPr algn="ctr"/>
+          </a:p>
+        </p:txBody>
+      </p:sp>
       <p:pic>
         <p:nvPicPr>
-          <p:cNvPr id="2" name="Picture 1" descr="s05a-tokenize-knife.png"/>
+          <p:cNvPr id="7" name="Picture 6" descr="strawberry-openai-crop.jpg"/>
           <p:cNvPicPr>
             <a:picLocks noChangeAspect="1"/>
           </p:cNvPicPr>
@@ -55902,8 +57020,8 @@
         </p:blipFill>
         <p:spPr>
           <a:xfrm>
-            <a:off x="10317175" y="411480"/>
-            <a:ext cx="1371600" cy="1371600"/>
+            <a:off x="6775704" y="1524570"/>
+            <a:ext cx="4782312" cy="2190372"/>
           </a:xfrm>
           <a:prstGeom prst="rect">
             <a:avLst/>
@@ -55912,163 +57030,46 @@
       </p:pic>
       <p:sp>
         <p:nvSpPr>
-          <p:cNvPr id="3" name="TextBox 2"/>
-          <p:cNvSpPr txBox="1"/>
-          <p:nvPr/>
-        </p:nvSpPr>
-        <p:spPr>
-          <a:xfrm>
-            <a:off x="502920" y="868680"/>
-            <a:ext cx="11247120" cy="2194560"/>
-          </a:xfrm>
-          <a:prstGeom prst="rect">
-            <a:avLst/>
-          </a:prstGeom>
-          <a:noFill/>
-        </p:spPr>
-        <p:txBody>
-          <a:bodyPr wrap="square" lIns="0" rIns="0" tIns="0" bIns="0" anchor="ctr">
+          <p:cNvPr id="8" name="TextBox 7"/>
+          <p:cNvSpPr txBox="1"/>
+          <p:nvPr/>
+        </p:nvSpPr>
+        <p:spPr>
+          <a:xfrm>
+            <a:off x="6775704" y="4425695"/>
+            <a:ext cx="4782312" cy="475488"/>
+          </a:xfrm>
+          <a:prstGeom prst="rect">
+            <a:avLst/>
+          </a:prstGeom>
+          <a:noFill/>
+        </p:spPr>
+        <p:txBody>
+          <a:bodyPr wrap="square" lIns="0" rIns="0" tIns="0" bIns="0" anchor="t">
             <a:spAutoFit/>
           </a:bodyPr>
           <a:lstStyle/>
           <a:p>
             <a:pPr algn="ctr">
               <a:lnSpc>
-                <a:spcPct val="100000"/>
-              </a:lnSpc>
-            </a:pPr>
-            <a:r>
-              <a:rPr sz="14000" b="1" i="0">
-                <a:solidFill>
-                  <a:srgbClr val="F0AB00"/>
-                </a:solidFill>
-                <a:latin typeface="Arial"/>
-              </a:rPr>
-              <a:t>Раздел 1</a:t>
-            </a:r>
-          </a:p>
-        </p:txBody>
-      </p:sp>
-      <p:sp>
-        <p:nvSpPr>
-          <p:cNvPr id="4" name="TextBox 3"/>
-          <p:cNvSpPr txBox="1"/>
-          <p:nvPr/>
-        </p:nvSpPr>
-        <p:spPr>
-          <a:xfrm>
-            <a:off x="502920" y="3246120"/>
-            <a:ext cx="11247120" cy="685800"/>
-          </a:xfrm>
-          <a:prstGeom prst="rect">
-            <a:avLst/>
-          </a:prstGeom>
-          <a:noFill/>
-        </p:spPr>
-        <p:txBody>
-          <a:bodyPr wrap="square" lIns="0" rIns="0" tIns="0" bIns="0" anchor="ctr">
-            <a:spAutoFit/>
-          </a:bodyPr>
-          <a:lstStyle/>
-          <a:p>
-            <a:pPr algn="ctr">
-              <a:lnSpc>
-                <a:spcPct val="115000"/>
-              </a:lnSpc>
-            </a:pPr>
-            <a:r>
-              <a:rPr sz="4400" b="1" i="0">
-                <a:solidFill>
-                  <a:srgbClr val="21295C"/>
-                </a:solidFill>
-                <a:latin typeface="Arial"/>
-              </a:rPr>
-              <a:t>Токенизация</a:t>
-            </a:r>
-          </a:p>
-        </p:txBody>
-      </p:sp>
-      <p:sp>
-        <p:nvSpPr>
-          <p:cNvPr id="5" name="TextBox 4"/>
-          <p:cNvSpPr txBox="1"/>
-          <p:nvPr/>
-        </p:nvSpPr>
-        <p:spPr>
-          <a:xfrm>
-            <a:off x="502920" y="4023360"/>
-            <a:ext cx="11247120" cy="685800"/>
-          </a:xfrm>
-          <a:prstGeom prst="rect">
-            <a:avLst/>
-          </a:prstGeom>
-          <a:noFill/>
-        </p:spPr>
-        <p:txBody>
-          <a:bodyPr wrap="square" lIns="0" rIns="0" tIns="0" bIns="0" anchor="t">
-            <a:spAutoFit/>
-          </a:bodyPr>
-          <a:lstStyle/>
-          <a:p>
-            <a:pPr algn="ctr">
-              <a:lnSpc>
-                <a:spcPct val="115000"/>
-              </a:lnSpc>
-            </a:pPr>
-            <a:r>
-              <a:rPr sz="2000" b="0" i="1">
-                <a:solidFill>
-                  <a:srgbClr val="065A82"/>
-                </a:solidFill>
-                <a:latin typeface="Arial"/>
-              </a:rPr>
-              <a:t>«Как модель видит ваш текст»</a:t>
-            </a:r>
-          </a:p>
-        </p:txBody>
-      </p:sp>
-      <p:sp>
-        <p:nvSpPr>
-          <p:cNvPr id="6" name="TextBox 5"/>
-          <p:cNvSpPr txBox="1"/>
-          <p:nvPr/>
-        </p:nvSpPr>
-        <p:spPr>
-          <a:xfrm>
-            <a:off x="502920" y="4800600"/>
-            <a:ext cx="11247120" cy="411480"/>
-          </a:xfrm>
-          <a:prstGeom prst="rect">
-            <a:avLst/>
-          </a:prstGeom>
-          <a:noFill/>
-        </p:spPr>
-        <p:txBody>
-          <a:bodyPr wrap="square" lIns="0" rIns="0" tIns="0" bIns="0" anchor="t">
-            <a:spAutoFit/>
-          </a:bodyPr>
-          <a:lstStyle/>
-          <a:p>
-            <a:pPr algn="ctr">
-              <a:lnSpc>
-                <a:spcPct val="115000"/>
-              </a:lnSpc>
-            </a:pPr>
-            <a:r>
-              <a:rPr sz="1600" b="1" i="0">
-                <a:solidFill>
-                  <a:srgbClr val="028090"/>
-                </a:solidFill>
-                <a:latin typeface="Arial"/>
-              </a:rPr>
-              <a:t>3 разбора · 3 провала</a:t>
-            </a:r>
-          </a:p>
-        </p:txBody>
-      </p:sp>
-      <p:sp>
-        <p:nvSpPr>
-          <p:cNvPr id="7" name="Rounded Rectangle 6"/>
+                <a:spcPct val="105000"/>
+              </a:lnSpc>
+            </a:pPr>
+            <a:r>
+              <a:rPr sz="950" b="0" i="1">
+                <a:solidFill>
+                  <a:srgbClr val="1C7293"/>
+                </a:solidFill>
+                <a:latin typeface="Arial"/>
+              </a:rPr>
+              <a:t>Реальный диалог: ChatGPT о «strawberry» — скриншот, OpenAI Community, 2024</a:t>
+            </a:r>
+          </a:p>
+        </p:txBody>
+      </p:sp>
+      <p:sp>
+        <p:nvSpPr>
+          <p:cNvPr id="9" name="Rounded Rectangle 8"/>
           <p:cNvSpPr/>
           <p:nvPr/>
         </p:nvSpPr>
@@ -56114,7 +57115,7 @@
       </p:sp>
       <p:sp>
         <p:nvSpPr>
-          <p:cNvPr id="8" name="TextBox 7"/>
+          <p:cNvPr id="10" name="TextBox 9"/>
           <p:cNvSpPr txBox="1"/>
           <p:nvPr/>
         </p:nvSpPr>
@@ -56153,7 +57154,7 @@
       </p:sp>
       <p:sp>
         <p:nvSpPr>
-          <p:cNvPr id="9" name="Right Arrow 8"/>
+          <p:cNvPr id="11" name="Right Arrow 10"/>
           <p:cNvSpPr/>
           <p:nvPr/>
         </p:nvSpPr>
@@ -56197,7 +57198,7 @@
       </p:sp>
       <p:sp>
         <p:nvSpPr>
-          <p:cNvPr id="10" name="Rounded Rectangle 9"/>
+          <p:cNvPr id="12" name="Rounded Rectangle 11"/>
           <p:cNvSpPr/>
           <p:nvPr/>
         </p:nvSpPr>
@@ -56243,7 +57244,7 @@
       </p:sp>
       <p:sp>
         <p:nvSpPr>
-          <p:cNvPr id="11" name="TextBox 10"/>
+          <p:cNvPr id="13" name="TextBox 12"/>
           <p:cNvSpPr txBox="1"/>
           <p:nvPr/>
         </p:nvSpPr>
@@ -56282,7 +57283,7 @@
       </p:sp>
       <p:sp>
         <p:nvSpPr>
-          <p:cNvPr id="12" name="Right Arrow 11"/>
+          <p:cNvPr id="14" name="Right Arrow 13"/>
           <p:cNvSpPr/>
           <p:nvPr/>
         </p:nvSpPr>
@@ -56326,7 +57327,7 @@
       </p:sp>
       <p:sp>
         <p:nvSpPr>
-          <p:cNvPr id="13" name="Rounded Rectangle 12"/>
+          <p:cNvPr id="15" name="Rounded Rectangle 14"/>
           <p:cNvSpPr/>
           <p:nvPr/>
         </p:nvSpPr>
@@ -56372,7 +57373,7 @@
       </p:sp>
       <p:sp>
         <p:nvSpPr>
-          <p:cNvPr id="14" name="TextBox 13"/>
+          <p:cNvPr id="16" name="TextBox 15"/>
           <p:cNvSpPr txBox="1"/>
           <p:nvPr/>
         </p:nvSpPr>
@@ -56411,7 +57412,7 @@
       </p:sp>
       <p:sp>
         <p:nvSpPr>
-          <p:cNvPr id="15" name="Right Arrow 14"/>
+          <p:cNvPr id="17" name="Right Arrow 16"/>
           <p:cNvSpPr/>
           <p:nvPr/>
         </p:nvSpPr>
@@ -56455,7 +57456,7 @@
       </p:sp>
       <p:sp>
         <p:nvSpPr>
-          <p:cNvPr id="16" name="Rounded Rectangle 15"/>
+          <p:cNvPr id="18" name="Rounded Rectangle 17"/>
           <p:cNvSpPr/>
           <p:nvPr/>
         </p:nvSpPr>
@@ -56501,7 +57502,7 @@
       </p:sp>
       <p:sp>
         <p:nvSpPr>
-          <p:cNvPr id="17" name="TextBox 16"/>
+          <p:cNvPr id="19" name="TextBox 18"/>
           <p:cNvSpPr txBox="1"/>
           <p:nvPr/>
         </p:nvSpPr>
@@ -56540,7 +57541,7 @@
       </p:sp>
       <p:sp>
         <p:nvSpPr>
-          <p:cNvPr id="18" name="Right Arrow 17"/>
+          <p:cNvPr id="20" name="Right Arrow 19"/>
           <p:cNvSpPr/>
           <p:nvPr/>
         </p:nvSpPr>
@@ -56584,7 +57585,7 @@
       </p:sp>
       <p:sp>
         <p:nvSpPr>
-          <p:cNvPr id="19" name="Rounded Rectangle 18"/>
+          <p:cNvPr id="21" name="Rounded Rectangle 20"/>
           <p:cNvSpPr/>
           <p:nvPr/>
         </p:nvSpPr>
@@ -56630,7 +57631,7 @@
       </p:sp>
       <p:sp>
         <p:nvSpPr>
-          <p:cNvPr id="20" name="TextBox 19"/>
+          <p:cNvPr id="22" name="TextBox 21"/>
           <p:cNvSpPr txBox="1"/>
           <p:nvPr/>
         </p:nvSpPr>
@@ -56669,7 +57670,7 @@
       </p:sp>
       <p:sp>
         <p:nvSpPr>
-          <p:cNvPr id="21" name="Right Arrow 20"/>
+          <p:cNvPr id="23" name="Right Arrow 22"/>
           <p:cNvSpPr/>
           <p:nvPr/>
         </p:nvSpPr>
@@ -56713,7 +57714,7 @@
       </p:sp>
       <p:sp>
         <p:nvSpPr>
-          <p:cNvPr id="22" name="Rounded Rectangle 21"/>
+          <p:cNvPr id="24" name="Rounded Rectangle 23"/>
           <p:cNvSpPr/>
           <p:nvPr/>
         </p:nvSpPr>
@@ -56759,7 +57760,7 @@
       </p:sp>
       <p:sp>
         <p:nvSpPr>
-          <p:cNvPr id="23" name="TextBox 22"/>
+          <p:cNvPr id="25" name="TextBox 24"/>
           <p:cNvSpPr txBox="1"/>
           <p:nvPr/>
         </p:nvSpPr>
@@ -56798,7 +57799,7 @@
       </p:sp>
       <p:sp>
         <p:nvSpPr>
-          <p:cNvPr id="24" name="Right Arrow 23"/>
+          <p:cNvPr id="26" name="Right Arrow 25"/>
           <p:cNvSpPr/>
           <p:nvPr/>
         </p:nvSpPr>
@@ -56842,7 +57843,7 @@
       </p:sp>
       <p:sp>
         <p:nvSpPr>
-          <p:cNvPr id="25" name="Rounded Rectangle 24"/>
+          <p:cNvPr id="27" name="Rounded Rectangle 26"/>
           <p:cNvSpPr/>
           <p:nvPr/>
         </p:nvSpPr>
@@ -56888,7 +57889,7 @@
       </p:sp>
       <p:sp>
         <p:nvSpPr>
-          <p:cNvPr id="26" name="TextBox 25"/>
+          <p:cNvPr id="28" name="TextBox 27"/>
           <p:cNvSpPr txBox="1"/>
           <p:nvPr/>
         </p:nvSpPr>
@@ -56927,7 +57928,7 @@
       </p:sp>
       <p:sp>
         <p:nvSpPr>
-          <p:cNvPr id="27" name="TextBox 26"/>
+          <p:cNvPr id="29" name="TextBox 28"/>
           <p:cNvSpPr txBox="1"/>
           <p:nvPr/>
         </p:nvSpPr>
@@ -56955,7 +57956,7 @@
                 </a:solidFill>
                 <a:latin typeface="Arial"/>
               </a:rPr>
-              <a:t>7/46</a:t>
+              <a:t>7/47</a:t>
             </a:r>
           </a:p>
         </p:txBody>
@@ -57569,7 +58570,7 @@
                 </a:solidFill>
                 <a:latin typeface="Arial"/>
               </a:rPr>
-              <a:t>8/46</a:t>
+              <a:t>8/47</a:t>
             </a:r>
           </a:p>
         </p:txBody>
@@ -58270,7 +59271,7 @@
                 </a:solidFill>
                 <a:latin typeface="Arial"/>
               </a:rPr>
-              <a:t>9/46</a:t>
+              <a:t>9/47</a:t>
             </a:r>
           </a:p>
         </p:txBody>

--- a/library/lectures/lec-02/rendered/lec-02.pptx
+++ b/library/lectures/lec-02/rendered/lec-02.pptx
@@ -7542,11 +7542,11 @@
         <p:spPr>
           <a:xfrm>
             <a:off x="502920" y="1481328"/>
-            <a:ext cx="4572000" cy="3520440"/>
+            <a:ext cx="4572000" cy="1143000"/>
           </a:xfrm>
           <a:prstGeom prst="roundRect">
             <a:avLst>
-              <a:gd name="adj" fmla="val 8658"/>
+              <a:gd name="adj" fmla="val 25000"/>
             </a:avLst>
           </a:prstGeom>
           <a:solidFill>
@@ -7589,8 +7589,8 @@
         </p:nvSpPr>
         <p:spPr>
           <a:xfrm>
-            <a:off x="777240" y="1645920"/>
-            <a:ext cx="4023360" cy="365760"/>
+            <a:off x="777240" y="1591056"/>
+            <a:ext cx="4023360" cy="329184"/>
           </a:xfrm>
           <a:prstGeom prst="rect">
             <a:avLst/>
@@ -7609,7 +7609,7 @@
               </a:lnSpc>
             </a:pPr>
             <a:r>
-              <a:rPr sz="1450" b="1" i="0">
+              <a:rPr sz="1400" b="1" i="0">
                 <a:solidFill>
                   <a:srgbClr val="065A82"/>
                 </a:solidFill>
@@ -7628,8 +7628,8 @@
         </p:nvSpPr>
         <p:spPr>
           <a:xfrm>
-            <a:off x="777240" y="2084831"/>
-            <a:ext cx="4023360" cy="868680"/>
+            <a:off x="777240" y="1920240"/>
+            <a:ext cx="4023360" cy="640080"/>
           </a:xfrm>
           <a:prstGeom prst="rect">
             <a:avLst/>
@@ -7648,7 +7648,7 @@
               </a:lnSpc>
             </a:pPr>
             <a:r>
-              <a:rPr sz="1500" b="0" i="0">
+              <a:rPr sz="1350" b="0" i="0">
                 <a:solidFill>
                   <a:srgbClr val="21295C"/>
                 </a:solidFill>
@@ -7657,92 +7657,34 @@
               <a:t>strawberry</a:t>
             </a:r>
             <a:r>
-              <a:rPr sz="1500" b="0" i="0">
+              <a:rPr sz="1350" b="0" i="0">
                 <a:solidFill>
                   <a:srgbClr val="6B7685"/>
                 </a:solidFill>
                 <a:latin typeface="Arial"/>
               </a:rPr>
-              <a:t>  →</a:t>
-            </a:r>
-          </a:p>
-          <a:p>
-            <a:pPr algn="l">
-              <a:lnSpc>
-                <a:spcPct val="115000"/>
-              </a:lnSpc>
-              <a:spcBef>
-                <a:spcPts val="600"/>
-              </a:spcBef>
-            </a:pPr>
-            <a:r>
-              <a:rPr sz="1500" b="1" i="0">
+              <a:t> → </a:t>
+            </a:r>
+            <a:r>
+              <a:rPr sz="1250" b="1" i="0">
                 <a:solidFill>
                   <a:srgbClr val="065A82"/>
                 </a:solidFill>
                 <a:latin typeface="Liberation Mono"/>
               </a:rPr>
-              <a:t>[st]</a:t>
-            </a:r>
-            <a:r>
-              <a:rPr sz="1500" b="1" i="0">
-                <a:solidFill>
-                  <a:srgbClr val="028090"/>
-                </a:solidFill>
-                <a:latin typeface="Liberation Mono"/>
-              </a:rPr>
-              <a:t>[raw]</a:t>
-            </a:r>
-            <a:r>
-              <a:rPr sz="1500" b="1" i="0">
-                <a:solidFill>
-                  <a:srgbClr val="1C7293"/>
-                </a:solidFill>
-                <a:latin typeface="Liberation Mono"/>
-              </a:rPr>
-              <a:t>[berry]</a:t>
-            </a:r>
-          </a:p>
-        </p:txBody>
-      </p:sp>
-      <p:sp>
-        <p:nvSpPr>
-          <p:cNvPr id="6" name="TextBox 5"/>
-          <p:cNvSpPr txBox="1"/>
-          <p:nvPr/>
-        </p:nvSpPr>
-        <p:spPr>
-          <a:xfrm>
-            <a:off x="777240" y="3035808"/>
-            <a:ext cx="4023360" cy="365760"/>
-          </a:xfrm>
-          <a:prstGeom prst="rect">
-            <a:avLst/>
-          </a:prstGeom>
-          <a:noFill/>
-        </p:spPr>
-        <p:txBody>
-          <a:bodyPr wrap="square" lIns="0" rIns="0" tIns="0" bIns="0" anchor="t">
-            <a:spAutoFit/>
-          </a:bodyPr>
-          <a:lstStyle/>
-          <a:p>
-            <a:pPr algn="l">
-              <a:lnSpc>
-                <a:spcPct val="115000"/>
-              </a:lnSpc>
-            </a:pPr>
-            <a:r>
-              <a:rPr sz="1500" b="0" i="0">
+              <a:t>[st][raw][berry]</a:t>
+            </a:r>
+            <a:r>
+              <a:rPr sz="1300" b="0" i="0">
                 <a:solidFill>
                   <a:srgbClr val="21295C"/>
                 </a:solidFill>
                 <a:latin typeface="Arial"/>
               </a:rPr>
-              <a:t>Модель видит </a:t>
-            </a:r>
-            <a:r>
-              <a:rPr sz="1500" b="1" i="0">
+              <a:t>  Модель видит </a:t>
+            </a:r>
+            <a:r>
+              <a:rPr sz="1300" b="1" i="0">
                 <a:solidFill>
                   <a:srgbClr val="21295C"/>
                 </a:solidFill>
@@ -7751,7 +7693,7 @@
               <a:t>3 токена</a:t>
             </a:r>
             <a:r>
-              <a:rPr sz="1500" b="0" i="0">
+              <a:rPr sz="1300" b="0" i="0">
                 <a:solidFill>
                   <a:srgbClr val="21295C"/>
                 </a:solidFill>
@@ -7764,24 +7706,24 @@
       </p:sp>
       <p:sp>
         <p:nvSpPr>
-          <p:cNvPr id="7" name="Rounded Rectangle 6"/>
+          <p:cNvPr id="6" name="Rounded Rectangle 5"/>
           <p:cNvSpPr/>
           <p:nvPr/>
         </p:nvSpPr>
         <p:spPr>
           <a:xfrm>
-            <a:off x="1636776" y="3374136"/>
-            <a:ext cx="2304288" cy="1226552"/>
+            <a:off x="1826679" y="2697479"/>
+            <a:ext cx="1924480" cy="2331720"/>
           </a:xfrm>
           <a:prstGeom prst="roundRect">
             <a:avLst>
-              <a:gd name="adj" fmla="val 24850"/>
+              <a:gd name="adj" fmla="val 15838"/>
             </a:avLst>
           </a:prstGeom>
           <a:solidFill>
-            <a:srgbClr val="111418"/>
+            <a:srgbClr val="FFFFFF"/>
           </a:solidFill>
-          <a:ln w="15240">
+          <a:ln w="16510">
             <a:solidFill>
               <a:srgbClr val="028090"/>
             </a:solidFill>
@@ -7812,7 +7754,7 @@
       </p:sp>
       <p:pic>
         <p:nvPicPr>
-          <p:cNvPr id="8" name="Picture 7" descr="strawberry-openai-crop.jpg"/>
+          <p:cNvPr id="7" name="Picture 6" descr="expanding-brain-strawberry.jpg"/>
           <p:cNvPicPr>
             <a:picLocks noChangeAspect="1"/>
           </p:cNvPicPr>
@@ -7826,56 +7768,17 @@
         </p:blipFill>
         <p:spPr>
           <a:xfrm>
-            <a:off x="1691640" y="3429000"/>
-            <a:ext cx="2194560" cy="1005142"/>
+            <a:off x="1918119" y="2788920"/>
+            <a:ext cx="1741600" cy="2148840"/>
           </a:xfrm>
           <a:prstGeom prst="rect">
             <a:avLst/>
           </a:prstGeom>
         </p:spPr>
       </p:pic>
-      <p:sp>
-        <p:nvSpPr>
-          <p:cNvPr id="9" name="TextBox 8"/>
-          <p:cNvSpPr txBox="1"/>
-          <p:nvPr/>
-        </p:nvSpPr>
-        <p:spPr>
-          <a:xfrm>
-            <a:off x="777240" y="4673840"/>
-            <a:ext cx="4023360" cy="237744"/>
-          </a:xfrm>
-          <a:prstGeom prst="rect">
-            <a:avLst/>
-          </a:prstGeom>
-          <a:noFill/>
-        </p:spPr>
-        <p:txBody>
-          <a:bodyPr wrap="square" lIns="0" rIns="0" tIns="0" bIns="0" anchor="t">
-            <a:spAutoFit/>
-          </a:bodyPr>
-          <a:lstStyle/>
-          <a:p>
-            <a:pPr algn="ctr">
-              <a:lnSpc>
-                <a:spcPct val="115000"/>
-              </a:lnSpc>
-            </a:pPr>
-            <a:r>
-              <a:rPr sz="900" b="0" i="1">
-                <a:solidFill>
-                  <a:srgbClr val="1C7293"/>
-                </a:solidFill>
-                <a:latin typeface="Arial"/>
-              </a:rPr>
-              <a:t>скриншот: ChatGPT, форум OpenAI, 2024</a:t>
-            </a:r>
-          </a:p>
-        </p:txBody>
-      </p:sp>
       <p:cxnSp>
         <p:nvCxnSpPr>
-          <p:cNvPr id="10" name="Connector 9"/>
+          <p:cNvPr id="8" name="Connector 7"/>
           <p:cNvCxnSpPr/>
           <p:nvPr/>
         </p:nvCxnSpPr>
@@ -7911,7 +7814,7 @@
       </p:cxnSp>
       <p:sp>
         <p:nvSpPr>
-          <p:cNvPr id="11" name="Oval 10"/>
+          <p:cNvPr id="9" name="Oval 8"/>
           <p:cNvSpPr/>
           <p:nvPr/>
         </p:nvSpPr>
@@ -7955,7 +7858,7 @@
       </p:sp>
       <p:sp>
         <p:nvSpPr>
-          <p:cNvPr id="12" name="Rounded Rectangle 11"/>
+          <p:cNvPr id="10" name="Rounded Rectangle 9"/>
           <p:cNvSpPr/>
           <p:nvPr/>
         </p:nvSpPr>
@@ -8003,7 +7906,7 @@
       </p:sp>
       <p:sp>
         <p:nvSpPr>
-          <p:cNvPr id="13" name="TextBox 12"/>
+          <p:cNvPr id="11" name="TextBox 10"/>
           <p:cNvSpPr txBox="1"/>
           <p:nvPr/>
         </p:nvSpPr>
@@ -8042,7 +7945,7 @@
       </p:sp>
       <p:sp>
         <p:nvSpPr>
-          <p:cNvPr id="14" name="TextBox 13"/>
+          <p:cNvPr id="12" name="TextBox 11"/>
           <p:cNvSpPr txBox="1"/>
           <p:nvPr/>
         </p:nvSpPr>
@@ -8081,7 +7984,7 @@
       </p:sp>
       <p:sp>
         <p:nvSpPr>
-          <p:cNvPr id="15" name="Oval 14"/>
+          <p:cNvPr id="13" name="Oval 12"/>
           <p:cNvSpPr/>
           <p:nvPr/>
         </p:nvSpPr>
@@ -8125,7 +8028,7 @@
       </p:sp>
       <p:sp>
         <p:nvSpPr>
-          <p:cNvPr id="16" name="Rounded Rectangle 15"/>
+          <p:cNvPr id="14" name="Rounded Rectangle 13"/>
           <p:cNvSpPr/>
           <p:nvPr/>
         </p:nvSpPr>
@@ -8173,7 +8076,7 @@
       </p:sp>
       <p:sp>
         <p:nvSpPr>
-          <p:cNvPr id="17" name="TextBox 16"/>
+          <p:cNvPr id="15" name="TextBox 14"/>
           <p:cNvSpPr txBox="1"/>
           <p:nvPr/>
         </p:nvSpPr>
@@ -8212,7 +8115,7 @@
       </p:sp>
       <p:sp>
         <p:nvSpPr>
-          <p:cNvPr id="18" name="TextBox 17"/>
+          <p:cNvPr id="16" name="TextBox 15"/>
           <p:cNvSpPr txBox="1"/>
           <p:nvPr/>
         </p:nvSpPr>
@@ -8251,7 +8154,7 @@
       </p:sp>
       <p:sp>
         <p:nvSpPr>
-          <p:cNvPr id="19" name="Oval 18"/>
+          <p:cNvPr id="17" name="Oval 16"/>
           <p:cNvSpPr/>
           <p:nvPr/>
         </p:nvSpPr>
@@ -8295,7 +8198,7 @@
       </p:sp>
       <p:sp>
         <p:nvSpPr>
-          <p:cNvPr id="20" name="Rounded Rectangle 19"/>
+          <p:cNvPr id="18" name="Rounded Rectangle 17"/>
           <p:cNvSpPr/>
           <p:nvPr/>
         </p:nvSpPr>
@@ -8343,7 +8246,7 @@
       </p:sp>
       <p:sp>
         <p:nvSpPr>
-          <p:cNvPr id="21" name="TextBox 20"/>
+          <p:cNvPr id="19" name="TextBox 18"/>
           <p:cNvSpPr txBox="1"/>
           <p:nvPr/>
         </p:nvSpPr>
@@ -8382,7 +8285,7 @@
       </p:sp>
       <p:sp>
         <p:nvSpPr>
-          <p:cNvPr id="22" name="TextBox 21"/>
+          <p:cNvPr id="20" name="TextBox 19"/>
           <p:cNvSpPr txBox="1"/>
           <p:nvPr/>
         </p:nvSpPr>
@@ -8421,7 +8324,7 @@
       </p:sp>
       <p:sp>
         <p:nvSpPr>
-          <p:cNvPr id="23" name="Oval 22"/>
+          <p:cNvPr id="21" name="Oval 20"/>
           <p:cNvSpPr/>
           <p:nvPr/>
         </p:nvSpPr>
@@ -8465,7 +8368,7 @@
       </p:sp>
       <p:sp>
         <p:nvSpPr>
-          <p:cNvPr id="24" name="Rounded Rectangle 23"/>
+          <p:cNvPr id="22" name="Rounded Rectangle 21"/>
           <p:cNvSpPr/>
           <p:nvPr/>
         </p:nvSpPr>
@@ -8513,7 +8416,7 @@
       </p:sp>
       <p:sp>
         <p:nvSpPr>
-          <p:cNvPr id="25" name="TextBox 24"/>
+          <p:cNvPr id="23" name="TextBox 22"/>
           <p:cNvSpPr txBox="1"/>
           <p:nvPr/>
         </p:nvSpPr>
@@ -8552,7 +8455,7 @@
       </p:sp>
       <p:sp>
         <p:nvSpPr>
-          <p:cNvPr id="26" name="TextBox 25"/>
+          <p:cNvPr id="24" name="TextBox 23"/>
           <p:cNvSpPr txBox="1"/>
           <p:nvPr/>
         </p:nvSpPr>
@@ -8591,7 +8494,7 @@
       </p:sp>
       <p:sp>
         <p:nvSpPr>
-          <p:cNvPr id="27" name="Rounded Rectangle 26"/>
+          <p:cNvPr id="25" name="Rounded Rectangle 24"/>
           <p:cNvSpPr/>
           <p:nvPr/>
         </p:nvSpPr>
@@ -8639,7 +8542,7 @@
       </p:sp>
       <p:sp>
         <p:nvSpPr>
-          <p:cNvPr id="28" name="TextBox 27"/>
+          <p:cNvPr id="26" name="TextBox 25"/>
           <p:cNvSpPr txBox="1"/>
           <p:nvPr/>
         </p:nvSpPr>
@@ -8678,7 +8581,7 @@
       </p:sp>
       <p:sp>
         <p:nvSpPr>
-          <p:cNvPr id="29" name="TextBox 28"/>
+          <p:cNvPr id="27" name="TextBox 26"/>
           <p:cNvSpPr txBox="1"/>
           <p:nvPr/>
         </p:nvSpPr>
@@ -8726,7 +8629,7 @@
       </p:sp>
       <p:sp>
         <p:nvSpPr>
-          <p:cNvPr id="30" name="TextBox 29"/>
+          <p:cNvPr id="28" name="TextBox 27"/>
           <p:cNvSpPr txBox="1"/>
           <p:nvPr/>
         </p:nvSpPr>
@@ -9771,8 +9674,8 @@
         </p:nvSpPr>
         <p:spPr>
           <a:xfrm>
-            <a:off x="731520" y="1591056"/>
-            <a:ext cx="3154680" cy="594360"/>
+            <a:off x="731520" y="1572768"/>
+            <a:ext cx="3154680" cy="566928"/>
           </a:xfrm>
           <a:prstGeom prst="rect">
             <a:avLst/>
@@ -9787,72 +9690,24 @@
           <a:p>
             <a:pPr algn="l">
               <a:lnSpc>
-                <a:spcPct val="112000"/>
+                <a:spcPct val="110000"/>
               </a:lnSpc>
             </a:pPr>
             <a:r>
-              <a:rPr sz="1150" b="0" i="0">
+              <a:rPr sz="1050" b="0" i="0">
                 <a:solidFill>
                   <a:srgbClr val="21295C"/>
                 </a:solidFill>
                 <a:latin typeface="Arial"/>
               </a:rPr>
-              <a:t>Юзернейм с Reddit в словаре GPT — модель не могла его повторить.</a:t>
-            </a:r>
-          </a:p>
-        </p:txBody>
-      </p:sp>
-      <p:sp>
-        <p:nvSpPr>
-          <p:cNvPr id="6" name="Rounded Rectangle 5"/>
-          <p:cNvSpPr/>
-          <p:nvPr/>
-        </p:nvSpPr>
-        <p:spPr>
-          <a:xfrm>
-            <a:off x="1110996" y="2157984"/>
-            <a:ext cx="2395728" cy="819040"/>
-          </a:xfrm>
-          <a:prstGeom prst="roundRect">
-            <a:avLst>
-              <a:gd name="adj" fmla="val 25000"/>
-            </a:avLst>
-          </a:prstGeom>
-          <a:solidFill>
-            <a:srgbClr val="FFFFFF"/>
-          </a:solidFill>
-          <a:ln w="13970">
-            <a:solidFill>
-              <a:srgbClr val="028090"/>
-            </a:solidFill>
-          </a:ln>
-          <a:effectLst/>
-        </p:spPr>
-        <p:style>
-          <a:lnRef idx="1">
-            <a:schemeClr val="accent1"/>
-          </a:lnRef>
-          <a:fillRef idx="3">
-            <a:schemeClr val="accent1"/>
-          </a:fillRef>
-          <a:effectRef idx="2">
-            <a:schemeClr val="accent1"/>
-          </a:effectRef>
-          <a:fontRef idx="minor">
-            <a:schemeClr val="lt1"/>
-          </a:fontRef>
-        </p:style>
-        <p:txBody>
-          <a:bodyPr rtlCol="0" anchor="ctr"/>
-          <a:lstStyle/>
-          <a:p>
-            <a:pPr algn="ctr"/>
+              <a:t>Юзернейм с Reddit в словаре GPT — модель не могла его повторить (имя токена — отсылка к покемону Magikarp).</a:t>
+            </a:r>
           </a:p>
         </p:txBody>
       </p:sp>
       <p:pic>
         <p:nvPicPr>
-          <p:cNvPr id="7" name="Picture 6" descr="solidgoldmagikarp-1.png"/>
+          <p:cNvPr id="6" name="Picture 5" descr="magikarp-clean.png"/>
           <p:cNvPicPr>
             <a:picLocks noChangeAspect="1"/>
           </p:cNvPicPr>
@@ -9866,8 +9721,8 @@
         </p:blipFill>
         <p:spPr>
           <a:xfrm>
-            <a:off x="1165860" y="2212848"/>
-            <a:ext cx="2286000" cy="709312"/>
+            <a:off x="1636386" y="2212848"/>
+            <a:ext cx="1344947" cy="1097280"/>
           </a:xfrm>
           <a:prstGeom prst="rect">
             <a:avLst/>
@@ -9876,14 +9731,14 @@
       </p:pic>
       <p:sp>
         <p:nvSpPr>
-          <p:cNvPr id="8" name="TextBox 7"/>
+          <p:cNvPr id="7" name="TextBox 6"/>
           <p:cNvSpPr txBox="1"/>
           <p:nvPr/>
         </p:nvSpPr>
         <p:spPr>
           <a:xfrm>
-            <a:off x="731520" y="3105040"/>
-            <a:ext cx="3154680" cy="822960"/>
+            <a:off x="731520" y="3401568"/>
+            <a:ext cx="3154680" cy="566928"/>
           </a:xfrm>
           <a:prstGeom prst="rect">
             <a:avLst/>
@@ -9898,11 +9753,11 @@
           <a:p>
             <a:pPr algn="l">
               <a:lnSpc>
-                <a:spcPct val="112000"/>
+                <a:spcPct val="110000"/>
               </a:lnSpc>
             </a:pPr>
             <a:r>
-              <a:rPr sz="1100" b="1" i="0">
+              <a:rPr sz="1000" b="1" i="0">
                 <a:solidFill>
                   <a:srgbClr val="028090"/>
                 </a:solidFill>
@@ -9911,7 +9766,7 @@
               <a:t>Механизм: </a:t>
             </a:r>
             <a:r>
-              <a:rPr sz="1100" b="0" i="0">
+              <a:rPr sz="1000" b="0" i="0">
                 <a:solidFill>
                   <a:srgbClr val="21295C"/>
                 </a:solidFill>
@@ -9924,7 +9779,7 @@
       </p:sp>
       <p:sp>
         <p:nvSpPr>
-          <p:cNvPr id="9" name="Rounded Rectangle 8"/>
+          <p:cNvPr id="8" name="Rounded Rectangle 7"/>
           <p:cNvSpPr/>
           <p:nvPr/>
         </p:nvSpPr>
@@ -9972,7 +9827,7 @@
       </p:sp>
       <p:sp>
         <p:nvSpPr>
-          <p:cNvPr id="10" name="TextBox 9"/>
+          <p:cNvPr id="9" name="TextBox 8"/>
           <p:cNvSpPr txBox="1"/>
           <p:nvPr/>
         </p:nvSpPr>
@@ -10011,7 +9866,7 @@
       </p:sp>
       <p:sp>
         <p:nvSpPr>
-          <p:cNvPr id="11" name="TextBox 10"/>
+          <p:cNvPr id="10" name="TextBox 9"/>
           <p:cNvSpPr txBox="1"/>
           <p:nvPr/>
         </p:nvSpPr>
@@ -10088,7 +9943,7 @@
       </p:sp>
       <p:sp>
         <p:nvSpPr>
-          <p:cNvPr id="12" name="Rounded Rectangle 11"/>
+          <p:cNvPr id="11" name="Rounded Rectangle 10"/>
           <p:cNvSpPr/>
           <p:nvPr/>
         </p:nvSpPr>
@@ -10136,7 +9991,7 @@
       </p:sp>
       <p:sp>
         <p:nvSpPr>
-          <p:cNvPr id="13" name="TextBox 12"/>
+          <p:cNvPr id="12" name="TextBox 11"/>
           <p:cNvSpPr txBox="1"/>
           <p:nvPr/>
         </p:nvSpPr>
@@ -10175,7 +10030,7 @@
       </p:sp>
       <p:sp>
         <p:nvSpPr>
-          <p:cNvPr id="14" name="TextBox 13"/>
+          <p:cNvPr id="13" name="TextBox 12"/>
           <p:cNvSpPr txBox="1"/>
           <p:nvPr/>
         </p:nvSpPr>
@@ -10242,7 +10097,7 @@
       </p:sp>
       <p:sp>
         <p:nvSpPr>
-          <p:cNvPr id="15" name="TextBox 14"/>
+          <p:cNvPr id="14" name="TextBox 13"/>
           <p:cNvSpPr txBox="1"/>
           <p:nvPr/>
         </p:nvSpPr>
@@ -10281,7 +10136,7 @@
       </p:sp>
       <p:sp>
         <p:nvSpPr>
-          <p:cNvPr id="16" name="Rounded Rectangle 15"/>
+          <p:cNvPr id="15" name="Rounded Rectangle 14"/>
           <p:cNvSpPr/>
           <p:nvPr/>
         </p:nvSpPr>
@@ -10329,7 +10184,7 @@
       </p:sp>
       <p:sp>
         <p:nvSpPr>
-          <p:cNvPr id="17" name="TextBox 16"/>
+          <p:cNvPr id="16" name="TextBox 15"/>
           <p:cNvSpPr txBox="1"/>
           <p:nvPr/>
         </p:nvSpPr>
@@ -10368,7 +10223,7 @@
       </p:sp>
       <p:sp>
         <p:nvSpPr>
-          <p:cNvPr id="18" name="Rounded Rectangle 17"/>
+          <p:cNvPr id="17" name="Rounded Rectangle 16"/>
           <p:cNvSpPr/>
           <p:nvPr/>
         </p:nvSpPr>
@@ -10416,7 +10271,7 @@
       </p:sp>
       <p:sp>
         <p:nvSpPr>
-          <p:cNvPr id="19" name="TextBox 18"/>
+          <p:cNvPr id="18" name="TextBox 17"/>
           <p:cNvSpPr txBox="1"/>
           <p:nvPr/>
         </p:nvSpPr>
@@ -10455,7 +10310,7 @@
       </p:sp>
       <p:sp>
         <p:nvSpPr>
-          <p:cNvPr id="20" name="TextBox 19"/>
+          <p:cNvPr id="19" name="TextBox 18"/>
           <p:cNvSpPr txBox="1"/>
           <p:nvPr/>
         </p:nvSpPr>
@@ -10494,7 +10349,7 @@
       </p:sp>
       <p:sp>
         <p:nvSpPr>
-          <p:cNvPr id="21" name="TextBox 20"/>
+          <p:cNvPr id="20" name="TextBox 19"/>
           <p:cNvSpPr txBox="1"/>
           <p:nvPr/>
         </p:nvSpPr>
@@ -11211,7 +11066,7 @@
       </p:sp>
       <p:pic>
         <p:nvPicPr>
-          <p:cNvPr id="7" name="Picture 6" descr="word2vec-king-analogy-arrows.png"/>
+          <p:cNvPr id="7" name="Picture 6" descr="pam-same-picture.jpg"/>
           <p:cNvPicPr>
             <a:picLocks noChangeAspect="1"/>
           </p:cNvPicPr>
@@ -11225,8 +11080,8 @@
         </p:blipFill>
         <p:spPr>
           <a:xfrm>
-            <a:off x="6775704" y="1424178"/>
-            <a:ext cx="4782312" cy="2391156"/>
+            <a:off x="6775704" y="1512474"/>
+            <a:ext cx="4782312" cy="2690050"/>
           </a:xfrm>
           <a:prstGeom prst="rect">
             <a:avLst/>
@@ -11235,46 +11090,7 @@
       </p:pic>
       <p:sp>
         <p:nvSpPr>
-          <p:cNvPr id="8" name="TextBox 7"/>
-          <p:cNvSpPr txBox="1"/>
-          <p:nvPr/>
-        </p:nvSpPr>
-        <p:spPr>
-          <a:xfrm>
-            <a:off x="6775704" y="4425695"/>
-            <a:ext cx="4782312" cy="475488"/>
-          </a:xfrm>
-          <a:prstGeom prst="rect">
-            <a:avLst/>
-          </a:prstGeom>
-          <a:noFill/>
-        </p:spPr>
-        <p:txBody>
-          <a:bodyPr wrap="square" lIns="0" rIns="0" tIns="0" bIns="0" anchor="t">
-            <a:spAutoFit/>
-          </a:bodyPr>
-          <a:lstStyle/>
-          <a:p>
-            <a:pPr algn="ctr">
-              <a:lnSpc>
-                <a:spcPct val="105000"/>
-              </a:lnSpc>
-            </a:pPr>
-            <a:r>
-              <a:rPr sz="950" b="0" i="1">
-                <a:solidFill>
-                  <a:srgbClr val="1C7293"/>
-                </a:solidFill>
-                <a:latin typeface="Arial"/>
-              </a:rPr>
-              <a:t>Классика word2vec: king − man + woman ≈ queen (Jay Alammar, illustrated word2vec)</a:t>
-            </a:r>
-          </a:p>
-        </p:txBody>
-      </p:sp>
-      <p:sp>
-        <p:nvSpPr>
-          <p:cNvPr id="9" name="Rounded Rectangle 8"/>
+          <p:cNvPr id="8" name="Rounded Rectangle 7"/>
           <p:cNvSpPr/>
           <p:nvPr/>
         </p:nvSpPr>
@@ -11320,7 +11136,7 @@
       </p:sp>
       <p:sp>
         <p:nvSpPr>
-          <p:cNvPr id="10" name="TextBox 9"/>
+          <p:cNvPr id="9" name="TextBox 8"/>
           <p:cNvSpPr txBox="1"/>
           <p:nvPr/>
         </p:nvSpPr>
@@ -11359,7 +11175,7 @@
       </p:sp>
       <p:sp>
         <p:nvSpPr>
-          <p:cNvPr id="11" name="Right Arrow 10"/>
+          <p:cNvPr id="10" name="Right Arrow 9"/>
           <p:cNvSpPr/>
           <p:nvPr/>
         </p:nvSpPr>
@@ -11403,7 +11219,7 @@
       </p:sp>
       <p:sp>
         <p:nvSpPr>
-          <p:cNvPr id="12" name="Rounded Rectangle 11"/>
+          <p:cNvPr id="11" name="Rounded Rectangle 10"/>
           <p:cNvSpPr/>
           <p:nvPr/>
         </p:nvSpPr>
@@ -11449,7 +11265,7 @@
       </p:sp>
       <p:sp>
         <p:nvSpPr>
-          <p:cNvPr id="13" name="TextBox 12"/>
+          <p:cNvPr id="12" name="TextBox 11"/>
           <p:cNvSpPr txBox="1"/>
           <p:nvPr/>
         </p:nvSpPr>
@@ -11488,7 +11304,7 @@
       </p:sp>
       <p:sp>
         <p:nvSpPr>
-          <p:cNvPr id="14" name="Right Arrow 13"/>
+          <p:cNvPr id="13" name="Right Arrow 12"/>
           <p:cNvSpPr/>
           <p:nvPr/>
         </p:nvSpPr>
@@ -11532,7 +11348,7 @@
       </p:sp>
       <p:sp>
         <p:nvSpPr>
-          <p:cNvPr id="15" name="Rounded Rectangle 14"/>
+          <p:cNvPr id="14" name="Rounded Rectangle 13"/>
           <p:cNvSpPr/>
           <p:nvPr/>
         </p:nvSpPr>
@@ -11578,7 +11394,7 @@
       </p:sp>
       <p:sp>
         <p:nvSpPr>
-          <p:cNvPr id="16" name="TextBox 15"/>
+          <p:cNvPr id="15" name="TextBox 14"/>
           <p:cNvSpPr txBox="1"/>
           <p:nvPr/>
         </p:nvSpPr>
@@ -11617,7 +11433,7 @@
       </p:sp>
       <p:sp>
         <p:nvSpPr>
-          <p:cNvPr id="17" name="Right Arrow 16"/>
+          <p:cNvPr id="16" name="Right Arrow 15"/>
           <p:cNvSpPr/>
           <p:nvPr/>
         </p:nvSpPr>
@@ -11661,7 +11477,7 @@
       </p:sp>
       <p:sp>
         <p:nvSpPr>
-          <p:cNvPr id="18" name="Rounded Rectangle 17"/>
+          <p:cNvPr id="17" name="Rounded Rectangle 16"/>
           <p:cNvSpPr/>
           <p:nvPr/>
         </p:nvSpPr>
@@ -11707,7 +11523,7 @@
       </p:sp>
       <p:sp>
         <p:nvSpPr>
-          <p:cNvPr id="19" name="TextBox 18"/>
+          <p:cNvPr id="18" name="TextBox 17"/>
           <p:cNvSpPr txBox="1"/>
           <p:nvPr/>
         </p:nvSpPr>
@@ -11746,7 +11562,7 @@
       </p:sp>
       <p:sp>
         <p:nvSpPr>
-          <p:cNvPr id="20" name="Right Arrow 19"/>
+          <p:cNvPr id="19" name="Right Arrow 18"/>
           <p:cNvSpPr/>
           <p:nvPr/>
         </p:nvSpPr>
@@ -11790,7 +11606,7 @@
       </p:sp>
       <p:sp>
         <p:nvSpPr>
-          <p:cNvPr id="21" name="Rounded Rectangle 20"/>
+          <p:cNvPr id="20" name="Rounded Rectangle 19"/>
           <p:cNvSpPr/>
           <p:nvPr/>
         </p:nvSpPr>
@@ -11836,7 +11652,7 @@
       </p:sp>
       <p:sp>
         <p:nvSpPr>
-          <p:cNvPr id="22" name="TextBox 21"/>
+          <p:cNvPr id="21" name="TextBox 20"/>
           <p:cNvSpPr txBox="1"/>
           <p:nvPr/>
         </p:nvSpPr>
@@ -11875,7 +11691,7 @@
       </p:sp>
       <p:sp>
         <p:nvSpPr>
-          <p:cNvPr id="23" name="Right Arrow 22"/>
+          <p:cNvPr id="22" name="Right Arrow 21"/>
           <p:cNvSpPr/>
           <p:nvPr/>
         </p:nvSpPr>
@@ -11919,7 +11735,7 @@
       </p:sp>
       <p:sp>
         <p:nvSpPr>
-          <p:cNvPr id="24" name="Rounded Rectangle 23"/>
+          <p:cNvPr id="23" name="Rounded Rectangle 22"/>
           <p:cNvSpPr/>
           <p:nvPr/>
         </p:nvSpPr>
@@ -11965,7 +11781,7 @@
       </p:sp>
       <p:sp>
         <p:nvSpPr>
-          <p:cNvPr id="25" name="TextBox 24"/>
+          <p:cNvPr id="24" name="TextBox 23"/>
           <p:cNvSpPr txBox="1"/>
           <p:nvPr/>
         </p:nvSpPr>
@@ -12004,7 +11820,7 @@
       </p:sp>
       <p:sp>
         <p:nvSpPr>
-          <p:cNvPr id="26" name="Right Arrow 25"/>
+          <p:cNvPr id="25" name="Right Arrow 24"/>
           <p:cNvSpPr/>
           <p:nvPr/>
         </p:nvSpPr>
@@ -12048,7 +11864,7 @@
       </p:sp>
       <p:sp>
         <p:nvSpPr>
-          <p:cNvPr id="27" name="Rounded Rectangle 26"/>
+          <p:cNvPr id="26" name="Rounded Rectangle 25"/>
           <p:cNvSpPr/>
           <p:nvPr/>
         </p:nvSpPr>
@@ -12094,7 +11910,7 @@
       </p:sp>
       <p:sp>
         <p:nvSpPr>
-          <p:cNvPr id="28" name="TextBox 27"/>
+          <p:cNvPr id="27" name="TextBox 26"/>
           <p:cNvSpPr txBox="1"/>
           <p:nvPr/>
         </p:nvSpPr>
@@ -12133,7 +11949,7 @@
       </p:sp>
       <p:sp>
         <p:nvSpPr>
-          <p:cNvPr id="29" name="TextBox 28"/>
+          <p:cNvPr id="28" name="TextBox 27"/>
           <p:cNvSpPr txBox="1"/>
           <p:nvPr/>
         </p:nvSpPr>
@@ -14980,33 +14796,9 @@
           </a:p>
         </p:txBody>
       </p:sp>
-      <p:pic>
-        <p:nvPicPr>
-          <p:cNvPr id="23" name="Picture 22" descr="s14-space.png"/>
-          <p:cNvPicPr>
-            <a:picLocks noChangeAspect="1"/>
-          </p:cNvPicPr>
-          <p:nvPr/>
-        </p:nvPicPr>
-        <p:blipFill>
-          <a:blip r:embed="rId2"/>
-          <a:stretch>
-            <a:fillRect/>
-          </a:stretch>
-        </p:blipFill>
-        <p:spPr>
-          <a:xfrm>
-            <a:off x="4800600" y="2148840"/>
-            <a:ext cx="1554480" cy="1295400"/>
-          </a:xfrm>
-          <a:prstGeom prst="rect">
-            <a:avLst/>
-          </a:prstGeom>
-        </p:spPr>
-      </p:pic>
-      <p:sp>
-        <p:nvSpPr>
-          <p:cNvPr id="24" name="Rounded Rectangle 23"/>
+      <p:sp>
+        <p:nvSpPr>
+          <p:cNvPr id="23" name="Rounded Rectangle 22"/>
           <p:cNvSpPr/>
           <p:nvPr/>
         </p:nvSpPr>
@@ -15054,7 +14846,7 @@
       </p:sp>
       <p:sp>
         <p:nvSpPr>
-          <p:cNvPr id="25" name="TextBox 24"/>
+          <p:cNvPr id="24" name="TextBox 23"/>
           <p:cNvSpPr txBox="1"/>
           <p:nvPr/>
         </p:nvSpPr>
@@ -15093,7 +14885,7 @@
       </p:sp>
       <p:sp>
         <p:nvSpPr>
-          <p:cNvPr id="26" name="TextBox 25"/>
+          <p:cNvPr id="25" name="TextBox 24"/>
           <p:cNvSpPr txBox="1"/>
           <p:nvPr/>
         </p:nvSpPr>
@@ -15150,7 +14942,7 @@
       </p:sp>
       <p:sp>
         <p:nvSpPr>
-          <p:cNvPr id="27" name="Rounded Rectangle 26"/>
+          <p:cNvPr id="26" name="Rounded Rectangle 25"/>
           <p:cNvSpPr/>
           <p:nvPr/>
         </p:nvSpPr>
@@ -15198,7 +14990,7 @@
       </p:sp>
       <p:sp>
         <p:nvSpPr>
-          <p:cNvPr id="28" name="TextBox 27"/>
+          <p:cNvPr id="27" name="TextBox 26"/>
           <p:cNvSpPr txBox="1"/>
           <p:nvPr/>
         </p:nvSpPr>
@@ -15237,7 +15029,7 @@
       </p:sp>
       <p:sp>
         <p:nvSpPr>
-          <p:cNvPr id="29" name="TextBox 28"/>
+          <p:cNvPr id="28" name="TextBox 27"/>
           <p:cNvSpPr txBox="1"/>
           <p:nvPr/>
         </p:nvSpPr>
@@ -15276,7 +15068,7 @@
       </p:sp>
       <p:sp>
         <p:nvSpPr>
-          <p:cNvPr id="30" name="Rounded Rectangle 29"/>
+          <p:cNvPr id="29" name="Rounded Rectangle 28"/>
           <p:cNvSpPr/>
           <p:nvPr/>
         </p:nvSpPr>
@@ -15324,7 +15116,7 @@
       </p:sp>
       <p:sp>
         <p:nvSpPr>
-          <p:cNvPr id="31" name="TextBox 30"/>
+          <p:cNvPr id="30" name="TextBox 29"/>
           <p:cNvSpPr txBox="1"/>
           <p:nvPr/>
         </p:nvSpPr>
@@ -15363,7 +15155,7 @@
       </p:sp>
       <p:sp>
         <p:nvSpPr>
-          <p:cNvPr id="32" name="TextBox 31"/>
+          <p:cNvPr id="31" name="TextBox 30"/>
           <p:cNvSpPr txBox="1"/>
           <p:nvPr/>
         </p:nvSpPr>
@@ -15402,7 +15194,7 @@
       </p:sp>
       <p:sp>
         <p:nvSpPr>
-          <p:cNvPr id="33" name="Rounded Rectangle 32"/>
+          <p:cNvPr id="32" name="Rounded Rectangle 31"/>
           <p:cNvSpPr/>
           <p:nvPr/>
         </p:nvSpPr>
@@ -15450,7 +15242,7 @@
       </p:sp>
       <p:sp>
         <p:nvSpPr>
-          <p:cNvPr id="34" name="TextBox 33"/>
+          <p:cNvPr id="33" name="TextBox 32"/>
           <p:cNvSpPr txBox="1"/>
           <p:nvPr/>
         </p:nvSpPr>
@@ -15489,7 +15281,7 @@
       </p:sp>
       <p:sp>
         <p:nvSpPr>
-          <p:cNvPr id="35" name="TextBox 34"/>
+          <p:cNvPr id="34" name="TextBox 33"/>
           <p:cNvSpPr txBox="1"/>
           <p:nvPr/>
         </p:nvSpPr>
@@ -19226,7 +19018,7 @@
       </p:sp>
       <p:pic>
         <p:nvPicPr>
-          <p:cNvPr id="7" name="Picture 6" descr="attention-paper-title.png"/>
+          <p:cNvPr id="7" name="Picture 6" descr="spotlight-clean.jpg"/>
           <p:cNvPicPr>
             <a:picLocks noChangeAspect="1"/>
           </p:cNvPicPr>
@@ -19240,8 +19032,8 @@
         </p:blipFill>
         <p:spPr>
           <a:xfrm>
-            <a:off x="7856150" y="923544"/>
-            <a:ext cx="2621418" cy="3392423"/>
+            <a:off x="6775704" y="1089612"/>
+            <a:ext cx="4782312" cy="3535775"/>
           </a:xfrm>
           <a:prstGeom prst="rect">
             <a:avLst/>
@@ -19250,46 +19042,7 @@
       </p:pic>
       <p:sp>
         <p:nvSpPr>
-          <p:cNvPr id="8" name="TextBox 7"/>
-          <p:cNvSpPr txBox="1"/>
-          <p:nvPr/>
-        </p:nvSpPr>
-        <p:spPr>
-          <a:xfrm>
-            <a:off x="6775704" y="4425695"/>
-            <a:ext cx="4782312" cy="475488"/>
-          </a:xfrm>
-          <a:prstGeom prst="rect">
-            <a:avLst/>
-          </a:prstGeom>
-          <a:noFill/>
-        </p:spPr>
-        <p:txBody>
-          <a:bodyPr wrap="square" lIns="0" rIns="0" tIns="0" bIns="0" anchor="t">
-            <a:spAutoFit/>
-          </a:bodyPr>
-          <a:lstStyle/>
-          <a:p>
-            <a:pPr algn="ctr">
-              <a:lnSpc>
-                <a:spcPct val="105000"/>
-              </a:lnSpc>
-            </a:pPr>
-            <a:r>
-              <a:rPr sz="950" b="0" i="1">
-                <a:solidFill>
-                  <a:srgbClr val="1C7293"/>
-                </a:solidFill>
-                <a:latin typeface="Arial"/>
-              </a:rPr>
-              <a:t>Статья, давшая механизму имя: Vaswani et al., «Attention Is All You Need», 2017 (arXiv:1706.03762)</a:t>
-            </a:r>
-          </a:p>
-        </p:txBody>
-      </p:sp>
-      <p:sp>
-        <p:nvSpPr>
-          <p:cNvPr id="9" name="Rounded Rectangle 8"/>
+          <p:cNvPr id="8" name="Rounded Rectangle 7"/>
           <p:cNvSpPr/>
           <p:nvPr/>
         </p:nvSpPr>
@@ -19335,7 +19088,7 @@
       </p:sp>
       <p:sp>
         <p:nvSpPr>
-          <p:cNvPr id="10" name="TextBox 9"/>
+          <p:cNvPr id="9" name="TextBox 8"/>
           <p:cNvSpPr txBox="1"/>
           <p:nvPr/>
         </p:nvSpPr>
@@ -19374,7 +19127,7 @@
       </p:sp>
       <p:sp>
         <p:nvSpPr>
-          <p:cNvPr id="11" name="Right Arrow 10"/>
+          <p:cNvPr id="10" name="Right Arrow 9"/>
           <p:cNvSpPr/>
           <p:nvPr/>
         </p:nvSpPr>
@@ -19418,7 +19171,7 @@
       </p:sp>
       <p:sp>
         <p:nvSpPr>
-          <p:cNvPr id="12" name="Rounded Rectangle 11"/>
+          <p:cNvPr id="11" name="Rounded Rectangle 10"/>
           <p:cNvSpPr/>
           <p:nvPr/>
         </p:nvSpPr>
@@ -19464,7 +19217,7 @@
       </p:sp>
       <p:sp>
         <p:nvSpPr>
-          <p:cNvPr id="13" name="TextBox 12"/>
+          <p:cNvPr id="12" name="TextBox 11"/>
           <p:cNvSpPr txBox="1"/>
           <p:nvPr/>
         </p:nvSpPr>
@@ -19503,7 +19256,7 @@
       </p:sp>
       <p:sp>
         <p:nvSpPr>
-          <p:cNvPr id="14" name="Right Arrow 13"/>
+          <p:cNvPr id="13" name="Right Arrow 12"/>
           <p:cNvSpPr/>
           <p:nvPr/>
         </p:nvSpPr>
@@ -19547,7 +19300,7 @@
       </p:sp>
       <p:sp>
         <p:nvSpPr>
-          <p:cNvPr id="15" name="Rounded Rectangle 14"/>
+          <p:cNvPr id="14" name="Rounded Rectangle 13"/>
           <p:cNvSpPr/>
           <p:nvPr/>
         </p:nvSpPr>
@@ -19593,7 +19346,7 @@
       </p:sp>
       <p:sp>
         <p:nvSpPr>
-          <p:cNvPr id="16" name="TextBox 15"/>
+          <p:cNvPr id="15" name="TextBox 14"/>
           <p:cNvSpPr txBox="1"/>
           <p:nvPr/>
         </p:nvSpPr>
@@ -19632,7 +19385,7 @@
       </p:sp>
       <p:sp>
         <p:nvSpPr>
-          <p:cNvPr id="17" name="Right Arrow 16"/>
+          <p:cNvPr id="16" name="Right Arrow 15"/>
           <p:cNvSpPr/>
           <p:nvPr/>
         </p:nvSpPr>
@@ -19676,7 +19429,7 @@
       </p:sp>
       <p:sp>
         <p:nvSpPr>
-          <p:cNvPr id="18" name="Rounded Rectangle 17"/>
+          <p:cNvPr id="17" name="Rounded Rectangle 16"/>
           <p:cNvSpPr/>
           <p:nvPr/>
         </p:nvSpPr>
@@ -19722,7 +19475,7 @@
       </p:sp>
       <p:sp>
         <p:nvSpPr>
-          <p:cNvPr id="19" name="TextBox 18"/>
+          <p:cNvPr id="18" name="TextBox 17"/>
           <p:cNvSpPr txBox="1"/>
           <p:nvPr/>
         </p:nvSpPr>
@@ -19761,7 +19514,7 @@
       </p:sp>
       <p:sp>
         <p:nvSpPr>
-          <p:cNvPr id="20" name="Right Arrow 19"/>
+          <p:cNvPr id="19" name="Right Arrow 18"/>
           <p:cNvSpPr/>
           <p:nvPr/>
         </p:nvSpPr>
@@ -19805,7 +19558,7 @@
       </p:sp>
       <p:sp>
         <p:nvSpPr>
-          <p:cNvPr id="21" name="Rounded Rectangle 20"/>
+          <p:cNvPr id="20" name="Rounded Rectangle 19"/>
           <p:cNvSpPr/>
           <p:nvPr/>
         </p:nvSpPr>
@@ -19851,7 +19604,7 @@
       </p:sp>
       <p:sp>
         <p:nvSpPr>
-          <p:cNvPr id="22" name="TextBox 21"/>
+          <p:cNvPr id="21" name="TextBox 20"/>
           <p:cNvSpPr txBox="1"/>
           <p:nvPr/>
         </p:nvSpPr>
@@ -19890,7 +19643,7 @@
       </p:sp>
       <p:sp>
         <p:nvSpPr>
-          <p:cNvPr id="23" name="Right Arrow 22"/>
+          <p:cNvPr id="22" name="Right Arrow 21"/>
           <p:cNvSpPr/>
           <p:nvPr/>
         </p:nvSpPr>
@@ -19934,7 +19687,7 @@
       </p:sp>
       <p:sp>
         <p:nvSpPr>
-          <p:cNvPr id="24" name="Rounded Rectangle 23"/>
+          <p:cNvPr id="23" name="Rounded Rectangle 22"/>
           <p:cNvSpPr/>
           <p:nvPr/>
         </p:nvSpPr>
@@ -19980,7 +19733,7 @@
       </p:sp>
       <p:sp>
         <p:nvSpPr>
-          <p:cNvPr id="25" name="TextBox 24"/>
+          <p:cNvPr id="24" name="TextBox 23"/>
           <p:cNvSpPr txBox="1"/>
           <p:nvPr/>
         </p:nvSpPr>
@@ -20019,7 +19772,7 @@
       </p:sp>
       <p:sp>
         <p:nvSpPr>
-          <p:cNvPr id="26" name="Right Arrow 25"/>
+          <p:cNvPr id="25" name="Right Arrow 24"/>
           <p:cNvSpPr/>
           <p:nvPr/>
         </p:nvSpPr>
@@ -20063,7 +19816,7 @@
       </p:sp>
       <p:sp>
         <p:nvSpPr>
-          <p:cNvPr id="27" name="Rounded Rectangle 26"/>
+          <p:cNvPr id="26" name="Rounded Rectangle 25"/>
           <p:cNvSpPr/>
           <p:nvPr/>
         </p:nvSpPr>
@@ -20109,7 +19862,7 @@
       </p:sp>
       <p:sp>
         <p:nvSpPr>
-          <p:cNvPr id="28" name="TextBox 27"/>
+          <p:cNvPr id="27" name="TextBox 26"/>
           <p:cNvSpPr txBox="1"/>
           <p:nvPr/>
         </p:nvSpPr>
@@ -20148,7 +19901,7 @@
       </p:sp>
       <p:sp>
         <p:nvSpPr>
-          <p:cNvPr id="29" name="TextBox 28"/>
+          <p:cNvPr id="28" name="TextBox 27"/>
           <p:cNvSpPr txBox="1"/>
           <p:nvPr/>
         </p:nvSpPr>
@@ -30148,8 +29901,8 @@
         </p:blipFill>
         <p:spPr>
           <a:xfrm>
-            <a:off x="6905244" y="923544"/>
-            <a:ext cx="4523231" cy="3392423"/>
+            <a:off x="6775704" y="1064132"/>
+            <a:ext cx="4782312" cy="3586734"/>
           </a:xfrm>
           <a:prstGeom prst="rect">
             <a:avLst/>
@@ -30158,46 +29911,7 @@
       </p:pic>
       <p:sp>
         <p:nvSpPr>
-          <p:cNvPr id="8" name="TextBox 7"/>
-          <p:cNvSpPr txBox="1"/>
-          <p:nvPr/>
-        </p:nvSpPr>
-        <p:spPr>
-          <a:xfrm>
-            <a:off x="6775704" y="4425695"/>
-            <a:ext cx="4782312" cy="475488"/>
-          </a:xfrm>
-          <a:prstGeom prst="rect">
-            <a:avLst/>
-          </a:prstGeom>
-          <a:noFill/>
-        </p:spPr>
-        <p:txBody>
-          <a:bodyPr wrap="square" lIns="0" rIns="0" tIns="0" bIns="0" anchor="t">
-            <a:spAutoFit/>
-          </a:bodyPr>
-          <a:lstStyle/>
-          <a:p>
-            <a:pPr algn="ctr">
-              <a:lnSpc>
-                <a:spcPct val="105000"/>
-              </a:lnSpc>
-            </a:pPr>
-            <a:r>
-              <a:rPr sz="950" b="0" i="1">
-                <a:solidFill>
-                  <a:srgbClr val="1C7293"/>
-                </a:solidFill>
-                <a:latin typeface="Arial"/>
-              </a:rPr>
-              <a:t>Казино-кости Caesars Palace — Wikimedia Commons, CC-BY-SA</a:t>
-            </a:r>
-          </a:p>
-        </p:txBody>
-      </p:sp>
-      <p:sp>
-        <p:nvSpPr>
-          <p:cNvPr id="9" name="Rounded Rectangle 8"/>
+          <p:cNvPr id="8" name="Rounded Rectangle 7"/>
           <p:cNvSpPr/>
           <p:nvPr/>
         </p:nvSpPr>
@@ -30243,7 +29957,7 @@
       </p:sp>
       <p:sp>
         <p:nvSpPr>
-          <p:cNvPr id="10" name="TextBox 9"/>
+          <p:cNvPr id="9" name="TextBox 8"/>
           <p:cNvSpPr txBox="1"/>
           <p:nvPr/>
         </p:nvSpPr>
@@ -30282,7 +29996,7 @@
       </p:sp>
       <p:sp>
         <p:nvSpPr>
-          <p:cNvPr id="11" name="Right Arrow 10"/>
+          <p:cNvPr id="10" name="Right Arrow 9"/>
           <p:cNvSpPr/>
           <p:nvPr/>
         </p:nvSpPr>
@@ -30326,7 +30040,7 @@
       </p:sp>
       <p:sp>
         <p:nvSpPr>
-          <p:cNvPr id="12" name="Rounded Rectangle 11"/>
+          <p:cNvPr id="11" name="Rounded Rectangle 10"/>
           <p:cNvSpPr/>
           <p:nvPr/>
         </p:nvSpPr>
@@ -30372,7 +30086,7 @@
       </p:sp>
       <p:sp>
         <p:nvSpPr>
-          <p:cNvPr id="13" name="TextBox 12"/>
+          <p:cNvPr id="12" name="TextBox 11"/>
           <p:cNvSpPr txBox="1"/>
           <p:nvPr/>
         </p:nvSpPr>
@@ -30411,7 +30125,7 @@
       </p:sp>
       <p:sp>
         <p:nvSpPr>
-          <p:cNvPr id="14" name="Right Arrow 13"/>
+          <p:cNvPr id="13" name="Right Arrow 12"/>
           <p:cNvSpPr/>
           <p:nvPr/>
         </p:nvSpPr>
@@ -30455,7 +30169,7 @@
       </p:sp>
       <p:sp>
         <p:nvSpPr>
-          <p:cNvPr id="15" name="Rounded Rectangle 14"/>
+          <p:cNvPr id="14" name="Rounded Rectangle 13"/>
           <p:cNvSpPr/>
           <p:nvPr/>
         </p:nvSpPr>
@@ -30501,7 +30215,7 @@
       </p:sp>
       <p:sp>
         <p:nvSpPr>
-          <p:cNvPr id="16" name="TextBox 15"/>
+          <p:cNvPr id="15" name="TextBox 14"/>
           <p:cNvSpPr txBox="1"/>
           <p:nvPr/>
         </p:nvSpPr>
@@ -30540,7 +30254,7 @@
       </p:sp>
       <p:sp>
         <p:nvSpPr>
-          <p:cNvPr id="17" name="Right Arrow 16"/>
+          <p:cNvPr id="16" name="Right Arrow 15"/>
           <p:cNvSpPr/>
           <p:nvPr/>
         </p:nvSpPr>
@@ -30584,7 +30298,7 @@
       </p:sp>
       <p:sp>
         <p:nvSpPr>
-          <p:cNvPr id="18" name="Rounded Rectangle 17"/>
+          <p:cNvPr id="17" name="Rounded Rectangle 16"/>
           <p:cNvSpPr/>
           <p:nvPr/>
         </p:nvSpPr>
@@ -30630,7 +30344,7 @@
       </p:sp>
       <p:sp>
         <p:nvSpPr>
-          <p:cNvPr id="19" name="TextBox 18"/>
+          <p:cNvPr id="18" name="TextBox 17"/>
           <p:cNvSpPr txBox="1"/>
           <p:nvPr/>
         </p:nvSpPr>
@@ -30669,7 +30383,7 @@
       </p:sp>
       <p:sp>
         <p:nvSpPr>
-          <p:cNvPr id="20" name="Right Arrow 19"/>
+          <p:cNvPr id="19" name="Right Arrow 18"/>
           <p:cNvSpPr/>
           <p:nvPr/>
         </p:nvSpPr>
@@ -30713,7 +30427,7 @@
       </p:sp>
       <p:sp>
         <p:nvSpPr>
-          <p:cNvPr id="21" name="Rounded Rectangle 20"/>
+          <p:cNvPr id="20" name="Rounded Rectangle 19"/>
           <p:cNvSpPr/>
           <p:nvPr/>
         </p:nvSpPr>
@@ -30759,7 +30473,7 @@
       </p:sp>
       <p:sp>
         <p:nvSpPr>
-          <p:cNvPr id="22" name="TextBox 21"/>
+          <p:cNvPr id="21" name="TextBox 20"/>
           <p:cNvSpPr txBox="1"/>
           <p:nvPr/>
         </p:nvSpPr>
@@ -30798,7 +30512,7 @@
       </p:sp>
       <p:sp>
         <p:nvSpPr>
-          <p:cNvPr id="23" name="Right Arrow 22"/>
+          <p:cNvPr id="22" name="Right Arrow 21"/>
           <p:cNvSpPr/>
           <p:nvPr/>
         </p:nvSpPr>
@@ -30842,7 +30556,7 @@
       </p:sp>
       <p:sp>
         <p:nvSpPr>
-          <p:cNvPr id="24" name="Rounded Rectangle 23"/>
+          <p:cNvPr id="23" name="Rounded Rectangle 22"/>
           <p:cNvSpPr/>
           <p:nvPr/>
         </p:nvSpPr>
@@ -30888,7 +30602,7 @@
       </p:sp>
       <p:sp>
         <p:nvSpPr>
-          <p:cNvPr id="25" name="TextBox 24"/>
+          <p:cNvPr id="24" name="TextBox 23"/>
           <p:cNvSpPr txBox="1"/>
           <p:nvPr/>
         </p:nvSpPr>
@@ -30927,7 +30641,7 @@
       </p:sp>
       <p:sp>
         <p:nvSpPr>
-          <p:cNvPr id="26" name="Right Arrow 25"/>
+          <p:cNvPr id="25" name="Right Arrow 24"/>
           <p:cNvSpPr/>
           <p:nvPr/>
         </p:nvSpPr>
@@ -30971,7 +30685,7 @@
       </p:sp>
       <p:sp>
         <p:nvSpPr>
-          <p:cNvPr id="27" name="Rounded Rectangle 26"/>
+          <p:cNvPr id="26" name="Rounded Rectangle 25"/>
           <p:cNvSpPr/>
           <p:nvPr/>
         </p:nvSpPr>
@@ -31017,7 +30731,7 @@
       </p:sp>
       <p:sp>
         <p:nvSpPr>
-          <p:cNvPr id="28" name="TextBox 27"/>
+          <p:cNvPr id="27" name="TextBox 26"/>
           <p:cNvSpPr txBox="1"/>
           <p:nvPr/>
         </p:nvSpPr>
@@ -31056,7 +30770,7 @@
       </p:sp>
       <p:sp>
         <p:nvSpPr>
-          <p:cNvPr id="29" name="TextBox 28"/>
+          <p:cNvPr id="28" name="TextBox 27"/>
           <p:cNvSpPr txBox="1"/>
           <p:nvPr/>
         </p:nvSpPr>
@@ -39493,7 +39207,7 @@
       </p:sp>
       <p:pic>
         <p:nvPicPr>
-          <p:cNvPr id="33" name="Picture 32" descr="gorshochek-ubbelohde-1909.jpg"/>
+          <p:cNvPr id="33" name="Picture 32" descr="gorshochek-1984-crop.jpg"/>
           <p:cNvPicPr>
             <a:picLocks noChangeAspect="1"/>
           </p:cNvPicPr>
@@ -39507,8 +39221,8 @@
         </p:blipFill>
         <p:spPr>
           <a:xfrm>
-            <a:off x="9646920" y="4076080"/>
-            <a:ext cx="1417320" cy="717518"/>
+            <a:off x="9494520" y="4005072"/>
+            <a:ext cx="1981200" cy="1371600"/>
           </a:xfrm>
           <a:prstGeom prst="rect">
             <a:avLst/>
@@ -39517,46 +39231,7 @@
       </p:pic>
       <p:sp>
         <p:nvSpPr>
-          <p:cNvPr id="34" name="TextBox 33"/>
-          <p:cNvSpPr txBox="1"/>
-          <p:nvPr/>
-        </p:nvSpPr>
-        <p:spPr>
-          <a:xfrm>
-            <a:off x="9537192" y="4821031"/>
-            <a:ext cx="1636776" cy="256032"/>
-          </a:xfrm>
-          <a:prstGeom prst="rect">
-            <a:avLst/>
-          </a:prstGeom>
-          <a:noFill/>
-        </p:spPr>
-        <p:txBody>
-          <a:bodyPr wrap="square" lIns="0" rIns="0" tIns="0" bIns="0" anchor="t">
-            <a:spAutoFit/>
-          </a:bodyPr>
-          <a:lstStyle/>
-          <a:p>
-            <a:pPr algn="ctr">
-              <a:lnSpc>
-                <a:spcPct val="115000"/>
-              </a:lnSpc>
-            </a:pPr>
-            <a:r>
-              <a:rPr sz="750" b="0" i="1">
-                <a:solidFill>
-                  <a:srgbClr val="1C7293"/>
-                </a:solidFill>
-                <a:latin typeface="Arial"/>
-              </a:rPr>
-              <a:t>«Горшочек каши» — Гримм, 1909</a:t>
-            </a:r>
-          </a:p>
-        </p:txBody>
-      </p:sp>
-      <p:sp>
-        <p:nvSpPr>
-          <p:cNvPr id="35" name="Rounded Rectangle 34"/>
+          <p:cNvPr id="34" name="Rounded Rectangle 33"/>
           <p:cNvSpPr/>
           <p:nvPr/>
         </p:nvSpPr>
@@ -39604,7 +39279,7 @@
       </p:sp>
       <p:sp>
         <p:nvSpPr>
-          <p:cNvPr id="36" name="TextBox 35"/>
+          <p:cNvPr id="35" name="TextBox 34"/>
           <p:cNvSpPr txBox="1"/>
           <p:nvPr/>
         </p:nvSpPr>
@@ -39643,7 +39318,7 @@
       </p:sp>
       <p:sp>
         <p:nvSpPr>
-          <p:cNvPr id="37" name="TextBox 36"/>
+          <p:cNvPr id="36" name="TextBox 35"/>
           <p:cNvSpPr txBox="1"/>
           <p:nvPr/>
         </p:nvSpPr>
@@ -39682,7 +39357,7 @@
       </p:sp>
       <p:sp>
         <p:nvSpPr>
-          <p:cNvPr id="38" name="TextBox 37"/>
+          <p:cNvPr id="37" name="TextBox 36"/>
           <p:cNvSpPr txBox="1"/>
           <p:nvPr/>
         </p:nvSpPr>
@@ -41256,8 +40931,8 @@
         </p:blipFill>
         <p:spPr>
           <a:xfrm>
-            <a:off x="6905244" y="923544"/>
-            <a:ext cx="4523231" cy="3392423"/>
+            <a:off x="6775704" y="1064132"/>
+            <a:ext cx="4782312" cy="3586734"/>
           </a:xfrm>
           <a:prstGeom prst="rect">
             <a:avLst/>
@@ -41266,46 +40941,7 @@
       </p:pic>
       <p:sp>
         <p:nvSpPr>
-          <p:cNvPr id="8" name="TextBox 7"/>
-          <p:cNvSpPr txBox="1"/>
-          <p:nvPr/>
-        </p:nvSpPr>
-        <p:spPr>
-          <a:xfrm>
-            <a:off x="6775704" y="4425695"/>
-            <a:ext cx="4782312" cy="475488"/>
-          </a:xfrm>
-          <a:prstGeom prst="rect">
-            <a:avLst/>
-          </a:prstGeom>
-          <a:noFill/>
-        </p:spPr>
-        <p:txBody>
-          <a:bodyPr wrap="square" lIns="0" rIns="0" tIns="0" bIns="0" anchor="t">
-            <a:spAutoFit/>
-          </a:bodyPr>
-          <a:lstStyle/>
-          <a:p>
-            <a:pPr algn="ctr">
-              <a:lnSpc>
-                <a:spcPct val="105000"/>
-              </a:lnSpc>
-            </a:pPr>
-            <a:r>
-              <a:rPr sz="950" b="0" i="1">
-                <a:solidFill>
-                  <a:srgbClr val="1C7293"/>
-                </a:solidFill>
-                <a:latin typeface="Arial"/>
-              </a:rPr>
-              <a:t>Русская матрёшка — Wikimedia Commons, CC-BY-SA 3.0 / GFDL</a:t>
-            </a:r>
-          </a:p>
-        </p:txBody>
-      </p:sp>
-      <p:sp>
-        <p:nvSpPr>
-          <p:cNvPr id="9" name="Rounded Rectangle 8"/>
+          <p:cNvPr id="8" name="Rounded Rectangle 7"/>
           <p:cNvSpPr/>
           <p:nvPr/>
         </p:nvSpPr>
@@ -41351,7 +40987,7 @@
       </p:sp>
       <p:sp>
         <p:nvSpPr>
-          <p:cNvPr id="10" name="TextBox 9"/>
+          <p:cNvPr id="9" name="TextBox 8"/>
           <p:cNvSpPr txBox="1"/>
           <p:nvPr/>
         </p:nvSpPr>
@@ -41390,7 +41026,7 @@
       </p:sp>
       <p:sp>
         <p:nvSpPr>
-          <p:cNvPr id="11" name="Right Arrow 10"/>
+          <p:cNvPr id="10" name="Right Arrow 9"/>
           <p:cNvSpPr/>
           <p:nvPr/>
         </p:nvSpPr>
@@ -41434,7 +41070,7 @@
       </p:sp>
       <p:sp>
         <p:nvSpPr>
-          <p:cNvPr id="12" name="Rounded Rectangle 11"/>
+          <p:cNvPr id="11" name="Rounded Rectangle 10"/>
           <p:cNvSpPr/>
           <p:nvPr/>
         </p:nvSpPr>
@@ -41480,7 +41116,7 @@
       </p:sp>
       <p:sp>
         <p:nvSpPr>
-          <p:cNvPr id="13" name="TextBox 12"/>
+          <p:cNvPr id="12" name="TextBox 11"/>
           <p:cNvSpPr txBox="1"/>
           <p:nvPr/>
         </p:nvSpPr>
@@ -41519,7 +41155,7 @@
       </p:sp>
       <p:sp>
         <p:nvSpPr>
-          <p:cNvPr id="14" name="Right Arrow 13"/>
+          <p:cNvPr id="13" name="Right Arrow 12"/>
           <p:cNvSpPr/>
           <p:nvPr/>
         </p:nvSpPr>
@@ -41563,7 +41199,7 @@
       </p:sp>
       <p:sp>
         <p:nvSpPr>
-          <p:cNvPr id="15" name="Rounded Rectangle 14"/>
+          <p:cNvPr id="14" name="Rounded Rectangle 13"/>
           <p:cNvSpPr/>
           <p:nvPr/>
         </p:nvSpPr>
@@ -41609,7 +41245,7 @@
       </p:sp>
       <p:sp>
         <p:nvSpPr>
-          <p:cNvPr id="16" name="TextBox 15"/>
+          <p:cNvPr id="15" name="TextBox 14"/>
           <p:cNvSpPr txBox="1"/>
           <p:nvPr/>
         </p:nvSpPr>
@@ -41648,7 +41284,7 @@
       </p:sp>
       <p:sp>
         <p:nvSpPr>
-          <p:cNvPr id="17" name="Right Arrow 16"/>
+          <p:cNvPr id="16" name="Right Arrow 15"/>
           <p:cNvSpPr/>
           <p:nvPr/>
         </p:nvSpPr>
@@ -41692,7 +41328,7 @@
       </p:sp>
       <p:sp>
         <p:nvSpPr>
-          <p:cNvPr id="18" name="Rounded Rectangle 17"/>
+          <p:cNvPr id="17" name="Rounded Rectangle 16"/>
           <p:cNvSpPr/>
           <p:nvPr/>
         </p:nvSpPr>
@@ -41738,7 +41374,7 @@
       </p:sp>
       <p:sp>
         <p:nvSpPr>
-          <p:cNvPr id="19" name="TextBox 18"/>
+          <p:cNvPr id="18" name="TextBox 17"/>
           <p:cNvSpPr txBox="1"/>
           <p:nvPr/>
         </p:nvSpPr>
@@ -41777,7 +41413,7 @@
       </p:sp>
       <p:sp>
         <p:nvSpPr>
-          <p:cNvPr id="20" name="Right Arrow 19"/>
+          <p:cNvPr id="19" name="Right Arrow 18"/>
           <p:cNvSpPr/>
           <p:nvPr/>
         </p:nvSpPr>
@@ -41821,7 +41457,7 @@
       </p:sp>
       <p:sp>
         <p:nvSpPr>
-          <p:cNvPr id="21" name="Rounded Rectangle 20"/>
+          <p:cNvPr id="20" name="Rounded Rectangle 19"/>
           <p:cNvSpPr/>
           <p:nvPr/>
         </p:nvSpPr>
@@ -41867,7 +41503,7 @@
       </p:sp>
       <p:sp>
         <p:nvSpPr>
-          <p:cNvPr id="22" name="TextBox 21"/>
+          <p:cNvPr id="21" name="TextBox 20"/>
           <p:cNvSpPr txBox="1"/>
           <p:nvPr/>
         </p:nvSpPr>
@@ -41906,7 +41542,7 @@
       </p:sp>
       <p:sp>
         <p:nvSpPr>
-          <p:cNvPr id="23" name="Right Arrow 22"/>
+          <p:cNvPr id="22" name="Right Arrow 21"/>
           <p:cNvSpPr/>
           <p:nvPr/>
         </p:nvSpPr>
@@ -41950,7 +41586,7 @@
       </p:sp>
       <p:sp>
         <p:nvSpPr>
-          <p:cNvPr id="24" name="Rounded Rectangle 23"/>
+          <p:cNvPr id="23" name="Rounded Rectangle 22"/>
           <p:cNvSpPr/>
           <p:nvPr/>
         </p:nvSpPr>
@@ -41996,7 +41632,7 @@
       </p:sp>
       <p:sp>
         <p:nvSpPr>
-          <p:cNvPr id="25" name="TextBox 24"/>
+          <p:cNvPr id="24" name="TextBox 23"/>
           <p:cNvSpPr txBox="1"/>
           <p:nvPr/>
         </p:nvSpPr>
@@ -42035,7 +41671,7 @@
       </p:sp>
       <p:sp>
         <p:nvSpPr>
-          <p:cNvPr id="26" name="Right Arrow 25"/>
+          <p:cNvPr id="25" name="Right Arrow 24"/>
           <p:cNvSpPr/>
           <p:nvPr/>
         </p:nvSpPr>
@@ -42079,7 +41715,7 @@
       </p:sp>
       <p:sp>
         <p:nvSpPr>
-          <p:cNvPr id="27" name="Rounded Rectangle 26"/>
+          <p:cNvPr id="26" name="Rounded Rectangle 25"/>
           <p:cNvSpPr/>
           <p:nvPr/>
         </p:nvSpPr>
@@ -42125,7 +41761,7 @@
       </p:sp>
       <p:sp>
         <p:nvSpPr>
-          <p:cNvPr id="28" name="TextBox 27"/>
+          <p:cNvPr id="27" name="TextBox 26"/>
           <p:cNvSpPr txBox="1"/>
           <p:nvPr/>
         </p:nvSpPr>
@@ -42164,7 +41800,7 @@
       </p:sp>
       <p:sp>
         <p:nvSpPr>
-          <p:cNvPr id="29" name="TextBox 28"/>
+          <p:cNvPr id="28" name="TextBox 27"/>
           <p:cNvSpPr txBox="1"/>
           <p:nvPr/>
         </p:nvSpPr>
@@ -46848,7 +46484,7 @@
       </p:sp>
       <p:pic>
         <p:nvPicPr>
-          <p:cNvPr id="7" name="Picture 6" descr="this-is-fine-meme-fb.jpg"/>
+          <p:cNvPr id="7" name="Picture 6" descr="pepe-silvia.jpg"/>
           <p:cNvPicPr>
             <a:picLocks noChangeAspect="1"/>
           </p:cNvPicPr>
@@ -46862,8 +46498,8 @@
         </p:blipFill>
         <p:spPr>
           <a:xfrm>
-            <a:off x="6775704" y="1280708"/>
-            <a:ext cx="4782312" cy="2678095"/>
+            <a:off x="6775704" y="1064132"/>
+            <a:ext cx="4782312" cy="3586734"/>
           </a:xfrm>
           <a:prstGeom prst="rect">
             <a:avLst/>
@@ -46872,46 +46508,7 @@
       </p:pic>
       <p:sp>
         <p:nvSpPr>
-          <p:cNvPr id="8" name="TextBox 7"/>
-          <p:cNvSpPr txBox="1"/>
-          <p:nvPr/>
-        </p:nvSpPr>
-        <p:spPr>
-          <a:xfrm>
-            <a:off x="6775704" y="4425695"/>
-            <a:ext cx="4782312" cy="475488"/>
-          </a:xfrm>
-          <a:prstGeom prst="rect">
-            <a:avLst/>
-          </a:prstGeom>
-          <a:noFill/>
-        </p:spPr>
-        <p:txBody>
-          <a:bodyPr wrap="square" lIns="0" rIns="0" tIns="0" bIns="0" anchor="t">
-            <a:spAutoFit/>
-          </a:bodyPr>
-          <a:lstStyle/>
-          <a:p>
-            <a:pPr algn="ctr">
-              <a:lnSpc>
-                <a:spcPct val="105000"/>
-              </a:lnSpc>
-            </a:pPr>
-            <a:r>
-              <a:rPr sz="950" b="0" i="1">
-                <a:solidFill>
-                  <a:srgbClr val="1C7293"/>
-                </a:solidFill>
-                <a:latin typeface="Arial"/>
-              </a:rPr>
-              <a:t>«This is fine» — K.C. Green, комикс Gunshow #648, 2013</a:t>
-            </a:r>
-          </a:p>
-        </p:txBody>
-      </p:sp>
-      <p:sp>
-        <p:nvSpPr>
-          <p:cNvPr id="9" name="Rounded Rectangle 8"/>
+          <p:cNvPr id="8" name="Rounded Rectangle 7"/>
           <p:cNvSpPr/>
           <p:nvPr/>
         </p:nvSpPr>
@@ -46957,7 +46554,7 @@
       </p:sp>
       <p:sp>
         <p:nvSpPr>
-          <p:cNvPr id="10" name="TextBox 9"/>
+          <p:cNvPr id="9" name="TextBox 8"/>
           <p:cNvSpPr txBox="1"/>
           <p:nvPr/>
         </p:nvSpPr>
@@ -46996,7 +46593,7 @@
       </p:sp>
       <p:sp>
         <p:nvSpPr>
-          <p:cNvPr id="11" name="Right Arrow 10"/>
+          <p:cNvPr id="10" name="Right Arrow 9"/>
           <p:cNvSpPr/>
           <p:nvPr/>
         </p:nvSpPr>
@@ -47040,7 +46637,7 @@
       </p:sp>
       <p:sp>
         <p:nvSpPr>
-          <p:cNvPr id="12" name="Rounded Rectangle 11"/>
+          <p:cNvPr id="11" name="Rounded Rectangle 10"/>
           <p:cNvSpPr/>
           <p:nvPr/>
         </p:nvSpPr>
@@ -47086,7 +46683,7 @@
       </p:sp>
       <p:sp>
         <p:nvSpPr>
-          <p:cNvPr id="13" name="TextBox 12"/>
+          <p:cNvPr id="12" name="TextBox 11"/>
           <p:cNvSpPr txBox="1"/>
           <p:nvPr/>
         </p:nvSpPr>
@@ -47125,7 +46722,7 @@
       </p:sp>
       <p:sp>
         <p:nvSpPr>
-          <p:cNvPr id="14" name="Right Arrow 13"/>
+          <p:cNvPr id="13" name="Right Arrow 12"/>
           <p:cNvSpPr/>
           <p:nvPr/>
         </p:nvSpPr>
@@ -47169,7 +46766,7 @@
       </p:sp>
       <p:sp>
         <p:nvSpPr>
-          <p:cNvPr id="15" name="Rounded Rectangle 14"/>
+          <p:cNvPr id="14" name="Rounded Rectangle 13"/>
           <p:cNvSpPr/>
           <p:nvPr/>
         </p:nvSpPr>
@@ -47215,7 +46812,7 @@
       </p:sp>
       <p:sp>
         <p:nvSpPr>
-          <p:cNvPr id="16" name="TextBox 15"/>
+          <p:cNvPr id="15" name="TextBox 14"/>
           <p:cNvSpPr txBox="1"/>
           <p:nvPr/>
         </p:nvSpPr>
@@ -47254,7 +46851,7 @@
       </p:sp>
       <p:sp>
         <p:nvSpPr>
-          <p:cNvPr id="17" name="Right Arrow 16"/>
+          <p:cNvPr id="16" name="Right Arrow 15"/>
           <p:cNvSpPr/>
           <p:nvPr/>
         </p:nvSpPr>
@@ -47298,7 +46895,7 @@
       </p:sp>
       <p:sp>
         <p:nvSpPr>
-          <p:cNvPr id="18" name="Rounded Rectangle 17"/>
+          <p:cNvPr id="17" name="Rounded Rectangle 16"/>
           <p:cNvSpPr/>
           <p:nvPr/>
         </p:nvSpPr>
@@ -47344,7 +46941,7 @@
       </p:sp>
       <p:sp>
         <p:nvSpPr>
-          <p:cNvPr id="19" name="TextBox 18"/>
+          <p:cNvPr id="18" name="TextBox 17"/>
           <p:cNvSpPr txBox="1"/>
           <p:nvPr/>
         </p:nvSpPr>
@@ -47383,7 +46980,7 @@
       </p:sp>
       <p:sp>
         <p:nvSpPr>
-          <p:cNvPr id="20" name="Right Arrow 19"/>
+          <p:cNvPr id="19" name="Right Arrow 18"/>
           <p:cNvSpPr/>
           <p:nvPr/>
         </p:nvSpPr>
@@ -47427,7 +47024,7 @@
       </p:sp>
       <p:sp>
         <p:nvSpPr>
-          <p:cNvPr id="21" name="Rounded Rectangle 20"/>
+          <p:cNvPr id="20" name="Rounded Rectangle 19"/>
           <p:cNvSpPr/>
           <p:nvPr/>
         </p:nvSpPr>
@@ -47473,7 +47070,7 @@
       </p:sp>
       <p:sp>
         <p:nvSpPr>
-          <p:cNvPr id="22" name="TextBox 21"/>
+          <p:cNvPr id="21" name="TextBox 20"/>
           <p:cNvSpPr txBox="1"/>
           <p:nvPr/>
         </p:nvSpPr>
@@ -47512,7 +47109,7 @@
       </p:sp>
       <p:sp>
         <p:nvSpPr>
-          <p:cNvPr id="23" name="Right Arrow 22"/>
+          <p:cNvPr id="22" name="Right Arrow 21"/>
           <p:cNvSpPr/>
           <p:nvPr/>
         </p:nvSpPr>
@@ -47556,7 +47153,7 @@
       </p:sp>
       <p:sp>
         <p:nvSpPr>
-          <p:cNvPr id="24" name="Rounded Rectangle 23"/>
+          <p:cNvPr id="23" name="Rounded Rectangle 22"/>
           <p:cNvSpPr/>
           <p:nvPr/>
         </p:nvSpPr>
@@ -47602,7 +47199,7 @@
       </p:sp>
       <p:sp>
         <p:nvSpPr>
-          <p:cNvPr id="25" name="TextBox 24"/>
+          <p:cNvPr id="24" name="TextBox 23"/>
           <p:cNvSpPr txBox="1"/>
           <p:nvPr/>
         </p:nvSpPr>
@@ -47641,7 +47238,7 @@
       </p:sp>
       <p:sp>
         <p:nvSpPr>
-          <p:cNvPr id="26" name="Right Arrow 25"/>
+          <p:cNvPr id="25" name="Right Arrow 24"/>
           <p:cNvSpPr/>
           <p:nvPr/>
         </p:nvSpPr>
@@ -47685,7 +47282,7 @@
       </p:sp>
       <p:sp>
         <p:nvSpPr>
-          <p:cNvPr id="27" name="Rounded Rectangle 26"/>
+          <p:cNvPr id="26" name="Rounded Rectangle 25"/>
           <p:cNvSpPr/>
           <p:nvPr/>
         </p:nvSpPr>
@@ -47731,7 +47328,7 @@
       </p:sp>
       <p:sp>
         <p:nvSpPr>
-          <p:cNvPr id="28" name="TextBox 27"/>
+          <p:cNvPr id="27" name="TextBox 26"/>
           <p:cNvSpPr txBox="1"/>
           <p:nvPr/>
         </p:nvSpPr>
@@ -47770,7 +47367,7 @@
       </p:sp>
       <p:sp>
         <p:nvSpPr>
-          <p:cNvPr id="29" name="Rounded Rectangle 28"/>
+          <p:cNvPr id="28" name="Rounded Rectangle 27"/>
           <p:cNvSpPr/>
           <p:nvPr/>
         </p:nvSpPr>
@@ -47816,7 +47413,7 @@
       </p:sp>
       <p:sp>
         <p:nvSpPr>
-          <p:cNvPr id="30" name="TextBox 29"/>
+          <p:cNvPr id="29" name="TextBox 28"/>
           <p:cNvSpPr txBox="1"/>
           <p:nvPr/>
         </p:nvSpPr>
@@ -57006,7 +56603,7 @@
       </p:sp>
       <p:pic>
         <p:nvPicPr>
-          <p:cNvPr id="7" name="Picture 6" descr="strawberry-openai-crop.jpg"/>
+          <p:cNvPr id="7" name="Picture 6" descr="surprised-pikachu-tokenize.jpg"/>
           <p:cNvPicPr>
             <a:picLocks noChangeAspect="1"/>
           </p:cNvPicPr>
@@ -57020,8 +56617,8 @@
         </p:blipFill>
         <p:spPr>
           <a:xfrm>
-            <a:off x="6775704" y="1524570"/>
-            <a:ext cx="4782312" cy="2190372"/>
+            <a:off x="7599085" y="923544"/>
+            <a:ext cx="3135548" cy="3867912"/>
           </a:xfrm>
           <a:prstGeom prst="rect">
             <a:avLst/>
@@ -57030,46 +56627,7 @@
       </p:pic>
       <p:sp>
         <p:nvSpPr>
-          <p:cNvPr id="8" name="TextBox 7"/>
-          <p:cNvSpPr txBox="1"/>
-          <p:nvPr/>
-        </p:nvSpPr>
-        <p:spPr>
-          <a:xfrm>
-            <a:off x="6775704" y="4425695"/>
-            <a:ext cx="4782312" cy="475488"/>
-          </a:xfrm>
-          <a:prstGeom prst="rect">
-            <a:avLst/>
-          </a:prstGeom>
-          <a:noFill/>
-        </p:spPr>
-        <p:txBody>
-          <a:bodyPr wrap="square" lIns="0" rIns="0" tIns="0" bIns="0" anchor="t">
-            <a:spAutoFit/>
-          </a:bodyPr>
-          <a:lstStyle/>
-          <a:p>
-            <a:pPr algn="ctr">
-              <a:lnSpc>
-                <a:spcPct val="105000"/>
-              </a:lnSpc>
-            </a:pPr>
-            <a:r>
-              <a:rPr sz="950" b="0" i="1">
-                <a:solidFill>
-                  <a:srgbClr val="1C7293"/>
-                </a:solidFill>
-                <a:latin typeface="Arial"/>
-              </a:rPr>
-              <a:t>Реальный диалог: ChatGPT о «strawberry» — скриншот, OpenAI Community, 2024</a:t>
-            </a:r>
-          </a:p>
-        </p:txBody>
-      </p:sp>
-      <p:sp>
-        <p:nvSpPr>
-          <p:cNvPr id="9" name="Rounded Rectangle 8"/>
+          <p:cNvPr id="8" name="Rounded Rectangle 7"/>
           <p:cNvSpPr/>
           <p:nvPr/>
         </p:nvSpPr>
@@ -57115,7 +56673,7 @@
       </p:sp>
       <p:sp>
         <p:nvSpPr>
-          <p:cNvPr id="10" name="TextBox 9"/>
+          <p:cNvPr id="9" name="TextBox 8"/>
           <p:cNvSpPr txBox="1"/>
           <p:nvPr/>
         </p:nvSpPr>
@@ -57154,7 +56712,7 @@
       </p:sp>
       <p:sp>
         <p:nvSpPr>
-          <p:cNvPr id="11" name="Right Arrow 10"/>
+          <p:cNvPr id="10" name="Right Arrow 9"/>
           <p:cNvSpPr/>
           <p:nvPr/>
         </p:nvSpPr>
@@ -57198,7 +56756,7 @@
       </p:sp>
       <p:sp>
         <p:nvSpPr>
-          <p:cNvPr id="12" name="Rounded Rectangle 11"/>
+          <p:cNvPr id="11" name="Rounded Rectangle 10"/>
           <p:cNvSpPr/>
           <p:nvPr/>
         </p:nvSpPr>
@@ -57244,7 +56802,7 @@
       </p:sp>
       <p:sp>
         <p:nvSpPr>
-          <p:cNvPr id="13" name="TextBox 12"/>
+          <p:cNvPr id="12" name="TextBox 11"/>
           <p:cNvSpPr txBox="1"/>
           <p:nvPr/>
         </p:nvSpPr>
@@ -57283,7 +56841,7 @@
       </p:sp>
       <p:sp>
         <p:nvSpPr>
-          <p:cNvPr id="14" name="Right Arrow 13"/>
+          <p:cNvPr id="13" name="Right Arrow 12"/>
           <p:cNvSpPr/>
           <p:nvPr/>
         </p:nvSpPr>
@@ -57327,7 +56885,7 @@
       </p:sp>
       <p:sp>
         <p:nvSpPr>
-          <p:cNvPr id="15" name="Rounded Rectangle 14"/>
+          <p:cNvPr id="14" name="Rounded Rectangle 13"/>
           <p:cNvSpPr/>
           <p:nvPr/>
         </p:nvSpPr>
@@ -57373,7 +56931,7 @@
       </p:sp>
       <p:sp>
         <p:nvSpPr>
-          <p:cNvPr id="16" name="TextBox 15"/>
+          <p:cNvPr id="15" name="TextBox 14"/>
           <p:cNvSpPr txBox="1"/>
           <p:nvPr/>
         </p:nvSpPr>
@@ -57412,7 +56970,7 @@
       </p:sp>
       <p:sp>
         <p:nvSpPr>
-          <p:cNvPr id="17" name="Right Arrow 16"/>
+          <p:cNvPr id="16" name="Right Arrow 15"/>
           <p:cNvSpPr/>
           <p:nvPr/>
         </p:nvSpPr>
@@ -57456,7 +57014,7 @@
       </p:sp>
       <p:sp>
         <p:nvSpPr>
-          <p:cNvPr id="18" name="Rounded Rectangle 17"/>
+          <p:cNvPr id="17" name="Rounded Rectangle 16"/>
           <p:cNvSpPr/>
           <p:nvPr/>
         </p:nvSpPr>
@@ -57502,7 +57060,7 @@
       </p:sp>
       <p:sp>
         <p:nvSpPr>
-          <p:cNvPr id="19" name="TextBox 18"/>
+          <p:cNvPr id="18" name="TextBox 17"/>
           <p:cNvSpPr txBox="1"/>
           <p:nvPr/>
         </p:nvSpPr>
@@ -57541,7 +57099,7 @@
       </p:sp>
       <p:sp>
         <p:nvSpPr>
-          <p:cNvPr id="20" name="Right Arrow 19"/>
+          <p:cNvPr id="19" name="Right Arrow 18"/>
           <p:cNvSpPr/>
           <p:nvPr/>
         </p:nvSpPr>
@@ -57585,7 +57143,7 @@
       </p:sp>
       <p:sp>
         <p:nvSpPr>
-          <p:cNvPr id="21" name="Rounded Rectangle 20"/>
+          <p:cNvPr id="20" name="Rounded Rectangle 19"/>
           <p:cNvSpPr/>
           <p:nvPr/>
         </p:nvSpPr>
@@ -57631,7 +57189,7 @@
       </p:sp>
       <p:sp>
         <p:nvSpPr>
-          <p:cNvPr id="22" name="TextBox 21"/>
+          <p:cNvPr id="21" name="TextBox 20"/>
           <p:cNvSpPr txBox="1"/>
           <p:nvPr/>
         </p:nvSpPr>
@@ -57670,7 +57228,7 @@
       </p:sp>
       <p:sp>
         <p:nvSpPr>
-          <p:cNvPr id="23" name="Right Arrow 22"/>
+          <p:cNvPr id="22" name="Right Arrow 21"/>
           <p:cNvSpPr/>
           <p:nvPr/>
         </p:nvSpPr>
@@ -57714,7 +57272,7 @@
       </p:sp>
       <p:sp>
         <p:nvSpPr>
-          <p:cNvPr id="24" name="Rounded Rectangle 23"/>
+          <p:cNvPr id="23" name="Rounded Rectangle 22"/>
           <p:cNvSpPr/>
           <p:nvPr/>
         </p:nvSpPr>
@@ -57760,7 +57318,7 @@
       </p:sp>
       <p:sp>
         <p:nvSpPr>
-          <p:cNvPr id="25" name="TextBox 24"/>
+          <p:cNvPr id="24" name="TextBox 23"/>
           <p:cNvSpPr txBox="1"/>
           <p:nvPr/>
         </p:nvSpPr>
@@ -57799,7 +57357,7 @@
       </p:sp>
       <p:sp>
         <p:nvSpPr>
-          <p:cNvPr id="26" name="Right Arrow 25"/>
+          <p:cNvPr id="25" name="Right Arrow 24"/>
           <p:cNvSpPr/>
           <p:nvPr/>
         </p:nvSpPr>
@@ -57843,7 +57401,7 @@
       </p:sp>
       <p:sp>
         <p:nvSpPr>
-          <p:cNvPr id="27" name="Rounded Rectangle 26"/>
+          <p:cNvPr id="26" name="Rounded Rectangle 25"/>
           <p:cNvSpPr/>
           <p:nvPr/>
         </p:nvSpPr>
@@ -57889,7 +57447,7 @@
       </p:sp>
       <p:sp>
         <p:nvSpPr>
-          <p:cNvPr id="28" name="TextBox 27"/>
+          <p:cNvPr id="27" name="TextBox 26"/>
           <p:cNvSpPr txBox="1"/>
           <p:nvPr/>
         </p:nvSpPr>
@@ -57928,7 +57486,7 @@
       </p:sp>
       <p:sp>
         <p:nvSpPr>
-          <p:cNvPr id="29" name="TextBox 28"/>
+          <p:cNvPr id="28" name="TextBox 27"/>
           <p:cNvSpPr txBox="1"/>
           <p:nvPr/>
         </p:nvSpPr>

--- a/library/lectures/lec-02/rendered/lec-02.pptx
+++ b/library/lectures/lec-02/rendered/lec-02.pptx
@@ -8767,11 +8767,11 @@
         <p:spPr>
           <a:xfrm>
             <a:off x="502920" y="1481328"/>
-            <a:ext cx="5486400" cy="3017520"/>
+            <a:ext cx="5486400" cy="3383280"/>
           </a:xfrm>
           <a:prstGeom prst="roundRect">
             <a:avLst>
-              <a:gd name="adj" fmla="val 10101"/>
+              <a:gd name="adj" fmla="val 9009"/>
             </a:avLst>
           </a:prstGeom>
           <a:solidFill>
@@ -8985,11 +8985,11 @@
         <p:spPr>
           <a:xfrm>
             <a:off x="6217920" y="1481328"/>
-            <a:ext cx="5486400" cy="3017520"/>
+            <a:ext cx="5486400" cy="3383280"/>
           </a:xfrm>
           <a:prstGeom prst="roundRect">
             <a:avLst>
-              <a:gd name="adj" fmla="val 10101"/>
+              <a:gd name="adj" fmla="val 9009"/>
             </a:avLst>
           </a:prstGeom>
           <a:solidFill>
@@ -9148,15 +9148,39 @@
           </a:p>
         </p:txBody>
       </p:sp>
-      <p:sp>
-        <p:nvSpPr>
-          <p:cNvPr id="10" name="TextBox 9"/>
+      <p:pic>
+        <p:nvPicPr>
+          <p:cNvPr id="10" name="Picture 9" descr="mathlady-tokens.jpg"/>
+          <p:cNvPicPr>
+            <a:picLocks noChangeAspect="1"/>
+          </p:cNvPicPr>
+          <p:nvPr/>
+        </p:nvPicPr>
+        <p:blipFill>
+          <a:blip r:embed="rId2"/>
+          <a:stretch>
+            <a:fillRect/>
+          </a:stretch>
+        </p:blipFill>
+        <p:spPr>
+          <a:xfrm>
+            <a:off x="7855641" y="3310128"/>
+            <a:ext cx="2210957" cy="1444752"/>
+          </a:xfrm>
+          <a:prstGeom prst="rect">
+            <a:avLst/>
+          </a:prstGeom>
+        </p:spPr>
+      </p:pic>
+      <p:sp>
+        <p:nvSpPr>
+          <p:cNvPr id="11" name="TextBox 10"/>
           <p:cNvSpPr txBox="1"/>
           <p:nvPr/>
         </p:nvSpPr>
         <p:spPr>
           <a:xfrm>
-            <a:off x="502920" y="4663440"/>
+            <a:off x="502920" y="4974336"/>
             <a:ext cx="3657600" cy="292608"/>
           </a:xfrm>
           <a:prstGeom prst="rect">
@@ -9189,13 +9213,13 @@
       </p:sp>
       <p:sp>
         <p:nvSpPr>
-          <p:cNvPr id="11" name="Rounded Rectangle 10"/>
+          <p:cNvPr id="12" name="Rounded Rectangle 11"/>
           <p:cNvSpPr/>
           <p:nvPr/>
         </p:nvSpPr>
         <p:spPr>
           <a:xfrm>
-            <a:off x="495147" y="4983480"/>
+            <a:off x="495147" y="5285232"/>
             <a:ext cx="3611880" cy="685800"/>
           </a:xfrm>
           <a:prstGeom prst="roundRect">
@@ -9237,13 +9261,13 @@
       </p:sp>
       <p:sp>
         <p:nvSpPr>
-          <p:cNvPr id="12" name="TextBox 11"/>
+          <p:cNvPr id="13" name="TextBox 12"/>
           <p:cNvSpPr txBox="1"/>
           <p:nvPr/>
         </p:nvSpPr>
         <p:spPr>
           <a:xfrm>
-            <a:off x="632307" y="5038344"/>
+            <a:off x="632307" y="5340096"/>
             <a:ext cx="3337560" cy="566928"/>
           </a:xfrm>
           <a:prstGeom prst="rect">
@@ -9276,13 +9300,13 @@
       </p:sp>
       <p:sp>
         <p:nvSpPr>
-          <p:cNvPr id="13" name="Rounded Rectangle 12"/>
+          <p:cNvPr id="14" name="Rounded Rectangle 13"/>
           <p:cNvSpPr/>
           <p:nvPr/>
         </p:nvSpPr>
         <p:spPr>
           <a:xfrm>
-            <a:off x="4289907" y="4983480"/>
+            <a:off x="4289907" y="5285232"/>
             <a:ext cx="3611880" cy="685800"/>
           </a:xfrm>
           <a:prstGeom prst="roundRect">
@@ -9324,13 +9348,13 @@
       </p:sp>
       <p:sp>
         <p:nvSpPr>
-          <p:cNvPr id="14" name="TextBox 13"/>
+          <p:cNvPr id="15" name="TextBox 14"/>
           <p:cNvSpPr txBox="1"/>
           <p:nvPr/>
         </p:nvSpPr>
         <p:spPr>
           <a:xfrm>
-            <a:off x="4427067" y="5038344"/>
+            <a:off x="4427067" y="5340096"/>
             <a:ext cx="3337560" cy="566928"/>
           </a:xfrm>
           <a:prstGeom prst="rect">
@@ -9363,13 +9387,13 @@
       </p:sp>
       <p:sp>
         <p:nvSpPr>
-          <p:cNvPr id="15" name="Rounded Rectangle 14"/>
+          <p:cNvPr id="16" name="Rounded Rectangle 15"/>
           <p:cNvSpPr/>
           <p:nvPr/>
         </p:nvSpPr>
         <p:spPr>
           <a:xfrm>
-            <a:off x="8084667" y="4983480"/>
+            <a:off x="8084667" y="5285232"/>
             <a:ext cx="3611880" cy="685800"/>
           </a:xfrm>
           <a:prstGeom prst="roundRect">
@@ -9411,13 +9435,13 @@
       </p:sp>
       <p:sp>
         <p:nvSpPr>
-          <p:cNvPr id="16" name="TextBox 15"/>
+          <p:cNvPr id="17" name="TextBox 16"/>
           <p:cNvSpPr txBox="1"/>
           <p:nvPr/>
         </p:nvSpPr>
         <p:spPr>
           <a:xfrm>
-            <a:off x="8221827" y="5038344"/>
+            <a:off x="8221827" y="5340096"/>
             <a:ext cx="3337560" cy="566928"/>
           </a:xfrm>
           <a:prstGeom prst="rect">
@@ -9450,13 +9474,13 @@
       </p:sp>
       <p:sp>
         <p:nvSpPr>
-          <p:cNvPr id="17" name="TextBox 16"/>
+          <p:cNvPr id="18" name="TextBox 17"/>
           <p:cNvSpPr txBox="1"/>
           <p:nvPr/>
         </p:nvSpPr>
         <p:spPr>
           <a:xfrm>
-            <a:off x="502920" y="5806440"/>
+            <a:off x="502920" y="6089904"/>
             <a:ext cx="11201400" cy="502920"/>
           </a:xfrm>
           <a:prstGeom prst="rect">
@@ -9489,7 +9513,7 @@
       </p:sp>
       <p:sp>
         <p:nvSpPr>
-          <p:cNvPr id="18" name="TextBox 17"/>
+          <p:cNvPr id="19" name="TextBox 18"/>
           <p:cNvSpPr txBox="1"/>
           <p:nvPr/>
         </p:nvSpPr>
@@ -10559,11 +10583,11 @@
         <p:spPr>
           <a:xfrm>
             <a:off x="7452360" y="1554480"/>
-            <a:ext cx="4251960" cy="2011680"/>
+            <a:ext cx="4251960" cy="2880360"/>
           </a:xfrm>
           <a:prstGeom prst="roundRect">
             <a:avLst>
-              <a:gd name="adj" fmla="val 15151"/>
+              <a:gd name="adj" fmla="val 10582"/>
             </a:avLst>
           </a:prstGeom>
           <a:solidFill>
@@ -10607,7 +10631,7 @@
         <p:spPr>
           <a:xfrm>
             <a:off x="7680960" y="1737360"/>
-            <a:ext cx="3794760" cy="1645920"/>
+            <a:ext cx="3794760" cy="1005840"/>
           </a:xfrm>
           <a:prstGeom prst="rect">
             <a:avLst/>
@@ -10674,15 +10698,39 @@
           </a:p>
         </p:txBody>
       </p:sp>
-      <p:sp>
-        <p:nvSpPr>
-          <p:cNvPr id="8" name="Rounded Rectangle 7"/>
+      <p:pic>
+        <p:nvPicPr>
+          <p:cNvPr id="8" name="Picture 7" descr="always-has-been-ru-cost.jpg"/>
+          <p:cNvPicPr>
+            <a:picLocks noChangeAspect="1"/>
+          </p:cNvPicPr>
+          <p:nvPr/>
+        </p:nvPicPr>
+        <p:blipFill>
+          <a:blip r:embed="rId3"/>
+          <a:stretch>
+            <a:fillRect/>
+          </a:stretch>
+        </p:blipFill>
+        <p:spPr>
+          <a:xfrm>
+            <a:off x="8318499" y="2944368"/>
+            <a:ext cx="2519680" cy="1417320"/>
+          </a:xfrm>
+          <a:prstGeom prst="rect">
+            <a:avLst/>
+          </a:prstGeom>
+        </p:spPr>
+      </p:pic>
+      <p:sp>
+        <p:nvSpPr>
+          <p:cNvPr id="9" name="Rounded Rectangle 8"/>
           <p:cNvSpPr/>
           <p:nvPr/>
         </p:nvSpPr>
         <p:spPr>
           <a:xfrm>
-            <a:off x="7452360" y="3794760"/>
+            <a:off x="7452360" y="4617720"/>
             <a:ext cx="4251960" cy="2148840"/>
           </a:xfrm>
           <a:prstGeom prst="roundRect">
@@ -10724,13 +10772,13 @@
       </p:sp>
       <p:sp>
         <p:nvSpPr>
-          <p:cNvPr id="9" name="TextBox 8"/>
+          <p:cNvPr id="10" name="TextBox 9"/>
           <p:cNvSpPr txBox="1"/>
           <p:nvPr/>
         </p:nvSpPr>
         <p:spPr>
           <a:xfrm>
-            <a:off x="7662672" y="3950208"/>
+            <a:off x="7662672" y="4773168"/>
             <a:ext cx="3840480" cy="1874519"/>
           </a:xfrm>
           <a:prstGeom prst="rect">
@@ -10801,7 +10849,7 @@
       </p:sp>
       <p:sp>
         <p:nvSpPr>
-          <p:cNvPr id="10" name="TextBox 9"/>
+          <p:cNvPr id="11" name="TextBox 10"/>
           <p:cNvSpPr txBox="1"/>
           <p:nvPr/>
         </p:nvSpPr>
@@ -16250,7 +16298,7 @@
         <p:spPr>
           <a:xfrm>
             <a:off x="7360920" y="1554480"/>
-            <a:ext cx="4343400" cy="2377440"/>
+            <a:ext cx="4343400" cy="1536192"/>
           </a:xfrm>
           <a:prstGeom prst="roundRect">
             <a:avLst>
@@ -16297,8 +16345,8 @@
         </p:nvSpPr>
         <p:spPr>
           <a:xfrm>
-            <a:off x="7635240" y="1783080"/>
-            <a:ext cx="3840480" cy="1920240"/>
+            <a:off x="7635240" y="1682496"/>
+            <a:ext cx="3840480" cy="1325880"/>
           </a:xfrm>
           <a:prstGeom prst="rect">
             <a:avLst/>
@@ -16383,7 +16431,7 @@
         </p:nvSpPr>
         <p:spPr>
           <a:xfrm>
-            <a:off x="7360920" y="4114800"/>
+            <a:off x="7360920" y="3145536"/>
             <a:ext cx="4343400" cy="320040"/>
           </a:xfrm>
           <a:prstGeom prst="rect">
@@ -16417,6 +16465,78 @@
       <p:sp>
         <p:nvSpPr>
           <p:cNvPr id="7" name="Rounded Rectangle 6"/>
+          <p:cNvSpPr/>
+          <p:nvPr/>
+        </p:nvSpPr>
+        <p:spPr>
+          <a:xfrm>
+            <a:off x="7360920" y="3493008"/>
+            <a:ext cx="4343400" cy="2212848"/>
+          </a:xfrm>
+          <a:prstGeom prst="roundRect">
+            <a:avLst>
+              <a:gd name="adj" fmla="val 13774"/>
+            </a:avLst>
+          </a:prstGeom>
+          <a:solidFill>
+            <a:srgbClr val="FFFFFF"/>
+          </a:solidFill>
+          <a:ln w="16510">
+            <a:solidFill>
+              <a:srgbClr val="1C7293"/>
+            </a:solidFill>
+          </a:ln>
+          <a:effectLst/>
+        </p:spPr>
+        <p:style>
+          <a:lnRef idx="1">
+            <a:schemeClr val="accent1"/>
+          </a:lnRef>
+          <a:fillRef idx="3">
+            <a:schemeClr val="accent1"/>
+          </a:fillRef>
+          <a:effectRef idx="2">
+            <a:schemeClr val="accent1"/>
+          </a:effectRef>
+          <a:fontRef idx="minor">
+            <a:schemeClr val="lt1"/>
+          </a:fontRef>
+        </p:style>
+        <p:txBody>
+          <a:bodyPr rtlCol="0" anchor="ctr"/>
+          <a:lstStyle/>
+          <a:p>
+            <a:pPr algn="ctr"/>
+          </a:p>
+        </p:txBody>
+      </p:sp>
+      <p:pic>
+        <p:nvPicPr>
+          <p:cNvPr id="8" name="Picture 7" descr="spiderman-similarity.jpg"/>
+          <p:cNvPicPr>
+            <a:picLocks noChangeAspect="1"/>
+          </p:cNvPicPr>
+          <p:nvPr/>
+        </p:nvPicPr>
+        <p:blipFill>
+          <a:blip r:embed="rId2"/>
+          <a:stretch>
+            <a:fillRect/>
+          </a:stretch>
+        </p:blipFill>
+        <p:spPr>
+          <a:xfrm>
+            <a:off x="8169984" y="3557016"/>
+            <a:ext cx="2725270" cy="2084832"/>
+          </a:xfrm>
+          <a:prstGeom prst="rect">
+            <a:avLst/>
+          </a:prstGeom>
+        </p:spPr>
+      </p:pic>
+      <p:sp>
+        <p:nvSpPr>
+          <p:cNvPr id="9" name="Rounded Rectangle 8"/>
           <p:cNvSpPr/>
           <p:nvPr/>
         </p:nvSpPr>
@@ -16464,7 +16584,7 @@
       </p:sp>
       <p:sp>
         <p:nvSpPr>
-          <p:cNvPr id="8" name="TextBox 7"/>
+          <p:cNvPr id="10" name="TextBox 9"/>
           <p:cNvSpPr txBox="1"/>
           <p:nvPr/>
         </p:nvSpPr>
@@ -16503,7 +16623,7 @@
       </p:sp>
       <p:sp>
         <p:nvSpPr>
-          <p:cNvPr id="9" name="TextBox 8"/>
+          <p:cNvPr id="11" name="TextBox 10"/>
           <p:cNvSpPr txBox="1"/>
           <p:nvPr/>
         </p:nvSpPr>
@@ -25807,7 +25927,7 @@
         <p:spPr>
           <a:xfrm>
             <a:off x="777240" y="4114800"/>
-            <a:ext cx="4206240" cy="292608"/>
+            <a:ext cx="2834640" cy="292608"/>
           </a:xfrm>
           <a:prstGeom prst="rect">
             <a:avLst/>
@@ -25850,8 +25970,8 @@
         </p:nvSpPr>
         <p:spPr>
           <a:xfrm>
-            <a:off x="5074920" y="4114800"/>
-            <a:ext cx="1188720" cy="292608"/>
+            <a:off x="3703320" y="4114800"/>
+            <a:ext cx="1005840" cy="292608"/>
           </a:xfrm>
           <a:prstGeom prst="rect">
             <a:avLst/>
@@ -25890,7 +26010,7 @@
         <p:spPr>
           <a:xfrm>
             <a:off x="896112" y="4133087"/>
-            <a:ext cx="3291840" cy="256032"/>
+            <a:ext cx="2651760" cy="256032"/>
           </a:xfrm>
           <a:prstGeom prst="rect">
             <a:avLst/>
@@ -25929,7 +26049,7 @@
         <p:spPr>
           <a:xfrm>
             <a:off x="777240" y="4498848"/>
-            <a:ext cx="749808" cy="292608"/>
+            <a:ext cx="502920" cy="292608"/>
           </a:xfrm>
           <a:prstGeom prst="rect">
             <a:avLst/>
@@ -25972,8 +26092,8 @@
         </p:nvSpPr>
         <p:spPr>
           <a:xfrm>
-            <a:off x="1645920" y="4498848"/>
-            <a:ext cx="4480560" cy="292608"/>
+            <a:off x="1371600" y="4498848"/>
+            <a:ext cx="3291840" cy="292608"/>
           </a:xfrm>
           <a:prstGeom prst="rect">
             <a:avLst/>
@@ -26012,9 +26132,33 @@
           </a:p>
         </p:txBody>
       </p:sp>
-      <p:sp>
-        <p:nvSpPr>
-          <p:cNvPr id="17" name="Rounded Rectangle 16"/>
+      <p:pic>
+        <p:nvPicPr>
+          <p:cNvPr id="17" name="Picture 16" descr="stonks-template.png"/>
+          <p:cNvPicPr>
+            <a:picLocks noChangeAspect="1"/>
+          </p:cNvPicPr>
+          <p:nvPr/>
+        </p:nvPicPr>
+        <p:blipFill>
+          <a:blip r:embed="rId2"/>
+          <a:stretch>
+            <a:fillRect/>
+          </a:stretch>
+        </p:blipFill>
+        <p:spPr>
+          <a:xfrm>
+            <a:off x="4709160" y="3983126"/>
+            <a:ext cx="1508760" cy="1132027"/>
+          </a:xfrm>
+          <a:prstGeom prst="rect">
+            <a:avLst/>
+          </a:prstGeom>
+        </p:spPr>
+      </p:pic>
+      <p:sp>
+        <p:nvSpPr>
+          <p:cNvPr id="18" name="Rounded Rectangle 17"/>
           <p:cNvSpPr/>
           <p:nvPr/>
         </p:nvSpPr>
@@ -26062,7 +26206,7 @@
       </p:sp>
       <p:sp>
         <p:nvSpPr>
-          <p:cNvPr id="18" name="TextBox 17"/>
+          <p:cNvPr id="19" name="TextBox 18"/>
           <p:cNvSpPr txBox="1"/>
           <p:nvPr/>
         </p:nvSpPr>
@@ -26110,7 +26254,7 @@
       </p:sp>
       <p:sp>
         <p:nvSpPr>
-          <p:cNvPr id="19" name="Rounded Rectangle 18"/>
+          <p:cNvPr id="20" name="Rounded Rectangle 19"/>
           <p:cNvSpPr/>
           <p:nvPr/>
         </p:nvSpPr>
@@ -26158,7 +26302,7 @@
       </p:sp>
       <p:sp>
         <p:nvSpPr>
-          <p:cNvPr id="20" name="TextBox 19"/>
+          <p:cNvPr id="21" name="TextBox 20"/>
           <p:cNvSpPr txBox="1"/>
           <p:nvPr/>
         </p:nvSpPr>
@@ -26197,7 +26341,7 @@
       </p:sp>
       <p:sp>
         <p:nvSpPr>
-          <p:cNvPr id="21" name="TextBox 20"/>
+          <p:cNvPr id="22" name="TextBox 21"/>
           <p:cNvSpPr txBox="1"/>
           <p:nvPr/>
         </p:nvSpPr>
@@ -26236,7 +26380,7 @@
       </p:sp>
       <p:sp>
         <p:nvSpPr>
-          <p:cNvPr id="22" name="Rounded Rectangle 21"/>
+          <p:cNvPr id="23" name="Rounded Rectangle 22"/>
           <p:cNvSpPr/>
           <p:nvPr/>
         </p:nvSpPr>
@@ -26284,7 +26428,7 @@
       </p:sp>
       <p:sp>
         <p:nvSpPr>
-          <p:cNvPr id="23" name="TextBox 22"/>
+          <p:cNvPr id="24" name="TextBox 23"/>
           <p:cNvSpPr txBox="1"/>
           <p:nvPr/>
         </p:nvSpPr>
@@ -26323,7 +26467,7 @@
       </p:sp>
       <p:sp>
         <p:nvSpPr>
-          <p:cNvPr id="24" name="TextBox 23"/>
+          <p:cNvPr id="25" name="TextBox 24"/>
           <p:cNvSpPr txBox="1"/>
           <p:nvPr/>
         </p:nvSpPr>
@@ -26362,7 +26506,7 @@
       </p:sp>
       <p:sp>
         <p:nvSpPr>
-          <p:cNvPr id="25" name="Rounded Rectangle 24"/>
+          <p:cNvPr id="26" name="Rounded Rectangle 25"/>
           <p:cNvSpPr/>
           <p:nvPr/>
         </p:nvSpPr>
@@ -26410,7 +26554,7 @@
       </p:sp>
       <p:sp>
         <p:nvSpPr>
-          <p:cNvPr id="26" name="TextBox 25"/>
+          <p:cNvPr id="27" name="TextBox 26"/>
           <p:cNvSpPr txBox="1"/>
           <p:nvPr/>
         </p:nvSpPr>
@@ -26449,7 +26593,7 @@
       </p:sp>
       <p:sp>
         <p:nvSpPr>
-          <p:cNvPr id="27" name="TextBox 26"/>
+          <p:cNvPr id="28" name="TextBox 27"/>
           <p:cNvSpPr txBox="1"/>
           <p:nvPr/>
         </p:nvSpPr>
@@ -26488,7 +26632,7 @@
       </p:sp>
       <p:sp>
         <p:nvSpPr>
-          <p:cNvPr id="28" name="Rounded Rectangle 27"/>
+          <p:cNvPr id="29" name="Rounded Rectangle 28"/>
           <p:cNvSpPr/>
           <p:nvPr/>
         </p:nvSpPr>
@@ -26536,7 +26680,7 @@
       </p:sp>
       <p:sp>
         <p:nvSpPr>
-          <p:cNvPr id="29" name="TextBox 28"/>
+          <p:cNvPr id="30" name="TextBox 29"/>
           <p:cNvSpPr txBox="1"/>
           <p:nvPr/>
         </p:nvSpPr>
@@ -26575,7 +26719,7 @@
       </p:sp>
       <p:sp>
         <p:nvSpPr>
-          <p:cNvPr id="30" name="TextBox 29"/>
+          <p:cNvPr id="31" name="TextBox 30"/>
           <p:cNvSpPr txBox="1"/>
           <p:nvPr/>
         </p:nvSpPr>
@@ -26614,7 +26758,7 @@
       </p:sp>
       <p:sp>
         <p:nvSpPr>
-          <p:cNvPr id="31" name="Rounded Rectangle 30"/>
+          <p:cNvPr id="32" name="Rounded Rectangle 31"/>
           <p:cNvSpPr/>
           <p:nvPr/>
         </p:nvSpPr>
@@ -26662,7 +26806,7 @@
       </p:sp>
       <p:sp>
         <p:nvSpPr>
-          <p:cNvPr id="32" name="TextBox 31"/>
+          <p:cNvPr id="33" name="TextBox 32"/>
           <p:cNvSpPr txBox="1"/>
           <p:nvPr/>
         </p:nvSpPr>
@@ -26701,7 +26845,7 @@
       </p:sp>
       <p:sp>
         <p:nvSpPr>
-          <p:cNvPr id="33" name="TextBox 32"/>
+          <p:cNvPr id="34" name="TextBox 33"/>
           <p:cNvSpPr txBox="1"/>
           <p:nvPr/>
         </p:nvSpPr>
@@ -26740,7 +26884,7 @@
       </p:sp>
       <p:sp>
         <p:nvSpPr>
-          <p:cNvPr id="34" name="TextBox 33"/>
+          <p:cNvPr id="35" name="TextBox 34"/>
           <p:cNvSpPr txBox="1"/>
           <p:nvPr/>
         </p:nvSpPr>
@@ -26779,7 +26923,7 @@
       </p:sp>
       <p:sp>
         <p:nvSpPr>
-          <p:cNvPr id="35" name="Rounded Rectangle 34"/>
+          <p:cNvPr id="36" name="Rounded Rectangle 35"/>
           <p:cNvSpPr/>
           <p:nvPr/>
         </p:nvSpPr>
@@ -26827,7 +26971,7 @@
       </p:sp>
       <p:sp>
         <p:nvSpPr>
-          <p:cNvPr id="36" name="TextBox 35"/>
+          <p:cNvPr id="37" name="TextBox 36"/>
           <p:cNvSpPr txBox="1"/>
           <p:nvPr/>
         </p:nvSpPr>
@@ -26866,7 +27010,7 @@
       </p:sp>
       <p:sp>
         <p:nvSpPr>
-          <p:cNvPr id="37" name="TextBox 36"/>
+          <p:cNvPr id="38" name="TextBox 37"/>
           <p:cNvSpPr txBox="1"/>
           <p:nvPr/>
         </p:nvSpPr>
@@ -29288,8 +29432,8 @@
         </p:nvSpPr>
         <p:spPr>
           <a:xfrm>
-            <a:off x="6720840" y="1572768"/>
-            <a:ext cx="4709160" cy="1463040"/>
+            <a:off x="6675120" y="1481328"/>
+            <a:ext cx="2487168" cy="1600200"/>
           </a:xfrm>
           <a:prstGeom prst="rect">
             <a:avLst/>
@@ -29304,11 +29448,11 @@
           <a:p>
             <a:pPr algn="l">
               <a:lnSpc>
-                <a:spcPct val="120000"/>
+                <a:spcPct val="118000"/>
               </a:lnSpc>
             </a:pPr>
             <a:r>
-              <a:rPr sz="1250" b="0" i="0">
+              <a:rPr sz="1200" b="0" i="0">
                 <a:solidFill>
                   <a:srgbClr val="21295C"/>
                 </a:solidFill>
@@ -29317,7 +29461,7 @@
               <a:t>U-кривая 2023 распрямилась: </a:t>
             </a:r>
             <a:r>
-              <a:rPr sz="1250" b="1" i="0">
+              <a:rPr sz="1200" b="1" i="0">
                 <a:solidFill>
                   <a:srgbClr val="21295C"/>
                 </a:solidFill>
@@ -29326,7 +29470,7 @@
               <a:t>single-needle — до 99% на полном окне 1 млн</a:t>
             </a:r>
             <a:r>
-              <a:rPr sz="1250" b="0" i="0">
+              <a:rPr sz="1200" b="0" i="0">
                 <a:solidFill>
                   <a:srgbClr val="21295C"/>
                 </a:solidFill>
@@ -29340,6 +29484,78 @@
       <p:sp>
         <p:nvSpPr>
           <p:cNvPr id="7" name="Rounded Rectangle 6"/>
+          <p:cNvSpPr/>
+          <p:nvPr/>
+        </p:nvSpPr>
+        <p:spPr>
+          <a:xfrm>
+            <a:off x="9217152" y="1389888"/>
+            <a:ext cx="2450592" cy="1700784"/>
+          </a:xfrm>
+          <a:prstGeom prst="roundRect">
+            <a:avLst>
+              <a:gd name="adj" fmla="val 17921"/>
+            </a:avLst>
+          </a:prstGeom>
+          <a:solidFill>
+            <a:srgbClr val="FFFFFF"/>
+          </a:solidFill>
+          <a:ln w="15240">
+            <a:solidFill>
+              <a:srgbClr val="1C7293"/>
+            </a:solidFill>
+          </a:ln>
+          <a:effectLst/>
+        </p:spPr>
+        <p:style>
+          <a:lnRef idx="1">
+            <a:schemeClr val="accent1"/>
+          </a:lnRef>
+          <a:fillRef idx="3">
+            <a:schemeClr val="accent1"/>
+          </a:fillRef>
+          <a:effectRef idx="2">
+            <a:schemeClr val="accent1"/>
+          </a:effectRef>
+          <a:fontRef idx="minor">
+            <a:schemeClr val="lt1"/>
+          </a:fontRef>
+        </p:style>
+        <p:txBody>
+          <a:bodyPr rtlCol="0" anchor="ctr"/>
+          <a:lstStyle/>
+          <a:p>
+            <a:pPr algn="ctr"/>
+          </a:p>
+        </p:txBody>
+      </p:sp>
+      <p:pic>
+        <p:nvPicPr>
+          <p:cNvPr id="8" name="Picture 7" descr="needle-haystack-crop.jpg"/>
+          <p:cNvPicPr>
+            <a:picLocks noChangeAspect="1"/>
+          </p:cNvPicPr>
+          <p:nvPr/>
+        </p:nvPicPr>
+        <p:blipFill>
+          <a:blip r:embed="rId3"/>
+          <a:stretch>
+            <a:fillRect/>
+          </a:stretch>
+        </p:blipFill>
+        <p:spPr>
+          <a:xfrm>
+            <a:off x="9314641" y="1444752"/>
+            <a:ext cx="2255612" cy="1591055"/>
+          </a:xfrm>
+          <a:prstGeom prst="rect">
+            <a:avLst/>
+          </a:prstGeom>
+        </p:spPr>
+      </p:pic>
+      <p:sp>
+        <p:nvSpPr>
+          <p:cNvPr id="9" name="Rounded Rectangle 8"/>
           <p:cNvSpPr/>
           <p:nvPr/>
         </p:nvSpPr>
@@ -29387,7 +29603,7 @@
       </p:sp>
       <p:sp>
         <p:nvSpPr>
-          <p:cNvPr id="8" name="TextBox 7"/>
+          <p:cNvPr id="10" name="TextBox 9"/>
           <p:cNvSpPr txBox="1"/>
           <p:nvPr/>
         </p:nvSpPr>
@@ -29435,14 +29651,14 @@
       </p:sp>
       <p:pic>
         <p:nvPicPr>
-          <p:cNvPr id="9" name="Picture 8" descr="s25-nolima.png"/>
+          <p:cNvPr id="11" name="Picture 10" descr="s25-nolima.png"/>
           <p:cNvPicPr>
             <a:picLocks noChangeAspect="1"/>
           </p:cNvPicPr>
           <p:nvPr/>
         </p:nvPicPr>
         <p:blipFill>
-          <a:blip r:embed="rId3"/>
+          <a:blip r:embed="rId4"/>
           <a:stretch>
             <a:fillRect/>
           </a:stretch>
@@ -29459,7 +29675,7 @@
       </p:pic>
       <p:sp>
         <p:nvSpPr>
-          <p:cNvPr id="10" name="TextBox 9"/>
+          <p:cNvPr id="12" name="TextBox 11"/>
           <p:cNvSpPr txBox="1"/>
           <p:nvPr/>
         </p:nvSpPr>
@@ -29535,7 +29751,7 @@
       </p:sp>
       <p:sp>
         <p:nvSpPr>
-          <p:cNvPr id="11" name="Rounded Rectangle 10"/>
+          <p:cNvPr id="13" name="Rounded Rectangle 12"/>
           <p:cNvSpPr/>
           <p:nvPr/>
         </p:nvSpPr>
@@ -29583,7 +29799,7 @@
       </p:sp>
       <p:sp>
         <p:nvSpPr>
-          <p:cNvPr id="12" name="TextBox 11"/>
+          <p:cNvPr id="14" name="TextBox 13"/>
           <p:cNvSpPr txBox="1"/>
           <p:nvPr/>
         </p:nvSpPr>
@@ -29622,7 +29838,7 @@
       </p:sp>
       <p:sp>
         <p:nvSpPr>
-          <p:cNvPr id="13" name="TextBox 12"/>
+          <p:cNvPr id="15" name="TextBox 14"/>
           <p:cNvSpPr txBox="1"/>
           <p:nvPr/>
         </p:nvSpPr>
@@ -37721,8 +37937,8 @@
         </p:nvSpPr>
         <p:spPr>
           <a:xfrm>
-            <a:off x="2423160" y="5532120"/>
-            <a:ext cx="7315200" cy="594360"/>
+            <a:off x="502920" y="5623560"/>
+            <a:ext cx="7863840" cy="594360"/>
           </a:xfrm>
           <a:prstGeom prst="roundRect">
             <a:avLst>
@@ -37769,8 +37985,8 @@
         </p:nvSpPr>
         <p:spPr>
           <a:xfrm>
-            <a:off x="2606040" y="5532120"/>
-            <a:ext cx="6949440" cy="594360"/>
+            <a:off x="685800" y="5623560"/>
+            <a:ext cx="7498079" cy="594360"/>
           </a:xfrm>
           <a:prstGeom prst="rect">
             <a:avLst/>
@@ -37809,9 +38025,33 @@
           </a:p>
         </p:txBody>
       </p:sp>
-      <p:sp>
-        <p:nvSpPr>
-          <p:cNvPr id="27" name="TextBox 26"/>
+      <p:pic>
+        <p:nvPicPr>
+          <p:cNvPr id="27" name="Picture 26" descr="gandalf-token.jpg"/>
+          <p:cNvPicPr>
+            <a:picLocks noChangeAspect="1"/>
+          </p:cNvPicPr>
+          <p:nvPr/>
+        </p:nvPicPr>
+        <p:blipFill>
+          <a:blip r:embed="rId2"/>
+          <a:stretch>
+            <a:fillRect/>
+          </a:stretch>
+        </p:blipFill>
+        <p:spPr>
+          <a:xfrm>
+            <a:off x="8747655" y="5413248"/>
+            <a:ext cx="2621488" cy="1280160"/>
+          </a:xfrm>
+          <a:prstGeom prst="rect">
+            <a:avLst/>
+          </a:prstGeom>
+        </p:spPr>
+      </p:pic>
+      <p:sp>
+        <p:nvSpPr>
+          <p:cNvPr id="28" name="TextBox 27"/>
           <p:cNvSpPr txBox="1"/>
           <p:nvPr/>
         </p:nvSpPr>
@@ -39864,9 +40104,33 @@
           </a:p>
         </p:txBody>
       </p:sp>
-      <p:sp>
-        <p:nvSpPr>
-          <p:cNvPr id="13" name="TextBox 12"/>
+      <p:pic>
+        <p:nvPicPr>
+          <p:cNvPr id="13" name="Picture 12" descr="joker-burning-money.jpg"/>
+          <p:cNvPicPr>
+            <a:picLocks noChangeAspect="1"/>
+          </p:cNvPicPr>
+          <p:nvPr/>
+        </p:nvPicPr>
+        <p:blipFill>
+          <a:blip r:embed="rId2"/>
+          <a:stretch>
+            <a:fillRect/>
+          </a:stretch>
+        </p:blipFill>
+        <p:spPr>
+          <a:xfrm>
+            <a:off x="9705456" y="1298448"/>
+            <a:ext cx="1748302" cy="978408"/>
+          </a:xfrm>
+          <a:prstGeom prst="rect">
+            <a:avLst/>
+          </a:prstGeom>
+        </p:spPr>
+      </p:pic>
+      <p:sp>
+        <p:nvSpPr>
+          <p:cNvPr id="14" name="TextBox 13"/>
           <p:cNvSpPr txBox="1"/>
           <p:nvPr/>
         </p:nvSpPr>
@@ -39905,7 +40169,7 @@
       </p:sp>
       <p:sp>
         <p:nvSpPr>
-          <p:cNvPr id="14" name="Rounded Rectangle 13"/>
+          <p:cNvPr id="15" name="Rounded Rectangle 14"/>
           <p:cNvSpPr/>
           <p:nvPr/>
         </p:nvSpPr>
@@ -39953,7 +40217,7 @@
       </p:sp>
       <p:sp>
         <p:nvSpPr>
-          <p:cNvPr id="15" name="TextBox 14"/>
+          <p:cNvPr id="16" name="TextBox 15"/>
           <p:cNvSpPr txBox="1"/>
           <p:nvPr/>
         </p:nvSpPr>
@@ -39992,7 +40256,7 @@
       </p:sp>
       <p:sp>
         <p:nvSpPr>
-          <p:cNvPr id="16" name="Rounded Rectangle 15"/>
+          <p:cNvPr id="17" name="Rounded Rectangle 16"/>
           <p:cNvSpPr/>
           <p:nvPr/>
         </p:nvSpPr>
@@ -40038,7 +40302,7 @@
       </p:sp>
       <p:sp>
         <p:nvSpPr>
-          <p:cNvPr id="17" name="TextBox 16"/>
+          <p:cNvPr id="18" name="TextBox 17"/>
           <p:cNvSpPr txBox="1"/>
           <p:nvPr/>
         </p:nvSpPr>
@@ -40077,7 +40341,7 @@
       </p:sp>
       <p:sp>
         <p:nvSpPr>
-          <p:cNvPr id="18" name="TextBox 17"/>
+          <p:cNvPr id="19" name="TextBox 18"/>
           <p:cNvSpPr txBox="1"/>
           <p:nvPr/>
         </p:nvSpPr>
@@ -40116,7 +40380,7 @@
       </p:sp>
       <p:sp>
         <p:nvSpPr>
-          <p:cNvPr id="19" name="Rounded Rectangle 18"/>
+          <p:cNvPr id="20" name="Rounded Rectangle 19"/>
           <p:cNvSpPr/>
           <p:nvPr/>
         </p:nvSpPr>
@@ -40162,7 +40426,7 @@
       </p:sp>
       <p:sp>
         <p:nvSpPr>
-          <p:cNvPr id="20" name="TextBox 19"/>
+          <p:cNvPr id="21" name="TextBox 20"/>
           <p:cNvSpPr txBox="1"/>
           <p:nvPr/>
         </p:nvSpPr>
@@ -40201,7 +40465,7 @@
       </p:sp>
       <p:sp>
         <p:nvSpPr>
-          <p:cNvPr id="21" name="TextBox 20"/>
+          <p:cNvPr id="22" name="TextBox 21"/>
           <p:cNvSpPr txBox="1"/>
           <p:nvPr/>
         </p:nvSpPr>
@@ -40240,7 +40504,7 @@
       </p:sp>
       <p:sp>
         <p:nvSpPr>
-          <p:cNvPr id="22" name="Rounded Rectangle 21"/>
+          <p:cNvPr id="23" name="Rounded Rectangle 22"/>
           <p:cNvSpPr/>
           <p:nvPr/>
         </p:nvSpPr>
@@ -40286,7 +40550,7 @@
       </p:sp>
       <p:sp>
         <p:nvSpPr>
-          <p:cNvPr id="23" name="TextBox 22"/>
+          <p:cNvPr id="24" name="TextBox 23"/>
           <p:cNvSpPr txBox="1"/>
           <p:nvPr/>
         </p:nvSpPr>
@@ -40325,7 +40589,7 @@
       </p:sp>
       <p:sp>
         <p:nvSpPr>
-          <p:cNvPr id="24" name="TextBox 23"/>
+          <p:cNvPr id="25" name="TextBox 24"/>
           <p:cNvSpPr txBox="1"/>
           <p:nvPr/>
         </p:nvSpPr>
@@ -40373,7 +40637,7 @@
       </p:sp>
       <p:sp>
         <p:nvSpPr>
-          <p:cNvPr id="25" name="Rounded Rectangle 24"/>
+          <p:cNvPr id="26" name="Rounded Rectangle 25"/>
           <p:cNvSpPr/>
           <p:nvPr/>
         </p:nvSpPr>
@@ -40421,7 +40685,7 @@
       </p:sp>
       <p:sp>
         <p:nvSpPr>
-          <p:cNvPr id="26" name="TextBox 25"/>
+          <p:cNvPr id="27" name="TextBox 26"/>
           <p:cNvSpPr txBox="1"/>
           <p:nvPr/>
         </p:nvSpPr>
@@ -40469,7 +40733,7 @@
       </p:sp>
       <p:sp>
         <p:nvSpPr>
-          <p:cNvPr id="27" name="Rounded Rectangle 26"/>
+          <p:cNvPr id="28" name="Rounded Rectangle 27"/>
           <p:cNvSpPr/>
           <p:nvPr/>
         </p:nvSpPr>
@@ -40517,7 +40781,7 @@
       </p:sp>
       <p:sp>
         <p:nvSpPr>
-          <p:cNvPr id="28" name="TextBox 27"/>
+          <p:cNvPr id="29" name="TextBox 28"/>
           <p:cNvSpPr txBox="1"/>
           <p:nvPr/>
         </p:nvSpPr>
@@ -40565,7 +40829,7 @@
       </p:sp>
       <p:sp>
         <p:nvSpPr>
-          <p:cNvPr id="29" name="Rounded Rectangle 28"/>
+          <p:cNvPr id="30" name="Rounded Rectangle 29"/>
           <p:cNvSpPr/>
           <p:nvPr/>
         </p:nvSpPr>
@@ -40613,7 +40877,7 @@
       </p:sp>
       <p:sp>
         <p:nvSpPr>
-          <p:cNvPr id="30" name="TextBox 29"/>
+          <p:cNvPr id="31" name="TextBox 30"/>
           <p:cNvSpPr txBox="1"/>
           <p:nvPr/>
         </p:nvSpPr>
@@ -40652,7 +40916,7 @@
       </p:sp>
       <p:sp>
         <p:nvSpPr>
-          <p:cNvPr id="31" name="TextBox 30"/>
+          <p:cNvPr id="32" name="TextBox 31"/>
           <p:cNvSpPr txBox="1"/>
           <p:nvPr/>
         </p:nvSpPr>
@@ -45881,7 +46145,7 @@
         <p:spPr>
           <a:xfrm>
             <a:off x="1325880" y="3282696"/>
-            <a:ext cx="10058400" cy="777240"/>
+            <a:ext cx="7406640" cy="777240"/>
           </a:xfrm>
           <a:prstGeom prst="rect">
             <a:avLst/>
@@ -45929,9 +46193,33 @@
           </a:p>
         </p:txBody>
       </p:sp>
-      <p:sp>
-        <p:nvSpPr>
-          <p:cNvPr id="13" name="Rounded Rectangle 12"/>
+      <p:pic>
+        <p:nvPicPr>
+          <p:cNvPr id="13" name="Picture 12" descr="pressx-template.jpg"/>
+          <p:cNvPicPr>
+            <a:picLocks noChangeAspect="1"/>
+          </p:cNvPicPr>
+          <p:nvPr/>
+        </p:nvPicPr>
+        <p:blipFill>
+          <a:blip r:embed="rId2"/>
+          <a:stretch>
+            <a:fillRect/>
+          </a:stretch>
+        </p:blipFill>
+        <p:spPr>
+          <a:xfrm>
+            <a:off x="9315196" y="2871216"/>
+            <a:ext cx="2080768" cy="1170432"/>
+          </a:xfrm>
+          <a:prstGeom prst="rect">
+            <a:avLst/>
+          </a:prstGeom>
+        </p:spPr>
+      </p:pic>
+      <p:sp>
+        <p:nvSpPr>
+          <p:cNvPr id="14" name="Rounded Rectangle 13"/>
           <p:cNvSpPr/>
           <p:nvPr/>
         </p:nvSpPr>
@@ -45979,7 +46267,7 @@
       </p:sp>
       <p:sp>
         <p:nvSpPr>
-          <p:cNvPr id="14" name="TextBox 13"/>
+          <p:cNvPr id="15" name="TextBox 14"/>
           <p:cNvSpPr txBox="1"/>
           <p:nvPr/>
         </p:nvSpPr>
@@ -46018,7 +46306,7 @@
       </p:sp>
       <p:sp>
         <p:nvSpPr>
-          <p:cNvPr id="15" name="TextBox 14"/>
+          <p:cNvPr id="16" name="TextBox 15"/>
           <p:cNvSpPr txBox="1"/>
           <p:nvPr/>
         </p:nvSpPr>
@@ -46057,7 +46345,7 @@
       </p:sp>
       <p:sp>
         <p:nvSpPr>
-          <p:cNvPr id="16" name="TextBox 15"/>
+          <p:cNvPr id="17" name="TextBox 16"/>
           <p:cNvSpPr txBox="1"/>
           <p:nvPr/>
         </p:nvSpPr>
@@ -46132,7 +46420,7 @@
       </p:sp>
       <p:sp>
         <p:nvSpPr>
-          <p:cNvPr id="17" name="Rounded Rectangle 16"/>
+          <p:cNvPr id="18" name="Rounded Rectangle 17"/>
           <p:cNvSpPr/>
           <p:nvPr/>
         </p:nvSpPr>
@@ -46180,7 +46468,7 @@
       </p:sp>
       <p:sp>
         <p:nvSpPr>
-          <p:cNvPr id="18" name="TextBox 17"/>
+          <p:cNvPr id="19" name="TextBox 18"/>
           <p:cNvSpPr txBox="1"/>
           <p:nvPr/>
         </p:nvSpPr>
@@ -46219,7 +46507,7 @@
       </p:sp>
       <p:sp>
         <p:nvSpPr>
-          <p:cNvPr id="19" name="TextBox 18"/>
+          <p:cNvPr id="20" name="TextBox 19"/>
           <p:cNvSpPr txBox="1"/>
           <p:nvPr/>
         </p:nvSpPr>
@@ -50694,7 +50982,7 @@
         </p:nvSpPr>
         <p:spPr>
           <a:xfrm>
-            <a:off x="9418320" y="2057400"/>
+            <a:off x="9418320" y="1691640"/>
             <a:ext cx="2057400" cy="731520"/>
           </a:xfrm>
           <a:prstGeom prst="roundRect">
@@ -50740,7 +51028,7 @@
         </p:nvSpPr>
         <p:spPr>
           <a:xfrm>
-            <a:off x="9528048" y="2103120"/>
+            <a:off x="9528048" y="1737360"/>
             <a:ext cx="1828800" cy="640080"/>
           </a:xfrm>
           <a:prstGeom prst="rect">
@@ -50780,7 +51068,7 @@
         </p:nvSpPr>
         <p:spPr>
           <a:xfrm>
-            <a:off x="7909560" y="2926080"/>
+            <a:off x="7909560" y="2560320"/>
             <a:ext cx="3566160" cy="822960"/>
           </a:xfrm>
           <a:prstGeom prst="roundRect">
@@ -50826,7 +51114,7 @@
         </p:nvSpPr>
         <p:spPr>
           <a:xfrm>
-            <a:off x="8046720" y="2971800"/>
+            <a:off x="8046720" y="2606040"/>
             <a:ext cx="3291840" cy="731520"/>
           </a:xfrm>
           <a:prstGeom prst="rect">
@@ -50866,8 +51154,8 @@
         </p:nvSpPr>
         <p:spPr>
           <a:xfrm>
-            <a:off x="7909560" y="4160520"/>
-            <a:ext cx="3566160" cy="1554480"/>
+            <a:off x="7909560" y="3566160"/>
+            <a:ext cx="3566160" cy="1097280"/>
           </a:xfrm>
           <a:prstGeom prst="rect">
             <a:avLst/>
@@ -50962,9 +51250,33 @@
           </a:p>
         </p:txBody>
       </p:sp>
-      <p:sp>
-        <p:nvSpPr>
-          <p:cNvPr id="21" name="TextBox 20"/>
+      <p:pic>
+        <p:nvPicPr>
+          <p:cNvPr id="21" name="Picture 20" descr="twobuttons-llm-vs-code-toponly.jpg"/>
+          <p:cNvPicPr>
+            <a:picLocks noChangeAspect="1"/>
+          </p:cNvPicPr>
+          <p:nvPr/>
+        </p:nvPicPr>
+        <p:blipFill>
+          <a:blip r:embed="rId2"/>
+          <a:stretch>
+            <a:fillRect/>
+          </a:stretch>
+        </p:blipFill>
+        <p:spPr>
+          <a:xfrm>
+            <a:off x="8650224" y="4645152"/>
+            <a:ext cx="2084832" cy="1389888"/>
+          </a:xfrm>
+          <a:prstGeom prst="rect">
+            <a:avLst/>
+          </a:prstGeom>
+        </p:spPr>
+      </p:pic>
+      <p:sp>
+        <p:nvSpPr>
+          <p:cNvPr id="22" name="TextBox 21"/>
           <p:cNvSpPr txBox="1"/>
           <p:nvPr/>
         </p:nvSpPr>
@@ -51908,8 +52220,8 @@
         </p:nvSpPr>
         <p:spPr>
           <a:xfrm>
-            <a:off x="502920" y="4892040"/>
-            <a:ext cx="11201400" cy="868680"/>
+            <a:off x="502920" y="5029200"/>
+            <a:ext cx="6903720" cy="1234440"/>
           </a:xfrm>
           <a:prstGeom prst="roundRect">
             <a:avLst>
@@ -51956,8 +52268,8 @@
         </p:nvSpPr>
         <p:spPr>
           <a:xfrm>
-            <a:off x="685800" y="4946903"/>
-            <a:ext cx="10835640" cy="758952"/>
+            <a:off x="685800" y="5084064"/>
+            <a:ext cx="6537959" cy="1124712"/>
           </a:xfrm>
           <a:prstGeom prst="rect">
             <a:avLst/>
@@ -51987,9 +52299,33 @@
           </a:p>
         </p:txBody>
       </p:sp>
-      <p:sp>
-        <p:nvSpPr>
-          <p:cNvPr id="23" name="TextBox 22"/>
+      <p:pic>
+        <p:nvPicPr>
+          <p:cNvPr id="23" name="Picture 22" descr="xkcd-552-correlation-2x.png"/>
+          <p:cNvPicPr>
+            <a:picLocks noChangeAspect="1"/>
+          </p:cNvPicPr>
+          <p:nvPr/>
+        </p:nvPicPr>
+        <p:blipFill>
+          <a:blip r:embed="rId2"/>
+          <a:stretch>
+            <a:fillRect/>
+          </a:stretch>
+        </p:blipFill>
+        <p:spPr>
+          <a:xfrm>
+            <a:off x="7543800" y="4919472"/>
+            <a:ext cx="4114800" cy="1662953"/>
+          </a:xfrm>
+          <a:prstGeom prst="rect">
+            <a:avLst/>
+          </a:prstGeom>
+        </p:spPr>
+      </p:pic>
+      <p:sp>
+        <p:nvSpPr>
+          <p:cNvPr id="24" name="TextBox 23"/>
           <p:cNvSpPr txBox="1"/>
           <p:nvPr/>
         </p:nvSpPr>
